--- a/documents/hinh_ve_trong_cao_cao_do_an.pptx
+++ b/documents/hinh_ve_trong_cao_cao_do_an.pptx
@@ -6,10 +6,12 @@
   </p:sldMasterIdLst>
   <p:sldIdLst>
     <p:sldId id="257" r:id="rId2"/>
-    <p:sldId id="256" r:id="rId3"/>
-    <p:sldId id="258" r:id="rId4"/>
-    <p:sldId id="259" r:id="rId5"/>
-    <p:sldId id="260" r:id="rId6"/>
+    <p:sldId id="261" r:id="rId3"/>
+    <p:sldId id="262" r:id="rId4"/>
+    <p:sldId id="256" r:id="rId5"/>
+    <p:sldId id="258" r:id="rId6"/>
+    <p:sldId id="259" r:id="rId7"/>
+    <p:sldId id="260" r:id="rId8"/>
   </p:sldIdLst>
   <p:sldSz cx="12192000" cy="6858000"/>
   <p:notesSz cx="6858000" cy="9144000"/>
@@ -263,7 +265,7 @@
           <a:p>
             <a:fld id="{1274BF1E-CB95-4284-9B4D-720351FD5384}" type="datetimeFigureOut">
               <a:rPr lang="en-US" smtClean="0"/>
-              <a:t>5/24/2025</a:t>
+              <a:t>5/26/2025</a:t>
             </a:fld>
             <a:endParaRPr lang="en-US"/>
           </a:p>
@@ -461,7 +463,7 @@
           <a:p>
             <a:fld id="{1274BF1E-CB95-4284-9B4D-720351FD5384}" type="datetimeFigureOut">
               <a:rPr lang="en-US" smtClean="0"/>
-              <a:t>5/24/2025</a:t>
+              <a:t>5/26/2025</a:t>
             </a:fld>
             <a:endParaRPr lang="en-US"/>
           </a:p>
@@ -669,7 +671,7 @@
           <a:p>
             <a:fld id="{1274BF1E-CB95-4284-9B4D-720351FD5384}" type="datetimeFigureOut">
               <a:rPr lang="en-US" smtClean="0"/>
-              <a:t>5/24/2025</a:t>
+              <a:t>5/26/2025</a:t>
             </a:fld>
             <a:endParaRPr lang="en-US"/>
           </a:p>
@@ -867,7 +869,7 @@
           <a:p>
             <a:fld id="{1274BF1E-CB95-4284-9B4D-720351FD5384}" type="datetimeFigureOut">
               <a:rPr lang="en-US" smtClean="0"/>
-              <a:t>5/24/2025</a:t>
+              <a:t>5/26/2025</a:t>
             </a:fld>
             <a:endParaRPr lang="en-US"/>
           </a:p>
@@ -1142,7 +1144,7 @@
           <a:p>
             <a:fld id="{1274BF1E-CB95-4284-9B4D-720351FD5384}" type="datetimeFigureOut">
               <a:rPr lang="en-US" smtClean="0"/>
-              <a:t>5/24/2025</a:t>
+              <a:t>5/26/2025</a:t>
             </a:fld>
             <a:endParaRPr lang="en-US"/>
           </a:p>
@@ -1407,7 +1409,7 @@
           <a:p>
             <a:fld id="{1274BF1E-CB95-4284-9B4D-720351FD5384}" type="datetimeFigureOut">
               <a:rPr lang="en-US" smtClean="0"/>
-              <a:t>5/24/2025</a:t>
+              <a:t>5/26/2025</a:t>
             </a:fld>
             <a:endParaRPr lang="en-US"/>
           </a:p>
@@ -1819,7 +1821,7 @@
           <a:p>
             <a:fld id="{1274BF1E-CB95-4284-9B4D-720351FD5384}" type="datetimeFigureOut">
               <a:rPr lang="en-US" smtClean="0"/>
-              <a:t>5/24/2025</a:t>
+              <a:t>5/26/2025</a:t>
             </a:fld>
             <a:endParaRPr lang="en-US"/>
           </a:p>
@@ -1960,7 +1962,7 @@
           <a:p>
             <a:fld id="{1274BF1E-CB95-4284-9B4D-720351FD5384}" type="datetimeFigureOut">
               <a:rPr lang="en-US" smtClean="0"/>
-              <a:t>5/24/2025</a:t>
+              <a:t>5/26/2025</a:t>
             </a:fld>
             <a:endParaRPr lang="en-US"/>
           </a:p>
@@ -2073,7 +2075,7 @@
           <a:p>
             <a:fld id="{1274BF1E-CB95-4284-9B4D-720351FD5384}" type="datetimeFigureOut">
               <a:rPr lang="en-US" smtClean="0"/>
-              <a:t>5/24/2025</a:t>
+              <a:t>5/26/2025</a:t>
             </a:fld>
             <a:endParaRPr lang="en-US"/>
           </a:p>
@@ -2384,7 +2386,7 @@
           <a:p>
             <a:fld id="{1274BF1E-CB95-4284-9B4D-720351FD5384}" type="datetimeFigureOut">
               <a:rPr lang="en-US" smtClean="0"/>
-              <a:t>5/24/2025</a:t>
+              <a:t>5/26/2025</a:t>
             </a:fld>
             <a:endParaRPr lang="en-US"/>
           </a:p>
@@ -2672,7 +2674,7 @@
           <a:p>
             <a:fld id="{1274BF1E-CB95-4284-9B4D-720351FD5384}" type="datetimeFigureOut">
               <a:rPr lang="en-US" smtClean="0"/>
-              <a:t>5/24/2025</a:t>
+              <a:t>5/26/2025</a:t>
             </a:fld>
             <a:endParaRPr lang="en-US"/>
           </a:p>
@@ -2913,7 +2915,7 @@
           <a:p>
             <a:fld id="{1274BF1E-CB95-4284-9B4D-720351FD5384}" type="datetimeFigureOut">
               <a:rPr lang="en-US" smtClean="0"/>
-              <a:t>5/24/2025</a:t>
+              <a:t>5/26/2025</a:t>
             </a:fld>
             <a:endParaRPr lang="en-US"/>
           </a:p>
@@ -5650,196 +5652,12 @@
           <a:chExt cx="0" cy="0"/>
         </a:xfrm>
       </p:grpSpPr>
-      <p:pic>
-        <p:nvPicPr>
-          <p:cNvPr id="3" name="Graphic 2" descr="Closed book outline">
-            <a:extLst>
-              <a:ext uri="{FF2B5EF4-FFF2-40B4-BE49-F238E27FC236}">
-                <a16:creationId xmlns:a16="http://schemas.microsoft.com/office/drawing/2014/main" id="{8B5A347F-16B0-4C01-CDE5-3DA7EE07C0A7}"/>
-              </a:ext>
-            </a:extLst>
-          </p:cNvPr>
-          <p:cNvPicPr>
-            <a:picLocks noChangeAspect="1"/>
-          </p:cNvPicPr>
-          <p:nvPr/>
-        </p:nvPicPr>
-        <p:blipFill>
-          <a:blip r:embed="rId2">
-            <a:extLst>
-              <a:ext uri="{96DAC541-7B7A-43D3-8B79-37D633B846F1}">
-                <asvg:svgBlip xmlns:asvg="http://schemas.microsoft.com/office/drawing/2016/SVG/main" r:embed="rId3"/>
-              </a:ext>
-            </a:extLst>
-          </a:blip>
-          <a:stretch>
-            <a:fillRect/>
-          </a:stretch>
-        </p:blipFill>
-        <p:spPr>
-          <a:xfrm>
-            <a:off x="1584960" y="1264920"/>
-            <a:ext cx="1183640" cy="1183640"/>
-          </a:xfrm>
-          <a:prstGeom prst="rect">
-            <a:avLst/>
-          </a:prstGeom>
-        </p:spPr>
-      </p:pic>
-      <p:pic>
-        <p:nvPicPr>
-          <p:cNvPr id="5" name="Graphic 4" descr="Closed book outline">
-            <a:extLst>
-              <a:ext uri="{FF2B5EF4-FFF2-40B4-BE49-F238E27FC236}">
-                <a16:creationId xmlns:a16="http://schemas.microsoft.com/office/drawing/2014/main" id="{6579DF6F-E332-F978-F493-883C9FE2975A}"/>
-              </a:ext>
-            </a:extLst>
-          </p:cNvPr>
-          <p:cNvPicPr>
-            <a:picLocks noChangeAspect="1"/>
-          </p:cNvPicPr>
-          <p:nvPr/>
-        </p:nvPicPr>
-        <p:blipFill>
-          <a:blip r:embed="rId2">
-            <a:extLst>
-              <a:ext uri="{96DAC541-7B7A-43D3-8B79-37D633B846F1}">
-                <asvg:svgBlip xmlns:asvg="http://schemas.microsoft.com/office/drawing/2016/SVG/main" r:embed="rId3"/>
-              </a:ext>
-            </a:extLst>
-          </a:blip>
-          <a:stretch>
-            <a:fillRect/>
-          </a:stretch>
-        </p:blipFill>
-        <p:spPr>
-          <a:xfrm>
-            <a:off x="2682240" y="1264920"/>
-            <a:ext cx="1183640" cy="1183640"/>
-          </a:xfrm>
-          <a:prstGeom prst="rect">
-            <a:avLst/>
-          </a:prstGeom>
-        </p:spPr>
-      </p:pic>
-      <p:pic>
-        <p:nvPicPr>
-          <p:cNvPr id="6" name="Graphic 5" descr="Closed book outline">
-            <a:extLst>
-              <a:ext uri="{FF2B5EF4-FFF2-40B4-BE49-F238E27FC236}">
-                <a16:creationId xmlns:a16="http://schemas.microsoft.com/office/drawing/2014/main" id="{48222A22-CE4D-1805-0AF0-BA5306965C12}"/>
-              </a:ext>
-            </a:extLst>
-          </p:cNvPr>
-          <p:cNvPicPr>
-            <a:picLocks noChangeAspect="1"/>
-          </p:cNvPicPr>
-          <p:nvPr/>
-        </p:nvPicPr>
-        <p:blipFill>
-          <a:blip r:embed="rId2">
-            <a:extLst>
-              <a:ext uri="{96DAC541-7B7A-43D3-8B79-37D633B846F1}">
-                <asvg:svgBlip xmlns:asvg="http://schemas.microsoft.com/office/drawing/2016/SVG/main" r:embed="rId3"/>
-              </a:ext>
-            </a:extLst>
-          </a:blip>
-          <a:stretch>
-            <a:fillRect/>
-          </a:stretch>
-        </p:blipFill>
-        <p:spPr>
-          <a:xfrm>
-            <a:off x="2682240" y="2585720"/>
-            <a:ext cx="1183640" cy="1183640"/>
-          </a:xfrm>
-          <a:prstGeom prst="rect">
-            <a:avLst/>
-          </a:prstGeom>
-        </p:spPr>
-      </p:pic>
-      <p:pic>
-        <p:nvPicPr>
-          <p:cNvPr id="7" name="Graphic 6" descr="Closed book outline">
-            <a:extLst>
-              <a:ext uri="{FF2B5EF4-FFF2-40B4-BE49-F238E27FC236}">
-                <a16:creationId xmlns:a16="http://schemas.microsoft.com/office/drawing/2014/main" id="{FD26C7B4-1F6C-12C6-A88D-C0236AEF846E}"/>
-              </a:ext>
-            </a:extLst>
-          </p:cNvPr>
-          <p:cNvPicPr>
-            <a:picLocks noChangeAspect="1"/>
-          </p:cNvPicPr>
-          <p:nvPr/>
-        </p:nvPicPr>
-        <p:blipFill>
-          <a:blip r:embed="rId2">
-            <a:extLst>
-              <a:ext uri="{96DAC541-7B7A-43D3-8B79-37D633B846F1}">
-                <asvg:svgBlip xmlns:asvg="http://schemas.microsoft.com/office/drawing/2016/SVG/main" r:embed="rId3"/>
-              </a:ext>
-            </a:extLst>
-          </a:blip>
-          <a:stretch>
-            <a:fillRect/>
-          </a:stretch>
-        </p:blipFill>
-        <p:spPr>
-          <a:xfrm>
-            <a:off x="1579880" y="2585720"/>
-            <a:ext cx="1183640" cy="1183640"/>
-          </a:xfrm>
-          <a:prstGeom prst="rect">
-            <a:avLst/>
-          </a:prstGeom>
-        </p:spPr>
-      </p:pic>
-      <p:sp>
-        <p:nvSpPr>
-          <p:cNvPr id="8" name="TextBox 7">
-            <a:extLst>
-              <a:ext uri="{FF2B5EF4-FFF2-40B4-BE49-F238E27FC236}">
-                <a16:creationId xmlns:a16="http://schemas.microsoft.com/office/drawing/2014/main" id="{A4D18BFF-8B72-771A-E213-EA8C5BFAC8E7}"/>
-              </a:ext>
-            </a:extLst>
-          </p:cNvPr>
-          <p:cNvSpPr txBox="1"/>
-          <p:nvPr/>
-        </p:nvSpPr>
-        <p:spPr>
-          <a:xfrm>
-            <a:off x="1691423" y="895588"/>
-            <a:ext cx="1981633" cy="369332"/>
-          </a:xfrm>
-          <a:prstGeom prst="rect">
-            <a:avLst/>
-          </a:prstGeom>
-          <a:noFill/>
-        </p:spPr>
-        <p:txBody>
-          <a:bodyPr wrap="none" rtlCol="0">
-            <a:spAutoFit/>
-          </a:bodyPr>
-          <a:lstStyle/>
-          <a:p>
-            <a:r>
-              <a:rPr lang="en-US" dirty="0"/>
-              <a:t>SGK </a:t>
-            </a:r>
-            <a:r>
-              <a:rPr lang="vi-VN" dirty="0"/>
-              <a:t>LỊCH SỬ VN</a:t>
-            </a:r>
-            <a:endParaRPr lang="en-US" dirty="0"/>
-          </a:p>
-        </p:txBody>
-      </p:sp>
-      <p:sp>
-        <p:nvSpPr>
-          <p:cNvPr id="9" name="Cylinder 8">
-            <a:extLst>
-              <a:ext uri="{FF2B5EF4-FFF2-40B4-BE49-F238E27FC236}">
-                <a16:creationId xmlns:a16="http://schemas.microsoft.com/office/drawing/2014/main" id="{F43CF5DF-12CB-D8BF-AFF4-5BED1806DF8F}"/>
+      <p:sp>
+        <p:nvSpPr>
+          <p:cNvPr id="3" name="Rectangle: Rounded Corners 2">
+            <a:extLst>
+              <a:ext uri="{FF2B5EF4-FFF2-40B4-BE49-F238E27FC236}">
+                <a16:creationId xmlns:a16="http://schemas.microsoft.com/office/drawing/2014/main" id="{4C0B364E-9D90-64CF-EE9A-A0106BA27474}"/>
               </a:ext>
             </a:extLst>
           </p:cNvPr>
@@ -5848,21 +5666,20 @@
         </p:nvSpPr>
         <p:spPr>
           <a:xfrm>
-            <a:off x="5902960" y="1856740"/>
-            <a:ext cx="1899920" cy="1572260"/>
-          </a:xfrm>
-          <a:prstGeom prst="can">
+            <a:off x="146304" y="187452"/>
+            <a:ext cx="1591056" cy="530352"/>
+          </a:xfrm>
+          <a:prstGeom prst="roundRect">
             <a:avLst/>
           </a:prstGeom>
           <a:solidFill>
-            <a:schemeClr val="accent2">
-              <a:lumMod val="60000"/>
-              <a:lumOff val="40000"/>
+            <a:schemeClr val="bg1">
+              <a:lumMod val="95000"/>
             </a:schemeClr>
           </a:solidFill>
           <a:ln>
             <a:solidFill>
-              <a:schemeClr val="bg1"/>
+              <a:schemeClr val="tx1"/>
             </a:solidFill>
           </a:ln>
         </p:spPr>
@@ -5887,125 +5704,2134 @@
           <a:lstStyle/>
           <a:p>
             <a:pPr algn="ctr"/>
-            <a:endParaRPr lang="en-US"/>
-          </a:p>
-        </p:txBody>
-      </p:sp>
-      <p:sp>
-        <p:nvSpPr>
-          <p:cNvPr id="10" name="TextBox 9">
-            <a:extLst>
-              <a:ext uri="{FF2B5EF4-FFF2-40B4-BE49-F238E27FC236}">
-                <a16:creationId xmlns:a16="http://schemas.microsoft.com/office/drawing/2014/main" id="{7EF27885-9A35-F250-7D10-D3DD61E5B54C}"/>
-              </a:ext>
-            </a:extLst>
-          </p:cNvPr>
-          <p:cNvSpPr txBox="1"/>
+            <a:r>
+              <a:rPr lang="vi-VN" sz="1300" dirty="0">
+                <a:solidFill>
+                  <a:schemeClr val="tx1"/>
+                </a:solidFill>
+                <a:latin typeface="+mj-lt"/>
+              </a:rPr>
+              <a:t>Thu thập dữ liệu</a:t>
+            </a:r>
+          </a:p>
+          <a:p>
+            <a:pPr algn="ctr"/>
+            <a:r>
+              <a:rPr lang="vi-VN" sz="1300" dirty="0">
+                <a:solidFill>
+                  <a:schemeClr val="tx1"/>
+                </a:solidFill>
+                <a:latin typeface="+mj-lt"/>
+              </a:rPr>
+              <a:t>(</a:t>
+            </a:r>
+            <a:r>
+              <a:rPr lang="vi-VN" sz="1300" dirty="0" err="1">
+                <a:solidFill>
+                  <a:schemeClr val="tx1"/>
+                </a:solidFill>
+                <a:latin typeface="+mj-lt"/>
+              </a:rPr>
+              <a:t>Collecting</a:t>
+            </a:r>
+            <a:r>
+              <a:rPr lang="vi-VN" sz="1300" dirty="0">
+                <a:solidFill>
+                  <a:schemeClr val="tx1"/>
+                </a:solidFill>
+                <a:latin typeface="+mj-lt"/>
+              </a:rPr>
+              <a:t> </a:t>
+            </a:r>
+            <a:r>
+              <a:rPr lang="vi-VN" sz="1300" dirty="0" err="1">
+                <a:solidFill>
+                  <a:schemeClr val="tx1"/>
+                </a:solidFill>
+                <a:latin typeface="+mj-lt"/>
+              </a:rPr>
+              <a:t>data</a:t>
+            </a:r>
+            <a:r>
+              <a:rPr lang="vi-VN" sz="1300" dirty="0">
+                <a:solidFill>
+                  <a:schemeClr val="tx1"/>
+                </a:solidFill>
+                <a:latin typeface="+mj-lt"/>
+              </a:rPr>
+              <a:t>)</a:t>
+            </a:r>
+            <a:endParaRPr lang="en-US" sz="1300" dirty="0">
+              <a:solidFill>
+                <a:schemeClr val="tx1"/>
+              </a:solidFill>
+              <a:latin typeface="+mj-lt"/>
+            </a:endParaRPr>
+          </a:p>
+        </p:txBody>
+      </p:sp>
+      <p:sp>
+        <p:nvSpPr>
+          <p:cNvPr id="4" name="Rectangle: Rounded Corners 3">
+            <a:extLst>
+              <a:ext uri="{FF2B5EF4-FFF2-40B4-BE49-F238E27FC236}">
+                <a16:creationId xmlns:a16="http://schemas.microsoft.com/office/drawing/2014/main" id="{C9149CF4-2B03-7E86-92B8-78C2E8CCD61F}"/>
+              </a:ext>
+            </a:extLst>
+          </p:cNvPr>
+          <p:cNvSpPr/>
           <p:nvPr/>
         </p:nvSpPr>
         <p:spPr>
           <a:xfrm>
-            <a:off x="5552692" y="1258824"/>
-            <a:ext cx="2600455" cy="369332"/>
+            <a:off x="2228088" y="187452"/>
+            <a:ext cx="1676400" cy="530352"/>
+          </a:xfrm>
+          <a:prstGeom prst="roundRect">
+            <a:avLst/>
+          </a:prstGeom>
+          <a:solidFill>
+            <a:schemeClr val="bg1">
+              <a:lumMod val="95000"/>
+            </a:schemeClr>
+          </a:solidFill>
+          <a:ln>
+            <a:solidFill>
+              <a:schemeClr val="tx1"/>
+            </a:solidFill>
+          </a:ln>
+        </p:spPr>
+        <p:style>
+          <a:lnRef idx="2">
+            <a:schemeClr val="accent1">
+              <a:shade val="15000"/>
+            </a:schemeClr>
+          </a:lnRef>
+          <a:fillRef idx="1">
+            <a:schemeClr val="accent1"/>
+          </a:fillRef>
+          <a:effectRef idx="0">
+            <a:schemeClr val="accent1"/>
+          </a:effectRef>
+          <a:fontRef idx="minor">
+            <a:schemeClr val="lt1"/>
+          </a:fontRef>
+        </p:style>
+        <p:txBody>
+          <a:bodyPr rtlCol="0" anchor="ctr"/>
+          <a:lstStyle/>
+          <a:p>
+            <a:pPr algn="ctr"/>
+            <a:r>
+              <a:rPr lang="vi-VN" sz="1300" dirty="0">
+                <a:solidFill>
+                  <a:schemeClr val="tx1"/>
+                </a:solidFill>
+                <a:latin typeface="+mj-lt"/>
+              </a:rPr>
+              <a:t>Tiền xử lý dữ liệu</a:t>
+            </a:r>
+          </a:p>
+          <a:p>
+            <a:pPr algn="ctr"/>
+            <a:r>
+              <a:rPr lang="vi-VN" sz="1300" dirty="0">
+                <a:solidFill>
+                  <a:schemeClr val="tx1"/>
+                </a:solidFill>
+                <a:latin typeface="+mj-lt"/>
+              </a:rPr>
+              <a:t>(</a:t>
+            </a:r>
+            <a:r>
+              <a:rPr lang="vi-VN" sz="1300" dirty="0" err="1">
+                <a:solidFill>
+                  <a:schemeClr val="tx1"/>
+                </a:solidFill>
+                <a:latin typeface="+mj-lt"/>
+              </a:rPr>
+              <a:t>Preprocessing</a:t>
+            </a:r>
+            <a:r>
+              <a:rPr lang="vi-VN" sz="1300" dirty="0">
+                <a:solidFill>
+                  <a:schemeClr val="tx1"/>
+                </a:solidFill>
+                <a:latin typeface="+mj-lt"/>
+              </a:rPr>
+              <a:t> </a:t>
+            </a:r>
+            <a:r>
+              <a:rPr lang="vi-VN" sz="1300" dirty="0" err="1">
+                <a:solidFill>
+                  <a:schemeClr val="tx1"/>
+                </a:solidFill>
+                <a:latin typeface="+mj-lt"/>
+              </a:rPr>
+              <a:t>data</a:t>
+            </a:r>
+            <a:r>
+              <a:rPr lang="vi-VN" sz="1300" dirty="0">
+                <a:solidFill>
+                  <a:schemeClr val="tx1"/>
+                </a:solidFill>
+                <a:latin typeface="+mj-lt"/>
+              </a:rPr>
+              <a:t>)</a:t>
+            </a:r>
+            <a:endParaRPr lang="en-US" sz="1300" dirty="0">
+              <a:solidFill>
+                <a:schemeClr val="tx1"/>
+              </a:solidFill>
+              <a:latin typeface="+mj-lt"/>
+            </a:endParaRPr>
+          </a:p>
+        </p:txBody>
+      </p:sp>
+      <p:sp>
+        <p:nvSpPr>
+          <p:cNvPr id="5" name="Rectangle: Rounded Corners 4">
+            <a:extLst>
+              <a:ext uri="{FF2B5EF4-FFF2-40B4-BE49-F238E27FC236}">
+                <a16:creationId xmlns:a16="http://schemas.microsoft.com/office/drawing/2014/main" id="{72FCEE69-E7C6-B0BC-7221-2D5531C0F05E}"/>
+              </a:ext>
+            </a:extLst>
+          </p:cNvPr>
+          <p:cNvSpPr/>
+          <p:nvPr/>
+        </p:nvSpPr>
+        <p:spPr>
+          <a:xfrm>
+            <a:off x="4395216" y="187452"/>
+            <a:ext cx="1456944" cy="530352"/>
+          </a:xfrm>
+          <a:prstGeom prst="roundRect">
+            <a:avLst/>
+          </a:prstGeom>
+          <a:solidFill>
+            <a:schemeClr val="bg1">
+              <a:lumMod val="95000"/>
+            </a:schemeClr>
+          </a:solidFill>
+          <a:ln>
+            <a:solidFill>
+              <a:schemeClr val="tx1"/>
+            </a:solidFill>
+          </a:ln>
+        </p:spPr>
+        <p:style>
+          <a:lnRef idx="2">
+            <a:schemeClr val="accent1">
+              <a:shade val="15000"/>
+            </a:schemeClr>
+          </a:lnRef>
+          <a:fillRef idx="1">
+            <a:schemeClr val="accent1"/>
+          </a:fillRef>
+          <a:effectRef idx="0">
+            <a:schemeClr val="accent1"/>
+          </a:effectRef>
+          <a:fontRef idx="minor">
+            <a:schemeClr val="lt1"/>
+          </a:fontRef>
+        </p:style>
+        <p:txBody>
+          <a:bodyPr rtlCol="0" anchor="ctr"/>
+          <a:lstStyle/>
+          <a:p>
+            <a:pPr algn="ctr"/>
+            <a:r>
+              <a:rPr lang="vi-VN" sz="1300" dirty="0">
+                <a:solidFill>
+                  <a:schemeClr val="tx1"/>
+                </a:solidFill>
+                <a:latin typeface="+mj-lt"/>
+              </a:rPr>
+              <a:t>Phân đoạn dữ liệu</a:t>
+            </a:r>
+          </a:p>
+          <a:p>
+            <a:pPr algn="ctr"/>
+            <a:r>
+              <a:rPr lang="vi-VN" sz="1300" dirty="0">
+                <a:solidFill>
+                  <a:schemeClr val="tx1"/>
+                </a:solidFill>
+                <a:latin typeface="+mj-lt"/>
+              </a:rPr>
+              <a:t>(</a:t>
+            </a:r>
+            <a:r>
+              <a:rPr lang="vi-VN" sz="1300" dirty="0" err="1">
+                <a:solidFill>
+                  <a:schemeClr val="tx1"/>
+                </a:solidFill>
+                <a:latin typeface="+mj-lt"/>
+              </a:rPr>
+              <a:t>Chunking</a:t>
+            </a:r>
+            <a:r>
+              <a:rPr lang="vi-VN" sz="1300" dirty="0">
+                <a:solidFill>
+                  <a:schemeClr val="tx1"/>
+                </a:solidFill>
+                <a:latin typeface="+mj-lt"/>
+              </a:rPr>
+              <a:t> </a:t>
+            </a:r>
+            <a:r>
+              <a:rPr lang="vi-VN" sz="1300" dirty="0" err="1">
+                <a:solidFill>
+                  <a:schemeClr val="tx1"/>
+                </a:solidFill>
+                <a:latin typeface="+mj-lt"/>
+              </a:rPr>
+              <a:t>data</a:t>
+            </a:r>
+            <a:r>
+              <a:rPr lang="vi-VN" sz="1300" dirty="0">
+                <a:solidFill>
+                  <a:schemeClr val="tx1"/>
+                </a:solidFill>
+                <a:latin typeface="+mj-lt"/>
+              </a:rPr>
+              <a:t>)</a:t>
+            </a:r>
+            <a:endParaRPr lang="en-US" sz="1300" dirty="0">
+              <a:solidFill>
+                <a:schemeClr val="tx1"/>
+              </a:solidFill>
+              <a:latin typeface="+mj-lt"/>
+            </a:endParaRPr>
+          </a:p>
+        </p:txBody>
+      </p:sp>
+      <p:sp>
+        <p:nvSpPr>
+          <p:cNvPr id="6" name="Cylinder 5">
+            <a:extLst>
+              <a:ext uri="{FF2B5EF4-FFF2-40B4-BE49-F238E27FC236}">
+                <a16:creationId xmlns:a16="http://schemas.microsoft.com/office/drawing/2014/main" id="{74A74C67-E73B-6C07-A7EF-03FC8E1C9209}"/>
+              </a:ext>
+            </a:extLst>
+          </p:cNvPr>
+          <p:cNvSpPr/>
+          <p:nvPr/>
+        </p:nvSpPr>
+        <p:spPr>
+          <a:xfrm>
+            <a:off x="6347699" y="96012"/>
+            <a:ext cx="1456944" cy="644652"/>
+          </a:xfrm>
+          <a:prstGeom prst="can">
+            <a:avLst>
+              <a:gd name="adj" fmla="val 12506"/>
+            </a:avLst>
+          </a:prstGeom>
+          <a:solidFill>
+            <a:schemeClr val="bg1">
+              <a:lumMod val="95000"/>
+            </a:schemeClr>
+          </a:solidFill>
+          <a:ln>
+            <a:solidFill>
+              <a:schemeClr val="tx1"/>
+            </a:solidFill>
+          </a:ln>
+        </p:spPr>
+        <p:style>
+          <a:lnRef idx="2">
+            <a:schemeClr val="accent1">
+              <a:shade val="15000"/>
+            </a:schemeClr>
+          </a:lnRef>
+          <a:fillRef idx="1">
+            <a:schemeClr val="accent1"/>
+          </a:fillRef>
+          <a:effectRef idx="0">
+            <a:schemeClr val="accent1"/>
+          </a:effectRef>
+          <a:fontRef idx="minor">
+            <a:schemeClr val="lt1"/>
+          </a:fontRef>
+        </p:style>
+        <p:txBody>
+          <a:bodyPr rtlCol="0" anchor="ctr"/>
+          <a:lstStyle/>
+          <a:p>
+            <a:pPr algn="ctr"/>
+            <a:r>
+              <a:rPr lang="vi-VN" sz="1300" dirty="0">
+                <a:solidFill>
+                  <a:schemeClr val="tx1"/>
+                </a:solidFill>
+                <a:latin typeface="+mj-lt"/>
+              </a:rPr>
+              <a:t>Dữ liệu chuẩn</a:t>
+            </a:r>
+          </a:p>
+          <a:p>
+            <a:pPr algn="ctr"/>
+            <a:r>
+              <a:rPr lang="vi-VN" sz="1300" dirty="0">
+                <a:solidFill>
+                  <a:schemeClr val="tx1"/>
+                </a:solidFill>
+                <a:latin typeface="+mj-lt"/>
+              </a:rPr>
+              <a:t>(</a:t>
+            </a:r>
+            <a:r>
+              <a:rPr lang="vi-VN" sz="1300" dirty="0" err="1">
+                <a:solidFill>
+                  <a:schemeClr val="tx1"/>
+                </a:solidFill>
+                <a:latin typeface="+mj-lt"/>
+              </a:rPr>
+              <a:t>Cleaned</a:t>
+            </a:r>
+            <a:r>
+              <a:rPr lang="vi-VN" sz="1300" dirty="0">
+                <a:solidFill>
+                  <a:schemeClr val="tx1"/>
+                </a:solidFill>
+                <a:latin typeface="+mj-lt"/>
+              </a:rPr>
+              <a:t> </a:t>
+            </a:r>
+            <a:r>
+              <a:rPr lang="vi-VN" sz="1300" dirty="0" err="1">
+                <a:solidFill>
+                  <a:schemeClr val="tx1"/>
+                </a:solidFill>
+                <a:latin typeface="+mj-lt"/>
+              </a:rPr>
+              <a:t>data</a:t>
+            </a:r>
+            <a:r>
+              <a:rPr lang="vi-VN" sz="1300" dirty="0">
+                <a:solidFill>
+                  <a:schemeClr val="tx1"/>
+                </a:solidFill>
+                <a:latin typeface="+mj-lt"/>
+              </a:rPr>
+              <a:t>)</a:t>
+            </a:r>
+            <a:endParaRPr lang="en-US" sz="1300" dirty="0">
+              <a:solidFill>
+                <a:schemeClr val="tx1"/>
+              </a:solidFill>
+              <a:latin typeface="+mj-lt"/>
+            </a:endParaRPr>
+          </a:p>
+        </p:txBody>
+      </p:sp>
+      <p:sp>
+        <p:nvSpPr>
+          <p:cNvPr id="9" name="Cube 8">
+            <a:extLst>
+              <a:ext uri="{FF2B5EF4-FFF2-40B4-BE49-F238E27FC236}">
+                <a16:creationId xmlns:a16="http://schemas.microsoft.com/office/drawing/2014/main" id="{BB5996C8-63F9-DD2B-5367-2334A49E3D1C}"/>
+              </a:ext>
+            </a:extLst>
+          </p:cNvPr>
+          <p:cNvSpPr/>
+          <p:nvPr/>
+        </p:nvSpPr>
+        <p:spPr>
+          <a:xfrm>
+            <a:off x="10553140" y="187452"/>
+            <a:ext cx="1523044" cy="530352"/>
+          </a:xfrm>
+          <a:prstGeom prst="cube">
+            <a:avLst>
+              <a:gd name="adj" fmla="val 19444"/>
+            </a:avLst>
+          </a:prstGeom>
+          <a:solidFill>
+            <a:schemeClr val="bg1">
+              <a:lumMod val="95000"/>
+            </a:schemeClr>
+          </a:solidFill>
+          <a:ln>
+            <a:solidFill>
+              <a:schemeClr val="tx1"/>
+            </a:solidFill>
+          </a:ln>
+        </p:spPr>
+        <p:style>
+          <a:lnRef idx="2">
+            <a:schemeClr val="accent1">
+              <a:shade val="15000"/>
+            </a:schemeClr>
+          </a:lnRef>
+          <a:fillRef idx="1">
+            <a:schemeClr val="accent1"/>
+          </a:fillRef>
+          <a:effectRef idx="0">
+            <a:schemeClr val="accent1"/>
+          </a:effectRef>
+          <a:fontRef idx="minor">
+            <a:schemeClr val="lt1"/>
+          </a:fontRef>
+        </p:style>
+        <p:txBody>
+          <a:bodyPr rtlCol="0" anchor="ctr"/>
+          <a:lstStyle/>
+          <a:p>
+            <a:pPr algn="ctr"/>
+            <a:r>
+              <a:rPr lang="vi-VN" sz="1300" dirty="0">
+                <a:solidFill>
+                  <a:schemeClr val="tx1"/>
+                </a:solidFill>
+                <a:latin typeface="+mj-lt"/>
+              </a:rPr>
+              <a:t>Các </a:t>
+            </a:r>
+            <a:r>
+              <a:rPr lang="vi-VN" sz="1300" dirty="0" err="1">
+                <a:solidFill>
+                  <a:schemeClr val="tx1"/>
+                </a:solidFill>
+                <a:latin typeface="+mj-lt"/>
+              </a:rPr>
+              <a:t>model</a:t>
+            </a:r>
+            <a:endParaRPr lang="vi-VN" sz="1300" dirty="0">
+              <a:solidFill>
+                <a:schemeClr val="tx1"/>
+              </a:solidFill>
+              <a:latin typeface="+mj-lt"/>
+            </a:endParaRPr>
+          </a:p>
+          <a:p>
+            <a:pPr algn="ctr"/>
+            <a:r>
+              <a:rPr lang="vi-VN" sz="1300" dirty="0" err="1">
+                <a:solidFill>
+                  <a:schemeClr val="tx1"/>
+                </a:solidFill>
+                <a:latin typeface="+mj-lt"/>
+              </a:rPr>
+              <a:t>embedding</a:t>
+            </a:r>
+            <a:endParaRPr lang="en-US" sz="1300" dirty="0">
+              <a:solidFill>
+                <a:schemeClr val="tx1"/>
+              </a:solidFill>
+              <a:latin typeface="+mj-lt"/>
+            </a:endParaRPr>
+          </a:p>
+        </p:txBody>
+      </p:sp>
+      <p:sp>
+        <p:nvSpPr>
+          <p:cNvPr id="13" name="Cube 12">
+            <a:extLst>
+              <a:ext uri="{FF2B5EF4-FFF2-40B4-BE49-F238E27FC236}">
+                <a16:creationId xmlns:a16="http://schemas.microsoft.com/office/drawing/2014/main" id="{7032E416-3072-CA65-BFB7-B4D384B9BA0D}"/>
+              </a:ext>
+            </a:extLst>
+          </p:cNvPr>
+          <p:cNvSpPr/>
+          <p:nvPr/>
+        </p:nvSpPr>
+        <p:spPr>
+          <a:xfrm>
+            <a:off x="8388053" y="1281684"/>
+            <a:ext cx="1511804" cy="530352"/>
+          </a:xfrm>
+          <a:prstGeom prst="cube">
+            <a:avLst>
+              <a:gd name="adj" fmla="val 19444"/>
+            </a:avLst>
+          </a:prstGeom>
+          <a:solidFill>
+            <a:schemeClr val="bg1">
+              <a:lumMod val="95000"/>
+            </a:schemeClr>
+          </a:solidFill>
+          <a:ln>
+            <a:solidFill>
+              <a:schemeClr val="tx1"/>
+            </a:solidFill>
+          </a:ln>
+        </p:spPr>
+        <p:style>
+          <a:lnRef idx="2">
+            <a:schemeClr val="accent1">
+              <a:shade val="15000"/>
+            </a:schemeClr>
+          </a:lnRef>
+          <a:fillRef idx="1">
+            <a:schemeClr val="accent1"/>
+          </a:fillRef>
+          <a:effectRef idx="0">
+            <a:schemeClr val="accent1"/>
+          </a:effectRef>
+          <a:fontRef idx="minor">
+            <a:schemeClr val="lt1"/>
+          </a:fontRef>
+        </p:style>
+        <p:txBody>
+          <a:bodyPr rtlCol="0" anchor="ctr"/>
+          <a:lstStyle/>
+          <a:p>
+            <a:pPr algn="ctr"/>
+            <a:r>
+              <a:rPr lang="vi-VN" sz="1300" dirty="0" err="1">
+                <a:solidFill>
+                  <a:schemeClr val="tx1"/>
+                </a:solidFill>
+                <a:latin typeface="+mj-lt"/>
+              </a:rPr>
+              <a:t>Model</a:t>
+            </a:r>
+            <a:r>
+              <a:rPr lang="vi-VN" sz="1300" dirty="0">
+                <a:solidFill>
+                  <a:schemeClr val="tx1"/>
+                </a:solidFill>
+                <a:latin typeface="+mj-lt"/>
+              </a:rPr>
+              <a:t> </a:t>
+            </a:r>
+            <a:r>
+              <a:rPr lang="vi-VN" sz="1300" dirty="0" err="1">
+                <a:solidFill>
+                  <a:schemeClr val="tx1"/>
+                </a:solidFill>
+                <a:latin typeface="+mj-lt"/>
+              </a:rPr>
+              <a:t>embedding</a:t>
+            </a:r>
+            <a:endParaRPr lang="vi-VN" sz="1300" dirty="0">
+              <a:solidFill>
+                <a:schemeClr val="tx1"/>
+              </a:solidFill>
+              <a:latin typeface="+mj-lt"/>
+            </a:endParaRPr>
+          </a:p>
+          <a:p>
+            <a:pPr algn="ctr"/>
+            <a:r>
+              <a:rPr lang="vi-VN" sz="1300" dirty="0">
+                <a:solidFill>
+                  <a:schemeClr val="tx1"/>
+                </a:solidFill>
+                <a:latin typeface="+mj-lt"/>
+              </a:rPr>
+              <a:t>tốt nhất</a:t>
+            </a:r>
+            <a:endParaRPr lang="en-US" sz="1300" dirty="0">
+              <a:solidFill>
+                <a:schemeClr val="tx1"/>
+              </a:solidFill>
+              <a:latin typeface="+mj-lt"/>
+            </a:endParaRPr>
+          </a:p>
+        </p:txBody>
+      </p:sp>
+      <p:sp>
+        <p:nvSpPr>
+          <p:cNvPr id="14" name="Cylinder 13">
+            <a:extLst>
+              <a:ext uri="{FF2B5EF4-FFF2-40B4-BE49-F238E27FC236}">
+                <a16:creationId xmlns:a16="http://schemas.microsoft.com/office/drawing/2014/main" id="{5CA7FCE2-8826-2AC2-A35A-B7D56C453B2A}"/>
+              </a:ext>
+            </a:extLst>
+          </p:cNvPr>
+          <p:cNvSpPr/>
+          <p:nvPr/>
+        </p:nvSpPr>
+        <p:spPr>
+          <a:xfrm>
+            <a:off x="10553140" y="1281684"/>
+            <a:ext cx="1523044" cy="1691640"/>
+          </a:xfrm>
+          <a:prstGeom prst="can">
+            <a:avLst>
+              <a:gd name="adj" fmla="val 10620"/>
+            </a:avLst>
+          </a:prstGeom>
+          <a:solidFill>
+            <a:schemeClr val="bg1">
+              <a:lumMod val="95000"/>
+            </a:schemeClr>
+          </a:solidFill>
+          <a:ln>
+            <a:solidFill>
+              <a:schemeClr val="tx1"/>
+            </a:solidFill>
+          </a:ln>
+        </p:spPr>
+        <p:style>
+          <a:lnRef idx="2">
+            <a:schemeClr val="accent1">
+              <a:shade val="15000"/>
+            </a:schemeClr>
+          </a:lnRef>
+          <a:fillRef idx="1">
+            <a:schemeClr val="accent1"/>
+          </a:fillRef>
+          <a:effectRef idx="0">
+            <a:schemeClr val="accent1"/>
+          </a:effectRef>
+          <a:fontRef idx="minor">
+            <a:schemeClr val="lt1"/>
+          </a:fontRef>
+        </p:style>
+        <p:txBody>
+          <a:bodyPr rtlCol="0" anchor="ctr"/>
+          <a:lstStyle/>
+          <a:p>
+            <a:pPr algn="ctr"/>
+            <a:r>
+              <a:rPr lang="vi-VN" sz="1300" dirty="0">
+                <a:solidFill>
+                  <a:schemeClr val="tx1"/>
+                </a:solidFill>
+                <a:latin typeface="Times New Roman" panose="02020603050405020304" pitchFamily="18" charset="0"/>
+                <a:cs typeface="Times New Roman" panose="02020603050405020304" pitchFamily="18" charset="0"/>
+              </a:rPr>
+              <a:t>Lưu trữ dữ liệu</a:t>
+            </a:r>
+          </a:p>
+          <a:p>
+            <a:pPr algn="ctr"/>
+            <a:r>
+              <a:rPr lang="vi-VN" sz="1300" dirty="0" err="1">
+                <a:solidFill>
+                  <a:schemeClr val="tx1"/>
+                </a:solidFill>
+                <a:latin typeface="Times New Roman" panose="02020603050405020304" pitchFamily="18" charset="0"/>
+                <a:cs typeface="Times New Roman" panose="02020603050405020304" pitchFamily="18" charset="0"/>
+              </a:rPr>
+              <a:t>vector</a:t>
+            </a:r>
+            <a:r>
+              <a:rPr lang="vi-VN" sz="1300" dirty="0">
+                <a:solidFill>
+                  <a:schemeClr val="tx1"/>
+                </a:solidFill>
+                <a:latin typeface="Times New Roman" panose="02020603050405020304" pitchFamily="18" charset="0"/>
+                <a:cs typeface="Times New Roman" panose="02020603050405020304" pitchFamily="18" charset="0"/>
+              </a:rPr>
+              <a:t> </a:t>
+            </a:r>
+            <a:r>
+              <a:rPr lang="vi-VN" sz="1300" dirty="0" err="1">
+                <a:solidFill>
+                  <a:schemeClr val="tx1"/>
+                </a:solidFill>
+                <a:latin typeface="Times New Roman" panose="02020603050405020304" pitchFamily="18" charset="0"/>
+                <a:cs typeface="Times New Roman" panose="02020603050405020304" pitchFamily="18" charset="0"/>
+              </a:rPr>
+              <a:t>database</a:t>
+            </a:r>
+            <a:endParaRPr lang="en-US" sz="1300" dirty="0">
+              <a:solidFill>
+                <a:schemeClr val="tx1"/>
+              </a:solidFill>
+              <a:latin typeface="Times New Roman" panose="02020603050405020304" pitchFamily="18" charset="0"/>
+              <a:cs typeface="Times New Roman" panose="02020603050405020304" pitchFamily="18" charset="0"/>
+            </a:endParaRPr>
+          </a:p>
+        </p:txBody>
+      </p:sp>
+      <p:pic>
+        <p:nvPicPr>
+          <p:cNvPr id="17" name="Graphic 16" descr="User with solid fill">
+            <a:extLst>
+              <a:ext uri="{FF2B5EF4-FFF2-40B4-BE49-F238E27FC236}">
+                <a16:creationId xmlns:a16="http://schemas.microsoft.com/office/drawing/2014/main" id="{B61B3EEB-3B71-FA44-D12A-08CB3E46ADB0}"/>
+              </a:ext>
+            </a:extLst>
+          </p:cNvPr>
+          <p:cNvPicPr>
+            <a:picLocks noChangeAspect="1"/>
+          </p:cNvPicPr>
+          <p:nvPr/>
+        </p:nvPicPr>
+        <p:blipFill>
+          <a:blip r:embed="rId2">
+            <a:extLst>
+              <a:ext uri="{96DAC541-7B7A-43D3-8B79-37D633B846F1}">
+                <asvg:svgBlip xmlns:asvg="http://schemas.microsoft.com/office/drawing/2016/SVG/main" r:embed="rId3"/>
+              </a:ext>
+            </a:extLst>
+          </a:blip>
+          <a:stretch>
+            <a:fillRect/>
+          </a:stretch>
+        </p:blipFill>
+        <p:spPr>
+          <a:xfrm>
+            <a:off x="2472939" y="2090743"/>
+            <a:ext cx="1003931" cy="1003931"/>
           </a:xfrm>
           <a:prstGeom prst="rect">
             <a:avLst/>
           </a:prstGeom>
-          <a:noFill/>
-        </p:spPr>
-        <p:txBody>
-          <a:bodyPr wrap="none" rtlCol="0">
-            <a:spAutoFit/>
-          </a:bodyPr>
-          <a:lstStyle/>
-          <a:p>
-            <a:r>
-              <a:rPr lang="vi-VN"/>
-              <a:t>DATASET LỊCH SỬ VN</a:t>
-            </a:r>
-            <a:endParaRPr lang="en-US" dirty="0"/>
-          </a:p>
-        </p:txBody>
-      </p:sp>
-      <p:cxnSp>
-        <p:nvCxnSpPr>
-          <p:cNvPr id="12" name="Straight Arrow Connector 11">
-            <a:extLst>
-              <a:ext uri="{FF2B5EF4-FFF2-40B4-BE49-F238E27FC236}">
-                <a16:creationId xmlns:a16="http://schemas.microsoft.com/office/drawing/2014/main" id="{DFDB0EF4-F1D1-8586-C253-0557B4AF13E0}"/>
-              </a:ext>
-            </a:extLst>
-          </p:cNvPr>
-          <p:cNvCxnSpPr/>
+        </p:spPr>
+      </p:pic>
+      <p:sp>
+        <p:nvSpPr>
+          <p:cNvPr id="20" name="Rectangle: Rounded Corners 19">
+            <a:extLst>
+              <a:ext uri="{FF2B5EF4-FFF2-40B4-BE49-F238E27FC236}">
+                <a16:creationId xmlns:a16="http://schemas.microsoft.com/office/drawing/2014/main" id="{A6EAC2B4-7E02-37B2-CEB3-63863C0A676D}"/>
+              </a:ext>
+            </a:extLst>
+          </p:cNvPr>
+          <p:cNvSpPr/>
           <p:nvPr/>
-        </p:nvCxnSpPr>
+        </p:nvSpPr>
         <p:spPr>
           <a:xfrm>
-            <a:off x="4206240" y="2585720"/>
-            <a:ext cx="1481328" cy="0"/>
-          </a:xfrm>
-          <a:prstGeom prst="straightConnector1">
+            <a:off x="6347700" y="1281684"/>
+            <a:ext cx="1456943" cy="530352"/>
+          </a:xfrm>
+          <a:prstGeom prst="roundRect">
             <a:avLst/>
           </a:prstGeom>
+          <a:solidFill>
+            <a:schemeClr val="bg1">
+              <a:lumMod val="95000"/>
+            </a:schemeClr>
+          </a:solidFill>
           <a:ln>
-            <a:tailEnd type="triangle"/>
+            <a:solidFill>
+              <a:schemeClr val="tx1"/>
+            </a:solidFill>
           </a:ln>
         </p:spPr>
         <p:style>
           <a:lnRef idx="2">
-            <a:schemeClr val="accent1"/>
+            <a:schemeClr val="accent1">
+              <a:shade val="15000"/>
+            </a:schemeClr>
           </a:lnRef>
-          <a:fillRef idx="0">
+          <a:fillRef idx="1">
             <a:schemeClr val="accent1"/>
           </a:fillRef>
-          <a:effectRef idx="1">
+          <a:effectRef idx="0">
             <a:schemeClr val="accent1"/>
           </a:effectRef>
           <a:fontRef idx="minor">
-            <a:schemeClr val="tx1"/>
+            <a:schemeClr val="lt1"/>
           </a:fontRef>
         </p:style>
-      </p:cxnSp>
-      <p:sp>
-        <p:nvSpPr>
-          <p:cNvPr id="13" name="TextBox 12">
-            <a:extLst>
-              <a:ext uri="{FF2B5EF4-FFF2-40B4-BE49-F238E27FC236}">
-                <a16:creationId xmlns:a16="http://schemas.microsoft.com/office/drawing/2014/main" id="{98BF2CDB-C40A-C74D-69A1-2BF46F00B375}"/>
-              </a:ext>
-            </a:extLst>
-          </p:cNvPr>
-          <p:cNvSpPr txBox="1"/>
+        <p:txBody>
+          <a:bodyPr rtlCol="0" anchor="ctr"/>
+          <a:lstStyle/>
+          <a:p>
+            <a:pPr algn="ctr"/>
+            <a:r>
+              <a:rPr lang="vi-VN" sz="1300" dirty="0">
+                <a:solidFill>
+                  <a:schemeClr val="tx1"/>
+                </a:solidFill>
+                <a:latin typeface="+mj-lt"/>
+              </a:rPr>
+              <a:t>Thông tin được trích xuất</a:t>
+            </a:r>
+            <a:endParaRPr lang="en-US" sz="1300" dirty="0">
+              <a:solidFill>
+                <a:schemeClr val="tx1"/>
+              </a:solidFill>
+              <a:latin typeface="+mj-lt"/>
+            </a:endParaRPr>
+          </a:p>
+        </p:txBody>
+      </p:sp>
+      <p:sp>
+        <p:nvSpPr>
+          <p:cNvPr id="23" name="Rectangle: Rounded Corners 22">
+            <a:extLst>
+              <a:ext uri="{FF2B5EF4-FFF2-40B4-BE49-F238E27FC236}">
+                <a16:creationId xmlns:a16="http://schemas.microsoft.com/office/drawing/2014/main" id="{83F988E7-AA09-988C-9F5A-31716BD85BB6}"/>
+              </a:ext>
+            </a:extLst>
+          </p:cNvPr>
+          <p:cNvSpPr/>
           <p:nvPr/>
         </p:nvSpPr>
         <p:spPr>
           <a:xfrm>
-            <a:off x="3924390" y="2057892"/>
-            <a:ext cx="1864613" cy="369332"/>
-          </a:xfrm>
-          <a:prstGeom prst="rect">
+            <a:off x="8388052" y="210312"/>
+            <a:ext cx="1523043" cy="530352"/>
+          </a:xfrm>
+          <a:prstGeom prst="roundRect">
             <a:avLst/>
           </a:prstGeom>
-          <a:noFill/>
-        </p:spPr>
-        <p:txBody>
-          <a:bodyPr wrap="none" rtlCol="0">
-            <a:spAutoFit/>
-          </a:bodyPr>
+          <a:solidFill>
+            <a:schemeClr val="bg1">
+              <a:lumMod val="95000"/>
+            </a:schemeClr>
+          </a:solidFill>
+          <a:ln>
+            <a:solidFill>
+              <a:schemeClr val="tx1"/>
+            </a:solidFill>
+            <a:prstDash val="dash"/>
+          </a:ln>
+        </p:spPr>
+        <p:style>
+          <a:lnRef idx="2">
+            <a:schemeClr val="accent1">
+              <a:shade val="15000"/>
+            </a:schemeClr>
+          </a:lnRef>
+          <a:fillRef idx="1">
+            <a:schemeClr val="accent1"/>
+          </a:fillRef>
+          <a:effectRef idx="0">
+            <a:schemeClr val="accent1"/>
+          </a:effectRef>
+          <a:fontRef idx="minor">
+            <a:schemeClr val="lt1"/>
+          </a:fontRef>
+        </p:style>
+        <p:txBody>
+          <a:bodyPr rtlCol="0" anchor="ctr"/>
           <a:lstStyle/>
           <a:p>
-            <a:r>
-              <a:rPr lang="vi-VN" dirty="0"/>
-              <a:t>Thu thập dữ liệu</a:t>
-            </a:r>
-            <a:endParaRPr lang="en-US" dirty="0"/>
+            <a:pPr algn="ctr"/>
+            <a:r>
+              <a:rPr lang="vi-VN" sz="1300" dirty="0">
+                <a:solidFill>
+                  <a:schemeClr val="tx1"/>
+                </a:solidFill>
+                <a:latin typeface="Times New Roman" panose="02020603050405020304" pitchFamily="18" charset="0"/>
+                <a:cs typeface="Times New Roman" panose="02020603050405020304" pitchFamily="18" charset="0"/>
+              </a:rPr>
+              <a:t>Đánh giá </a:t>
+            </a:r>
+            <a:r>
+              <a:rPr lang="vi-VN" sz="1300" dirty="0" err="1">
+                <a:solidFill>
+                  <a:schemeClr val="tx1"/>
+                </a:solidFill>
+                <a:latin typeface="Times New Roman" panose="02020603050405020304" pitchFamily="18" charset="0"/>
+                <a:cs typeface="Times New Roman" panose="02020603050405020304" pitchFamily="18" charset="0"/>
+              </a:rPr>
+              <a:t>model</a:t>
+            </a:r>
+            <a:r>
+              <a:rPr lang="vi-VN" sz="1300" dirty="0">
+                <a:solidFill>
+                  <a:schemeClr val="tx1"/>
+                </a:solidFill>
+                <a:latin typeface="Times New Roman" panose="02020603050405020304" pitchFamily="18" charset="0"/>
+                <a:cs typeface="Times New Roman" panose="02020603050405020304" pitchFamily="18" charset="0"/>
+              </a:rPr>
+              <a:t> </a:t>
+            </a:r>
+            <a:r>
+              <a:rPr lang="vi-VN" sz="1300" dirty="0" err="1">
+                <a:solidFill>
+                  <a:schemeClr val="tx1"/>
+                </a:solidFill>
+                <a:latin typeface="Times New Roman" panose="02020603050405020304" pitchFamily="18" charset="0"/>
+                <a:cs typeface="Times New Roman" panose="02020603050405020304" pitchFamily="18" charset="0"/>
+              </a:rPr>
+              <a:t>embedding</a:t>
+            </a:r>
+            <a:endParaRPr lang="en-US" sz="1300" dirty="0">
+              <a:solidFill>
+                <a:schemeClr val="tx1"/>
+              </a:solidFill>
+              <a:latin typeface="Times New Roman" panose="02020603050405020304" pitchFamily="18" charset="0"/>
+              <a:cs typeface="Times New Roman" panose="02020603050405020304" pitchFamily="18" charset="0"/>
+            </a:endParaRPr>
+          </a:p>
+        </p:txBody>
+      </p:sp>
+      <p:sp>
+        <p:nvSpPr>
+          <p:cNvPr id="24" name="Rectangle: Rounded Corners 23">
+            <a:extLst>
+              <a:ext uri="{FF2B5EF4-FFF2-40B4-BE49-F238E27FC236}">
+                <a16:creationId xmlns:a16="http://schemas.microsoft.com/office/drawing/2014/main" id="{CB4C4D39-4345-51F9-F870-BDBBD7720C2F}"/>
+              </a:ext>
+            </a:extLst>
+          </p:cNvPr>
+          <p:cNvSpPr/>
+          <p:nvPr/>
+        </p:nvSpPr>
+        <p:spPr>
+          <a:xfrm>
+            <a:off x="4395216" y="1281684"/>
+            <a:ext cx="1456944" cy="530352"/>
+          </a:xfrm>
+          <a:prstGeom prst="roundRect">
+            <a:avLst/>
+          </a:prstGeom>
+          <a:solidFill>
+            <a:schemeClr val="bg1">
+              <a:lumMod val="95000"/>
+            </a:schemeClr>
+          </a:solidFill>
+          <a:ln>
+            <a:solidFill>
+              <a:schemeClr val="tx1"/>
+            </a:solidFill>
+            <a:prstDash val="dash"/>
+          </a:ln>
+        </p:spPr>
+        <p:style>
+          <a:lnRef idx="2">
+            <a:schemeClr val="accent1">
+              <a:shade val="15000"/>
+            </a:schemeClr>
+          </a:lnRef>
+          <a:fillRef idx="1">
+            <a:schemeClr val="accent1"/>
+          </a:fillRef>
+          <a:effectRef idx="0">
+            <a:schemeClr val="accent1"/>
+          </a:effectRef>
+          <a:fontRef idx="minor">
+            <a:schemeClr val="lt1"/>
+          </a:fontRef>
+        </p:style>
+        <p:txBody>
+          <a:bodyPr rtlCol="0" anchor="ctr"/>
+          <a:lstStyle/>
+          <a:p>
+            <a:pPr algn="ctr"/>
+            <a:r>
+              <a:rPr lang="vi-VN" sz="1300" dirty="0">
+                <a:solidFill>
+                  <a:schemeClr val="tx1"/>
+                </a:solidFill>
+                <a:latin typeface="+mj-lt"/>
+              </a:rPr>
+              <a:t>Trích xuất thông tin câu hỏi</a:t>
+            </a:r>
+            <a:endParaRPr lang="en-US" sz="1300" dirty="0">
+              <a:solidFill>
+                <a:schemeClr val="tx1"/>
+              </a:solidFill>
+              <a:latin typeface="+mj-lt"/>
+            </a:endParaRPr>
+          </a:p>
+        </p:txBody>
+      </p:sp>
+      <p:sp>
+        <p:nvSpPr>
+          <p:cNvPr id="54" name="Cube 53">
+            <a:extLst>
+              <a:ext uri="{FF2B5EF4-FFF2-40B4-BE49-F238E27FC236}">
+                <a16:creationId xmlns:a16="http://schemas.microsoft.com/office/drawing/2014/main" id="{8F6C086B-973C-E6F8-D0E8-04E58C696C4E}"/>
+              </a:ext>
+            </a:extLst>
+          </p:cNvPr>
+          <p:cNvSpPr/>
+          <p:nvPr/>
+        </p:nvSpPr>
+        <p:spPr>
+          <a:xfrm>
+            <a:off x="2223277" y="1281684"/>
+            <a:ext cx="1676400" cy="530352"/>
+          </a:xfrm>
+          <a:prstGeom prst="cube">
+            <a:avLst>
+              <a:gd name="adj" fmla="val 17720"/>
+            </a:avLst>
+          </a:prstGeom>
+          <a:solidFill>
+            <a:schemeClr val="bg1">
+              <a:lumMod val="95000"/>
+            </a:schemeClr>
+          </a:solidFill>
+          <a:ln>
+            <a:solidFill>
+              <a:schemeClr val="tx1"/>
+            </a:solidFill>
+          </a:ln>
+        </p:spPr>
+        <p:style>
+          <a:lnRef idx="2">
+            <a:schemeClr val="accent1">
+              <a:shade val="15000"/>
+            </a:schemeClr>
+          </a:lnRef>
+          <a:fillRef idx="1">
+            <a:schemeClr val="accent1"/>
+          </a:fillRef>
+          <a:effectRef idx="0">
+            <a:schemeClr val="accent1"/>
+          </a:effectRef>
+          <a:fontRef idx="minor">
+            <a:schemeClr val="lt1"/>
+          </a:fontRef>
+        </p:style>
+        <p:txBody>
+          <a:bodyPr rtlCol="0" anchor="ctr"/>
+          <a:lstStyle/>
+          <a:p>
+            <a:pPr algn="ctr"/>
+            <a:r>
+              <a:rPr lang="vi-VN" sz="1300" dirty="0">
+                <a:solidFill>
+                  <a:schemeClr val="tx1"/>
+                </a:solidFill>
+                <a:latin typeface="+mj-lt"/>
+              </a:rPr>
+              <a:t>LLM</a:t>
+            </a:r>
+            <a:endParaRPr lang="en-US" sz="1300" dirty="0">
+              <a:solidFill>
+                <a:schemeClr val="tx1"/>
+              </a:solidFill>
+              <a:latin typeface="+mj-lt"/>
+            </a:endParaRPr>
+          </a:p>
+        </p:txBody>
+      </p:sp>
+      <p:sp>
+        <p:nvSpPr>
+          <p:cNvPr id="55" name="Rectangle: Rounded Corners 54">
+            <a:extLst>
+              <a:ext uri="{FF2B5EF4-FFF2-40B4-BE49-F238E27FC236}">
+                <a16:creationId xmlns:a16="http://schemas.microsoft.com/office/drawing/2014/main" id="{B8ACB595-AD1A-F1AC-4471-A5D6994010FF}"/>
+              </a:ext>
+            </a:extLst>
+          </p:cNvPr>
+          <p:cNvSpPr/>
+          <p:nvPr/>
+        </p:nvSpPr>
+        <p:spPr>
+          <a:xfrm>
+            <a:off x="146304" y="1281684"/>
+            <a:ext cx="1591056" cy="573024"/>
+          </a:xfrm>
+          <a:prstGeom prst="roundRect">
+            <a:avLst/>
+          </a:prstGeom>
+          <a:solidFill>
+            <a:schemeClr val="bg1">
+              <a:lumMod val="95000"/>
+            </a:schemeClr>
+          </a:solidFill>
+          <a:ln>
+            <a:solidFill>
+              <a:schemeClr val="tx1"/>
+            </a:solidFill>
+          </a:ln>
+        </p:spPr>
+        <p:style>
+          <a:lnRef idx="2">
+            <a:schemeClr val="accent1">
+              <a:shade val="15000"/>
+            </a:schemeClr>
+          </a:lnRef>
+          <a:fillRef idx="1">
+            <a:schemeClr val="accent1"/>
+          </a:fillRef>
+          <a:effectRef idx="0">
+            <a:schemeClr val="accent1"/>
+          </a:effectRef>
+          <a:fontRef idx="minor">
+            <a:schemeClr val="lt1"/>
+          </a:fontRef>
+        </p:style>
+        <p:txBody>
+          <a:bodyPr rtlCol="0" anchor="ctr"/>
+          <a:lstStyle/>
+          <a:p>
+            <a:pPr algn="ctr"/>
+            <a:r>
+              <a:rPr lang="vi-VN" sz="1300" dirty="0">
+                <a:solidFill>
+                  <a:schemeClr val="tx1"/>
+                </a:solidFill>
+                <a:latin typeface="+mj-lt"/>
+              </a:rPr>
+              <a:t>Câu hỏi văn bản</a:t>
+            </a:r>
+            <a:endParaRPr lang="en-US" sz="1300" dirty="0">
+              <a:solidFill>
+                <a:schemeClr val="tx1"/>
+              </a:solidFill>
+              <a:latin typeface="+mj-lt"/>
+            </a:endParaRPr>
+          </a:p>
+        </p:txBody>
+      </p:sp>
+      <p:sp>
+        <p:nvSpPr>
+          <p:cNvPr id="56" name="Rectangle: Rounded Corners 55">
+            <a:extLst>
+              <a:ext uri="{FF2B5EF4-FFF2-40B4-BE49-F238E27FC236}">
+                <a16:creationId xmlns:a16="http://schemas.microsoft.com/office/drawing/2014/main" id="{C72AD4ED-D215-BCF5-4367-51D1C1768014}"/>
+              </a:ext>
+            </a:extLst>
+          </p:cNvPr>
+          <p:cNvSpPr/>
+          <p:nvPr/>
+        </p:nvSpPr>
+        <p:spPr>
+          <a:xfrm>
+            <a:off x="146304" y="2250948"/>
+            <a:ext cx="1591056" cy="722376"/>
+          </a:xfrm>
+          <a:prstGeom prst="roundRect">
+            <a:avLst/>
+          </a:prstGeom>
+          <a:solidFill>
+            <a:schemeClr val="bg1">
+              <a:lumMod val="95000"/>
+            </a:schemeClr>
+          </a:solidFill>
+          <a:ln>
+            <a:solidFill>
+              <a:schemeClr val="tx1"/>
+            </a:solidFill>
+            <a:prstDash val="dash"/>
+          </a:ln>
+        </p:spPr>
+        <p:style>
+          <a:lnRef idx="2">
+            <a:schemeClr val="accent1">
+              <a:shade val="15000"/>
+            </a:schemeClr>
+          </a:lnRef>
+          <a:fillRef idx="1">
+            <a:schemeClr val="accent1"/>
+          </a:fillRef>
+          <a:effectRef idx="0">
+            <a:schemeClr val="accent1"/>
+          </a:effectRef>
+          <a:fontRef idx="minor">
+            <a:schemeClr val="lt1"/>
+          </a:fontRef>
+        </p:style>
+        <p:txBody>
+          <a:bodyPr rtlCol="0" anchor="ctr"/>
+          <a:lstStyle/>
+          <a:p>
+            <a:pPr algn="ctr"/>
+            <a:r>
+              <a:rPr lang="vi-VN" sz="1300" dirty="0">
+                <a:solidFill>
+                  <a:schemeClr val="tx1"/>
+                </a:solidFill>
+                <a:latin typeface="+mj-lt"/>
+              </a:rPr>
+              <a:t>Xử lý âm thanh</a:t>
+            </a:r>
+          </a:p>
+          <a:p>
+            <a:pPr algn="ctr"/>
+            <a:r>
+              <a:rPr lang="vi-VN" sz="1300" dirty="0">
+                <a:solidFill>
+                  <a:schemeClr val="tx1"/>
+                </a:solidFill>
+                <a:latin typeface="+mj-lt"/>
+              </a:rPr>
+              <a:t>(Khử ồn, phát hiện </a:t>
+            </a:r>
+          </a:p>
+          <a:p>
+            <a:pPr algn="ctr"/>
+            <a:r>
+              <a:rPr lang="vi-VN" sz="1300" dirty="0">
+                <a:solidFill>
+                  <a:schemeClr val="tx1"/>
+                </a:solidFill>
+                <a:latin typeface="+mj-lt"/>
+              </a:rPr>
+              <a:t>câu hỏi…)</a:t>
+            </a:r>
+            <a:endParaRPr lang="en-US" sz="1300" dirty="0">
+              <a:solidFill>
+                <a:schemeClr val="tx1"/>
+              </a:solidFill>
+              <a:latin typeface="+mj-lt"/>
+            </a:endParaRPr>
+          </a:p>
+        </p:txBody>
+      </p:sp>
+      <p:sp>
+        <p:nvSpPr>
+          <p:cNvPr id="57" name="Rectangle: Rounded Corners 56">
+            <a:extLst>
+              <a:ext uri="{FF2B5EF4-FFF2-40B4-BE49-F238E27FC236}">
+                <a16:creationId xmlns:a16="http://schemas.microsoft.com/office/drawing/2014/main" id="{B3349750-6CDB-9E22-4332-CDD7F2259EA3}"/>
+              </a:ext>
+            </a:extLst>
+          </p:cNvPr>
+          <p:cNvSpPr/>
+          <p:nvPr/>
+        </p:nvSpPr>
+        <p:spPr>
+          <a:xfrm>
+            <a:off x="8388052" y="2250948"/>
+            <a:ext cx="1524983" cy="722376"/>
+          </a:xfrm>
+          <a:prstGeom prst="roundRect">
+            <a:avLst/>
+          </a:prstGeom>
+          <a:solidFill>
+            <a:schemeClr val="bg1">
+              <a:lumMod val="95000"/>
+            </a:schemeClr>
+          </a:solidFill>
+          <a:ln>
+            <a:solidFill>
+              <a:schemeClr val="tx1"/>
+            </a:solidFill>
+            <a:prstDash val="dash"/>
+          </a:ln>
+        </p:spPr>
+        <p:style>
+          <a:lnRef idx="2">
+            <a:schemeClr val="accent1">
+              <a:shade val="15000"/>
+            </a:schemeClr>
+          </a:lnRef>
+          <a:fillRef idx="1">
+            <a:schemeClr val="accent1"/>
+          </a:fillRef>
+          <a:effectRef idx="0">
+            <a:schemeClr val="accent1"/>
+          </a:effectRef>
+          <a:fontRef idx="minor">
+            <a:schemeClr val="lt1"/>
+          </a:fontRef>
+        </p:style>
+        <p:txBody>
+          <a:bodyPr rtlCol="0" anchor="ctr"/>
+          <a:lstStyle/>
+          <a:p>
+            <a:pPr algn="ctr"/>
+            <a:r>
+              <a:rPr lang="vi-VN" sz="1300" dirty="0">
+                <a:solidFill>
+                  <a:schemeClr val="tx1"/>
+                </a:solidFill>
+                <a:latin typeface="+mj-lt"/>
+              </a:rPr>
+              <a:t>Trích xuất thông tin liên quan</a:t>
+            </a:r>
+            <a:endParaRPr lang="en-US" sz="1300" dirty="0">
+              <a:solidFill>
+                <a:schemeClr val="tx1"/>
+              </a:solidFill>
+              <a:latin typeface="+mj-lt"/>
+            </a:endParaRPr>
+          </a:p>
+        </p:txBody>
+      </p:sp>
+      <p:sp>
+        <p:nvSpPr>
+          <p:cNvPr id="58" name="Cylinder 57">
+            <a:extLst>
+              <a:ext uri="{FF2B5EF4-FFF2-40B4-BE49-F238E27FC236}">
+                <a16:creationId xmlns:a16="http://schemas.microsoft.com/office/drawing/2014/main" id="{1F705B23-A2C5-20CD-FB48-3BF6D93C260F}"/>
+              </a:ext>
+            </a:extLst>
+          </p:cNvPr>
+          <p:cNvSpPr/>
+          <p:nvPr/>
+        </p:nvSpPr>
+        <p:spPr>
+          <a:xfrm>
+            <a:off x="6347700" y="2252472"/>
+            <a:ext cx="1456944" cy="722376"/>
+          </a:xfrm>
+          <a:prstGeom prst="can">
+            <a:avLst>
+              <a:gd name="adj" fmla="val 13615"/>
+            </a:avLst>
+          </a:prstGeom>
+          <a:solidFill>
+            <a:schemeClr val="bg1">
+              <a:lumMod val="95000"/>
+            </a:schemeClr>
+          </a:solidFill>
+          <a:ln>
+            <a:solidFill>
+              <a:schemeClr val="tx1"/>
+            </a:solidFill>
+          </a:ln>
+        </p:spPr>
+        <p:style>
+          <a:lnRef idx="2">
+            <a:schemeClr val="accent1">
+              <a:shade val="15000"/>
+            </a:schemeClr>
+          </a:lnRef>
+          <a:fillRef idx="1">
+            <a:schemeClr val="accent1"/>
+          </a:fillRef>
+          <a:effectRef idx="0">
+            <a:schemeClr val="accent1"/>
+          </a:effectRef>
+          <a:fontRef idx="minor">
+            <a:schemeClr val="lt1"/>
+          </a:fontRef>
+        </p:style>
+        <p:txBody>
+          <a:bodyPr rtlCol="0" anchor="ctr"/>
+          <a:lstStyle/>
+          <a:p>
+            <a:pPr algn="ctr"/>
+            <a:r>
+              <a:rPr lang="vi-VN" sz="1300" dirty="0">
+                <a:solidFill>
+                  <a:schemeClr val="tx1"/>
+                </a:solidFill>
+                <a:latin typeface="+mj-lt"/>
+              </a:rPr>
+              <a:t>CSDL thông tin người dùng</a:t>
+            </a:r>
+            <a:endParaRPr lang="en-US" sz="1300" dirty="0">
+              <a:solidFill>
+                <a:schemeClr val="tx1"/>
+              </a:solidFill>
+              <a:latin typeface="+mj-lt"/>
+            </a:endParaRPr>
+          </a:p>
+        </p:txBody>
+      </p:sp>
+      <p:sp>
+        <p:nvSpPr>
+          <p:cNvPr id="59" name="Rectangle: Rounded Corners 58">
+            <a:extLst>
+              <a:ext uri="{FF2B5EF4-FFF2-40B4-BE49-F238E27FC236}">
+                <a16:creationId xmlns:a16="http://schemas.microsoft.com/office/drawing/2014/main" id="{260F8AE3-D622-49E0-1D43-B08132CFF553}"/>
+              </a:ext>
+            </a:extLst>
+          </p:cNvPr>
+          <p:cNvSpPr/>
+          <p:nvPr/>
+        </p:nvSpPr>
+        <p:spPr>
+          <a:xfrm>
+            <a:off x="10553140" y="3412236"/>
+            <a:ext cx="1523044" cy="632460"/>
+          </a:xfrm>
+          <a:prstGeom prst="roundRect">
+            <a:avLst/>
+          </a:prstGeom>
+          <a:solidFill>
+            <a:schemeClr val="bg1">
+              <a:lumMod val="95000"/>
+            </a:schemeClr>
+          </a:solidFill>
+          <a:ln>
+            <a:solidFill>
+              <a:schemeClr val="tx1"/>
+            </a:solidFill>
+          </a:ln>
+        </p:spPr>
+        <p:style>
+          <a:lnRef idx="2">
+            <a:schemeClr val="accent1">
+              <a:shade val="15000"/>
+            </a:schemeClr>
+          </a:lnRef>
+          <a:fillRef idx="1">
+            <a:schemeClr val="accent1"/>
+          </a:fillRef>
+          <a:effectRef idx="0">
+            <a:schemeClr val="accent1"/>
+          </a:effectRef>
+          <a:fontRef idx="minor">
+            <a:schemeClr val="lt1"/>
+          </a:fontRef>
+        </p:style>
+        <p:txBody>
+          <a:bodyPr rtlCol="0" anchor="ctr"/>
+          <a:lstStyle/>
+          <a:p>
+            <a:pPr algn="ctr"/>
+            <a:r>
+              <a:rPr lang="vi-VN" sz="1300" dirty="0">
+                <a:solidFill>
+                  <a:schemeClr val="tx1"/>
+                </a:solidFill>
+                <a:latin typeface="+mj-lt"/>
+              </a:rPr>
+              <a:t>Tạo </a:t>
+            </a:r>
+            <a:r>
+              <a:rPr lang="vi-VN" sz="1300" dirty="0" err="1">
+                <a:solidFill>
+                  <a:schemeClr val="tx1"/>
+                </a:solidFill>
+                <a:latin typeface="+mj-lt"/>
+              </a:rPr>
+              <a:t>prompt</a:t>
+            </a:r>
+            <a:endParaRPr lang="vi-VN" sz="1300" dirty="0">
+              <a:solidFill>
+                <a:schemeClr val="tx1"/>
+              </a:solidFill>
+              <a:latin typeface="+mj-lt"/>
+            </a:endParaRPr>
+          </a:p>
+          <a:p>
+            <a:pPr algn="ctr"/>
+            <a:r>
+              <a:rPr lang="vi-VN" sz="1300" dirty="0">
+                <a:solidFill>
+                  <a:schemeClr val="tx1"/>
+                </a:solidFill>
+                <a:latin typeface="+mj-lt"/>
+              </a:rPr>
+              <a:t>hoàn chỉnh</a:t>
+            </a:r>
+            <a:endParaRPr lang="en-US" sz="1300" dirty="0">
+              <a:solidFill>
+                <a:schemeClr val="tx1"/>
+              </a:solidFill>
+              <a:latin typeface="+mj-lt"/>
+            </a:endParaRPr>
+          </a:p>
+        </p:txBody>
+      </p:sp>
+      <p:sp>
+        <p:nvSpPr>
+          <p:cNvPr id="60" name="Cube 59">
+            <a:extLst>
+              <a:ext uri="{FF2B5EF4-FFF2-40B4-BE49-F238E27FC236}">
+                <a16:creationId xmlns:a16="http://schemas.microsoft.com/office/drawing/2014/main" id="{4E3894F2-818C-AE90-D888-94D9BFDCD5B0}"/>
+              </a:ext>
+            </a:extLst>
+          </p:cNvPr>
+          <p:cNvSpPr/>
+          <p:nvPr/>
+        </p:nvSpPr>
+        <p:spPr>
+          <a:xfrm>
+            <a:off x="8386111" y="4418076"/>
+            <a:ext cx="1524983" cy="632460"/>
+          </a:xfrm>
+          <a:prstGeom prst="cube">
+            <a:avLst>
+              <a:gd name="adj" fmla="val 17720"/>
+            </a:avLst>
+          </a:prstGeom>
+          <a:solidFill>
+            <a:schemeClr val="bg1">
+              <a:lumMod val="95000"/>
+            </a:schemeClr>
+          </a:solidFill>
+          <a:ln>
+            <a:solidFill>
+              <a:schemeClr val="tx1"/>
+            </a:solidFill>
+          </a:ln>
+        </p:spPr>
+        <p:style>
+          <a:lnRef idx="2">
+            <a:schemeClr val="accent1">
+              <a:shade val="15000"/>
+            </a:schemeClr>
+          </a:lnRef>
+          <a:fillRef idx="1">
+            <a:schemeClr val="accent1"/>
+          </a:fillRef>
+          <a:effectRef idx="0">
+            <a:schemeClr val="accent1"/>
+          </a:effectRef>
+          <a:fontRef idx="minor">
+            <a:schemeClr val="lt1"/>
+          </a:fontRef>
+        </p:style>
+        <p:txBody>
+          <a:bodyPr rtlCol="0" anchor="ctr"/>
+          <a:lstStyle/>
+          <a:p>
+            <a:pPr algn="ctr"/>
+            <a:r>
+              <a:rPr lang="vi-VN" sz="1300" dirty="0">
+                <a:solidFill>
+                  <a:schemeClr val="tx1"/>
+                </a:solidFill>
+                <a:latin typeface="+mj-lt"/>
+              </a:rPr>
+              <a:t>LLM</a:t>
+            </a:r>
+            <a:endParaRPr lang="en-US" sz="1300" dirty="0">
+              <a:solidFill>
+                <a:schemeClr val="tx1"/>
+              </a:solidFill>
+              <a:latin typeface="+mj-lt"/>
+            </a:endParaRPr>
+          </a:p>
+        </p:txBody>
+      </p:sp>
+      <p:sp>
+        <p:nvSpPr>
+          <p:cNvPr id="61" name="Rectangle: Rounded Corners 60">
+            <a:extLst>
+              <a:ext uri="{FF2B5EF4-FFF2-40B4-BE49-F238E27FC236}">
+                <a16:creationId xmlns:a16="http://schemas.microsoft.com/office/drawing/2014/main" id="{1E4DF0B0-F346-2566-481E-A85FB3B965F7}"/>
+              </a:ext>
+            </a:extLst>
+          </p:cNvPr>
+          <p:cNvSpPr/>
+          <p:nvPr/>
+        </p:nvSpPr>
+        <p:spPr>
+          <a:xfrm>
+            <a:off x="4395216" y="3412236"/>
+            <a:ext cx="1952484" cy="632460"/>
+          </a:xfrm>
+          <a:prstGeom prst="roundRect">
+            <a:avLst/>
+          </a:prstGeom>
+          <a:solidFill>
+            <a:schemeClr val="bg1">
+              <a:lumMod val="95000"/>
+            </a:schemeClr>
+          </a:solidFill>
+          <a:ln>
+            <a:solidFill>
+              <a:schemeClr val="tx1"/>
+            </a:solidFill>
+            <a:prstDash val="dash"/>
+          </a:ln>
+        </p:spPr>
+        <p:style>
+          <a:lnRef idx="2">
+            <a:schemeClr val="accent1">
+              <a:shade val="15000"/>
+            </a:schemeClr>
+          </a:lnRef>
+          <a:fillRef idx="1">
+            <a:schemeClr val="accent1"/>
+          </a:fillRef>
+          <a:effectRef idx="0">
+            <a:schemeClr val="accent1"/>
+          </a:effectRef>
+          <a:fontRef idx="minor">
+            <a:schemeClr val="lt1"/>
+          </a:fontRef>
+        </p:style>
+        <p:txBody>
+          <a:bodyPr rtlCol="0" anchor="ctr"/>
+          <a:lstStyle/>
+          <a:p>
+            <a:pPr algn="ctr"/>
+            <a:r>
+              <a:rPr lang="vi-VN" sz="1300" dirty="0">
+                <a:solidFill>
+                  <a:schemeClr val="tx1"/>
+                </a:solidFill>
+                <a:latin typeface="+mj-lt"/>
+              </a:rPr>
+              <a:t>Bộ phân tích hành vi người dùng</a:t>
+            </a:r>
+          </a:p>
+        </p:txBody>
+      </p:sp>
+      <p:sp>
+        <p:nvSpPr>
+          <p:cNvPr id="62" name="Cylinder 61">
+            <a:extLst>
+              <a:ext uri="{FF2B5EF4-FFF2-40B4-BE49-F238E27FC236}">
+                <a16:creationId xmlns:a16="http://schemas.microsoft.com/office/drawing/2014/main" id="{C8A51440-C671-1AD6-13D0-D3C9616FFD12}"/>
+              </a:ext>
+            </a:extLst>
+          </p:cNvPr>
+          <p:cNvSpPr/>
+          <p:nvPr/>
+        </p:nvSpPr>
+        <p:spPr>
+          <a:xfrm>
+            <a:off x="4395215" y="2252472"/>
+            <a:ext cx="1456944" cy="722376"/>
+          </a:xfrm>
+          <a:prstGeom prst="can">
+            <a:avLst>
+              <a:gd name="adj" fmla="val 13615"/>
+            </a:avLst>
+          </a:prstGeom>
+          <a:solidFill>
+            <a:schemeClr val="bg1">
+              <a:lumMod val="95000"/>
+            </a:schemeClr>
+          </a:solidFill>
+          <a:ln>
+            <a:solidFill>
+              <a:schemeClr val="tx1"/>
+            </a:solidFill>
+          </a:ln>
+        </p:spPr>
+        <p:style>
+          <a:lnRef idx="2">
+            <a:schemeClr val="accent1">
+              <a:shade val="15000"/>
+            </a:schemeClr>
+          </a:lnRef>
+          <a:fillRef idx="1">
+            <a:schemeClr val="accent1"/>
+          </a:fillRef>
+          <a:effectRef idx="0">
+            <a:schemeClr val="accent1"/>
+          </a:effectRef>
+          <a:fontRef idx="minor">
+            <a:schemeClr val="lt1"/>
+          </a:fontRef>
+        </p:style>
+        <p:txBody>
+          <a:bodyPr rtlCol="0" anchor="ctr"/>
+          <a:lstStyle/>
+          <a:p>
+            <a:pPr algn="ctr"/>
+            <a:r>
+              <a:rPr lang="vi-VN" sz="1300" dirty="0">
+                <a:solidFill>
+                  <a:schemeClr val="tx1"/>
+                </a:solidFill>
+                <a:latin typeface="+mj-lt"/>
+              </a:rPr>
+              <a:t>CSDL trò chuyện và tương tác</a:t>
+            </a:r>
+            <a:endParaRPr lang="en-US" sz="1300" dirty="0">
+              <a:solidFill>
+                <a:schemeClr val="tx1"/>
+              </a:solidFill>
+              <a:latin typeface="+mj-lt"/>
+            </a:endParaRPr>
+          </a:p>
+        </p:txBody>
+      </p:sp>
+      <p:sp>
+        <p:nvSpPr>
+          <p:cNvPr id="63" name="Rectangle: Rounded Corners 62">
+            <a:extLst>
+              <a:ext uri="{FF2B5EF4-FFF2-40B4-BE49-F238E27FC236}">
+                <a16:creationId xmlns:a16="http://schemas.microsoft.com/office/drawing/2014/main" id="{3899F772-0CBC-E699-B579-32F74EB3BB74}"/>
+              </a:ext>
+            </a:extLst>
+          </p:cNvPr>
+          <p:cNvSpPr/>
+          <p:nvPr/>
+        </p:nvSpPr>
+        <p:spPr>
+          <a:xfrm>
+            <a:off x="4395215" y="4482084"/>
+            <a:ext cx="1952484" cy="632460"/>
+          </a:xfrm>
+          <a:prstGeom prst="roundRect">
+            <a:avLst/>
+          </a:prstGeom>
+          <a:solidFill>
+            <a:schemeClr val="bg1">
+              <a:lumMod val="95000"/>
+            </a:schemeClr>
+          </a:solidFill>
+          <a:ln>
+            <a:solidFill>
+              <a:schemeClr val="tx1"/>
+            </a:solidFill>
+            <a:prstDash val="dash"/>
+          </a:ln>
+        </p:spPr>
+        <p:style>
+          <a:lnRef idx="2">
+            <a:schemeClr val="accent1">
+              <a:shade val="15000"/>
+            </a:schemeClr>
+          </a:lnRef>
+          <a:fillRef idx="1">
+            <a:schemeClr val="accent1"/>
+          </a:fillRef>
+          <a:effectRef idx="0">
+            <a:schemeClr val="accent1"/>
+          </a:effectRef>
+          <a:fontRef idx="minor">
+            <a:schemeClr val="lt1"/>
+          </a:fontRef>
+        </p:style>
+        <p:txBody>
+          <a:bodyPr rtlCol="0" anchor="ctr"/>
+          <a:lstStyle/>
+          <a:p>
+            <a:pPr algn="ctr"/>
+            <a:r>
+              <a:rPr lang="vi-VN" sz="1300" dirty="0">
+                <a:solidFill>
+                  <a:schemeClr val="tx1"/>
+                </a:solidFill>
+                <a:latin typeface="+mj-lt"/>
+              </a:rPr>
+              <a:t>Bộ phân tích cú pháp và dữ liệu phản hồi</a:t>
+            </a:r>
+          </a:p>
+        </p:txBody>
+      </p:sp>
+      <p:sp>
+        <p:nvSpPr>
+          <p:cNvPr id="64" name="Rectangle: Rounded Corners 63">
+            <a:extLst>
+              <a:ext uri="{FF2B5EF4-FFF2-40B4-BE49-F238E27FC236}">
+                <a16:creationId xmlns:a16="http://schemas.microsoft.com/office/drawing/2014/main" id="{8204FD2E-58F6-6EA4-7B0A-E03496EDED60}"/>
+              </a:ext>
+            </a:extLst>
+          </p:cNvPr>
+          <p:cNvSpPr/>
+          <p:nvPr/>
+        </p:nvSpPr>
+        <p:spPr>
+          <a:xfrm>
+            <a:off x="146304" y="3380232"/>
+            <a:ext cx="1591056" cy="2737104"/>
+          </a:xfrm>
+          <a:prstGeom prst="roundRect">
+            <a:avLst/>
+          </a:prstGeom>
+          <a:solidFill>
+            <a:schemeClr val="bg1">
+              <a:lumMod val="95000"/>
+            </a:schemeClr>
+          </a:solidFill>
+          <a:ln>
+            <a:solidFill>
+              <a:schemeClr val="tx1"/>
+            </a:solidFill>
+          </a:ln>
+        </p:spPr>
+        <p:style>
+          <a:lnRef idx="2">
+            <a:schemeClr val="accent1">
+              <a:shade val="15000"/>
+            </a:schemeClr>
+          </a:lnRef>
+          <a:fillRef idx="1">
+            <a:schemeClr val="accent1"/>
+          </a:fillRef>
+          <a:effectRef idx="0">
+            <a:schemeClr val="accent1"/>
+          </a:effectRef>
+          <a:fontRef idx="minor">
+            <a:schemeClr val="lt1"/>
+          </a:fontRef>
+        </p:style>
+        <p:txBody>
+          <a:bodyPr rtlCol="0" anchor="ctr"/>
+          <a:lstStyle/>
+          <a:p>
+            <a:pPr algn="ctr"/>
+            <a:r>
+              <a:rPr lang="vi-VN" sz="1300" dirty="0">
+                <a:solidFill>
+                  <a:schemeClr val="tx1"/>
+                </a:solidFill>
+                <a:latin typeface="+mj-lt"/>
+              </a:rPr>
+              <a:t>Các chức năng người dùng tùy ý</a:t>
+            </a:r>
+          </a:p>
+          <a:p>
+            <a:pPr algn="ctr"/>
+            <a:r>
+              <a:rPr lang="vi-VN" sz="1300" dirty="0">
+                <a:solidFill>
+                  <a:schemeClr val="tx1"/>
+                </a:solidFill>
+                <a:latin typeface="+mj-lt"/>
+              </a:rPr>
+              <a:t>***</a:t>
+            </a:r>
+          </a:p>
+          <a:p>
+            <a:r>
+              <a:rPr lang="vi-VN" sz="1300" dirty="0">
+                <a:solidFill>
+                  <a:schemeClr val="tx1"/>
+                </a:solidFill>
+                <a:latin typeface="+mj-lt"/>
+              </a:rPr>
+              <a:t>- Đăng nhập/xuất</a:t>
+            </a:r>
+          </a:p>
+          <a:p>
+            <a:r>
+              <a:rPr lang="vi-VN" sz="1300" dirty="0">
+                <a:solidFill>
+                  <a:schemeClr val="tx1"/>
+                </a:solidFill>
+                <a:latin typeface="+mj-lt"/>
+              </a:rPr>
+              <a:t>- Thay đổi LLM, các chỉ số…</a:t>
+            </a:r>
+          </a:p>
+          <a:p>
+            <a:r>
+              <a:rPr lang="vi-VN" sz="1300" dirty="0">
+                <a:solidFill>
+                  <a:schemeClr val="tx1"/>
+                </a:solidFill>
+                <a:latin typeface="+mj-lt"/>
+              </a:rPr>
+              <a:t>- Xóa/tạo hội thoại</a:t>
+            </a:r>
+          </a:p>
+          <a:p>
+            <a:r>
+              <a:rPr lang="vi-VN" sz="1300" dirty="0">
+                <a:solidFill>
+                  <a:schemeClr val="tx1"/>
+                </a:solidFill>
+                <a:latin typeface="+mj-lt"/>
+              </a:rPr>
+              <a:t>- Cài đặt giao diện</a:t>
+            </a:r>
+          </a:p>
+          <a:p>
+            <a:pPr algn="ctr"/>
+            <a:r>
+              <a:rPr lang="vi-VN" sz="1300" dirty="0">
+                <a:solidFill>
+                  <a:schemeClr val="tx1"/>
+                </a:solidFill>
+                <a:latin typeface="+mj-lt"/>
+              </a:rPr>
+              <a:t>…</a:t>
+            </a:r>
+            <a:endParaRPr lang="en-US" sz="1300" dirty="0">
+              <a:solidFill>
+                <a:schemeClr val="tx1"/>
+              </a:solidFill>
+              <a:latin typeface="+mj-lt"/>
+            </a:endParaRPr>
+          </a:p>
+        </p:txBody>
+      </p:sp>
+      <p:sp>
+        <p:nvSpPr>
+          <p:cNvPr id="65" name="Rectangle: Rounded Corners 64">
+            <a:extLst>
+              <a:ext uri="{FF2B5EF4-FFF2-40B4-BE49-F238E27FC236}">
+                <a16:creationId xmlns:a16="http://schemas.microsoft.com/office/drawing/2014/main" id="{6BD43CE7-DA56-A790-271E-5D66D054134E}"/>
+              </a:ext>
+            </a:extLst>
+          </p:cNvPr>
+          <p:cNvSpPr/>
+          <p:nvPr/>
+        </p:nvSpPr>
+        <p:spPr>
+          <a:xfrm>
+            <a:off x="8388051" y="3412236"/>
+            <a:ext cx="1511805" cy="632460"/>
+          </a:xfrm>
+          <a:prstGeom prst="roundRect">
+            <a:avLst/>
+          </a:prstGeom>
+          <a:solidFill>
+            <a:schemeClr val="bg1">
+              <a:lumMod val="95000"/>
+            </a:schemeClr>
+          </a:solidFill>
+          <a:ln>
+            <a:solidFill>
+              <a:schemeClr val="tx1"/>
+            </a:solidFill>
+          </a:ln>
+        </p:spPr>
+        <p:style>
+          <a:lnRef idx="2">
+            <a:schemeClr val="accent1">
+              <a:shade val="15000"/>
+            </a:schemeClr>
+          </a:lnRef>
+          <a:fillRef idx="1">
+            <a:schemeClr val="accent1"/>
+          </a:fillRef>
+          <a:effectRef idx="0">
+            <a:schemeClr val="accent1"/>
+          </a:effectRef>
+          <a:fontRef idx="minor">
+            <a:schemeClr val="lt1"/>
+          </a:fontRef>
+        </p:style>
+        <p:txBody>
+          <a:bodyPr rtlCol="0" anchor="ctr"/>
+          <a:lstStyle/>
+          <a:p>
+            <a:pPr algn="ctr"/>
+            <a:r>
+              <a:rPr lang="vi-VN" sz="1300" dirty="0">
+                <a:solidFill>
+                  <a:schemeClr val="tx1"/>
+                </a:solidFill>
+                <a:latin typeface="+mj-lt"/>
+              </a:rPr>
+              <a:t>Thông tin ngữ cảnh trò chuyện</a:t>
+            </a:r>
+            <a:endParaRPr lang="en-US" sz="1300" dirty="0">
+              <a:solidFill>
+                <a:schemeClr val="tx1"/>
+              </a:solidFill>
+              <a:latin typeface="+mj-lt"/>
+            </a:endParaRPr>
+          </a:p>
+        </p:txBody>
+      </p:sp>
+      <p:sp>
+        <p:nvSpPr>
+          <p:cNvPr id="66" name="Rectangle: Rounded Corners 65">
+            <a:extLst>
+              <a:ext uri="{FF2B5EF4-FFF2-40B4-BE49-F238E27FC236}">
+                <a16:creationId xmlns:a16="http://schemas.microsoft.com/office/drawing/2014/main" id="{CB2024C0-8DF9-D283-83F9-B1C79C487FAC}"/>
+              </a:ext>
+            </a:extLst>
+          </p:cNvPr>
+          <p:cNvSpPr/>
+          <p:nvPr/>
+        </p:nvSpPr>
+        <p:spPr>
+          <a:xfrm>
+            <a:off x="4395216" y="5484876"/>
+            <a:ext cx="3409427" cy="632460"/>
+          </a:xfrm>
+          <a:prstGeom prst="roundRect">
+            <a:avLst/>
+          </a:prstGeom>
+          <a:solidFill>
+            <a:schemeClr val="bg1">
+              <a:lumMod val="95000"/>
+            </a:schemeClr>
+          </a:solidFill>
+          <a:ln>
+            <a:solidFill>
+              <a:schemeClr val="tx1"/>
+            </a:solidFill>
+            <a:prstDash val="dash"/>
+          </a:ln>
+        </p:spPr>
+        <p:style>
+          <a:lnRef idx="2">
+            <a:schemeClr val="accent1">
+              <a:shade val="15000"/>
+            </a:schemeClr>
+          </a:lnRef>
+          <a:fillRef idx="1">
+            <a:schemeClr val="accent1"/>
+          </a:fillRef>
+          <a:effectRef idx="0">
+            <a:schemeClr val="accent1"/>
+          </a:effectRef>
+          <a:fontRef idx="minor">
+            <a:schemeClr val="lt1"/>
+          </a:fontRef>
+        </p:style>
+        <p:txBody>
+          <a:bodyPr rtlCol="0" anchor="ctr"/>
+          <a:lstStyle/>
+          <a:p>
+            <a:pPr algn="ctr"/>
+            <a:r>
+              <a:rPr lang="vi-VN" sz="1300" dirty="0">
+                <a:solidFill>
+                  <a:schemeClr val="tx1"/>
+                </a:solidFill>
+                <a:latin typeface="+mj-lt"/>
+              </a:rPr>
+              <a:t>Xử lý sau phản hồi và</a:t>
+            </a:r>
+          </a:p>
+          <a:p>
+            <a:pPr algn="ctr"/>
+            <a:r>
+              <a:rPr lang="vi-VN" sz="1300" dirty="0">
+                <a:solidFill>
+                  <a:schemeClr val="tx1"/>
+                </a:solidFill>
+                <a:latin typeface="+mj-lt"/>
+              </a:rPr>
+              <a:t>trích xuất thông tin</a:t>
+            </a:r>
+          </a:p>
+        </p:txBody>
+      </p:sp>
+      <p:sp>
+        <p:nvSpPr>
+          <p:cNvPr id="67" name="Cube 66">
+            <a:extLst>
+              <a:ext uri="{FF2B5EF4-FFF2-40B4-BE49-F238E27FC236}">
+                <a16:creationId xmlns:a16="http://schemas.microsoft.com/office/drawing/2014/main" id="{C1F2C232-53FA-4E1A-2D61-CF95F7E39DAF}"/>
+              </a:ext>
+            </a:extLst>
+          </p:cNvPr>
+          <p:cNvSpPr/>
+          <p:nvPr/>
+        </p:nvSpPr>
+        <p:spPr>
+          <a:xfrm>
+            <a:off x="2298985" y="5484876"/>
+            <a:ext cx="1524983" cy="632460"/>
+          </a:xfrm>
+          <a:prstGeom prst="cube">
+            <a:avLst>
+              <a:gd name="adj" fmla="val 17720"/>
+            </a:avLst>
+          </a:prstGeom>
+          <a:solidFill>
+            <a:schemeClr val="bg1">
+              <a:lumMod val="95000"/>
+            </a:schemeClr>
+          </a:solidFill>
+          <a:ln>
+            <a:solidFill>
+              <a:schemeClr val="tx1"/>
+            </a:solidFill>
+          </a:ln>
+        </p:spPr>
+        <p:style>
+          <a:lnRef idx="2">
+            <a:schemeClr val="accent1">
+              <a:shade val="15000"/>
+            </a:schemeClr>
+          </a:lnRef>
+          <a:fillRef idx="1">
+            <a:schemeClr val="accent1"/>
+          </a:fillRef>
+          <a:effectRef idx="0">
+            <a:schemeClr val="accent1"/>
+          </a:effectRef>
+          <a:fontRef idx="minor">
+            <a:schemeClr val="lt1"/>
+          </a:fontRef>
+        </p:style>
+        <p:txBody>
+          <a:bodyPr rtlCol="0" anchor="ctr"/>
+          <a:lstStyle/>
+          <a:p>
+            <a:pPr algn="ctr"/>
+            <a:r>
+              <a:rPr lang="vi-VN" sz="1300" dirty="0">
+                <a:solidFill>
+                  <a:schemeClr val="tx1"/>
+                </a:solidFill>
+                <a:latin typeface="+mj-lt"/>
+              </a:rPr>
+              <a:t>LLM</a:t>
+            </a:r>
+            <a:endParaRPr lang="en-US" sz="1300" dirty="0">
+              <a:solidFill>
+                <a:schemeClr val="tx1"/>
+              </a:solidFill>
+              <a:latin typeface="+mj-lt"/>
+            </a:endParaRPr>
           </a:p>
         </p:txBody>
       </p:sp>
     </p:spTree>
     <p:extLst>
       <p:ext uri="{BB962C8B-B14F-4D97-AF65-F5344CB8AC3E}">
-        <p14:creationId xmlns:p14="http://schemas.microsoft.com/office/powerpoint/2010/main" val="365958809"/>
+        <p14:creationId xmlns:p14="http://schemas.microsoft.com/office/powerpoint/2010/main" val="3927588064"/>
       </p:ext>
     </p:extLst>
   </p:cSld>
@@ -6032,112 +7858,12 @@
           <a:chExt cx="0" cy="0"/>
         </a:xfrm>
       </p:grpSpPr>
-      <p:sp>
-        <p:nvSpPr>
-          <p:cNvPr id="2" name="TextBox 1">
-            <a:extLst>
-              <a:ext uri="{FF2B5EF4-FFF2-40B4-BE49-F238E27FC236}">
-                <a16:creationId xmlns:a16="http://schemas.microsoft.com/office/drawing/2014/main" id="{66497829-D8FF-F2E4-0A7A-09423295FBEA}"/>
-              </a:ext>
-            </a:extLst>
-          </p:cNvPr>
-          <p:cNvSpPr txBox="1"/>
-          <p:nvPr/>
-        </p:nvSpPr>
-        <p:spPr>
-          <a:xfrm>
-            <a:off x="591671" y="605118"/>
-            <a:ext cx="3809056" cy="369332"/>
-          </a:xfrm>
-          <a:prstGeom prst="rect">
-            <a:avLst/>
-          </a:prstGeom>
-          <a:noFill/>
-        </p:spPr>
-        <p:txBody>
-          <a:bodyPr wrap="none" rtlCol="0">
-            <a:spAutoFit/>
-          </a:bodyPr>
-          <a:lstStyle/>
-          <a:p>
-            <a:r>
-              <a:rPr lang="en-US" dirty="0" err="1"/>
-              <a:t>Hình</a:t>
-            </a:r>
-            <a:r>
-              <a:rPr lang="en-US" dirty="0"/>
-              <a:t> </a:t>
-            </a:r>
-            <a:r>
-              <a:rPr lang="en-US" dirty="0" err="1"/>
-              <a:t>mô</a:t>
-            </a:r>
-            <a:r>
-              <a:rPr lang="en-US" dirty="0"/>
-              <a:t> </a:t>
-            </a:r>
-            <a:r>
-              <a:rPr lang="en-US" dirty="0" err="1"/>
-              <a:t>tả</a:t>
-            </a:r>
-            <a:r>
-              <a:rPr lang="en-US" dirty="0"/>
-              <a:t> </a:t>
-            </a:r>
-            <a:r>
-              <a:rPr lang="en-US" dirty="0" err="1"/>
-              <a:t>quá</a:t>
-            </a:r>
-            <a:r>
-              <a:rPr lang="en-US" dirty="0"/>
-              <a:t> </a:t>
-            </a:r>
-            <a:r>
-              <a:rPr lang="en-US" dirty="0" err="1"/>
-              <a:t>trình</a:t>
-            </a:r>
-            <a:r>
-              <a:rPr lang="en-US" dirty="0"/>
-              <a:t> </a:t>
-            </a:r>
-            <a:r>
-              <a:rPr lang="en-US" dirty="0" err="1"/>
-              <a:t>thu</a:t>
-            </a:r>
-            <a:r>
-              <a:rPr lang="en-US" dirty="0"/>
-              <a:t> </a:t>
-            </a:r>
-            <a:r>
-              <a:rPr lang="en-US" dirty="0" err="1"/>
-              <a:t>thập</a:t>
-            </a:r>
-            <a:r>
-              <a:rPr lang="en-US" dirty="0"/>
-              <a:t> </a:t>
-            </a:r>
-            <a:r>
-              <a:rPr lang="en-US" dirty="0" err="1"/>
-              <a:t>dữ</a:t>
-            </a:r>
-            <a:r>
-              <a:rPr lang="en-US" dirty="0"/>
-              <a:t> </a:t>
-            </a:r>
-            <a:r>
-              <a:rPr lang="en-US" dirty="0" err="1"/>
-              <a:t>liệu</a:t>
-            </a:r>
-            <a:endParaRPr lang="en-US" dirty="0"/>
-          </a:p>
-        </p:txBody>
-      </p:sp>
       <p:pic>
         <p:nvPicPr>
-          <p:cNvPr id="5" name="Picture 4" descr="SA stack of books with a bookmark">
-            <a:extLst>
-              <a:ext uri="{FF2B5EF4-FFF2-40B4-BE49-F238E27FC236}">
-                <a16:creationId xmlns:a16="http://schemas.microsoft.com/office/drawing/2014/main" id="{6E3F6604-BA07-4786-C6BC-5C1375AD7895}"/>
+          <p:cNvPr id="3" name="Picture 2">
+            <a:extLst>
+              <a:ext uri="{FF2B5EF4-FFF2-40B4-BE49-F238E27FC236}">
+                <a16:creationId xmlns:a16="http://schemas.microsoft.com/office/drawing/2014/main" id="{48DCA111-F1F4-4BD9-90EC-77B7AE2010FE}"/>
               </a:ext>
             </a:extLst>
           </p:cNvPr>
@@ -6147,406 +7873,25 @@
           <p:nvPr/>
         </p:nvPicPr>
         <p:blipFill>
-          <a:blip r:embed="rId2">
-            <a:extLst>
-              <a:ext uri="{28A0092B-C50C-407E-A947-70E740481C1C}">
-                <a14:useLocalDpi xmlns:a14="http://schemas.microsoft.com/office/drawing/2010/main" val="0"/>
-              </a:ext>
-            </a:extLst>
-          </a:blip>
+          <a:blip r:embed="rId2"/>
           <a:stretch>
             <a:fillRect/>
           </a:stretch>
         </p:blipFill>
         <p:spPr>
           <a:xfrm>
-            <a:off x="2053839" y="3074508"/>
-            <a:ext cx="2346888" cy="2234282"/>
+            <a:off x="0" y="0"/>
+            <a:ext cx="9519920" cy="6845275"/>
           </a:xfrm>
           <a:prstGeom prst="rect">
             <a:avLst/>
           </a:prstGeom>
         </p:spPr>
       </p:pic>
-      <p:sp>
-        <p:nvSpPr>
-          <p:cNvPr id="6" name="TextBox 5">
-            <a:extLst>
-              <a:ext uri="{FF2B5EF4-FFF2-40B4-BE49-F238E27FC236}">
-                <a16:creationId xmlns:a16="http://schemas.microsoft.com/office/drawing/2014/main" id="{D6E64CA9-55C8-1D4D-D10E-4CC1A663CD46}"/>
-              </a:ext>
-            </a:extLst>
-          </p:cNvPr>
-          <p:cNvSpPr txBox="1"/>
-          <p:nvPr/>
-        </p:nvSpPr>
-        <p:spPr>
-          <a:xfrm>
-            <a:off x="2412013" y="2435597"/>
-            <a:ext cx="1717008" cy="786754"/>
-          </a:xfrm>
-          <a:prstGeom prst="rect">
-            <a:avLst/>
-          </a:prstGeom>
-          <a:noFill/>
-        </p:spPr>
-        <p:txBody>
-          <a:bodyPr wrap="none" rtlCol="0">
-            <a:spAutoFit/>
-          </a:bodyPr>
-          <a:lstStyle/>
-          <a:p>
-            <a:pPr algn="ctr">
-              <a:lnSpc>
-                <a:spcPct val="150000"/>
-              </a:lnSpc>
-            </a:pPr>
-            <a:r>
-              <a:rPr lang="en-US" sz="1600" b="1" dirty="0" err="1">
-                <a:latin typeface="Times New Roman" panose="02020603050405020304" pitchFamily="18" charset="0"/>
-                <a:cs typeface="Times New Roman" panose="02020603050405020304" pitchFamily="18" charset="0"/>
-              </a:rPr>
-              <a:t>Sách</a:t>
-            </a:r>
-            <a:r>
-              <a:rPr lang="en-US" sz="1600" b="1" dirty="0">
-                <a:latin typeface="Times New Roman" panose="02020603050405020304" pitchFamily="18" charset="0"/>
-                <a:cs typeface="Times New Roman" panose="02020603050405020304" pitchFamily="18" charset="0"/>
-              </a:rPr>
-              <a:t> </a:t>
-            </a:r>
-            <a:r>
-              <a:rPr lang="en-US" sz="1600" b="1" dirty="0" err="1">
-                <a:latin typeface="Times New Roman" panose="02020603050405020304" pitchFamily="18" charset="0"/>
-                <a:cs typeface="Times New Roman" panose="02020603050405020304" pitchFamily="18" charset="0"/>
-              </a:rPr>
-              <a:t>giáo</a:t>
-            </a:r>
-            <a:r>
-              <a:rPr lang="en-US" sz="1600" b="1" dirty="0">
-                <a:latin typeface="Times New Roman" panose="02020603050405020304" pitchFamily="18" charset="0"/>
-                <a:cs typeface="Times New Roman" panose="02020603050405020304" pitchFamily="18" charset="0"/>
-              </a:rPr>
-              <a:t> khoa</a:t>
-            </a:r>
-          </a:p>
-          <a:p>
-            <a:pPr algn="ctr">
-              <a:lnSpc>
-                <a:spcPct val="150000"/>
-              </a:lnSpc>
-            </a:pPr>
-            <a:r>
-              <a:rPr lang="en-US" sz="1600" b="1" dirty="0" err="1">
-                <a:latin typeface="Times New Roman" panose="02020603050405020304" pitchFamily="18" charset="0"/>
-                <a:cs typeface="Times New Roman" panose="02020603050405020304" pitchFamily="18" charset="0"/>
-              </a:rPr>
-              <a:t>Lịch</a:t>
-            </a:r>
-            <a:r>
-              <a:rPr lang="en-US" sz="1600" b="1" dirty="0">
-                <a:latin typeface="Times New Roman" panose="02020603050405020304" pitchFamily="18" charset="0"/>
-                <a:cs typeface="Times New Roman" panose="02020603050405020304" pitchFamily="18" charset="0"/>
-              </a:rPr>
-              <a:t> </a:t>
-            </a:r>
-            <a:r>
-              <a:rPr lang="en-US" sz="1600" b="1" dirty="0" err="1">
-                <a:latin typeface="Times New Roman" panose="02020603050405020304" pitchFamily="18" charset="0"/>
-                <a:cs typeface="Times New Roman" panose="02020603050405020304" pitchFamily="18" charset="0"/>
-              </a:rPr>
-              <a:t>sử</a:t>
-            </a:r>
-            <a:r>
-              <a:rPr lang="en-US" sz="1600" b="1" dirty="0">
-                <a:latin typeface="Times New Roman" panose="02020603050405020304" pitchFamily="18" charset="0"/>
-                <a:cs typeface="Times New Roman" panose="02020603050405020304" pitchFamily="18" charset="0"/>
-              </a:rPr>
-              <a:t> Việt Nam</a:t>
-            </a:r>
-          </a:p>
-        </p:txBody>
-      </p:sp>
-      <p:sp>
-        <p:nvSpPr>
-          <p:cNvPr id="7" name="Cylinder 6">
-            <a:extLst>
-              <a:ext uri="{FF2B5EF4-FFF2-40B4-BE49-F238E27FC236}">
-                <a16:creationId xmlns:a16="http://schemas.microsoft.com/office/drawing/2014/main" id="{332FD407-45B1-8B63-03C2-2931E3555CE3}"/>
-              </a:ext>
-            </a:extLst>
-          </p:cNvPr>
-          <p:cNvSpPr/>
-          <p:nvPr/>
-        </p:nvSpPr>
-        <p:spPr>
-          <a:xfrm>
-            <a:off x="8005949" y="2779708"/>
-            <a:ext cx="2346887" cy="2823882"/>
-          </a:xfrm>
-          <a:prstGeom prst="can">
-            <a:avLst/>
-          </a:prstGeom>
-          <a:solidFill>
-            <a:schemeClr val="bg2"/>
-          </a:solidFill>
-          <a:ln>
-            <a:solidFill>
-              <a:schemeClr val="tx1"/>
-            </a:solidFill>
-          </a:ln>
-        </p:spPr>
-        <p:style>
-          <a:lnRef idx="2">
-            <a:schemeClr val="accent1">
-              <a:shade val="15000"/>
-            </a:schemeClr>
-          </a:lnRef>
-          <a:fillRef idx="1">
-            <a:schemeClr val="accent1"/>
-          </a:fillRef>
-          <a:effectRef idx="0">
-            <a:schemeClr val="accent1"/>
-          </a:effectRef>
-          <a:fontRef idx="minor">
-            <a:schemeClr val="lt1"/>
-          </a:fontRef>
-        </p:style>
-        <p:txBody>
-          <a:bodyPr rtlCol="0" anchor="ctr"/>
-          <a:lstStyle/>
-          <a:p>
-            <a:pPr algn="ctr">
-              <a:lnSpc>
-                <a:spcPct val="150000"/>
-              </a:lnSpc>
-            </a:pPr>
-            <a:r>
-              <a:rPr lang="en-US" sz="1600" b="1" dirty="0">
-                <a:solidFill>
-                  <a:schemeClr val="tx1"/>
-                </a:solidFill>
-                <a:latin typeface="Times New Roman" panose="02020603050405020304" pitchFamily="18" charset="0"/>
-                <a:cs typeface="Times New Roman" panose="02020603050405020304" pitchFamily="18" charset="0"/>
-              </a:rPr>
-              <a:t>Kho </a:t>
-            </a:r>
-            <a:r>
-              <a:rPr lang="en-US" sz="1600" b="1" dirty="0" err="1">
-                <a:solidFill>
-                  <a:schemeClr val="tx1"/>
-                </a:solidFill>
-                <a:latin typeface="Times New Roman" panose="02020603050405020304" pitchFamily="18" charset="0"/>
-                <a:cs typeface="Times New Roman" panose="02020603050405020304" pitchFamily="18" charset="0"/>
-              </a:rPr>
-              <a:t>tài</a:t>
-            </a:r>
-            <a:r>
-              <a:rPr lang="en-US" sz="1600" b="1" dirty="0">
-                <a:solidFill>
-                  <a:schemeClr val="tx1"/>
-                </a:solidFill>
-                <a:latin typeface="Times New Roman" panose="02020603050405020304" pitchFamily="18" charset="0"/>
-                <a:cs typeface="Times New Roman" panose="02020603050405020304" pitchFamily="18" charset="0"/>
-              </a:rPr>
-              <a:t> </a:t>
-            </a:r>
-            <a:r>
-              <a:rPr lang="en-US" sz="1600" b="1" dirty="0" err="1">
-                <a:solidFill>
-                  <a:schemeClr val="tx1"/>
-                </a:solidFill>
-                <a:latin typeface="Times New Roman" panose="02020603050405020304" pitchFamily="18" charset="0"/>
-                <a:cs typeface="Times New Roman" panose="02020603050405020304" pitchFamily="18" charset="0"/>
-              </a:rPr>
-              <a:t>liệu</a:t>
-            </a:r>
-            <a:endParaRPr lang="en-US" sz="1600" b="1" dirty="0">
-              <a:solidFill>
-                <a:schemeClr val="tx1"/>
-              </a:solidFill>
-              <a:latin typeface="Times New Roman" panose="02020603050405020304" pitchFamily="18" charset="0"/>
-              <a:cs typeface="Times New Roman" panose="02020603050405020304" pitchFamily="18" charset="0"/>
-            </a:endParaRPr>
-          </a:p>
-          <a:p>
-            <a:pPr algn="ctr">
-              <a:lnSpc>
-                <a:spcPct val="150000"/>
-              </a:lnSpc>
-            </a:pPr>
-            <a:r>
-              <a:rPr lang="en-US" sz="1600" b="1" dirty="0" err="1">
-                <a:solidFill>
-                  <a:schemeClr val="tx1"/>
-                </a:solidFill>
-                <a:latin typeface="Times New Roman" panose="02020603050405020304" pitchFamily="18" charset="0"/>
-                <a:cs typeface="Times New Roman" panose="02020603050405020304" pitchFamily="18" charset="0"/>
-              </a:rPr>
-              <a:t>Lịch</a:t>
-            </a:r>
-            <a:r>
-              <a:rPr lang="en-US" sz="1600" b="1" dirty="0">
-                <a:solidFill>
-                  <a:schemeClr val="tx1"/>
-                </a:solidFill>
-                <a:latin typeface="Times New Roman" panose="02020603050405020304" pitchFamily="18" charset="0"/>
-                <a:cs typeface="Times New Roman" panose="02020603050405020304" pitchFamily="18" charset="0"/>
-              </a:rPr>
-              <a:t> </a:t>
-            </a:r>
-            <a:r>
-              <a:rPr lang="en-US" sz="1600" b="1" dirty="0" err="1">
-                <a:solidFill>
-                  <a:schemeClr val="tx1"/>
-                </a:solidFill>
-                <a:latin typeface="Times New Roman" panose="02020603050405020304" pitchFamily="18" charset="0"/>
-                <a:cs typeface="Times New Roman" panose="02020603050405020304" pitchFamily="18" charset="0"/>
-              </a:rPr>
-              <a:t>sử</a:t>
-            </a:r>
-            <a:r>
-              <a:rPr lang="en-US" sz="1600" b="1" dirty="0">
-                <a:solidFill>
-                  <a:schemeClr val="tx1"/>
-                </a:solidFill>
-                <a:latin typeface="Times New Roman" panose="02020603050405020304" pitchFamily="18" charset="0"/>
-                <a:cs typeface="Times New Roman" panose="02020603050405020304" pitchFamily="18" charset="0"/>
-              </a:rPr>
-              <a:t> Việt Nam</a:t>
-            </a:r>
-          </a:p>
-        </p:txBody>
-      </p:sp>
-      <p:cxnSp>
-        <p:nvCxnSpPr>
-          <p:cNvPr id="9" name="Straight Arrow Connector 8">
-            <a:extLst>
-              <a:ext uri="{FF2B5EF4-FFF2-40B4-BE49-F238E27FC236}">
-                <a16:creationId xmlns:a16="http://schemas.microsoft.com/office/drawing/2014/main" id="{2ACE4B27-B07C-3A57-4391-61D5579D75BC}"/>
-              </a:ext>
-            </a:extLst>
-          </p:cNvPr>
-          <p:cNvCxnSpPr>
-            <a:cxnSpLocks/>
-            <a:stCxn id="5" idx="3"/>
-            <a:endCxn id="7" idx="2"/>
-          </p:cNvCxnSpPr>
-          <p:nvPr/>
-        </p:nvCxnSpPr>
-        <p:spPr>
-          <a:xfrm>
-            <a:off x="4400727" y="4191649"/>
-            <a:ext cx="3605222" cy="0"/>
-          </a:xfrm>
-          <a:prstGeom prst="straightConnector1">
-            <a:avLst/>
-          </a:prstGeom>
-          <a:ln>
-            <a:tailEnd type="triangle"/>
-          </a:ln>
-        </p:spPr>
-        <p:style>
-          <a:lnRef idx="2">
-            <a:schemeClr val="dk1"/>
-          </a:lnRef>
-          <a:fillRef idx="0">
-            <a:schemeClr val="dk1"/>
-          </a:fillRef>
-          <a:effectRef idx="1">
-            <a:schemeClr val="dk1"/>
-          </a:effectRef>
-          <a:fontRef idx="minor">
-            <a:schemeClr val="tx1"/>
-          </a:fontRef>
-        </p:style>
-      </p:cxnSp>
-      <p:sp>
-        <p:nvSpPr>
-          <p:cNvPr id="11" name="TextBox 10">
-            <a:extLst>
-              <a:ext uri="{FF2B5EF4-FFF2-40B4-BE49-F238E27FC236}">
-                <a16:creationId xmlns:a16="http://schemas.microsoft.com/office/drawing/2014/main" id="{E8B193BF-D9F4-2D52-CF09-9F83F9F743EB}"/>
-              </a:ext>
-            </a:extLst>
-          </p:cNvPr>
-          <p:cNvSpPr txBox="1"/>
-          <p:nvPr/>
-        </p:nvSpPr>
-        <p:spPr>
-          <a:xfrm>
-            <a:off x="5450472" y="3696149"/>
-            <a:ext cx="1545616" cy="417422"/>
-          </a:xfrm>
-          <a:prstGeom prst="rect">
-            <a:avLst/>
-          </a:prstGeom>
-          <a:noFill/>
-        </p:spPr>
-        <p:txBody>
-          <a:bodyPr wrap="none" rtlCol="0">
-            <a:spAutoFit/>
-          </a:bodyPr>
-          <a:lstStyle/>
-          <a:p>
-            <a:pPr algn="ctr">
-              <a:lnSpc>
-                <a:spcPct val="150000"/>
-              </a:lnSpc>
-            </a:pPr>
-            <a:r>
-              <a:rPr lang="en-US" sz="1600" dirty="0">
-                <a:latin typeface="Times New Roman" panose="02020603050405020304" pitchFamily="18" charset="0"/>
-                <a:cs typeface="Times New Roman" panose="02020603050405020304" pitchFamily="18" charset="0"/>
-              </a:rPr>
-              <a:t>Thu </a:t>
-            </a:r>
-            <a:r>
-              <a:rPr lang="en-US" sz="1600" dirty="0" err="1">
-                <a:latin typeface="Times New Roman" panose="02020603050405020304" pitchFamily="18" charset="0"/>
-                <a:cs typeface="Times New Roman" panose="02020603050405020304" pitchFamily="18" charset="0"/>
-              </a:rPr>
-              <a:t>thập</a:t>
-            </a:r>
-            <a:r>
-              <a:rPr lang="en-US" sz="1600" dirty="0">
-                <a:latin typeface="Times New Roman" panose="02020603050405020304" pitchFamily="18" charset="0"/>
-                <a:cs typeface="Times New Roman" panose="02020603050405020304" pitchFamily="18" charset="0"/>
-              </a:rPr>
-              <a:t> </a:t>
-            </a:r>
-            <a:r>
-              <a:rPr lang="en-US" sz="1600" dirty="0" err="1">
-                <a:latin typeface="Times New Roman" panose="02020603050405020304" pitchFamily="18" charset="0"/>
-                <a:cs typeface="Times New Roman" panose="02020603050405020304" pitchFamily="18" charset="0"/>
-              </a:rPr>
-              <a:t>dữ</a:t>
-            </a:r>
-            <a:r>
-              <a:rPr lang="en-US" sz="1600" dirty="0">
-                <a:latin typeface="Times New Roman" panose="02020603050405020304" pitchFamily="18" charset="0"/>
-                <a:cs typeface="Times New Roman" panose="02020603050405020304" pitchFamily="18" charset="0"/>
-              </a:rPr>
-              <a:t> </a:t>
-            </a:r>
-            <a:r>
-              <a:rPr lang="en-US" sz="1600" dirty="0" err="1">
-                <a:latin typeface="Times New Roman" panose="02020603050405020304" pitchFamily="18" charset="0"/>
-                <a:cs typeface="Times New Roman" panose="02020603050405020304" pitchFamily="18" charset="0"/>
-              </a:rPr>
-              <a:t>liệu</a:t>
-            </a:r>
-            <a:endParaRPr lang="en-US" sz="1600" dirty="0">
-              <a:latin typeface="Times New Roman" panose="02020603050405020304" pitchFamily="18" charset="0"/>
-              <a:cs typeface="Times New Roman" panose="02020603050405020304" pitchFamily="18" charset="0"/>
-            </a:endParaRPr>
-          </a:p>
-        </p:txBody>
-      </p:sp>
     </p:spTree>
     <p:extLst>
       <p:ext uri="{BB962C8B-B14F-4D97-AF65-F5344CB8AC3E}">
-        <p14:creationId xmlns:p14="http://schemas.microsoft.com/office/powerpoint/2010/main" val="1574673704"/>
+        <p14:creationId xmlns:p14="http://schemas.microsoft.com/office/powerpoint/2010/main" val="2400683774"/>
       </p:ext>
     </p:extLst>
   </p:cSld>
@@ -6573,6 +7918,929 @@
           <a:chExt cx="0" cy="0"/>
         </a:xfrm>
       </p:grpSpPr>
+      <p:pic>
+        <p:nvPicPr>
+          <p:cNvPr id="3" name="Graphic 2" descr="Closed book outline">
+            <a:extLst>
+              <a:ext uri="{FF2B5EF4-FFF2-40B4-BE49-F238E27FC236}">
+                <a16:creationId xmlns:a16="http://schemas.microsoft.com/office/drawing/2014/main" id="{8B5A347F-16B0-4C01-CDE5-3DA7EE07C0A7}"/>
+              </a:ext>
+            </a:extLst>
+          </p:cNvPr>
+          <p:cNvPicPr>
+            <a:picLocks noChangeAspect="1"/>
+          </p:cNvPicPr>
+          <p:nvPr/>
+        </p:nvPicPr>
+        <p:blipFill>
+          <a:blip r:embed="rId2">
+            <a:extLst>
+              <a:ext uri="{96DAC541-7B7A-43D3-8B79-37D633B846F1}">
+                <asvg:svgBlip xmlns:asvg="http://schemas.microsoft.com/office/drawing/2016/SVG/main" r:embed="rId3"/>
+              </a:ext>
+            </a:extLst>
+          </a:blip>
+          <a:stretch>
+            <a:fillRect/>
+          </a:stretch>
+        </p:blipFill>
+        <p:spPr>
+          <a:xfrm>
+            <a:off x="1584960" y="1264920"/>
+            <a:ext cx="1183640" cy="1183640"/>
+          </a:xfrm>
+          <a:prstGeom prst="rect">
+            <a:avLst/>
+          </a:prstGeom>
+        </p:spPr>
+      </p:pic>
+      <p:pic>
+        <p:nvPicPr>
+          <p:cNvPr id="5" name="Graphic 4" descr="Closed book outline">
+            <a:extLst>
+              <a:ext uri="{FF2B5EF4-FFF2-40B4-BE49-F238E27FC236}">
+                <a16:creationId xmlns:a16="http://schemas.microsoft.com/office/drawing/2014/main" id="{6579DF6F-E332-F978-F493-883C9FE2975A}"/>
+              </a:ext>
+            </a:extLst>
+          </p:cNvPr>
+          <p:cNvPicPr>
+            <a:picLocks noChangeAspect="1"/>
+          </p:cNvPicPr>
+          <p:nvPr/>
+        </p:nvPicPr>
+        <p:blipFill>
+          <a:blip r:embed="rId2">
+            <a:extLst>
+              <a:ext uri="{96DAC541-7B7A-43D3-8B79-37D633B846F1}">
+                <asvg:svgBlip xmlns:asvg="http://schemas.microsoft.com/office/drawing/2016/SVG/main" r:embed="rId3"/>
+              </a:ext>
+            </a:extLst>
+          </a:blip>
+          <a:stretch>
+            <a:fillRect/>
+          </a:stretch>
+        </p:blipFill>
+        <p:spPr>
+          <a:xfrm>
+            <a:off x="2682240" y="1264920"/>
+            <a:ext cx="1183640" cy="1183640"/>
+          </a:xfrm>
+          <a:prstGeom prst="rect">
+            <a:avLst/>
+          </a:prstGeom>
+        </p:spPr>
+      </p:pic>
+      <p:pic>
+        <p:nvPicPr>
+          <p:cNvPr id="6" name="Graphic 5" descr="Closed book outline">
+            <a:extLst>
+              <a:ext uri="{FF2B5EF4-FFF2-40B4-BE49-F238E27FC236}">
+                <a16:creationId xmlns:a16="http://schemas.microsoft.com/office/drawing/2014/main" id="{48222A22-CE4D-1805-0AF0-BA5306965C12}"/>
+              </a:ext>
+            </a:extLst>
+          </p:cNvPr>
+          <p:cNvPicPr>
+            <a:picLocks noChangeAspect="1"/>
+          </p:cNvPicPr>
+          <p:nvPr/>
+        </p:nvPicPr>
+        <p:blipFill>
+          <a:blip r:embed="rId2">
+            <a:extLst>
+              <a:ext uri="{96DAC541-7B7A-43D3-8B79-37D633B846F1}">
+                <asvg:svgBlip xmlns:asvg="http://schemas.microsoft.com/office/drawing/2016/SVG/main" r:embed="rId3"/>
+              </a:ext>
+            </a:extLst>
+          </a:blip>
+          <a:stretch>
+            <a:fillRect/>
+          </a:stretch>
+        </p:blipFill>
+        <p:spPr>
+          <a:xfrm>
+            <a:off x="2682240" y="2585720"/>
+            <a:ext cx="1183640" cy="1183640"/>
+          </a:xfrm>
+          <a:prstGeom prst="rect">
+            <a:avLst/>
+          </a:prstGeom>
+        </p:spPr>
+      </p:pic>
+      <p:pic>
+        <p:nvPicPr>
+          <p:cNvPr id="7" name="Graphic 6" descr="Closed book outline">
+            <a:extLst>
+              <a:ext uri="{FF2B5EF4-FFF2-40B4-BE49-F238E27FC236}">
+                <a16:creationId xmlns:a16="http://schemas.microsoft.com/office/drawing/2014/main" id="{FD26C7B4-1F6C-12C6-A88D-C0236AEF846E}"/>
+              </a:ext>
+            </a:extLst>
+          </p:cNvPr>
+          <p:cNvPicPr>
+            <a:picLocks noChangeAspect="1"/>
+          </p:cNvPicPr>
+          <p:nvPr/>
+        </p:nvPicPr>
+        <p:blipFill>
+          <a:blip r:embed="rId2">
+            <a:extLst>
+              <a:ext uri="{96DAC541-7B7A-43D3-8B79-37D633B846F1}">
+                <asvg:svgBlip xmlns:asvg="http://schemas.microsoft.com/office/drawing/2016/SVG/main" r:embed="rId3"/>
+              </a:ext>
+            </a:extLst>
+          </a:blip>
+          <a:stretch>
+            <a:fillRect/>
+          </a:stretch>
+        </p:blipFill>
+        <p:spPr>
+          <a:xfrm>
+            <a:off x="1579880" y="2585720"/>
+            <a:ext cx="1183640" cy="1183640"/>
+          </a:xfrm>
+          <a:prstGeom prst="rect">
+            <a:avLst/>
+          </a:prstGeom>
+        </p:spPr>
+      </p:pic>
+      <p:sp>
+        <p:nvSpPr>
+          <p:cNvPr id="8" name="TextBox 7">
+            <a:extLst>
+              <a:ext uri="{FF2B5EF4-FFF2-40B4-BE49-F238E27FC236}">
+                <a16:creationId xmlns:a16="http://schemas.microsoft.com/office/drawing/2014/main" id="{A4D18BFF-8B72-771A-E213-EA8C5BFAC8E7}"/>
+              </a:ext>
+            </a:extLst>
+          </p:cNvPr>
+          <p:cNvSpPr txBox="1"/>
+          <p:nvPr/>
+        </p:nvSpPr>
+        <p:spPr>
+          <a:xfrm>
+            <a:off x="1691423" y="895588"/>
+            <a:ext cx="1981633" cy="369332"/>
+          </a:xfrm>
+          <a:prstGeom prst="rect">
+            <a:avLst/>
+          </a:prstGeom>
+          <a:noFill/>
+        </p:spPr>
+        <p:txBody>
+          <a:bodyPr wrap="none" rtlCol="0">
+            <a:spAutoFit/>
+          </a:bodyPr>
+          <a:lstStyle/>
+          <a:p>
+            <a:r>
+              <a:rPr lang="en-US" dirty="0"/>
+              <a:t>SGK </a:t>
+            </a:r>
+            <a:r>
+              <a:rPr lang="vi-VN" dirty="0"/>
+              <a:t>LỊCH SỬ VN</a:t>
+            </a:r>
+            <a:endParaRPr lang="en-US" dirty="0"/>
+          </a:p>
+        </p:txBody>
+      </p:sp>
+      <p:sp>
+        <p:nvSpPr>
+          <p:cNvPr id="9" name="Cylinder 8">
+            <a:extLst>
+              <a:ext uri="{FF2B5EF4-FFF2-40B4-BE49-F238E27FC236}">
+                <a16:creationId xmlns:a16="http://schemas.microsoft.com/office/drawing/2014/main" id="{F43CF5DF-12CB-D8BF-AFF4-5BED1806DF8F}"/>
+              </a:ext>
+            </a:extLst>
+          </p:cNvPr>
+          <p:cNvSpPr/>
+          <p:nvPr/>
+        </p:nvSpPr>
+        <p:spPr>
+          <a:xfrm>
+            <a:off x="5902960" y="1856740"/>
+            <a:ext cx="1899920" cy="1572260"/>
+          </a:xfrm>
+          <a:prstGeom prst="can">
+            <a:avLst/>
+          </a:prstGeom>
+          <a:solidFill>
+            <a:schemeClr val="accent2">
+              <a:lumMod val="60000"/>
+              <a:lumOff val="40000"/>
+            </a:schemeClr>
+          </a:solidFill>
+          <a:ln>
+            <a:solidFill>
+              <a:schemeClr val="bg1"/>
+            </a:solidFill>
+          </a:ln>
+        </p:spPr>
+        <p:style>
+          <a:lnRef idx="2">
+            <a:schemeClr val="accent1">
+              <a:shade val="15000"/>
+            </a:schemeClr>
+          </a:lnRef>
+          <a:fillRef idx="1">
+            <a:schemeClr val="accent1"/>
+          </a:fillRef>
+          <a:effectRef idx="0">
+            <a:schemeClr val="accent1"/>
+          </a:effectRef>
+          <a:fontRef idx="minor">
+            <a:schemeClr val="lt1"/>
+          </a:fontRef>
+        </p:style>
+        <p:txBody>
+          <a:bodyPr rtlCol="0" anchor="ctr"/>
+          <a:lstStyle/>
+          <a:p>
+            <a:pPr algn="ctr"/>
+            <a:endParaRPr lang="en-US"/>
+          </a:p>
+        </p:txBody>
+      </p:sp>
+      <p:sp>
+        <p:nvSpPr>
+          <p:cNvPr id="10" name="TextBox 9">
+            <a:extLst>
+              <a:ext uri="{FF2B5EF4-FFF2-40B4-BE49-F238E27FC236}">
+                <a16:creationId xmlns:a16="http://schemas.microsoft.com/office/drawing/2014/main" id="{7EF27885-9A35-F250-7D10-D3DD61E5B54C}"/>
+              </a:ext>
+            </a:extLst>
+          </p:cNvPr>
+          <p:cNvSpPr txBox="1"/>
+          <p:nvPr/>
+        </p:nvSpPr>
+        <p:spPr>
+          <a:xfrm>
+            <a:off x="5552692" y="1258824"/>
+            <a:ext cx="2600455" cy="369332"/>
+          </a:xfrm>
+          <a:prstGeom prst="rect">
+            <a:avLst/>
+          </a:prstGeom>
+          <a:noFill/>
+        </p:spPr>
+        <p:txBody>
+          <a:bodyPr wrap="none" rtlCol="0">
+            <a:spAutoFit/>
+          </a:bodyPr>
+          <a:lstStyle/>
+          <a:p>
+            <a:r>
+              <a:rPr lang="vi-VN"/>
+              <a:t>DATASET LỊCH SỬ VN</a:t>
+            </a:r>
+            <a:endParaRPr lang="en-US" dirty="0"/>
+          </a:p>
+        </p:txBody>
+      </p:sp>
+      <p:cxnSp>
+        <p:nvCxnSpPr>
+          <p:cNvPr id="12" name="Straight Arrow Connector 11">
+            <a:extLst>
+              <a:ext uri="{FF2B5EF4-FFF2-40B4-BE49-F238E27FC236}">
+                <a16:creationId xmlns:a16="http://schemas.microsoft.com/office/drawing/2014/main" id="{DFDB0EF4-F1D1-8586-C253-0557B4AF13E0}"/>
+              </a:ext>
+            </a:extLst>
+          </p:cNvPr>
+          <p:cNvCxnSpPr/>
+          <p:nvPr/>
+        </p:nvCxnSpPr>
+        <p:spPr>
+          <a:xfrm>
+            <a:off x="4206240" y="2585720"/>
+            <a:ext cx="1481328" cy="0"/>
+          </a:xfrm>
+          <a:prstGeom prst="straightConnector1">
+            <a:avLst/>
+          </a:prstGeom>
+          <a:ln>
+            <a:tailEnd type="triangle"/>
+          </a:ln>
+        </p:spPr>
+        <p:style>
+          <a:lnRef idx="2">
+            <a:schemeClr val="accent1"/>
+          </a:lnRef>
+          <a:fillRef idx="0">
+            <a:schemeClr val="accent1"/>
+          </a:fillRef>
+          <a:effectRef idx="1">
+            <a:schemeClr val="accent1"/>
+          </a:effectRef>
+          <a:fontRef idx="minor">
+            <a:schemeClr val="tx1"/>
+          </a:fontRef>
+        </p:style>
+      </p:cxnSp>
+      <p:sp>
+        <p:nvSpPr>
+          <p:cNvPr id="13" name="TextBox 12">
+            <a:extLst>
+              <a:ext uri="{FF2B5EF4-FFF2-40B4-BE49-F238E27FC236}">
+                <a16:creationId xmlns:a16="http://schemas.microsoft.com/office/drawing/2014/main" id="{98BF2CDB-C40A-C74D-69A1-2BF46F00B375}"/>
+              </a:ext>
+            </a:extLst>
+          </p:cNvPr>
+          <p:cNvSpPr txBox="1"/>
+          <p:nvPr/>
+        </p:nvSpPr>
+        <p:spPr>
+          <a:xfrm>
+            <a:off x="3924390" y="2057892"/>
+            <a:ext cx="1864613" cy="369332"/>
+          </a:xfrm>
+          <a:prstGeom prst="rect">
+            <a:avLst/>
+          </a:prstGeom>
+          <a:noFill/>
+        </p:spPr>
+        <p:txBody>
+          <a:bodyPr wrap="none" rtlCol="0">
+            <a:spAutoFit/>
+          </a:bodyPr>
+          <a:lstStyle/>
+          <a:p>
+            <a:r>
+              <a:rPr lang="vi-VN" dirty="0"/>
+              <a:t>Thu thập dữ liệu</a:t>
+            </a:r>
+            <a:endParaRPr lang="en-US" dirty="0"/>
+          </a:p>
+        </p:txBody>
+      </p:sp>
+    </p:spTree>
+    <p:extLst>
+      <p:ext uri="{BB962C8B-B14F-4D97-AF65-F5344CB8AC3E}">
+        <p14:creationId xmlns:p14="http://schemas.microsoft.com/office/powerpoint/2010/main" val="365958809"/>
+      </p:ext>
+    </p:extLst>
+  </p:cSld>
+  <p:clrMapOvr>
+    <a:masterClrMapping/>
+  </p:clrMapOvr>
+</p:sld>
+</file>
+
+<file path=ppt/slides/slide5.xml><?xml version="1.0" encoding="utf-8"?>
+<p:sld xmlns:a="http://schemas.openxmlformats.org/drawingml/2006/main" xmlns:r="http://schemas.openxmlformats.org/officeDocument/2006/relationships" xmlns:p="http://schemas.openxmlformats.org/presentationml/2006/main">
+  <p:cSld>
+    <p:spTree>
+      <p:nvGrpSpPr>
+        <p:cNvPr id="1" name=""/>
+        <p:cNvGrpSpPr/>
+        <p:nvPr/>
+      </p:nvGrpSpPr>
+      <p:grpSpPr>
+        <a:xfrm>
+          <a:off x="0" y="0"/>
+          <a:ext cx="0" cy="0"/>
+          <a:chOff x="0" y="0"/>
+          <a:chExt cx="0" cy="0"/>
+        </a:xfrm>
+      </p:grpSpPr>
+      <p:sp>
+        <p:nvSpPr>
+          <p:cNvPr id="2" name="TextBox 1">
+            <a:extLst>
+              <a:ext uri="{FF2B5EF4-FFF2-40B4-BE49-F238E27FC236}">
+                <a16:creationId xmlns:a16="http://schemas.microsoft.com/office/drawing/2014/main" id="{66497829-D8FF-F2E4-0A7A-09423295FBEA}"/>
+              </a:ext>
+            </a:extLst>
+          </p:cNvPr>
+          <p:cNvSpPr txBox="1"/>
+          <p:nvPr/>
+        </p:nvSpPr>
+        <p:spPr>
+          <a:xfrm>
+            <a:off x="591671" y="605118"/>
+            <a:ext cx="3809056" cy="369332"/>
+          </a:xfrm>
+          <a:prstGeom prst="rect">
+            <a:avLst/>
+          </a:prstGeom>
+          <a:noFill/>
+        </p:spPr>
+        <p:txBody>
+          <a:bodyPr wrap="none" rtlCol="0">
+            <a:spAutoFit/>
+          </a:bodyPr>
+          <a:lstStyle/>
+          <a:p>
+            <a:r>
+              <a:rPr lang="en-US" dirty="0" err="1"/>
+              <a:t>Hình</a:t>
+            </a:r>
+            <a:r>
+              <a:rPr lang="en-US" dirty="0"/>
+              <a:t> </a:t>
+            </a:r>
+            <a:r>
+              <a:rPr lang="en-US" dirty="0" err="1"/>
+              <a:t>mô</a:t>
+            </a:r>
+            <a:r>
+              <a:rPr lang="en-US" dirty="0"/>
+              <a:t> </a:t>
+            </a:r>
+            <a:r>
+              <a:rPr lang="en-US" dirty="0" err="1"/>
+              <a:t>tả</a:t>
+            </a:r>
+            <a:r>
+              <a:rPr lang="en-US" dirty="0"/>
+              <a:t> </a:t>
+            </a:r>
+            <a:r>
+              <a:rPr lang="en-US" dirty="0" err="1"/>
+              <a:t>quá</a:t>
+            </a:r>
+            <a:r>
+              <a:rPr lang="en-US" dirty="0"/>
+              <a:t> </a:t>
+            </a:r>
+            <a:r>
+              <a:rPr lang="en-US" dirty="0" err="1"/>
+              <a:t>trình</a:t>
+            </a:r>
+            <a:r>
+              <a:rPr lang="en-US" dirty="0"/>
+              <a:t> </a:t>
+            </a:r>
+            <a:r>
+              <a:rPr lang="en-US" dirty="0" err="1"/>
+              <a:t>thu</a:t>
+            </a:r>
+            <a:r>
+              <a:rPr lang="en-US" dirty="0"/>
+              <a:t> </a:t>
+            </a:r>
+            <a:r>
+              <a:rPr lang="en-US" dirty="0" err="1"/>
+              <a:t>thập</a:t>
+            </a:r>
+            <a:r>
+              <a:rPr lang="en-US" dirty="0"/>
+              <a:t> </a:t>
+            </a:r>
+            <a:r>
+              <a:rPr lang="en-US" dirty="0" err="1"/>
+              <a:t>dữ</a:t>
+            </a:r>
+            <a:r>
+              <a:rPr lang="en-US" dirty="0"/>
+              <a:t> </a:t>
+            </a:r>
+            <a:r>
+              <a:rPr lang="en-US" dirty="0" err="1"/>
+              <a:t>liệu</a:t>
+            </a:r>
+            <a:endParaRPr lang="en-US" dirty="0"/>
+          </a:p>
+        </p:txBody>
+      </p:sp>
+      <p:pic>
+        <p:nvPicPr>
+          <p:cNvPr id="5" name="Picture 4" descr="SA stack of books with a bookmark">
+            <a:extLst>
+              <a:ext uri="{FF2B5EF4-FFF2-40B4-BE49-F238E27FC236}">
+                <a16:creationId xmlns:a16="http://schemas.microsoft.com/office/drawing/2014/main" id="{6E3F6604-BA07-4786-C6BC-5C1375AD7895}"/>
+              </a:ext>
+            </a:extLst>
+          </p:cNvPr>
+          <p:cNvPicPr>
+            <a:picLocks noChangeAspect="1"/>
+          </p:cNvPicPr>
+          <p:nvPr/>
+        </p:nvPicPr>
+        <p:blipFill>
+          <a:blip r:embed="rId2">
+            <a:extLst>
+              <a:ext uri="{28A0092B-C50C-407E-A947-70E740481C1C}">
+                <a14:useLocalDpi xmlns:a14="http://schemas.microsoft.com/office/drawing/2010/main" val="0"/>
+              </a:ext>
+            </a:extLst>
+          </a:blip>
+          <a:stretch>
+            <a:fillRect/>
+          </a:stretch>
+        </p:blipFill>
+        <p:spPr>
+          <a:xfrm>
+            <a:off x="2053839" y="3074508"/>
+            <a:ext cx="2346888" cy="2234282"/>
+          </a:xfrm>
+          <a:prstGeom prst="rect">
+            <a:avLst/>
+          </a:prstGeom>
+        </p:spPr>
+      </p:pic>
+      <p:sp>
+        <p:nvSpPr>
+          <p:cNvPr id="6" name="TextBox 5">
+            <a:extLst>
+              <a:ext uri="{FF2B5EF4-FFF2-40B4-BE49-F238E27FC236}">
+                <a16:creationId xmlns:a16="http://schemas.microsoft.com/office/drawing/2014/main" id="{D6E64CA9-55C8-1D4D-D10E-4CC1A663CD46}"/>
+              </a:ext>
+            </a:extLst>
+          </p:cNvPr>
+          <p:cNvSpPr txBox="1"/>
+          <p:nvPr/>
+        </p:nvSpPr>
+        <p:spPr>
+          <a:xfrm>
+            <a:off x="2412013" y="2435597"/>
+            <a:ext cx="1717008" cy="786754"/>
+          </a:xfrm>
+          <a:prstGeom prst="rect">
+            <a:avLst/>
+          </a:prstGeom>
+          <a:noFill/>
+        </p:spPr>
+        <p:txBody>
+          <a:bodyPr wrap="none" rtlCol="0">
+            <a:spAutoFit/>
+          </a:bodyPr>
+          <a:lstStyle/>
+          <a:p>
+            <a:pPr algn="ctr">
+              <a:lnSpc>
+                <a:spcPct val="150000"/>
+              </a:lnSpc>
+            </a:pPr>
+            <a:r>
+              <a:rPr lang="en-US" sz="1600" b="1" dirty="0" err="1">
+                <a:latin typeface="Times New Roman" panose="02020603050405020304" pitchFamily="18" charset="0"/>
+                <a:cs typeface="Times New Roman" panose="02020603050405020304" pitchFamily="18" charset="0"/>
+              </a:rPr>
+              <a:t>Sách</a:t>
+            </a:r>
+            <a:r>
+              <a:rPr lang="en-US" sz="1600" b="1" dirty="0">
+                <a:latin typeface="Times New Roman" panose="02020603050405020304" pitchFamily="18" charset="0"/>
+                <a:cs typeface="Times New Roman" panose="02020603050405020304" pitchFamily="18" charset="0"/>
+              </a:rPr>
+              <a:t> </a:t>
+            </a:r>
+            <a:r>
+              <a:rPr lang="en-US" sz="1600" b="1" dirty="0" err="1">
+                <a:latin typeface="Times New Roman" panose="02020603050405020304" pitchFamily="18" charset="0"/>
+                <a:cs typeface="Times New Roman" panose="02020603050405020304" pitchFamily="18" charset="0"/>
+              </a:rPr>
+              <a:t>giáo</a:t>
+            </a:r>
+            <a:r>
+              <a:rPr lang="en-US" sz="1600" b="1" dirty="0">
+                <a:latin typeface="Times New Roman" panose="02020603050405020304" pitchFamily="18" charset="0"/>
+                <a:cs typeface="Times New Roman" panose="02020603050405020304" pitchFamily="18" charset="0"/>
+              </a:rPr>
+              <a:t> khoa</a:t>
+            </a:r>
+          </a:p>
+          <a:p>
+            <a:pPr algn="ctr">
+              <a:lnSpc>
+                <a:spcPct val="150000"/>
+              </a:lnSpc>
+            </a:pPr>
+            <a:r>
+              <a:rPr lang="en-US" sz="1600" b="1" dirty="0" err="1">
+                <a:latin typeface="Times New Roman" panose="02020603050405020304" pitchFamily="18" charset="0"/>
+                <a:cs typeface="Times New Roman" panose="02020603050405020304" pitchFamily="18" charset="0"/>
+              </a:rPr>
+              <a:t>Lịch</a:t>
+            </a:r>
+            <a:r>
+              <a:rPr lang="en-US" sz="1600" b="1" dirty="0">
+                <a:latin typeface="Times New Roman" panose="02020603050405020304" pitchFamily="18" charset="0"/>
+                <a:cs typeface="Times New Roman" panose="02020603050405020304" pitchFamily="18" charset="0"/>
+              </a:rPr>
+              <a:t> </a:t>
+            </a:r>
+            <a:r>
+              <a:rPr lang="en-US" sz="1600" b="1" dirty="0" err="1">
+                <a:latin typeface="Times New Roman" panose="02020603050405020304" pitchFamily="18" charset="0"/>
+                <a:cs typeface="Times New Roman" panose="02020603050405020304" pitchFamily="18" charset="0"/>
+              </a:rPr>
+              <a:t>sử</a:t>
+            </a:r>
+            <a:r>
+              <a:rPr lang="en-US" sz="1600" b="1" dirty="0">
+                <a:latin typeface="Times New Roman" panose="02020603050405020304" pitchFamily="18" charset="0"/>
+                <a:cs typeface="Times New Roman" panose="02020603050405020304" pitchFamily="18" charset="0"/>
+              </a:rPr>
+              <a:t> Việt Nam</a:t>
+            </a:r>
+          </a:p>
+        </p:txBody>
+      </p:sp>
+      <p:sp>
+        <p:nvSpPr>
+          <p:cNvPr id="7" name="Cylinder 6">
+            <a:extLst>
+              <a:ext uri="{FF2B5EF4-FFF2-40B4-BE49-F238E27FC236}">
+                <a16:creationId xmlns:a16="http://schemas.microsoft.com/office/drawing/2014/main" id="{332FD407-45B1-8B63-03C2-2931E3555CE3}"/>
+              </a:ext>
+            </a:extLst>
+          </p:cNvPr>
+          <p:cNvSpPr/>
+          <p:nvPr/>
+        </p:nvSpPr>
+        <p:spPr>
+          <a:xfrm>
+            <a:off x="8005949" y="2779708"/>
+            <a:ext cx="2346887" cy="2823882"/>
+          </a:xfrm>
+          <a:prstGeom prst="can">
+            <a:avLst/>
+          </a:prstGeom>
+          <a:solidFill>
+            <a:schemeClr val="bg2"/>
+          </a:solidFill>
+          <a:ln>
+            <a:solidFill>
+              <a:schemeClr val="tx1"/>
+            </a:solidFill>
+          </a:ln>
+        </p:spPr>
+        <p:style>
+          <a:lnRef idx="2">
+            <a:schemeClr val="accent1">
+              <a:shade val="15000"/>
+            </a:schemeClr>
+          </a:lnRef>
+          <a:fillRef idx="1">
+            <a:schemeClr val="accent1"/>
+          </a:fillRef>
+          <a:effectRef idx="0">
+            <a:schemeClr val="accent1"/>
+          </a:effectRef>
+          <a:fontRef idx="minor">
+            <a:schemeClr val="lt1"/>
+          </a:fontRef>
+        </p:style>
+        <p:txBody>
+          <a:bodyPr rtlCol="0" anchor="ctr"/>
+          <a:lstStyle/>
+          <a:p>
+            <a:pPr algn="ctr">
+              <a:lnSpc>
+                <a:spcPct val="150000"/>
+              </a:lnSpc>
+            </a:pPr>
+            <a:r>
+              <a:rPr lang="en-US" sz="1600" b="1" dirty="0">
+                <a:solidFill>
+                  <a:schemeClr val="tx1"/>
+                </a:solidFill>
+                <a:latin typeface="Times New Roman" panose="02020603050405020304" pitchFamily="18" charset="0"/>
+                <a:cs typeface="Times New Roman" panose="02020603050405020304" pitchFamily="18" charset="0"/>
+              </a:rPr>
+              <a:t>Kho </a:t>
+            </a:r>
+            <a:r>
+              <a:rPr lang="en-US" sz="1600" b="1" dirty="0" err="1">
+                <a:solidFill>
+                  <a:schemeClr val="tx1"/>
+                </a:solidFill>
+                <a:latin typeface="Times New Roman" panose="02020603050405020304" pitchFamily="18" charset="0"/>
+                <a:cs typeface="Times New Roman" panose="02020603050405020304" pitchFamily="18" charset="0"/>
+              </a:rPr>
+              <a:t>tài</a:t>
+            </a:r>
+            <a:r>
+              <a:rPr lang="en-US" sz="1600" b="1" dirty="0">
+                <a:solidFill>
+                  <a:schemeClr val="tx1"/>
+                </a:solidFill>
+                <a:latin typeface="Times New Roman" panose="02020603050405020304" pitchFamily="18" charset="0"/>
+                <a:cs typeface="Times New Roman" panose="02020603050405020304" pitchFamily="18" charset="0"/>
+              </a:rPr>
+              <a:t> </a:t>
+            </a:r>
+            <a:r>
+              <a:rPr lang="en-US" sz="1600" b="1" dirty="0" err="1">
+                <a:solidFill>
+                  <a:schemeClr val="tx1"/>
+                </a:solidFill>
+                <a:latin typeface="Times New Roman" panose="02020603050405020304" pitchFamily="18" charset="0"/>
+                <a:cs typeface="Times New Roman" panose="02020603050405020304" pitchFamily="18" charset="0"/>
+              </a:rPr>
+              <a:t>liệu</a:t>
+            </a:r>
+            <a:endParaRPr lang="en-US" sz="1600" b="1" dirty="0">
+              <a:solidFill>
+                <a:schemeClr val="tx1"/>
+              </a:solidFill>
+              <a:latin typeface="Times New Roman" panose="02020603050405020304" pitchFamily="18" charset="0"/>
+              <a:cs typeface="Times New Roman" panose="02020603050405020304" pitchFamily="18" charset="0"/>
+            </a:endParaRPr>
+          </a:p>
+          <a:p>
+            <a:pPr algn="ctr">
+              <a:lnSpc>
+                <a:spcPct val="150000"/>
+              </a:lnSpc>
+            </a:pPr>
+            <a:r>
+              <a:rPr lang="en-US" sz="1600" b="1" dirty="0" err="1">
+                <a:solidFill>
+                  <a:schemeClr val="tx1"/>
+                </a:solidFill>
+                <a:latin typeface="Times New Roman" panose="02020603050405020304" pitchFamily="18" charset="0"/>
+                <a:cs typeface="Times New Roman" panose="02020603050405020304" pitchFamily="18" charset="0"/>
+              </a:rPr>
+              <a:t>Lịch</a:t>
+            </a:r>
+            <a:r>
+              <a:rPr lang="en-US" sz="1600" b="1" dirty="0">
+                <a:solidFill>
+                  <a:schemeClr val="tx1"/>
+                </a:solidFill>
+                <a:latin typeface="Times New Roman" panose="02020603050405020304" pitchFamily="18" charset="0"/>
+                <a:cs typeface="Times New Roman" panose="02020603050405020304" pitchFamily="18" charset="0"/>
+              </a:rPr>
+              <a:t> </a:t>
+            </a:r>
+            <a:r>
+              <a:rPr lang="en-US" sz="1600" b="1" dirty="0" err="1">
+                <a:solidFill>
+                  <a:schemeClr val="tx1"/>
+                </a:solidFill>
+                <a:latin typeface="Times New Roman" panose="02020603050405020304" pitchFamily="18" charset="0"/>
+                <a:cs typeface="Times New Roman" panose="02020603050405020304" pitchFamily="18" charset="0"/>
+              </a:rPr>
+              <a:t>sử</a:t>
+            </a:r>
+            <a:r>
+              <a:rPr lang="en-US" sz="1600" b="1" dirty="0">
+                <a:solidFill>
+                  <a:schemeClr val="tx1"/>
+                </a:solidFill>
+                <a:latin typeface="Times New Roman" panose="02020603050405020304" pitchFamily="18" charset="0"/>
+                <a:cs typeface="Times New Roman" panose="02020603050405020304" pitchFamily="18" charset="0"/>
+              </a:rPr>
+              <a:t> Việt Nam</a:t>
+            </a:r>
+          </a:p>
+        </p:txBody>
+      </p:sp>
+      <p:cxnSp>
+        <p:nvCxnSpPr>
+          <p:cNvPr id="9" name="Straight Arrow Connector 8">
+            <a:extLst>
+              <a:ext uri="{FF2B5EF4-FFF2-40B4-BE49-F238E27FC236}">
+                <a16:creationId xmlns:a16="http://schemas.microsoft.com/office/drawing/2014/main" id="{2ACE4B27-B07C-3A57-4391-61D5579D75BC}"/>
+              </a:ext>
+            </a:extLst>
+          </p:cNvPr>
+          <p:cNvCxnSpPr>
+            <a:cxnSpLocks/>
+            <a:stCxn id="5" idx="3"/>
+            <a:endCxn id="7" idx="2"/>
+          </p:cNvCxnSpPr>
+          <p:nvPr/>
+        </p:nvCxnSpPr>
+        <p:spPr>
+          <a:xfrm>
+            <a:off x="4400727" y="4191649"/>
+            <a:ext cx="3605222" cy="0"/>
+          </a:xfrm>
+          <a:prstGeom prst="straightConnector1">
+            <a:avLst/>
+          </a:prstGeom>
+          <a:ln>
+            <a:tailEnd type="triangle"/>
+          </a:ln>
+        </p:spPr>
+        <p:style>
+          <a:lnRef idx="2">
+            <a:schemeClr val="dk1"/>
+          </a:lnRef>
+          <a:fillRef idx="0">
+            <a:schemeClr val="dk1"/>
+          </a:fillRef>
+          <a:effectRef idx="1">
+            <a:schemeClr val="dk1"/>
+          </a:effectRef>
+          <a:fontRef idx="minor">
+            <a:schemeClr val="tx1"/>
+          </a:fontRef>
+        </p:style>
+      </p:cxnSp>
+      <p:sp>
+        <p:nvSpPr>
+          <p:cNvPr id="11" name="TextBox 10">
+            <a:extLst>
+              <a:ext uri="{FF2B5EF4-FFF2-40B4-BE49-F238E27FC236}">
+                <a16:creationId xmlns:a16="http://schemas.microsoft.com/office/drawing/2014/main" id="{E8B193BF-D9F4-2D52-CF09-9F83F9F743EB}"/>
+              </a:ext>
+            </a:extLst>
+          </p:cNvPr>
+          <p:cNvSpPr txBox="1"/>
+          <p:nvPr/>
+        </p:nvSpPr>
+        <p:spPr>
+          <a:xfrm>
+            <a:off x="5450472" y="3696149"/>
+            <a:ext cx="1545616" cy="417422"/>
+          </a:xfrm>
+          <a:prstGeom prst="rect">
+            <a:avLst/>
+          </a:prstGeom>
+          <a:noFill/>
+        </p:spPr>
+        <p:txBody>
+          <a:bodyPr wrap="none" rtlCol="0">
+            <a:spAutoFit/>
+          </a:bodyPr>
+          <a:lstStyle/>
+          <a:p>
+            <a:pPr algn="ctr">
+              <a:lnSpc>
+                <a:spcPct val="150000"/>
+              </a:lnSpc>
+            </a:pPr>
+            <a:r>
+              <a:rPr lang="en-US" sz="1600" dirty="0">
+                <a:latin typeface="Times New Roman" panose="02020603050405020304" pitchFamily="18" charset="0"/>
+                <a:cs typeface="Times New Roman" panose="02020603050405020304" pitchFamily="18" charset="0"/>
+              </a:rPr>
+              <a:t>Thu </a:t>
+            </a:r>
+            <a:r>
+              <a:rPr lang="en-US" sz="1600" dirty="0" err="1">
+                <a:latin typeface="Times New Roman" panose="02020603050405020304" pitchFamily="18" charset="0"/>
+                <a:cs typeface="Times New Roman" panose="02020603050405020304" pitchFamily="18" charset="0"/>
+              </a:rPr>
+              <a:t>thập</a:t>
+            </a:r>
+            <a:r>
+              <a:rPr lang="en-US" sz="1600" dirty="0">
+                <a:latin typeface="Times New Roman" panose="02020603050405020304" pitchFamily="18" charset="0"/>
+                <a:cs typeface="Times New Roman" panose="02020603050405020304" pitchFamily="18" charset="0"/>
+              </a:rPr>
+              <a:t> </a:t>
+            </a:r>
+            <a:r>
+              <a:rPr lang="en-US" sz="1600" dirty="0" err="1">
+                <a:latin typeface="Times New Roman" panose="02020603050405020304" pitchFamily="18" charset="0"/>
+                <a:cs typeface="Times New Roman" panose="02020603050405020304" pitchFamily="18" charset="0"/>
+              </a:rPr>
+              <a:t>dữ</a:t>
+            </a:r>
+            <a:r>
+              <a:rPr lang="en-US" sz="1600" dirty="0">
+                <a:latin typeface="Times New Roman" panose="02020603050405020304" pitchFamily="18" charset="0"/>
+                <a:cs typeface="Times New Roman" panose="02020603050405020304" pitchFamily="18" charset="0"/>
+              </a:rPr>
+              <a:t> </a:t>
+            </a:r>
+            <a:r>
+              <a:rPr lang="en-US" sz="1600" dirty="0" err="1">
+                <a:latin typeface="Times New Roman" panose="02020603050405020304" pitchFamily="18" charset="0"/>
+                <a:cs typeface="Times New Roman" panose="02020603050405020304" pitchFamily="18" charset="0"/>
+              </a:rPr>
+              <a:t>liệu</a:t>
+            </a:r>
+            <a:endParaRPr lang="en-US" sz="1600" dirty="0">
+              <a:latin typeface="Times New Roman" panose="02020603050405020304" pitchFamily="18" charset="0"/>
+              <a:cs typeface="Times New Roman" panose="02020603050405020304" pitchFamily="18" charset="0"/>
+            </a:endParaRPr>
+          </a:p>
+        </p:txBody>
+      </p:sp>
+    </p:spTree>
+    <p:extLst>
+      <p:ext uri="{BB962C8B-B14F-4D97-AF65-F5344CB8AC3E}">
+        <p14:creationId xmlns:p14="http://schemas.microsoft.com/office/powerpoint/2010/main" val="1574673704"/>
+      </p:ext>
+    </p:extLst>
+  </p:cSld>
+  <p:clrMapOvr>
+    <a:masterClrMapping/>
+  </p:clrMapOvr>
+</p:sld>
+</file>
+
+<file path=ppt/slides/slide6.xml><?xml version="1.0" encoding="utf-8"?>
+<p:sld xmlns:a="http://schemas.openxmlformats.org/drawingml/2006/main" xmlns:r="http://schemas.openxmlformats.org/officeDocument/2006/relationships" xmlns:p="http://schemas.openxmlformats.org/presentationml/2006/main">
+  <p:cSld>
+    <p:spTree>
+      <p:nvGrpSpPr>
+        <p:cNvPr id="1" name=""/>
+        <p:cNvGrpSpPr/>
+        <p:nvPr/>
+      </p:nvGrpSpPr>
+      <p:grpSpPr>
+        <a:xfrm>
+          <a:off x="0" y="0"/>
+          <a:ext cx="0" cy="0"/>
+          <a:chOff x="0" y="0"/>
+          <a:chExt cx="0" cy="0"/>
+        </a:xfrm>
+      </p:grpSpPr>
       <p:sp>
         <p:nvSpPr>
           <p:cNvPr id="3" name="TextBox 2">
@@ -7823,7 +10091,7 @@
 </p:sld>
 </file>
 
-<file path=ppt/slides/slide5.xml><?xml version="1.0" encoding="utf-8"?>
+<file path=ppt/slides/slide7.xml><?xml version="1.0" encoding="utf-8"?>
 <p:sld xmlns:a="http://schemas.openxmlformats.org/drawingml/2006/main" xmlns:r="http://schemas.openxmlformats.org/officeDocument/2006/relationships" xmlns:p="http://schemas.openxmlformats.org/presentationml/2006/main">
   <p:cSld>
     <p:spTree>

--- a/documents/hinh_ve_trong_cao_cao_do_an.pptx
+++ b/documents/hinh_ve_trong_cao_cao_do_an.pptx
@@ -6020,7 +6020,7 @@
         </p:nvSpPr>
         <p:spPr>
           <a:xfrm>
-            <a:off x="6347699" y="96012"/>
+            <a:off x="6347699" y="132588"/>
             <a:ext cx="1456944" cy="644652"/>
           </a:xfrm>
           <a:prstGeom prst="can">
@@ -6140,8 +6140,8 @@
         </p:nvSpPr>
         <p:spPr>
           <a:xfrm>
-            <a:off x="10553140" y="187452"/>
-            <a:ext cx="1523044" cy="530352"/>
+            <a:off x="10553140" y="105156"/>
+            <a:ext cx="1523044" cy="585216"/>
           </a:xfrm>
           <a:prstGeom prst="cube">
             <a:avLst>
@@ -6239,7 +6239,7 @@
         </p:nvSpPr>
         <p:spPr>
           <a:xfrm>
-            <a:off x="8388053" y="1281684"/>
+            <a:off x="8450421" y="1226820"/>
             <a:ext cx="1511804" cy="530352"/>
           </a:xfrm>
           <a:prstGeom prst="cube">
@@ -6468,7 +6468,7 @@
         </p:blipFill>
         <p:spPr>
           <a:xfrm>
-            <a:off x="2472939" y="2090743"/>
+            <a:off x="2512522" y="3226500"/>
             <a:ext cx="1003931" cy="1003931"/>
           </a:xfrm>
           <a:prstGeom prst="rect">
@@ -6560,7 +6560,7 @@
         </p:nvSpPr>
         <p:spPr>
           <a:xfrm>
-            <a:off x="8388052" y="210312"/>
+            <a:off x="8388052" y="192024"/>
             <a:ext cx="1523043" cy="530352"/>
           </a:xfrm>
           <a:prstGeom prst="roundRect">
@@ -6734,7 +6734,7 @@
         </p:nvSpPr>
         <p:spPr>
           <a:xfrm>
-            <a:off x="2223277" y="1281684"/>
+            <a:off x="2223277" y="1235964"/>
             <a:ext cx="1676400" cy="530352"/>
           </a:xfrm>
           <a:prstGeom prst="cube">
@@ -6806,8 +6806,8 @@
         </p:nvSpPr>
         <p:spPr>
           <a:xfrm>
-            <a:off x="146304" y="1281684"/>
-            <a:ext cx="1591056" cy="573024"/>
+            <a:off x="146303" y="1263396"/>
+            <a:ext cx="1597981" cy="573024"/>
           </a:xfrm>
           <a:prstGeom prst="roundRect">
             <a:avLst/>
@@ -6971,7 +6971,7 @@
         </p:nvSpPr>
         <p:spPr>
           <a:xfrm>
-            <a:off x="8388052" y="2250948"/>
+            <a:off x="8392925" y="2250948"/>
             <a:ext cx="1524983" cy="722376"/>
           </a:xfrm>
           <a:prstGeom prst="roundRect">
@@ -7211,7 +7211,7 @@
         </p:nvSpPr>
         <p:spPr>
           <a:xfrm>
-            <a:off x="8386111" y="4418076"/>
+            <a:off x="8450119" y="4418076"/>
             <a:ext cx="1524983" cy="632460"/>
           </a:xfrm>
           <a:prstGeom prst="cube">
@@ -7283,8 +7283,8 @@
         </p:nvSpPr>
         <p:spPr>
           <a:xfrm>
-            <a:off x="4395216" y="3412236"/>
-            <a:ext cx="1952484" cy="632460"/>
+            <a:off x="4395214" y="3412236"/>
+            <a:ext cx="1467079" cy="632460"/>
           </a:xfrm>
           <a:prstGeom prst="roundRect">
             <a:avLst/>
@@ -7420,8 +7420,8 @@
         </p:nvSpPr>
         <p:spPr>
           <a:xfrm>
-            <a:off x="4395215" y="4482084"/>
-            <a:ext cx="1952484" cy="632460"/>
+            <a:off x="4395214" y="4472940"/>
+            <a:ext cx="2220657" cy="632460"/>
           </a:xfrm>
           <a:prstGeom prst="roundRect">
             <a:avLst/>
@@ -7435,7 +7435,7 @@
             <a:solidFill>
               <a:schemeClr val="tx1"/>
             </a:solidFill>
-            <a:prstDash val="dash"/>
+            <a:prstDash val="solid"/>
           </a:ln>
         </p:spPr>
         <p:style>
@@ -7466,7 +7466,19 @@
                 </a:solidFill>
                 <a:latin typeface="+mj-lt"/>
               </a:rPr>
-              <a:t>Bộ phân tích cú pháp và dữ liệu phản hồi</a:t>
+              <a:t>Bộ phân tích cú pháp và</a:t>
+            </a:r>
+          </a:p>
+          <a:p>
+            <a:pPr algn="ctr"/>
+            <a:r>
+              <a:rPr lang="vi-VN" sz="1300" dirty="0">
+                <a:solidFill>
+                  <a:schemeClr val="tx1"/>
+                </a:solidFill>
+                <a:latin typeface="+mj-lt"/>
+              </a:rPr>
+              <a:t>dữ liệu phản hồi</a:t>
             </a:r>
           </a:p>
         </p:txBody>
@@ -7623,7 +7635,7 @@
         </p:nvSpPr>
         <p:spPr>
           <a:xfrm>
-            <a:off x="8388051" y="3412236"/>
+            <a:off x="8397195" y="3412236"/>
             <a:ext cx="1511805" cy="632460"/>
           </a:xfrm>
           <a:prstGeom prst="roundRect">
@@ -7693,8 +7705,8 @@
         </p:nvSpPr>
         <p:spPr>
           <a:xfrm>
-            <a:off x="4395216" y="5484876"/>
-            <a:ext cx="3409427" cy="632460"/>
+            <a:off x="8450119" y="5448300"/>
+            <a:ext cx="1919177" cy="632460"/>
           </a:xfrm>
           <a:prstGeom prst="roundRect">
             <a:avLst/>
@@ -7770,8 +7782,8 @@
         </p:nvSpPr>
         <p:spPr>
           <a:xfrm>
-            <a:off x="2298985" y="5484876"/>
-            <a:ext cx="1524983" cy="632460"/>
+            <a:off x="6425763" y="5393436"/>
+            <a:ext cx="1197834" cy="632460"/>
           </a:xfrm>
           <a:prstGeom prst="cube">
             <a:avLst>
@@ -7823,6 +7835,3175 @@
               <a:solidFill>
                 <a:schemeClr val="tx1"/>
               </a:solidFill>
+              <a:latin typeface="+mj-lt"/>
+            </a:endParaRPr>
+          </a:p>
+        </p:txBody>
+      </p:sp>
+      <p:cxnSp>
+        <p:nvCxnSpPr>
+          <p:cNvPr id="7" name="Straight Arrow Connector 6">
+            <a:extLst>
+              <a:ext uri="{FF2B5EF4-FFF2-40B4-BE49-F238E27FC236}">
+                <a16:creationId xmlns:a16="http://schemas.microsoft.com/office/drawing/2014/main" id="{E5244915-63A2-76F6-EE6C-AC60D11423EA}"/>
+              </a:ext>
+            </a:extLst>
+          </p:cNvPr>
+          <p:cNvCxnSpPr>
+            <a:stCxn id="3" idx="3"/>
+            <a:endCxn id="4" idx="1"/>
+          </p:cNvCxnSpPr>
+          <p:nvPr/>
+        </p:nvCxnSpPr>
+        <p:spPr>
+          <a:xfrm>
+            <a:off x="1737360" y="452628"/>
+            <a:ext cx="490728" cy="0"/>
+          </a:xfrm>
+          <a:prstGeom prst="straightConnector1">
+            <a:avLst/>
+          </a:prstGeom>
+          <a:ln>
+            <a:tailEnd type="triangle"/>
+          </a:ln>
+        </p:spPr>
+        <p:style>
+          <a:lnRef idx="2">
+            <a:schemeClr val="dk1"/>
+          </a:lnRef>
+          <a:fillRef idx="0">
+            <a:schemeClr val="dk1"/>
+          </a:fillRef>
+          <a:effectRef idx="1">
+            <a:schemeClr val="dk1"/>
+          </a:effectRef>
+          <a:fontRef idx="minor">
+            <a:schemeClr val="tx1"/>
+          </a:fontRef>
+        </p:style>
+      </p:cxnSp>
+      <p:cxnSp>
+        <p:nvCxnSpPr>
+          <p:cNvPr id="10" name="Straight Arrow Connector 9">
+            <a:extLst>
+              <a:ext uri="{FF2B5EF4-FFF2-40B4-BE49-F238E27FC236}">
+                <a16:creationId xmlns:a16="http://schemas.microsoft.com/office/drawing/2014/main" id="{ECB564DD-A9C2-4D81-C32E-ABF1A1F82414}"/>
+              </a:ext>
+            </a:extLst>
+          </p:cNvPr>
+          <p:cNvCxnSpPr>
+            <a:stCxn id="4" idx="3"/>
+            <a:endCxn id="5" idx="1"/>
+          </p:cNvCxnSpPr>
+          <p:nvPr/>
+        </p:nvCxnSpPr>
+        <p:spPr>
+          <a:xfrm>
+            <a:off x="3904488" y="452628"/>
+            <a:ext cx="490728" cy="0"/>
+          </a:xfrm>
+          <a:prstGeom prst="straightConnector1">
+            <a:avLst/>
+          </a:prstGeom>
+          <a:ln>
+            <a:tailEnd type="triangle"/>
+          </a:ln>
+        </p:spPr>
+        <p:style>
+          <a:lnRef idx="2">
+            <a:schemeClr val="dk1"/>
+          </a:lnRef>
+          <a:fillRef idx="0">
+            <a:schemeClr val="dk1"/>
+          </a:fillRef>
+          <a:effectRef idx="1">
+            <a:schemeClr val="dk1"/>
+          </a:effectRef>
+          <a:fontRef idx="minor">
+            <a:schemeClr val="tx1"/>
+          </a:fontRef>
+        </p:style>
+      </p:cxnSp>
+      <p:cxnSp>
+        <p:nvCxnSpPr>
+          <p:cNvPr id="12" name="Straight Arrow Connector 11">
+            <a:extLst>
+              <a:ext uri="{FF2B5EF4-FFF2-40B4-BE49-F238E27FC236}">
+                <a16:creationId xmlns:a16="http://schemas.microsoft.com/office/drawing/2014/main" id="{1DDC645D-7760-D5AD-0735-A1A545F54CB6}"/>
+              </a:ext>
+            </a:extLst>
+          </p:cNvPr>
+          <p:cNvCxnSpPr>
+            <a:stCxn id="5" idx="3"/>
+            <a:endCxn id="6" idx="2"/>
+          </p:cNvCxnSpPr>
+          <p:nvPr/>
+        </p:nvCxnSpPr>
+        <p:spPr>
+          <a:xfrm>
+            <a:off x="5852160" y="452628"/>
+            <a:ext cx="495539" cy="2286"/>
+          </a:xfrm>
+          <a:prstGeom prst="straightConnector1">
+            <a:avLst/>
+          </a:prstGeom>
+          <a:ln>
+            <a:tailEnd type="triangle"/>
+          </a:ln>
+        </p:spPr>
+        <p:style>
+          <a:lnRef idx="2">
+            <a:schemeClr val="dk1"/>
+          </a:lnRef>
+          <a:fillRef idx="0">
+            <a:schemeClr val="dk1"/>
+          </a:fillRef>
+          <a:effectRef idx="1">
+            <a:schemeClr val="dk1"/>
+          </a:effectRef>
+          <a:fontRef idx="minor">
+            <a:schemeClr val="tx1"/>
+          </a:fontRef>
+        </p:style>
+      </p:cxnSp>
+      <p:cxnSp>
+        <p:nvCxnSpPr>
+          <p:cNvPr id="16" name="Straight Arrow Connector 15">
+            <a:extLst>
+              <a:ext uri="{FF2B5EF4-FFF2-40B4-BE49-F238E27FC236}">
+                <a16:creationId xmlns:a16="http://schemas.microsoft.com/office/drawing/2014/main" id="{30E47978-4563-1DAC-40A3-E275FFD7AB75}"/>
+              </a:ext>
+            </a:extLst>
+          </p:cNvPr>
+          <p:cNvCxnSpPr>
+            <a:stCxn id="6" idx="4"/>
+            <a:endCxn id="23" idx="1"/>
+          </p:cNvCxnSpPr>
+          <p:nvPr/>
+        </p:nvCxnSpPr>
+        <p:spPr>
+          <a:xfrm>
+            <a:off x="7804643" y="454914"/>
+            <a:ext cx="583409" cy="2286"/>
+          </a:xfrm>
+          <a:prstGeom prst="straightConnector1">
+            <a:avLst/>
+          </a:prstGeom>
+          <a:ln>
+            <a:prstDash val="dash"/>
+            <a:tailEnd type="triangle"/>
+          </a:ln>
+        </p:spPr>
+        <p:style>
+          <a:lnRef idx="2">
+            <a:schemeClr val="dk1"/>
+          </a:lnRef>
+          <a:fillRef idx="0">
+            <a:schemeClr val="dk1"/>
+          </a:fillRef>
+          <a:effectRef idx="1">
+            <a:schemeClr val="dk1"/>
+          </a:effectRef>
+          <a:fontRef idx="minor">
+            <a:schemeClr val="tx1"/>
+          </a:fontRef>
+        </p:style>
+      </p:cxnSp>
+      <p:cxnSp>
+        <p:nvCxnSpPr>
+          <p:cNvPr id="19" name="Straight Arrow Connector 18">
+            <a:extLst>
+              <a:ext uri="{FF2B5EF4-FFF2-40B4-BE49-F238E27FC236}">
+                <a16:creationId xmlns:a16="http://schemas.microsoft.com/office/drawing/2014/main" id="{73369A63-B9FA-176B-E93A-AE83A9654719}"/>
+              </a:ext>
+            </a:extLst>
+          </p:cNvPr>
+          <p:cNvCxnSpPr>
+            <a:cxnSpLocks/>
+            <a:stCxn id="9" idx="2"/>
+            <a:endCxn id="23" idx="3"/>
+          </p:cNvCxnSpPr>
+          <p:nvPr/>
+        </p:nvCxnSpPr>
+        <p:spPr>
+          <a:xfrm flipH="1">
+            <a:off x="9911095" y="454659"/>
+            <a:ext cx="642045" cy="2541"/>
+          </a:xfrm>
+          <a:prstGeom prst="straightConnector1">
+            <a:avLst/>
+          </a:prstGeom>
+          <a:ln>
+            <a:prstDash val="dash"/>
+            <a:tailEnd type="triangle"/>
+          </a:ln>
+        </p:spPr>
+        <p:style>
+          <a:lnRef idx="2">
+            <a:schemeClr val="dk1"/>
+          </a:lnRef>
+          <a:fillRef idx="0">
+            <a:schemeClr val="dk1"/>
+          </a:fillRef>
+          <a:effectRef idx="1">
+            <a:schemeClr val="dk1"/>
+          </a:effectRef>
+          <a:fontRef idx="minor">
+            <a:schemeClr val="tx1"/>
+          </a:fontRef>
+        </p:style>
+      </p:cxnSp>
+      <p:cxnSp>
+        <p:nvCxnSpPr>
+          <p:cNvPr id="25" name="Straight Arrow Connector 24">
+            <a:extLst>
+              <a:ext uri="{FF2B5EF4-FFF2-40B4-BE49-F238E27FC236}">
+                <a16:creationId xmlns:a16="http://schemas.microsoft.com/office/drawing/2014/main" id="{EE8773F0-1B13-2B0F-3341-31339A3DABF0}"/>
+              </a:ext>
+            </a:extLst>
+          </p:cNvPr>
+          <p:cNvCxnSpPr>
+            <a:cxnSpLocks/>
+          </p:cNvCxnSpPr>
+          <p:nvPr/>
+        </p:nvCxnSpPr>
+        <p:spPr>
+          <a:xfrm>
+            <a:off x="9387318" y="722376"/>
+            <a:ext cx="5188" cy="607566"/>
+          </a:xfrm>
+          <a:prstGeom prst="straightConnector1">
+            <a:avLst/>
+          </a:prstGeom>
+          <a:ln>
+            <a:prstDash val="dash"/>
+            <a:tailEnd type="triangle"/>
+          </a:ln>
+        </p:spPr>
+        <p:style>
+          <a:lnRef idx="2">
+            <a:schemeClr val="dk1"/>
+          </a:lnRef>
+          <a:fillRef idx="0">
+            <a:schemeClr val="dk1"/>
+          </a:fillRef>
+          <a:effectRef idx="1">
+            <a:schemeClr val="dk1"/>
+          </a:effectRef>
+          <a:fontRef idx="minor">
+            <a:schemeClr val="tx1"/>
+          </a:fontRef>
+        </p:style>
+      </p:cxnSp>
+      <p:cxnSp>
+        <p:nvCxnSpPr>
+          <p:cNvPr id="27" name="Connector: Elbow 26">
+            <a:extLst>
+              <a:ext uri="{FF2B5EF4-FFF2-40B4-BE49-F238E27FC236}">
+                <a16:creationId xmlns:a16="http://schemas.microsoft.com/office/drawing/2014/main" id="{72047F34-37A9-DBEA-8593-094A562B174A}"/>
+              </a:ext>
+            </a:extLst>
+          </p:cNvPr>
+          <p:cNvCxnSpPr>
+            <a:stCxn id="13" idx="5"/>
+            <a:endCxn id="14" idx="2"/>
+          </p:cNvCxnSpPr>
+          <p:nvPr/>
+        </p:nvCxnSpPr>
+        <p:spPr>
+          <a:xfrm>
+            <a:off x="9962225" y="1440435"/>
+            <a:ext cx="590915" cy="687069"/>
+          </a:xfrm>
+          <a:prstGeom prst="bentConnector3">
+            <a:avLst>
+              <a:gd name="adj1" fmla="val 46906"/>
+            </a:avLst>
+          </a:prstGeom>
+          <a:ln>
+            <a:tailEnd type="triangle"/>
+          </a:ln>
+        </p:spPr>
+        <p:style>
+          <a:lnRef idx="2">
+            <a:schemeClr val="dk1"/>
+          </a:lnRef>
+          <a:fillRef idx="0">
+            <a:schemeClr val="dk1"/>
+          </a:fillRef>
+          <a:effectRef idx="1">
+            <a:schemeClr val="dk1"/>
+          </a:effectRef>
+          <a:fontRef idx="minor">
+            <a:schemeClr val="tx1"/>
+          </a:fontRef>
+        </p:style>
+      </p:cxnSp>
+      <p:cxnSp>
+        <p:nvCxnSpPr>
+          <p:cNvPr id="29" name="Straight Arrow Connector 28">
+            <a:extLst>
+              <a:ext uri="{FF2B5EF4-FFF2-40B4-BE49-F238E27FC236}">
+                <a16:creationId xmlns:a16="http://schemas.microsoft.com/office/drawing/2014/main" id="{7D113A5D-A04C-85D6-EEF1-7AF4A5A7B529}"/>
+              </a:ext>
+            </a:extLst>
+          </p:cNvPr>
+          <p:cNvCxnSpPr>
+            <a:cxnSpLocks/>
+            <a:stCxn id="17" idx="0"/>
+            <a:endCxn id="54" idx="3"/>
+          </p:cNvCxnSpPr>
+          <p:nvPr/>
+        </p:nvCxnSpPr>
+        <p:spPr>
+          <a:xfrm flipV="1">
+            <a:off x="3014488" y="1766316"/>
+            <a:ext cx="0" cy="1460184"/>
+          </a:xfrm>
+          <a:prstGeom prst="straightConnector1">
+            <a:avLst/>
+          </a:prstGeom>
+          <a:ln>
+            <a:tailEnd type="triangle"/>
+          </a:ln>
+        </p:spPr>
+        <p:style>
+          <a:lnRef idx="2">
+            <a:schemeClr val="dk1"/>
+          </a:lnRef>
+          <a:fillRef idx="0">
+            <a:schemeClr val="dk1"/>
+          </a:fillRef>
+          <a:effectRef idx="1">
+            <a:schemeClr val="dk1"/>
+          </a:effectRef>
+          <a:fontRef idx="minor">
+            <a:schemeClr val="tx1"/>
+          </a:fontRef>
+        </p:style>
+      </p:cxnSp>
+      <p:cxnSp>
+        <p:nvCxnSpPr>
+          <p:cNvPr id="34" name="Straight Arrow Connector 33">
+            <a:extLst>
+              <a:ext uri="{FF2B5EF4-FFF2-40B4-BE49-F238E27FC236}">
+                <a16:creationId xmlns:a16="http://schemas.microsoft.com/office/drawing/2014/main" id="{54C950E8-EE34-B49E-0895-F6A548ADDA64}"/>
+              </a:ext>
+            </a:extLst>
+          </p:cNvPr>
+          <p:cNvCxnSpPr>
+            <a:cxnSpLocks/>
+            <a:stCxn id="54" idx="4"/>
+            <a:endCxn id="24" idx="1"/>
+          </p:cNvCxnSpPr>
+          <p:nvPr/>
+        </p:nvCxnSpPr>
+        <p:spPr>
+          <a:xfrm flipV="1">
+            <a:off x="3805699" y="1546860"/>
+            <a:ext cx="589517" cy="1269"/>
+          </a:xfrm>
+          <a:prstGeom prst="straightConnector1">
+            <a:avLst/>
+          </a:prstGeom>
+          <a:ln>
+            <a:tailEnd type="triangle"/>
+          </a:ln>
+        </p:spPr>
+        <p:style>
+          <a:lnRef idx="2">
+            <a:schemeClr val="dk1"/>
+          </a:lnRef>
+          <a:fillRef idx="0">
+            <a:schemeClr val="dk1"/>
+          </a:fillRef>
+          <a:effectRef idx="1">
+            <a:schemeClr val="dk1"/>
+          </a:effectRef>
+          <a:fontRef idx="minor">
+            <a:schemeClr val="tx1"/>
+          </a:fontRef>
+        </p:style>
+      </p:cxnSp>
+      <p:cxnSp>
+        <p:nvCxnSpPr>
+          <p:cNvPr id="36" name="Straight Arrow Connector 35">
+            <a:extLst>
+              <a:ext uri="{FF2B5EF4-FFF2-40B4-BE49-F238E27FC236}">
+                <a16:creationId xmlns:a16="http://schemas.microsoft.com/office/drawing/2014/main" id="{F3C549D6-FF4C-1B45-A3ED-0E21615A9748}"/>
+              </a:ext>
+            </a:extLst>
+          </p:cNvPr>
+          <p:cNvCxnSpPr>
+            <a:stCxn id="24" idx="3"/>
+            <a:endCxn id="20" idx="1"/>
+          </p:cNvCxnSpPr>
+          <p:nvPr/>
+        </p:nvCxnSpPr>
+        <p:spPr>
+          <a:xfrm>
+            <a:off x="5852160" y="1546860"/>
+            <a:ext cx="495540" cy="0"/>
+          </a:xfrm>
+          <a:prstGeom prst="straightConnector1">
+            <a:avLst/>
+          </a:prstGeom>
+          <a:ln>
+            <a:tailEnd type="triangle"/>
+          </a:ln>
+        </p:spPr>
+        <p:style>
+          <a:lnRef idx="2">
+            <a:schemeClr val="dk1"/>
+          </a:lnRef>
+          <a:fillRef idx="0">
+            <a:schemeClr val="dk1"/>
+          </a:fillRef>
+          <a:effectRef idx="1">
+            <a:schemeClr val="dk1"/>
+          </a:effectRef>
+          <a:fontRef idx="minor">
+            <a:schemeClr val="tx1"/>
+          </a:fontRef>
+        </p:style>
+      </p:cxnSp>
+      <p:cxnSp>
+        <p:nvCxnSpPr>
+          <p:cNvPr id="38" name="Straight Arrow Connector 37">
+            <a:extLst>
+              <a:ext uri="{FF2B5EF4-FFF2-40B4-BE49-F238E27FC236}">
+                <a16:creationId xmlns:a16="http://schemas.microsoft.com/office/drawing/2014/main" id="{61B7315D-9A18-0B39-00A8-C588E9030025}"/>
+              </a:ext>
+            </a:extLst>
+          </p:cNvPr>
+          <p:cNvCxnSpPr>
+            <a:stCxn id="20" idx="3"/>
+            <a:endCxn id="13" idx="2"/>
+          </p:cNvCxnSpPr>
+          <p:nvPr/>
+        </p:nvCxnSpPr>
+        <p:spPr>
+          <a:xfrm flipV="1">
+            <a:off x="7804643" y="1543557"/>
+            <a:ext cx="645778" cy="3303"/>
+          </a:xfrm>
+          <a:prstGeom prst="straightConnector1">
+            <a:avLst/>
+          </a:prstGeom>
+          <a:ln>
+            <a:tailEnd type="triangle"/>
+          </a:ln>
+        </p:spPr>
+        <p:style>
+          <a:lnRef idx="2">
+            <a:schemeClr val="dk1"/>
+          </a:lnRef>
+          <a:fillRef idx="0">
+            <a:schemeClr val="dk1"/>
+          </a:fillRef>
+          <a:effectRef idx="1">
+            <a:schemeClr val="dk1"/>
+          </a:effectRef>
+          <a:fontRef idx="minor">
+            <a:schemeClr val="tx1"/>
+          </a:fontRef>
+        </p:style>
+      </p:cxnSp>
+      <p:cxnSp>
+        <p:nvCxnSpPr>
+          <p:cNvPr id="40" name="Straight Arrow Connector 39">
+            <a:extLst>
+              <a:ext uri="{FF2B5EF4-FFF2-40B4-BE49-F238E27FC236}">
+                <a16:creationId xmlns:a16="http://schemas.microsoft.com/office/drawing/2014/main" id="{F2D58ECA-A51C-44FD-6730-EF8763337F5D}"/>
+              </a:ext>
+            </a:extLst>
+          </p:cNvPr>
+          <p:cNvCxnSpPr>
+            <a:stCxn id="20" idx="2"/>
+            <a:endCxn id="58" idx="0"/>
+          </p:cNvCxnSpPr>
+          <p:nvPr/>
+        </p:nvCxnSpPr>
+        <p:spPr>
+          <a:xfrm>
+            <a:off x="7076172" y="1812036"/>
+            <a:ext cx="0" cy="538787"/>
+          </a:xfrm>
+          <a:prstGeom prst="straightConnector1">
+            <a:avLst/>
+          </a:prstGeom>
+          <a:ln>
+            <a:tailEnd type="triangle"/>
+          </a:ln>
+        </p:spPr>
+        <p:style>
+          <a:lnRef idx="2">
+            <a:schemeClr val="dk1"/>
+          </a:lnRef>
+          <a:fillRef idx="0">
+            <a:schemeClr val="dk1"/>
+          </a:fillRef>
+          <a:effectRef idx="1">
+            <a:schemeClr val="dk1"/>
+          </a:effectRef>
+          <a:fontRef idx="minor">
+            <a:schemeClr val="tx1"/>
+          </a:fontRef>
+        </p:style>
+      </p:cxnSp>
+      <p:cxnSp>
+        <p:nvCxnSpPr>
+          <p:cNvPr id="42" name="Straight Arrow Connector 41">
+            <a:extLst>
+              <a:ext uri="{FF2B5EF4-FFF2-40B4-BE49-F238E27FC236}">
+                <a16:creationId xmlns:a16="http://schemas.microsoft.com/office/drawing/2014/main" id="{645D5B8B-7D4E-1036-130C-40C221BDBEBF}"/>
+              </a:ext>
+            </a:extLst>
+          </p:cNvPr>
+          <p:cNvCxnSpPr>
+            <a:stCxn id="13" idx="3"/>
+            <a:endCxn id="57" idx="0"/>
+          </p:cNvCxnSpPr>
+          <p:nvPr/>
+        </p:nvCxnSpPr>
+        <p:spPr>
+          <a:xfrm>
+            <a:off x="9154762" y="1757172"/>
+            <a:ext cx="655" cy="493776"/>
+          </a:xfrm>
+          <a:prstGeom prst="straightConnector1">
+            <a:avLst/>
+          </a:prstGeom>
+          <a:ln>
+            <a:tailEnd type="triangle"/>
+          </a:ln>
+        </p:spPr>
+        <p:style>
+          <a:lnRef idx="2">
+            <a:schemeClr val="dk1"/>
+          </a:lnRef>
+          <a:fillRef idx="0">
+            <a:schemeClr val="dk1"/>
+          </a:fillRef>
+          <a:effectRef idx="1">
+            <a:schemeClr val="dk1"/>
+          </a:effectRef>
+          <a:fontRef idx="minor">
+            <a:schemeClr val="tx1"/>
+          </a:fontRef>
+        </p:style>
+      </p:cxnSp>
+      <p:cxnSp>
+        <p:nvCxnSpPr>
+          <p:cNvPr id="78" name="Straight Arrow Connector 77">
+            <a:extLst>
+              <a:ext uri="{FF2B5EF4-FFF2-40B4-BE49-F238E27FC236}">
+                <a16:creationId xmlns:a16="http://schemas.microsoft.com/office/drawing/2014/main" id="{3E0B055F-0174-51C2-9763-EADAF4604B8C}"/>
+              </a:ext>
+            </a:extLst>
+          </p:cNvPr>
+          <p:cNvCxnSpPr/>
+          <p:nvPr/>
+        </p:nvCxnSpPr>
+        <p:spPr>
+          <a:xfrm>
+            <a:off x="9917908" y="2496408"/>
+            <a:ext cx="635232" cy="0"/>
+          </a:xfrm>
+          <a:prstGeom prst="straightConnector1">
+            <a:avLst/>
+          </a:prstGeom>
+          <a:ln>
+            <a:tailEnd type="triangle"/>
+          </a:ln>
+        </p:spPr>
+        <p:style>
+          <a:lnRef idx="2">
+            <a:schemeClr val="dk1"/>
+          </a:lnRef>
+          <a:fillRef idx="0">
+            <a:schemeClr val="dk1"/>
+          </a:fillRef>
+          <a:effectRef idx="1">
+            <a:schemeClr val="dk1"/>
+          </a:effectRef>
+          <a:fontRef idx="minor">
+            <a:schemeClr val="tx1"/>
+          </a:fontRef>
+        </p:style>
+      </p:cxnSp>
+      <p:cxnSp>
+        <p:nvCxnSpPr>
+          <p:cNvPr id="80" name="Straight Arrow Connector 79">
+            <a:extLst>
+              <a:ext uri="{FF2B5EF4-FFF2-40B4-BE49-F238E27FC236}">
+                <a16:creationId xmlns:a16="http://schemas.microsoft.com/office/drawing/2014/main" id="{7E561A5F-68EC-D7F0-3EDD-EA2C39CA007E}"/>
+              </a:ext>
+            </a:extLst>
+          </p:cNvPr>
+          <p:cNvCxnSpPr/>
+          <p:nvPr/>
+        </p:nvCxnSpPr>
+        <p:spPr>
+          <a:xfrm flipH="1">
+            <a:off x="9917908" y="2679192"/>
+            <a:ext cx="635232" cy="0"/>
+          </a:xfrm>
+          <a:prstGeom prst="straightConnector1">
+            <a:avLst/>
+          </a:prstGeom>
+          <a:ln>
+            <a:tailEnd type="triangle"/>
+          </a:ln>
+        </p:spPr>
+        <p:style>
+          <a:lnRef idx="2">
+            <a:schemeClr val="dk1"/>
+          </a:lnRef>
+          <a:fillRef idx="0">
+            <a:schemeClr val="dk1"/>
+          </a:fillRef>
+          <a:effectRef idx="1">
+            <a:schemeClr val="dk1"/>
+          </a:effectRef>
+          <a:fontRef idx="minor">
+            <a:schemeClr val="tx1"/>
+          </a:fontRef>
+        </p:style>
+      </p:cxnSp>
+      <p:cxnSp>
+        <p:nvCxnSpPr>
+          <p:cNvPr id="82" name="Straight Arrow Connector 81">
+            <a:extLst>
+              <a:ext uri="{FF2B5EF4-FFF2-40B4-BE49-F238E27FC236}">
+                <a16:creationId xmlns:a16="http://schemas.microsoft.com/office/drawing/2014/main" id="{3C20B47F-2C45-9A57-01AE-77327090404B}"/>
+              </a:ext>
+            </a:extLst>
+          </p:cNvPr>
+          <p:cNvCxnSpPr/>
+          <p:nvPr/>
+        </p:nvCxnSpPr>
+        <p:spPr>
+          <a:xfrm>
+            <a:off x="7804643" y="2688432"/>
+            <a:ext cx="583408" cy="0"/>
+          </a:xfrm>
+          <a:prstGeom prst="straightConnector1">
+            <a:avLst/>
+          </a:prstGeom>
+          <a:ln>
+            <a:tailEnd type="triangle"/>
+          </a:ln>
+        </p:spPr>
+        <p:style>
+          <a:lnRef idx="2">
+            <a:schemeClr val="dk1"/>
+          </a:lnRef>
+          <a:fillRef idx="0">
+            <a:schemeClr val="dk1"/>
+          </a:fillRef>
+          <a:effectRef idx="1">
+            <a:schemeClr val="dk1"/>
+          </a:effectRef>
+          <a:fontRef idx="minor">
+            <a:schemeClr val="tx1"/>
+          </a:fontRef>
+        </p:style>
+      </p:cxnSp>
+      <p:cxnSp>
+        <p:nvCxnSpPr>
+          <p:cNvPr id="83" name="Straight Arrow Connector 82">
+            <a:extLst>
+              <a:ext uri="{FF2B5EF4-FFF2-40B4-BE49-F238E27FC236}">
+                <a16:creationId xmlns:a16="http://schemas.microsoft.com/office/drawing/2014/main" id="{20A3D7F3-CCCD-DBE5-9A80-EB9BDF0943D8}"/>
+              </a:ext>
+            </a:extLst>
+          </p:cNvPr>
+          <p:cNvCxnSpPr>
+            <a:cxnSpLocks/>
+          </p:cNvCxnSpPr>
+          <p:nvPr/>
+        </p:nvCxnSpPr>
+        <p:spPr>
+          <a:xfrm flipH="1">
+            <a:off x="7804643" y="2487264"/>
+            <a:ext cx="588282" cy="0"/>
+          </a:xfrm>
+          <a:prstGeom prst="straightConnector1">
+            <a:avLst/>
+          </a:prstGeom>
+          <a:ln>
+            <a:tailEnd type="triangle"/>
+          </a:ln>
+        </p:spPr>
+        <p:style>
+          <a:lnRef idx="2">
+            <a:schemeClr val="dk1"/>
+          </a:lnRef>
+          <a:fillRef idx="0">
+            <a:schemeClr val="dk1"/>
+          </a:fillRef>
+          <a:effectRef idx="1">
+            <a:schemeClr val="dk1"/>
+          </a:effectRef>
+          <a:fontRef idx="minor">
+            <a:schemeClr val="tx1"/>
+          </a:fontRef>
+        </p:style>
+      </p:cxnSp>
+      <p:cxnSp>
+        <p:nvCxnSpPr>
+          <p:cNvPr id="86" name="Straight Arrow Connector 85">
+            <a:extLst>
+              <a:ext uri="{FF2B5EF4-FFF2-40B4-BE49-F238E27FC236}">
+                <a16:creationId xmlns:a16="http://schemas.microsoft.com/office/drawing/2014/main" id="{893CE6EB-5F08-2544-FBEF-9F402634C635}"/>
+              </a:ext>
+            </a:extLst>
+          </p:cNvPr>
+          <p:cNvCxnSpPr>
+            <a:stCxn id="57" idx="2"/>
+            <a:endCxn id="65" idx="0"/>
+          </p:cNvCxnSpPr>
+          <p:nvPr/>
+        </p:nvCxnSpPr>
+        <p:spPr>
+          <a:xfrm flipH="1">
+            <a:off x="9153098" y="2973324"/>
+            <a:ext cx="2319" cy="438912"/>
+          </a:xfrm>
+          <a:prstGeom prst="straightConnector1">
+            <a:avLst/>
+          </a:prstGeom>
+          <a:ln>
+            <a:tailEnd type="triangle"/>
+          </a:ln>
+        </p:spPr>
+        <p:style>
+          <a:lnRef idx="2">
+            <a:schemeClr val="dk1"/>
+          </a:lnRef>
+          <a:fillRef idx="0">
+            <a:schemeClr val="dk1"/>
+          </a:fillRef>
+          <a:effectRef idx="1">
+            <a:schemeClr val="dk1"/>
+          </a:effectRef>
+          <a:fontRef idx="minor">
+            <a:schemeClr val="tx1"/>
+          </a:fontRef>
+        </p:style>
+      </p:cxnSp>
+      <p:cxnSp>
+        <p:nvCxnSpPr>
+          <p:cNvPr id="88" name="Straight Arrow Connector 87">
+            <a:extLst>
+              <a:ext uri="{FF2B5EF4-FFF2-40B4-BE49-F238E27FC236}">
+                <a16:creationId xmlns:a16="http://schemas.microsoft.com/office/drawing/2014/main" id="{22BF4B43-010E-23AE-6AD0-F5E5F96FEA61}"/>
+              </a:ext>
+            </a:extLst>
+          </p:cNvPr>
+          <p:cNvCxnSpPr>
+            <a:stCxn id="65" idx="3"/>
+            <a:endCxn id="59" idx="1"/>
+          </p:cNvCxnSpPr>
+          <p:nvPr/>
+        </p:nvCxnSpPr>
+        <p:spPr>
+          <a:xfrm>
+            <a:off x="9909000" y="3728466"/>
+            <a:ext cx="644140" cy="0"/>
+          </a:xfrm>
+          <a:prstGeom prst="straightConnector1">
+            <a:avLst/>
+          </a:prstGeom>
+          <a:ln>
+            <a:tailEnd type="triangle"/>
+          </a:ln>
+        </p:spPr>
+        <p:style>
+          <a:lnRef idx="2">
+            <a:schemeClr val="dk1"/>
+          </a:lnRef>
+          <a:fillRef idx="0">
+            <a:schemeClr val="dk1"/>
+          </a:fillRef>
+          <a:effectRef idx="1">
+            <a:schemeClr val="dk1"/>
+          </a:effectRef>
+          <a:fontRef idx="minor">
+            <a:schemeClr val="tx1"/>
+          </a:fontRef>
+        </p:style>
+      </p:cxnSp>
+      <p:cxnSp>
+        <p:nvCxnSpPr>
+          <p:cNvPr id="90" name="Straight Arrow Connector 89">
+            <a:extLst>
+              <a:ext uri="{FF2B5EF4-FFF2-40B4-BE49-F238E27FC236}">
+                <a16:creationId xmlns:a16="http://schemas.microsoft.com/office/drawing/2014/main" id="{5499AD5B-5E5D-6CD8-7D9B-11CB9F71C4DE}"/>
+              </a:ext>
+            </a:extLst>
+          </p:cNvPr>
+          <p:cNvCxnSpPr>
+            <a:stCxn id="65" idx="2"/>
+            <a:endCxn id="60" idx="1"/>
+          </p:cNvCxnSpPr>
+          <p:nvPr/>
+        </p:nvCxnSpPr>
+        <p:spPr>
+          <a:xfrm>
+            <a:off x="9153098" y="4044696"/>
+            <a:ext cx="3477" cy="485452"/>
+          </a:xfrm>
+          <a:prstGeom prst="straightConnector1">
+            <a:avLst/>
+          </a:prstGeom>
+          <a:ln>
+            <a:tailEnd type="triangle"/>
+          </a:ln>
+        </p:spPr>
+        <p:style>
+          <a:lnRef idx="2">
+            <a:schemeClr val="dk1"/>
+          </a:lnRef>
+          <a:fillRef idx="0">
+            <a:schemeClr val="dk1"/>
+          </a:fillRef>
+          <a:effectRef idx="1">
+            <a:schemeClr val="dk1"/>
+          </a:effectRef>
+          <a:fontRef idx="minor">
+            <a:schemeClr val="tx1"/>
+          </a:fontRef>
+        </p:style>
+      </p:cxnSp>
+      <p:cxnSp>
+        <p:nvCxnSpPr>
+          <p:cNvPr id="92" name="Connector: Elbow 91">
+            <a:extLst>
+              <a:ext uri="{FF2B5EF4-FFF2-40B4-BE49-F238E27FC236}">
+                <a16:creationId xmlns:a16="http://schemas.microsoft.com/office/drawing/2014/main" id="{674953EC-953A-2AA2-509D-D07E52184CE1}"/>
+              </a:ext>
+            </a:extLst>
+          </p:cNvPr>
+          <p:cNvCxnSpPr>
+            <a:stCxn id="59" idx="2"/>
+            <a:endCxn id="60" idx="4"/>
+          </p:cNvCxnSpPr>
+          <p:nvPr/>
+        </p:nvCxnSpPr>
+        <p:spPr>
+          <a:xfrm rot="5400000">
+            <a:off x="10216023" y="3691703"/>
+            <a:ext cx="745646" cy="1451632"/>
+          </a:xfrm>
+          <a:prstGeom prst="bentConnector2">
+            <a:avLst/>
+          </a:prstGeom>
+          <a:ln>
+            <a:tailEnd type="triangle"/>
+          </a:ln>
+        </p:spPr>
+        <p:style>
+          <a:lnRef idx="2">
+            <a:schemeClr val="dk1"/>
+          </a:lnRef>
+          <a:fillRef idx="0">
+            <a:schemeClr val="dk1"/>
+          </a:fillRef>
+          <a:effectRef idx="1">
+            <a:schemeClr val="dk1"/>
+          </a:effectRef>
+          <a:fontRef idx="minor">
+            <a:schemeClr val="tx1"/>
+          </a:fontRef>
+        </p:style>
+      </p:cxnSp>
+      <p:cxnSp>
+        <p:nvCxnSpPr>
+          <p:cNvPr id="94" name="Straight Arrow Connector 93">
+            <a:extLst>
+              <a:ext uri="{FF2B5EF4-FFF2-40B4-BE49-F238E27FC236}">
+                <a16:creationId xmlns:a16="http://schemas.microsoft.com/office/drawing/2014/main" id="{B818D712-06F0-C025-7D3D-D319D7101436}"/>
+              </a:ext>
+            </a:extLst>
+          </p:cNvPr>
+          <p:cNvCxnSpPr>
+            <a:cxnSpLocks/>
+            <a:stCxn id="60" idx="2"/>
+            <a:endCxn id="63" idx="3"/>
+          </p:cNvCxnSpPr>
+          <p:nvPr/>
+        </p:nvCxnSpPr>
+        <p:spPr>
+          <a:xfrm flipH="1" flipV="1">
+            <a:off x="6615871" y="4789170"/>
+            <a:ext cx="1834248" cy="1172"/>
+          </a:xfrm>
+          <a:prstGeom prst="straightConnector1">
+            <a:avLst/>
+          </a:prstGeom>
+          <a:ln>
+            <a:tailEnd type="triangle"/>
+          </a:ln>
+        </p:spPr>
+        <p:style>
+          <a:lnRef idx="2">
+            <a:schemeClr val="dk1"/>
+          </a:lnRef>
+          <a:fillRef idx="0">
+            <a:schemeClr val="dk1"/>
+          </a:fillRef>
+          <a:effectRef idx="1">
+            <a:schemeClr val="dk1"/>
+          </a:effectRef>
+          <a:fontRef idx="minor">
+            <a:schemeClr val="tx1"/>
+          </a:fontRef>
+        </p:style>
+      </p:cxnSp>
+      <p:cxnSp>
+        <p:nvCxnSpPr>
+          <p:cNvPr id="98" name="Connector: Elbow 97">
+            <a:extLst>
+              <a:ext uri="{FF2B5EF4-FFF2-40B4-BE49-F238E27FC236}">
+                <a16:creationId xmlns:a16="http://schemas.microsoft.com/office/drawing/2014/main" id="{CF2047C0-B234-454C-A941-7704BDE22454}"/>
+              </a:ext>
+            </a:extLst>
+          </p:cNvPr>
+          <p:cNvCxnSpPr>
+            <a:cxnSpLocks/>
+            <a:stCxn id="63" idx="1"/>
+            <a:endCxn id="17" idx="2"/>
+          </p:cNvCxnSpPr>
+          <p:nvPr/>
+        </p:nvCxnSpPr>
+        <p:spPr>
+          <a:xfrm rot="10800000">
+            <a:off x="3014488" y="4230432"/>
+            <a:ext cx="1380726" cy="558739"/>
+          </a:xfrm>
+          <a:prstGeom prst="bentConnector2">
+            <a:avLst/>
+          </a:prstGeom>
+          <a:ln>
+            <a:tailEnd type="triangle"/>
+          </a:ln>
+        </p:spPr>
+        <p:style>
+          <a:lnRef idx="2">
+            <a:schemeClr val="dk1"/>
+          </a:lnRef>
+          <a:fillRef idx="0">
+            <a:schemeClr val="dk1"/>
+          </a:fillRef>
+          <a:effectRef idx="1">
+            <a:schemeClr val="dk1"/>
+          </a:effectRef>
+          <a:fontRef idx="minor">
+            <a:schemeClr val="tx1"/>
+          </a:fontRef>
+        </p:style>
+      </p:cxnSp>
+      <p:cxnSp>
+        <p:nvCxnSpPr>
+          <p:cNvPr id="100" name="Connector: Elbow 99">
+            <a:extLst>
+              <a:ext uri="{FF2B5EF4-FFF2-40B4-BE49-F238E27FC236}">
+                <a16:creationId xmlns:a16="http://schemas.microsoft.com/office/drawing/2014/main" id="{F0C8EDDE-1843-CBCA-C82D-2EE433AEB7B4}"/>
+              </a:ext>
+            </a:extLst>
+          </p:cNvPr>
+          <p:cNvCxnSpPr>
+            <a:cxnSpLocks/>
+            <a:stCxn id="63" idx="2"/>
+            <a:endCxn id="67" idx="2"/>
+          </p:cNvCxnSpPr>
+          <p:nvPr/>
+        </p:nvCxnSpPr>
+        <p:spPr>
+          <a:xfrm rot="16200000" flipH="1">
+            <a:off x="5635502" y="4975441"/>
+            <a:ext cx="660302" cy="920220"/>
+          </a:xfrm>
+          <a:prstGeom prst="bentConnector2">
+            <a:avLst/>
+          </a:prstGeom>
+          <a:ln>
+            <a:prstDash val="dash"/>
+            <a:tailEnd type="triangle"/>
+          </a:ln>
+        </p:spPr>
+        <p:style>
+          <a:lnRef idx="2">
+            <a:schemeClr val="dk1"/>
+          </a:lnRef>
+          <a:fillRef idx="0">
+            <a:schemeClr val="dk1"/>
+          </a:fillRef>
+          <a:effectRef idx="1">
+            <a:schemeClr val="dk1"/>
+          </a:effectRef>
+          <a:fontRef idx="minor">
+            <a:schemeClr val="tx1"/>
+          </a:fontRef>
+        </p:style>
+      </p:cxnSp>
+      <p:cxnSp>
+        <p:nvCxnSpPr>
+          <p:cNvPr id="103" name="Straight Arrow Connector 102">
+            <a:extLst>
+              <a:ext uri="{FF2B5EF4-FFF2-40B4-BE49-F238E27FC236}">
+                <a16:creationId xmlns:a16="http://schemas.microsoft.com/office/drawing/2014/main" id="{6DF0944B-DF3B-FBF9-B2FA-2ACBDE23B968}"/>
+              </a:ext>
+            </a:extLst>
+          </p:cNvPr>
+          <p:cNvCxnSpPr>
+            <a:cxnSpLocks/>
+            <a:endCxn id="61" idx="1"/>
+          </p:cNvCxnSpPr>
+          <p:nvPr/>
+        </p:nvCxnSpPr>
+        <p:spPr>
+          <a:xfrm>
+            <a:off x="3516453" y="3728465"/>
+            <a:ext cx="878761" cy="1"/>
+          </a:xfrm>
+          <a:prstGeom prst="straightConnector1">
+            <a:avLst/>
+          </a:prstGeom>
+          <a:ln>
+            <a:prstDash val="dash"/>
+            <a:tailEnd type="triangle"/>
+          </a:ln>
+        </p:spPr>
+        <p:style>
+          <a:lnRef idx="2">
+            <a:schemeClr val="dk1"/>
+          </a:lnRef>
+          <a:fillRef idx="0">
+            <a:schemeClr val="dk1"/>
+          </a:fillRef>
+          <a:effectRef idx="1">
+            <a:schemeClr val="dk1"/>
+          </a:effectRef>
+          <a:fontRef idx="minor">
+            <a:schemeClr val="tx1"/>
+          </a:fontRef>
+        </p:style>
+      </p:cxnSp>
+      <p:cxnSp>
+        <p:nvCxnSpPr>
+          <p:cNvPr id="105" name="Straight Arrow Connector 104">
+            <a:extLst>
+              <a:ext uri="{FF2B5EF4-FFF2-40B4-BE49-F238E27FC236}">
+                <a16:creationId xmlns:a16="http://schemas.microsoft.com/office/drawing/2014/main" id="{3DEFA6A6-54D3-A975-2E74-ACF839F82619}"/>
+              </a:ext>
+            </a:extLst>
+          </p:cNvPr>
+          <p:cNvCxnSpPr>
+            <a:cxnSpLocks/>
+            <a:endCxn id="62" idx="3"/>
+          </p:cNvCxnSpPr>
+          <p:nvPr/>
+        </p:nvCxnSpPr>
+        <p:spPr>
+          <a:xfrm flipH="1" flipV="1">
+            <a:off x="5123687" y="2974848"/>
+            <a:ext cx="10134" cy="405384"/>
+          </a:xfrm>
+          <a:prstGeom prst="straightConnector1">
+            <a:avLst/>
+          </a:prstGeom>
+          <a:ln>
+            <a:solidFill>
+              <a:schemeClr val="tx1"/>
+            </a:solidFill>
+            <a:prstDash val="dash"/>
+            <a:tailEnd type="triangle"/>
+          </a:ln>
+        </p:spPr>
+        <p:style>
+          <a:lnRef idx="2">
+            <a:schemeClr val="dk1"/>
+          </a:lnRef>
+          <a:fillRef idx="0">
+            <a:schemeClr val="dk1"/>
+          </a:fillRef>
+          <a:effectRef idx="1">
+            <a:schemeClr val="dk1"/>
+          </a:effectRef>
+          <a:fontRef idx="minor">
+            <a:schemeClr val="tx1"/>
+          </a:fontRef>
+        </p:style>
+      </p:cxnSp>
+      <p:cxnSp>
+        <p:nvCxnSpPr>
+          <p:cNvPr id="109" name="Straight Arrow Connector 108">
+            <a:extLst>
+              <a:ext uri="{FF2B5EF4-FFF2-40B4-BE49-F238E27FC236}">
+                <a16:creationId xmlns:a16="http://schemas.microsoft.com/office/drawing/2014/main" id="{452208B9-71BD-B2E0-3CE2-EE501E854A49}"/>
+              </a:ext>
+            </a:extLst>
+          </p:cNvPr>
+          <p:cNvCxnSpPr>
+            <a:cxnSpLocks/>
+            <a:stCxn id="67" idx="4"/>
+            <a:endCxn id="66" idx="1"/>
+          </p:cNvCxnSpPr>
+          <p:nvPr/>
+        </p:nvCxnSpPr>
+        <p:spPr>
+          <a:xfrm flipV="1">
+            <a:off x="7511525" y="5764530"/>
+            <a:ext cx="938594" cy="1172"/>
+          </a:xfrm>
+          <a:prstGeom prst="straightConnector1">
+            <a:avLst/>
+          </a:prstGeom>
+          <a:ln>
+            <a:prstDash val="dash"/>
+            <a:tailEnd type="triangle"/>
+          </a:ln>
+        </p:spPr>
+        <p:style>
+          <a:lnRef idx="2">
+            <a:schemeClr val="dk1"/>
+          </a:lnRef>
+          <a:fillRef idx="0">
+            <a:schemeClr val="dk1"/>
+          </a:fillRef>
+          <a:effectRef idx="1">
+            <a:schemeClr val="dk1"/>
+          </a:effectRef>
+          <a:fontRef idx="minor">
+            <a:schemeClr val="tx1"/>
+          </a:fontRef>
+        </p:style>
+      </p:cxnSp>
+      <p:cxnSp>
+        <p:nvCxnSpPr>
+          <p:cNvPr id="113" name="Connector: Elbow 112">
+            <a:extLst>
+              <a:ext uri="{FF2B5EF4-FFF2-40B4-BE49-F238E27FC236}">
+                <a16:creationId xmlns:a16="http://schemas.microsoft.com/office/drawing/2014/main" id="{E9FC4317-5ABC-E301-8B89-0205BE05C6C3}"/>
+              </a:ext>
+            </a:extLst>
+          </p:cNvPr>
+          <p:cNvCxnSpPr>
+            <a:cxnSpLocks/>
+            <a:stCxn id="66" idx="0"/>
+            <a:endCxn id="58" idx="3"/>
+          </p:cNvCxnSpPr>
+          <p:nvPr/>
+        </p:nvCxnSpPr>
+        <p:spPr>
+          <a:xfrm rot="16200000" flipV="1">
+            <a:off x="7006214" y="3044806"/>
+            <a:ext cx="2473452" cy="2333536"/>
+          </a:xfrm>
+          <a:prstGeom prst="bentConnector3">
+            <a:avLst>
+              <a:gd name="adj1" fmla="val 10444"/>
+            </a:avLst>
+          </a:prstGeom>
+          <a:ln>
+            <a:prstDash val="dash"/>
+            <a:tailEnd type="triangle"/>
+          </a:ln>
+        </p:spPr>
+        <p:style>
+          <a:lnRef idx="2">
+            <a:schemeClr val="dk1"/>
+          </a:lnRef>
+          <a:fillRef idx="0">
+            <a:schemeClr val="dk1"/>
+          </a:fillRef>
+          <a:effectRef idx="1">
+            <a:schemeClr val="dk1"/>
+          </a:effectRef>
+          <a:fontRef idx="minor">
+            <a:schemeClr val="tx1"/>
+          </a:fontRef>
+        </p:style>
+      </p:cxnSp>
+      <p:cxnSp>
+        <p:nvCxnSpPr>
+          <p:cNvPr id="151" name="Straight Connector 150">
+            <a:extLst>
+              <a:ext uri="{FF2B5EF4-FFF2-40B4-BE49-F238E27FC236}">
+                <a16:creationId xmlns:a16="http://schemas.microsoft.com/office/drawing/2014/main" id="{2888B481-7A39-096A-3CD3-DE70ED41D2BB}"/>
+              </a:ext>
+            </a:extLst>
+          </p:cNvPr>
+          <p:cNvCxnSpPr>
+            <a:cxnSpLocks/>
+            <a:stCxn id="64" idx="3"/>
+          </p:cNvCxnSpPr>
+          <p:nvPr/>
+        </p:nvCxnSpPr>
+        <p:spPr>
+          <a:xfrm>
+            <a:off x="1737360" y="4748784"/>
+            <a:ext cx="393192" cy="0"/>
+          </a:xfrm>
+          <a:prstGeom prst="line">
+            <a:avLst/>
+          </a:prstGeom>
+          <a:ln>
+            <a:headEnd type="triangle" w="med" len="med"/>
+            <a:tailEnd type="none" w="med" len="med"/>
+          </a:ln>
+        </p:spPr>
+        <p:style>
+          <a:lnRef idx="2">
+            <a:schemeClr val="dk1"/>
+          </a:lnRef>
+          <a:fillRef idx="0">
+            <a:schemeClr val="dk1"/>
+          </a:fillRef>
+          <a:effectRef idx="1">
+            <a:schemeClr val="dk1"/>
+          </a:effectRef>
+          <a:fontRef idx="minor">
+            <a:schemeClr val="tx1"/>
+          </a:fontRef>
+        </p:style>
+      </p:cxnSp>
+      <p:cxnSp>
+        <p:nvCxnSpPr>
+          <p:cNvPr id="153" name="Straight Connector 152">
+            <a:extLst>
+              <a:ext uri="{FF2B5EF4-FFF2-40B4-BE49-F238E27FC236}">
+                <a16:creationId xmlns:a16="http://schemas.microsoft.com/office/drawing/2014/main" id="{997A810C-FDE1-B67A-673F-F3A557A0CB42}"/>
+              </a:ext>
+            </a:extLst>
+          </p:cNvPr>
+          <p:cNvCxnSpPr>
+            <a:cxnSpLocks/>
+          </p:cNvCxnSpPr>
+          <p:nvPr/>
+        </p:nvCxnSpPr>
+        <p:spPr>
+          <a:xfrm flipV="1">
+            <a:off x="2122932" y="3728465"/>
+            <a:ext cx="0" cy="1020319"/>
+          </a:xfrm>
+          <a:prstGeom prst="line">
+            <a:avLst/>
+          </a:prstGeom>
+        </p:spPr>
+        <p:style>
+          <a:lnRef idx="2">
+            <a:schemeClr val="dk1"/>
+          </a:lnRef>
+          <a:fillRef idx="0">
+            <a:schemeClr val="dk1"/>
+          </a:fillRef>
+          <a:effectRef idx="1">
+            <a:schemeClr val="dk1"/>
+          </a:effectRef>
+          <a:fontRef idx="minor">
+            <a:schemeClr val="tx1"/>
+          </a:fontRef>
+        </p:style>
+      </p:cxnSp>
+      <p:cxnSp>
+        <p:nvCxnSpPr>
+          <p:cNvPr id="155" name="Straight Connector 154">
+            <a:extLst>
+              <a:ext uri="{FF2B5EF4-FFF2-40B4-BE49-F238E27FC236}">
+                <a16:creationId xmlns:a16="http://schemas.microsoft.com/office/drawing/2014/main" id="{48767D13-55AF-5E73-A0F8-293F3EB6BE56}"/>
+              </a:ext>
+            </a:extLst>
+          </p:cNvPr>
+          <p:cNvCxnSpPr>
+            <a:cxnSpLocks/>
+          </p:cNvCxnSpPr>
+          <p:nvPr/>
+        </p:nvCxnSpPr>
+        <p:spPr>
+          <a:xfrm>
+            <a:off x="2121408" y="3728465"/>
+            <a:ext cx="466344" cy="0"/>
+          </a:xfrm>
+          <a:prstGeom prst="line">
+            <a:avLst/>
+          </a:prstGeom>
+          <a:ln>
+            <a:headEnd type="none" w="med" len="med"/>
+            <a:tailEnd type="triangle" w="med" len="med"/>
+          </a:ln>
+        </p:spPr>
+        <p:style>
+          <a:lnRef idx="2">
+            <a:schemeClr val="dk1"/>
+          </a:lnRef>
+          <a:fillRef idx="0">
+            <a:schemeClr val="dk1"/>
+          </a:fillRef>
+          <a:effectRef idx="1">
+            <a:schemeClr val="dk1"/>
+          </a:effectRef>
+          <a:fontRef idx="minor">
+            <a:schemeClr val="tx1"/>
+          </a:fontRef>
+        </p:style>
+      </p:cxnSp>
+      <p:cxnSp>
+        <p:nvCxnSpPr>
+          <p:cNvPr id="166" name="Connector: Elbow 165">
+            <a:extLst>
+              <a:ext uri="{FF2B5EF4-FFF2-40B4-BE49-F238E27FC236}">
+                <a16:creationId xmlns:a16="http://schemas.microsoft.com/office/drawing/2014/main" id="{81C65EEC-4071-5E36-0065-18102D4C3BE8}"/>
+              </a:ext>
+            </a:extLst>
+          </p:cNvPr>
+          <p:cNvCxnSpPr>
+            <a:cxnSpLocks/>
+            <a:endCxn id="56" idx="3"/>
+          </p:cNvCxnSpPr>
+          <p:nvPr/>
+        </p:nvCxnSpPr>
+        <p:spPr>
+          <a:xfrm rot="10800000">
+            <a:off x="1737361" y="2612136"/>
+            <a:ext cx="1152317" cy="611124"/>
+          </a:xfrm>
+          <a:prstGeom prst="bentConnector3">
+            <a:avLst>
+              <a:gd name="adj1" fmla="val 735"/>
+            </a:avLst>
+          </a:prstGeom>
+          <a:ln>
+            <a:tailEnd type="triangle"/>
+          </a:ln>
+        </p:spPr>
+        <p:style>
+          <a:lnRef idx="2">
+            <a:schemeClr val="dk1"/>
+          </a:lnRef>
+          <a:fillRef idx="0">
+            <a:schemeClr val="dk1"/>
+          </a:fillRef>
+          <a:effectRef idx="1">
+            <a:schemeClr val="dk1"/>
+          </a:effectRef>
+          <a:fontRef idx="minor">
+            <a:schemeClr val="tx1"/>
+          </a:fontRef>
+        </p:style>
+      </p:cxnSp>
+      <p:cxnSp>
+        <p:nvCxnSpPr>
+          <p:cNvPr id="173" name="Straight Arrow Connector 172">
+            <a:extLst>
+              <a:ext uri="{FF2B5EF4-FFF2-40B4-BE49-F238E27FC236}">
+                <a16:creationId xmlns:a16="http://schemas.microsoft.com/office/drawing/2014/main" id="{43D634BE-31AE-A930-E307-79675B0A6951}"/>
+              </a:ext>
+            </a:extLst>
+          </p:cNvPr>
+          <p:cNvCxnSpPr>
+            <a:cxnSpLocks/>
+            <a:stCxn id="56" idx="0"/>
+            <a:endCxn id="55" idx="2"/>
+          </p:cNvCxnSpPr>
+          <p:nvPr/>
+        </p:nvCxnSpPr>
+        <p:spPr>
+          <a:xfrm flipV="1">
+            <a:off x="941832" y="1836420"/>
+            <a:ext cx="3462" cy="414528"/>
+          </a:xfrm>
+          <a:prstGeom prst="straightConnector1">
+            <a:avLst/>
+          </a:prstGeom>
+          <a:ln>
+            <a:tailEnd type="triangle"/>
+          </a:ln>
+        </p:spPr>
+        <p:style>
+          <a:lnRef idx="2">
+            <a:schemeClr val="dk1"/>
+          </a:lnRef>
+          <a:fillRef idx="0">
+            <a:schemeClr val="dk1"/>
+          </a:fillRef>
+          <a:effectRef idx="1">
+            <a:schemeClr val="dk1"/>
+          </a:effectRef>
+          <a:fontRef idx="minor">
+            <a:schemeClr val="tx1"/>
+          </a:fontRef>
+        </p:style>
+      </p:cxnSp>
+      <p:cxnSp>
+        <p:nvCxnSpPr>
+          <p:cNvPr id="175" name="Straight Arrow Connector 174">
+            <a:extLst>
+              <a:ext uri="{FF2B5EF4-FFF2-40B4-BE49-F238E27FC236}">
+                <a16:creationId xmlns:a16="http://schemas.microsoft.com/office/drawing/2014/main" id="{E8C2BC04-FB25-AFA6-0C83-90D85821B5FD}"/>
+              </a:ext>
+            </a:extLst>
+          </p:cNvPr>
+          <p:cNvCxnSpPr>
+            <a:cxnSpLocks/>
+            <a:stCxn id="55" idx="3"/>
+            <a:endCxn id="54" idx="2"/>
+          </p:cNvCxnSpPr>
+          <p:nvPr/>
+        </p:nvCxnSpPr>
+        <p:spPr>
+          <a:xfrm flipV="1">
+            <a:off x="1744284" y="1548129"/>
+            <a:ext cx="478993" cy="1779"/>
+          </a:xfrm>
+          <a:prstGeom prst="straightConnector1">
+            <a:avLst/>
+          </a:prstGeom>
+          <a:ln>
+            <a:tailEnd type="triangle"/>
+          </a:ln>
+        </p:spPr>
+        <p:style>
+          <a:lnRef idx="2">
+            <a:schemeClr val="dk1"/>
+          </a:lnRef>
+          <a:fillRef idx="0">
+            <a:schemeClr val="dk1"/>
+          </a:fillRef>
+          <a:effectRef idx="1">
+            <a:schemeClr val="dk1"/>
+          </a:effectRef>
+          <a:fontRef idx="minor">
+            <a:schemeClr val="tx1"/>
+          </a:fontRef>
+        </p:style>
+      </p:cxnSp>
+      <p:cxnSp>
+        <p:nvCxnSpPr>
+          <p:cNvPr id="177" name="Connector: Elbow 176">
+            <a:extLst>
+              <a:ext uri="{FF2B5EF4-FFF2-40B4-BE49-F238E27FC236}">
+                <a16:creationId xmlns:a16="http://schemas.microsoft.com/office/drawing/2014/main" id="{937361AC-5BC3-026B-3653-708B57FC5409}"/>
+              </a:ext>
+            </a:extLst>
+          </p:cNvPr>
+          <p:cNvCxnSpPr>
+            <a:cxnSpLocks/>
+          </p:cNvCxnSpPr>
+          <p:nvPr/>
+        </p:nvCxnSpPr>
+        <p:spPr>
+          <a:xfrm rot="10800000" flipV="1">
+            <a:off x="3159761" y="2487262"/>
+            <a:ext cx="1249775" cy="734730"/>
+          </a:xfrm>
+          <a:prstGeom prst="bentConnector3">
+            <a:avLst>
+              <a:gd name="adj1" fmla="val 99793"/>
+            </a:avLst>
+          </a:prstGeom>
+          <a:ln>
+            <a:prstDash val="dash"/>
+            <a:headEnd type="triangle" w="med" len="med"/>
+            <a:tailEnd type="triangle" w="med" len="med"/>
+          </a:ln>
+        </p:spPr>
+        <p:style>
+          <a:lnRef idx="2">
+            <a:schemeClr val="dk1"/>
+          </a:lnRef>
+          <a:fillRef idx="0">
+            <a:schemeClr val="dk1"/>
+          </a:fillRef>
+          <a:effectRef idx="1">
+            <a:schemeClr val="dk1"/>
+          </a:effectRef>
+          <a:fontRef idx="minor">
+            <a:schemeClr val="tx1"/>
+          </a:fontRef>
+        </p:style>
+      </p:cxnSp>
+      <p:cxnSp>
+        <p:nvCxnSpPr>
+          <p:cNvPr id="198" name="Connector: Elbow 197">
+            <a:extLst>
+              <a:ext uri="{FF2B5EF4-FFF2-40B4-BE49-F238E27FC236}">
+                <a16:creationId xmlns:a16="http://schemas.microsoft.com/office/drawing/2014/main" id="{BA8F1A4B-01A4-11E8-378F-60F0E6E6EBF6}"/>
+              </a:ext>
+            </a:extLst>
+          </p:cNvPr>
+          <p:cNvCxnSpPr>
+            <a:cxnSpLocks/>
+            <a:endCxn id="62" idx="2"/>
+          </p:cNvCxnSpPr>
+          <p:nvPr/>
+        </p:nvCxnSpPr>
+        <p:spPr>
+          <a:xfrm rot="5400000" flipH="1" flipV="1">
+            <a:off x="3196786" y="3468879"/>
+            <a:ext cx="2053648" cy="343210"/>
+          </a:xfrm>
+          <a:prstGeom prst="bentConnector2">
+            <a:avLst/>
+          </a:prstGeom>
+          <a:ln>
+            <a:prstDash val="dash"/>
+            <a:tailEnd type="triangle"/>
+          </a:ln>
+        </p:spPr>
+        <p:style>
+          <a:lnRef idx="2">
+            <a:schemeClr val="dk1"/>
+          </a:lnRef>
+          <a:fillRef idx="0">
+            <a:schemeClr val="dk1"/>
+          </a:fillRef>
+          <a:effectRef idx="1">
+            <a:schemeClr val="dk1"/>
+          </a:effectRef>
+          <a:fontRef idx="minor">
+            <a:schemeClr val="tx1"/>
+          </a:fontRef>
+        </p:style>
+      </p:cxnSp>
+      <p:cxnSp>
+        <p:nvCxnSpPr>
+          <p:cNvPr id="210" name="Straight Arrow Connector 209">
+            <a:extLst>
+              <a:ext uri="{FF2B5EF4-FFF2-40B4-BE49-F238E27FC236}">
+                <a16:creationId xmlns:a16="http://schemas.microsoft.com/office/drawing/2014/main" id="{529515B2-14A0-5DB1-33A5-B80483A9852C}"/>
+              </a:ext>
+            </a:extLst>
+          </p:cNvPr>
+          <p:cNvCxnSpPr>
+            <a:cxnSpLocks/>
+          </p:cNvCxnSpPr>
+          <p:nvPr/>
+        </p:nvCxnSpPr>
+        <p:spPr>
+          <a:xfrm flipH="1">
+            <a:off x="4052005" y="4667308"/>
+            <a:ext cx="343209" cy="0"/>
+          </a:xfrm>
+          <a:prstGeom prst="straightConnector1">
+            <a:avLst/>
+          </a:prstGeom>
+          <a:ln>
+            <a:prstDash val="dash"/>
+            <a:headEnd type="none" w="med" len="med"/>
+            <a:tailEnd type="none" w="med" len="med"/>
+          </a:ln>
+        </p:spPr>
+        <p:style>
+          <a:lnRef idx="2">
+            <a:schemeClr val="dk1"/>
+          </a:lnRef>
+          <a:fillRef idx="0">
+            <a:schemeClr val="dk1"/>
+          </a:fillRef>
+          <a:effectRef idx="1">
+            <a:schemeClr val="dk1"/>
+          </a:effectRef>
+          <a:fontRef idx="minor">
+            <a:schemeClr val="tx1"/>
+          </a:fontRef>
+        </p:style>
+      </p:cxnSp>
+      <p:sp>
+        <p:nvSpPr>
+          <p:cNvPr id="224" name="Rectangle: Rounded Corners 223">
+            <a:extLst>
+              <a:ext uri="{FF2B5EF4-FFF2-40B4-BE49-F238E27FC236}">
+                <a16:creationId xmlns:a16="http://schemas.microsoft.com/office/drawing/2014/main" id="{D03AB27B-21F2-EE19-54E3-030F281BCE77}"/>
+              </a:ext>
+            </a:extLst>
+          </p:cNvPr>
+          <p:cNvSpPr/>
+          <p:nvPr/>
+        </p:nvSpPr>
+        <p:spPr>
+          <a:xfrm>
+            <a:off x="2334800" y="5412736"/>
+            <a:ext cx="1591056" cy="722376"/>
+          </a:xfrm>
+          <a:prstGeom prst="roundRect">
+            <a:avLst/>
+          </a:prstGeom>
+          <a:solidFill>
+            <a:schemeClr val="bg1">
+              <a:lumMod val="95000"/>
+            </a:schemeClr>
+          </a:solidFill>
+          <a:ln>
+            <a:solidFill>
+              <a:schemeClr val="tx1"/>
+            </a:solidFill>
+            <a:prstDash val="dash"/>
+          </a:ln>
+        </p:spPr>
+        <p:style>
+          <a:lnRef idx="2">
+            <a:schemeClr val="accent1">
+              <a:shade val="15000"/>
+            </a:schemeClr>
+          </a:lnRef>
+          <a:fillRef idx="1">
+            <a:schemeClr val="accent1"/>
+          </a:fillRef>
+          <a:effectRef idx="0">
+            <a:schemeClr val="accent1"/>
+          </a:effectRef>
+          <a:fontRef idx="minor">
+            <a:schemeClr val="lt1"/>
+          </a:fontRef>
+        </p:style>
+        <p:txBody>
+          <a:bodyPr rtlCol="0" anchor="ctr"/>
+          <a:lstStyle/>
+          <a:p>
+            <a:pPr algn="ctr"/>
+            <a:r>
+              <a:rPr lang="vi-VN" sz="1300" dirty="0">
+                <a:solidFill>
+                  <a:schemeClr val="tx1"/>
+                </a:solidFill>
+                <a:latin typeface="+mj-lt"/>
+              </a:rPr>
+              <a:t>Chuyển văn bản thành âm thanh</a:t>
+            </a:r>
+            <a:endParaRPr lang="en-US" sz="1300" dirty="0">
+              <a:solidFill>
+                <a:schemeClr val="tx1"/>
+              </a:solidFill>
+              <a:latin typeface="+mj-lt"/>
+            </a:endParaRPr>
+          </a:p>
+        </p:txBody>
+      </p:sp>
+      <p:cxnSp>
+        <p:nvCxnSpPr>
+          <p:cNvPr id="228" name="Connector: Elbow 227">
+            <a:extLst>
+              <a:ext uri="{FF2B5EF4-FFF2-40B4-BE49-F238E27FC236}">
+                <a16:creationId xmlns:a16="http://schemas.microsoft.com/office/drawing/2014/main" id="{7D7E927B-54AD-7885-BFAA-9003CE363D33}"/>
+              </a:ext>
+            </a:extLst>
+          </p:cNvPr>
+          <p:cNvCxnSpPr>
+            <a:cxnSpLocks/>
+            <a:endCxn id="224" idx="3"/>
+          </p:cNvCxnSpPr>
+          <p:nvPr/>
+        </p:nvCxnSpPr>
+        <p:spPr>
+          <a:xfrm rot="10800000" flipV="1">
+            <a:off x="3925856" y="5113014"/>
+            <a:ext cx="1197832" cy="660909"/>
+          </a:xfrm>
+          <a:prstGeom prst="bentConnector3">
+            <a:avLst>
+              <a:gd name="adj1" fmla="val -256"/>
+            </a:avLst>
+          </a:prstGeom>
+          <a:ln>
+            <a:tailEnd type="triangle"/>
+          </a:ln>
+        </p:spPr>
+        <p:style>
+          <a:lnRef idx="2">
+            <a:schemeClr val="dk1"/>
+          </a:lnRef>
+          <a:fillRef idx="0">
+            <a:schemeClr val="dk1"/>
+          </a:fillRef>
+          <a:effectRef idx="1">
+            <a:schemeClr val="dk1"/>
+          </a:effectRef>
+          <a:fontRef idx="minor">
+            <a:schemeClr val="tx1"/>
+          </a:fontRef>
+        </p:style>
+      </p:cxnSp>
+      <p:cxnSp>
+        <p:nvCxnSpPr>
+          <p:cNvPr id="230" name="Straight Arrow Connector 229">
+            <a:extLst>
+              <a:ext uri="{FF2B5EF4-FFF2-40B4-BE49-F238E27FC236}">
+                <a16:creationId xmlns:a16="http://schemas.microsoft.com/office/drawing/2014/main" id="{A46722BE-4CA8-7DD3-2630-4333F32F733F}"/>
+              </a:ext>
+            </a:extLst>
+          </p:cNvPr>
+          <p:cNvCxnSpPr/>
+          <p:nvPr/>
+        </p:nvCxnSpPr>
+        <p:spPr>
+          <a:xfrm flipV="1">
+            <a:off x="2874264" y="4230431"/>
+            <a:ext cx="0" cy="1174685"/>
+          </a:xfrm>
+          <a:prstGeom prst="straightConnector1">
+            <a:avLst/>
+          </a:prstGeom>
+          <a:ln>
+            <a:tailEnd type="triangle"/>
+          </a:ln>
+        </p:spPr>
+        <p:style>
+          <a:lnRef idx="2">
+            <a:schemeClr val="dk1"/>
+          </a:lnRef>
+          <a:fillRef idx="0">
+            <a:schemeClr val="dk1"/>
+          </a:fillRef>
+          <a:effectRef idx="1">
+            <a:schemeClr val="dk1"/>
+          </a:effectRef>
+          <a:fontRef idx="minor">
+            <a:schemeClr val="tx1"/>
+          </a:fontRef>
+        </p:style>
+      </p:cxnSp>
+      <p:cxnSp>
+        <p:nvCxnSpPr>
+          <p:cNvPr id="254" name="Connector: Elbow 253">
+            <a:extLst>
+              <a:ext uri="{FF2B5EF4-FFF2-40B4-BE49-F238E27FC236}">
+                <a16:creationId xmlns:a16="http://schemas.microsoft.com/office/drawing/2014/main" id="{852310E1-ECBE-0632-B85C-693B6D5BBD09}"/>
+              </a:ext>
+            </a:extLst>
+          </p:cNvPr>
+          <p:cNvCxnSpPr>
+            <a:cxnSpLocks/>
+            <a:stCxn id="6" idx="3"/>
+            <a:endCxn id="13" idx="1"/>
+          </p:cNvCxnSpPr>
+          <p:nvPr/>
+        </p:nvCxnSpPr>
+        <p:spPr>
+          <a:xfrm rot="16200000" flipH="1">
+            <a:off x="7839115" y="14295"/>
+            <a:ext cx="552702" cy="2078591"/>
+          </a:xfrm>
+          <a:prstGeom prst="bentConnector3">
+            <a:avLst/>
+          </a:prstGeom>
+          <a:ln>
+            <a:tailEnd type="triangle"/>
+          </a:ln>
+        </p:spPr>
+        <p:style>
+          <a:lnRef idx="2">
+            <a:schemeClr val="dk1"/>
+          </a:lnRef>
+          <a:fillRef idx="0">
+            <a:schemeClr val="dk1"/>
+          </a:fillRef>
+          <a:effectRef idx="1">
+            <a:schemeClr val="dk1"/>
+          </a:effectRef>
+          <a:fontRef idx="minor">
+            <a:schemeClr val="tx1"/>
+          </a:fontRef>
+        </p:style>
+      </p:cxnSp>
+      <p:sp>
+        <p:nvSpPr>
+          <p:cNvPr id="256" name="TextBox 255">
+            <a:extLst>
+              <a:ext uri="{FF2B5EF4-FFF2-40B4-BE49-F238E27FC236}">
+                <a16:creationId xmlns:a16="http://schemas.microsoft.com/office/drawing/2014/main" id="{22B93CA2-65CF-9AD2-0E86-AC44B7FD0C5C}"/>
+              </a:ext>
+            </a:extLst>
+          </p:cNvPr>
+          <p:cNvSpPr txBox="1"/>
+          <p:nvPr/>
+        </p:nvSpPr>
+        <p:spPr>
+          <a:xfrm>
+            <a:off x="1772212" y="134112"/>
+            <a:ext cx="409086" cy="323165"/>
+          </a:xfrm>
+          <a:prstGeom prst="rect">
+            <a:avLst/>
+          </a:prstGeom>
+          <a:noFill/>
+        </p:spPr>
+        <p:txBody>
+          <a:bodyPr wrap="none" rtlCol="0">
+            <a:spAutoFit/>
+          </a:bodyPr>
+          <a:lstStyle/>
+          <a:p>
+            <a:r>
+              <a:rPr lang="vi-VN" sz="1500" dirty="0">
+                <a:latin typeface="+mj-lt"/>
+              </a:rPr>
+              <a:t>(1)</a:t>
+            </a:r>
+            <a:endParaRPr lang="en-US" sz="1500" dirty="0">
+              <a:latin typeface="+mj-lt"/>
+            </a:endParaRPr>
+          </a:p>
+        </p:txBody>
+      </p:sp>
+      <p:sp>
+        <p:nvSpPr>
+          <p:cNvPr id="257" name="TextBox 256">
+            <a:extLst>
+              <a:ext uri="{FF2B5EF4-FFF2-40B4-BE49-F238E27FC236}">
+                <a16:creationId xmlns:a16="http://schemas.microsoft.com/office/drawing/2014/main" id="{61D55E67-B00D-8BED-A339-F3413189BEAC}"/>
+              </a:ext>
+            </a:extLst>
+          </p:cNvPr>
+          <p:cNvSpPr txBox="1"/>
+          <p:nvPr/>
+        </p:nvSpPr>
+        <p:spPr>
+          <a:xfrm>
+            <a:off x="3929174" y="134112"/>
+            <a:ext cx="409086" cy="323165"/>
+          </a:xfrm>
+          <a:prstGeom prst="rect">
+            <a:avLst/>
+          </a:prstGeom>
+          <a:noFill/>
+        </p:spPr>
+        <p:txBody>
+          <a:bodyPr wrap="none" rtlCol="0">
+            <a:spAutoFit/>
+          </a:bodyPr>
+          <a:lstStyle/>
+          <a:p>
+            <a:r>
+              <a:rPr lang="vi-VN" sz="1500" dirty="0">
+                <a:latin typeface="+mj-lt"/>
+              </a:rPr>
+              <a:t>(2)</a:t>
+            </a:r>
+            <a:endParaRPr lang="en-US" sz="1500" dirty="0">
+              <a:latin typeface="+mj-lt"/>
+            </a:endParaRPr>
+          </a:p>
+        </p:txBody>
+      </p:sp>
+      <p:sp>
+        <p:nvSpPr>
+          <p:cNvPr id="258" name="TextBox 257">
+            <a:extLst>
+              <a:ext uri="{FF2B5EF4-FFF2-40B4-BE49-F238E27FC236}">
+                <a16:creationId xmlns:a16="http://schemas.microsoft.com/office/drawing/2014/main" id="{32C67A7E-6D70-06C9-0053-8516DF9413F7}"/>
+              </a:ext>
+            </a:extLst>
+          </p:cNvPr>
+          <p:cNvSpPr txBox="1"/>
+          <p:nvPr/>
+        </p:nvSpPr>
+        <p:spPr>
+          <a:xfrm>
+            <a:off x="5872513" y="134112"/>
+            <a:ext cx="409086" cy="323165"/>
+          </a:xfrm>
+          <a:prstGeom prst="rect">
+            <a:avLst/>
+          </a:prstGeom>
+          <a:noFill/>
+        </p:spPr>
+        <p:txBody>
+          <a:bodyPr wrap="none" rtlCol="0">
+            <a:spAutoFit/>
+          </a:bodyPr>
+          <a:lstStyle/>
+          <a:p>
+            <a:r>
+              <a:rPr lang="vi-VN" sz="1500" dirty="0">
+                <a:latin typeface="+mj-lt"/>
+              </a:rPr>
+              <a:t>(3)</a:t>
+            </a:r>
+            <a:endParaRPr lang="en-US" sz="1500" dirty="0">
+              <a:latin typeface="+mj-lt"/>
+            </a:endParaRPr>
+          </a:p>
+        </p:txBody>
+      </p:sp>
+      <p:sp>
+        <p:nvSpPr>
+          <p:cNvPr id="259" name="TextBox 258">
+            <a:extLst>
+              <a:ext uri="{FF2B5EF4-FFF2-40B4-BE49-F238E27FC236}">
+                <a16:creationId xmlns:a16="http://schemas.microsoft.com/office/drawing/2014/main" id="{506C6AEB-3584-B844-10D1-018A0F7DFCF8}"/>
+              </a:ext>
+            </a:extLst>
+          </p:cNvPr>
+          <p:cNvSpPr txBox="1"/>
+          <p:nvPr/>
+        </p:nvSpPr>
+        <p:spPr>
+          <a:xfrm>
+            <a:off x="7855913" y="134112"/>
+            <a:ext cx="553357" cy="323165"/>
+          </a:xfrm>
+          <a:prstGeom prst="rect">
+            <a:avLst/>
+          </a:prstGeom>
+          <a:noFill/>
+        </p:spPr>
+        <p:txBody>
+          <a:bodyPr wrap="none" rtlCol="0">
+            <a:spAutoFit/>
+          </a:bodyPr>
+          <a:lstStyle/>
+          <a:p>
+            <a:r>
+              <a:rPr lang="vi-VN" sz="1500" dirty="0">
+                <a:latin typeface="+mj-lt"/>
+              </a:rPr>
+              <a:t>(4.1)</a:t>
+            </a:r>
+            <a:endParaRPr lang="en-US" sz="1500" dirty="0">
+              <a:latin typeface="+mj-lt"/>
+            </a:endParaRPr>
+          </a:p>
+        </p:txBody>
+      </p:sp>
+      <p:sp>
+        <p:nvSpPr>
+          <p:cNvPr id="260" name="TextBox 259">
+            <a:extLst>
+              <a:ext uri="{FF2B5EF4-FFF2-40B4-BE49-F238E27FC236}">
+                <a16:creationId xmlns:a16="http://schemas.microsoft.com/office/drawing/2014/main" id="{B0E2ADE8-3471-6F13-21D8-7180FB0E588B}"/>
+              </a:ext>
+            </a:extLst>
+          </p:cNvPr>
+          <p:cNvSpPr txBox="1"/>
+          <p:nvPr/>
+        </p:nvSpPr>
+        <p:spPr>
+          <a:xfrm>
+            <a:off x="10024057" y="134112"/>
+            <a:ext cx="553357" cy="323165"/>
+          </a:xfrm>
+          <a:prstGeom prst="rect">
+            <a:avLst/>
+          </a:prstGeom>
+          <a:noFill/>
+        </p:spPr>
+        <p:txBody>
+          <a:bodyPr wrap="none" rtlCol="0">
+            <a:spAutoFit/>
+          </a:bodyPr>
+          <a:lstStyle/>
+          <a:p>
+            <a:r>
+              <a:rPr lang="vi-VN" sz="1500" dirty="0">
+                <a:latin typeface="+mj-lt"/>
+              </a:rPr>
+              <a:t>(4.2)</a:t>
+            </a:r>
+            <a:endParaRPr lang="en-US" sz="1500" dirty="0">
+              <a:latin typeface="+mj-lt"/>
+            </a:endParaRPr>
+          </a:p>
+        </p:txBody>
+      </p:sp>
+      <p:sp>
+        <p:nvSpPr>
+          <p:cNvPr id="261" name="TextBox 260">
+            <a:extLst>
+              <a:ext uri="{FF2B5EF4-FFF2-40B4-BE49-F238E27FC236}">
+                <a16:creationId xmlns:a16="http://schemas.microsoft.com/office/drawing/2014/main" id="{107413D4-2765-49C5-21A5-A5F246165B11}"/>
+              </a:ext>
+            </a:extLst>
+          </p:cNvPr>
+          <p:cNvSpPr txBox="1"/>
+          <p:nvPr/>
+        </p:nvSpPr>
+        <p:spPr>
+          <a:xfrm>
+            <a:off x="9387318" y="828386"/>
+            <a:ext cx="553357" cy="323165"/>
+          </a:xfrm>
+          <a:prstGeom prst="rect">
+            <a:avLst/>
+          </a:prstGeom>
+          <a:noFill/>
+        </p:spPr>
+        <p:txBody>
+          <a:bodyPr wrap="none" rtlCol="0">
+            <a:spAutoFit/>
+          </a:bodyPr>
+          <a:lstStyle/>
+          <a:p>
+            <a:r>
+              <a:rPr lang="vi-VN" sz="1500" dirty="0">
+                <a:latin typeface="+mj-lt"/>
+              </a:rPr>
+              <a:t>(4.3)</a:t>
+            </a:r>
+            <a:endParaRPr lang="en-US" sz="1500" dirty="0">
+              <a:latin typeface="+mj-lt"/>
+            </a:endParaRPr>
+          </a:p>
+        </p:txBody>
+      </p:sp>
+      <p:sp>
+        <p:nvSpPr>
+          <p:cNvPr id="262" name="TextBox 261">
+            <a:extLst>
+              <a:ext uri="{FF2B5EF4-FFF2-40B4-BE49-F238E27FC236}">
+                <a16:creationId xmlns:a16="http://schemas.microsoft.com/office/drawing/2014/main" id="{CA0B72E3-23AF-3415-3BEA-BEA97E9B800A}"/>
+              </a:ext>
+            </a:extLst>
+          </p:cNvPr>
+          <p:cNvSpPr txBox="1"/>
+          <p:nvPr/>
+        </p:nvSpPr>
+        <p:spPr>
+          <a:xfrm>
+            <a:off x="7884959" y="749514"/>
+            <a:ext cx="409086" cy="323165"/>
+          </a:xfrm>
+          <a:prstGeom prst="rect">
+            <a:avLst/>
+          </a:prstGeom>
+          <a:noFill/>
+        </p:spPr>
+        <p:txBody>
+          <a:bodyPr wrap="none" rtlCol="0">
+            <a:spAutoFit/>
+          </a:bodyPr>
+          <a:lstStyle/>
+          <a:p>
+            <a:r>
+              <a:rPr lang="vi-VN" sz="1500" dirty="0">
+                <a:latin typeface="+mj-lt"/>
+              </a:rPr>
+              <a:t>(5)</a:t>
+            </a:r>
+            <a:endParaRPr lang="en-US" sz="1500" dirty="0">
+              <a:latin typeface="+mj-lt"/>
+            </a:endParaRPr>
+          </a:p>
+        </p:txBody>
+      </p:sp>
+      <p:sp>
+        <p:nvSpPr>
+          <p:cNvPr id="266" name="TextBox 265">
+            <a:extLst>
+              <a:ext uri="{FF2B5EF4-FFF2-40B4-BE49-F238E27FC236}">
+                <a16:creationId xmlns:a16="http://schemas.microsoft.com/office/drawing/2014/main" id="{FBD1815C-B498-6ECC-F936-4F6E255851B8}"/>
+              </a:ext>
+            </a:extLst>
+          </p:cNvPr>
+          <p:cNvSpPr txBox="1"/>
+          <p:nvPr/>
+        </p:nvSpPr>
+        <p:spPr>
+          <a:xfrm>
+            <a:off x="9137586" y="1809711"/>
+            <a:ext cx="498150" cy="323165"/>
+          </a:xfrm>
+          <a:prstGeom prst="rect">
+            <a:avLst/>
+          </a:prstGeom>
+          <a:noFill/>
+        </p:spPr>
+        <p:txBody>
+          <a:bodyPr wrap="none" rtlCol="0">
+            <a:spAutoFit/>
+          </a:bodyPr>
+          <a:lstStyle/>
+          <a:p>
+            <a:r>
+              <a:rPr lang="vi-VN" sz="1500" dirty="0">
+                <a:latin typeface="+mj-lt"/>
+              </a:rPr>
+              <a:t>(11)</a:t>
+            </a:r>
+            <a:endParaRPr lang="en-US" sz="1500" dirty="0">
+              <a:latin typeface="+mj-lt"/>
+            </a:endParaRPr>
+          </a:p>
+        </p:txBody>
+      </p:sp>
+      <p:sp>
+        <p:nvSpPr>
+          <p:cNvPr id="267" name="TextBox 266">
+            <a:extLst>
+              <a:ext uri="{FF2B5EF4-FFF2-40B4-BE49-F238E27FC236}">
+                <a16:creationId xmlns:a16="http://schemas.microsoft.com/office/drawing/2014/main" id="{551C35FC-20B1-30B2-8408-717CAD357B0D}"/>
+              </a:ext>
+            </a:extLst>
+          </p:cNvPr>
+          <p:cNvSpPr txBox="1"/>
+          <p:nvPr/>
+        </p:nvSpPr>
+        <p:spPr>
+          <a:xfrm>
+            <a:off x="9876321" y="1681735"/>
+            <a:ext cx="409086" cy="323165"/>
+          </a:xfrm>
+          <a:prstGeom prst="rect">
+            <a:avLst/>
+          </a:prstGeom>
+          <a:noFill/>
+        </p:spPr>
+        <p:txBody>
+          <a:bodyPr wrap="none" rtlCol="0">
+            <a:spAutoFit/>
+          </a:bodyPr>
+          <a:lstStyle/>
+          <a:p>
+            <a:r>
+              <a:rPr lang="vi-VN" sz="1500" dirty="0">
+                <a:latin typeface="+mj-lt"/>
+              </a:rPr>
+              <a:t>(6)</a:t>
+            </a:r>
+            <a:endParaRPr lang="en-US" sz="1500" dirty="0">
+              <a:latin typeface="+mj-lt"/>
+            </a:endParaRPr>
+          </a:p>
+        </p:txBody>
+      </p:sp>
+      <p:sp>
+        <p:nvSpPr>
+          <p:cNvPr id="268" name="TextBox 267">
+            <a:extLst>
+              <a:ext uri="{FF2B5EF4-FFF2-40B4-BE49-F238E27FC236}">
+                <a16:creationId xmlns:a16="http://schemas.microsoft.com/office/drawing/2014/main" id="{6E05D608-E9BE-51D7-9560-703B4F871F31}"/>
+              </a:ext>
+            </a:extLst>
+          </p:cNvPr>
+          <p:cNvSpPr txBox="1"/>
+          <p:nvPr/>
+        </p:nvSpPr>
+        <p:spPr>
+          <a:xfrm>
+            <a:off x="9903603" y="3392552"/>
+            <a:ext cx="649537" cy="323165"/>
+          </a:xfrm>
+          <a:prstGeom prst="rect">
+            <a:avLst/>
+          </a:prstGeom>
+          <a:noFill/>
+        </p:spPr>
+        <p:txBody>
+          <a:bodyPr wrap="none" rtlCol="0">
+            <a:spAutoFit/>
+          </a:bodyPr>
+          <a:lstStyle/>
+          <a:p>
+            <a:r>
+              <a:rPr lang="vi-VN" sz="1500" dirty="0">
+                <a:latin typeface="+mj-lt"/>
+              </a:rPr>
+              <a:t>(14.1)</a:t>
+            </a:r>
+            <a:endParaRPr lang="en-US" sz="1500" dirty="0">
+              <a:latin typeface="+mj-lt"/>
+            </a:endParaRPr>
+          </a:p>
+        </p:txBody>
+      </p:sp>
+      <p:sp>
+        <p:nvSpPr>
+          <p:cNvPr id="269" name="TextBox 268">
+            <a:extLst>
+              <a:ext uri="{FF2B5EF4-FFF2-40B4-BE49-F238E27FC236}">
+                <a16:creationId xmlns:a16="http://schemas.microsoft.com/office/drawing/2014/main" id="{DE2E276B-2324-A476-F504-B8EBB4EC0CF4}"/>
+              </a:ext>
+            </a:extLst>
+          </p:cNvPr>
+          <p:cNvSpPr txBox="1"/>
+          <p:nvPr/>
+        </p:nvSpPr>
+        <p:spPr>
+          <a:xfrm>
+            <a:off x="9151650" y="3015957"/>
+            <a:ext cx="505267" cy="323165"/>
+          </a:xfrm>
+          <a:prstGeom prst="rect">
+            <a:avLst/>
+          </a:prstGeom>
+          <a:noFill/>
+        </p:spPr>
+        <p:txBody>
+          <a:bodyPr wrap="none" rtlCol="0">
+            <a:spAutoFit/>
+          </a:bodyPr>
+          <a:lstStyle/>
+          <a:p>
+            <a:r>
+              <a:rPr lang="vi-VN" sz="1500" dirty="0">
+                <a:latin typeface="+mj-lt"/>
+              </a:rPr>
+              <a:t>(13)</a:t>
+            </a:r>
+            <a:endParaRPr lang="en-US" sz="1500" dirty="0">
+              <a:latin typeface="+mj-lt"/>
+            </a:endParaRPr>
+          </a:p>
+        </p:txBody>
+      </p:sp>
+      <p:sp>
+        <p:nvSpPr>
+          <p:cNvPr id="270" name="TextBox 269">
+            <a:extLst>
+              <a:ext uri="{FF2B5EF4-FFF2-40B4-BE49-F238E27FC236}">
+                <a16:creationId xmlns:a16="http://schemas.microsoft.com/office/drawing/2014/main" id="{80D3B9EA-0FD0-EC27-68F6-A4AF329F7A29}"/>
+              </a:ext>
+            </a:extLst>
+          </p:cNvPr>
+          <p:cNvSpPr txBox="1"/>
+          <p:nvPr/>
+        </p:nvSpPr>
+        <p:spPr>
+          <a:xfrm>
+            <a:off x="7784321" y="2173243"/>
+            <a:ext cx="649537" cy="323165"/>
+          </a:xfrm>
+          <a:prstGeom prst="rect">
+            <a:avLst/>
+          </a:prstGeom>
+          <a:noFill/>
+        </p:spPr>
+        <p:txBody>
+          <a:bodyPr wrap="none" rtlCol="0">
+            <a:spAutoFit/>
+          </a:bodyPr>
+          <a:lstStyle/>
+          <a:p>
+            <a:r>
+              <a:rPr lang="vi-VN" sz="1500" dirty="0">
+                <a:latin typeface="+mj-lt"/>
+              </a:rPr>
+              <a:t>(12.2)</a:t>
+            </a:r>
+            <a:endParaRPr lang="en-US" sz="1500" dirty="0">
+              <a:latin typeface="+mj-lt"/>
+            </a:endParaRPr>
+          </a:p>
+        </p:txBody>
+      </p:sp>
+      <p:sp>
+        <p:nvSpPr>
+          <p:cNvPr id="271" name="TextBox 270">
+            <a:extLst>
+              <a:ext uri="{FF2B5EF4-FFF2-40B4-BE49-F238E27FC236}">
+                <a16:creationId xmlns:a16="http://schemas.microsoft.com/office/drawing/2014/main" id="{9D4C1670-B0D5-BA83-2A81-F339360E9FF3}"/>
+              </a:ext>
+            </a:extLst>
+          </p:cNvPr>
+          <p:cNvSpPr txBox="1"/>
+          <p:nvPr/>
+        </p:nvSpPr>
+        <p:spPr>
+          <a:xfrm>
+            <a:off x="9939309" y="2173243"/>
+            <a:ext cx="649537" cy="323165"/>
+          </a:xfrm>
+          <a:prstGeom prst="rect">
+            <a:avLst/>
+          </a:prstGeom>
+          <a:noFill/>
+        </p:spPr>
+        <p:txBody>
+          <a:bodyPr wrap="none" rtlCol="0">
+            <a:spAutoFit/>
+          </a:bodyPr>
+          <a:lstStyle/>
+          <a:p>
+            <a:r>
+              <a:rPr lang="vi-VN" sz="1500" dirty="0">
+                <a:latin typeface="+mj-lt"/>
+              </a:rPr>
+              <a:t>(12.1)</a:t>
+            </a:r>
+            <a:endParaRPr lang="en-US" sz="1500" dirty="0">
+              <a:latin typeface="+mj-lt"/>
+            </a:endParaRPr>
+          </a:p>
+        </p:txBody>
+      </p:sp>
+      <p:sp>
+        <p:nvSpPr>
+          <p:cNvPr id="272" name="TextBox 271">
+            <a:extLst>
+              <a:ext uri="{FF2B5EF4-FFF2-40B4-BE49-F238E27FC236}">
+                <a16:creationId xmlns:a16="http://schemas.microsoft.com/office/drawing/2014/main" id="{804844C1-05A6-2D92-B31B-484250A49FB1}"/>
+              </a:ext>
+            </a:extLst>
+          </p:cNvPr>
+          <p:cNvSpPr txBox="1"/>
+          <p:nvPr/>
+        </p:nvSpPr>
+        <p:spPr>
+          <a:xfrm>
+            <a:off x="11288437" y="4255936"/>
+            <a:ext cx="649537" cy="323165"/>
+          </a:xfrm>
+          <a:prstGeom prst="rect">
+            <a:avLst/>
+          </a:prstGeom>
+          <a:noFill/>
+        </p:spPr>
+        <p:txBody>
+          <a:bodyPr wrap="none" rtlCol="0">
+            <a:spAutoFit/>
+          </a:bodyPr>
+          <a:lstStyle/>
+          <a:p>
+            <a:r>
+              <a:rPr lang="vi-VN" sz="1500" dirty="0">
+                <a:latin typeface="+mj-lt"/>
+              </a:rPr>
+              <a:t>(14.2)</a:t>
+            </a:r>
+            <a:endParaRPr lang="en-US" sz="1500" dirty="0">
+              <a:latin typeface="+mj-lt"/>
+            </a:endParaRPr>
+          </a:p>
+        </p:txBody>
+      </p:sp>
+      <p:sp>
+        <p:nvSpPr>
+          <p:cNvPr id="275" name="TextBox 274">
+            <a:extLst>
+              <a:ext uri="{FF2B5EF4-FFF2-40B4-BE49-F238E27FC236}">
+                <a16:creationId xmlns:a16="http://schemas.microsoft.com/office/drawing/2014/main" id="{A5B0BE72-EE02-F790-A759-2788949AA62F}"/>
+              </a:ext>
+            </a:extLst>
+          </p:cNvPr>
+          <p:cNvSpPr txBox="1"/>
+          <p:nvPr/>
+        </p:nvSpPr>
+        <p:spPr>
+          <a:xfrm>
+            <a:off x="9448114" y="5120304"/>
+            <a:ext cx="777777" cy="323165"/>
+          </a:xfrm>
+          <a:prstGeom prst="rect">
+            <a:avLst/>
+          </a:prstGeom>
+          <a:noFill/>
+        </p:spPr>
+        <p:txBody>
+          <a:bodyPr wrap="none" rtlCol="0">
+            <a:spAutoFit/>
+          </a:bodyPr>
+          <a:lstStyle/>
+          <a:p>
+            <a:r>
+              <a:rPr lang="vi-VN" sz="1500" dirty="0">
+                <a:latin typeface="+mj-lt"/>
+              </a:rPr>
+              <a:t>(16C.2)</a:t>
+            </a:r>
+            <a:endParaRPr lang="en-US" sz="1500" dirty="0">
+              <a:latin typeface="+mj-lt"/>
+            </a:endParaRPr>
+          </a:p>
+        </p:txBody>
+      </p:sp>
+      <p:sp>
+        <p:nvSpPr>
+          <p:cNvPr id="276" name="TextBox 275">
+            <a:extLst>
+              <a:ext uri="{FF2B5EF4-FFF2-40B4-BE49-F238E27FC236}">
+                <a16:creationId xmlns:a16="http://schemas.microsoft.com/office/drawing/2014/main" id="{0D9A538E-2FBC-F2F3-7A97-4CBF0890F0AD}"/>
+              </a:ext>
+            </a:extLst>
+          </p:cNvPr>
+          <p:cNvSpPr txBox="1"/>
+          <p:nvPr/>
+        </p:nvSpPr>
+        <p:spPr>
+          <a:xfrm>
+            <a:off x="9113193" y="4091587"/>
+            <a:ext cx="649537" cy="323165"/>
+          </a:xfrm>
+          <a:prstGeom prst="rect">
+            <a:avLst/>
+          </a:prstGeom>
+          <a:noFill/>
+        </p:spPr>
+        <p:txBody>
+          <a:bodyPr wrap="none" rtlCol="0">
+            <a:spAutoFit/>
+          </a:bodyPr>
+          <a:lstStyle/>
+          <a:p>
+            <a:r>
+              <a:rPr lang="vi-VN" sz="1500" dirty="0">
+                <a:latin typeface="+mj-lt"/>
+              </a:rPr>
+              <a:t>(14.3)</a:t>
+            </a:r>
+            <a:endParaRPr lang="en-US" sz="1500" dirty="0">
+              <a:latin typeface="+mj-lt"/>
+            </a:endParaRPr>
+          </a:p>
+        </p:txBody>
+      </p:sp>
+      <p:sp>
+        <p:nvSpPr>
+          <p:cNvPr id="280" name="TextBox 279">
+            <a:extLst>
+              <a:ext uri="{FF2B5EF4-FFF2-40B4-BE49-F238E27FC236}">
+                <a16:creationId xmlns:a16="http://schemas.microsoft.com/office/drawing/2014/main" id="{A582CEAB-1E4B-E29D-E603-FEDB1440148A}"/>
+              </a:ext>
+            </a:extLst>
+          </p:cNvPr>
+          <p:cNvSpPr txBox="1"/>
+          <p:nvPr/>
+        </p:nvSpPr>
+        <p:spPr>
+          <a:xfrm>
+            <a:off x="7541659" y="4463124"/>
+            <a:ext cx="505267" cy="323165"/>
+          </a:xfrm>
+          <a:prstGeom prst="rect">
+            <a:avLst/>
+          </a:prstGeom>
+          <a:noFill/>
+        </p:spPr>
+        <p:txBody>
+          <a:bodyPr wrap="none" rtlCol="0">
+            <a:spAutoFit/>
+          </a:bodyPr>
+          <a:lstStyle/>
+          <a:p>
+            <a:r>
+              <a:rPr lang="vi-VN" sz="1500" dirty="0">
+                <a:latin typeface="+mj-lt"/>
+              </a:rPr>
+              <a:t>(15)</a:t>
+            </a:r>
+            <a:endParaRPr lang="en-US" sz="1500" dirty="0">
+              <a:latin typeface="+mj-lt"/>
+            </a:endParaRPr>
+          </a:p>
+        </p:txBody>
+      </p:sp>
+      <p:sp>
+        <p:nvSpPr>
+          <p:cNvPr id="281" name="TextBox 280">
+            <a:extLst>
+              <a:ext uri="{FF2B5EF4-FFF2-40B4-BE49-F238E27FC236}">
+                <a16:creationId xmlns:a16="http://schemas.microsoft.com/office/drawing/2014/main" id="{AFD39DFA-22B4-EA44-2E74-BBD21813E0B0}"/>
+              </a:ext>
+            </a:extLst>
+          </p:cNvPr>
+          <p:cNvSpPr txBox="1"/>
+          <p:nvPr/>
+        </p:nvSpPr>
+        <p:spPr>
+          <a:xfrm>
+            <a:off x="7662944" y="5467984"/>
+            <a:ext cx="777777" cy="323165"/>
+          </a:xfrm>
+          <a:prstGeom prst="rect">
+            <a:avLst/>
+          </a:prstGeom>
+          <a:noFill/>
+        </p:spPr>
+        <p:txBody>
+          <a:bodyPr wrap="none" rtlCol="0">
+            <a:spAutoFit/>
+          </a:bodyPr>
+          <a:lstStyle/>
+          <a:p>
+            <a:r>
+              <a:rPr lang="vi-VN" sz="1500" dirty="0">
+                <a:latin typeface="+mj-lt"/>
+              </a:rPr>
+              <a:t>(16C.1)</a:t>
+            </a:r>
+            <a:endParaRPr lang="en-US" sz="1500" dirty="0">
+              <a:latin typeface="+mj-lt"/>
+            </a:endParaRPr>
+          </a:p>
+        </p:txBody>
+      </p:sp>
+      <p:sp>
+        <p:nvSpPr>
+          <p:cNvPr id="282" name="TextBox 281">
+            <a:extLst>
+              <a:ext uri="{FF2B5EF4-FFF2-40B4-BE49-F238E27FC236}">
+                <a16:creationId xmlns:a16="http://schemas.microsoft.com/office/drawing/2014/main" id="{B26CB8C6-C514-F1CC-14F8-64C42E4A17CB}"/>
+              </a:ext>
+            </a:extLst>
+          </p:cNvPr>
+          <p:cNvSpPr txBox="1"/>
+          <p:nvPr/>
+        </p:nvSpPr>
+        <p:spPr>
+          <a:xfrm>
+            <a:off x="5495381" y="5280955"/>
+            <a:ext cx="633507" cy="323165"/>
+          </a:xfrm>
+          <a:prstGeom prst="rect">
+            <a:avLst/>
+          </a:prstGeom>
+          <a:noFill/>
+        </p:spPr>
+        <p:txBody>
+          <a:bodyPr wrap="none" rtlCol="0">
+            <a:spAutoFit/>
+          </a:bodyPr>
+          <a:lstStyle/>
+          <a:p>
+            <a:r>
+              <a:rPr lang="vi-VN" sz="1500" dirty="0">
+                <a:latin typeface="+mj-lt"/>
+              </a:rPr>
+              <a:t>(16C)</a:t>
+            </a:r>
+            <a:endParaRPr lang="en-US" sz="1500" dirty="0">
+              <a:latin typeface="+mj-lt"/>
+            </a:endParaRPr>
+          </a:p>
+        </p:txBody>
+      </p:sp>
+      <p:sp>
+        <p:nvSpPr>
+          <p:cNvPr id="283" name="TextBox 282">
+            <a:extLst>
+              <a:ext uri="{FF2B5EF4-FFF2-40B4-BE49-F238E27FC236}">
+                <a16:creationId xmlns:a16="http://schemas.microsoft.com/office/drawing/2014/main" id="{1BE24C1E-94FB-6DB9-1C44-235293F6B6B8}"/>
+              </a:ext>
+            </a:extLst>
+          </p:cNvPr>
+          <p:cNvSpPr txBox="1"/>
+          <p:nvPr/>
+        </p:nvSpPr>
+        <p:spPr>
+          <a:xfrm>
+            <a:off x="4523296" y="5273968"/>
+            <a:ext cx="633507" cy="323165"/>
+          </a:xfrm>
+          <a:prstGeom prst="rect">
+            <a:avLst/>
+          </a:prstGeom>
+          <a:noFill/>
+        </p:spPr>
+        <p:txBody>
+          <a:bodyPr wrap="none" rtlCol="0">
+            <a:spAutoFit/>
+          </a:bodyPr>
+          <a:lstStyle/>
+          <a:p>
+            <a:r>
+              <a:rPr lang="vi-VN" sz="1500" dirty="0">
+                <a:latin typeface="+mj-lt"/>
+              </a:rPr>
+              <a:t>(16B)</a:t>
+            </a:r>
+            <a:endParaRPr lang="en-US" sz="1500" dirty="0">
+              <a:latin typeface="+mj-lt"/>
+            </a:endParaRPr>
+          </a:p>
+        </p:txBody>
+      </p:sp>
+      <p:sp>
+        <p:nvSpPr>
+          <p:cNvPr id="284" name="TextBox 283">
+            <a:extLst>
+              <a:ext uri="{FF2B5EF4-FFF2-40B4-BE49-F238E27FC236}">
+                <a16:creationId xmlns:a16="http://schemas.microsoft.com/office/drawing/2014/main" id="{1778CC2D-D547-4D70-FA88-31201997BD24}"/>
+              </a:ext>
+            </a:extLst>
+          </p:cNvPr>
+          <p:cNvSpPr txBox="1"/>
+          <p:nvPr/>
+        </p:nvSpPr>
+        <p:spPr>
+          <a:xfrm>
+            <a:off x="2822873" y="4974908"/>
+            <a:ext cx="777777" cy="323165"/>
+          </a:xfrm>
+          <a:prstGeom prst="rect">
+            <a:avLst/>
+          </a:prstGeom>
+          <a:noFill/>
+        </p:spPr>
+        <p:txBody>
+          <a:bodyPr wrap="none" rtlCol="0">
+            <a:spAutoFit/>
+          </a:bodyPr>
+          <a:lstStyle/>
+          <a:p>
+            <a:r>
+              <a:rPr lang="vi-VN" sz="1500" dirty="0">
+                <a:latin typeface="+mj-lt"/>
+              </a:rPr>
+              <a:t>(16B.1)</a:t>
+            </a:r>
+            <a:endParaRPr lang="en-US" sz="1500" dirty="0">
+              <a:latin typeface="+mj-lt"/>
+            </a:endParaRPr>
+          </a:p>
+        </p:txBody>
+      </p:sp>
+      <p:sp>
+        <p:nvSpPr>
+          <p:cNvPr id="285" name="TextBox 284">
+            <a:extLst>
+              <a:ext uri="{FF2B5EF4-FFF2-40B4-BE49-F238E27FC236}">
+                <a16:creationId xmlns:a16="http://schemas.microsoft.com/office/drawing/2014/main" id="{1CCD28F8-826B-FC07-FB91-28947CEFF281}"/>
+              </a:ext>
+            </a:extLst>
+          </p:cNvPr>
+          <p:cNvSpPr txBox="1"/>
+          <p:nvPr/>
+        </p:nvSpPr>
+        <p:spPr>
+          <a:xfrm>
+            <a:off x="3778002" y="4813325"/>
+            <a:ext cx="644728" cy="323165"/>
+          </a:xfrm>
+          <a:prstGeom prst="rect">
+            <a:avLst/>
+          </a:prstGeom>
+          <a:noFill/>
+        </p:spPr>
+        <p:txBody>
+          <a:bodyPr wrap="none" rtlCol="0">
+            <a:spAutoFit/>
+          </a:bodyPr>
+          <a:lstStyle/>
+          <a:p>
+            <a:r>
+              <a:rPr lang="vi-VN" sz="1500" dirty="0">
+                <a:latin typeface="+mj-lt"/>
+              </a:rPr>
+              <a:t>(16A)</a:t>
+            </a:r>
+            <a:endParaRPr lang="en-US" sz="1500" dirty="0">
+              <a:latin typeface="+mj-lt"/>
+            </a:endParaRPr>
+          </a:p>
+        </p:txBody>
+      </p:sp>
+      <p:sp>
+        <p:nvSpPr>
+          <p:cNvPr id="286" name="TextBox 285">
+            <a:extLst>
+              <a:ext uri="{FF2B5EF4-FFF2-40B4-BE49-F238E27FC236}">
+                <a16:creationId xmlns:a16="http://schemas.microsoft.com/office/drawing/2014/main" id="{99869131-941E-87CF-3E96-63408E7E167F}"/>
+              </a:ext>
+            </a:extLst>
+          </p:cNvPr>
+          <p:cNvSpPr txBox="1"/>
+          <p:nvPr/>
+        </p:nvSpPr>
+        <p:spPr>
+          <a:xfrm>
+            <a:off x="3453648" y="4190239"/>
+            <a:ext cx="644728" cy="323165"/>
+          </a:xfrm>
+          <a:prstGeom prst="rect">
+            <a:avLst/>
+          </a:prstGeom>
+          <a:noFill/>
+        </p:spPr>
+        <p:txBody>
+          <a:bodyPr wrap="none" rtlCol="0">
+            <a:spAutoFit/>
+          </a:bodyPr>
+          <a:lstStyle/>
+          <a:p>
+            <a:r>
+              <a:rPr lang="vi-VN" sz="1500" dirty="0">
+                <a:latin typeface="+mj-lt"/>
+              </a:rPr>
+              <a:t>(16D)</a:t>
+            </a:r>
+            <a:endParaRPr lang="en-US" sz="1500" dirty="0">
+              <a:latin typeface="+mj-lt"/>
+            </a:endParaRPr>
+          </a:p>
+        </p:txBody>
+      </p:sp>
+      <p:sp>
+        <p:nvSpPr>
+          <p:cNvPr id="287" name="TextBox 286">
+            <a:extLst>
+              <a:ext uri="{FF2B5EF4-FFF2-40B4-BE49-F238E27FC236}">
+                <a16:creationId xmlns:a16="http://schemas.microsoft.com/office/drawing/2014/main" id="{ACEC940B-E761-D45B-3C71-5D34A962B899}"/>
+              </a:ext>
+            </a:extLst>
+          </p:cNvPr>
+          <p:cNvSpPr txBox="1"/>
+          <p:nvPr/>
+        </p:nvSpPr>
+        <p:spPr>
+          <a:xfrm>
+            <a:off x="2047329" y="3405299"/>
+            <a:ext cx="505267" cy="323165"/>
+          </a:xfrm>
+          <a:prstGeom prst="rect">
+            <a:avLst/>
+          </a:prstGeom>
+          <a:noFill/>
+        </p:spPr>
+        <p:txBody>
+          <a:bodyPr wrap="none" rtlCol="0">
+            <a:spAutoFit/>
+          </a:bodyPr>
+          <a:lstStyle/>
+          <a:p>
+            <a:r>
+              <a:rPr lang="vi-VN" sz="1500" dirty="0">
+                <a:latin typeface="+mj-lt"/>
+              </a:rPr>
+              <a:t>(18)</a:t>
+            </a:r>
+            <a:endParaRPr lang="en-US" sz="1500" dirty="0">
+              <a:latin typeface="+mj-lt"/>
+            </a:endParaRPr>
+          </a:p>
+        </p:txBody>
+      </p:sp>
+      <p:sp>
+        <p:nvSpPr>
+          <p:cNvPr id="288" name="TextBox 287">
+            <a:extLst>
+              <a:ext uri="{FF2B5EF4-FFF2-40B4-BE49-F238E27FC236}">
+                <a16:creationId xmlns:a16="http://schemas.microsoft.com/office/drawing/2014/main" id="{06088D57-887B-70CF-0080-9E0171F38698}"/>
+              </a:ext>
+            </a:extLst>
+          </p:cNvPr>
+          <p:cNvSpPr txBox="1"/>
+          <p:nvPr/>
+        </p:nvSpPr>
+        <p:spPr>
+          <a:xfrm>
+            <a:off x="2404446" y="2811741"/>
+            <a:ext cx="537327" cy="323165"/>
+          </a:xfrm>
+          <a:prstGeom prst="rect">
+            <a:avLst/>
+          </a:prstGeom>
+          <a:noFill/>
+        </p:spPr>
+        <p:txBody>
+          <a:bodyPr wrap="none" rtlCol="0">
+            <a:spAutoFit/>
+          </a:bodyPr>
+          <a:lstStyle/>
+          <a:p>
+            <a:r>
+              <a:rPr lang="vi-VN" sz="1500" dirty="0">
+                <a:latin typeface="+mj-lt"/>
+              </a:rPr>
+              <a:t>(7B)</a:t>
+            </a:r>
+            <a:endParaRPr lang="en-US" sz="1500" dirty="0">
+              <a:latin typeface="+mj-lt"/>
+            </a:endParaRPr>
+          </a:p>
+        </p:txBody>
+      </p:sp>
+      <p:sp>
+        <p:nvSpPr>
+          <p:cNvPr id="289" name="TextBox 288">
+            <a:extLst>
+              <a:ext uri="{FF2B5EF4-FFF2-40B4-BE49-F238E27FC236}">
+                <a16:creationId xmlns:a16="http://schemas.microsoft.com/office/drawing/2014/main" id="{BE135A3D-4206-F7E3-D6D6-EA7F5BE88389}"/>
+              </a:ext>
+            </a:extLst>
+          </p:cNvPr>
+          <p:cNvSpPr txBox="1"/>
+          <p:nvPr/>
+        </p:nvSpPr>
+        <p:spPr>
+          <a:xfrm>
+            <a:off x="2498213" y="1945116"/>
+            <a:ext cx="548548" cy="323165"/>
+          </a:xfrm>
+          <a:prstGeom prst="rect">
+            <a:avLst/>
+          </a:prstGeom>
+          <a:noFill/>
+        </p:spPr>
+        <p:txBody>
+          <a:bodyPr wrap="none" rtlCol="0">
+            <a:spAutoFit/>
+          </a:bodyPr>
+          <a:lstStyle/>
+          <a:p>
+            <a:r>
+              <a:rPr lang="vi-VN" sz="1500" dirty="0">
+                <a:latin typeface="+mj-lt"/>
+              </a:rPr>
+              <a:t>(7A)</a:t>
+            </a:r>
+            <a:endParaRPr lang="en-US" sz="1500" dirty="0">
+              <a:latin typeface="+mj-lt"/>
+            </a:endParaRPr>
+          </a:p>
+        </p:txBody>
+      </p:sp>
+      <p:sp>
+        <p:nvSpPr>
+          <p:cNvPr id="290" name="TextBox 289">
+            <a:extLst>
+              <a:ext uri="{FF2B5EF4-FFF2-40B4-BE49-F238E27FC236}">
+                <a16:creationId xmlns:a16="http://schemas.microsoft.com/office/drawing/2014/main" id="{A5F7C83A-C0D9-C3BA-39D2-230A1B0A7E84}"/>
+              </a:ext>
+            </a:extLst>
+          </p:cNvPr>
+          <p:cNvSpPr txBox="1"/>
+          <p:nvPr/>
+        </p:nvSpPr>
+        <p:spPr>
+          <a:xfrm>
+            <a:off x="3183240" y="2482755"/>
+            <a:ext cx="649537" cy="323165"/>
+          </a:xfrm>
+          <a:prstGeom prst="rect">
+            <a:avLst/>
+          </a:prstGeom>
+          <a:noFill/>
+        </p:spPr>
+        <p:txBody>
+          <a:bodyPr wrap="none" rtlCol="0">
+            <a:spAutoFit/>
+          </a:bodyPr>
+          <a:lstStyle/>
+          <a:p>
+            <a:r>
+              <a:rPr lang="vi-VN" sz="1500" dirty="0">
+                <a:latin typeface="+mj-lt"/>
+              </a:rPr>
+              <a:t>(17.3)</a:t>
+            </a:r>
+            <a:endParaRPr lang="en-US" sz="1500" dirty="0">
+              <a:latin typeface="+mj-lt"/>
+            </a:endParaRPr>
+          </a:p>
+        </p:txBody>
+      </p:sp>
+      <p:sp>
+        <p:nvSpPr>
+          <p:cNvPr id="291" name="TextBox 290">
+            <a:extLst>
+              <a:ext uri="{FF2B5EF4-FFF2-40B4-BE49-F238E27FC236}">
+                <a16:creationId xmlns:a16="http://schemas.microsoft.com/office/drawing/2014/main" id="{17D0318E-D31A-40CC-A06C-CF44698FAB89}"/>
+              </a:ext>
+            </a:extLst>
+          </p:cNvPr>
+          <p:cNvSpPr txBox="1"/>
+          <p:nvPr/>
+        </p:nvSpPr>
+        <p:spPr>
+          <a:xfrm>
+            <a:off x="3216024" y="3372192"/>
+            <a:ext cx="649537" cy="323165"/>
+          </a:xfrm>
+          <a:prstGeom prst="rect">
+            <a:avLst/>
+          </a:prstGeom>
+          <a:noFill/>
+        </p:spPr>
+        <p:txBody>
+          <a:bodyPr wrap="none" rtlCol="0">
+            <a:spAutoFit/>
+          </a:bodyPr>
+          <a:lstStyle/>
+          <a:p>
+            <a:r>
+              <a:rPr lang="vi-VN" sz="1500" dirty="0">
+                <a:latin typeface="+mj-lt"/>
+              </a:rPr>
+              <a:t>(17.1)</a:t>
+            </a:r>
+            <a:endParaRPr lang="en-US" sz="1500" dirty="0">
+              <a:latin typeface="+mj-lt"/>
+            </a:endParaRPr>
+          </a:p>
+        </p:txBody>
+      </p:sp>
+      <p:sp>
+        <p:nvSpPr>
+          <p:cNvPr id="292" name="TextBox 291">
+            <a:extLst>
+              <a:ext uri="{FF2B5EF4-FFF2-40B4-BE49-F238E27FC236}">
+                <a16:creationId xmlns:a16="http://schemas.microsoft.com/office/drawing/2014/main" id="{19FC8885-F706-6FC7-9244-4DFDBD2CC8B7}"/>
+              </a:ext>
+            </a:extLst>
+          </p:cNvPr>
+          <p:cNvSpPr txBox="1"/>
+          <p:nvPr/>
+        </p:nvSpPr>
+        <p:spPr>
+          <a:xfrm>
+            <a:off x="975341" y="1878291"/>
+            <a:ext cx="681597" cy="323165"/>
+          </a:xfrm>
+          <a:prstGeom prst="rect">
+            <a:avLst/>
+          </a:prstGeom>
+          <a:noFill/>
+        </p:spPr>
+        <p:txBody>
+          <a:bodyPr wrap="none" rtlCol="0">
+            <a:spAutoFit/>
+          </a:bodyPr>
+          <a:lstStyle/>
+          <a:p>
+            <a:r>
+              <a:rPr lang="vi-VN" sz="1500" dirty="0">
+                <a:latin typeface="+mj-lt"/>
+              </a:rPr>
+              <a:t>(7B.1)</a:t>
+            </a:r>
+            <a:endParaRPr lang="en-US" sz="1500" dirty="0">
+              <a:latin typeface="+mj-lt"/>
+            </a:endParaRPr>
+          </a:p>
+        </p:txBody>
+      </p:sp>
+      <p:sp>
+        <p:nvSpPr>
+          <p:cNvPr id="293" name="TextBox 292">
+            <a:extLst>
+              <a:ext uri="{FF2B5EF4-FFF2-40B4-BE49-F238E27FC236}">
+                <a16:creationId xmlns:a16="http://schemas.microsoft.com/office/drawing/2014/main" id="{108AA94C-3148-7A1C-B256-555FEAD43013}"/>
+              </a:ext>
+            </a:extLst>
+          </p:cNvPr>
+          <p:cNvSpPr txBox="1"/>
+          <p:nvPr/>
+        </p:nvSpPr>
+        <p:spPr>
+          <a:xfrm>
+            <a:off x="1635956" y="1017700"/>
+            <a:ext cx="681597" cy="323165"/>
+          </a:xfrm>
+          <a:prstGeom prst="rect">
+            <a:avLst/>
+          </a:prstGeom>
+          <a:noFill/>
+        </p:spPr>
+        <p:txBody>
+          <a:bodyPr wrap="none" rtlCol="0">
+            <a:spAutoFit/>
+          </a:bodyPr>
+          <a:lstStyle/>
+          <a:p>
+            <a:r>
+              <a:rPr lang="vi-VN" sz="1500" dirty="0">
+                <a:latin typeface="+mj-lt"/>
+              </a:rPr>
+              <a:t>(7B.2)</a:t>
+            </a:r>
+            <a:endParaRPr lang="en-US" sz="1500" dirty="0">
+              <a:latin typeface="+mj-lt"/>
+            </a:endParaRPr>
+          </a:p>
+        </p:txBody>
+      </p:sp>
+      <p:sp>
+        <p:nvSpPr>
+          <p:cNvPr id="294" name="TextBox 293">
+            <a:extLst>
+              <a:ext uri="{FF2B5EF4-FFF2-40B4-BE49-F238E27FC236}">
+                <a16:creationId xmlns:a16="http://schemas.microsoft.com/office/drawing/2014/main" id="{261694D5-AB9A-2B9D-606E-BB028723A396}"/>
+              </a:ext>
+            </a:extLst>
+          </p:cNvPr>
+          <p:cNvSpPr txBox="1"/>
+          <p:nvPr/>
+        </p:nvSpPr>
+        <p:spPr>
+          <a:xfrm>
+            <a:off x="3952519" y="1226916"/>
+            <a:ext cx="409086" cy="323165"/>
+          </a:xfrm>
+          <a:prstGeom prst="rect">
+            <a:avLst/>
+          </a:prstGeom>
+          <a:noFill/>
+        </p:spPr>
+        <p:txBody>
+          <a:bodyPr wrap="none" rtlCol="0">
+            <a:spAutoFit/>
+          </a:bodyPr>
+          <a:lstStyle/>
+          <a:p>
+            <a:r>
+              <a:rPr lang="vi-VN" sz="1500" dirty="0">
+                <a:latin typeface="+mj-lt"/>
+              </a:rPr>
+              <a:t>(8)</a:t>
+            </a:r>
+            <a:endParaRPr lang="en-US" sz="1500" dirty="0">
+              <a:latin typeface="+mj-lt"/>
+            </a:endParaRPr>
+          </a:p>
+        </p:txBody>
+      </p:sp>
+      <p:sp>
+        <p:nvSpPr>
+          <p:cNvPr id="295" name="TextBox 294">
+            <a:extLst>
+              <a:ext uri="{FF2B5EF4-FFF2-40B4-BE49-F238E27FC236}">
+                <a16:creationId xmlns:a16="http://schemas.microsoft.com/office/drawing/2014/main" id="{5E87B460-B410-8220-576E-E23E384857B0}"/>
+              </a:ext>
+            </a:extLst>
+          </p:cNvPr>
+          <p:cNvSpPr txBox="1"/>
+          <p:nvPr/>
+        </p:nvSpPr>
+        <p:spPr>
+          <a:xfrm>
+            <a:off x="5910601" y="1226916"/>
+            <a:ext cx="409086" cy="323165"/>
+          </a:xfrm>
+          <a:prstGeom prst="rect">
+            <a:avLst/>
+          </a:prstGeom>
+          <a:noFill/>
+        </p:spPr>
+        <p:txBody>
+          <a:bodyPr wrap="none" rtlCol="0">
+            <a:spAutoFit/>
+          </a:bodyPr>
+          <a:lstStyle/>
+          <a:p>
+            <a:r>
+              <a:rPr lang="vi-VN" sz="1500" dirty="0">
+                <a:latin typeface="+mj-lt"/>
+              </a:rPr>
+              <a:t>(9)</a:t>
+            </a:r>
+            <a:endParaRPr lang="en-US" sz="1500" dirty="0">
+              <a:latin typeface="+mj-lt"/>
+            </a:endParaRPr>
+          </a:p>
+        </p:txBody>
+      </p:sp>
+      <p:sp>
+        <p:nvSpPr>
+          <p:cNvPr id="296" name="TextBox 295">
+            <a:extLst>
+              <a:ext uri="{FF2B5EF4-FFF2-40B4-BE49-F238E27FC236}">
+                <a16:creationId xmlns:a16="http://schemas.microsoft.com/office/drawing/2014/main" id="{8C3CAB20-4800-D1ED-0A69-77E11E886F2B}"/>
+              </a:ext>
+            </a:extLst>
+          </p:cNvPr>
+          <p:cNvSpPr txBox="1"/>
+          <p:nvPr/>
+        </p:nvSpPr>
+        <p:spPr>
+          <a:xfrm>
+            <a:off x="7802764" y="1226916"/>
+            <a:ext cx="649537" cy="323165"/>
+          </a:xfrm>
+          <a:prstGeom prst="rect">
+            <a:avLst/>
+          </a:prstGeom>
+          <a:noFill/>
+        </p:spPr>
+        <p:txBody>
+          <a:bodyPr wrap="none" rtlCol="0">
+            <a:spAutoFit/>
+          </a:bodyPr>
+          <a:lstStyle/>
+          <a:p>
+            <a:r>
+              <a:rPr lang="vi-VN" sz="1500" dirty="0">
+                <a:latin typeface="+mj-lt"/>
+              </a:rPr>
+              <a:t>(10.2)</a:t>
+            </a:r>
+            <a:endParaRPr lang="en-US" sz="1500" dirty="0">
+              <a:latin typeface="+mj-lt"/>
+            </a:endParaRPr>
+          </a:p>
+        </p:txBody>
+      </p:sp>
+      <p:sp>
+        <p:nvSpPr>
+          <p:cNvPr id="297" name="TextBox 296">
+            <a:extLst>
+              <a:ext uri="{FF2B5EF4-FFF2-40B4-BE49-F238E27FC236}">
+                <a16:creationId xmlns:a16="http://schemas.microsoft.com/office/drawing/2014/main" id="{88A04E50-BAC5-0C94-6CDE-0D9CA0329A0A}"/>
+              </a:ext>
+            </a:extLst>
+          </p:cNvPr>
+          <p:cNvSpPr txBox="1"/>
+          <p:nvPr/>
+        </p:nvSpPr>
+        <p:spPr>
+          <a:xfrm>
+            <a:off x="6492996" y="1849413"/>
+            <a:ext cx="649537" cy="323165"/>
+          </a:xfrm>
+          <a:prstGeom prst="rect">
+            <a:avLst/>
+          </a:prstGeom>
+          <a:noFill/>
+        </p:spPr>
+        <p:txBody>
+          <a:bodyPr wrap="none" rtlCol="0">
+            <a:spAutoFit/>
+          </a:bodyPr>
+          <a:lstStyle/>
+          <a:p>
+            <a:r>
+              <a:rPr lang="vi-VN" sz="1500" dirty="0">
+                <a:latin typeface="+mj-lt"/>
+              </a:rPr>
+              <a:t>(10.1)</a:t>
+            </a:r>
+            <a:endParaRPr lang="en-US" sz="1500" dirty="0">
+              <a:latin typeface="+mj-lt"/>
+            </a:endParaRPr>
+          </a:p>
+        </p:txBody>
+      </p:sp>
+      <p:sp>
+        <p:nvSpPr>
+          <p:cNvPr id="298" name="TextBox 297">
+            <a:extLst>
+              <a:ext uri="{FF2B5EF4-FFF2-40B4-BE49-F238E27FC236}">
+                <a16:creationId xmlns:a16="http://schemas.microsoft.com/office/drawing/2014/main" id="{23DD19B5-7E29-83A0-1912-E3B127FD3F04}"/>
+              </a:ext>
+            </a:extLst>
+          </p:cNvPr>
+          <p:cNvSpPr txBox="1"/>
+          <p:nvPr/>
+        </p:nvSpPr>
+        <p:spPr>
+          <a:xfrm>
+            <a:off x="4507260" y="3003508"/>
+            <a:ext cx="649537" cy="323165"/>
+          </a:xfrm>
+          <a:prstGeom prst="rect">
+            <a:avLst/>
+          </a:prstGeom>
+          <a:noFill/>
+        </p:spPr>
+        <p:txBody>
+          <a:bodyPr wrap="none" rtlCol="0">
+            <a:spAutoFit/>
+          </a:bodyPr>
+          <a:lstStyle/>
+          <a:p>
+            <a:r>
+              <a:rPr lang="vi-VN" sz="1500" dirty="0">
+                <a:latin typeface="+mj-lt"/>
+              </a:rPr>
+              <a:t>(17.2)</a:t>
+            </a:r>
+            <a:endParaRPr lang="en-US" sz="1500" dirty="0">
               <a:latin typeface="+mj-lt"/>
             </a:endParaRPr>
           </a:p>

--- a/documents/hinh_ve_trong_cao_cao_do_an.pptx
+++ b/documents/hinh_ve_trong_cao_cao_do_an.pptx
@@ -5,7 +5,7 @@
     <p:sldMasterId id="2147483648" r:id="rId1"/>
   </p:sldMasterIdLst>
   <p:notesMasterIdLst>
-    <p:notesMasterId r:id="rId13"/>
+    <p:notesMasterId r:id="rId15"/>
   </p:notesMasterIdLst>
   <p:sldIdLst>
     <p:sldId id="263" r:id="rId2"/>
@@ -15,10 +15,12 @@
     <p:sldId id="266" r:id="rId6"/>
     <p:sldId id="267" r:id="rId7"/>
     <p:sldId id="260" r:id="rId8"/>
-    <p:sldId id="269" r:id="rId9"/>
-    <p:sldId id="268" r:id="rId10"/>
-    <p:sldId id="262" r:id="rId11"/>
-    <p:sldId id="270" r:id="rId12"/>
+    <p:sldId id="262" r:id="rId9"/>
+    <p:sldId id="269" r:id="rId10"/>
+    <p:sldId id="268" r:id="rId11"/>
+    <p:sldId id="272" r:id="rId12"/>
+    <p:sldId id="271" r:id="rId13"/>
+    <p:sldId id="270" r:id="rId14"/>
   </p:sldIdLst>
   <p:sldSz cx="12192000" cy="6858000"/>
   <p:notesSz cx="6858000" cy="9144000"/>
@@ -207,7 +209,7 @@
           <a:p>
             <a:fld id="{1699B688-3183-4F5A-8B47-70F70E2DF15B}" type="datetimeFigureOut">
               <a:rPr lang="en-US" smtClean="0"/>
-              <a:t>5/27/2025</a:t>
+              <a:t>5/28/2025</a:t>
             </a:fld>
             <a:endParaRPr lang="en-US"/>
           </a:p>
@@ -562,6 +564,268 @@
 </p:notes>
 </file>
 
+<file path=ppt/notesSlides/notesSlide10.xml><?xml version="1.0" encoding="utf-8"?>
+<p:notes xmlns:a="http://schemas.openxmlformats.org/drawingml/2006/main" xmlns:r="http://schemas.openxmlformats.org/officeDocument/2006/relationships" xmlns:p="http://schemas.openxmlformats.org/presentationml/2006/main">
+  <p:cSld>
+    <p:spTree>
+      <p:nvGrpSpPr>
+        <p:cNvPr id="1" name=""/>
+        <p:cNvGrpSpPr/>
+        <p:nvPr/>
+      </p:nvGrpSpPr>
+      <p:grpSpPr>
+        <a:xfrm>
+          <a:off x="0" y="0"/>
+          <a:ext cx="0" cy="0"/>
+          <a:chOff x="0" y="0"/>
+          <a:chExt cx="0" cy="0"/>
+        </a:xfrm>
+      </p:grpSpPr>
+      <p:sp>
+        <p:nvSpPr>
+          <p:cNvPr id="2" name="Slide Image Placeholder 1"/>
+          <p:cNvSpPr>
+            <a:spLocks noGrp="1" noRot="1" noChangeAspect="1"/>
+          </p:cNvSpPr>
+          <p:nvPr>
+            <p:ph type="sldImg"/>
+          </p:nvPr>
+        </p:nvSpPr>
+        <p:spPr/>
+      </p:sp>
+      <p:sp>
+        <p:nvSpPr>
+          <p:cNvPr id="3" name="Notes Placeholder 2"/>
+          <p:cNvSpPr>
+            <a:spLocks noGrp="1"/>
+          </p:cNvSpPr>
+          <p:nvPr>
+            <p:ph type="body" idx="1"/>
+          </p:nvPr>
+        </p:nvSpPr>
+        <p:spPr/>
+        <p:txBody>
+          <a:bodyPr/>
+          <a:lstStyle/>
+          <a:p>
+            <a:r>
+              <a:rPr lang="en-US"/>
+              <a:t>Biểu đồ use case chức năng người dùng cài đặt tùy chọn</a:t>
+            </a:r>
+          </a:p>
+        </p:txBody>
+      </p:sp>
+      <p:sp>
+        <p:nvSpPr>
+          <p:cNvPr id="4" name="Slide Number Placeholder 3"/>
+          <p:cNvSpPr>
+            <a:spLocks noGrp="1"/>
+          </p:cNvSpPr>
+          <p:nvPr>
+            <p:ph type="sldNum" sz="quarter" idx="5"/>
+          </p:nvPr>
+        </p:nvSpPr>
+        <p:spPr/>
+        <p:txBody>
+          <a:bodyPr/>
+          <a:lstStyle/>
+          <a:p>
+            <a:fld id="{959F4E64-33AD-4E03-A94E-822473CE3B48}" type="slidenum">
+              <a:rPr lang="en-US" smtClean="0"/>
+              <a:t>11</a:t>
+            </a:fld>
+            <a:endParaRPr lang="en-US"/>
+          </a:p>
+        </p:txBody>
+      </p:sp>
+    </p:spTree>
+    <p:extLst>
+      <p:ext uri="{BB962C8B-B14F-4D97-AF65-F5344CB8AC3E}">
+        <p14:creationId xmlns:p14="http://schemas.microsoft.com/office/powerpoint/2010/main" val="1828968213"/>
+      </p:ext>
+    </p:extLst>
+  </p:cSld>
+  <p:clrMapOvr>
+    <a:masterClrMapping/>
+  </p:clrMapOvr>
+</p:notes>
+</file>
+
+<file path=ppt/notesSlides/notesSlide11.xml><?xml version="1.0" encoding="utf-8"?>
+<p:notes xmlns:a="http://schemas.openxmlformats.org/drawingml/2006/main" xmlns:r="http://schemas.openxmlformats.org/officeDocument/2006/relationships" xmlns:p="http://schemas.openxmlformats.org/presentationml/2006/main">
+  <p:cSld>
+    <p:spTree>
+      <p:nvGrpSpPr>
+        <p:cNvPr id="1" name=""/>
+        <p:cNvGrpSpPr/>
+        <p:nvPr/>
+      </p:nvGrpSpPr>
+      <p:grpSpPr>
+        <a:xfrm>
+          <a:off x="0" y="0"/>
+          <a:ext cx="0" cy="0"/>
+          <a:chOff x="0" y="0"/>
+          <a:chExt cx="0" cy="0"/>
+        </a:xfrm>
+      </p:grpSpPr>
+      <p:sp>
+        <p:nvSpPr>
+          <p:cNvPr id="2" name="Slide Image Placeholder 1"/>
+          <p:cNvSpPr>
+            <a:spLocks noGrp="1" noRot="1" noChangeAspect="1"/>
+          </p:cNvSpPr>
+          <p:nvPr>
+            <p:ph type="sldImg"/>
+          </p:nvPr>
+        </p:nvSpPr>
+        <p:spPr/>
+      </p:sp>
+      <p:sp>
+        <p:nvSpPr>
+          <p:cNvPr id="3" name="Notes Placeholder 2"/>
+          <p:cNvSpPr>
+            <a:spLocks noGrp="1"/>
+          </p:cNvSpPr>
+          <p:nvPr>
+            <p:ph type="body" idx="1"/>
+          </p:nvPr>
+        </p:nvSpPr>
+        <p:spPr/>
+        <p:txBody>
+          <a:bodyPr/>
+          <a:lstStyle/>
+          <a:p>
+            <a:r>
+              <a:rPr lang="en-US"/>
+              <a:t>Biểu đồ chức năng người dùng cài đặt tùy chọn</a:t>
+            </a:r>
+          </a:p>
+        </p:txBody>
+      </p:sp>
+      <p:sp>
+        <p:nvSpPr>
+          <p:cNvPr id="4" name="Slide Number Placeholder 3"/>
+          <p:cNvSpPr>
+            <a:spLocks noGrp="1"/>
+          </p:cNvSpPr>
+          <p:nvPr>
+            <p:ph type="sldNum" sz="quarter" idx="5"/>
+          </p:nvPr>
+        </p:nvSpPr>
+        <p:spPr/>
+        <p:txBody>
+          <a:bodyPr/>
+          <a:lstStyle/>
+          <a:p>
+            <a:fld id="{959F4E64-33AD-4E03-A94E-822473CE3B48}" type="slidenum">
+              <a:rPr lang="en-US" smtClean="0"/>
+              <a:t>12</a:t>
+            </a:fld>
+            <a:endParaRPr lang="en-US"/>
+          </a:p>
+        </p:txBody>
+      </p:sp>
+    </p:spTree>
+    <p:extLst>
+      <p:ext uri="{BB962C8B-B14F-4D97-AF65-F5344CB8AC3E}">
+        <p14:creationId xmlns:p14="http://schemas.microsoft.com/office/powerpoint/2010/main" val="2854509630"/>
+      </p:ext>
+    </p:extLst>
+  </p:cSld>
+  <p:clrMapOvr>
+    <a:masterClrMapping/>
+  </p:clrMapOvr>
+</p:notes>
+</file>
+
+<file path=ppt/notesSlides/notesSlide12.xml><?xml version="1.0" encoding="utf-8"?>
+<p:notes xmlns:a="http://schemas.openxmlformats.org/drawingml/2006/main" xmlns:r="http://schemas.openxmlformats.org/officeDocument/2006/relationships" xmlns:p="http://schemas.openxmlformats.org/presentationml/2006/main">
+  <p:cSld>
+    <p:spTree>
+      <p:nvGrpSpPr>
+        <p:cNvPr id="1" name=""/>
+        <p:cNvGrpSpPr/>
+        <p:nvPr/>
+      </p:nvGrpSpPr>
+      <p:grpSpPr>
+        <a:xfrm>
+          <a:off x="0" y="0"/>
+          <a:ext cx="0" cy="0"/>
+          <a:chOff x="0" y="0"/>
+          <a:chExt cx="0" cy="0"/>
+        </a:xfrm>
+      </p:grpSpPr>
+      <p:sp>
+        <p:nvSpPr>
+          <p:cNvPr id="2" name="Slide Image Placeholder 1"/>
+          <p:cNvSpPr>
+            <a:spLocks noGrp="1" noRot="1" noChangeAspect="1"/>
+          </p:cNvSpPr>
+          <p:nvPr>
+            <p:ph type="sldImg"/>
+          </p:nvPr>
+        </p:nvSpPr>
+        <p:spPr/>
+      </p:sp>
+      <p:sp>
+        <p:nvSpPr>
+          <p:cNvPr id="3" name="Notes Placeholder 2"/>
+          <p:cNvSpPr>
+            <a:spLocks noGrp="1"/>
+          </p:cNvSpPr>
+          <p:nvPr>
+            <p:ph type="body" idx="1"/>
+          </p:nvPr>
+        </p:nvSpPr>
+        <p:spPr/>
+        <p:txBody>
+          <a:bodyPr/>
+          <a:lstStyle/>
+          <a:p>
+            <a:r>
+              <a:rPr lang="vi-VN"/>
+              <a:t>Style</a:t>
+            </a:r>
+            <a:endParaRPr lang="en-US"/>
+          </a:p>
+        </p:txBody>
+      </p:sp>
+      <p:sp>
+        <p:nvSpPr>
+          <p:cNvPr id="4" name="Slide Number Placeholder 3"/>
+          <p:cNvSpPr>
+            <a:spLocks noGrp="1"/>
+          </p:cNvSpPr>
+          <p:nvPr>
+            <p:ph type="sldNum" sz="quarter" idx="5"/>
+          </p:nvPr>
+        </p:nvSpPr>
+        <p:spPr/>
+        <p:txBody>
+          <a:bodyPr/>
+          <a:lstStyle/>
+          <a:p>
+            <a:fld id="{959F4E64-33AD-4E03-A94E-822473CE3B48}" type="slidenum">
+              <a:rPr lang="en-US" smtClean="0"/>
+              <a:t>13</a:t>
+            </a:fld>
+            <a:endParaRPr lang="en-US"/>
+          </a:p>
+        </p:txBody>
+      </p:sp>
+    </p:spTree>
+    <p:extLst>
+      <p:ext uri="{BB962C8B-B14F-4D97-AF65-F5344CB8AC3E}">
+        <p14:creationId xmlns:p14="http://schemas.microsoft.com/office/powerpoint/2010/main" val="1436646404"/>
+      </p:ext>
+    </p:extLst>
+  </p:cSld>
+  <p:clrMapOvr>
+    <a:masterClrMapping/>
+  </p:clrMapOvr>
+</p:notes>
+</file>
+
 <file path=ppt/notesSlides/notesSlide2.xml><?xml version="1.0" encoding="utf-8"?>
 <p:notes xmlns:a="http://schemas.openxmlformats.org/drawingml/2006/main" xmlns:r="http://schemas.openxmlformats.org/officeDocument/2006/relationships" xmlns:p="http://schemas.openxmlformats.org/presentationml/2006/main">
   <p:cSld>
@@ -1045,7 +1309,27 @@
           <a:bodyPr/>
           <a:lstStyle/>
           <a:p>
-            <a:endParaRPr lang="en-US"/>
+            <a:pPr marL="0" marR="0" lvl="0" indent="0" algn="l" defTabSz="914400" rtl="0" eaLnBrk="1" fontAlgn="auto" latinLnBrk="0" hangingPunct="1">
+              <a:lnSpc>
+                <a:spcPct val="100000"/>
+              </a:lnSpc>
+              <a:spcBef>
+                <a:spcPts val="0"/>
+              </a:spcBef>
+              <a:spcAft>
+                <a:spcPts val="0"/>
+              </a:spcAft>
+              <a:buClrTx/>
+              <a:buSzTx/>
+              <a:buFontTx/>
+              <a:buNone/>
+              <a:tabLst/>
+              <a:defRPr/>
+            </a:pPr>
+            <a:r>
+              <a:rPr lang="en-US"/>
+              <a:t>Minh họa tại sao phải đánh giá các mô hình embedding</a:t>
+            </a:r>
           </a:p>
         </p:txBody>
       </p:sp>
@@ -1154,7 +1438,7 @@
           <a:p>
             <a:fld id="{959F4E64-33AD-4E03-A94E-822473CE3B48}" type="slidenum">
               <a:rPr lang="en-US" smtClean="0"/>
-              <a:t>8</a:t>
+              <a:t>9</a:t>
             </a:fld>
             <a:endParaRPr lang="en-US"/>
           </a:p>
@@ -1218,10 +1502,9 @@
           <a:lstStyle/>
           <a:p>
             <a:r>
-              <a:rPr lang="vi-VN"/>
-              <a:t>Style</a:t>
+              <a:rPr lang="en-US"/>
+              <a:t>Biểu đồ chức năng đăng nhập – đăng ký</a:t>
             </a:r>
-            <a:endParaRPr lang="en-US"/>
           </a:p>
         </p:txBody>
       </p:sp>
@@ -1242,7 +1525,7 @@
           <a:p>
             <a:fld id="{959F4E64-33AD-4E03-A94E-822473CE3B48}" type="slidenum">
               <a:rPr lang="en-US" smtClean="0"/>
-              <a:t>11</a:t>
+              <a:t>10</a:t>
             </a:fld>
             <a:endParaRPr lang="en-US"/>
           </a:p>
@@ -1251,7 +1534,7 @@
     </p:spTree>
     <p:extLst>
       <p:ext uri="{BB962C8B-B14F-4D97-AF65-F5344CB8AC3E}">
-        <p14:creationId xmlns:p14="http://schemas.microsoft.com/office/powerpoint/2010/main" val="1436646404"/>
+        <p14:creationId xmlns:p14="http://schemas.microsoft.com/office/powerpoint/2010/main" val="3689453927"/>
       </p:ext>
     </p:extLst>
   </p:cSld>
@@ -1408,7 +1691,7 @@
           <a:p>
             <a:fld id="{1274BF1E-CB95-4284-9B4D-720351FD5384}" type="datetimeFigureOut">
               <a:rPr lang="en-US" smtClean="0"/>
-              <a:t>5/27/2025</a:t>
+              <a:t>5/28/2025</a:t>
             </a:fld>
             <a:endParaRPr lang="en-US"/>
           </a:p>
@@ -1606,7 +1889,7 @@
           <a:p>
             <a:fld id="{1274BF1E-CB95-4284-9B4D-720351FD5384}" type="datetimeFigureOut">
               <a:rPr lang="en-US" smtClean="0"/>
-              <a:t>5/27/2025</a:t>
+              <a:t>5/28/2025</a:t>
             </a:fld>
             <a:endParaRPr lang="en-US"/>
           </a:p>
@@ -1814,7 +2097,7 @@
           <a:p>
             <a:fld id="{1274BF1E-CB95-4284-9B4D-720351FD5384}" type="datetimeFigureOut">
               <a:rPr lang="en-US" smtClean="0"/>
-              <a:t>5/27/2025</a:t>
+              <a:t>5/28/2025</a:t>
             </a:fld>
             <a:endParaRPr lang="en-US"/>
           </a:p>
@@ -2012,7 +2295,7 @@
           <a:p>
             <a:fld id="{1274BF1E-CB95-4284-9B4D-720351FD5384}" type="datetimeFigureOut">
               <a:rPr lang="en-US" smtClean="0"/>
-              <a:t>5/27/2025</a:t>
+              <a:t>5/28/2025</a:t>
             </a:fld>
             <a:endParaRPr lang="en-US"/>
           </a:p>
@@ -2287,7 +2570,7 @@
           <a:p>
             <a:fld id="{1274BF1E-CB95-4284-9B4D-720351FD5384}" type="datetimeFigureOut">
               <a:rPr lang="en-US" smtClean="0"/>
-              <a:t>5/27/2025</a:t>
+              <a:t>5/28/2025</a:t>
             </a:fld>
             <a:endParaRPr lang="en-US"/>
           </a:p>
@@ -2552,7 +2835,7 @@
           <a:p>
             <a:fld id="{1274BF1E-CB95-4284-9B4D-720351FD5384}" type="datetimeFigureOut">
               <a:rPr lang="en-US" smtClean="0"/>
-              <a:t>5/27/2025</a:t>
+              <a:t>5/28/2025</a:t>
             </a:fld>
             <a:endParaRPr lang="en-US"/>
           </a:p>
@@ -2964,7 +3247,7 @@
           <a:p>
             <a:fld id="{1274BF1E-CB95-4284-9B4D-720351FD5384}" type="datetimeFigureOut">
               <a:rPr lang="en-US" smtClean="0"/>
-              <a:t>5/27/2025</a:t>
+              <a:t>5/28/2025</a:t>
             </a:fld>
             <a:endParaRPr lang="en-US"/>
           </a:p>
@@ -3105,7 +3388,7 @@
           <a:p>
             <a:fld id="{1274BF1E-CB95-4284-9B4D-720351FD5384}" type="datetimeFigureOut">
               <a:rPr lang="en-US" smtClean="0"/>
-              <a:t>5/27/2025</a:t>
+              <a:t>5/28/2025</a:t>
             </a:fld>
             <a:endParaRPr lang="en-US"/>
           </a:p>
@@ -3218,7 +3501,7 @@
           <a:p>
             <a:fld id="{1274BF1E-CB95-4284-9B4D-720351FD5384}" type="datetimeFigureOut">
               <a:rPr lang="en-US" smtClean="0"/>
-              <a:t>5/27/2025</a:t>
+              <a:t>5/28/2025</a:t>
             </a:fld>
             <a:endParaRPr lang="en-US"/>
           </a:p>
@@ -3529,7 +3812,7 @@
           <a:p>
             <a:fld id="{1274BF1E-CB95-4284-9B4D-720351FD5384}" type="datetimeFigureOut">
               <a:rPr lang="en-US" smtClean="0"/>
-              <a:t>5/27/2025</a:t>
+              <a:t>5/28/2025</a:t>
             </a:fld>
             <a:endParaRPr lang="en-US"/>
           </a:p>
@@ -3817,7 +4100,7 @@
           <a:p>
             <a:fld id="{1274BF1E-CB95-4284-9B4D-720351FD5384}" type="datetimeFigureOut">
               <a:rPr lang="en-US" smtClean="0"/>
-              <a:t>5/27/2025</a:t>
+              <a:t>5/28/2025</a:t>
             </a:fld>
             <a:endParaRPr lang="en-US"/>
           </a:p>
@@ -4058,7 +4341,7 @@
           <a:p>
             <a:fld id="{1274BF1E-CB95-4284-9B4D-720351FD5384}" type="datetimeFigureOut">
               <a:rPr lang="en-US" smtClean="0"/>
-              <a:t>5/27/2025</a:t>
+              <a:t>5/28/2025</a:t>
             </a:fld>
             <a:endParaRPr lang="en-US"/>
           </a:p>
@@ -4507,10 +4790,841 @@
       </p:grpSpPr>
       <p:sp>
         <p:nvSpPr>
-          <p:cNvPr id="2" name="TextBox 1">
+          <p:cNvPr id="104" name="Oval 103">
             <a:extLst>
               <a:ext uri="{FF2B5EF4-FFF2-40B4-BE49-F238E27FC236}">
-                <a16:creationId xmlns:a16="http://schemas.microsoft.com/office/drawing/2014/main" id="{A76BB85E-EAB6-2089-5682-48447CE032A4}"/>
+                <a16:creationId xmlns:a16="http://schemas.microsoft.com/office/drawing/2014/main" id="{CF0DE857-44E6-6D0A-EEB3-B0FD3340E2AE}"/>
+              </a:ext>
+            </a:extLst>
+          </p:cNvPr>
+          <p:cNvSpPr/>
+          <p:nvPr/>
+        </p:nvSpPr>
+        <p:spPr>
+          <a:xfrm>
+            <a:off x="5173980" y="213360"/>
+            <a:ext cx="1844040" cy="838200"/>
+          </a:xfrm>
+          <a:prstGeom prst="ellipse">
+            <a:avLst/>
+          </a:prstGeom>
+          <a:solidFill>
+            <a:schemeClr val="bg2"/>
+          </a:solidFill>
+        </p:spPr>
+        <p:style>
+          <a:lnRef idx="2">
+            <a:schemeClr val="dk1"/>
+          </a:lnRef>
+          <a:fillRef idx="1">
+            <a:schemeClr val="lt1"/>
+          </a:fillRef>
+          <a:effectRef idx="0">
+            <a:schemeClr val="dk1"/>
+          </a:effectRef>
+          <a:fontRef idx="minor">
+            <a:schemeClr val="dk1"/>
+          </a:fontRef>
+        </p:style>
+        <p:txBody>
+          <a:bodyPr rtlCol="0" anchor="ctr"/>
+          <a:lstStyle/>
+          <a:p>
+            <a:pPr algn="ctr"/>
+            <a:r>
+              <a:rPr lang="en-US">
+                <a:latin typeface="Times New Roman" panose="02020603050405020304" pitchFamily="18" charset="0"/>
+                <a:cs typeface="Times New Roman" panose="02020603050405020304" pitchFamily="18" charset="0"/>
+              </a:rPr>
+              <a:t>Bắt đầu</a:t>
+            </a:r>
+          </a:p>
+        </p:txBody>
+      </p:sp>
+      <p:sp>
+        <p:nvSpPr>
+          <p:cNvPr id="105" name="Rectangle: Rounded Corners 104">
+            <a:extLst>
+              <a:ext uri="{FF2B5EF4-FFF2-40B4-BE49-F238E27FC236}">
+                <a16:creationId xmlns:a16="http://schemas.microsoft.com/office/drawing/2014/main" id="{2967CB8B-9291-D8E1-7D10-4BBDB50EC91D}"/>
+              </a:ext>
+            </a:extLst>
+          </p:cNvPr>
+          <p:cNvSpPr/>
+          <p:nvPr/>
+        </p:nvSpPr>
+        <p:spPr>
+          <a:xfrm>
+            <a:off x="7018020" y="1562099"/>
+            <a:ext cx="2941320" cy="1021080"/>
+          </a:xfrm>
+          <a:prstGeom prst="roundRect">
+            <a:avLst/>
+          </a:prstGeom>
+          <a:solidFill>
+            <a:schemeClr val="bg2"/>
+          </a:solidFill>
+        </p:spPr>
+        <p:style>
+          <a:lnRef idx="2">
+            <a:schemeClr val="dk1"/>
+          </a:lnRef>
+          <a:fillRef idx="1">
+            <a:schemeClr val="lt1"/>
+          </a:fillRef>
+          <a:effectRef idx="0">
+            <a:schemeClr val="dk1"/>
+          </a:effectRef>
+          <a:fontRef idx="minor">
+            <a:schemeClr val="dk1"/>
+          </a:fontRef>
+        </p:style>
+        <p:txBody>
+          <a:bodyPr rtlCol="0" anchor="ctr"/>
+          <a:lstStyle/>
+          <a:p>
+            <a:pPr algn="ctr"/>
+            <a:r>
+              <a:rPr lang="en-US">
+                <a:latin typeface="Times New Roman" panose="02020603050405020304" pitchFamily="18" charset="0"/>
+                <a:cs typeface="Times New Roman" panose="02020603050405020304" pitchFamily="18" charset="0"/>
+              </a:rPr>
+              <a:t>Người dùng thực hiện</a:t>
+            </a:r>
+          </a:p>
+          <a:p>
+            <a:pPr algn="ctr"/>
+            <a:r>
+              <a:rPr lang="en-US">
+                <a:latin typeface="Times New Roman" panose="02020603050405020304" pitchFamily="18" charset="0"/>
+                <a:cs typeface="Times New Roman" panose="02020603050405020304" pitchFamily="18" charset="0"/>
+              </a:rPr>
+              <a:t>đăng nhập</a:t>
+            </a:r>
+          </a:p>
+        </p:txBody>
+      </p:sp>
+      <p:sp>
+        <p:nvSpPr>
+          <p:cNvPr id="107" name="Diamond 106">
+            <a:extLst>
+              <a:ext uri="{FF2B5EF4-FFF2-40B4-BE49-F238E27FC236}">
+                <a16:creationId xmlns:a16="http://schemas.microsoft.com/office/drawing/2014/main" id="{65C28E9C-15F4-1130-6089-B5D1F062A39C}"/>
+              </a:ext>
+            </a:extLst>
+          </p:cNvPr>
+          <p:cNvSpPr/>
+          <p:nvPr/>
+        </p:nvSpPr>
+        <p:spPr>
+          <a:xfrm>
+            <a:off x="7018020" y="3093720"/>
+            <a:ext cx="2941320" cy="1844039"/>
+          </a:xfrm>
+          <a:prstGeom prst="diamond">
+            <a:avLst/>
+          </a:prstGeom>
+          <a:solidFill>
+            <a:schemeClr val="bg2"/>
+          </a:solidFill>
+        </p:spPr>
+        <p:style>
+          <a:lnRef idx="2">
+            <a:schemeClr val="dk1"/>
+          </a:lnRef>
+          <a:fillRef idx="1">
+            <a:schemeClr val="lt1"/>
+          </a:fillRef>
+          <a:effectRef idx="0">
+            <a:schemeClr val="dk1"/>
+          </a:effectRef>
+          <a:fontRef idx="minor">
+            <a:schemeClr val="dk1"/>
+          </a:fontRef>
+        </p:style>
+        <p:txBody>
+          <a:bodyPr rtlCol="0" anchor="ctr"/>
+          <a:lstStyle/>
+          <a:p>
+            <a:pPr algn="ctr"/>
+            <a:r>
+              <a:rPr lang="en-US">
+                <a:latin typeface="Times New Roman" panose="02020603050405020304" pitchFamily="18" charset="0"/>
+                <a:cs typeface="Times New Roman" panose="02020603050405020304" pitchFamily="18" charset="0"/>
+              </a:rPr>
+              <a:t>Hệ thống kiểm tra thông tin đăng nhập</a:t>
+            </a:r>
+          </a:p>
+        </p:txBody>
+      </p:sp>
+      <p:sp>
+        <p:nvSpPr>
+          <p:cNvPr id="108" name="Rectangle: Rounded Corners 107">
+            <a:extLst>
+              <a:ext uri="{FF2B5EF4-FFF2-40B4-BE49-F238E27FC236}">
+                <a16:creationId xmlns:a16="http://schemas.microsoft.com/office/drawing/2014/main" id="{917EAA67-5691-42CB-506A-D4AA705CF051}"/>
+              </a:ext>
+            </a:extLst>
+          </p:cNvPr>
+          <p:cNvSpPr/>
+          <p:nvPr/>
+        </p:nvSpPr>
+        <p:spPr>
+          <a:xfrm>
+            <a:off x="4480560" y="5349239"/>
+            <a:ext cx="2941320" cy="1021080"/>
+          </a:xfrm>
+          <a:prstGeom prst="roundRect">
+            <a:avLst/>
+          </a:prstGeom>
+          <a:solidFill>
+            <a:schemeClr val="bg2"/>
+          </a:solidFill>
+        </p:spPr>
+        <p:style>
+          <a:lnRef idx="2">
+            <a:schemeClr val="dk1"/>
+          </a:lnRef>
+          <a:fillRef idx="1">
+            <a:schemeClr val="lt1"/>
+          </a:fillRef>
+          <a:effectRef idx="0">
+            <a:schemeClr val="dk1"/>
+          </a:effectRef>
+          <a:fontRef idx="minor">
+            <a:schemeClr val="dk1"/>
+          </a:fontRef>
+        </p:style>
+        <p:txBody>
+          <a:bodyPr rtlCol="0" anchor="ctr"/>
+          <a:lstStyle/>
+          <a:p>
+            <a:pPr algn="ctr"/>
+            <a:r>
+              <a:rPr lang="en-US">
+                <a:latin typeface="Times New Roman" panose="02020603050405020304" pitchFamily="18" charset="0"/>
+                <a:cs typeface="Times New Roman" panose="02020603050405020304" pitchFamily="18" charset="0"/>
+              </a:rPr>
+              <a:t>Giao diện chat</a:t>
+            </a:r>
+          </a:p>
+        </p:txBody>
+      </p:sp>
+      <p:sp>
+        <p:nvSpPr>
+          <p:cNvPr id="109" name="Rectangle: Rounded Corners 108">
+            <a:extLst>
+              <a:ext uri="{FF2B5EF4-FFF2-40B4-BE49-F238E27FC236}">
+                <a16:creationId xmlns:a16="http://schemas.microsoft.com/office/drawing/2014/main" id="{CE025A2A-FF9A-D931-CD29-CBC668861B50}"/>
+              </a:ext>
+            </a:extLst>
+          </p:cNvPr>
+          <p:cNvSpPr/>
+          <p:nvPr/>
+        </p:nvSpPr>
+        <p:spPr>
+          <a:xfrm>
+            <a:off x="2232660" y="1562099"/>
+            <a:ext cx="2941320" cy="1021080"/>
+          </a:xfrm>
+          <a:prstGeom prst="roundRect">
+            <a:avLst/>
+          </a:prstGeom>
+          <a:solidFill>
+            <a:schemeClr val="bg2"/>
+          </a:solidFill>
+        </p:spPr>
+        <p:style>
+          <a:lnRef idx="2">
+            <a:schemeClr val="dk1"/>
+          </a:lnRef>
+          <a:fillRef idx="1">
+            <a:schemeClr val="lt1"/>
+          </a:fillRef>
+          <a:effectRef idx="0">
+            <a:schemeClr val="dk1"/>
+          </a:effectRef>
+          <a:fontRef idx="minor">
+            <a:schemeClr val="dk1"/>
+          </a:fontRef>
+        </p:style>
+        <p:txBody>
+          <a:bodyPr rtlCol="0" anchor="ctr"/>
+          <a:lstStyle/>
+          <a:p>
+            <a:pPr algn="ctr"/>
+            <a:r>
+              <a:rPr lang="en-US">
+                <a:latin typeface="Times New Roman" panose="02020603050405020304" pitchFamily="18" charset="0"/>
+                <a:cs typeface="Times New Roman" panose="02020603050405020304" pitchFamily="18" charset="0"/>
+              </a:rPr>
+              <a:t>Người dùng thực hiện</a:t>
+            </a:r>
+          </a:p>
+          <a:p>
+            <a:pPr algn="ctr"/>
+            <a:r>
+              <a:rPr lang="en-US">
+                <a:latin typeface="Times New Roman" panose="02020603050405020304" pitchFamily="18" charset="0"/>
+                <a:cs typeface="Times New Roman" panose="02020603050405020304" pitchFamily="18" charset="0"/>
+              </a:rPr>
+              <a:t>đăng ký</a:t>
+            </a:r>
+          </a:p>
+        </p:txBody>
+      </p:sp>
+      <p:sp>
+        <p:nvSpPr>
+          <p:cNvPr id="110" name="Diamond 109">
+            <a:extLst>
+              <a:ext uri="{FF2B5EF4-FFF2-40B4-BE49-F238E27FC236}">
+                <a16:creationId xmlns:a16="http://schemas.microsoft.com/office/drawing/2014/main" id="{0AF7C904-E5A9-2BE1-E5CF-5BBE8BD2C068}"/>
+              </a:ext>
+            </a:extLst>
+          </p:cNvPr>
+          <p:cNvSpPr/>
+          <p:nvPr/>
+        </p:nvSpPr>
+        <p:spPr>
+          <a:xfrm>
+            <a:off x="2232660" y="3093720"/>
+            <a:ext cx="2941320" cy="1844039"/>
+          </a:xfrm>
+          <a:prstGeom prst="diamond">
+            <a:avLst/>
+          </a:prstGeom>
+          <a:solidFill>
+            <a:schemeClr val="bg2"/>
+          </a:solidFill>
+        </p:spPr>
+        <p:style>
+          <a:lnRef idx="2">
+            <a:schemeClr val="dk1"/>
+          </a:lnRef>
+          <a:fillRef idx="1">
+            <a:schemeClr val="lt1"/>
+          </a:fillRef>
+          <a:effectRef idx="0">
+            <a:schemeClr val="dk1"/>
+          </a:effectRef>
+          <a:fontRef idx="minor">
+            <a:schemeClr val="dk1"/>
+          </a:fontRef>
+        </p:style>
+        <p:txBody>
+          <a:bodyPr rtlCol="0" anchor="ctr"/>
+          <a:lstStyle/>
+          <a:p>
+            <a:pPr algn="ctr"/>
+            <a:r>
+              <a:rPr lang="en-US">
+                <a:latin typeface="Times New Roman" panose="02020603050405020304" pitchFamily="18" charset="0"/>
+                <a:cs typeface="Times New Roman" panose="02020603050405020304" pitchFamily="18" charset="0"/>
+              </a:rPr>
+              <a:t>Hệ thống kiểm tra thông tin đăng ký</a:t>
+            </a:r>
+          </a:p>
+        </p:txBody>
+      </p:sp>
+      <p:cxnSp>
+        <p:nvCxnSpPr>
+          <p:cNvPr id="112" name="Connector: Elbow 111">
+            <a:extLst>
+              <a:ext uri="{FF2B5EF4-FFF2-40B4-BE49-F238E27FC236}">
+                <a16:creationId xmlns:a16="http://schemas.microsoft.com/office/drawing/2014/main" id="{8CF5B753-1868-E16A-BB06-838D7C4EC81C}"/>
+              </a:ext>
+            </a:extLst>
+          </p:cNvPr>
+          <p:cNvCxnSpPr>
+            <a:cxnSpLocks/>
+            <a:stCxn id="104" idx="2"/>
+            <a:endCxn id="109" idx="0"/>
+          </p:cNvCxnSpPr>
+          <p:nvPr/>
+        </p:nvCxnSpPr>
+        <p:spPr>
+          <a:xfrm rot="10800000" flipV="1">
+            <a:off x="3703320" y="632459"/>
+            <a:ext cx="1470660" cy="929639"/>
+          </a:xfrm>
+          <a:prstGeom prst="bentConnector2">
+            <a:avLst/>
+          </a:prstGeom>
+          <a:ln>
+            <a:tailEnd type="triangle"/>
+          </a:ln>
+        </p:spPr>
+        <p:style>
+          <a:lnRef idx="2">
+            <a:schemeClr val="dk1"/>
+          </a:lnRef>
+          <a:fillRef idx="0">
+            <a:schemeClr val="dk1"/>
+          </a:fillRef>
+          <a:effectRef idx="1">
+            <a:schemeClr val="dk1"/>
+          </a:effectRef>
+          <a:fontRef idx="minor">
+            <a:schemeClr val="tx1"/>
+          </a:fontRef>
+        </p:style>
+      </p:cxnSp>
+      <p:cxnSp>
+        <p:nvCxnSpPr>
+          <p:cNvPr id="114" name="Connector: Elbow 113">
+            <a:extLst>
+              <a:ext uri="{FF2B5EF4-FFF2-40B4-BE49-F238E27FC236}">
+                <a16:creationId xmlns:a16="http://schemas.microsoft.com/office/drawing/2014/main" id="{EE05216D-7A3A-7C1A-2BF4-0404AA31F361}"/>
+              </a:ext>
+            </a:extLst>
+          </p:cNvPr>
+          <p:cNvCxnSpPr>
+            <a:cxnSpLocks/>
+            <a:stCxn id="104" idx="6"/>
+            <a:endCxn id="105" idx="0"/>
+          </p:cNvCxnSpPr>
+          <p:nvPr/>
+        </p:nvCxnSpPr>
+        <p:spPr>
+          <a:xfrm>
+            <a:off x="7018020" y="632460"/>
+            <a:ext cx="1470660" cy="929639"/>
+          </a:xfrm>
+          <a:prstGeom prst="bentConnector2">
+            <a:avLst/>
+          </a:prstGeom>
+          <a:ln>
+            <a:tailEnd type="triangle"/>
+          </a:ln>
+        </p:spPr>
+        <p:style>
+          <a:lnRef idx="2">
+            <a:schemeClr val="dk1"/>
+          </a:lnRef>
+          <a:fillRef idx="0">
+            <a:schemeClr val="dk1"/>
+          </a:fillRef>
+          <a:effectRef idx="1">
+            <a:schemeClr val="dk1"/>
+          </a:effectRef>
+          <a:fontRef idx="minor">
+            <a:schemeClr val="tx1"/>
+          </a:fontRef>
+        </p:style>
+      </p:cxnSp>
+      <p:cxnSp>
+        <p:nvCxnSpPr>
+          <p:cNvPr id="116" name="Straight Arrow Connector 115">
+            <a:extLst>
+              <a:ext uri="{FF2B5EF4-FFF2-40B4-BE49-F238E27FC236}">
+                <a16:creationId xmlns:a16="http://schemas.microsoft.com/office/drawing/2014/main" id="{70DDAD2B-2F3D-821C-7BAE-F7D41AF5CC02}"/>
+              </a:ext>
+            </a:extLst>
+          </p:cNvPr>
+          <p:cNvCxnSpPr>
+            <a:stCxn id="109" idx="2"/>
+            <a:endCxn id="110" idx="0"/>
+          </p:cNvCxnSpPr>
+          <p:nvPr/>
+        </p:nvCxnSpPr>
+        <p:spPr>
+          <a:xfrm>
+            <a:off x="3703320" y="2583179"/>
+            <a:ext cx="0" cy="510541"/>
+          </a:xfrm>
+          <a:prstGeom prst="straightConnector1">
+            <a:avLst/>
+          </a:prstGeom>
+          <a:ln>
+            <a:solidFill>
+              <a:schemeClr val="tx1"/>
+            </a:solidFill>
+            <a:tailEnd type="triangle"/>
+          </a:ln>
+        </p:spPr>
+        <p:style>
+          <a:lnRef idx="2">
+            <a:schemeClr val="accent1"/>
+          </a:lnRef>
+          <a:fillRef idx="0">
+            <a:schemeClr val="accent1"/>
+          </a:fillRef>
+          <a:effectRef idx="1">
+            <a:schemeClr val="accent1"/>
+          </a:effectRef>
+          <a:fontRef idx="minor">
+            <a:schemeClr val="tx1"/>
+          </a:fontRef>
+        </p:style>
+      </p:cxnSp>
+      <p:cxnSp>
+        <p:nvCxnSpPr>
+          <p:cNvPr id="118" name="Straight Arrow Connector 117">
+            <a:extLst>
+              <a:ext uri="{FF2B5EF4-FFF2-40B4-BE49-F238E27FC236}">
+                <a16:creationId xmlns:a16="http://schemas.microsoft.com/office/drawing/2014/main" id="{C4184C5E-118A-D8CE-415A-C46980B8FED4}"/>
+              </a:ext>
+            </a:extLst>
+          </p:cNvPr>
+          <p:cNvCxnSpPr>
+            <a:stCxn id="105" idx="2"/>
+            <a:endCxn id="107" idx="0"/>
+          </p:cNvCxnSpPr>
+          <p:nvPr/>
+        </p:nvCxnSpPr>
+        <p:spPr>
+          <a:xfrm>
+            <a:off x="8488680" y="2583179"/>
+            <a:ext cx="0" cy="510541"/>
+          </a:xfrm>
+          <a:prstGeom prst="straightConnector1">
+            <a:avLst/>
+          </a:prstGeom>
+          <a:ln>
+            <a:solidFill>
+              <a:schemeClr val="tx1"/>
+            </a:solidFill>
+            <a:tailEnd type="triangle"/>
+          </a:ln>
+        </p:spPr>
+        <p:style>
+          <a:lnRef idx="2">
+            <a:schemeClr val="accent1"/>
+          </a:lnRef>
+          <a:fillRef idx="0">
+            <a:schemeClr val="accent1"/>
+          </a:fillRef>
+          <a:effectRef idx="1">
+            <a:schemeClr val="accent1"/>
+          </a:effectRef>
+          <a:fontRef idx="minor">
+            <a:schemeClr val="tx1"/>
+          </a:fontRef>
+        </p:style>
+      </p:cxnSp>
+      <p:cxnSp>
+        <p:nvCxnSpPr>
+          <p:cNvPr id="120" name="Connector: Elbow 119">
+            <a:extLst>
+              <a:ext uri="{FF2B5EF4-FFF2-40B4-BE49-F238E27FC236}">
+                <a16:creationId xmlns:a16="http://schemas.microsoft.com/office/drawing/2014/main" id="{7A0DA4CF-935D-591E-95A0-825E2860BC7C}"/>
+              </a:ext>
+            </a:extLst>
+          </p:cNvPr>
+          <p:cNvCxnSpPr>
+            <a:stCxn id="110" idx="1"/>
+            <a:endCxn id="109" idx="1"/>
+          </p:cNvCxnSpPr>
+          <p:nvPr/>
+        </p:nvCxnSpPr>
+        <p:spPr>
+          <a:xfrm rot="10800000">
+            <a:off x="2232660" y="2072640"/>
+            <a:ext cx="12700" cy="1943101"/>
+          </a:xfrm>
+          <a:prstGeom prst="bentConnector3">
+            <a:avLst>
+              <a:gd name="adj1" fmla="val 7440000"/>
+            </a:avLst>
+          </a:prstGeom>
+          <a:ln>
+            <a:solidFill>
+              <a:schemeClr val="tx1"/>
+            </a:solidFill>
+            <a:tailEnd type="triangle"/>
+          </a:ln>
+        </p:spPr>
+        <p:style>
+          <a:lnRef idx="2">
+            <a:schemeClr val="accent1"/>
+          </a:lnRef>
+          <a:fillRef idx="0">
+            <a:schemeClr val="accent1"/>
+          </a:fillRef>
+          <a:effectRef idx="1">
+            <a:schemeClr val="accent1"/>
+          </a:effectRef>
+          <a:fontRef idx="minor">
+            <a:schemeClr val="tx1"/>
+          </a:fontRef>
+        </p:style>
+      </p:cxnSp>
+      <p:cxnSp>
+        <p:nvCxnSpPr>
+          <p:cNvPr id="123" name="Connector: Elbow 122">
+            <a:extLst>
+              <a:ext uri="{FF2B5EF4-FFF2-40B4-BE49-F238E27FC236}">
+                <a16:creationId xmlns:a16="http://schemas.microsoft.com/office/drawing/2014/main" id="{9E4DCF95-BAC0-E560-4D39-5F26EAB02355}"/>
+              </a:ext>
+            </a:extLst>
+          </p:cNvPr>
+          <p:cNvCxnSpPr>
+            <a:stCxn id="107" idx="3"/>
+            <a:endCxn id="105" idx="3"/>
+          </p:cNvCxnSpPr>
+          <p:nvPr/>
+        </p:nvCxnSpPr>
+        <p:spPr>
+          <a:xfrm flipV="1">
+            <a:off x="9959340" y="2072639"/>
+            <a:ext cx="12700" cy="1943101"/>
+          </a:xfrm>
+          <a:prstGeom prst="bentConnector3">
+            <a:avLst>
+              <a:gd name="adj1" fmla="val 6840000"/>
+            </a:avLst>
+          </a:prstGeom>
+          <a:ln>
+            <a:solidFill>
+              <a:schemeClr val="tx1"/>
+            </a:solidFill>
+            <a:tailEnd type="triangle"/>
+          </a:ln>
+        </p:spPr>
+        <p:style>
+          <a:lnRef idx="2">
+            <a:schemeClr val="accent1"/>
+          </a:lnRef>
+          <a:fillRef idx="0">
+            <a:schemeClr val="accent1"/>
+          </a:fillRef>
+          <a:effectRef idx="1">
+            <a:schemeClr val="accent1"/>
+          </a:effectRef>
+          <a:fontRef idx="minor">
+            <a:schemeClr val="tx1"/>
+          </a:fontRef>
+        </p:style>
+      </p:cxnSp>
+      <p:cxnSp>
+        <p:nvCxnSpPr>
+          <p:cNvPr id="126" name="Connector: Elbow 125">
+            <a:extLst>
+              <a:ext uri="{FF2B5EF4-FFF2-40B4-BE49-F238E27FC236}">
+                <a16:creationId xmlns:a16="http://schemas.microsoft.com/office/drawing/2014/main" id="{2150CE8E-6185-F2D0-8799-892E184E3001}"/>
+              </a:ext>
+            </a:extLst>
+          </p:cNvPr>
+          <p:cNvCxnSpPr>
+            <a:stCxn id="110" idx="2"/>
+            <a:endCxn id="108" idx="0"/>
+          </p:cNvCxnSpPr>
+          <p:nvPr/>
+        </p:nvCxnSpPr>
+        <p:spPr>
+          <a:xfrm rot="16200000" flipH="1">
+            <a:off x="4621530" y="4019549"/>
+            <a:ext cx="411480" cy="2247900"/>
+          </a:xfrm>
+          <a:prstGeom prst="bentConnector3">
+            <a:avLst/>
+          </a:prstGeom>
+          <a:ln>
+            <a:tailEnd type="triangle"/>
+          </a:ln>
+        </p:spPr>
+        <p:style>
+          <a:lnRef idx="2">
+            <a:schemeClr val="dk1"/>
+          </a:lnRef>
+          <a:fillRef idx="0">
+            <a:schemeClr val="dk1"/>
+          </a:fillRef>
+          <a:effectRef idx="1">
+            <a:schemeClr val="dk1"/>
+          </a:effectRef>
+          <a:fontRef idx="minor">
+            <a:schemeClr val="tx1"/>
+          </a:fontRef>
+        </p:style>
+      </p:cxnSp>
+      <p:cxnSp>
+        <p:nvCxnSpPr>
+          <p:cNvPr id="128" name="Connector: Elbow 127">
+            <a:extLst>
+              <a:ext uri="{FF2B5EF4-FFF2-40B4-BE49-F238E27FC236}">
+                <a16:creationId xmlns:a16="http://schemas.microsoft.com/office/drawing/2014/main" id="{8C95E6B3-8930-91B1-4021-9CB4F561705F}"/>
+              </a:ext>
+            </a:extLst>
+          </p:cNvPr>
+          <p:cNvCxnSpPr>
+            <a:stCxn id="107" idx="2"/>
+            <a:endCxn id="108" idx="0"/>
+          </p:cNvCxnSpPr>
+          <p:nvPr/>
+        </p:nvCxnSpPr>
+        <p:spPr>
+          <a:xfrm rot="5400000">
+            <a:off x="7014210" y="3874769"/>
+            <a:ext cx="411480" cy="2537460"/>
+          </a:xfrm>
+          <a:prstGeom prst="bentConnector3">
+            <a:avLst/>
+          </a:prstGeom>
+          <a:ln>
+            <a:tailEnd type="triangle"/>
+          </a:ln>
+        </p:spPr>
+        <p:style>
+          <a:lnRef idx="2">
+            <a:schemeClr val="dk1"/>
+          </a:lnRef>
+          <a:fillRef idx="0">
+            <a:schemeClr val="dk1"/>
+          </a:fillRef>
+          <a:effectRef idx="1">
+            <a:schemeClr val="dk1"/>
+          </a:effectRef>
+          <a:fontRef idx="minor">
+            <a:schemeClr val="tx1"/>
+          </a:fontRef>
+        </p:style>
+      </p:cxnSp>
+      <p:sp>
+        <p:nvSpPr>
+          <p:cNvPr id="129" name="Rectangle: Rounded Corners 128">
+            <a:extLst>
+              <a:ext uri="{FF2B5EF4-FFF2-40B4-BE49-F238E27FC236}">
+                <a16:creationId xmlns:a16="http://schemas.microsoft.com/office/drawing/2014/main" id="{1D24CF0B-21FE-19B8-B6A2-F1275DCDDE20}"/>
+              </a:ext>
+            </a:extLst>
+          </p:cNvPr>
+          <p:cNvSpPr/>
+          <p:nvPr/>
+        </p:nvSpPr>
+        <p:spPr>
+          <a:xfrm>
+            <a:off x="8488680" y="5661659"/>
+            <a:ext cx="1844040" cy="396240"/>
+          </a:xfrm>
+          <a:prstGeom prst="roundRect">
+            <a:avLst/>
+          </a:prstGeom>
+          <a:solidFill>
+            <a:schemeClr val="bg2"/>
+          </a:solidFill>
+        </p:spPr>
+        <p:style>
+          <a:lnRef idx="2">
+            <a:schemeClr val="dk1"/>
+          </a:lnRef>
+          <a:fillRef idx="1">
+            <a:schemeClr val="lt1"/>
+          </a:fillRef>
+          <a:effectRef idx="0">
+            <a:schemeClr val="dk1"/>
+          </a:effectRef>
+          <a:fontRef idx="minor">
+            <a:schemeClr val="dk1"/>
+          </a:fontRef>
+        </p:style>
+        <p:txBody>
+          <a:bodyPr rtlCol="0" anchor="ctr"/>
+          <a:lstStyle/>
+          <a:p>
+            <a:pPr algn="ctr"/>
+            <a:r>
+              <a:rPr lang="en-US">
+                <a:latin typeface="Times New Roman" panose="02020603050405020304" pitchFamily="18" charset="0"/>
+                <a:cs typeface="Times New Roman" panose="02020603050405020304" pitchFamily="18" charset="0"/>
+              </a:rPr>
+              <a:t>Đăng xuất</a:t>
+            </a:r>
+          </a:p>
+        </p:txBody>
+      </p:sp>
+      <p:cxnSp>
+        <p:nvCxnSpPr>
+          <p:cNvPr id="131" name="Straight Arrow Connector 130">
+            <a:extLst>
+              <a:ext uri="{FF2B5EF4-FFF2-40B4-BE49-F238E27FC236}">
+                <a16:creationId xmlns:a16="http://schemas.microsoft.com/office/drawing/2014/main" id="{FEDDF2BB-202E-1627-1825-D8223BED3674}"/>
+              </a:ext>
+            </a:extLst>
+          </p:cNvPr>
+          <p:cNvCxnSpPr>
+            <a:stCxn id="108" idx="3"/>
+            <a:endCxn id="129" idx="1"/>
+          </p:cNvCxnSpPr>
+          <p:nvPr/>
+        </p:nvCxnSpPr>
+        <p:spPr>
+          <a:xfrm>
+            <a:off x="7421880" y="5859779"/>
+            <a:ext cx="1066800" cy="0"/>
+          </a:xfrm>
+          <a:prstGeom prst="straightConnector1">
+            <a:avLst/>
+          </a:prstGeom>
+          <a:ln>
+            <a:tailEnd type="triangle"/>
+          </a:ln>
+        </p:spPr>
+        <p:style>
+          <a:lnRef idx="2">
+            <a:schemeClr val="dk1"/>
+          </a:lnRef>
+          <a:fillRef idx="0">
+            <a:schemeClr val="dk1"/>
+          </a:fillRef>
+          <a:effectRef idx="1">
+            <a:schemeClr val="dk1"/>
+          </a:effectRef>
+          <a:fontRef idx="minor">
+            <a:schemeClr val="tx1"/>
+          </a:fontRef>
+        </p:style>
+      </p:cxnSp>
+      <p:cxnSp>
+        <p:nvCxnSpPr>
+          <p:cNvPr id="134" name="Connector: Elbow 133">
+            <a:extLst>
+              <a:ext uri="{FF2B5EF4-FFF2-40B4-BE49-F238E27FC236}">
+                <a16:creationId xmlns:a16="http://schemas.microsoft.com/office/drawing/2014/main" id="{E4E36DCD-EE28-38FC-394B-2D234BE1BEE8}"/>
+              </a:ext>
+            </a:extLst>
+          </p:cNvPr>
+          <p:cNvCxnSpPr>
+            <a:stCxn id="129" idx="3"/>
+            <a:endCxn id="105" idx="3"/>
+          </p:cNvCxnSpPr>
+          <p:nvPr/>
+        </p:nvCxnSpPr>
+        <p:spPr>
+          <a:xfrm flipH="1" flipV="1">
+            <a:off x="9959340" y="2072639"/>
+            <a:ext cx="373380" cy="3787140"/>
+          </a:xfrm>
+          <a:prstGeom prst="bentConnector3">
+            <a:avLst>
+              <a:gd name="adj1" fmla="val -132653"/>
+            </a:avLst>
+          </a:prstGeom>
+          <a:ln>
+            <a:tailEnd type="triangle"/>
+          </a:ln>
+        </p:spPr>
+        <p:style>
+          <a:lnRef idx="2">
+            <a:schemeClr val="dk1"/>
+          </a:lnRef>
+          <a:fillRef idx="0">
+            <a:schemeClr val="dk1"/>
+          </a:fillRef>
+          <a:effectRef idx="1">
+            <a:schemeClr val="dk1"/>
+          </a:effectRef>
+          <a:fontRef idx="minor">
+            <a:schemeClr val="tx1"/>
+          </a:fontRef>
+        </p:style>
+      </p:cxnSp>
+      <p:sp>
+        <p:nvSpPr>
+          <p:cNvPr id="139" name="TextBox 138">
+            <a:extLst>
+              <a:ext uri="{FF2B5EF4-FFF2-40B4-BE49-F238E27FC236}">
+                <a16:creationId xmlns:a16="http://schemas.microsoft.com/office/drawing/2014/main" id="{F50CF43A-BDB9-AE31-7220-74AF57532A00}"/>
               </a:ext>
             </a:extLst>
           </p:cNvPr>
@@ -4519,8 +5633,8 @@
         </p:nvSpPr>
         <p:spPr>
           <a:xfrm>
-            <a:off x="612648" y="795528"/>
-            <a:ext cx="8497839" cy="3693319"/>
+            <a:off x="1455420" y="4015739"/>
+            <a:ext cx="793807" cy="584775"/>
           </a:xfrm>
           <a:prstGeom prst="rect">
             <a:avLst/>
@@ -4533,139 +5647,532 @@
           </a:bodyPr>
           <a:lstStyle/>
           <a:p>
-            <a:pPr marL="285750" indent="-285750">
-              <a:buFontTx/>
-              <a:buChar char="-"/>
-            </a:pPr>
             <a:r>
-              <a:rPr lang="vi-VN"/>
-              <a:t>Chức năng đăng nhập/đăng xuất: biểu đồ chức năng, usecase, tuần tự</a:t>
+              <a:rPr lang="en-US" sz="1600">
+                <a:latin typeface="Times New Roman" panose="02020603050405020304" pitchFamily="18" charset="0"/>
+                <a:cs typeface="Times New Roman" panose="02020603050405020304" pitchFamily="18" charset="0"/>
+              </a:rPr>
+              <a:t>Không </a:t>
             </a:r>
           </a:p>
           <a:p>
-            <a:pPr marL="285750" indent="-285750">
-              <a:buFontTx/>
-              <a:buChar char="-"/>
-            </a:pPr>
             <a:r>
-              <a:rPr lang="vi-VN"/>
-              <a:t>Chức năng cài đặt người dùng tùy chọn: biểu đồ  chức năng, usecase, tuần tự</a:t>
+              <a:rPr lang="en-US" sz="1600">
+                <a:latin typeface="Times New Roman" panose="02020603050405020304" pitchFamily="18" charset="0"/>
+                <a:cs typeface="Times New Roman" panose="02020603050405020304" pitchFamily="18" charset="0"/>
+              </a:rPr>
+              <a:t>hợp lệ</a:t>
             </a:r>
           </a:p>
-          <a:p>
-            <a:pPr marL="285750" indent="-285750">
-              <a:buFontTx/>
-              <a:buChar char="-"/>
-            </a:pPr>
+        </p:txBody>
+      </p:sp>
+      <p:sp>
+        <p:nvSpPr>
+          <p:cNvPr id="140" name="TextBox 139">
+            <a:extLst>
+              <a:ext uri="{FF2B5EF4-FFF2-40B4-BE49-F238E27FC236}">
+                <a16:creationId xmlns:a16="http://schemas.microsoft.com/office/drawing/2014/main" id="{02E7496E-0415-ED06-196F-D7DFC7BB94E8}"/>
+              </a:ext>
+            </a:extLst>
+          </p:cNvPr>
+          <p:cNvSpPr txBox="1"/>
+          <p:nvPr/>
+        </p:nvSpPr>
+        <p:spPr>
+          <a:xfrm>
+            <a:off x="9905359" y="4015739"/>
+            <a:ext cx="793807" cy="584775"/>
+          </a:xfrm>
+          <a:prstGeom prst="rect">
+            <a:avLst/>
+          </a:prstGeom>
+          <a:noFill/>
+        </p:spPr>
+        <p:txBody>
+          <a:bodyPr wrap="none" rtlCol="0">
+            <a:spAutoFit/>
+          </a:bodyPr>
+          <a:lstStyle/>
+          <a:p>
             <a:r>
-              <a:rPr lang="vi-VN"/>
-              <a:t>Chức năng khởi tạo starter: biểu đồ tuần tự</a:t>
+              <a:rPr lang="en-US" sz="1600">
+                <a:latin typeface="Times New Roman" panose="02020603050405020304" pitchFamily="18" charset="0"/>
+                <a:cs typeface="Times New Roman" panose="02020603050405020304" pitchFamily="18" charset="0"/>
+              </a:rPr>
+              <a:t>Không </a:t>
             </a:r>
           </a:p>
           <a:p>
-            <a:pPr marL="285750" indent="-285750">
-              <a:buFontTx/>
-              <a:buChar char="-"/>
-            </a:pPr>
             <a:r>
-              <a:rPr lang="vi-VN"/>
-              <a:t>Chức năng trò chuyện văn bản: biểu đồ chức năng, usecase, tuần tự</a:t>
+              <a:rPr lang="en-US" sz="1600">
+                <a:latin typeface="Times New Roman" panose="02020603050405020304" pitchFamily="18" charset="0"/>
+                <a:cs typeface="Times New Roman" panose="02020603050405020304" pitchFamily="18" charset="0"/>
+              </a:rPr>
+              <a:t>hợp lệ</a:t>
             </a:r>
           </a:p>
-          <a:p>
-            <a:pPr marL="285750" indent="-285750">
-              <a:buFontTx/>
-              <a:buChar char="-"/>
-            </a:pPr>
+        </p:txBody>
+      </p:sp>
+      <p:sp>
+        <p:nvSpPr>
+          <p:cNvPr id="141" name="TextBox 140">
+            <a:extLst>
+              <a:ext uri="{FF2B5EF4-FFF2-40B4-BE49-F238E27FC236}">
+                <a16:creationId xmlns:a16="http://schemas.microsoft.com/office/drawing/2014/main" id="{B69CA317-E04F-AF31-18FE-AA25F6B474D7}"/>
+              </a:ext>
+            </a:extLst>
+          </p:cNvPr>
+          <p:cNvSpPr txBox="1"/>
+          <p:nvPr/>
+        </p:nvSpPr>
+        <p:spPr>
+          <a:xfrm>
+            <a:off x="3703320" y="5143498"/>
+            <a:ext cx="763351" cy="338554"/>
+          </a:xfrm>
+          <a:prstGeom prst="rect">
+            <a:avLst/>
+          </a:prstGeom>
+          <a:noFill/>
+        </p:spPr>
+        <p:txBody>
+          <a:bodyPr wrap="none" rtlCol="0">
+            <a:spAutoFit/>
+          </a:bodyPr>
+          <a:lstStyle/>
+          <a:p>
             <a:r>
-              <a:rPr lang="vi-VN"/>
-              <a:t>Chức năng trò chuyện âm thanh: chức năng, usecase, tuần tự</a:t>
+              <a:rPr lang="en-US" sz="1600">
+                <a:latin typeface="Times New Roman" panose="02020603050405020304" pitchFamily="18" charset="0"/>
+                <a:cs typeface="Times New Roman" panose="02020603050405020304" pitchFamily="18" charset="0"/>
+              </a:rPr>
+              <a:t>Hợp lệ</a:t>
             </a:r>
           </a:p>
-          <a:p>
-            <a:pPr marL="285750" indent="-285750">
-              <a:buFontTx/>
-              <a:buChar char="-"/>
-            </a:pPr>
+        </p:txBody>
+      </p:sp>
+      <p:sp>
+        <p:nvSpPr>
+          <p:cNvPr id="142" name="TextBox 141">
+            <a:extLst>
+              <a:ext uri="{FF2B5EF4-FFF2-40B4-BE49-F238E27FC236}">
+                <a16:creationId xmlns:a16="http://schemas.microsoft.com/office/drawing/2014/main" id="{94CE0EB5-C05E-0024-9F02-473C547E437C}"/>
+              </a:ext>
+            </a:extLst>
+          </p:cNvPr>
+          <p:cNvSpPr txBox="1"/>
+          <p:nvPr/>
+        </p:nvSpPr>
+        <p:spPr>
+          <a:xfrm>
+            <a:off x="7725329" y="5143498"/>
+            <a:ext cx="763351" cy="338554"/>
+          </a:xfrm>
+          <a:prstGeom prst="rect">
+            <a:avLst/>
+          </a:prstGeom>
+          <a:noFill/>
+        </p:spPr>
+        <p:txBody>
+          <a:bodyPr wrap="none" rtlCol="0">
+            <a:spAutoFit/>
+          </a:bodyPr>
+          <a:lstStyle/>
+          <a:p>
             <a:r>
-              <a:rPr lang="vi-VN"/>
-              <a:t>Chức năng tăng cường trí nhớ hội thoại: chức năng, usecase, tuần tự</a:t>
+              <a:rPr lang="en-US" sz="1600">
+                <a:latin typeface="Times New Roman" panose="02020603050405020304" pitchFamily="18" charset="0"/>
+                <a:cs typeface="Times New Roman" panose="02020603050405020304" pitchFamily="18" charset="0"/>
+              </a:rPr>
+              <a:t>Hợp lệ</a:t>
             </a:r>
           </a:p>
-          <a:p>
-            <a:pPr marL="285750" indent="-285750">
-              <a:buFontTx/>
-              <a:buChar char="-"/>
-            </a:pPr>
+        </p:txBody>
+      </p:sp>
+      <p:sp>
+        <p:nvSpPr>
+          <p:cNvPr id="143" name="TextBox 142">
+            <a:extLst>
+              <a:ext uri="{FF2B5EF4-FFF2-40B4-BE49-F238E27FC236}">
+                <a16:creationId xmlns:a16="http://schemas.microsoft.com/office/drawing/2014/main" id="{9849074F-7731-DED0-3CD6-1805CC6925B4}"/>
+              </a:ext>
+            </a:extLst>
+          </p:cNvPr>
+          <p:cNvSpPr txBox="1"/>
+          <p:nvPr/>
+        </p:nvSpPr>
+        <p:spPr>
+          <a:xfrm>
+            <a:off x="7019925" y="263127"/>
+            <a:ext cx="620683" cy="369332"/>
+          </a:xfrm>
+          <a:prstGeom prst="rect">
+            <a:avLst/>
+          </a:prstGeom>
+          <a:noFill/>
+        </p:spPr>
+        <p:txBody>
+          <a:bodyPr wrap="none" rtlCol="0">
+            <a:spAutoFit/>
+          </a:bodyPr>
+          <a:lstStyle/>
+          <a:p>
             <a:r>
-              <a:rPr lang="vi-VN"/>
-              <a:t>Chức năng quản lý hành vi người dùng: chức năng, usecase, tuần tự</a:t>
+              <a:rPr lang="en-US">
+                <a:latin typeface="Times New Roman" panose="02020603050405020304" pitchFamily="18" charset="0"/>
+                <a:cs typeface="Times New Roman" panose="02020603050405020304" pitchFamily="18" charset="0"/>
+              </a:rPr>
+              <a:t>(1A)</a:t>
             </a:r>
           </a:p>
-          <a:p>
-            <a:pPr marL="285750" indent="-285750">
-              <a:buFontTx/>
-              <a:buChar char="-"/>
-            </a:pPr>
+        </p:txBody>
+      </p:sp>
+      <p:sp>
+        <p:nvSpPr>
+          <p:cNvPr id="144" name="TextBox 143">
+            <a:extLst>
+              <a:ext uri="{FF2B5EF4-FFF2-40B4-BE49-F238E27FC236}">
+                <a16:creationId xmlns:a16="http://schemas.microsoft.com/office/drawing/2014/main" id="{E132DEFE-9AF1-CA61-30F8-2E4ADA112EE1}"/>
+              </a:ext>
+            </a:extLst>
+          </p:cNvPr>
+          <p:cNvSpPr txBox="1"/>
+          <p:nvPr/>
+        </p:nvSpPr>
+        <p:spPr>
+          <a:xfrm>
+            <a:off x="4540171" y="265123"/>
+            <a:ext cx="607859" cy="369332"/>
+          </a:xfrm>
+          <a:prstGeom prst="rect">
+            <a:avLst/>
+          </a:prstGeom>
+          <a:noFill/>
+        </p:spPr>
+        <p:txBody>
+          <a:bodyPr wrap="none" rtlCol="0">
+            <a:spAutoFit/>
+          </a:bodyPr>
+          <a:lstStyle/>
+          <a:p>
             <a:r>
-              <a:rPr lang="vi-VN"/>
-              <a:t>Chức năng quản lý hội thoại: chức năng, usecase, tuần tự</a:t>
+              <a:rPr lang="en-US">
+                <a:latin typeface="Times New Roman" panose="02020603050405020304" pitchFamily="18" charset="0"/>
+                <a:cs typeface="Times New Roman" panose="02020603050405020304" pitchFamily="18" charset="0"/>
+              </a:rPr>
+              <a:t>(1B)</a:t>
             </a:r>
           </a:p>
-          <a:p>
-            <a:pPr marL="285750" indent="-285750">
-              <a:buFontTx/>
-              <a:buChar char="-"/>
-            </a:pPr>
+        </p:txBody>
+      </p:sp>
+      <p:sp>
+        <p:nvSpPr>
+          <p:cNvPr id="145" name="TextBox 144">
+            <a:extLst>
+              <a:ext uri="{FF2B5EF4-FFF2-40B4-BE49-F238E27FC236}">
+                <a16:creationId xmlns:a16="http://schemas.microsoft.com/office/drawing/2014/main" id="{C980FEC5-67B0-24B6-6B9E-607A16950B1C}"/>
+              </a:ext>
+            </a:extLst>
+          </p:cNvPr>
+          <p:cNvSpPr txBox="1"/>
+          <p:nvPr/>
+        </p:nvSpPr>
+        <p:spPr>
+          <a:xfrm>
+            <a:off x="8488680" y="2577582"/>
+            <a:ext cx="620683" cy="369332"/>
+          </a:xfrm>
+          <a:prstGeom prst="rect">
+            <a:avLst/>
+          </a:prstGeom>
+          <a:noFill/>
+        </p:spPr>
+        <p:txBody>
+          <a:bodyPr wrap="none" rtlCol="0">
+            <a:spAutoFit/>
+          </a:bodyPr>
+          <a:lstStyle/>
+          <a:p>
             <a:r>
-              <a:rPr lang="vi-VN"/>
-              <a:t>Chức năng xử lý trích xuất thông tin trò chuyện</a:t>
+              <a:rPr lang="en-US">
+                <a:latin typeface="Times New Roman" panose="02020603050405020304" pitchFamily="18" charset="0"/>
+                <a:cs typeface="Times New Roman" panose="02020603050405020304" pitchFamily="18" charset="0"/>
+              </a:rPr>
+              <a:t>(2A)</a:t>
             </a:r>
           </a:p>
-          <a:p>
-            <a:pPr marL="285750" indent="-285750">
-              <a:buFontTx/>
-              <a:buChar char="-"/>
-            </a:pPr>
-            <a:endParaRPr lang="vi-VN"/>
-          </a:p>
-          <a:p>
-            <a:pPr marL="285750" indent="-285750">
-              <a:buFontTx/>
-              <a:buChar char="-"/>
-            </a:pPr>
+        </p:txBody>
+      </p:sp>
+      <p:sp>
+        <p:nvSpPr>
+          <p:cNvPr id="150" name="TextBox 149">
+            <a:extLst>
+              <a:ext uri="{FF2B5EF4-FFF2-40B4-BE49-F238E27FC236}">
+                <a16:creationId xmlns:a16="http://schemas.microsoft.com/office/drawing/2014/main" id="{64BBBA42-1BCF-2531-021A-6FAD597D5EF1}"/>
+              </a:ext>
+            </a:extLst>
+          </p:cNvPr>
+          <p:cNvSpPr txBox="1"/>
+          <p:nvPr/>
+        </p:nvSpPr>
+        <p:spPr>
+          <a:xfrm>
+            <a:off x="3690620" y="2577582"/>
+            <a:ext cx="607859" cy="369332"/>
+          </a:xfrm>
+          <a:prstGeom prst="rect">
+            <a:avLst/>
+          </a:prstGeom>
+          <a:noFill/>
+        </p:spPr>
+        <p:txBody>
+          <a:bodyPr wrap="none" rtlCol="0">
+            <a:spAutoFit/>
+          </a:bodyPr>
+          <a:lstStyle/>
+          <a:p>
             <a:r>
-              <a:rPr lang="vi-VN"/>
-              <a:t>Thiết kế cơ sở dữ liệu embedding: có những trường nào</a:t>
+              <a:rPr lang="en-US">
+                <a:latin typeface="Times New Roman" panose="02020603050405020304" pitchFamily="18" charset="0"/>
+                <a:cs typeface="Times New Roman" panose="02020603050405020304" pitchFamily="18" charset="0"/>
+              </a:rPr>
+              <a:t>(2B)</a:t>
             </a:r>
           </a:p>
-          <a:p>
-            <a:pPr marL="285750" indent="-285750">
-              <a:buFontTx/>
-              <a:buChar char="-"/>
-            </a:pPr>
+        </p:txBody>
+      </p:sp>
+      <p:sp>
+        <p:nvSpPr>
+          <p:cNvPr id="151" name="TextBox 150">
+            <a:extLst>
+              <a:ext uri="{FF2B5EF4-FFF2-40B4-BE49-F238E27FC236}">
+                <a16:creationId xmlns:a16="http://schemas.microsoft.com/office/drawing/2014/main" id="{5F7F5BE2-B6B7-CA49-F6DC-41220719D6F8}"/>
+              </a:ext>
+            </a:extLst>
+          </p:cNvPr>
+          <p:cNvSpPr txBox="1"/>
+          <p:nvPr/>
+        </p:nvSpPr>
+        <p:spPr>
+          <a:xfrm>
+            <a:off x="8488679" y="4932848"/>
+            <a:ext cx="793807" cy="369332"/>
+          </a:xfrm>
+          <a:prstGeom prst="rect">
+            <a:avLst/>
+          </a:prstGeom>
+          <a:noFill/>
+        </p:spPr>
+        <p:txBody>
+          <a:bodyPr wrap="none" rtlCol="0">
+            <a:spAutoFit/>
+          </a:bodyPr>
+          <a:lstStyle/>
+          <a:p>
             <a:r>
-              <a:rPr lang="vi-VN"/>
-              <a:t>Cơ sở dữ liệu lưu trữ lịch sử hội thoại</a:t>
+              <a:rPr lang="en-US">
+                <a:latin typeface="Times New Roman" panose="02020603050405020304" pitchFamily="18" charset="0"/>
+                <a:cs typeface="Times New Roman" panose="02020603050405020304" pitchFamily="18" charset="0"/>
+              </a:rPr>
+              <a:t>(3A.1)</a:t>
             </a:r>
           </a:p>
-          <a:p>
-            <a:pPr marL="285750" indent="-285750">
-              <a:buFontTx/>
-              <a:buChar char="-"/>
-            </a:pPr>
+        </p:txBody>
+      </p:sp>
+      <p:sp>
+        <p:nvSpPr>
+          <p:cNvPr id="152" name="TextBox 151">
+            <a:extLst>
+              <a:ext uri="{FF2B5EF4-FFF2-40B4-BE49-F238E27FC236}">
+                <a16:creationId xmlns:a16="http://schemas.microsoft.com/office/drawing/2014/main" id="{111FEC82-001B-C9FB-A5CC-07E8230CBD4E}"/>
+              </a:ext>
+            </a:extLst>
+          </p:cNvPr>
+          <p:cNvSpPr txBox="1"/>
+          <p:nvPr/>
+        </p:nvSpPr>
+        <p:spPr>
+          <a:xfrm>
+            <a:off x="2922336" y="4943443"/>
+            <a:ext cx="780983" cy="369332"/>
+          </a:xfrm>
+          <a:prstGeom prst="rect">
+            <a:avLst/>
+          </a:prstGeom>
+          <a:noFill/>
+        </p:spPr>
+        <p:txBody>
+          <a:bodyPr wrap="none" rtlCol="0">
+            <a:spAutoFit/>
+          </a:bodyPr>
+          <a:lstStyle/>
+          <a:p>
             <a:r>
-              <a:rPr lang="vi-VN"/>
-              <a:t>Co sơ dữ liệu lưu trữ thông tin người dùng</a:t>
+              <a:rPr lang="en-US">
+                <a:latin typeface="Times New Roman" panose="02020603050405020304" pitchFamily="18" charset="0"/>
+                <a:cs typeface="Times New Roman" panose="02020603050405020304" pitchFamily="18" charset="0"/>
+              </a:rPr>
+              <a:t>(3B.1)</a:t>
             </a:r>
-            <a:endParaRPr lang="en-US"/>
+          </a:p>
+        </p:txBody>
+      </p:sp>
+      <p:sp>
+        <p:nvSpPr>
+          <p:cNvPr id="153" name="TextBox 152">
+            <a:extLst>
+              <a:ext uri="{FF2B5EF4-FFF2-40B4-BE49-F238E27FC236}">
+                <a16:creationId xmlns:a16="http://schemas.microsoft.com/office/drawing/2014/main" id="{FF903399-78B1-94BC-F3D0-374C05BCC981}"/>
+              </a:ext>
+            </a:extLst>
+          </p:cNvPr>
+          <p:cNvSpPr txBox="1"/>
+          <p:nvPr/>
+        </p:nvSpPr>
+        <p:spPr>
+          <a:xfrm>
+            <a:off x="9959340" y="3643953"/>
+            <a:ext cx="793807" cy="369332"/>
+          </a:xfrm>
+          <a:prstGeom prst="rect">
+            <a:avLst/>
+          </a:prstGeom>
+          <a:noFill/>
+        </p:spPr>
+        <p:txBody>
+          <a:bodyPr wrap="none" rtlCol="0">
+            <a:spAutoFit/>
+          </a:bodyPr>
+          <a:lstStyle/>
+          <a:p>
+            <a:r>
+              <a:rPr lang="en-US">
+                <a:latin typeface="Times New Roman" panose="02020603050405020304" pitchFamily="18" charset="0"/>
+                <a:cs typeface="Times New Roman" panose="02020603050405020304" pitchFamily="18" charset="0"/>
+              </a:rPr>
+              <a:t>(3A.2)</a:t>
+            </a:r>
+          </a:p>
+        </p:txBody>
+      </p:sp>
+      <p:sp>
+        <p:nvSpPr>
+          <p:cNvPr id="154" name="TextBox 153">
+            <a:extLst>
+              <a:ext uri="{FF2B5EF4-FFF2-40B4-BE49-F238E27FC236}">
+                <a16:creationId xmlns:a16="http://schemas.microsoft.com/office/drawing/2014/main" id="{293FE729-B807-0B94-217D-F1FF85CF8FF9}"/>
+              </a:ext>
+            </a:extLst>
+          </p:cNvPr>
+          <p:cNvSpPr txBox="1"/>
+          <p:nvPr/>
+        </p:nvSpPr>
+        <p:spPr>
+          <a:xfrm>
+            <a:off x="1451553" y="3640723"/>
+            <a:ext cx="780983" cy="369332"/>
+          </a:xfrm>
+          <a:prstGeom prst="rect">
+            <a:avLst/>
+          </a:prstGeom>
+          <a:noFill/>
+        </p:spPr>
+        <p:txBody>
+          <a:bodyPr wrap="none" rtlCol="0">
+            <a:spAutoFit/>
+          </a:bodyPr>
+          <a:lstStyle/>
+          <a:p>
+            <a:r>
+              <a:rPr lang="en-US">
+                <a:latin typeface="Times New Roman" panose="02020603050405020304" pitchFamily="18" charset="0"/>
+                <a:cs typeface="Times New Roman" panose="02020603050405020304" pitchFamily="18" charset="0"/>
+              </a:rPr>
+              <a:t>(3B.2)</a:t>
+            </a:r>
+          </a:p>
+        </p:txBody>
+      </p:sp>
+      <p:sp>
+        <p:nvSpPr>
+          <p:cNvPr id="155" name="TextBox 154">
+            <a:extLst>
+              <a:ext uri="{FF2B5EF4-FFF2-40B4-BE49-F238E27FC236}">
+                <a16:creationId xmlns:a16="http://schemas.microsoft.com/office/drawing/2014/main" id="{09DFDA9A-1BB3-7DA5-59AD-78DC5CD94235}"/>
+              </a:ext>
+            </a:extLst>
+          </p:cNvPr>
+          <p:cNvSpPr txBox="1"/>
+          <p:nvPr/>
+        </p:nvSpPr>
+        <p:spPr>
+          <a:xfrm>
+            <a:off x="7421399" y="5852158"/>
+            <a:ext cx="453970" cy="369332"/>
+          </a:xfrm>
+          <a:prstGeom prst="rect">
+            <a:avLst/>
+          </a:prstGeom>
+          <a:noFill/>
+        </p:spPr>
+        <p:txBody>
+          <a:bodyPr wrap="none" rtlCol="0">
+            <a:spAutoFit/>
+          </a:bodyPr>
+          <a:lstStyle/>
+          <a:p>
+            <a:r>
+              <a:rPr lang="en-US">
+                <a:latin typeface="Times New Roman" panose="02020603050405020304" pitchFamily="18" charset="0"/>
+                <a:cs typeface="Times New Roman" panose="02020603050405020304" pitchFamily="18" charset="0"/>
+              </a:rPr>
+              <a:t>(4)</a:t>
+            </a:r>
+          </a:p>
+        </p:txBody>
+      </p:sp>
+      <p:sp>
+        <p:nvSpPr>
+          <p:cNvPr id="156" name="TextBox 155">
+            <a:extLst>
+              <a:ext uri="{FF2B5EF4-FFF2-40B4-BE49-F238E27FC236}">
+                <a16:creationId xmlns:a16="http://schemas.microsoft.com/office/drawing/2014/main" id="{10C1A162-B48F-EF9C-4DC3-E07AFF9084BC}"/>
+              </a:ext>
+            </a:extLst>
+          </p:cNvPr>
+          <p:cNvSpPr txBox="1"/>
+          <p:nvPr/>
+        </p:nvSpPr>
+        <p:spPr>
+          <a:xfrm>
+            <a:off x="10332720" y="5859779"/>
+            <a:ext cx="627095" cy="369332"/>
+          </a:xfrm>
+          <a:prstGeom prst="rect">
+            <a:avLst/>
+          </a:prstGeom>
+          <a:noFill/>
+        </p:spPr>
+        <p:txBody>
+          <a:bodyPr wrap="none" rtlCol="0">
+            <a:spAutoFit/>
+          </a:bodyPr>
+          <a:lstStyle/>
+          <a:p>
+            <a:r>
+              <a:rPr lang="en-US">
+                <a:latin typeface="Times New Roman" panose="02020603050405020304" pitchFamily="18" charset="0"/>
+                <a:cs typeface="Times New Roman" panose="02020603050405020304" pitchFamily="18" charset="0"/>
+              </a:rPr>
+              <a:t>(4.1)</a:t>
+            </a:r>
           </a:p>
         </p:txBody>
       </p:sp>
     </p:spTree>
     <p:extLst>
       <p:ext uri="{BB962C8B-B14F-4D97-AF65-F5344CB8AC3E}">
-        <p14:creationId xmlns:p14="http://schemas.microsoft.com/office/powerpoint/2010/main" val="629964740"/>
+        <p14:creationId xmlns:p14="http://schemas.microsoft.com/office/powerpoint/2010/main" val="3397203099"/>
       </p:ext>
     </p:extLst>
   </p:cSld>
@@ -4676,6 +6183,2052 @@
 </file>
 
 <file path=ppt/slides/slide11.xml><?xml version="1.0" encoding="utf-8"?>
+<p:sld xmlns:a="http://schemas.openxmlformats.org/drawingml/2006/main" xmlns:r="http://schemas.openxmlformats.org/officeDocument/2006/relationships" xmlns:p="http://schemas.openxmlformats.org/presentationml/2006/main">
+  <p:cSld>
+    <p:spTree>
+      <p:nvGrpSpPr>
+        <p:cNvPr id="1" name=""/>
+        <p:cNvGrpSpPr/>
+        <p:nvPr/>
+      </p:nvGrpSpPr>
+      <p:grpSpPr>
+        <a:xfrm>
+          <a:off x="0" y="0"/>
+          <a:ext cx="0" cy="0"/>
+          <a:chOff x="0" y="0"/>
+          <a:chExt cx="0" cy="0"/>
+        </a:xfrm>
+      </p:grpSpPr>
+      <p:grpSp>
+        <p:nvGrpSpPr>
+          <p:cNvPr id="2" name="Group 1">
+            <a:extLst>
+              <a:ext uri="{FF2B5EF4-FFF2-40B4-BE49-F238E27FC236}">
+                <a16:creationId xmlns:a16="http://schemas.microsoft.com/office/drawing/2014/main" id="{69B0A154-08A4-D97A-0E7A-7396FCA25FE6}"/>
+              </a:ext>
+            </a:extLst>
+          </p:cNvPr>
+          <p:cNvGrpSpPr/>
+          <p:nvPr/>
+        </p:nvGrpSpPr>
+        <p:grpSpPr>
+          <a:xfrm>
+            <a:off x="5509138" y="214652"/>
+            <a:ext cx="1173719" cy="1180574"/>
+            <a:chOff x="5509139" y="42349"/>
+            <a:chExt cx="1173719" cy="1180574"/>
+          </a:xfrm>
+        </p:grpSpPr>
+        <p:pic>
+          <p:nvPicPr>
+            <p:cNvPr id="3" name="Graphic 2" descr="User with solid fill">
+              <a:extLst>
+                <a:ext uri="{FF2B5EF4-FFF2-40B4-BE49-F238E27FC236}">
+                  <a16:creationId xmlns:a16="http://schemas.microsoft.com/office/drawing/2014/main" id="{1BED0E52-2D63-7666-1151-C989191C0733}"/>
+                </a:ext>
+              </a:extLst>
+            </p:cNvPr>
+            <p:cNvPicPr>
+              <a:picLocks noChangeAspect="1"/>
+            </p:cNvPicPr>
+            <p:nvPr/>
+          </p:nvPicPr>
+          <p:blipFill>
+            <a:blip r:embed="rId3">
+              <a:extLst>
+                <a:ext uri="{96DAC541-7B7A-43D3-8B79-37D633B846F1}">
+                  <asvg:svgBlip xmlns:asvg="http://schemas.microsoft.com/office/drawing/2016/SVG/main" r:embed="rId4"/>
+                </a:ext>
+              </a:extLst>
+            </a:blip>
+            <a:stretch>
+              <a:fillRect/>
+            </a:stretch>
+          </p:blipFill>
+          <p:spPr>
+            <a:xfrm>
+              <a:off x="5594034" y="42349"/>
+              <a:ext cx="1003931" cy="1003931"/>
+            </a:xfrm>
+            <a:prstGeom prst="rect">
+              <a:avLst/>
+            </a:prstGeom>
+          </p:spPr>
+        </p:pic>
+        <p:sp>
+          <p:nvSpPr>
+            <p:cNvPr id="4" name="TextBox 3">
+              <a:extLst>
+                <a:ext uri="{FF2B5EF4-FFF2-40B4-BE49-F238E27FC236}">
+                  <a16:creationId xmlns:a16="http://schemas.microsoft.com/office/drawing/2014/main" id="{C4BB48F4-6707-24B4-E7C4-AEE772FBD3BE}"/>
+                </a:ext>
+              </a:extLst>
+            </p:cNvPr>
+            <p:cNvSpPr txBox="1"/>
+            <p:nvPr/>
+          </p:nvSpPr>
+          <p:spPr>
+            <a:xfrm>
+              <a:off x="5509139" y="884369"/>
+              <a:ext cx="1173719" cy="338554"/>
+            </a:xfrm>
+            <a:prstGeom prst="rect">
+              <a:avLst/>
+            </a:prstGeom>
+            <a:noFill/>
+          </p:spPr>
+          <p:txBody>
+            <a:bodyPr wrap="none" rtlCol="0">
+              <a:spAutoFit/>
+            </a:bodyPr>
+            <a:lstStyle/>
+            <a:p>
+              <a:r>
+                <a:rPr lang="vi-VN" sz="1600">
+                  <a:latin typeface="+mj-lt"/>
+                </a:rPr>
+                <a:t>Người dùng</a:t>
+              </a:r>
+              <a:endParaRPr lang="en-US" sz="1600">
+                <a:latin typeface="+mj-lt"/>
+              </a:endParaRPr>
+            </a:p>
+          </p:txBody>
+        </p:sp>
+      </p:grpSp>
+      <p:sp>
+        <p:nvSpPr>
+          <p:cNvPr id="5" name="Rectangle: Rounded Corners 4">
+            <a:extLst>
+              <a:ext uri="{FF2B5EF4-FFF2-40B4-BE49-F238E27FC236}">
+                <a16:creationId xmlns:a16="http://schemas.microsoft.com/office/drawing/2014/main" id="{8E8A3DB1-B542-BF43-4249-6A673A081C01}"/>
+              </a:ext>
+            </a:extLst>
+          </p:cNvPr>
+          <p:cNvSpPr/>
+          <p:nvPr/>
+        </p:nvSpPr>
+        <p:spPr>
+          <a:xfrm>
+            <a:off x="4397828" y="1712259"/>
+            <a:ext cx="3396343" cy="442686"/>
+          </a:xfrm>
+          <a:prstGeom prst="roundRect">
+            <a:avLst/>
+          </a:prstGeom>
+          <a:solidFill>
+            <a:schemeClr val="bg2"/>
+          </a:solidFill>
+          <a:ln>
+            <a:solidFill>
+              <a:schemeClr val="tx1"/>
+            </a:solidFill>
+            <a:prstDash val="dash"/>
+          </a:ln>
+        </p:spPr>
+        <p:style>
+          <a:lnRef idx="2">
+            <a:schemeClr val="accent1">
+              <a:shade val="15000"/>
+            </a:schemeClr>
+          </a:lnRef>
+          <a:fillRef idx="1">
+            <a:schemeClr val="accent1"/>
+          </a:fillRef>
+          <a:effectRef idx="0">
+            <a:schemeClr val="accent1"/>
+          </a:effectRef>
+          <a:fontRef idx="minor">
+            <a:schemeClr val="lt1"/>
+          </a:fontRef>
+        </p:style>
+        <p:txBody>
+          <a:bodyPr rtlCol="0" anchor="ctr"/>
+          <a:lstStyle/>
+          <a:p>
+            <a:pPr algn="ctr"/>
+            <a:r>
+              <a:rPr lang="en-US">
+                <a:solidFill>
+                  <a:schemeClr val="tx1"/>
+                </a:solidFill>
+              </a:rPr>
+              <a:t>Giao diện chat</a:t>
+            </a:r>
+          </a:p>
+        </p:txBody>
+      </p:sp>
+      <p:sp>
+        <p:nvSpPr>
+          <p:cNvPr id="7" name="Rectangle: Rounded Corners 6">
+            <a:extLst>
+              <a:ext uri="{FF2B5EF4-FFF2-40B4-BE49-F238E27FC236}">
+                <a16:creationId xmlns:a16="http://schemas.microsoft.com/office/drawing/2014/main" id="{6BA552BB-F47C-5233-E510-733187E9BC67}"/>
+              </a:ext>
+            </a:extLst>
+          </p:cNvPr>
+          <p:cNvSpPr/>
+          <p:nvPr/>
+        </p:nvSpPr>
+        <p:spPr>
+          <a:xfrm>
+            <a:off x="4397824" y="2861833"/>
+            <a:ext cx="3396343" cy="442686"/>
+          </a:xfrm>
+          <a:prstGeom prst="roundRect">
+            <a:avLst/>
+          </a:prstGeom>
+          <a:solidFill>
+            <a:schemeClr val="bg2"/>
+          </a:solidFill>
+          <a:ln>
+            <a:solidFill>
+              <a:schemeClr val="tx1"/>
+            </a:solidFill>
+          </a:ln>
+        </p:spPr>
+        <p:style>
+          <a:lnRef idx="2">
+            <a:schemeClr val="accent1">
+              <a:shade val="15000"/>
+            </a:schemeClr>
+          </a:lnRef>
+          <a:fillRef idx="1">
+            <a:schemeClr val="accent1"/>
+          </a:fillRef>
+          <a:effectRef idx="0">
+            <a:schemeClr val="accent1"/>
+          </a:effectRef>
+          <a:fontRef idx="minor">
+            <a:schemeClr val="lt1"/>
+          </a:fontRef>
+        </p:style>
+        <p:txBody>
+          <a:bodyPr rtlCol="0" anchor="ctr"/>
+          <a:lstStyle/>
+          <a:p>
+            <a:pPr algn="ctr"/>
+            <a:r>
+              <a:rPr lang="en-US">
+                <a:solidFill>
+                  <a:schemeClr val="tx1"/>
+                </a:solidFill>
+              </a:rPr>
+              <a:t>Mở giao diện cài đặt tùy chọn</a:t>
+            </a:r>
+          </a:p>
+        </p:txBody>
+      </p:sp>
+      <p:sp>
+        <p:nvSpPr>
+          <p:cNvPr id="10" name="Rectangle: Rounded Corners 9">
+            <a:extLst>
+              <a:ext uri="{FF2B5EF4-FFF2-40B4-BE49-F238E27FC236}">
+                <a16:creationId xmlns:a16="http://schemas.microsoft.com/office/drawing/2014/main" id="{54FC52ED-D325-D40F-15FE-AB3D4B713DAF}"/>
+              </a:ext>
+            </a:extLst>
+          </p:cNvPr>
+          <p:cNvSpPr/>
+          <p:nvPr/>
+        </p:nvSpPr>
+        <p:spPr>
+          <a:xfrm>
+            <a:off x="7794164" y="4226782"/>
+            <a:ext cx="1944912" cy="918959"/>
+          </a:xfrm>
+          <a:prstGeom prst="roundRect">
+            <a:avLst/>
+          </a:prstGeom>
+          <a:solidFill>
+            <a:schemeClr val="bg2"/>
+          </a:solidFill>
+          <a:ln>
+            <a:solidFill>
+              <a:schemeClr val="tx1"/>
+            </a:solidFill>
+            <a:prstDash val="dash"/>
+          </a:ln>
+        </p:spPr>
+        <p:style>
+          <a:lnRef idx="2">
+            <a:schemeClr val="accent1">
+              <a:shade val="15000"/>
+            </a:schemeClr>
+          </a:lnRef>
+          <a:fillRef idx="1">
+            <a:schemeClr val="accent1"/>
+          </a:fillRef>
+          <a:effectRef idx="0">
+            <a:schemeClr val="accent1"/>
+          </a:effectRef>
+          <a:fontRef idx="minor">
+            <a:schemeClr val="lt1"/>
+          </a:fontRef>
+        </p:style>
+        <p:txBody>
+          <a:bodyPr rtlCol="0" anchor="ctr"/>
+          <a:lstStyle/>
+          <a:p>
+            <a:pPr algn="ctr"/>
+            <a:r>
+              <a:rPr lang="en-US">
+                <a:solidFill>
+                  <a:schemeClr val="tx1"/>
+                </a:solidFill>
+              </a:rPr>
+              <a:t>Điều chỉnh temperature</a:t>
+            </a:r>
+          </a:p>
+        </p:txBody>
+      </p:sp>
+      <p:sp>
+        <p:nvSpPr>
+          <p:cNvPr id="11" name="Rectangle: Rounded Corners 10">
+            <a:extLst>
+              <a:ext uri="{FF2B5EF4-FFF2-40B4-BE49-F238E27FC236}">
+                <a16:creationId xmlns:a16="http://schemas.microsoft.com/office/drawing/2014/main" id="{9182A22E-530B-15D3-3773-9A83D3C878C2}"/>
+              </a:ext>
+            </a:extLst>
+          </p:cNvPr>
+          <p:cNvSpPr/>
+          <p:nvPr/>
+        </p:nvSpPr>
+        <p:spPr>
+          <a:xfrm>
+            <a:off x="4397825" y="5666887"/>
+            <a:ext cx="3396343" cy="442686"/>
+          </a:xfrm>
+          <a:prstGeom prst="roundRect">
+            <a:avLst/>
+          </a:prstGeom>
+          <a:solidFill>
+            <a:schemeClr val="bg2"/>
+          </a:solidFill>
+          <a:ln>
+            <a:solidFill>
+              <a:schemeClr val="tx1"/>
+            </a:solidFill>
+          </a:ln>
+        </p:spPr>
+        <p:style>
+          <a:lnRef idx="2">
+            <a:schemeClr val="accent1">
+              <a:shade val="15000"/>
+            </a:schemeClr>
+          </a:lnRef>
+          <a:fillRef idx="1">
+            <a:schemeClr val="accent1"/>
+          </a:fillRef>
+          <a:effectRef idx="0">
+            <a:schemeClr val="accent1"/>
+          </a:effectRef>
+          <a:fontRef idx="minor">
+            <a:schemeClr val="lt1"/>
+          </a:fontRef>
+        </p:style>
+        <p:txBody>
+          <a:bodyPr rtlCol="0" anchor="ctr"/>
+          <a:lstStyle/>
+          <a:p>
+            <a:pPr algn="ctr"/>
+            <a:r>
+              <a:rPr lang="en-US">
+                <a:solidFill>
+                  <a:schemeClr val="tx1"/>
+                </a:solidFill>
+              </a:rPr>
+              <a:t>Lưu và áp dụng tùy chọn</a:t>
+            </a:r>
+          </a:p>
+        </p:txBody>
+      </p:sp>
+      <p:sp>
+        <p:nvSpPr>
+          <p:cNvPr id="13" name="Rectangle: Rounded Corners 12">
+            <a:extLst>
+              <a:ext uri="{FF2B5EF4-FFF2-40B4-BE49-F238E27FC236}">
+                <a16:creationId xmlns:a16="http://schemas.microsoft.com/office/drawing/2014/main" id="{CF3E6DEE-2F74-0B2C-64BA-F5B24461CD3A}"/>
+              </a:ext>
+            </a:extLst>
+          </p:cNvPr>
+          <p:cNvSpPr/>
+          <p:nvPr/>
+        </p:nvSpPr>
+        <p:spPr>
+          <a:xfrm>
+            <a:off x="5123539" y="4226783"/>
+            <a:ext cx="1944911" cy="918958"/>
+          </a:xfrm>
+          <a:prstGeom prst="roundRect">
+            <a:avLst/>
+          </a:prstGeom>
+          <a:solidFill>
+            <a:schemeClr val="bg2"/>
+          </a:solidFill>
+          <a:ln>
+            <a:solidFill>
+              <a:schemeClr val="tx1"/>
+            </a:solidFill>
+            <a:prstDash val="dash"/>
+          </a:ln>
+        </p:spPr>
+        <p:style>
+          <a:lnRef idx="2">
+            <a:schemeClr val="accent1">
+              <a:shade val="15000"/>
+            </a:schemeClr>
+          </a:lnRef>
+          <a:fillRef idx="1">
+            <a:schemeClr val="accent1"/>
+          </a:fillRef>
+          <a:effectRef idx="0">
+            <a:schemeClr val="accent1"/>
+          </a:effectRef>
+          <a:fontRef idx="minor">
+            <a:schemeClr val="lt1"/>
+          </a:fontRef>
+        </p:style>
+        <p:txBody>
+          <a:bodyPr rtlCol="0" anchor="ctr"/>
+          <a:lstStyle/>
+          <a:p>
+            <a:pPr algn="ctr"/>
+            <a:r>
+              <a:rPr lang="en-US">
+                <a:solidFill>
+                  <a:schemeClr val="tx1"/>
+                </a:solidFill>
+              </a:rPr>
+              <a:t>Lựa chọn LLM</a:t>
+            </a:r>
+          </a:p>
+        </p:txBody>
+      </p:sp>
+      <p:sp>
+        <p:nvSpPr>
+          <p:cNvPr id="14" name="Rectangle: Rounded Corners 13">
+            <a:extLst>
+              <a:ext uri="{FF2B5EF4-FFF2-40B4-BE49-F238E27FC236}">
+                <a16:creationId xmlns:a16="http://schemas.microsoft.com/office/drawing/2014/main" id="{939A4245-B633-7D02-D20B-44DFD81F966C}"/>
+              </a:ext>
+            </a:extLst>
+          </p:cNvPr>
+          <p:cNvSpPr/>
+          <p:nvPr/>
+        </p:nvSpPr>
+        <p:spPr>
+          <a:xfrm>
+            <a:off x="2452912" y="4226783"/>
+            <a:ext cx="1944911" cy="918958"/>
+          </a:xfrm>
+          <a:prstGeom prst="roundRect">
+            <a:avLst/>
+          </a:prstGeom>
+          <a:solidFill>
+            <a:schemeClr val="bg2"/>
+          </a:solidFill>
+          <a:ln>
+            <a:solidFill>
+              <a:schemeClr val="tx1"/>
+            </a:solidFill>
+            <a:prstDash val="dash"/>
+          </a:ln>
+        </p:spPr>
+        <p:style>
+          <a:lnRef idx="2">
+            <a:schemeClr val="accent1">
+              <a:shade val="15000"/>
+            </a:schemeClr>
+          </a:lnRef>
+          <a:fillRef idx="1">
+            <a:schemeClr val="accent1"/>
+          </a:fillRef>
+          <a:effectRef idx="0">
+            <a:schemeClr val="accent1"/>
+          </a:effectRef>
+          <a:fontRef idx="minor">
+            <a:schemeClr val="lt1"/>
+          </a:fontRef>
+        </p:style>
+        <p:txBody>
+          <a:bodyPr rtlCol="0" anchor="ctr"/>
+          <a:lstStyle/>
+          <a:p>
+            <a:pPr algn="ctr"/>
+            <a:r>
+              <a:rPr lang="en-US">
+                <a:solidFill>
+                  <a:schemeClr val="tx1"/>
+                </a:solidFill>
+              </a:rPr>
+              <a:t>Bật/tắt streaming</a:t>
+            </a:r>
+          </a:p>
+        </p:txBody>
+      </p:sp>
+      <p:cxnSp>
+        <p:nvCxnSpPr>
+          <p:cNvPr id="16" name="Connector: Elbow 15">
+            <a:extLst>
+              <a:ext uri="{FF2B5EF4-FFF2-40B4-BE49-F238E27FC236}">
+                <a16:creationId xmlns:a16="http://schemas.microsoft.com/office/drawing/2014/main" id="{164EA925-73AB-D4A3-72F9-B0E067CA613A}"/>
+              </a:ext>
+            </a:extLst>
+          </p:cNvPr>
+          <p:cNvCxnSpPr>
+            <a:stCxn id="7" idx="2"/>
+            <a:endCxn id="14" idx="0"/>
+          </p:cNvCxnSpPr>
+          <p:nvPr/>
+        </p:nvCxnSpPr>
+        <p:spPr>
+          <a:xfrm rot="5400000">
+            <a:off x="4299550" y="2430337"/>
+            <a:ext cx="922264" cy="2670628"/>
+          </a:xfrm>
+          <a:prstGeom prst="bentConnector3">
+            <a:avLst/>
+          </a:prstGeom>
+          <a:ln>
+            <a:tailEnd type="triangle"/>
+          </a:ln>
+        </p:spPr>
+        <p:style>
+          <a:lnRef idx="2">
+            <a:schemeClr val="dk1"/>
+          </a:lnRef>
+          <a:fillRef idx="0">
+            <a:schemeClr val="dk1"/>
+          </a:fillRef>
+          <a:effectRef idx="1">
+            <a:schemeClr val="dk1"/>
+          </a:effectRef>
+          <a:fontRef idx="minor">
+            <a:schemeClr val="tx1"/>
+          </a:fontRef>
+        </p:style>
+      </p:cxnSp>
+      <p:cxnSp>
+        <p:nvCxnSpPr>
+          <p:cNvPr id="20" name="Connector: Elbow 19">
+            <a:extLst>
+              <a:ext uri="{FF2B5EF4-FFF2-40B4-BE49-F238E27FC236}">
+                <a16:creationId xmlns:a16="http://schemas.microsoft.com/office/drawing/2014/main" id="{9AFC90FF-2B9B-28B4-B00A-E620B71E8A73}"/>
+              </a:ext>
+            </a:extLst>
+          </p:cNvPr>
+          <p:cNvCxnSpPr>
+            <a:stCxn id="7" idx="2"/>
+            <a:endCxn id="10" idx="0"/>
+          </p:cNvCxnSpPr>
+          <p:nvPr/>
+        </p:nvCxnSpPr>
+        <p:spPr>
+          <a:xfrm rot="16200000" flipH="1">
+            <a:off x="6970177" y="2430338"/>
+            <a:ext cx="922263" cy="2670624"/>
+          </a:xfrm>
+          <a:prstGeom prst="bentConnector3">
+            <a:avLst/>
+          </a:prstGeom>
+          <a:ln>
+            <a:tailEnd type="triangle"/>
+          </a:ln>
+        </p:spPr>
+        <p:style>
+          <a:lnRef idx="2">
+            <a:schemeClr val="dk1"/>
+          </a:lnRef>
+          <a:fillRef idx="0">
+            <a:schemeClr val="dk1"/>
+          </a:fillRef>
+          <a:effectRef idx="1">
+            <a:schemeClr val="dk1"/>
+          </a:effectRef>
+          <a:fontRef idx="minor">
+            <a:schemeClr val="tx1"/>
+          </a:fontRef>
+        </p:style>
+      </p:cxnSp>
+      <p:cxnSp>
+        <p:nvCxnSpPr>
+          <p:cNvPr id="22" name="Straight Arrow Connector 21">
+            <a:extLst>
+              <a:ext uri="{FF2B5EF4-FFF2-40B4-BE49-F238E27FC236}">
+                <a16:creationId xmlns:a16="http://schemas.microsoft.com/office/drawing/2014/main" id="{FE6D100E-8941-743C-29D6-0C71A5315607}"/>
+              </a:ext>
+            </a:extLst>
+          </p:cNvPr>
+          <p:cNvCxnSpPr>
+            <a:stCxn id="7" idx="2"/>
+            <a:endCxn id="13" idx="0"/>
+          </p:cNvCxnSpPr>
+          <p:nvPr/>
+        </p:nvCxnSpPr>
+        <p:spPr>
+          <a:xfrm flipH="1">
+            <a:off x="6095995" y="3304519"/>
+            <a:ext cx="1" cy="922264"/>
+          </a:xfrm>
+          <a:prstGeom prst="straightConnector1">
+            <a:avLst/>
+          </a:prstGeom>
+          <a:ln>
+            <a:tailEnd type="triangle"/>
+          </a:ln>
+        </p:spPr>
+        <p:style>
+          <a:lnRef idx="2">
+            <a:schemeClr val="dk1"/>
+          </a:lnRef>
+          <a:fillRef idx="0">
+            <a:schemeClr val="dk1"/>
+          </a:fillRef>
+          <a:effectRef idx="1">
+            <a:schemeClr val="dk1"/>
+          </a:effectRef>
+          <a:fontRef idx="minor">
+            <a:schemeClr val="tx1"/>
+          </a:fontRef>
+        </p:style>
+      </p:cxnSp>
+      <p:cxnSp>
+        <p:nvCxnSpPr>
+          <p:cNvPr id="24" name="Connector: Elbow 23">
+            <a:extLst>
+              <a:ext uri="{FF2B5EF4-FFF2-40B4-BE49-F238E27FC236}">
+                <a16:creationId xmlns:a16="http://schemas.microsoft.com/office/drawing/2014/main" id="{F9C580E9-8E79-1E8F-AB63-09D4FD405977}"/>
+              </a:ext>
+            </a:extLst>
+          </p:cNvPr>
+          <p:cNvCxnSpPr>
+            <a:stCxn id="14" idx="2"/>
+            <a:endCxn id="11" idx="0"/>
+          </p:cNvCxnSpPr>
+          <p:nvPr/>
+        </p:nvCxnSpPr>
+        <p:spPr>
+          <a:xfrm rot="16200000" flipH="1">
+            <a:off x="4500109" y="4070999"/>
+            <a:ext cx="521146" cy="2670629"/>
+          </a:xfrm>
+          <a:prstGeom prst="bentConnector3">
+            <a:avLst/>
+          </a:prstGeom>
+          <a:ln>
+            <a:tailEnd type="triangle"/>
+          </a:ln>
+        </p:spPr>
+        <p:style>
+          <a:lnRef idx="2">
+            <a:schemeClr val="dk1"/>
+          </a:lnRef>
+          <a:fillRef idx="0">
+            <a:schemeClr val="dk1"/>
+          </a:fillRef>
+          <a:effectRef idx="1">
+            <a:schemeClr val="dk1"/>
+          </a:effectRef>
+          <a:fontRef idx="minor">
+            <a:schemeClr val="tx1"/>
+          </a:fontRef>
+        </p:style>
+      </p:cxnSp>
+      <p:cxnSp>
+        <p:nvCxnSpPr>
+          <p:cNvPr id="26" name="Connector: Elbow 25">
+            <a:extLst>
+              <a:ext uri="{FF2B5EF4-FFF2-40B4-BE49-F238E27FC236}">
+                <a16:creationId xmlns:a16="http://schemas.microsoft.com/office/drawing/2014/main" id="{1C89D13F-0BBE-DCF1-45CA-92E7A51B7144}"/>
+              </a:ext>
+            </a:extLst>
+          </p:cNvPr>
+          <p:cNvCxnSpPr>
+            <a:stCxn id="10" idx="2"/>
+            <a:endCxn id="11" idx="0"/>
+          </p:cNvCxnSpPr>
+          <p:nvPr/>
+        </p:nvCxnSpPr>
+        <p:spPr>
+          <a:xfrm rot="5400000">
+            <a:off x="7170736" y="4071003"/>
+            <a:ext cx="521146" cy="2670623"/>
+          </a:xfrm>
+          <a:prstGeom prst="bentConnector3">
+            <a:avLst/>
+          </a:prstGeom>
+          <a:ln>
+            <a:tailEnd type="triangle"/>
+          </a:ln>
+        </p:spPr>
+        <p:style>
+          <a:lnRef idx="2">
+            <a:schemeClr val="dk1"/>
+          </a:lnRef>
+          <a:fillRef idx="0">
+            <a:schemeClr val="dk1"/>
+          </a:fillRef>
+          <a:effectRef idx="1">
+            <a:schemeClr val="dk1"/>
+          </a:effectRef>
+          <a:fontRef idx="minor">
+            <a:schemeClr val="tx1"/>
+          </a:fontRef>
+        </p:style>
+      </p:cxnSp>
+      <p:cxnSp>
+        <p:nvCxnSpPr>
+          <p:cNvPr id="28" name="Straight Arrow Connector 27">
+            <a:extLst>
+              <a:ext uri="{FF2B5EF4-FFF2-40B4-BE49-F238E27FC236}">
+                <a16:creationId xmlns:a16="http://schemas.microsoft.com/office/drawing/2014/main" id="{FB6D00F6-A407-C787-2346-1AA42382CD26}"/>
+              </a:ext>
+            </a:extLst>
+          </p:cNvPr>
+          <p:cNvCxnSpPr>
+            <a:stCxn id="13" idx="2"/>
+            <a:endCxn id="11" idx="0"/>
+          </p:cNvCxnSpPr>
+          <p:nvPr/>
+        </p:nvCxnSpPr>
+        <p:spPr>
+          <a:xfrm>
+            <a:off x="6095995" y="5145741"/>
+            <a:ext cx="2" cy="521146"/>
+          </a:xfrm>
+          <a:prstGeom prst="straightConnector1">
+            <a:avLst/>
+          </a:prstGeom>
+          <a:ln>
+            <a:tailEnd type="triangle"/>
+          </a:ln>
+        </p:spPr>
+        <p:style>
+          <a:lnRef idx="2">
+            <a:schemeClr val="dk1"/>
+          </a:lnRef>
+          <a:fillRef idx="0">
+            <a:schemeClr val="dk1"/>
+          </a:fillRef>
+          <a:effectRef idx="1">
+            <a:schemeClr val="dk1"/>
+          </a:effectRef>
+          <a:fontRef idx="minor">
+            <a:schemeClr val="tx1"/>
+          </a:fontRef>
+        </p:style>
+      </p:cxnSp>
+      <p:cxnSp>
+        <p:nvCxnSpPr>
+          <p:cNvPr id="60" name="Straight Connector 59">
+            <a:extLst>
+              <a:ext uri="{FF2B5EF4-FFF2-40B4-BE49-F238E27FC236}">
+                <a16:creationId xmlns:a16="http://schemas.microsoft.com/office/drawing/2014/main" id="{C98A81B2-15C8-2E73-697D-69BC47E647F4}"/>
+              </a:ext>
+            </a:extLst>
+          </p:cNvPr>
+          <p:cNvCxnSpPr>
+            <a:stCxn id="11" idx="3"/>
+          </p:cNvCxnSpPr>
+          <p:nvPr/>
+        </p:nvCxnSpPr>
+        <p:spPr>
+          <a:xfrm>
+            <a:off x="7794168" y="5888230"/>
+            <a:ext cx="2353132" cy="4570"/>
+          </a:xfrm>
+          <a:prstGeom prst="line">
+            <a:avLst/>
+          </a:prstGeom>
+        </p:spPr>
+        <p:style>
+          <a:lnRef idx="2">
+            <a:schemeClr val="dk1"/>
+          </a:lnRef>
+          <a:fillRef idx="0">
+            <a:schemeClr val="dk1"/>
+          </a:fillRef>
+          <a:effectRef idx="1">
+            <a:schemeClr val="dk1"/>
+          </a:effectRef>
+          <a:fontRef idx="minor">
+            <a:schemeClr val="tx1"/>
+          </a:fontRef>
+        </p:style>
+      </p:cxnSp>
+      <p:cxnSp>
+        <p:nvCxnSpPr>
+          <p:cNvPr id="62" name="Straight Connector 61">
+            <a:extLst>
+              <a:ext uri="{FF2B5EF4-FFF2-40B4-BE49-F238E27FC236}">
+                <a16:creationId xmlns:a16="http://schemas.microsoft.com/office/drawing/2014/main" id="{72E10347-06D2-B46A-6CF3-94D7E3ABF76C}"/>
+              </a:ext>
+            </a:extLst>
+          </p:cNvPr>
+          <p:cNvCxnSpPr>
+            <a:cxnSpLocks/>
+          </p:cNvCxnSpPr>
+          <p:nvPr/>
+        </p:nvCxnSpPr>
+        <p:spPr>
+          <a:xfrm flipV="1">
+            <a:off x="10160000" y="1943100"/>
+            <a:ext cx="0" cy="3949700"/>
+          </a:xfrm>
+          <a:prstGeom prst="line">
+            <a:avLst/>
+          </a:prstGeom>
+        </p:spPr>
+        <p:style>
+          <a:lnRef idx="2">
+            <a:schemeClr val="dk1"/>
+          </a:lnRef>
+          <a:fillRef idx="0">
+            <a:schemeClr val="dk1"/>
+          </a:fillRef>
+          <a:effectRef idx="1">
+            <a:schemeClr val="dk1"/>
+          </a:effectRef>
+          <a:fontRef idx="minor">
+            <a:schemeClr val="tx1"/>
+          </a:fontRef>
+        </p:style>
+      </p:cxnSp>
+      <p:cxnSp>
+        <p:nvCxnSpPr>
+          <p:cNvPr id="64" name="Straight Arrow Connector 63">
+            <a:extLst>
+              <a:ext uri="{FF2B5EF4-FFF2-40B4-BE49-F238E27FC236}">
+                <a16:creationId xmlns:a16="http://schemas.microsoft.com/office/drawing/2014/main" id="{DA842740-3219-9EF7-D5E9-592606E6A6CE}"/>
+              </a:ext>
+            </a:extLst>
+          </p:cNvPr>
+          <p:cNvCxnSpPr>
+            <a:cxnSpLocks/>
+            <a:endCxn id="5" idx="3"/>
+          </p:cNvCxnSpPr>
+          <p:nvPr/>
+        </p:nvCxnSpPr>
+        <p:spPr>
+          <a:xfrm flipH="1" flipV="1">
+            <a:off x="7794171" y="1933602"/>
+            <a:ext cx="2365829" cy="9498"/>
+          </a:xfrm>
+          <a:prstGeom prst="straightConnector1">
+            <a:avLst/>
+          </a:prstGeom>
+          <a:ln>
+            <a:tailEnd type="triangle"/>
+          </a:ln>
+        </p:spPr>
+        <p:style>
+          <a:lnRef idx="2">
+            <a:schemeClr val="dk1"/>
+          </a:lnRef>
+          <a:fillRef idx="0">
+            <a:schemeClr val="dk1"/>
+          </a:fillRef>
+          <a:effectRef idx="1">
+            <a:schemeClr val="dk1"/>
+          </a:effectRef>
+          <a:fontRef idx="minor">
+            <a:schemeClr val="tx1"/>
+          </a:fontRef>
+        </p:style>
+      </p:cxnSp>
+      <p:cxnSp>
+        <p:nvCxnSpPr>
+          <p:cNvPr id="68" name="Straight Arrow Connector 67">
+            <a:extLst>
+              <a:ext uri="{FF2B5EF4-FFF2-40B4-BE49-F238E27FC236}">
+                <a16:creationId xmlns:a16="http://schemas.microsoft.com/office/drawing/2014/main" id="{2D61EA22-C9A4-D74D-0276-BA2D71358CFF}"/>
+              </a:ext>
+            </a:extLst>
+          </p:cNvPr>
+          <p:cNvCxnSpPr>
+            <a:stCxn id="4" idx="2"/>
+            <a:endCxn id="5" idx="0"/>
+          </p:cNvCxnSpPr>
+          <p:nvPr/>
+        </p:nvCxnSpPr>
+        <p:spPr>
+          <a:xfrm>
+            <a:off x="6095998" y="1395226"/>
+            <a:ext cx="2" cy="317033"/>
+          </a:xfrm>
+          <a:prstGeom prst="straightConnector1">
+            <a:avLst/>
+          </a:prstGeom>
+          <a:ln>
+            <a:tailEnd type="triangle"/>
+          </a:ln>
+        </p:spPr>
+        <p:style>
+          <a:lnRef idx="2">
+            <a:schemeClr val="dk1"/>
+          </a:lnRef>
+          <a:fillRef idx="0">
+            <a:schemeClr val="dk1"/>
+          </a:fillRef>
+          <a:effectRef idx="1">
+            <a:schemeClr val="dk1"/>
+          </a:effectRef>
+          <a:fontRef idx="minor">
+            <a:schemeClr val="tx1"/>
+          </a:fontRef>
+        </p:style>
+      </p:cxnSp>
+      <p:cxnSp>
+        <p:nvCxnSpPr>
+          <p:cNvPr id="70" name="Straight Arrow Connector 69">
+            <a:extLst>
+              <a:ext uri="{FF2B5EF4-FFF2-40B4-BE49-F238E27FC236}">
+                <a16:creationId xmlns:a16="http://schemas.microsoft.com/office/drawing/2014/main" id="{E5B654EA-E6A5-4BF9-FE8B-3AECDD898393}"/>
+              </a:ext>
+            </a:extLst>
+          </p:cNvPr>
+          <p:cNvCxnSpPr>
+            <a:stCxn id="5" idx="2"/>
+            <a:endCxn id="7" idx="0"/>
+          </p:cNvCxnSpPr>
+          <p:nvPr/>
+        </p:nvCxnSpPr>
+        <p:spPr>
+          <a:xfrm flipH="1">
+            <a:off x="6095996" y="2154945"/>
+            <a:ext cx="4" cy="706888"/>
+          </a:xfrm>
+          <a:prstGeom prst="straightConnector1">
+            <a:avLst/>
+          </a:prstGeom>
+          <a:ln>
+            <a:tailEnd type="triangle"/>
+          </a:ln>
+        </p:spPr>
+        <p:style>
+          <a:lnRef idx="2">
+            <a:schemeClr val="dk1"/>
+          </a:lnRef>
+          <a:fillRef idx="0">
+            <a:schemeClr val="dk1"/>
+          </a:fillRef>
+          <a:effectRef idx="1">
+            <a:schemeClr val="dk1"/>
+          </a:effectRef>
+          <a:fontRef idx="minor">
+            <a:schemeClr val="tx1"/>
+          </a:fontRef>
+        </p:style>
+      </p:cxnSp>
+    </p:spTree>
+    <p:extLst>
+      <p:ext uri="{BB962C8B-B14F-4D97-AF65-F5344CB8AC3E}">
+        <p14:creationId xmlns:p14="http://schemas.microsoft.com/office/powerpoint/2010/main" val="649960317"/>
+      </p:ext>
+    </p:extLst>
+  </p:cSld>
+  <p:clrMapOvr>
+    <a:masterClrMapping/>
+  </p:clrMapOvr>
+</p:sld>
+</file>
+
+<file path=ppt/slides/slide12.xml><?xml version="1.0" encoding="utf-8"?>
+<p:sld xmlns:a="http://schemas.openxmlformats.org/drawingml/2006/main" xmlns:r="http://schemas.openxmlformats.org/officeDocument/2006/relationships" xmlns:p="http://schemas.openxmlformats.org/presentationml/2006/main">
+  <p:cSld>
+    <p:spTree>
+      <p:nvGrpSpPr>
+        <p:cNvPr id="1" name=""/>
+        <p:cNvGrpSpPr/>
+        <p:nvPr/>
+      </p:nvGrpSpPr>
+      <p:grpSpPr>
+        <a:xfrm>
+          <a:off x="0" y="0"/>
+          <a:ext cx="0" cy="0"/>
+          <a:chOff x="0" y="0"/>
+          <a:chExt cx="0" cy="0"/>
+        </a:xfrm>
+      </p:grpSpPr>
+      <p:sp>
+        <p:nvSpPr>
+          <p:cNvPr id="2" name="Oval 1">
+            <a:extLst>
+              <a:ext uri="{FF2B5EF4-FFF2-40B4-BE49-F238E27FC236}">
+                <a16:creationId xmlns:a16="http://schemas.microsoft.com/office/drawing/2014/main" id="{77CED487-EC9D-C1F7-B17E-3A44C10E3D8E}"/>
+              </a:ext>
+            </a:extLst>
+          </p:cNvPr>
+          <p:cNvSpPr/>
+          <p:nvPr/>
+        </p:nvSpPr>
+        <p:spPr>
+          <a:xfrm>
+            <a:off x="994227" y="557529"/>
+            <a:ext cx="1844040" cy="838200"/>
+          </a:xfrm>
+          <a:prstGeom prst="ellipse">
+            <a:avLst/>
+          </a:prstGeom>
+          <a:solidFill>
+            <a:schemeClr val="bg2"/>
+          </a:solidFill>
+          <a:ln>
+            <a:solidFill>
+              <a:schemeClr val="tx1"/>
+            </a:solidFill>
+          </a:ln>
+        </p:spPr>
+        <p:style>
+          <a:lnRef idx="2">
+            <a:schemeClr val="dk1"/>
+          </a:lnRef>
+          <a:fillRef idx="1">
+            <a:schemeClr val="lt1"/>
+          </a:fillRef>
+          <a:effectRef idx="0">
+            <a:schemeClr val="dk1"/>
+          </a:effectRef>
+          <a:fontRef idx="minor">
+            <a:schemeClr val="dk1"/>
+          </a:fontRef>
+        </p:style>
+        <p:txBody>
+          <a:bodyPr rtlCol="0" anchor="ctr"/>
+          <a:lstStyle/>
+          <a:p>
+            <a:pPr algn="ctr"/>
+            <a:r>
+              <a:rPr lang="en-US">
+                <a:solidFill>
+                  <a:schemeClr val="tx1"/>
+                </a:solidFill>
+                <a:latin typeface="Times New Roman" panose="02020603050405020304" pitchFamily="18" charset="0"/>
+                <a:cs typeface="Times New Roman" panose="02020603050405020304" pitchFamily="18" charset="0"/>
+              </a:rPr>
+              <a:t>Bắt đầu</a:t>
+            </a:r>
+          </a:p>
+        </p:txBody>
+      </p:sp>
+      <p:sp>
+        <p:nvSpPr>
+          <p:cNvPr id="3" name="Rectangle: Rounded Corners 2">
+            <a:extLst>
+              <a:ext uri="{FF2B5EF4-FFF2-40B4-BE49-F238E27FC236}">
+                <a16:creationId xmlns:a16="http://schemas.microsoft.com/office/drawing/2014/main" id="{1AB19B60-C3F6-5444-5F43-179014C1CCC8}"/>
+              </a:ext>
+            </a:extLst>
+          </p:cNvPr>
+          <p:cNvSpPr/>
+          <p:nvPr/>
+        </p:nvSpPr>
+        <p:spPr>
+          <a:xfrm>
+            <a:off x="4666339" y="558072"/>
+            <a:ext cx="2859315" cy="837657"/>
+          </a:xfrm>
+          <a:prstGeom prst="roundRect">
+            <a:avLst/>
+          </a:prstGeom>
+          <a:solidFill>
+            <a:schemeClr val="bg2"/>
+          </a:solidFill>
+          <a:ln>
+            <a:solidFill>
+              <a:schemeClr val="tx1"/>
+            </a:solidFill>
+          </a:ln>
+        </p:spPr>
+        <p:style>
+          <a:lnRef idx="2">
+            <a:schemeClr val="accent1">
+              <a:shade val="15000"/>
+            </a:schemeClr>
+          </a:lnRef>
+          <a:fillRef idx="1">
+            <a:schemeClr val="accent1"/>
+          </a:fillRef>
+          <a:effectRef idx="0">
+            <a:schemeClr val="accent1"/>
+          </a:effectRef>
+          <a:fontRef idx="minor">
+            <a:schemeClr val="lt1"/>
+          </a:fontRef>
+        </p:style>
+        <p:txBody>
+          <a:bodyPr rtlCol="0" anchor="ctr"/>
+          <a:lstStyle/>
+          <a:p>
+            <a:pPr algn="ctr"/>
+            <a:r>
+              <a:rPr lang="en-US">
+                <a:solidFill>
+                  <a:schemeClr val="tx1"/>
+                </a:solidFill>
+                <a:latin typeface="Times New Roman" panose="02020603050405020304" pitchFamily="18" charset="0"/>
+                <a:cs typeface="Times New Roman" panose="02020603050405020304" pitchFamily="18" charset="0"/>
+              </a:rPr>
+              <a:t>Người dùng lựa chọn các</a:t>
+            </a:r>
+          </a:p>
+          <a:p>
+            <a:pPr algn="ctr"/>
+            <a:r>
+              <a:rPr lang="en-US">
+                <a:solidFill>
+                  <a:schemeClr val="tx1"/>
+                </a:solidFill>
+                <a:latin typeface="Times New Roman" panose="02020603050405020304" pitchFamily="18" charset="0"/>
+                <a:cs typeface="Times New Roman" panose="02020603050405020304" pitchFamily="18" charset="0"/>
+              </a:rPr>
+              <a:t>cài đặt tùy chọn</a:t>
+            </a:r>
+          </a:p>
+        </p:txBody>
+      </p:sp>
+      <p:sp>
+        <p:nvSpPr>
+          <p:cNvPr id="5" name="Rectangle: Rounded Corners 4">
+            <a:extLst>
+              <a:ext uri="{FF2B5EF4-FFF2-40B4-BE49-F238E27FC236}">
+                <a16:creationId xmlns:a16="http://schemas.microsoft.com/office/drawing/2014/main" id="{66666381-152F-F2B7-0F1D-ABE9AA69BF20}"/>
+              </a:ext>
+            </a:extLst>
+          </p:cNvPr>
+          <p:cNvSpPr/>
+          <p:nvPr/>
+        </p:nvSpPr>
+        <p:spPr>
+          <a:xfrm>
+            <a:off x="4666339" y="2443279"/>
+            <a:ext cx="2859315" cy="837657"/>
+          </a:xfrm>
+          <a:prstGeom prst="roundRect">
+            <a:avLst/>
+          </a:prstGeom>
+          <a:solidFill>
+            <a:schemeClr val="bg2"/>
+          </a:solidFill>
+          <a:ln>
+            <a:solidFill>
+              <a:schemeClr val="tx1"/>
+            </a:solidFill>
+            <a:prstDash val="dash"/>
+          </a:ln>
+        </p:spPr>
+        <p:style>
+          <a:lnRef idx="2">
+            <a:schemeClr val="accent1">
+              <a:shade val="15000"/>
+            </a:schemeClr>
+          </a:lnRef>
+          <a:fillRef idx="1">
+            <a:schemeClr val="accent1"/>
+          </a:fillRef>
+          <a:effectRef idx="0">
+            <a:schemeClr val="accent1"/>
+          </a:effectRef>
+          <a:fontRef idx="minor">
+            <a:schemeClr val="lt1"/>
+          </a:fontRef>
+        </p:style>
+        <p:txBody>
+          <a:bodyPr rtlCol="0" anchor="ctr"/>
+          <a:lstStyle/>
+          <a:p>
+            <a:pPr algn="ctr"/>
+            <a:r>
+              <a:rPr lang="en-US">
+                <a:solidFill>
+                  <a:schemeClr val="tx1"/>
+                </a:solidFill>
+                <a:latin typeface="Times New Roman" panose="02020603050405020304" pitchFamily="18" charset="0"/>
+                <a:cs typeface="Times New Roman" panose="02020603050405020304" pitchFamily="18" charset="0"/>
+              </a:rPr>
+              <a:t>Chọn sử dụng streaming khi</a:t>
+            </a:r>
+          </a:p>
+          <a:p>
+            <a:pPr algn="ctr"/>
+            <a:r>
+              <a:rPr lang="en-US">
+                <a:solidFill>
+                  <a:schemeClr val="tx1"/>
+                </a:solidFill>
+                <a:latin typeface="Times New Roman" panose="02020603050405020304" pitchFamily="18" charset="0"/>
+                <a:cs typeface="Times New Roman" panose="02020603050405020304" pitchFamily="18" charset="0"/>
+              </a:rPr>
+              <a:t>sinh phản hồi hay không</a:t>
+            </a:r>
+          </a:p>
+        </p:txBody>
+      </p:sp>
+      <p:sp>
+        <p:nvSpPr>
+          <p:cNvPr id="6" name="Rectangle: Rounded Corners 5">
+            <a:extLst>
+              <a:ext uri="{FF2B5EF4-FFF2-40B4-BE49-F238E27FC236}">
+                <a16:creationId xmlns:a16="http://schemas.microsoft.com/office/drawing/2014/main" id="{B3ED9545-85A4-EC52-6D48-EA294F061EEC}"/>
+              </a:ext>
+            </a:extLst>
+          </p:cNvPr>
+          <p:cNvSpPr/>
+          <p:nvPr/>
+        </p:nvSpPr>
+        <p:spPr>
+          <a:xfrm>
+            <a:off x="994227" y="2443278"/>
+            <a:ext cx="2859315" cy="837657"/>
+          </a:xfrm>
+          <a:prstGeom prst="roundRect">
+            <a:avLst/>
+          </a:prstGeom>
+          <a:solidFill>
+            <a:schemeClr val="bg2"/>
+          </a:solidFill>
+          <a:ln>
+            <a:solidFill>
+              <a:schemeClr val="tx1"/>
+            </a:solidFill>
+            <a:prstDash val="dash"/>
+          </a:ln>
+        </p:spPr>
+        <p:style>
+          <a:lnRef idx="2">
+            <a:schemeClr val="accent1">
+              <a:shade val="15000"/>
+            </a:schemeClr>
+          </a:lnRef>
+          <a:fillRef idx="1">
+            <a:schemeClr val="accent1"/>
+          </a:fillRef>
+          <a:effectRef idx="0">
+            <a:schemeClr val="accent1"/>
+          </a:effectRef>
+          <a:fontRef idx="minor">
+            <a:schemeClr val="lt1"/>
+          </a:fontRef>
+        </p:style>
+        <p:txBody>
+          <a:bodyPr rtlCol="0" anchor="ctr"/>
+          <a:lstStyle/>
+          <a:p>
+            <a:pPr algn="ctr"/>
+            <a:r>
+              <a:rPr lang="en-US">
+                <a:solidFill>
+                  <a:schemeClr val="tx1"/>
+                </a:solidFill>
+                <a:latin typeface="Times New Roman" panose="02020603050405020304" pitchFamily="18" charset="0"/>
+                <a:cs typeface="Times New Roman" panose="02020603050405020304" pitchFamily="18" charset="0"/>
+              </a:rPr>
+              <a:t>Lựa chọn mô hình LLM</a:t>
+            </a:r>
+          </a:p>
+          <a:p>
+            <a:pPr algn="ctr"/>
+            <a:r>
+              <a:rPr lang="en-US">
+                <a:solidFill>
+                  <a:schemeClr val="tx1"/>
+                </a:solidFill>
+                <a:latin typeface="Times New Roman" panose="02020603050405020304" pitchFamily="18" charset="0"/>
+                <a:cs typeface="Times New Roman" panose="02020603050405020304" pitchFamily="18" charset="0"/>
+              </a:rPr>
+              <a:t>sẽ sinh phản hồi</a:t>
+            </a:r>
+          </a:p>
+        </p:txBody>
+      </p:sp>
+      <p:sp>
+        <p:nvSpPr>
+          <p:cNvPr id="7" name="Rectangle: Rounded Corners 6">
+            <a:extLst>
+              <a:ext uri="{FF2B5EF4-FFF2-40B4-BE49-F238E27FC236}">
+                <a16:creationId xmlns:a16="http://schemas.microsoft.com/office/drawing/2014/main" id="{BDF037F5-B213-F186-DA20-182B7F151232}"/>
+              </a:ext>
+            </a:extLst>
+          </p:cNvPr>
+          <p:cNvSpPr/>
+          <p:nvPr/>
+        </p:nvSpPr>
+        <p:spPr>
+          <a:xfrm>
+            <a:off x="8338451" y="2423613"/>
+            <a:ext cx="2859315" cy="857320"/>
+          </a:xfrm>
+          <a:prstGeom prst="roundRect">
+            <a:avLst/>
+          </a:prstGeom>
+          <a:solidFill>
+            <a:schemeClr val="bg2"/>
+          </a:solidFill>
+          <a:ln>
+            <a:solidFill>
+              <a:schemeClr val="tx1"/>
+            </a:solidFill>
+            <a:prstDash val="dash"/>
+          </a:ln>
+        </p:spPr>
+        <p:style>
+          <a:lnRef idx="2">
+            <a:schemeClr val="accent1">
+              <a:shade val="15000"/>
+            </a:schemeClr>
+          </a:lnRef>
+          <a:fillRef idx="1">
+            <a:schemeClr val="accent1"/>
+          </a:fillRef>
+          <a:effectRef idx="0">
+            <a:schemeClr val="accent1"/>
+          </a:effectRef>
+          <a:fontRef idx="minor">
+            <a:schemeClr val="lt1"/>
+          </a:fontRef>
+        </p:style>
+        <p:txBody>
+          <a:bodyPr rtlCol="0" anchor="ctr"/>
+          <a:lstStyle/>
+          <a:p>
+            <a:pPr algn="ctr"/>
+            <a:r>
+              <a:rPr lang="en-US">
+                <a:solidFill>
+                  <a:schemeClr val="tx1"/>
+                </a:solidFill>
+                <a:latin typeface="Times New Roman" panose="02020603050405020304" pitchFamily="18" charset="0"/>
+                <a:cs typeface="Times New Roman" panose="02020603050405020304" pitchFamily="18" charset="0"/>
+              </a:rPr>
+              <a:t>Lựa chọn độ “thân thiện”</a:t>
+            </a:r>
+          </a:p>
+          <a:p>
+            <a:pPr algn="ctr"/>
+            <a:r>
+              <a:rPr lang="en-US">
+                <a:solidFill>
+                  <a:schemeClr val="tx1"/>
+                </a:solidFill>
+                <a:latin typeface="Times New Roman" panose="02020603050405020304" pitchFamily="18" charset="0"/>
+                <a:cs typeface="Times New Roman" panose="02020603050405020304" pitchFamily="18" charset="0"/>
+              </a:rPr>
+              <a:t>của phản hồi</a:t>
+            </a:r>
+          </a:p>
+        </p:txBody>
+      </p:sp>
+      <p:sp>
+        <p:nvSpPr>
+          <p:cNvPr id="8" name="Rectangle: Rounded Corners 7">
+            <a:extLst>
+              <a:ext uri="{FF2B5EF4-FFF2-40B4-BE49-F238E27FC236}">
+                <a16:creationId xmlns:a16="http://schemas.microsoft.com/office/drawing/2014/main" id="{1C4C8401-2614-0C9B-8301-5C8989FEA059}"/>
+              </a:ext>
+            </a:extLst>
+          </p:cNvPr>
+          <p:cNvSpPr/>
+          <p:nvPr/>
+        </p:nvSpPr>
+        <p:spPr>
+          <a:xfrm>
+            <a:off x="4666339" y="3915940"/>
+            <a:ext cx="2859315" cy="837657"/>
+          </a:xfrm>
+          <a:prstGeom prst="roundRect">
+            <a:avLst/>
+          </a:prstGeom>
+          <a:solidFill>
+            <a:schemeClr val="bg2"/>
+          </a:solidFill>
+          <a:ln>
+            <a:solidFill>
+              <a:schemeClr val="tx1"/>
+            </a:solidFill>
+          </a:ln>
+        </p:spPr>
+        <p:style>
+          <a:lnRef idx="2">
+            <a:schemeClr val="accent1">
+              <a:shade val="15000"/>
+            </a:schemeClr>
+          </a:lnRef>
+          <a:fillRef idx="1">
+            <a:schemeClr val="accent1"/>
+          </a:fillRef>
+          <a:effectRef idx="0">
+            <a:schemeClr val="accent1"/>
+          </a:effectRef>
+          <a:fontRef idx="minor">
+            <a:schemeClr val="lt1"/>
+          </a:fontRef>
+        </p:style>
+        <p:txBody>
+          <a:bodyPr rtlCol="0" anchor="ctr"/>
+          <a:lstStyle/>
+          <a:p>
+            <a:pPr algn="ctr"/>
+            <a:r>
+              <a:rPr lang="en-US">
+                <a:solidFill>
+                  <a:schemeClr val="tx1"/>
+                </a:solidFill>
+                <a:latin typeface="Times New Roman" panose="02020603050405020304" pitchFamily="18" charset="0"/>
+                <a:cs typeface="Times New Roman" panose="02020603050405020304" pitchFamily="18" charset="0"/>
+              </a:rPr>
+              <a:t>Áp dụng cài đặt tùy chọn cho phản hồi tiếp theo</a:t>
+            </a:r>
+          </a:p>
+        </p:txBody>
+      </p:sp>
+      <p:sp>
+        <p:nvSpPr>
+          <p:cNvPr id="9" name="Oval 8">
+            <a:extLst>
+              <a:ext uri="{FF2B5EF4-FFF2-40B4-BE49-F238E27FC236}">
+                <a16:creationId xmlns:a16="http://schemas.microsoft.com/office/drawing/2014/main" id="{5DAC9F1C-A7FA-6017-347A-E665382BDD60}"/>
+              </a:ext>
+            </a:extLst>
+          </p:cNvPr>
+          <p:cNvSpPr/>
+          <p:nvPr/>
+        </p:nvSpPr>
+        <p:spPr>
+          <a:xfrm>
+            <a:off x="5173976" y="5388601"/>
+            <a:ext cx="1844040" cy="838200"/>
+          </a:xfrm>
+          <a:prstGeom prst="ellipse">
+            <a:avLst/>
+          </a:prstGeom>
+          <a:solidFill>
+            <a:schemeClr val="bg2"/>
+          </a:solidFill>
+          <a:ln>
+            <a:solidFill>
+              <a:schemeClr val="tx1"/>
+            </a:solidFill>
+          </a:ln>
+        </p:spPr>
+        <p:style>
+          <a:lnRef idx="2">
+            <a:schemeClr val="dk1"/>
+          </a:lnRef>
+          <a:fillRef idx="1">
+            <a:schemeClr val="lt1"/>
+          </a:fillRef>
+          <a:effectRef idx="0">
+            <a:schemeClr val="dk1"/>
+          </a:effectRef>
+          <a:fontRef idx="minor">
+            <a:schemeClr val="dk1"/>
+          </a:fontRef>
+        </p:style>
+        <p:txBody>
+          <a:bodyPr rtlCol="0" anchor="ctr"/>
+          <a:lstStyle/>
+          <a:p>
+            <a:pPr algn="ctr"/>
+            <a:r>
+              <a:rPr lang="en-US">
+                <a:solidFill>
+                  <a:schemeClr val="tx1"/>
+                </a:solidFill>
+                <a:latin typeface="Times New Roman" panose="02020603050405020304" pitchFamily="18" charset="0"/>
+                <a:cs typeface="Times New Roman" panose="02020603050405020304" pitchFamily="18" charset="0"/>
+              </a:rPr>
+              <a:t>Kết thúc</a:t>
+            </a:r>
+          </a:p>
+        </p:txBody>
+      </p:sp>
+      <p:cxnSp>
+        <p:nvCxnSpPr>
+          <p:cNvPr id="11" name="Straight Arrow Connector 10">
+            <a:extLst>
+              <a:ext uri="{FF2B5EF4-FFF2-40B4-BE49-F238E27FC236}">
+                <a16:creationId xmlns:a16="http://schemas.microsoft.com/office/drawing/2014/main" id="{CF3AABFA-E81C-3DA9-3929-6C4D726031DA}"/>
+              </a:ext>
+            </a:extLst>
+          </p:cNvPr>
+          <p:cNvCxnSpPr>
+            <a:stCxn id="2" idx="6"/>
+            <a:endCxn id="3" idx="1"/>
+          </p:cNvCxnSpPr>
+          <p:nvPr/>
+        </p:nvCxnSpPr>
+        <p:spPr>
+          <a:xfrm>
+            <a:off x="2838267" y="976629"/>
+            <a:ext cx="1828072" cy="272"/>
+          </a:xfrm>
+          <a:prstGeom prst="straightConnector1">
+            <a:avLst/>
+          </a:prstGeom>
+          <a:ln>
+            <a:tailEnd type="triangle"/>
+          </a:ln>
+        </p:spPr>
+        <p:style>
+          <a:lnRef idx="2">
+            <a:schemeClr val="dk1"/>
+          </a:lnRef>
+          <a:fillRef idx="0">
+            <a:schemeClr val="dk1"/>
+          </a:fillRef>
+          <a:effectRef idx="1">
+            <a:schemeClr val="dk1"/>
+          </a:effectRef>
+          <a:fontRef idx="minor">
+            <a:schemeClr val="tx1"/>
+          </a:fontRef>
+        </p:style>
+      </p:cxnSp>
+      <p:cxnSp>
+        <p:nvCxnSpPr>
+          <p:cNvPr id="13" name="Connector: Elbow 12">
+            <a:extLst>
+              <a:ext uri="{FF2B5EF4-FFF2-40B4-BE49-F238E27FC236}">
+                <a16:creationId xmlns:a16="http://schemas.microsoft.com/office/drawing/2014/main" id="{D34FF8B5-C2AD-CECE-E769-23CF3686B352}"/>
+              </a:ext>
+            </a:extLst>
+          </p:cNvPr>
+          <p:cNvCxnSpPr>
+            <a:stCxn id="3" idx="2"/>
+            <a:endCxn id="6" idx="0"/>
+          </p:cNvCxnSpPr>
+          <p:nvPr/>
+        </p:nvCxnSpPr>
+        <p:spPr>
+          <a:xfrm rot="5400000">
+            <a:off x="3736167" y="83447"/>
+            <a:ext cx="1047549" cy="3672112"/>
+          </a:xfrm>
+          <a:prstGeom prst="bentConnector3">
+            <a:avLst/>
+          </a:prstGeom>
+          <a:ln>
+            <a:tailEnd type="triangle"/>
+          </a:ln>
+        </p:spPr>
+        <p:style>
+          <a:lnRef idx="2">
+            <a:schemeClr val="dk1"/>
+          </a:lnRef>
+          <a:fillRef idx="0">
+            <a:schemeClr val="dk1"/>
+          </a:fillRef>
+          <a:effectRef idx="1">
+            <a:schemeClr val="dk1"/>
+          </a:effectRef>
+          <a:fontRef idx="minor">
+            <a:schemeClr val="tx1"/>
+          </a:fontRef>
+        </p:style>
+      </p:cxnSp>
+      <p:cxnSp>
+        <p:nvCxnSpPr>
+          <p:cNvPr id="15" name="Connector: Elbow 14">
+            <a:extLst>
+              <a:ext uri="{FF2B5EF4-FFF2-40B4-BE49-F238E27FC236}">
+                <a16:creationId xmlns:a16="http://schemas.microsoft.com/office/drawing/2014/main" id="{F1D76289-375D-3C3C-77EB-EDBE077429A1}"/>
+              </a:ext>
+            </a:extLst>
+          </p:cNvPr>
+          <p:cNvCxnSpPr>
+            <a:cxnSpLocks/>
+            <a:stCxn id="3" idx="2"/>
+            <a:endCxn id="7" idx="0"/>
+          </p:cNvCxnSpPr>
+          <p:nvPr/>
+        </p:nvCxnSpPr>
+        <p:spPr>
+          <a:xfrm rot="16200000" flipH="1">
+            <a:off x="7418111" y="73615"/>
+            <a:ext cx="1027884" cy="3672112"/>
+          </a:xfrm>
+          <a:prstGeom prst="bentConnector3">
+            <a:avLst>
+              <a:gd name="adj1" fmla="val 50927"/>
+            </a:avLst>
+          </a:prstGeom>
+          <a:ln>
+            <a:tailEnd type="triangle"/>
+          </a:ln>
+        </p:spPr>
+        <p:style>
+          <a:lnRef idx="2">
+            <a:schemeClr val="dk1"/>
+          </a:lnRef>
+          <a:fillRef idx="0">
+            <a:schemeClr val="dk1"/>
+          </a:fillRef>
+          <a:effectRef idx="1">
+            <a:schemeClr val="dk1"/>
+          </a:effectRef>
+          <a:fontRef idx="minor">
+            <a:schemeClr val="tx1"/>
+          </a:fontRef>
+        </p:style>
+      </p:cxnSp>
+      <p:cxnSp>
+        <p:nvCxnSpPr>
+          <p:cNvPr id="17" name="Straight Arrow Connector 16">
+            <a:extLst>
+              <a:ext uri="{FF2B5EF4-FFF2-40B4-BE49-F238E27FC236}">
+                <a16:creationId xmlns:a16="http://schemas.microsoft.com/office/drawing/2014/main" id="{ECD5ABF1-E50E-E16D-84CD-C5C8E41F8327}"/>
+              </a:ext>
+            </a:extLst>
+          </p:cNvPr>
+          <p:cNvCxnSpPr>
+            <a:stCxn id="3" idx="2"/>
+            <a:endCxn id="5" idx="0"/>
+          </p:cNvCxnSpPr>
+          <p:nvPr/>
+        </p:nvCxnSpPr>
+        <p:spPr>
+          <a:xfrm>
+            <a:off x="6095997" y="1395729"/>
+            <a:ext cx="0" cy="1047550"/>
+          </a:xfrm>
+          <a:prstGeom prst="straightConnector1">
+            <a:avLst/>
+          </a:prstGeom>
+          <a:ln>
+            <a:tailEnd type="triangle"/>
+          </a:ln>
+        </p:spPr>
+        <p:style>
+          <a:lnRef idx="2">
+            <a:schemeClr val="dk1"/>
+          </a:lnRef>
+          <a:fillRef idx="0">
+            <a:schemeClr val="dk1"/>
+          </a:fillRef>
+          <a:effectRef idx="1">
+            <a:schemeClr val="dk1"/>
+          </a:effectRef>
+          <a:fontRef idx="minor">
+            <a:schemeClr val="tx1"/>
+          </a:fontRef>
+        </p:style>
+      </p:cxnSp>
+      <p:cxnSp>
+        <p:nvCxnSpPr>
+          <p:cNvPr id="20" name="Connector: Elbow 19">
+            <a:extLst>
+              <a:ext uri="{FF2B5EF4-FFF2-40B4-BE49-F238E27FC236}">
+                <a16:creationId xmlns:a16="http://schemas.microsoft.com/office/drawing/2014/main" id="{CA280FE3-81C5-D2CD-D963-293BB29A7BCC}"/>
+              </a:ext>
+            </a:extLst>
+          </p:cNvPr>
+          <p:cNvCxnSpPr>
+            <a:stCxn id="6" idx="2"/>
+            <a:endCxn id="8" idx="0"/>
+          </p:cNvCxnSpPr>
+          <p:nvPr/>
+        </p:nvCxnSpPr>
+        <p:spPr>
+          <a:xfrm rot="16200000" flipH="1">
+            <a:off x="3942439" y="1762381"/>
+            <a:ext cx="635005" cy="3672112"/>
+          </a:xfrm>
+          <a:prstGeom prst="bentConnector3">
+            <a:avLst/>
+          </a:prstGeom>
+          <a:ln>
+            <a:tailEnd type="triangle"/>
+          </a:ln>
+        </p:spPr>
+        <p:style>
+          <a:lnRef idx="2">
+            <a:schemeClr val="dk1"/>
+          </a:lnRef>
+          <a:fillRef idx="0">
+            <a:schemeClr val="dk1"/>
+          </a:fillRef>
+          <a:effectRef idx="1">
+            <a:schemeClr val="dk1"/>
+          </a:effectRef>
+          <a:fontRef idx="minor">
+            <a:schemeClr val="tx1"/>
+          </a:fontRef>
+        </p:style>
+      </p:cxnSp>
+      <p:cxnSp>
+        <p:nvCxnSpPr>
+          <p:cNvPr id="22" name="Connector: Elbow 21">
+            <a:extLst>
+              <a:ext uri="{FF2B5EF4-FFF2-40B4-BE49-F238E27FC236}">
+                <a16:creationId xmlns:a16="http://schemas.microsoft.com/office/drawing/2014/main" id="{BABF387F-162D-4BDA-2E13-4D97F788CD90}"/>
+              </a:ext>
+            </a:extLst>
+          </p:cNvPr>
+          <p:cNvCxnSpPr>
+            <a:cxnSpLocks/>
+            <a:stCxn id="7" idx="2"/>
+            <a:endCxn id="8" idx="0"/>
+          </p:cNvCxnSpPr>
+          <p:nvPr/>
+        </p:nvCxnSpPr>
+        <p:spPr>
+          <a:xfrm rot="5400000">
+            <a:off x="7614550" y="1762380"/>
+            <a:ext cx="635007" cy="3672112"/>
+          </a:xfrm>
+          <a:prstGeom prst="bentConnector3">
+            <a:avLst>
+              <a:gd name="adj1" fmla="val 50000"/>
+            </a:avLst>
+          </a:prstGeom>
+          <a:ln>
+            <a:solidFill>
+              <a:schemeClr val="tx1"/>
+            </a:solidFill>
+            <a:tailEnd type="triangle"/>
+          </a:ln>
+        </p:spPr>
+        <p:style>
+          <a:lnRef idx="2">
+            <a:schemeClr val="accent1"/>
+          </a:lnRef>
+          <a:fillRef idx="0">
+            <a:schemeClr val="accent1"/>
+          </a:fillRef>
+          <a:effectRef idx="1">
+            <a:schemeClr val="accent1"/>
+          </a:effectRef>
+          <a:fontRef idx="minor">
+            <a:schemeClr val="tx1"/>
+          </a:fontRef>
+        </p:style>
+      </p:cxnSp>
+      <p:cxnSp>
+        <p:nvCxnSpPr>
+          <p:cNvPr id="24" name="Straight Arrow Connector 23">
+            <a:extLst>
+              <a:ext uri="{FF2B5EF4-FFF2-40B4-BE49-F238E27FC236}">
+                <a16:creationId xmlns:a16="http://schemas.microsoft.com/office/drawing/2014/main" id="{E057C5D9-2615-466F-FFDA-7EDB739064CD}"/>
+              </a:ext>
+            </a:extLst>
+          </p:cNvPr>
+          <p:cNvCxnSpPr>
+            <a:stCxn id="5" idx="2"/>
+            <a:endCxn id="8" idx="0"/>
+          </p:cNvCxnSpPr>
+          <p:nvPr/>
+        </p:nvCxnSpPr>
+        <p:spPr>
+          <a:xfrm>
+            <a:off x="6095997" y="3280936"/>
+            <a:ext cx="0" cy="635004"/>
+          </a:xfrm>
+          <a:prstGeom prst="straightConnector1">
+            <a:avLst/>
+          </a:prstGeom>
+          <a:ln>
+            <a:tailEnd type="triangle"/>
+          </a:ln>
+        </p:spPr>
+        <p:style>
+          <a:lnRef idx="2">
+            <a:schemeClr val="dk1"/>
+          </a:lnRef>
+          <a:fillRef idx="0">
+            <a:schemeClr val="dk1"/>
+          </a:fillRef>
+          <a:effectRef idx="1">
+            <a:schemeClr val="dk1"/>
+          </a:effectRef>
+          <a:fontRef idx="minor">
+            <a:schemeClr val="tx1"/>
+          </a:fontRef>
+        </p:style>
+      </p:cxnSp>
+      <p:cxnSp>
+        <p:nvCxnSpPr>
+          <p:cNvPr id="27" name="Straight Arrow Connector 26">
+            <a:extLst>
+              <a:ext uri="{FF2B5EF4-FFF2-40B4-BE49-F238E27FC236}">
+                <a16:creationId xmlns:a16="http://schemas.microsoft.com/office/drawing/2014/main" id="{FB67C2E8-511F-C48F-A441-8704CF1CC29D}"/>
+              </a:ext>
+            </a:extLst>
+          </p:cNvPr>
+          <p:cNvCxnSpPr>
+            <a:stCxn id="8" idx="2"/>
+            <a:endCxn id="9" idx="0"/>
+          </p:cNvCxnSpPr>
+          <p:nvPr/>
+        </p:nvCxnSpPr>
+        <p:spPr>
+          <a:xfrm flipH="1">
+            <a:off x="6095996" y="4753597"/>
+            <a:ext cx="1" cy="635004"/>
+          </a:xfrm>
+          <a:prstGeom prst="straightConnector1">
+            <a:avLst/>
+          </a:prstGeom>
+          <a:ln>
+            <a:tailEnd type="triangle"/>
+          </a:ln>
+        </p:spPr>
+        <p:style>
+          <a:lnRef idx="2">
+            <a:schemeClr val="dk1"/>
+          </a:lnRef>
+          <a:fillRef idx="0">
+            <a:schemeClr val="dk1"/>
+          </a:fillRef>
+          <a:effectRef idx="1">
+            <a:schemeClr val="dk1"/>
+          </a:effectRef>
+          <a:fontRef idx="minor">
+            <a:schemeClr val="tx1"/>
+          </a:fontRef>
+        </p:style>
+      </p:cxnSp>
+      <p:sp>
+        <p:nvSpPr>
+          <p:cNvPr id="28" name="TextBox 27">
+            <a:extLst>
+              <a:ext uri="{FF2B5EF4-FFF2-40B4-BE49-F238E27FC236}">
+                <a16:creationId xmlns:a16="http://schemas.microsoft.com/office/drawing/2014/main" id="{1FABBE4D-112E-E0DF-8FF5-CDA539404E35}"/>
+              </a:ext>
+            </a:extLst>
+          </p:cNvPr>
+          <p:cNvSpPr txBox="1"/>
+          <p:nvPr/>
+        </p:nvSpPr>
+        <p:spPr>
+          <a:xfrm>
+            <a:off x="2838267" y="638346"/>
+            <a:ext cx="425116" cy="338554"/>
+          </a:xfrm>
+          <a:prstGeom prst="rect">
+            <a:avLst/>
+          </a:prstGeom>
+          <a:noFill/>
+        </p:spPr>
+        <p:txBody>
+          <a:bodyPr wrap="none" rtlCol="0">
+            <a:spAutoFit/>
+          </a:bodyPr>
+          <a:lstStyle/>
+          <a:p>
+            <a:r>
+              <a:rPr lang="en-US" sz="1600">
+                <a:latin typeface="Times New Roman" panose="02020603050405020304" pitchFamily="18" charset="0"/>
+                <a:cs typeface="Times New Roman" panose="02020603050405020304" pitchFamily="18" charset="0"/>
+              </a:rPr>
+              <a:t>(1)</a:t>
+            </a:r>
+          </a:p>
+        </p:txBody>
+      </p:sp>
+      <p:sp>
+        <p:nvSpPr>
+          <p:cNvPr id="29" name="TextBox 28">
+            <a:extLst>
+              <a:ext uri="{FF2B5EF4-FFF2-40B4-BE49-F238E27FC236}">
+                <a16:creationId xmlns:a16="http://schemas.microsoft.com/office/drawing/2014/main" id="{79ECD4CE-CEAB-C0B3-C070-A2A55C7F7C71}"/>
+              </a:ext>
+            </a:extLst>
+          </p:cNvPr>
+          <p:cNvSpPr txBox="1"/>
+          <p:nvPr/>
+        </p:nvSpPr>
+        <p:spPr>
+          <a:xfrm>
+            <a:off x="6095996" y="1401840"/>
+            <a:ext cx="425116" cy="338554"/>
+          </a:xfrm>
+          <a:prstGeom prst="rect">
+            <a:avLst/>
+          </a:prstGeom>
+          <a:noFill/>
+        </p:spPr>
+        <p:txBody>
+          <a:bodyPr wrap="none" rtlCol="0">
+            <a:spAutoFit/>
+          </a:bodyPr>
+          <a:lstStyle/>
+          <a:p>
+            <a:r>
+              <a:rPr lang="en-US" sz="1600">
+                <a:latin typeface="Times New Roman" panose="02020603050405020304" pitchFamily="18" charset="0"/>
+                <a:cs typeface="Times New Roman" panose="02020603050405020304" pitchFamily="18" charset="0"/>
+              </a:rPr>
+              <a:t>(2)</a:t>
+            </a:r>
+          </a:p>
+        </p:txBody>
+      </p:sp>
+      <p:sp>
+        <p:nvSpPr>
+          <p:cNvPr id="30" name="TextBox 29">
+            <a:extLst>
+              <a:ext uri="{FF2B5EF4-FFF2-40B4-BE49-F238E27FC236}">
+                <a16:creationId xmlns:a16="http://schemas.microsoft.com/office/drawing/2014/main" id="{CD5A52F6-029F-BA1C-5F6F-5AB5C809D3D9}"/>
+              </a:ext>
+            </a:extLst>
+          </p:cNvPr>
+          <p:cNvSpPr txBox="1"/>
+          <p:nvPr/>
+        </p:nvSpPr>
+        <p:spPr>
+          <a:xfrm>
+            <a:off x="2423884" y="3280933"/>
+            <a:ext cx="572593" cy="338554"/>
+          </a:xfrm>
+          <a:prstGeom prst="rect">
+            <a:avLst/>
+          </a:prstGeom>
+          <a:noFill/>
+        </p:spPr>
+        <p:txBody>
+          <a:bodyPr wrap="none" rtlCol="0">
+            <a:spAutoFit/>
+          </a:bodyPr>
+          <a:lstStyle/>
+          <a:p>
+            <a:r>
+              <a:rPr lang="en-US" sz="1600">
+                <a:latin typeface="Times New Roman" panose="02020603050405020304" pitchFamily="18" charset="0"/>
+                <a:cs typeface="Times New Roman" panose="02020603050405020304" pitchFamily="18" charset="0"/>
+              </a:rPr>
+              <a:t>(2A)</a:t>
+            </a:r>
+          </a:p>
+        </p:txBody>
+      </p:sp>
+      <p:sp>
+        <p:nvSpPr>
+          <p:cNvPr id="31" name="TextBox 30">
+            <a:extLst>
+              <a:ext uri="{FF2B5EF4-FFF2-40B4-BE49-F238E27FC236}">
+                <a16:creationId xmlns:a16="http://schemas.microsoft.com/office/drawing/2014/main" id="{ACA3D5B3-750A-CA8E-24C0-FDAAC4C85725}"/>
+              </a:ext>
+            </a:extLst>
+          </p:cNvPr>
+          <p:cNvSpPr txBox="1"/>
+          <p:nvPr/>
+        </p:nvSpPr>
+        <p:spPr>
+          <a:xfrm>
+            <a:off x="6095996" y="3283106"/>
+            <a:ext cx="561372" cy="338554"/>
+          </a:xfrm>
+          <a:prstGeom prst="rect">
+            <a:avLst/>
+          </a:prstGeom>
+          <a:noFill/>
+        </p:spPr>
+        <p:txBody>
+          <a:bodyPr wrap="none" rtlCol="0">
+            <a:spAutoFit/>
+          </a:bodyPr>
+          <a:lstStyle/>
+          <a:p>
+            <a:r>
+              <a:rPr lang="en-US" sz="1600">
+                <a:latin typeface="Times New Roman" panose="02020603050405020304" pitchFamily="18" charset="0"/>
+                <a:cs typeface="Times New Roman" panose="02020603050405020304" pitchFamily="18" charset="0"/>
+              </a:rPr>
+              <a:t>(2B)</a:t>
+            </a:r>
+          </a:p>
+        </p:txBody>
+      </p:sp>
+      <p:sp>
+        <p:nvSpPr>
+          <p:cNvPr id="32" name="TextBox 31">
+            <a:extLst>
+              <a:ext uri="{FF2B5EF4-FFF2-40B4-BE49-F238E27FC236}">
+                <a16:creationId xmlns:a16="http://schemas.microsoft.com/office/drawing/2014/main" id="{CF50E784-DD4C-9D6F-2266-5CA7C6AD71CE}"/>
+              </a:ext>
+            </a:extLst>
+          </p:cNvPr>
+          <p:cNvSpPr txBox="1"/>
+          <p:nvPr/>
+        </p:nvSpPr>
+        <p:spPr>
+          <a:xfrm>
+            <a:off x="9768108" y="3294788"/>
+            <a:ext cx="561372" cy="338554"/>
+          </a:xfrm>
+          <a:prstGeom prst="rect">
+            <a:avLst/>
+          </a:prstGeom>
+          <a:noFill/>
+        </p:spPr>
+        <p:txBody>
+          <a:bodyPr wrap="none" rtlCol="0">
+            <a:spAutoFit/>
+          </a:bodyPr>
+          <a:lstStyle/>
+          <a:p>
+            <a:r>
+              <a:rPr lang="en-US" sz="1600">
+                <a:latin typeface="Times New Roman" panose="02020603050405020304" pitchFamily="18" charset="0"/>
+                <a:cs typeface="Times New Roman" panose="02020603050405020304" pitchFamily="18" charset="0"/>
+              </a:rPr>
+              <a:t>(2C)</a:t>
+            </a:r>
+          </a:p>
+        </p:txBody>
+      </p:sp>
+      <p:sp>
+        <p:nvSpPr>
+          <p:cNvPr id="35" name="TextBox 34">
+            <a:extLst>
+              <a:ext uri="{FF2B5EF4-FFF2-40B4-BE49-F238E27FC236}">
+                <a16:creationId xmlns:a16="http://schemas.microsoft.com/office/drawing/2014/main" id="{567604A8-1CCF-4A8E-C09D-5110B5DF2965}"/>
+              </a:ext>
+            </a:extLst>
+          </p:cNvPr>
+          <p:cNvSpPr txBox="1"/>
+          <p:nvPr/>
+        </p:nvSpPr>
+        <p:spPr>
+          <a:xfrm>
+            <a:off x="6095996" y="4753593"/>
+            <a:ext cx="425116" cy="338554"/>
+          </a:xfrm>
+          <a:prstGeom prst="rect">
+            <a:avLst/>
+          </a:prstGeom>
+          <a:noFill/>
+        </p:spPr>
+        <p:txBody>
+          <a:bodyPr wrap="none" rtlCol="0">
+            <a:spAutoFit/>
+          </a:bodyPr>
+          <a:lstStyle/>
+          <a:p>
+            <a:r>
+              <a:rPr lang="en-US" sz="1600">
+                <a:latin typeface="Times New Roman" panose="02020603050405020304" pitchFamily="18" charset="0"/>
+                <a:cs typeface="Times New Roman" panose="02020603050405020304" pitchFamily="18" charset="0"/>
+              </a:rPr>
+              <a:t>(3)</a:t>
+            </a:r>
+          </a:p>
+        </p:txBody>
+      </p:sp>
+    </p:spTree>
+    <p:extLst>
+      <p:ext uri="{BB962C8B-B14F-4D97-AF65-F5344CB8AC3E}">
+        <p14:creationId xmlns:p14="http://schemas.microsoft.com/office/powerpoint/2010/main" val="1653470133"/>
+      </p:ext>
+    </p:extLst>
+  </p:cSld>
+  <p:clrMapOvr>
+    <a:masterClrMapping/>
+  </p:clrMapOvr>
+</p:sld>
+</file>
+
+<file path=ppt/slides/slide13.xml><?xml version="1.0" encoding="utf-8"?>
 <p:sld xmlns:a="http://schemas.openxmlformats.org/drawingml/2006/main" xmlns:r="http://schemas.openxmlformats.org/officeDocument/2006/relationships" xmlns:p="http://schemas.openxmlformats.org/presentationml/2006/main">
   <p:cSld>
     <p:spTree>
@@ -12608,113 +16161,6 @@
       </p:grpSpPr>
       <p:sp>
         <p:nvSpPr>
-          <p:cNvPr id="2" name="TextBox 1">
-            <a:extLst>
-              <a:ext uri="{FF2B5EF4-FFF2-40B4-BE49-F238E27FC236}">
-                <a16:creationId xmlns:a16="http://schemas.microsoft.com/office/drawing/2014/main" id="{DDC3B24D-E97B-2982-21AB-8F7CB06C7A45}"/>
-              </a:ext>
-            </a:extLst>
-          </p:cNvPr>
-          <p:cNvSpPr txBox="1"/>
-          <p:nvPr/>
-        </p:nvSpPr>
-        <p:spPr>
-          <a:xfrm>
-            <a:off x="282388" y="349624"/>
-            <a:ext cx="5611088" cy="369332"/>
-          </a:xfrm>
-          <a:prstGeom prst="rect">
-            <a:avLst/>
-          </a:prstGeom>
-          <a:noFill/>
-        </p:spPr>
-        <p:txBody>
-          <a:bodyPr wrap="none" rtlCol="0">
-            <a:spAutoFit/>
-          </a:bodyPr>
-          <a:lstStyle/>
-          <a:p>
-            <a:r>
-              <a:rPr lang="en-US" dirty="0"/>
-              <a:t>Minh </a:t>
-            </a:r>
-            <a:r>
-              <a:rPr lang="en-US" dirty="0" err="1"/>
-              <a:t>họa</a:t>
-            </a:r>
-            <a:r>
-              <a:rPr lang="en-US" dirty="0"/>
-              <a:t> </a:t>
-            </a:r>
-            <a:r>
-              <a:rPr lang="en-US" dirty="0" err="1"/>
-              <a:t>tại</a:t>
-            </a:r>
-            <a:r>
-              <a:rPr lang="en-US" dirty="0"/>
-              <a:t> </a:t>
-            </a:r>
-            <a:r>
-              <a:rPr lang="en-US" dirty="0" err="1"/>
-              <a:t>sao</a:t>
-            </a:r>
-            <a:r>
-              <a:rPr lang="en-US" dirty="0"/>
-              <a:t> </a:t>
-            </a:r>
-            <a:r>
-              <a:rPr lang="en-US" dirty="0" err="1"/>
-              <a:t>phải</a:t>
-            </a:r>
-            <a:r>
-              <a:rPr lang="en-US" dirty="0"/>
-              <a:t> </a:t>
-            </a:r>
-            <a:r>
-              <a:rPr lang="en-US" dirty="0" err="1"/>
-              <a:t>đánh</a:t>
-            </a:r>
-            <a:r>
-              <a:rPr lang="en-US" dirty="0"/>
-              <a:t> </a:t>
-            </a:r>
-            <a:r>
-              <a:rPr lang="en-US" dirty="0" err="1"/>
-              <a:t>giá</a:t>
-            </a:r>
-            <a:r>
-              <a:rPr lang="en-US" dirty="0"/>
-              <a:t> </a:t>
-            </a:r>
-            <a:r>
-              <a:rPr lang="en-US" dirty="0" err="1"/>
-              <a:t>các</a:t>
-            </a:r>
-            <a:r>
-              <a:rPr lang="en-US" dirty="0"/>
-              <a:t> </a:t>
-            </a:r>
-            <a:r>
-              <a:rPr lang="en-US" dirty="0" err="1"/>
-              <a:t>mô</a:t>
-            </a:r>
-            <a:r>
-              <a:rPr lang="en-US" dirty="0"/>
-              <a:t> </a:t>
-            </a:r>
-            <a:r>
-              <a:rPr lang="en-US" dirty="0" err="1"/>
-              <a:t>hình</a:t>
-            </a:r>
-            <a:r>
-              <a:rPr lang="en-US" dirty="0"/>
-              <a:t> embedding</a:t>
-            </a:r>
-          </a:p>
-        </p:txBody>
-      </p:sp>
-      <p:sp>
-        <p:nvSpPr>
           <p:cNvPr id="4" name="Rectangle: Rounded Corners 3">
             <a:extLst>
               <a:ext uri="{FF2B5EF4-FFF2-40B4-BE49-F238E27FC236}">
@@ -13753,6 +17199,193 @@
 </file>
 
 <file path=ppt/slides/slide8.xml><?xml version="1.0" encoding="utf-8"?>
+<p:sld xmlns:a="http://schemas.openxmlformats.org/drawingml/2006/main" xmlns:r="http://schemas.openxmlformats.org/officeDocument/2006/relationships" xmlns:p="http://schemas.openxmlformats.org/presentationml/2006/main">
+  <p:cSld>
+    <p:spTree>
+      <p:nvGrpSpPr>
+        <p:cNvPr id="1" name=""/>
+        <p:cNvGrpSpPr/>
+        <p:nvPr/>
+      </p:nvGrpSpPr>
+      <p:grpSpPr>
+        <a:xfrm>
+          <a:off x="0" y="0"/>
+          <a:ext cx="0" cy="0"/>
+          <a:chOff x="0" y="0"/>
+          <a:chExt cx="0" cy="0"/>
+        </a:xfrm>
+      </p:grpSpPr>
+      <p:sp>
+        <p:nvSpPr>
+          <p:cNvPr id="2" name="TextBox 1">
+            <a:extLst>
+              <a:ext uri="{FF2B5EF4-FFF2-40B4-BE49-F238E27FC236}">
+                <a16:creationId xmlns:a16="http://schemas.microsoft.com/office/drawing/2014/main" id="{A76BB85E-EAB6-2089-5682-48447CE032A4}"/>
+              </a:ext>
+            </a:extLst>
+          </p:cNvPr>
+          <p:cNvSpPr txBox="1"/>
+          <p:nvPr/>
+        </p:nvSpPr>
+        <p:spPr>
+          <a:xfrm>
+            <a:off x="612648" y="795528"/>
+            <a:ext cx="8497839" cy="3693319"/>
+          </a:xfrm>
+          <a:prstGeom prst="rect">
+            <a:avLst/>
+          </a:prstGeom>
+          <a:noFill/>
+        </p:spPr>
+        <p:txBody>
+          <a:bodyPr wrap="none" rtlCol="0">
+            <a:spAutoFit/>
+          </a:bodyPr>
+          <a:lstStyle/>
+          <a:p>
+            <a:pPr marL="285750" indent="-285750">
+              <a:buFontTx/>
+              <a:buChar char="-"/>
+            </a:pPr>
+            <a:r>
+              <a:rPr lang="vi-VN"/>
+              <a:t>Chức năng đăng nhập/đăng xuất: biểu đồ chức năng, usecase, tuần tự</a:t>
+            </a:r>
+          </a:p>
+          <a:p>
+            <a:pPr marL="285750" indent="-285750">
+              <a:buFontTx/>
+              <a:buChar char="-"/>
+            </a:pPr>
+            <a:r>
+              <a:rPr lang="vi-VN"/>
+              <a:t>Chức năng cài đặt người dùng tùy chọn: biểu đồ  chức năng, usecase, tuần tự</a:t>
+            </a:r>
+          </a:p>
+          <a:p>
+            <a:pPr marL="285750" indent="-285750">
+              <a:buFontTx/>
+              <a:buChar char="-"/>
+            </a:pPr>
+            <a:r>
+              <a:rPr lang="vi-VN"/>
+              <a:t>Chức năng khởi tạo starter: biểu đồ tuần tự</a:t>
+            </a:r>
+          </a:p>
+          <a:p>
+            <a:pPr marL="285750" indent="-285750">
+              <a:buFontTx/>
+              <a:buChar char="-"/>
+            </a:pPr>
+            <a:r>
+              <a:rPr lang="vi-VN"/>
+              <a:t>Chức năng trò chuyện văn bản: biểu đồ chức năng, usecase, tuần tự</a:t>
+            </a:r>
+          </a:p>
+          <a:p>
+            <a:pPr marL="285750" indent="-285750">
+              <a:buFontTx/>
+              <a:buChar char="-"/>
+            </a:pPr>
+            <a:r>
+              <a:rPr lang="vi-VN"/>
+              <a:t>Chức năng trò chuyện âm thanh: chức năng, usecase, tuần tự</a:t>
+            </a:r>
+          </a:p>
+          <a:p>
+            <a:pPr marL="285750" indent="-285750">
+              <a:buFontTx/>
+              <a:buChar char="-"/>
+            </a:pPr>
+            <a:r>
+              <a:rPr lang="vi-VN"/>
+              <a:t>Chức năng tăng cường trí nhớ hội thoại: chức năng, usecase, tuần tự</a:t>
+            </a:r>
+          </a:p>
+          <a:p>
+            <a:pPr marL="285750" indent="-285750">
+              <a:buFontTx/>
+              <a:buChar char="-"/>
+            </a:pPr>
+            <a:r>
+              <a:rPr lang="vi-VN"/>
+              <a:t>Chức năng quản lý hành vi người dùng: chức năng, usecase, tuần tự</a:t>
+            </a:r>
+          </a:p>
+          <a:p>
+            <a:pPr marL="285750" indent="-285750">
+              <a:buFontTx/>
+              <a:buChar char="-"/>
+            </a:pPr>
+            <a:r>
+              <a:rPr lang="vi-VN"/>
+              <a:t>Chức năng quản lý hội thoại: chức năng, usecase, tuần tự</a:t>
+            </a:r>
+          </a:p>
+          <a:p>
+            <a:pPr marL="285750" indent="-285750">
+              <a:buFontTx/>
+              <a:buChar char="-"/>
+            </a:pPr>
+            <a:r>
+              <a:rPr lang="vi-VN"/>
+              <a:t>Chức năng xử lý trích xuất thông tin trò chuyện</a:t>
+            </a:r>
+          </a:p>
+          <a:p>
+            <a:pPr marL="285750" indent="-285750">
+              <a:buFontTx/>
+              <a:buChar char="-"/>
+            </a:pPr>
+            <a:endParaRPr lang="vi-VN"/>
+          </a:p>
+          <a:p>
+            <a:pPr marL="285750" indent="-285750">
+              <a:buFontTx/>
+              <a:buChar char="-"/>
+            </a:pPr>
+            <a:r>
+              <a:rPr lang="vi-VN"/>
+              <a:t>Thiết kế cơ sở dữ liệu embedding: có những trường nào</a:t>
+            </a:r>
+          </a:p>
+          <a:p>
+            <a:pPr marL="285750" indent="-285750">
+              <a:buFontTx/>
+              <a:buChar char="-"/>
+            </a:pPr>
+            <a:r>
+              <a:rPr lang="vi-VN"/>
+              <a:t>Cơ sở dữ liệu lưu trữ lịch sử hội thoại</a:t>
+            </a:r>
+          </a:p>
+          <a:p>
+            <a:pPr marL="285750" indent="-285750">
+              <a:buFontTx/>
+              <a:buChar char="-"/>
+            </a:pPr>
+            <a:r>
+              <a:rPr lang="vi-VN"/>
+              <a:t>Co sơ dữ liệu lưu trữ thông tin người dùng</a:t>
+            </a:r>
+            <a:endParaRPr lang="en-US"/>
+          </a:p>
+        </p:txBody>
+      </p:sp>
+    </p:spTree>
+    <p:extLst>
+      <p:ext uri="{BB962C8B-B14F-4D97-AF65-F5344CB8AC3E}">
+        <p14:creationId xmlns:p14="http://schemas.microsoft.com/office/powerpoint/2010/main" val="629964740"/>
+      </p:ext>
+    </p:extLst>
+  </p:cSld>
+  <p:clrMapOvr>
+    <a:masterClrMapping/>
+  </p:clrMapOvr>
+</p:sld>
+</file>
+
+<file path=ppt/slides/slide9.xml><?xml version="1.0" encoding="utf-8"?>
 <p:sld xmlns:a="http://schemas.openxmlformats.org/drawingml/2006/main" xmlns:r="http://schemas.openxmlformats.org/officeDocument/2006/relationships" xmlns:p="http://schemas.openxmlformats.org/presentationml/2006/main">
   <p:cSld>
     <p:spTree>
@@ -14909,40 +18542,124 @@
           </a:p>
         </p:txBody>
       </p:sp>
+      <p:sp>
+        <p:nvSpPr>
+          <p:cNvPr id="7" name="TextBox 6">
+            <a:extLst>
+              <a:ext uri="{FF2B5EF4-FFF2-40B4-BE49-F238E27FC236}">
+                <a16:creationId xmlns:a16="http://schemas.microsoft.com/office/drawing/2014/main" id="{41DDCBEC-3C22-77D3-FA32-656909EE95EC}"/>
+              </a:ext>
+            </a:extLst>
+          </p:cNvPr>
+          <p:cNvSpPr txBox="1"/>
+          <p:nvPr/>
+        </p:nvSpPr>
+        <p:spPr>
+          <a:xfrm>
+            <a:off x="6095997" y="5228556"/>
+            <a:ext cx="978153" cy="523220"/>
+          </a:xfrm>
+          <a:prstGeom prst="rect">
+            <a:avLst/>
+          </a:prstGeom>
+          <a:noFill/>
+        </p:spPr>
+        <p:txBody>
+          <a:bodyPr wrap="none" rtlCol="0">
+            <a:spAutoFit/>
+          </a:bodyPr>
+          <a:lstStyle/>
+          <a:p>
+            <a:r>
+              <a:rPr lang="vi-VN" sz="1400">
+                <a:latin typeface="+mj-lt"/>
+              </a:rPr>
+              <a:t>Đăng</a:t>
+            </a:r>
+            <a:r>
+              <a:rPr lang="en-US" sz="1400">
+                <a:latin typeface="Times New Roman" panose="02020603050405020304" pitchFamily="18" charset="0"/>
+                <a:cs typeface="Times New Roman" panose="02020603050405020304" pitchFamily="18" charset="0"/>
+              </a:rPr>
+              <a:t> nhập</a:t>
+            </a:r>
+            <a:endParaRPr lang="vi-VN" sz="1400">
+              <a:latin typeface="+mj-lt"/>
+            </a:endParaRPr>
+          </a:p>
+          <a:p>
+            <a:r>
+              <a:rPr lang="vi-VN" sz="1400">
+                <a:latin typeface="+mj-lt"/>
+              </a:rPr>
+              <a:t>thành công</a:t>
+            </a:r>
+            <a:endParaRPr lang="en-US" sz="1400">
+              <a:latin typeface="+mj-lt"/>
+            </a:endParaRPr>
+          </a:p>
+        </p:txBody>
+      </p:sp>
+      <p:sp>
+        <p:nvSpPr>
+          <p:cNvPr id="9" name="TextBox 8">
+            <a:extLst>
+              <a:ext uri="{FF2B5EF4-FFF2-40B4-BE49-F238E27FC236}">
+                <a16:creationId xmlns:a16="http://schemas.microsoft.com/office/drawing/2014/main" id="{F2AAA943-F699-9525-C9F3-9D5D1B642FF4}"/>
+              </a:ext>
+            </a:extLst>
+          </p:cNvPr>
+          <p:cNvSpPr txBox="1"/>
+          <p:nvPr/>
+        </p:nvSpPr>
+        <p:spPr>
+          <a:xfrm>
+            <a:off x="6890036" y="4298973"/>
+            <a:ext cx="978153" cy="523220"/>
+          </a:xfrm>
+          <a:prstGeom prst="rect">
+            <a:avLst/>
+          </a:prstGeom>
+          <a:noFill/>
+        </p:spPr>
+        <p:txBody>
+          <a:bodyPr wrap="none" rtlCol="0">
+            <a:spAutoFit/>
+          </a:bodyPr>
+          <a:lstStyle/>
+          <a:p>
+            <a:r>
+              <a:rPr lang="vi-VN" sz="1400">
+                <a:latin typeface="+mj-lt"/>
+              </a:rPr>
+              <a:t>Đăng</a:t>
+            </a:r>
+            <a:r>
+              <a:rPr lang="en-US" sz="1400">
+                <a:latin typeface="Times New Roman" panose="02020603050405020304" pitchFamily="18" charset="0"/>
+                <a:cs typeface="Times New Roman" panose="02020603050405020304" pitchFamily="18" charset="0"/>
+              </a:rPr>
+              <a:t> nhập</a:t>
+            </a:r>
+            <a:endParaRPr lang="vi-VN" sz="1400">
+              <a:latin typeface="+mj-lt"/>
+            </a:endParaRPr>
+          </a:p>
+          <a:p>
+            <a:r>
+              <a:rPr lang="en-US" sz="1400">
+                <a:latin typeface="Times New Roman" panose="02020603050405020304" pitchFamily="18" charset="0"/>
+                <a:cs typeface="Times New Roman" panose="02020603050405020304" pitchFamily="18" charset="0"/>
+              </a:rPr>
+              <a:t>thất bại</a:t>
+            </a:r>
+          </a:p>
+        </p:txBody>
+      </p:sp>
     </p:spTree>
     <p:extLst>
       <p:ext uri="{BB962C8B-B14F-4D97-AF65-F5344CB8AC3E}">
         <p14:creationId xmlns:p14="http://schemas.microsoft.com/office/powerpoint/2010/main" val="3049573887"/>
-      </p:ext>
-    </p:extLst>
-  </p:cSld>
-  <p:clrMapOvr>
-    <a:masterClrMapping/>
-  </p:clrMapOvr>
-</p:sld>
-</file>
-
-<file path=ppt/slides/slide9.xml><?xml version="1.0" encoding="utf-8"?>
-<p:sld xmlns:a="http://schemas.openxmlformats.org/drawingml/2006/main" xmlns:r="http://schemas.openxmlformats.org/officeDocument/2006/relationships" xmlns:p="http://schemas.openxmlformats.org/presentationml/2006/main">
-  <p:cSld>
-    <p:spTree>
-      <p:nvGrpSpPr>
-        <p:cNvPr id="1" name=""/>
-        <p:cNvGrpSpPr/>
-        <p:nvPr/>
-      </p:nvGrpSpPr>
-      <p:grpSpPr>
-        <a:xfrm>
-          <a:off x="0" y="0"/>
-          <a:ext cx="0" cy="0"/>
-          <a:chOff x="0" y="0"/>
-          <a:chExt cx="0" cy="0"/>
-        </a:xfrm>
-      </p:grpSpPr>
-    </p:spTree>
-    <p:extLst>
-      <p:ext uri="{BB962C8B-B14F-4D97-AF65-F5344CB8AC3E}">
-        <p14:creationId xmlns:p14="http://schemas.microsoft.com/office/powerpoint/2010/main" val="3397203099"/>
       </p:ext>
     </p:extLst>
   </p:cSld>

--- a/documents/hinh_ve_trong_cao_cao_do_an.pptx
+++ b/documents/hinh_ve_trong_cao_cao_do_an.pptx
@@ -5,7 +5,7 @@
     <p:sldMasterId id="2147483648" r:id="rId1"/>
   </p:sldMasterIdLst>
   <p:notesMasterIdLst>
-    <p:notesMasterId r:id="rId15"/>
+    <p:notesMasterId r:id="rId23"/>
   </p:notesMasterIdLst>
   <p:sldIdLst>
     <p:sldId id="263" r:id="rId2"/>
@@ -20,7 +20,15 @@
     <p:sldId id="268" r:id="rId11"/>
     <p:sldId id="272" r:id="rId12"/>
     <p:sldId id="271" r:id="rId13"/>
-    <p:sldId id="270" r:id="rId14"/>
+    <p:sldId id="274" r:id="rId14"/>
+    <p:sldId id="273" r:id="rId15"/>
+    <p:sldId id="276" r:id="rId16"/>
+    <p:sldId id="275" r:id="rId17"/>
+    <p:sldId id="278" r:id="rId18"/>
+    <p:sldId id="277" r:id="rId19"/>
+    <p:sldId id="280" r:id="rId20"/>
+    <p:sldId id="279" r:id="rId21"/>
+    <p:sldId id="270" r:id="rId22"/>
   </p:sldIdLst>
   <p:sldSz cx="12192000" cy="6858000"/>
   <p:notesSz cx="6858000" cy="9144000"/>
@@ -783,10 +791,9 @@
           <a:lstStyle/>
           <a:p>
             <a:r>
-              <a:rPr lang="vi-VN"/>
-              <a:t>Style</a:t>
-            </a:r>
-            <a:endParaRPr lang="en-US"/>
+              <a:rPr lang="en-US"/>
+              <a:t>Biểu đồ use case chức năng khởi tạo starter</a:t>
+            </a:r>
           </a:p>
         </p:txBody>
       </p:sp>
@@ -816,7 +823,616 @@
     </p:spTree>
     <p:extLst>
       <p:ext uri="{BB962C8B-B14F-4D97-AF65-F5344CB8AC3E}">
-        <p14:creationId xmlns:p14="http://schemas.microsoft.com/office/powerpoint/2010/main" val="1436646404"/>
+        <p14:creationId xmlns:p14="http://schemas.microsoft.com/office/powerpoint/2010/main" val="4197391801"/>
+      </p:ext>
+    </p:extLst>
+  </p:cSld>
+  <p:clrMapOvr>
+    <a:masterClrMapping/>
+  </p:clrMapOvr>
+</p:notes>
+</file>
+
+<file path=ppt/notesSlides/notesSlide13.xml><?xml version="1.0" encoding="utf-8"?>
+<p:notes xmlns:a="http://schemas.openxmlformats.org/drawingml/2006/main" xmlns:r="http://schemas.openxmlformats.org/officeDocument/2006/relationships" xmlns:p="http://schemas.openxmlformats.org/presentationml/2006/main">
+  <p:cSld>
+    <p:spTree>
+      <p:nvGrpSpPr>
+        <p:cNvPr id="1" name=""/>
+        <p:cNvGrpSpPr/>
+        <p:nvPr/>
+      </p:nvGrpSpPr>
+      <p:grpSpPr>
+        <a:xfrm>
+          <a:off x="0" y="0"/>
+          <a:ext cx="0" cy="0"/>
+          <a:chOff x="0" y="0"/>
+          <a:chExt cx="0" cy="0"/>
+        </a:xfrm>
+      </p:grpSpPr>
+      <p:sp>
+        <p:nvSpPr>
+          <p:cNvPr id="2" name="Slide Image Placeholder 1"/>
+          <p:cNvSpPr>
+            <a:spLocks noGrp="1" noRot="1" noChangeAspect="1"/>
+          </p:cNvSpPr>
+          <p:nvPr>
+            <p:ph type="sldImg"/>
+          </p:nvPr>
+        </p:nvSpPr>
+        <p:spPr/>
+      </p:sp>
+      <p:sp>
+        <p:nvSpPr>
+          <p:cNvPr id="3" name="Notes Placeholder 2"/>
+          <p:cNvSpPr>
+            <a:spLocks noGrp="1"/>
+          </p:cNvSpPr>
+          <p:nvPr>
+            <p:ph type="body" idx="1"/>
+          </p:nvPr>
+        </p:nvSpPr>
+        <p:spPr/>
+        <p:txBody>
+          <a:bodyPr/>
+          <a:lstStyle/>
+          <a:p>
+            <a:r>
+              <a:rPr lang="en-US"/>
+              <a:t>Biểu đồ chức năng của chức năng khởi tạo starter</a:t>
+            </a:r>
+          </a:p>
+        </p:txBody>
+      </p:sp>
+      <p:sp>
+        <p:nvSpPr>
+          <p:cNvPr id="4" name="Slide Number Placeholder 3"/>
+          <p:cNvSpPr>
+            <a:spLocks noGrp="1"/>
+          </p:cNvSpPr>
+          <p:nvPr>
+            <p:ph type="sldNum" sz="quarter" idx="5"/>
+          </p:nvPr>
+        </p:nvSpPr>
+        <p:spPr/>
+        <p:txBody>
+          <a:bodyPr/>
+          <a:lstStyle/>
+          <a:p>
+            <a:fld id="{959F4E64-33AD-4E03-A94E-822473CE3B48}" type="slidenum">
+              <a:rPr lang="en-US" smtClean="0"/>
+              <a:t>14</a:t>
+            </a:fld>
+            <a:endParaRPr lang="en-US"/>
+          </a:p>
+        </p:txBody>
+      </p:sp>
+    </p:spTree>
+    <p:extLst>
+      <p:ext uri="{BB962C8B-B14F-4D97-AF65-F5344CB8AC3E}">
+        <p14:creationId xmlns:p14="http://schemas.microsoft.com/office/powerpoint/2010/main" val="3138939907"/>
+      </p:ext>
+    </p:extLst>
+  </p:cSld>
+  <p:clrMapOvr>
+    <a:masterClrMapping/>
+  </p:clrMapOvr>
+</p:notes>
+</file>
+
+<file path=ppt/notesSlides/notesSlide14.xml><?xml version="1.0" encoding="utf-8"?>
+<p:notes xmlns:a="http://schemas.openxmlformats.org/drawingml/2006/main" xmlns:r="http://schemas.openxmlformats.org/officeDocument/2006/relationships" xmlns:p="http://schemas.openxmlformats.org/presentationml/2006/main">
+  <p:cSld>
+    <p:spTree>
+      <p:nvGrpSpPr>
+        <p:cNvPr id="1" name=""/>
+        <p:cNvGrpSpPr/>
+        <p:nvPr/>
+      </p:nvGrpSpPr>
+      <p:grpSpPr>
+        <a:xfrm>
+          <a:off x="0" y="0"/>
+          <a:ext cx="0" cy="0"/>
+          <a:chOff x="0" y="0"/>
+          <a:chExt cx="0" cy="0"/>
+        </a:xfrm>
+      </p:grpSpPr>
+      <p:sp>
+        <p:nvSpPr>
+          <p:cNvPr id="2" name="Slide Image Placeholder 1"/>
+          <p:cNvSpPr>
+            <a:spLocks noGrp="1" noRot="1" noChangeAspect="1"/>
+          </p:cNvSpPr>
+          <p:nvPr>
+            <p:ph type="sldImg"/>
+          </p:nvPr>
+        </p:nvSpPr>
+        <p:spPr/>
+      </p:sp>
+      <p:sp>
+        <p:nvSpPr>
+          <p:cNvPr id="3" name="Notes Placeholder 2"/>
+          <p:cNvSpPr>
+            <a:spLocks noGrp="1"/>
+          </p:cNvSpPr>
+          <p:nvPr>
+            <p:ph type="body" idx="1"/>
+          </p:nvPr>
+        </p:nvSpPr>
+        <p:spPr/>
+        <p:txBody>
+          <a:bodyPr/>
+          <a:lstStyle/>
+          <a:p>
+            <a:r>
+              <a:rPr lang="en-US"/>
+              <a:t>Biểu đồ usecase của chức năng trò chuyện văn b</a:t>
+            </a:r>
+          </a:p>
+        </p:txBody>
+      </p:sp>
+      <p:sp>
+        <p:nvSpPr>
+          <p:cNvPr id="4" name="Slide Number Placeholder 3"/>
+          <p:cNvSpPr>
+            <a:spLocks noGrp="1"/>
+          </p:cNvSpPr>
+          <p:nvPr>
+            <p:ph type="sldNum" sz="quarter" idx="5"/>
+          </p:nvPr>
+        </p:nvSpPr>
+        <p:spPr/>
+        <p:txBody>
+          <a:bodyPr/>
+          <a:lstStyle/>
+          <a:p>
+            <a:fld id="{959F4E64-33AD-4E03-A94E-822473CE3B48}" type="slidenum">
+              <a:rPr lang="en-US" smtClean="0"/>
+              <a:t>15</a:t>
+            </a:fld>
+            <a:endParaRPr lang="en-US"/>
+          </a:p>
+        </p:txBody>
+      </p:sp>
+    </p:spTree>
+    <p:extLst>
+      <p:ext uri="{BB962C8B-B14F-4D97-AF65-F5344CB8AC3E}">
+        <p14:creationId xmlns:p14="http://schemas.microsoft.com/office/powerpoint/2010/main" val="3002454543"/>
+      </p:ext>
+    </p:extLst>
+  </p:cSld>
+  <p:clrMapOvr>
+    <a:masterClrMapping/>
+  </p:clrMapOvr>
+</p:notes>
+</file>
+
+<file path=ppt/notesSlides/notesSlide15.xml><?xml version="1.0" encoding="utf-8"?>
+<p:notes xmlns:a="http://schemas.openxmlformats.org/drawingml/2006/main" xmlns:r="http://schemas.openxmlformats.org/officeDocument/2006/relationships" xmlns:p="http://schemas.openxmlformats.org/presentationml/2006/main">
+  <p:cSld>
+    <p:spTree>
+      <p:nvGrpSpPr>
+        <p:cNvPr id="1" name=""/>
+        <p:cNvGrpSpPr/>
+        <p:nvPr/>
+      </p:nvGrpSpPr>
+      <p:grpSpPr>
+        <a:xfrm>
+          <a:off x="0" y="0"/>
+          <a:ext cx="0" cy="0"/>
+          <a:chOff x="0" y="0"/>
+          <a:chExt cx="0" cy="0"/>
+        </a:xfrm>
+      </p:grpSpPr>
+      <p:sp>
+        <p:nvSpPr>
+          <p:cNvPr id="2" name="Slide Image Placeholder 1"/>
+          <p:cNvSpPr>
+            <a:spLocks noGrp="1" noRot="1" noChangeAspect="1"/>
+          </p:cNvSpPr>
+          <p:nvPr>
+            <p:ph type="sldImg"/>
+          </p:nvPr>
+        </p:nvSpPr>
+        <p:spPr/>
+      </p:sp>
+      <p:sp>
+        <p:nvSpPr>
+          <p:cNvPr id="3" name="Notes Placeholder 2"/>
+          <p:cNvSpPr>
+            <a:spLocks noGrp="1"/>
+          </p:cNvSpPr>
+          <p:nvPr>
+            <p:ph type="body" idx="1"/>
+          </p:nvPr>
+        </p:nvSpPr>
+        <p:spPr/>
+        <p:txBody>
+          <a:bodyPr/>
+          <a:lstStyle/>
+          <a:p>
+            <a:r>
+              <a:rPr lang="en-US"/>
+              <a:t>Biểu đồ chức năng của chức năng trò chuyện văn bản.</a:t>
+            </a:r>
+          </a:p>
+        </p:txBody>
+      </p:sp>
+      <p:sp>
+        <p:nvSpPr>
+          <p:cNvPr id="4" name="Slide Number Placeholder 3"/>
+          <p:cNvSpPr>
+            <a:spLocks noGrp="1"/>
+          </p:cNvSpPr>
+          <p:nvPr>
+            <p:ph type="sldNum" sz="quarter" idx="5"/>
+          </p:nvPr>
+        </p:nvSpPr>
+        <p:spPr/>
+        <p:txBody>
+          <a:bodyPr/>
+          <a:lstStyle/>
+          <a:p>
+            <a:fld id="{959F4E64-33AD-4E03-A94E-822473CE3B48}" type="slidenum">
+              <a:rPr lang="en-US" smtClean="0"/>
+              <a:t>16</a:t>
+            </a:fld>
+            <a:endParaRPr lang="en-US"/>
+          </a:p>
+        </p:txBody>
+      </p:sp>
+    </p:spTree>
+    <p:extLst>
+      <p:ext uri="{BB962C8B-B14F-4D97-AF65-F5344CB8AC3E}">
+        <p14:creationId xmlns:p14="http://schemas.microsoft.com/office/powerpoint/2010/main" val="2285672054"/>
+      </p:ext>
+    </p:extLst>
+  </p:cSld>
+  <p:clrMapOvr>
+    <a:masterClrMapping/>
+  </p:clrMapOvr>
+</p:notes>
+</file>
+
+<file path=ppt/notesSlides/notesSlide16.xml><?xml version="1.0" encoding="utf-8"?>
+<p:notes xmlns:a="http://schemas.openxmlformats.org/drawingml/2006/main" xmlns:r="http://schemas.openxmlformats.org/officeDocument/2006/relationships" xmlns:p="http://schemas.openxmlformats.org/presentationml/2006/main">
+  <p:cSld>
+    <p:spTree>
+      <p:nvGrpSpPr>
+        <p:cNvPr id="1" name=""/>
+        <p:cNvGrpSpPr/>
+        <p:nvPr/>
+      </p:nvGrpSpPr>
+      <p:grpSpPr>
+        <a:xfrm>
+          <a:off x="0" y="0"/>
+          <a:ext cx="0" cy="0"/>
+          <a:chOff x="0" y="0"/>
+          <a:chExt cx="0" cy="0"/>
+        </a:xfrm>
+      </p:grpSpPr>
+      <p:sp>
+        <p:nvSpPr>
+          <p:cNvPr id="2" name="Slide Image Placeholder 1"/>
+          <p:cNvSpPr>
+            <a:spLocks noGrp="1" noRot="1" noChangeAspect="1"/>
+          </p:cNvSpPr>
+          <p:nvPr>
+            <p:ph type="sldImg"/>
+          </p:nvPr>
+        </p:nvSpPr>
+        <p:spPr/>
+      </p:sp>
+      <p:sp>
+        <p:nvSpPr>
+          <p:cNvPr id="3" name="Notes Placeholder 2"/>
+          <p:cNvSpPr>
+            <a:spLocks noGrp="1"/>
+          </p:cNvSpPr>
+          <p:nvPr>
+            <p:ph type="body" idx="1"/>
+          </p:nvPr>
+        </p:nvSpPr>
+        <p:spPr/>
+        <p:txBody>
+          <a:bodyPr/>
+          <a:lstStyle/>
+          <a:p>
+            <a:r>
+              <a:rPr lang="en-US"/>
+              <a:t>Biểu đồ use case chức năng trò chuyện âm thanh</a:t>
+            </a:r>
+          </a:p>
+        </p:txBody>
+      </p:sp>
+      <p:sp>
+        <p:nvSpPr>
+          <p:cNvPr id="4" name="Slide Number Placeholder 3"/>
+          <p:cNvSpPr>
+            <a:spLocks noGrp="1"/>
+          </p:cNvSpPr>
+          <p:nvPr>
+            <p:ph type="sldNum" sz="quarter" idx="5"/>
+          </p:nvPr>
+        </p:nvSpPr>
+        <p:spPr/>
+        <p:txBody>
+          <a:bodyPr/>
+          <a:lstStyle/>
+          <a:p>
+            <a:fld id="{959F4E64-33AD-4E03-A94E-822473CE3B48}" type="slidenum">
+              <a:rPr lang="en-US" smtClean="0"/>
+              <a:t>17</a:t>
+            </a:fld>
+            <a:endParaRPr lang="en-US"/>
+          </a:p>
+        </p:txBody>
+      </p:sp>
+    </p:spTree>
+    <p:extLst>
+      <p:ext uri="{BB962C8B-B14F-4D97-AF65-F5344CB8AC3E}">
+        <p14:creationId xmlns:p14="http://schemas.microsoft.com/office/powerpoint/2010/main" val="3879826595"/>
+      </p:ext>
+    </p:extLst>
+  </p:cSld>
+  <p:clrMapOvr>
+    <a:masterClrMapping/>
+  </p:clrMapOvr>
+</p:notes>
+</file>
+
+<file path=ppt/notesSlides/notesSlide17.xml><?xml version="1.0" encoding="utf-8"?>
+<p:notes xmlns:a="http://schemas.openxmlformats.org/drawingml/2006/main" xmlns:r="http://schemas.openxmlformats.org/officeDocument/2006/relationships" xmlns:p="http://schemas.openxmlformats.org/presentationml/2006/main">
+  <p:cSld>
+    <p:spTree>
+      <p:nvGrpSpPr>
+        <p:cNvPr id="1" name=""/>
+        <p:cNvGrpSpPr/>
+        <p:nvPr/>
+      </p:nvGrpSpPr>
+      <p:grpSpPr>
+        <a:xfrm>
+          <a:off x="0" y="0"/>
+          <a:ext cx="0" cy="0"/>
+          <a:chOff x="0" y="0"/>
+          <a:chExt cx="0" cy="0"/>
+        </a:xfrm>
+      </p:grpSpPr>
+      <p:sp>
+        <p:nvSpPr>
+          <p:cNvPr id="2" name="Slide Image Placeholder 1"/>
+          <p:cNvSpPr>
+            <a:spLocks noGrp="1" noRot="1" noChangeAspect="1"/>
+          </p:cNvSpPr>
+          <p:nvPr>
+            <p:ph type="sldImg"/>
+          </p:nvPr>
+        </p:nvSpPr>
+        <p:spPr/>
+      </p:sp>
+      <p:sp>
+        <p:nvSpPr>
+          <p:cNvPr id="3" name="Notes Placeholder 2"/>
+          <p:cNvSpPr>
+            <a:spLocks noGrp="1"/>
+          </p:cNvSpPr>
+          <p:nvPr>
+            <p:ph type="body" idx="1"/>
+          </p:nvPr>
+        </p:nvSpPr>
+        <p:spPr/>
+        <p:txBody>
+          <a:bodyPr/>
+          <a:lstStyle/>
+          <a:p>
+            <a:r>
+              <a:rPr lang="en-US"/>
+              <a:t>Biểu đồ chức năng của chức năng trò chuyện âm thanh</a:t>
+            </a:r>
+          </a:p>
+        </p:txBody>
+      </p:sp>
+      <p:sp>
+        <p:nvSpPr>
+          <p:cNvPr id="4" name="Slide Number Placeholder 3"/>
+          <p:cNvSpPr>
+            <a:spLocks noGrp="1"/>
+          </p:cNvSpPr>
+          <p:nvPr>
+            <p:ph type="sldNum" sz="quarter" idx="5"/>
+          </p:nvPr>
+        </p:nvSpPr>
+        <p:spPr/>
+        <p:txBody>
+          <a:bodyPr/>
+          <a:lstStyle/>
+          <a:p>
+            <a:fld id="{959F4E64-33AD-4E03-A94E-822473CE3B48}" type="slidenum">
+              <a:rPr lang="en-US" smtClean="0"/>
+              <a:t>18</a:t>
+            </a:fld>
+            <a:endParaRPr lang="en-US"/>
+          </a:p>
+        </p:txBody>
+      </p:sp>
+    </p:spTree>
+    <p:extLst>
+      <p:ext uri="{BB962C8B-B14F-4D97-AF65-F5344CB8AC3E}">
+        <p14:creationId xmlns:p14="http://schemas.microsoft.com/office/powerpoint/2010/main" val="1458376165"/>
+      </p:ext>
+    </p:extLst>
+  </p:cSld>
+  <p:clrMapOvr>
+    <a:masterClrMapping/>
+  </p:clrMapOvr>
+</p:notes>
+</file>
+
+<file path=ppt/notesSlides/notesSlide18.xml><?xml version="1.0" encoding="utf-8"?>
+<p:notes xmlns:a="http://schemas.openxmlformats.org/drawingml/2006/main" xmlns:r="http://schemas.openxmlformats.org/officeDocument/2006/relationships" xmlns:p="http://schemas.openxmlformats.org/presentationml/2006/main">
+  <p:cSld>
+    <p:spTree>
+      <p:nvGrpSpPr>
+        <p:cNvPr id="1" name=""/>
+        <p:cNvGrpSpPr/>
+        <p:nvPr/>
+      </p:nvGrpSpPr>
+      <p:grpSpPr>
+        <a:xfrm>
+          <a:off x="0" y="0"/>
+          <a:ext cx="0" cy="0"/>
+          <a:chOff x="0" y="0"/>
+          <a:chExt cx="0" cy="0"/>
+        </a:xfrm>
+      </p:grpSpPr>
+      <p:sp>
+        <p:nvSpPr>
+          <p:cNvPr id="2" name="Slide Image Placeholder 1"/>
+          <p:cNvSpPr>
+            <a:spLocks noGrp="1" noRot="1" noChangeAspect="1"/>
+          </p:cNvSpPr>
+          <p:nvPr>
+            <p:ph type="sldImg"/>
+          </p:nvPr>
+        </p:nvSpPr>
+        <p:spPr/>
+      </p:sp>
+      <p:sp>
+        <p:nvSpPr>
+          <p:cNvPr id="3" name="Notes Placeholder 2"/>
+          <p:cNvSpPr>
+            <a:spLocks noGrp="1"/>
+          </p:cNvSpPr>
+          <p:nvPr>
+            <p:ph type="body" idx="1"/>
+          </p:nvPr>
+        </p:nvSpPr>
+        <p:spPr/>
+        <p:txBody>
+          <a:bodyPr/>
+          <a:lstStyle/>
+          <a:p>
+            <a:r>
+              <a:rPr lang="en-US"/>
+              <a:t>Biểu đồ use case chức năng tăng cường trí nhớ hội thoại</a:t>
+            </a:r>
+          </a:p>
+        </p:txBody>
+      </p:sp>
+      <p:sp>
+        <p:nvSpPr>
+          <p:cNvPr id="4" name="Slide Number Placeholder 3"/>
+          <p:cNvSpPr>
+            <a:spLocks noGrp="1"/>
+          </p:cNvSpPr>
+          <p:nvPr>
+            <p:ph type="sldNum" sz="quarter" idx="5"/>
+          </p:nvPr>
+        </p:nvSpPr>
+        <p:spPr/>
+        <p:txBody>
+          <a:bodyPr/>
+          <a:lstStyle/>
+          <a:p>
+            <a:fld id="{959F4E64-33AD-4E03-A94E-822473CE3B48}" type="slidenum">
+              <a:rPr lang="en-US" smtClean="0"/>
+              <a:t>19</a:t>
+            </a:fld>
+            <a:endParaRPr lang="en-US"/>
+          </a:p>
+        </p:txBody>
+      </p:sp>
+    </p:spTree>
+    <p:extLst>
+      <p:ext uri="{BB962C8B-B14F-4D97-AF65-F5344CB8AC3E}">
+        <p14:creationId xmlns:p14="http://schemas.microsoft.com/office/powerpoint/2010/main" val="2737796367"/>
+      </p:ext>
+    </p:extLst>
+  </p:cSld>
+  <p:clrMapOvr>
+    <a:masterClrMapping/>
+  </p:clrMapOvr>
+</p:notes>
+</file>
+
+<file path=ppt/notesSlides/notesSlide19.xml><?xml version="1.0" encoding="utf-8"?>
+<p:notes xmlns:a="http://schemas.openxmlformats.org/drawingml/2006/main" xmlns:r="http://schemas.openxmlformats.org/officeDocument/2006/relationships" xmlns:p="http://schemas.openxmlformats.org/presentationml/2006/main">
+  <p:cSld>
+    <p:spTree>
+      <p:nvGrpSpPr>
+        <p:cNvPr id="1" name=""/>
+        <p:cNvGrpSpPr/>
+        <p:nvPr/>
+      </p:nvGrpSpPr>
+      <p:grpSpPr>
+        <a:xfrm>
+          <a:off x="0" y="0"/>
+          <a:ext cx="0" cy="0"/>
+          <a:chOff x="0" y="0"/>
+          <a:chExt cx="0" cy="0"/>
+        </a:xfrm>
+      </p:grpSpPr>
+      <p:sp>
+        <p:nvSpPr>
+          <p:cNvPr id="2" name="Slide Image Placeholder 1"/>
+          <p:cNvSpPr>
+            <a:spLocks noGrp="1" noRot="1" noChangeAspect="1"/>
+          </p:cNvSpPr>
+          <p:nvPr>
+            <p:ph type="sldImg"/>
+          </p:nvPr>
+        </p:nvSpPr>
+        <p:spPr/>
+      </p:sp>
+      <p:sp>
+        <p:nvSpPr>
+          <p:cNvPr id="3" name="Notes Placeholder 2"/>
+          <p:cNvSpPr>
+            <a:spLocks noGrp="1"/>
+          </p:cNvSpPr>
+          <p:nvPr>
+            <p:ph type="body" idx="1"/>
+          </p:nvPr>
+        </p:nvSpPr>
+        <p:spPr/>
+        <p:txBody>
+          <a:bodyPr/>
+          <a:lstStyle/>
+          <a:p>
+            <a:r>
+              <a:rPr lang="en-US"/>
+              <a:t>Biểu đồ chức năng của chức năng tăng cường trí nhớ hội thoại</a:t>
+            </a:r>
+          </a:p>
+        </p:txBody>
+      </p:sp>
+      <p:sp>
+        <p:nvSpPr>
+          <p:cNvPr id="4" name="Slide Number Placeholder 3"/>
+          <p:cNvSpPr>
+            <a:spLocks noGrp="1"/>
+          </p:cNvSpPr>
+          <p:nvPr>
+            <p:ph type="sldNum" sz="quarter" idx="5"/>
+          </p:nvPr>
+        </p:nvSpPr>
+        <p:spPr/>
+        <p:txBody>
+          <a:bodyPr/>
+          <a:lstStyle/>
+          <a:p>
+            <a:fld id="{959F4E64-33AD-4E03-A94E-822473CE3B48}" type="slidenum">
+              <a:rPr lang="en-US" smtClean="0"/>
+              <a:t>20</a:t>
+            </a:fld>
+            <a:endParaRPr lang="en-US"/>
+          </a:p>
+        </p:txBody>
+      </p:sp>
+    </p:spTree>
+    <p:extLst>
+      <p:ext uri="{BB962C8B-B14F-4D97-AF65-F5344CB8AC3E}">
+        <p14:creationId xmlns:p14="http://schemas.microsoft.com/office/powerpoint/2010/main" val="123994773"/>
       </p:ext>
     </p:extLst>
   </p:cSld>
@@ -904,6 +1520,94 @@
     <p:extLst>
       <p:ext uri="{BB962C8B-B14F-4D97-AF65-F5344CB8AC3E}">
         <p14:creationId xmlns:p14="http://schemas.microsoft.com/office/powerpoint/2010/main" val="1390556427"/>
+      </p:ext>
+    </p:extLst>
+  </p:cSld>
+  <p:clrMapOvr>
+    <a:masterClrMapping/>
+  </p:clrMapOvr>
+</p:notes>
+</file>
+
+<file path=ppt/notesSlides/notesSlide20.xml><?xml version="1.0" encoding="utf-8"?>
+<p:notes xmlns:a="http://schemas.openxmlformats.org/drawingml/2006/main" xmlns:r="http://schemas.openxmlformats.org/officeDocument/2006/relationships" xmlns:p="http://schemas.openxmlformats.org/presentationml/2006/main">
+  <p:cSld>
+    <p:spTree>
+      <p:nvGrpSpPr>
+        <p:cNvPr id="1" name=""/>
+        <p:cNvGrpSpPr/>
+        <p:nvPr/>
+      </p:nvGrpSpPr>
+      <p:grpSpPr>
+        <a:xfrm>
+          <a:off x="0" y="0"/>
+          <a:ext cx="0" cy="0"/>
+          <a:chOff x="0" y="0"/>
+          <a:chExt cx="0" cy="0"/>
+        </a:xfrm>
+      </p:grpSpPr>
+      <p:sp>
+        <p:nvSpPr>
+          <p:cNvPr id="2" name="Slide Image Placeholder 1"/>
+          <p:cNvSpPr>
+            <a:spLocks noGrp="1" noRot="1" noChangeAspect="1"/>
+          </p:cNvSpPr>
+          <p:nvPr>
+            <p:ph type="sldImg"/>
+          </p:nvPr>
+        </p:nvSpPr>
+        <p:spPr/>
+      </p:sp>
+      <p:sp>
+        <p:nvSpPr>
+          <p:cNvPr id="3" name="Notes Placeholder 2"/>
+          <p:cNvSpPr>
+            <a:spLocks noGrp="1"/>
+          </p:cNvSpPr>
+          <p:nvPr>
+            <p:ph type="body" idx="1"/>
+          </p:nvPr>
+        </p:nvSpPr>
+        <p:spPr/>
+        <p:txBody>
+          <a:bodyPr/>
+          <a:lstStyle/>
+          <a:p>
+            <a:r>
+              <a:rPr lang="vi-VN"/>
+              <a:t>Style</a:t>
+            </a:r>
+            <a:endParaRPr lang="en-US"/>
+          </a:p>
+        </p:txBody>
+      </p:sp>
+      <p:sp>
+        <p:nvSpPr>
+          <p:cNvPr id="4" name="Slide Number Placeholder 3"/>
+          <p:cNvSpPr>
+            <a:spLocks noGrp="1"/>
+          </p:cNvSpPr>
+          <p:nvPr>
+            <p:ph type="sldNum" sz="quarter" idx="5"/>
+          </p:nvPr>
+        </p:nvSpPr>
+        <p:spPr/>
+        <p:txBody>
+          <a:bodyPr/>
+          <a:lstStyle/>
+          <a:p>
+            <a:fld id="{959F4E64-33AD-4E03-A94E-822473CE3B48}" type="slidenum">
+              <a:rPr lang="en-US" smtClean="0"/>
+              <a:t>21</a:t>
+            </a:fld>
+            <a:endParaRPr lang="en-US"/>
+          </a:p>
+        </p:txBody>
+      </p:sp>
+    </p:spTree>
+    <p:extLst>
+      <p:ext uri="{BB962C8B-B14F-4D97-AF65-F5344CB8AC3E}">
+        <p14:creationId xmlns:p14="http://schemas.microsoft.com/office/powerpoint/2010/main" val="1436646404"/>
       </p:ext>
     </p:extLst>
   </p:cSld>
@@ -8245,40 +8949,6202 @@
           <a:chExt cx="0" cy="0"/>
         </a:xfrm>
       </p:grpSpPr>
-      <p:pic>
-        <p:nvPicPr>
-          <p:cNvPr id="3" name="Picture 2">
-            <a:extLst>
-              <a:ext uri="{FF2B5EF4-FFF2-40B4-BE49-F238E27FC236}">
-                <a16:creationId xmlns:a16="http://schemas.microsoft.com/office/drawing/2014/main" id="{75821577-64B6-E0C7-06AB-59F7A4584752}"/>
-              </a:ext>
-            </a:extLst>
-          </p:cNvPr>
-          <p:cNvPicPr>
-            <a:picLocks noChangeAspect="1"/>
-          </p:cNvPicPr>
+      <p:grpSp>
+        <p:nvGrpSpPr>
+          <p:cNvPr id="2" name="Group 1">
+            <a:extLst>
+              <a:ext uri="{FF2B5EF4-FFF2-40B4-BE49-F238E27FC236}">
+                <a16:creationId xmlns:a16="http://schemas.microsoft.com/office/drawing/2014/main" id="{BA26FC92-E264-53EC-B41F-B020459C6AFD}"/>
+              </a:ext>
+            </a:extLst>
+          </p:cNvPr>
+          <p:cNvGrpSpPr/>
           <p:nvPr/>
-        </p:nvPicPr>
-        <p:blipFill>
-          <a:blip r:embed="rId3"/>
-          <a:stretch>
-            <a:fillRect/>
-          </a:stretch>
-        </p:blipFill>
+        </p:nvGrpSpPr>
+        <p:grpSpPr>
+          <a:xfrm>
+            <a:off x="1752601" y="371194"/>
+            <a:ext cx="1421219" cy="1618759"/>
+            <a:chOff x="5261639" y="42349"/>
+            <a:chExt cx="1421219" cy="1211352"/>
+          </a:xfrm>
+        </p:grpSpPr>
+        <p:pic>
+          <p:nvPicPr>
+            <p:cNvPr id="3" name="Graphic 2" descr="User with solid fill">
+              <a:extLst>
+                <a:ext uri="{FF2B5EF4-FFF2-40B4-BE49-F238E27FC236}">
+                  <a16:creationId xmlns:a16="http://schemas.microsoft.com/office/drawing/2014/main" id="{6227E11A-6C13-C5C2-0E9C-B6CF77C4984B}"/>
+                </a:ext>
+              </a:extLst>
+            </p:cNvPr>
+            <p:cNvPicPr>
+              <a:picLocks noChangeAspect="1"/>
+            </p:cNvPicPr>
+            <p:nvPr/>
+          </p:nvPicPr>
+          <p:blipFill>
+            <a:blip r:embed="rId3">
+              <a:extLst>
+                <a:ext uri="{96DAC541-7B7A-43D3-8B79-37D633B846F1}">
+                  <asvg:svgBlip xmlns:asvg="http://schemas.microsoft.com/office/drawing/2016/SVG/main" r:embed="rId4"/>
+                </a:ext>
+              </a:extLst>
+            </a:blip>
+            <a:stretch>
+              <a:fillRect/>
+            </a:stretch>
+          </p:blipFill>
+          <p:spPr>
+            <a:xfrm>
+              <a:off x="5333030" y="42349"/>
+              <a:ext cx="1264935" cy="1003931"/>
+            </a:xfrm>
+            <a:prstGeom prst="rect">
+              <a:avLst/>
+            </a:prstGeom>
+          </p:spPr>
+        </p:pic>
+        <p:sp>
+          <p:nvSpPr>
+            <p:cNvPr id="4" name="TextBox 3">
+              <a:extLst>
+                <a:ext uri="{FF2B5EF4-FFF2-40B4-BE49-F238E27FC236}">
+                  <a16:creationId xmlns:a16="http://schemas.microsoft.com/office/drawing/2014/main" id="{281E2644-219A-3372-C0D4-6AB8E98EBC8D}"/>
+                </a:ext>
+              </a:extLst>
+            </p:cNvPr>
+            <p:cNvSpPr txBox="1"/>
+            <p:nvPr/>
+          </p:nvSpPr>
+          <p:spPr>
+            <a:xfrm>
+              <a:off x="5261639" y="884369"/>
+              <a:ext cx="1421219" cy="369332"/>
+            </a:xfrm>
+            <a:prstGeom prst="rect">
+              <a:avLst/>
+            </a:prstGeom>
+            <a:noFill/>
+          </p:spPr>
+          <p:txBody>
+            <a:bodyPr wrap="square" rtlCol="0">
+              <a:spAutoFit/>
+            </a:bodyPr>
+            <a:lstStyle/>
+            <a:p>
+              <a:pPr algn="ctr"/>
+              <a:r>
+                <a:rPr lang="vi-VN">
+                  <a:latin typeface="+mj-lt"/>
+                </a:rPr>
+                <a:t>Người dùng</a:t>
+              </a:r>
+              <a:endParaRPr lang="en-US">
+                <a:latin typeface="+mj-lt"/>
+              </a:endParaRPr>
+            </a:p>
+          </p:txBody>
+        </p:sp>
+      </p:grpSp>
+      <p:sp>
+        <p:nvSpPr>
+          <p:cNvPr id="5" name="Rectangle: Rounded Corners 4">
+            <a:extLst>
+              <a:ext uri="{FF2B5EF4-FFF2-40B4-BE49-F238E27FC236}">
+                <a16:creationId xmlns:a16="http://schemas.microsoft.com/office/drawing/2014/main" id="{C02A6875-8B26-6719-649E-8D23ABB40979}"/>
+              </a:ext>
+            </a:extLst>
+          </p:cNvPr>
+          <p:cNvSpPr/>
+          <p:nvPr/>
+        </p:nvSpPr>
         <p:spPr>
           <a:xfrm>
-            <a:off x="1143675" y="1"/>
-            <a:ext cx="11048325" cy="6858000"/>
+            <a:off x="4746171" y="801980"/>
+            <a:ext cx="2699657" cy="757188"/>
+          </a:xfrm>
+          <a:prstGeom prst="roundRect">
+            <a:avLst>
+              <a:gd name="adj" fmla="val 50000"/>
+            </a:avLst>
+          </a:prstGeom>
+          <a:solidFill>
+            <a:schemeClr val="bg2"/>
+          </a:solidFill>
+          <a:ln>
+            <a:solidFill>
+              <a:schemeClr val="tx1"/>
+            </a:solidFill>
+          </a:ln>
+        </p:spPr>
+        <p:style>
+          <a:lnRef idx="2">
+            <a:schemeClr val="accent1">
+              <a:shade val="15000"/>
+            </a:schemeClr>
+          </a:lnRef>
+          <a:fillRef idx="1">
+            <a:schemeClr val="accent1"/>
+          </a:fillRef>
+          <a:effectRef idx="0">
+            <a:schemeClr val="accent1"/>
+          </a:effectRef>
+          <a:fontRef idx="minor">
+            <a:schemeClr val="lt1"/>
+          </a:fontRef>
+        </p:style>
+        <p:txBody>
+          <a:bodyPr rtlCol="0" anchor="ctr"/>
+          <a:lstStyle/>
+          <a:p>
+            <a:pPr algn="ctr"/>
+            <a:r>
+              <a:rPr lang="en-US">
+                <a:solidFill>
+                  <a:schemeClr val="tx1"/>
+                </a:solidFill>
+                <a:latin typeface="+mj-lt"/>
+                <a:cs typeface="Times New Roman" panose="02020603050405020304" pitchFamily="18" charset="0"/>
+              </a:rPr>
+              <a:t>Khởi tạo phiên chat mới</a:t>
+            </a:r>
+          </a:p>
+        </p:txBody>
+      </p:sp>
+      <p:sp>
+        <p:nvSpPr>
+          <p:cNvPr id="8" name="Rectangle: Rounded Corners 7">
+            <a:extLst>
+              <a:ext uri="{FF2B5EF4-FFF2-40B4-BE49-F238E27FC236}">
+                <a16:creationId xmlns:a16="http://schemas.microsoft.com/office/drawing/2014/main" id="{48AD5708-5B0D-6B71-D491-BB4563F76B77}"/>
+              </a:ext>
+            </a:extLst>
+          </p:cNvPr>
+          <p:cNvSpPr/>
+          <p:nvPr/>
+        </p:nvSpPr>
+        <p:spPr>
+          <a:xfrm>
+            <a:off x="4746171" y="4348212"/>
+            <a:ext cx="2699657" cy="757188"/>
+          </a:xfrm>
+          <a:prstGeom prst="roundRect">
+            <a:avLst>
+              <a:gd name="adj" fmla="val 50000"/>
+            </a:avLst>
+          </a:prstGeom>
+          <a:solidFill>
+            <a:schemeClr val="bg2"/>
+          </a:solidFill>
+          <a:ln>
+            <a:solidFill>
+              <a:schemeClr val="tx1"/>
+            </a:solidFill>
+          </a:ln>
+        </p:spPr>
+        <p:style>
+          <a:lnRef idx="2">
+            <a:schemeClr val="accent1">
+              <a:shade val="15000"/>
+            </a:schemeClr>
+          </a:lnRef>
+          <a:fillRef idx="1">
+            <a:schemeClr val="accent1"/>
+          </a:fillRef>
+          <a:effectRef idx="0">
+            <a:schemeClr val="accent1"/>
+          </a:effectRef>
+          <a:fontRef idx="minor">
+            <a:schemeClr val="lt1"/>
+          </a:fontRef>
+        </p:style>
+        <p:txBody>
+          <a:bodyPr rtlCol="0" anchor="ctr"/>
+          <a:lstStyle/>
+          <a:p>
+            <a:pPr algn="ctr"/>
+            <a:r>
+              <a:rPr lang="en-US">
+                <a:solidFill>
+                  <a:schemeClr val="tx1"/>
+                </a:solidFill>
+                <a:latin typeface="+mj-lt"/>
+                <a:cs typeface="Times New Roman" panose="02020603050405020304" pitchFamily="18" charset="0"/>
+              </a:rPr>
+              <a:t>LLM tạo ra phản hồi</a:t>
+            </a:r>
+          </a:p>
+        </p:txBody>
+      </p:sp>
+      <p:sp>
+        <p:nvSpPr>
+          <p:cNvPr id="9" name="Rectangle: Rounded Corners 8">
+            <a:extLst>
+              <a:ext uri="{FF2B5EF4-FFF2-40B4-BE49-F238E27FC236}">
+                <a16:creationId xmlns:a16="http://schemas.microsoft.com/office/drawing/2014/main" id="{714BA9D8-F05D-99AB-ADBF-C508B94C5280}"/>
+              </a:ext>
+            </a:extLst>
+          </p:cNvPr>
+          <p:cNvSpPr/>
+          <p:nvPr/>
+        </p:nvSpPr>
+        <p:spPr>
+          <a:xfrm>
+            <a:off x="4746171" y="3050406"/>
+            <a:ext cx="2699657" cy="757188"/>
+          </a:xfrm>
+          <a:prstGeom prst="roundRect">
+            <a:avLst>
+              <a:gd name="adj" fmla="val 50000"/>
+            </a:avLst>
+          </a:prstGeom>
+          <a:solidFill>
+            <a:schemeClr val="bg2"/>
+          </a:solidFill>
+          <a:ln>
+            <a:solidFill>
+              <a:schemeClr val="tx1"/>
+            </a:solidFill>
+          </a:ln>
+        </p:spPr>
+        <p:style>
+          <a:lnRef idx="2">
+            <a:schemeClr val="accent1">
+              <a:shade val="15000"/>
+            </a:schemeClr>
+          </a:lnRef>
+          <a:fillRef idx="1">
+            <a:schemeClr val="accent1"/>
+          </a:fillRef>
+          <a:effectRef idx="0">
+            <a:schemeClr val="accent1"/>
+          </a:effectRef>
+          <a:fontRef idx="minor">
+            <a:schemeClr val="lt1"/>
+          </a:fontRef>
+        </p:style>
+        <p:txBody>
+          <a:bodyPr rtlCol="0" anchor="ctr"/>
+          <a:lstStyle/>
+          <a:p>
+            <a:pPr algn="ctr"/>
+            <a:r>
+              <a:rPr lang="en-US">
+                <a:solidFill>
+                  <a:schemeClr val="tx1"/>
+                </a:solidFill>
+                <a:latin typeface="+mj-lt"/>
+                <a:cs typeface="Times New Roman" panose="02020603050405020304" pitchFamily="18" charset="0"/>
+              </a:rPr>
+              <a:t>Hệ thống gửi prompt sinh starter đến LLM</a:t>
+            </a:r>
+          </a:p>
+        </p:txBody>
+      </p:sp>
+      <p:sp>
+        <p:nvSpPr>
+          <p:cNvPr id="10" name="Rectangle: Rounded Corners 9">
+            <a:extLst>
+              <a:ext uri="{FF2B5EF4-FFF2-40B4-BE49-F238E27FC236}">
+                <a16:creationId xmlns:a16="http://schemas.microsoft.com/office/drawing/2014/main" id="{871BA363-D13A-2EC7-ED5F-D8CD06623CEB}"/>
+              </a:ext>
+            </a:extLst>
+          </p:cNvPr>
+          <p:cNvSpPr/>
+          <p:nvPr/>
+        </p:nvSpPr>
+        <p:spPr>
+          <a:xfrm>
+            <a:off x="8092196" y="4348212"/>
+            <a:ext cx="2699657" cy="757188"/>
+          </a:xfrm>
+          <a:prstGeom prst="roundRect">
+            <a:avLst>
+              <a:gd name="adj" fmla="val 50000"/>
+            </a:avLst>
+          </a:prstGeom>
+          <a:solidFill>
+            <a:schemeClr val="bg2"/>
+          </a:solidFill>
+          <a:ln>
+            <a:solidFill>
+              <a:schemeClr val="tx1"/>
+            </a:solidFill>
+          </a:ln>
+        </p:spPr>
+        <p:style>
+          <a:lnRef idx="2">
+            <a:schemeClr val="accent1">
+              <a:shade val="15000"/>
+            </a:schemeClr>
+          </a:lnRef>
+          <a:fillRef idx="1">
+            <a:schemeClr val="accent1"/>
+          </a:fillRef>
+          <a:effectRef idx="0">
+            <a:schemeClr val="accent1"/>
+          </a:effectRef>
+          <a:fontRef idx="minor">
+            <a:schemeClr val="lt1"/>
+          </a:fontRef>
+        </p:style>
+        <p:txBody>
+          <a:bodyPr rtlCol="0" anchor="ctr"/>
+          <a:lstStyle/>
+          <a:p>
+            <a:pPr algn="ctr"/>
+            <a:r>
+              <a:rPr lang="en-US">
+                <a:solidFill>
+                  <a:schemeClr val="tx1"/>
+                </a:solidFill>
+                <a:latin typeface="+mj-lt"/>
+                <a:cs typeface="Times New Roman" panose="02020603050405020304" pitchFamily="18" charset="0"/>
+              </a:rPr>
+              <a:t>Hệ thống trích xuất starter và hiển thị lên UI</a:t>
+            </a:r>
+          </a:p>
+        </p:txBody>
+      </p:sp>
+      <p:sp>
+        <p:nvSpPr>
+          <p:cNvPr id="11" name="Rectangle: Rounded Corners 10">
+            <a:extLst>
+              <a:ext uri="{FF2B5EF4-FFF2-40B4-BE49-F238E27FC236}">
+                <a16:creationId xmlns:a16="http://schemas.microsoft.com/office/drawing/2014/main" id="{ABE263FE-907E-EB4B-3DDA-32BA1B1C9D19}"/>
+              </a:ext>
+            </a:extLst>
+          </p:cNvPr>
+          <p:cNvSpPr/>
+          <p:nvPr/>
+        </p:nvSpPr>
+        <p:spPr>
+          <a:xfrm>
+            <a:off x="8092195" y="801980"/>
+            <a:ext cx="2699657" cy="757188"/>
+          </a:xfrm>
+          <a:prstGeom prst="roundRect">
+            <a:avLst>
+              <a:gd name="adj" fmla="val 50000"/>
+            </a:avLst>
+          </a:prstGeom>
+          <a:solidFill>
+            <a:schemeClr val="bg2"/>
+          </a:solidFill>
+          <a:ln>
+            <a:solidFill>
+              <a:schemeClr val="tx1"/>
+            </a:solidFill>
+            <a:prstDash val="solid"/>
+          </a:ln>
+        </p:spPr>
+        <p:style>
+          <a:lnRef idx="2">
+            <a:schemeClr val="accent1">
+              <a:shade val="15000"/>
+            </a:schemeClr>
+          </a:lnRef>
+          <a:fillRef idx="1">
+            <a:schemeClr val="accent1"/>
+          </a:fillRef>
+          <a:effectRef idx="0">
+            <a:schemeClr val="accent1"/>
+          </a:effectRef>
+          <a:fontRef idx="minor">
+            <a:schemeClr val="lt1"/>
+          </a:fontRef>
+        </p:style>
+        <p:txBody>
+          <a:bodyPr rtlCol="0" anchor="ctr"/>
+          <a:lstStyle/>
+          <a:p>
+            <a:pPr algn="ctr"/>
+            <a:r>
+              <a:rPr lang="en-US">
+                <a:solidFill>
+                  <a:schemeClr val="tx1"/>
+                </a:solidFill>
+                <a:latin typeface="+mj-lt"/>
+                <a:cs typeface="Times New Roman" panose="02020603050405020304" pitchFamily="18" charset="0"/>
+              </a:rPr>
+              <a:t>Giao diện </a:t>
+            </a:r>
+          </a:p>
+          <a:p>
+            <a:pPr algn="ctr"/>
+            <a:r>
+              <a:rPr lang="en-US">
+                <a:solidFill>
+                  <a:schemeClr val="tx1"/>
+                </a:solidFill>
+                <a:latin typeface="+mj-lt"/>
+                <a:cs typeface="Times New Roman" panose="02020603050405020304" pitchFamily="18" charset="0"/>
+              </a:rPr>
+              <a:t>phiên chat mới</a:t>
+            </a:r>
+          </a:p>
+        </p:txBody>
+      </p:sp>
+      <p:cxnSp>
+        <p:nvCxnSpPr>
+          <p:cNvPr id="13" name="Straight Arrow Connector 12">
+            <a:extLst>
+              <a:ext uri="{FF2B5EF4-FFF2-40B4-BE49-F238E27FC236}">
+                <a16:creationId xmlns:a16="http://schemas.microsoft.com/office/drawing/2014/main" id="{CAE2D89A-200B-05DC-785D-E8B9B21DF33B}"/>
+              </a:ext>
+            </a:extLst>
+          </p:cNvPr>
+          <p:cNvCxnSpPr>
+            <a:cxnSpLocks/>
+            <a:endCxn id="5" idx="1"/>
+          </p:cNvCxnSpPr>
+          <p:nvPr/>
+        </p:nvCxnSpPr>
+        <p:spPr>
+          <a:xfrm>
+            <a:off x="3173820" y="1180574"/>
+            <a:ext cx="1572351" cy="0"/>
+          </a:xfrm>
+          <a:prstGeom prst="straightConnector1">
+            <a:avLst/>
+          </a:prstGeom>
+          <a:ln>
+            <a:tailEnd type="triangle"/>
+          </a:ln>
+        </p:spPr>
+        <p:style>
+          <a:lnRef idx="2">
+            <a:schemeClr val="dk1"/>
+          </a:lnRef>
+          <a:fillRef idx="0">
+            <a:schemeClr val="dk1"/>
+          </a:fillRef>
+          <a:effectRef idx="1">
+            <a:schemeClr val="dk1"/>
+          </a:effectRef>
+          <a:fontRef idx="minor">
+            <a:schemeClr val="tx1"/>
+          </a:fontRef>
+        </p:style>
+      </p:cxnSp>
+      <p:cxnSp>
+        <p:nvCxnSpPr>
+          <p:cNvPr id="16" name="Straight Arrow Connector 15">
+            <a:extLst>
+              <a:ext uri="{FF2B5EF4-FFF2-40B4-BE49-F238E27FC236}">
+                <a16:creationId xmlns:a16="http://schemas.microsoft.com/office/drawing/2014/main" id="{AB13899F-BF5F-BA78-D86E-38875B076885}"/>
+              </a:ext>
+            </a:extLst>
+          </p:cNvPr>
+          <p:cNvCxnSpPr>
+            <a:cxnSpLocks/>
+            <a:stCxn id="5" idx="3"/>
+            <a:endCxn id="11" idx="1"/>
+          </p:cNvCxnSpPr>
+          <p:nvPr/>
+        </p:nvCxnSpPr>
+        <p:spPr>
+          <a:xfrm>
+            <a:off x="7445828" y="1180574"/>
+            <a:ext cx="646367" cy="0"/>
+          </a:xfrm>
+          <a:prstGeom prst="straightConnector1">
+            <a:avLst/>
+          </a:prstGeom>
+          <a:ln>
+            <a:tailEnd type="triangle"/>
+          </a:ln>
+        </p:spPr>
+        <p:style>
+          <a:lnRef idx="2">
+            <a:schemeClr val="dk1"/>
+          </a:lnRef>
+          <a:fillRef idx="0">
+            <a:schemeClr val="dk1"/>
+          </a:fillRef>
+          <a:effectRef idx="1">
+            <a:schemeClr val="dk1"/>
+          </a:effectRef>
+          <a:fontRef idx="minor">
+            <a:schemeClr val="tx1"/>
+          </a:fontRef>
+        </p:style>
+      </p:cxnSp>
+      <p:cxnSp>
+        <p:nvCxnSpPr>
+          <p:cNvPr id="19" name="Straight Arrow Connector 18">
+            <a:extLst>
+              <a:ext uri="{FF2B5EF4-FFF2-40B4-BE49-F238E27FC236}">
+                <a16:creationId xmlns:a16="http://schemas.microsoft.com/office/drawing/2014/main" id="{5CA331EC-E1AF-4E0F-1040-6D6D29AE23B7}"/>
+              </a:ext>
+            </a:extLst>
+          </p:cNvPr>
+          <p:cNvCxnSpPr>
+            <a:cxnSpLocks/>
+            <a:stCxn id="5" idx="2"/>
+            <a:endCxn id="9" idx="0"/>
+          </p:cNvCxnSpPr>
+          <p:nvPr/>
+        </p:nvCxnSpPr>
+        <p:spPr>
+          <a:xfrm>
+            <a:off x="6096000" y="1559168"/>
+            <a:ext cx="0" cy="1491238"/>
+          </a:xfrm>
+          <a:prstGeom prst="straightConnector1">
+            <a:avLst/>
+          </a:prstGeom>
+          <a:ln>
+            <a:prstDash val="dash"/>
+            <a:tailEnd type="triangle"/>
+          </a:ln>
+        </p:spPr>
+        <p:style>
+          <a:lnRef idx="2">
+            <a:schemeClr val="dk1"/>
+          </a:lnRef>
+          <a:fillRef idx="0">
+            <a:schemeClr val="dk1"/>
+          </a:fillRef>
+          <a:effectRef idx="1">
+            <a:schemeClr val="dk1"/>
+          </a:effectRef>
+          <a:fontRef idx="minor">
+            <a:schemeClr val="tx1"/>
+          </a:fontRef>
+        </p:style>
+      </p:cxnSp>
+      <p:cxnSp>
+        <p:nvCxnSpPr>
+          <p:cNvPr id="22" name="Straight Arrow Connector 21">
+            <a:extLst>
+              <a:ext uri="{FF2B5EF4-FFF2-40B4-BE49-F238E27FC236}">
+                <a16:creationId xmlns:a16="http://schemas.microsoft.com/office/drawing/2014/main" id="{B3D65895-F305-82CC-EFC8-B409193E9512}"/>
+              </a:ext>
+            </a:extLst>
+          </p:cNvPr>
+          <p:cNvCxnSpPr>
+            <a:cxnSpLocks/>
+            <a:stCxn id="9" idx="2"/>
+            <a:endCxn id="8" idx="0"/>
+          </p:cNvCxnSpPr>
+          <p:nvPr/>
+        </p:nvCxnSpPr>
+        <p:spPr>
+          <a:xfrm>
+            <a:off x="6096000" y="3807594"/>
+            <a:ext cx="0" cy="540618"/>
+          </a:xfrm>
+          <a:prstGeom prst="straightConnector1">
+            <a:avLst/>
+          </a:prstGeom>
+          <a:ln>
+            <a:tailEnd type="triangle"/>
+          </a:ln>
+        </p:spPr>
+        <p:style>
+          <a:lnRef idx="2">
+            <a:schemeClr val="dk1"/>
+          </a:lnRef>
+          <a:fillRef idx="0">
+            <a:schemeClr val="dk1"/>
+          </a:fillRef>
+          <a:effectRef idx="1">
+            <a:schemeClr val="dk1"/>
+          </a:effectRef>
+          <a:fontRef idx="minor">
+            <a:schemeClr val="tx1"/>
+          </a:fontRef>
+        </p:style>
+      </p:cxnSp>
+      <p:cxnSp>
+        <p:nvCxnSpPr>
+          <p:cNvPr id="25" name="Straight Arrow Connector 24">
+            <a:extLst>
+              <a:ext uri="{FF2B5EF4-FFF2-40B4-BE49-F238E27FC236}">
+                <a16:creationId xmlns:a16="http://schemas.microsoft.com/office/drawing/2014/main" id="{860B4A27-DA68-90AD-539C-2401F00B409A}"/>
+              </a:ext>
+            </a:extLst>
+          </p:cNvPr>
+          <p:cNvCxnSpPr>
+            <a:cxnSpLocks/>
+            <a:stCxn id="8" idx="3"/>
+          </p:cNvCxnSpPr>
+          <p:nvPr/>
+        </p:nvCxnSpPr>
+        <p:spPr>
+          <a:xfrm>
+            <a:off x="7445828" y="4726806"/>
+            <a:ext cx="646367" cy="0"/>
+          </a:xfrm>
+          <a:prstGeom prst="straightConnector1">
+            <a:avLst/>
+          </a:prstGeom>
+          <a:ln>
+            <a:tailEnd type="triangle"/>
+          </a:ln>
+        </p:spPr>
+        <p:style>
+          <a:lnRef idx="2">
+            <a:schemeClr val="dk1"/>
+          </a:lnRef>
+          <a:fillRef idx="0">
+            <a:schemeClr val="dk1"/>
+          </a:fillRef>
+          <a:effectRef idx="1">
+            <a:schemeClr val="dk1"/>
+          </a:effectRef>
+          <a:fontRef idx="minor">
+            <a:schemeClr val="tx1"/>
+          </a:fontRef>
+        </p:style>
+      </p:cxnSp>
+      <p:cxnSp>
+        <p:nvCxnSpPr>
+          <p:cNvPr id="28" name="Straight Arrow Connector 27">
+            <a:extLst>
+              <a:ext uri="{FF2B5EF4-FFF2-40B4-BE49-F238E27FC236}">
+                <a16:creationId xmlns:a16="http://schemas.microsoft.com/office/drawing/2014/main" id="{2A91FC9D-D248-3668-08F2-D60156BA8348}"/>
+              </a:ext>
+            </a:extLst>
+          </p:cNvPr>
+          <p:cNvCxnSpPr>
+            <a:cxnSpLocks/>
+            <a:stCxn id="10" idx="0"/>
+            <a:endCxn id="11" idx="2"/>
+          </p:cNvCxnSpPr>
+          <p:nvPr/>
+        </p:nvCxnSpPr>
+        <p:spPr>
+          <a:xfrm flipH="1" flipV="1">
+            <a:off x="9442024" y="1559168"/>
+            <a:ext cx="1" cy="2789044"/>
+          </a:xfrm>
+          <a:prstGeom prst="straightConnector1">
+            <a:avLst/>
+          </a:prstGeom>
+          <a:ln>
+            <a:tailEnd type="triangle"/>
+          </a:ln>
+        </p:spPr>
+        <p:style>
+          <a:lnRef idx="2">
+            <a:schemeClr val="dk1"/>
+          </a:lnRef>
+          <a:fillRef idx="0">
+            <a:schemeClr val="dk1"/>
+          </a:fillRef>
+          <a:effectRef idx="1">
+            <a:schemeClr val="dk1"/>
+          </a:effectRef>
+          <a:fontRef idx="minor">
+            <a:schemeClr val="tx1"/>
+          </a:fontRef>
+        </p:style>
+      </p:cxnSp>
+      <p:sp>
+        <p:nvSpPr>
+          <p:cNvPr id="31" name="TextBox 30">
+            <a:extLst>
+              <a:ext uri="{FF2B5EF4-FFF2-40B4-BE49-F238E27FC236}">
+                <a16:creationId xmlns:a16="http://schemas.microsoft.com/office/drawing/2014/main" id="{D9A363C5-D977-5F96-A02D-BEE715205650}"/>
+              </a:ext>
+            </a:extLst>
+          </p:cNvPr>
+          <p:cNvSpPr txBox="1"/>
+          <p:nvPr/>
+        </p:nvSpPr>
+        <p:spPr>
+          <a:xfrm>
+            <a:off x="6077253" y="1805287"/>
+            <a:ext cx="885179" cy="369332"/>
           </a:xfrm>
           <a:prstGeom prst="rect">
             <a:avLst/>
           </a:prstGeom>
+          <a:noFill/>
         </p:spPr>
-      </p:pic>
+        <p:txBody>
+          <a:bodyPr wrap="none" rtlCol="0">
+            <a:spAutoFit/>
+          </a:bodyPr>
+          <a:lstStyle/>
+          <a:p>
+            <a:r>
+              <a:rPr lang="en-US">
+                <a:latin typeface="+mj-lt"/>
+              </a:rPr>
+              <a:t>tự động</a:t>
+            </a:r>
+          </a:p>
+        </p:txBody>
+      </p:sp>
+      <p:sp>
+        <p:nvSpPr>
+          <p:cNvPr id="32" name="Rectangle 31">
+            <a:extLst>
+              <a:ext uri="{FF2B5EF4-FFF2-40B4-BE49-F238E27FC236}">
+                <a16:creationId xmlns:a16="http://schemas.microsoft.com/office/drawing/2014/main" id="{7FABDC62-3A1B-4362-CCC3-8068E09224C4}"/>
+              </a:ext>
+            </a:extLst>
+          </p:cNvPr>
+          <p:cNvSpPr/>
+          <p:nvPr/>
+        </p:nvSpPr>
+        <p:spPr>
+          <a:xfrm>
+            <a:off x="4286673" y="2296415"/>
+            <a:ext cx="6964675" cy="3322317"/>
+          </a:xfrm>
+          <a:prstGeom prst="rect">
+            <a:avLst/>
+          </a:prstGeom>
+          <a:noFill/>
+          <a:ln>
+            <a:solidFill>
+              <a:schemeClr val="accent1">
+                <a:shade val="15000"/>
+              </a:schemeClr>
+            </a:solidFill>
+            <a:prstDash val="dash"/>
+          </a:ln>
+        </p:spPr>
+        <p:style>
+          <a:lnRef idx="0">
+            <a:scrgbClr r="0" g="0" b="0"/>
+          </a:lnRef>
+          <a:fillRef idx="0">
+            <a:scrgbClr r="0" g="0" b="0"/>
+          </a:fillRef>
+          <a:effectRef idx="0">
+            <a:scrgbClr r="0" g="0" b="0"/>
+          </a:effectRef>
+          <a:fontRef idx="minor">
+            <a:schemeClr val="dk1"/>
+          </a:fontRef>
+        </p:style>
+        <p:txBody>
+          <a:bodyPr rtlCol="0" anchor="ctr"/>
+          <a:lstStyle/>
+          <a:p>
+            <a:pPr algn="ctr"/>
+            <a:endParaRPr lang="en-US">
+              <a:ln>
+                <a:solidFill>
+                  <a:schemeClr val="tx1"/>
+                </a:solidFill>
+              </a:ln>
+              <a:solidFill>
+                <a:schemeClr val="bg1"/>
+              </a:solidFill>
+            </a:endParaRPr>
+          </a:p>
+        </p:txBody>
+      </p:sp>
     </p:spTree>
     <p:extLst>
       <p:ext uri="{BB962C8B-B14F-4D97-AF65-F5344CB8AC3E}">
-        <p14:creationId xmlns:p14="http://schemas.microsoft.com/office/powerpoint/2010/main" val="2467334427"/>
+        <p14:creationId xmlns:p14="http://schemas.microsoft.com/office/powerpoint/2010/main" val="4069737076"/>
+      </p:ext>
+    </p:extLst>
+  </p:cSld>
+  <p:clrMapOvr>
+    <a:masterClrMapping/>
+  </p:clrMapOvr>
+</p:sld>
+</file>
+
+<file path=ppt/slides/slide14.xml><?xml version="1.0" encoding="utf-8"?>
+<p:sld xmlns:a="http://schemas.openxmlformats.org/drawingml/2006/main" xmlns:r="http://schemas.openxmlformats.org/officeDocument/2006/relationships" xmlns:p="http://schemas.openxmlformats.org/presentationml/2006/main">
+  <p:cSld>
+    <p:spTree>
+      <p:nvGrpSpPr>
+        <p:cNvPr id="1" name=""/>
+        <p:cNvGrpSpPr/>
+        <p:nvPr/>
+      </p:nvGrpSpPr>
+      <p:grpSpPr>
+        <a:xfrm>
+          <a:off x="0" y="0"/>
+          <a:ext cx="0" cy="0"/>
+          <a:chOff x="0" y="0"/>
+          <a:chExt cx="0" cy="0"/>
+        </a:xfrm>
+      </p:grpSpPr>
+      <p:sp>
+        <p:nvSpPr>
+          <p:cNvPr id="11" name="Oval 10">
+            <a:extLst>
+              <a:ext uri="{FF2B5EF4-FFF2-40B4-BE49-F238E27FC236}">
+                <a16:creationId xmlns:a16="http://schemas.microsoft.com/office/drawing/2014/main" id="{4FDEA4F1-B0BB-A117-78D7-3E085C6A7636}"/>
+              </a:ext>
+            </a:extLst>
+          </p:cNvPr>
+          <p:cNvSpPr/>
+          <p:nvPr/>
+        </p:nvSpPr>
+        <p:spPr>
+          <a:xfrm>
+            <a:off x="5185195" y="631196"/>
+            <a:ext cx="1844040" cy="1197601"/>
+          </a:xfrm>
+          <a:prstGeom prst="ellipse">
+            <a:avLst/>
+          </a:prstGeom>
+          <a:solidFill>
+            <a:schemeClr val="bg2"/>
+          </a:solidFill>
+          <a:ln>
+            <a:solidFill>
+              <a:schemeClr val="tx1"/>
+            </a:solidFill>
+          </a:ln>
+        </p:spPr>
+        <p:style>
+          <a:lnRef idx="2">
+            <a:schemeClr val="dk1"/>
+          </a:lnRef>
+          <a:fillRef idx="1">
+            <a:schemeClr val="lt1"/>
+          </a:fillRef>
+          <a:effectRef idx="0">
+            <a:schemeClr val="dk1"/>
+          </a:effectRef>
+          <a:fontRef idx="minor">
+            <a:schemeClr val="dk1"/>
+          </a:fontRef>
+        </p:style>
+        <p:txBody>
+          <a:bodyPr rtlCol="0" anchor="ctr"/>
+          <a:lstStyle/>
+          <a:p>
+            <a:pPr algn="ctr"/>
+            <a:r>
+              <a:rPr lang="en-US" sz="2000">
+                <a:solidFill>
+                  <a:schemeClr val="tx1"/>
+                </a:solidFill>
+                <a:latin typeface="Times New Roman" panose="02020603050405020304" pitchFamily="18" charset="0"/>
+                <a:cs typeface="Times New Roman" panose="02020603050405020304" pitchFamily="18" charset="0"/>
+              </a:rPr>
+              <a:t>Bắt đầu</a:t>
+            </a:r>
+          </a:p>
+        </p:txBody>
+      </p:sp>
+      <p:sp>
+        <p:nvSpPr>
+          <p:cNvPr id="12" name="Oval 11">
+            <a:extLst>
+              <a:ext uri="{FF2B5EF4-FFF2-40B4-BE49-F238E27FC236}">
+                <a16:creationId xmlns:a16="http://schemas.microsoft.com/office/drawing/2014/main" id="{09B7C0BC-2D74-53AB-D09E-8386636DD11C}"/>
+              </a:ext>
+            </a:extLst>
+          </p:cNvPr>
+          <p:cNvSpPr/>
+          <p:nvPr/>
+        </p:nvSpPr>
+        <p:spPr>
+          <a:xfrm>
+            <a:off x="5173976" y="5029201"/>
+            <a:ext cx="1844040" cy="1197833"/>
+          </a:xfrm>
+          <a:prstGeom prst="ellipse">
+            <a:avLst/>
+          </a:prstGeom>
+          <a:solidFill>
+            <a:schemeClr val="bg2"/>
+          </a:solidFill>
+          <a:ln>
+            <a:solidFill>
+              <a:schemeClr val="tx1"/>
+            </a:solidFill>
+          </a:ln>
+        </p:spPr>
+        <p:style>
+          <a:lnRef idx="2">
+            <a:schemeClr val="dk1"/>
+          </a:lnRef>
+          <a:fillRef idx="1">
+            <a:schemeClr val="lt1"/>
+          </a:fillRef>
+          <a:effectRef idx="0">
+            <a:schemeClr val="dk1"/>
+          </a:effectRef>
+          <a:fontRef idx="minor">
+            <a:schemeClr val="dk1"/>
+          </a:fontRef>
+        </p:style>
+        <p:txBody>
+          <a:bodyPr rtlCol="0" anchor="ctr"/>
+          <a:lstStyle/>
+          <a:p>
+            <a:pPr algn="ctr"/>
+            <a:r>
+              <a:rPr lang="en-US" sz="2000">
+                <a:solidFill>
+                  <a:schemeClr val="tx1"/>
+                </a:solidFill>
+                <a:latin typeface="Times New Roman" panose="02020603050405020304" pitchFamily="18" charset="0"/>
+                <a:cs typeface="Times New Roman" panose="02020603050405020304" pitchFamily="18" charset="0"/>
+              </a:rPr>
+              <a:t>Kết thúc</a:t>
+            </a:r>
+          </a:p>
+        </p:txBody>
+      </p:sp>
+      <p:sp>
+        <p:nvSpPr>
+          <p:cNvPr id="13" name="Rectangle: Rounded Corners 12">
+            <a:extLst>
+              <a:ext uri="{FF2B5EF4-FFF2-40B4-BE49-F238E27FC236}">
+                <a16:creationId xmlns:a16="http://schemas.microsoft.com/office/drawing/2014/main" id="{C8AE0F51-58AB-1B4C-3FEC-B33476038955}"/>
+              </a:ext>
+            </a:extLst>
+          </p:cNvPr>
+          <p:cNvSpPr/>
+          <p:nvPr/>
+        </p:nvSpPr>
+        <p:spPr>
+          <a:xfrm>
+            <a:off x="4666338" y="2830471"/>
+            <a:ext cx="2859315" cy="1197057"/>
+          </a:xfrm>
+          <a:prstGeom prst="roundRect">
+            <a:avLst/>
+          </a:prstGeom>
+          <a:solidFill>
+            <a:schemeClr val="bg2"/>
+          </a:solidFill>
+          <a:ln>
+            <a:solidFill>
+              <a:schemeClr val="tx1"/>
+            </a:solidFill>
+          </a:ln>
+        </p:spPr>
+        <p:style>
+          <a:lnRef idx="2">
+            <a:schemeClr val="accent1">
+              <a:shade val="15000"/>
+            </a:schemeClr>
+          </a:lnRef>
+          <a:fillRef idx="1">
+            <a:schemeClr val="accent1"/>
+          </a:fillRef>
+          <a:effectRef idx="0">
+            <a:schemeClr val="accent1"/>
+          </a:effectRef>
+          <a:fontRef idx="minor">
+            <a:schemeClr val="lt1"/>
+          </a:fontRef>
+        </p:style>
+        <p:txBody>
+          <a:bodyPr rtlCol="0" anchor="ctr"/>
+          <a:lstStyle/>
+          <a:p>
+            <a:pPr algn="ctr"/>
+            <a:r>
+              <a:rPr lang="en-US" sz="2000">
+                <a:solidFill>
+                  <a:schemeClr val="tx1"/>
+                </a:solidFill>
+                <a:latin typeface="Times New Roman" panose="02020603050405020304" pitchFamily="18" charset="0"/>
+                <a:cs typeface="Times New Roman" panose="02020603050405020304" pitchFamily="18" charset="0"/>
+              </a:rPr>
+              <a:t>LLM sinh phản hồi chứa starter</a:t>
+            </a:r>
+          </a:p>
+        </p:txBody>
+      </p:sp>
+      <p:sp>
+        <p:nvSpPr>
+          <p:cNvPr id="15" name="Rectangle: Rounded Corners 14">
+            <a:extLst>
+              <a:ext uri="{FF2B5EF4-FFF2-40B4-BE49-F238E27FC236}">
+                <a16:creationId xmlns:a16="http://schemas.microsoft.com/office/drawing/2014/main" id="{D317227E-AAC0-E24C-93CA-008C19A5D14D}"/>
+              </a:ext>
+            </a:extLst>
+          </p:cNvPr>
+          <p:cNvSpPr/>
+          <p:nvPr/>
+        </p:nvSpPr>
+        <p:spPr>
+          <a:xfrm>
+            <a:off x="8487556" y="631740"/>
+            <a:ext cx="2859315" cy="1197057"/>
+          </a:xfrm>
+          <a:prstGeom prst="roundRect">
+            <a:avLst/>
+          </a:prstGeom>
+          <a:solidFill>
+            <a:schemeClr val="bg2"/>
+          </a:solidFill>
+          <a:ln>
+            <a:solidFill>
+              <a:schemeClr val="tx1"/>
+            </a:solidFill>
+          </a:ln>
+        </p:spPr>
+        <p:style>
+          <a:lnRef idx="2">
+            <a:schemeClr val="accent1">
+              <a:shade val="15000"/>
+            </a:schemeClr>
+          </a:lnRef>
+          <a:fillRef idx="1">
+            <a:schemeClr val="accent1"/>
+          </a:fillRef>
+          <a:effectRef idx="0">
+            <a:schemeClr val="accent1"/>
+          </a:effectRef>
+          <a:fontRef idx="minor">
+            <a:schemeClr val="lt1"/>
+          </a:fontRef>
+        </p:style>
+        <p:txBody>
+          <a:bodyPr rtlCol="0" anchor="ctr"/>
+          <a:lstStyle/>
+          <a:p>
+            <a:pPr algn="ctr"/>
+            <a:r>
+              <a:rPr lang="en-US" sz="2000">
+                <a:solidFill>
+                  <a:schemeClr val="tx1"/>
+                </a:solidFill>
+                <a:latin typeface="Times New Roman" panose="02020603050405020304" pitchFamily="18" charset="0"/>
+                <a:cs typeface="Times New Roman" panose="02020603050405020304" pitchFamily="18" charset="0"/>
+              </a:rPr>
+              <a:t>Người dùng khởi tạo phiên chat mới</a:t>
+            </a:r>
+          </a:p>
+        </p:txBody>
+      </p:sp>
+      <p:sp>
+        <p:nvSpPr>
+          <p:cNvPr id="17" name="Rectangle: Rounded Corners 16">
+            <a:extLst>
+              <a:ext uri="{FF2B5EF4-FFF2-40B4-BE49-F238E27FC236}">
+                <a16:creationId xmlns:a16="http://schemas.microsoft.com/office/drawing/2014/main" id="{0123D8A0-33A1-E454-06A7-B3436998946D}"/>
+              </a:ext>
+            </a:extLst>
+          </p:cNvPr>
+          <p:cNvSpPr/>
+          <p:nvPr/>
+        </p:nvSpPr>
+        <p:spPr>
+          <a:xfrm>
+            <a:off x="856339" y="5029201"/>
+            <a:ext cx="2859315" cy="1197057"/>
+          </a:xfrm>
+          <a:prstGeom prst="roundRect">
+            <a:avLst/>
+          </a:prstGeom>
+          <a:solidFill>
+            <a:schemeClr val="bg2"/>
+          </a:solidFill>
+          <a:ln>
+            <a:solidFill>
+              <a:schemeClr val="tx1"/>
+            </a:solidFill>
+          </a:ln>
+        </p:spPr>
+        <p:style>
+          <a:lnRef idx="2">
+            <a:schemeClr val="accent1">
+              <a:shade val="15000"/>
+            </a:schemeClr>
+          </a:lnRef>
+          <a:fillRef idx="1">
+            <a:schemeClr val="accent1"/>
+          </a:fillRef>
+          <a:effectRef idx="0">
+            <a:schemeClr val="accent1"/>
+          </a:effectRef>
+          <a:fontRef idx="minor">
+            <a:schemeClr val="lt1"/>
+          </a:fontRef>
+        </p:style>
+        <p:txBody>
+          <a:bodyPr rtlCol="0" anchor="ctr"/>
+          <a:lstStyle/>
+          <a:p>
+            <a:pPr algn="ctr"/>
+            <a:r>
+              <a:rPr lang="en-US" sz="2000">
+                <a:solidFill>
+                  <a:schemeClr val="tx1"/>
+                </a:solidFill>
+                <a:latin typeface="Times New Roman" panose="02020603050405020304" pitchFamily="18" charset="0"/>
+                <a:cs typeface="Times New Roman" panose="02020603050405020304" pitchFamily="18" charset="0"/>
+              </a:rPr>
+              <a:t>Hiển thị starter</a:t>
+            </a:r>
+          </a:p>
+          <a:p>
+            <a:pPr algn="ctr"/>
+            <a:r>
+              <a:rPr lang="en-US" sz="2000">
+                <a:solidFill>
+                  <a:schemeClr val="tx1"/>
+                </a:solidFill>
+                <a:latin typeface="Times New Roman" panose="02020603050405020304" pitchFamily="18" charset="0"/>
+                <a:cs typeface="Times New Roman" panose="02020603050405020304" pitchFamily="18" charset="0"/>
+              </a:rPr>
+              <a:t>lên UI</a:t>
+            </a:r>
+          </a:p>
+        </p:txBody>
+      </p:sp>
+      <p:cxnSp>
+        <p:nvCxnSpPr>
+          <p:cNvPr id="20" name="Straight Arrow Connector 19">
+            <a:extLst>
+              <a:ext uri="{FF2B5EF4-FFF2-40B4-BE49-F238E27FC236}">
+                <a16:creationId xmlns:a16="http://schemas.microsoft.com/office/drawing/2014/main" id="{9F90AE46-2703-BD7D-807A-4F92311748D9}"/>
+              </a:ext>
+            </a:extLst>
+          </p:cNvPr>
+          <p:cNvCxnSpPr>
+            <a:stCxn id="11" idx="6"/>
+            <a:endCxn id="15" idx="1"/>
+          </p:cNvCxnSpPr>
+          <p:nvPr/>
+        </p:nvCxnSpPr>
+        <p:spPr>
+          <a:xfrm>
+            <a:off x="7029235" y="1229997"/>
+            <a:ext cx="1458321" cy="272"/>
+          </a:xfrm>
+          <a:prstGeom prst="straightConnector1">
+            <a:avLst/>
+          </a:prstGeom>
+          <a:ln>
+            <a:tailEnd type="triangle"/>
+          </a:ln>
+        </p:spPr>
+        <p:style>
+          <a:lnRef idx="2">
+            <a:schemeClr val="dk1"/>
+          </a:lnRef>
+          <a:fillRef idx="0">
+            <a:schemeClr val="dk1"/>
+          </a:fillRef>
+          <a:effectRef idx="1">
+            <a:schemeClr val="dk1"/>
+          </a:effectRef>
+          <a:fontRef idx="minor">
+            <a:schemeClr val="tx1"/>
+          </a:fontRef>
+        </p:style>
+      </p:cxnSp>
+      <p:cxnSp>
+        <p:nvCxnSpPr>
+          <p:cNvPr id="22" name="Straight Arrow Connector 21">
+            <a:extLst>
+              <a:ext uri="{FF2B5EF4-FFF2-40B4-BE49-F238E27FC236}">
+                <a16:creationId xmlns:a16="http://schemas.microsoft.com/office/drawing/2014/main" id="{8C172BC6-0DED-D41B-8E59-DB9AA2B582A4}"/>
+              </a:ext>
+            </a:extLst>
+          </p:cNvPr>
+          <p:cNvCxnSpPr>
+            <a:cxnSpLocks/>
+            <a:stCxn id="15" idx="2"/>
+            <a:endCxn id="43" idx="0"/>
+          </p:cNvCxnSpPr>
+          <p:nvPr/>
+        </p:nvCxnSpPr>
+        <p:spPr>
+          <a:xfrm>
+            <a:off x="9917214" y="1828797"/>
+            <a:ext cx="0" cy="1001673"/>
+          </a:xfrm>
+          <a:prstGeom prst="straightConnector1">
+            <a:avLst/>
+          </a:prstGeom>
+          <a:ln>
+            <a:tailEnd type="triangle"/>
+          </a:ln>
+        </p:spPr>
+        <p:style>
+          <a:lnRef idx="2">
+            <a:schemeClr val="dk1"/>
+          </a:lnRef>
+          <a:fillRef idx="0">
+            <a:schemeClr val="dk1"/>
+          </a:fillRef>
+          <a:effectRef idx="1">
+            <a:schemeClr val="dk1"/>
+          </a:effectRef>
+          <a:fontRef idx="minor">
+            <a:schemeClr val="tx1"/>
+          </a:fontRef>
+        </p:style>
+      </p:cxnSp>
+      <p:cxnSp>
+        <p:nvCxnSpPr>
+          <p:cNvPr id="28" name="Straight Arrow Connector 27">
+            <a:extLst>
+              <a:ext uri="{FF2B5EF4-FFF2-40B4-BE49-F238E27FC236}">
+                <a16:creationId xmlns:a16="http://schemas.microsoft.com/office/drawing/2014/main" id="{8D909A49-C42A-44F6-AFE7-C53802194A7D}"/>
+              </a:ext>
+            </a:extLst>
+          </p:cNvPr>
+          <p:cNvCxnSpPr>
+            <a:cxnSpLocks/>
+            <a:stCxn id="44" idx="2"/>
+            <a:endCxn id="17" idx="0"/>
+          </p:cNvCxnSpPr>
+          <p:nvPr/>
+        </p:nvCxnSpPr>
+        <p:spPr>
+          <a:xfrm>
+            <a:off x="2285997" y="4027526"/>
+            <a:ext cx="0" cy="1001675"/>
+          </a:xfrm>
+          <a:prstGeom prst="straightConnector1">
+            <a:avLst/>
+          </a:prstGeom>
+          <a:ln>
+            <a:tailEnd type="triangle"/>
+          </a:ln>
+        </p:spPr>
+        <p:style>
+          <a:lnRef idx="2">
+            <a:schemeClr val="dk1"/>
+          </a:lnRef>
+          <a:fillRef idx="0">
+            <a:schemeClr val="dk1"/>
+          </a:fillRef>
+          <a:effectRef idx="1">
+            <a:schemeClr val="dk1"/>
+          </a:effectRef>
+          <a:fontRef idx="minor">
+            <a:schemeClr val="tx1"/>
+          </a:fontRef>
+        </p:style>
+      </p:cxnSp>
+      <p:cxnSp>
+        <p:nvCxnSpPr>
+          <p:cNvPr id="30" name="Straight Arrow Connector 29">
+            <a:extLst>
+              <a:ext uri="{FF2B5EF4-FFF2-40B4-BE49-F238E27FC236}">
+                <a16:creationId xmlns:a16="http://schemas.microsoft.com/office/drawing/2014/main" id="{D19DE6D9-EBD7-8193-C81B-789E8F9FF72F}"/>
+              </a:ext>
+            </a:extLst>
+          </p:cNvPr>
+          <p:cNvCxnSpPr>
+            <a:stCxn id="17" idx="3"/>
+            <a:endCxn id="12" idx="2"/>
+          </p:cNvCxnSpPr>
+          <p:nvPr/>
+        </p:nvCxnSpPr>
+        <p:spPr>
+          <a:xfrm>
+            <a:off x="3715654" y="5627730"/>
+            <a:ext cx="1458322" cy="388"/>
+          </a:xfrm>
+          <a:prstGeom prst="straightConnector1">
+            <a:avLst/>
+          </a:prstGeom>
+          <a:ln>
+            <a:tailEnd type="triangle"/>
+          </a:ln>
+        </p:spPr>
+        <p:style>
+          <a:lnRef idx="2">
+            <a:schemeClr val="dk1"/>
+          </a:lnRef>
+          <a:fillRef idx="0">
+            <a:schemeClr val="dk1"/>
+          </a:fillRef>
+          <a:effectRef idx="1">
+            <a:schemeClr val="dk1"/>
+          </a:effectRef>
+          <a:fontRef idx="minor">
+            <a:schemeClr val="tx1"/>
+          </a:fontRef>
+        </p:style>
+      </p:cxnSp>
+      <p:sp>
+        <p:nvSpPr>
+          <p:cNvPr id="31" name="TextBox 30">
+            <a:extLst>
+              <a:ext uri="{FF2B5EF4-FFF2-40B4-BE49-F238E27FC236}">
+                <a16:creationId xmlns:a16="http://schemas.microsoft.com/office/drawing/2014/main" id="{D4591EC1-A315-E9A3-C8EE-CE55F8D5096D}"/>
+              </a:ext>
+            </a:extLst>
+          </p:cNvPr>
+          <p:cNvSpPr txBox="1"/>
+          <p:nvPr/>
+        </p:nvSpPr>
+        <p:spPr>
+          <a:xfrm>
+            <a:off x="7029234" y="860664"/>
+            <a:ext cx="453970" cy="369332"/>
+          </a:xfrm>
+          <a:prstGeom prst="rect">
+            <a:avLst/>
+          </a:prstGeom>
+          <a:noFill/>
+        </p:spPr>
+        <p:txBody>
+          <a:bodyPr wrap="none" rtlCol="0">
+            <a:spAutoFit/>
+          </a:bodyPr>
+          <a:lstStyle/>
+          <a:p>
+            <a:r>
+              <a:rPr lang="en-US">
+                <a:latin typeface="Times New Roman" panose="02020603050405020304" pitchFamily="18" charset="0"/>
+                <a:cs typeface="Times New Roman" panose="02020603050405020304" pitchFamily="18" charset="0"/>
+              </a:rPr>
+              <a:t>(1)</a:t>
+            </a:r>
+          </a:p>
+        </p:txBody>
+      </p:sp>
+      <p:sp>
+        <p:nvSpPr>
+          <p:cNvPr id="32" name="TextBox 31">
+            <a:extLst>
+              <a:ext uri="{FF2B5EF4-FFF2-40B4-BE49-F238E27FC236}">
+                <a16:creationId xmlns:a16="http://schemas.microsoft.com/office/drawing/2014/main" id="{D536CA1C-78CE-2C38-57AD-6682E4F9A1E2}"/>
+              </a:ext>
+            </a:extLst>
+          </p:cNvPr>
+          <p:cNvSpPr txBox="1"/>
+          <p:nvPr/>
+        </p:nvSpPr>
+        <p:spPr>
+          <a:xfrm>
+            <a:off x="9463243" y="1828797"/>
+            <a:ext cx="453970" cy="369332"/>
+          </a:xfrm>
+          <a:prstGeom prst="rect">
+            <a:avLst/>
+          </a:prstGeom>
+          <a:noFill/>
+        </p:spPr>
+        <p:txBody>
+          <a:bodyPr wrap="none" rtlCol="0">
+            <a:spAutoFit/>
+          </a:bodyPr>
+          <a:lstStyle/>
+          <a:p>
+            <a:r>
+              <a:rPr lang="en-US">
+                <a:latin typeface="Times New Roman" panose="02020603050405020304" pitchFamily="18" charset="0"/>
+                <a:cs typeface="Times New Roman" panose="02020603050405020304" pitchFamily="18" charset="0"/>
+              </a:rPr>
+              <a:t>(2)</a:t>
+            </a:r>
+          </a:p>
+        </p:txBody>
+      </p:sp>
+      <p:sp>
+        <p:nvSpPr>
+          <p:cNvPr id="34" name="TextBox 33">
+            <a:extLst>
+              <a:ext uri="{FF2B5EF4-FFF2-40B4-BE49-F238E27FC236}">
+                <a16:creationId xmlns:a16="http://schemas.microsoft.com/office/drawing/2014/main" id="{66FD61F7-9FBD-59BA-AD74-E60AB3852FF2}"/>
+              </a:ext>
+            </a:extLst>
+          </p:cNvPr>
+          <p:cNvSpPr txBox="1"/>
+          <p:nvPr/>
+        </p:nvSpPr>
+        <p:spPr>
+          <a:xfrm>
+            <a:off x="8033586" y="3428997"/>
+            <a:ext cx="453970" cy="369332"/>
+          </a:xfrm>
+          <a:prstGeom prst="rect">
+            <a:avLst/>
+          </a:prstGeom>
+          <a:noFill/>
+        </p:spPr>
+        <p:txBody>
+          <a:bodyPr wrap="none" rtlCol="0">
+            <a:spAutoFit/>
+          </a:bodyPr>
+          <a:lstStyle/>
+          <a:p>
+            <a:r>
+              <a:rPr lang="en-US">
+                <a:latin typeface="Times New Roman" panose="02020603050405020304" pitchFamily="18" charset="0"/>
+                <a:cs typeface="Times New Roman" panose="02020603050405020304" pitchFamily="18" charset="0"/>
+              </a:rPr>
+              <a:t>(3)</a:t>
+            </a:r>
+          </a:p>
+        </p:txBody>
+      </p:sp>
+      <p:sp>
+        <p:nvSpPr>
+          <p:cNvPr id="36" name="TextBox 35">
+            <a:extLst>
+              <a:ext uri="{FF2B5EF4-FFF2-40B4-BE49-F238E27FC236}">
+                <a16:creationId xmlns:a16="http://schemas.microsoft.com/office/drawing/2014/main" id="{D55C5393-3635-CDF3-570F-333BB613AFB5}"/>
+              </a:ext>
+            </a:extLst>
+          </p:cNvPr>
+          <p:cNvSpPr txBox="1"/>
+          <p:nvPr/>
+        </p:nvSpPr>
+        <p:spPr>
+          <a:xfrm>
+            <a:off x="3715654" y="5258397"/>
+            <a:ext cx="453970" cy="369332"/>
+          </a:xfrm>
+          <a:prstGeom prst="rect">
+            <a:avLst/>
+          </a:prstGeom>
+          <a:noFill/>
+        </p:spPr>
+        <p:txBody>
+          <a:bodyPr wrap="none" rtlCol="0">
+            <a:spAutoFit/>
+          </a:bodyPr>
+          <a:lstStyle/>
+          <a:p>
+            <a:r>
+              <a:rPr lang="en-US">
+                <a:latin typeface="Times New Roman" panose="02020603050405020304" pitchFamily="18" charset="0"/>
+                <a:cs typeface="Times New Roman" panose="02020603050405020304" pitchFamily="18" charset="0"/>
+              </a:rPr>
+              <a:t>(6)</a:t>
+            </a:r>
+          </a:p>
+        </p:txBody>
+      </p:sp>
+      <p:sp>
+        <p:nvSpPr>
+          <p:cNvPr id="43" name="Rectangle: Rounded Corners 42">
+            <a:extLst>
+              <a:ext uri="{FF2B5EF4-FFF2-40B4-BE49-F238E27FC236}">
+                <a16:creationId xmlns:a16="http://schemas.microsoft.com/office/drawing/2014/main" id="{B7F45430-8CD4-C3FA-8071-519AB313316B}"/>
+              </a:ext>
+            </a:extLst>
+          </p:cNvPr>
+          <p:cNvSpPr/>
+          <p:nvPr/>
+        </p:nvSpPr>
+        <p:spPr>
+          <a:xfrm>
+            <a:off x="8487556" y="2830470"/>
+            <a:ext cx="2859315" cy="1197057"/>
+          </a:xfrm>
+          <a:prstGeom prst="roundRect">
+            <a:avLst/>
+          </a:prstGeom>
+          <a:solidFill>
+            <a:schemeClr val="bg2"/>
+          </a:solidFill>
+          <a:ln>
+            <a:solidFill>
+              <a:schemeClr val="tx1"/>
+            </a:solidFill>
+          </a:ln>
+        </p:spPr>
+        <p:style>
+          <a:lnRef idx="2">
+            <a:schemeClr val="accent1">
+              <a:shade val="15000"/>
+            </a:schemeClr>
+          </a:lnRef>
+          <a:fillRef idx="1">
+            <a:schemeClr val="accent1"/>
+          </a:fillRef>
+          <a:effectRef idx="0">
+            <a:schemeClr val="accent1"/>
+          </a:effectRef>
+          <a:fontRef idx="minor">
+            <a:schemeClr val="lt1"/>
+          </a:fontRef>
+        </p:style>
+        <p:txBody>
+          <a:bodyPr rtlCol="0" anchor="ctr"/>
+          <a:lstStyle/>
+          <a:p>
+            <a:pPr algn="ctr"/>
+            <a:r>
+              <a:rPr lang="en-US" sz="2000">
+                <a:solidFill>
+                  <a:schemeClr val="tx1"/>
+                </a:solidFill>
+                <a:latin typeface="Times New Roman" panose="02020603050405020304" pitchFamily="18" charset="0"/>
+                <a:cs typeface="Times New Roman" panose="02020603050405020304" pitchFamily="18" charset="0"/>
+              </a:rPr>
+              <a:t>Hệ thống tự động gửi</a:t>
+            </a:r>
+          </a:p>
+          <a:p>
+            <a:pPr algn="ctr"/>
+            <a:r>
+              <a:rPr lang="en-US" sz="2000">
+                <a:solidFill>
+                  <a:schemeClr val="tx1"/>
+                </a:solidFill>
+                <a:latin typeface="Times New Roman" panose="02020603050405020304" pitchFamily="18" charset="0"/>
+                <a:cs typeface="Times New Roman" panose="02020603050405020304" pitchFamily="18" charset="0"/>
+              </a:rPr>
+              <a:t>prompt đến LLM</a:t>
+            </a:r>
+          </a:p>
+        </p:txBody>
+      </p:sp>
+      <p:sp>
+        <p:nvSpPr>
+          <p:cNvPr id="44" name="Rectangle: Rounded Corners 43">
+            <a:extLst>
+              <a:ext uri="{FF2B5EF4-FFF2-40B4-BE49-F238E27FC236}">
+                <a16:creationId xmlns:a16="http://schemas.microsoft.com/office/drawing/2014/main" id="{F8F78AFC-BB0D-EB48-BEA4-B67EB36EA154}"/>
+              </a:ext>
+            </a:extLst>
+          </p:cNvPr>
+          <p:cNvSpPr/>
+          <p:nvPr/>
+        </p:nvSpPr>
+        <p:spPr>
+          <a:xfrm>
+            <a:off x="856339" y="2830469"/>
+            <a:ext cx="2859315" cy="1197057"/>
+          </a:xfrm>
+          <a:prstGeom prst="roundRect">
+            <a:avLst/>
+          </a:prstGeom>
+          <a:solidFill>
+            <a:schemeClr val="bg2"/>
+          </a:solidFill>
+          <a:ln>
+            <a:solidFill>
+              <a:schemeClr val="tx1"/>
+            </a:solidFill>
+          </a:ln>
+        </p:spPr>
+        <p:style>
+          <a:lnRef idx="2">
+            <a:schemeClr val="accent1">
+              <a:shade val="15000"/>
+            </a:schemeClr>
+          </a:lnRef>
+          <a:fillRef idx="1">
+            <a:schemeClr val="accent1"/>
+          </a:fillRef>
+          <a:effectRef idx="0">
+            <a:schemeClr val="accent1"/>
+          </a:effectRef>
+          <a:fontRef idx="minor">
+            <a:schemeClr val="lt1"/>
+          </a:fontRef>
+        </p:style>
+        <p:txBody>
+          <a:bodyPr rtlCol="0" anchor="ctr"/>
+          <a:lstStyle/>
+          <a:p>
+            <a:pPr algn="ctr"/>
+            <a:r>
+              <a:rPr lang="en-US" sz="2000">
+                <a:solidFill>
+                  <a:schemeClr val="tx1"/>
+                </a:solidFill>
+                <a:latin typeface="Times New Roman" panose="02020603050405020304" pitchFamily="18" charset="0"/>
+                <a:cs typeface="Times New Roman" panose="02020603050405020304" pitchFamily="18" charset="0"/>
+              </a:rPr>
+              <a:t>Trích xuất các starter từ phản hồi</a:t>
+            </a:r>
+          </a:p>
+        </p:txBody>
+      </p:sp>
+      <p:cxnSp>
+        <p:nvCxnSpPr>
+          <p:cNvPr id="49" name="Straight Arrow Connector 48">
+            <a:extLst>
+              <a:ext uri="{FF2B5EF4-FFF2-40B4-BE49-F238E27FC236}">
+                <a16:creationId xmlns:a16="http://schemas.microsoft.com/office/drawing/2014/main" id="{7A39C485-62B2-30C4-BCD7-091588AA65E2}"/>
+              </a:ext>
+            </a:extLst>
+          </p:cNvPr>
+          <p:cNvCxnSpPr>
+            <a:cxnSpLocks/>
+            <a:stCxn id="43" idx="1"/>
+            <a:endCxn id="13" idx="3"/>
+          </p:cNvCxnSpPr>
+          <p:nvPr/>
+        </p:nvCxnSpPr>
+        <p:spPr>
+          <a:xfrm flipH="1">
+            <a:off x="7525653" y="3428999"/>
+            <a:ext cx="961903" cy="1"/>
+          </a:xfrm>
+          <a:prstGeom prst="straightConnector1">
+            <a:avLst/>
+          </a:prstGeom>
+          <a:ln>
+            <a:tailEnd type="triangle"/>
+          </a:ln>
+        </p:spPr>
+        <p:style>
+          <a:lnRef idx="2">
+            <a:schemeClr val="dk1"/>
+          </a:lnRef>
+          <a:fillRef idx="0">
+            <a:schemeClr val="dk1"/>
+          </a:fillRef>
+          <a:effectRef idx="1">
+            <a:schemeClr val="dk1"/>
+          </a:effectRef>
+          <a:fontRef idx="minor">
+            <a:schemeClr val="tx1"/>
+          </a:fontRef>
+        </p:style>
+      </p:cxnSp>
+      <p:cxnSp>
+        <p:nvCxnSpPr>
+          <p:cNvPr id="52" name="Straight Arrow Connector 51">
+            <a:extLst>
+              <a:ext uri="{FF2B5EF4-FFF2-40B4-BE49-F238E27FC236}">
+                <a16:creationId xmlns:a16="http://schemas.microsoft.com/office/drawing/2014/main" id="{03FECA1F-3DC5-3C13-ECBC-7CCAECB02F61}"/>
+              </a:ext>
+            </a:extLst>
+          </p:cNvPr>
+          <p:cNvCxnSpPr>
+            <a:cxnSpLocks/>
+            <a:stCxn id="13" idx="1"/>
+            <a:endCxn id="44" idx="3"/>
+          </p:cNvCxnSpPr>
+          <p:nvPr/>
+        </p:nvCxnSpPr>
+        <p:spPr>
+          <a:xfrm flipH="1" flipV="1">
+            <a:off x="3715654" y="3428998"/>
+            <a:ext cx="950684" cy="2"/>
+          </a:xfrm>
+          <a:prstGeom prst="straightConnector1">
+            <a:avLst/>
+          </a:prstGeom>
+          <a:ln>
+            <a:tailEnd type="triangle"/>
+          </a:ln>
+        </p:spPr>
+        <p:style>
+          <a:lnRef idx="2">
+            <a:schemeClr val="dk1"/>
+          </a:lnRef>
+          <a:fillRef idx="0">
+            <a:schemeClr val="dk1"/>
+          </a:fillRef>
+          <a:effectRef idx="1">
+            <a:schemeClr val="dk1"/>
+          </a:effectRef>
+          <a:fontRef idx="minor">
+            <a:schemeClr val="tx1"/>
+          </a:fontRef>
+        </p:style>
+      </p:cxnSp>
+      <p:sp>
+        <p:nvSpPr>
+          <p:cNvPr id="55" name="TextBox 54">
+            <a:extLst>
+              <a:ext uri="{FF2B5EF4-FFF2-40B4-BE49-F238E27FC236}">
+                <a16:creationId xmlns:a16="http://schemas.microsoft.com/office/drawing/2014/main" id="{37913B3C-B887-5538-E7FB-8E789A9F2CAF}"/>
+              </a:ext>
+            </a:extLst>
+          </p:cNvPr>
+          <p:cNvSpPr txBox="1"/>
+          <p:nvPr/>
+        </p:nvSpPr>
+        <p:spPr>
+          <a:xfrm>
+            <a:off x="4217830" y="3428997"/>
+            <a:ext cx="453970" cy="369332"/>
+          </a:xfrm>
+          <a:prstGeom prst="rect">
+            <a:avLst/>
+          </a:prstGeom>
+          <a:noFill/>
+        </p:spPr>
+        <p:txBody>
+          <a:bodyPr wrap="none" rtlCol="0">
+            <a:spAutoFit/>
+          </a:bodyPr>
+          <a:lstStyle/>
+          <a:p>
+            <a:r>
+              <a:rPr lang="en-US">
+                <a:latin typeface="Times New Roman" panose="02020603050405020304" pitchFamily="18" charset="0"/>
+                <a:cs typeface="Times New Roman" panose="02020603050405020304" pitchFamily="18" charset="0"/>
+              </a:rPr>
+              <a:t>(4)</a:t>
+            </a:r>
+          </a:p>
+        </p:txBody>
+      </p:sp>
+      <p:sp>
+        <p:nvSpPr>
+          <p:cNvPr id="56" name="TextBox 55">
+            <a:extLst>
+              <a:ext uri="{FF2B5EF4-FFF2-40B4-BE49-F238E27FC236}">
+                <a16:creationId xmlns:a16="http://schemas.microsoft.com/office/drawing/2014/main" id="{E4F82C71-1913-D952-7A1C-7E184758F9B0}"/>
+              </a:ext>
+            </a:extLst>
+          </p:cNvPr>
+          <p:cNvSpPr txBox="1"/>
+          <p:nvPr/>
+        </p:nvSpPr>
+        <p:spPr>
+          <a:xfrm>
+            <a:off x="2285996" y="4027526"/>
+            <a:ext cx="453970" cy="369332"/>
+          </a:xfrm>
+          <a:prstGeom prst="rect">
+            <a:avLst/>
+          </a:prstGeom>
+          <a:noFill/>
+        </p:spPr>
+        <p:txBody>
+          <a:bodyPr wrap="none" rtlCol="0">
+            <a:spAutoFit/>
+          </a:bodyPr>
+          <a:lstStyle/>
+          <a:p>
+            <a:r>
+              <a:rPr lang="en-US">
+                <a:latin typeface="Times New Roman" panose="02020603050405020304" pitchFamily="18" charset="0"/>
+                <a:cs typeface="Times New Roman" panose="02020603050405020304" pitchFamily="18" charset="0"/>
+              </a:rPr>
+              <a:t>(5)</a:t>
+            </a:r>
+          </a:p>
+        </p:txBody>
+      </p:sp>
+    </p:spTree>
+    <p:extLst>
+      <p:ext uri="{BB962C8B-B14F-4D97-AF65-F5344CB8AC3E}">
+        <p14:creationId xmlns:p14="http://schemas.microsoft.com/office/powerpoint/2010/main" val="3630531534"/>
+      </p:ext>
+    </p:extLst>
+  </p:cSld>
+  <p:clrMapOvr>
+    <a:masterClrMapping/>
+  </p:clrMapOvr>
+</p:sld>
+</file>
+
+<file path=ppt/slides/slide15.xml><?xml version="1.0" encoding="utf-8"?>
+<p:sld xmlns:a="http://schemas.openxmlformats.org/drawingml/2006/main" xmlns:r="http://schemas.openxmlformats.org/officeDocument/2006/relationships" xmlns:p="http://schemas.openxmlformats.org/presentationml/2006/main">
+  <p:cSld>
+    <p:spTree>
+      <p:nvGrpSpPr>
+        <p:cNvPr id="1" name=""/>
+        <p:cNvGrpSpPr/>
+        <p:nvPr/>
+      </p:nvGrpSpPr>
+      <p:grpSpPr>
+        <a:xfrm>
+          <a:off x="0" y="0"/>
+          <a:ext cx="0" cy="0"/>
+          <a:chOff x="0" y="0"/>
+          <a:chExt cx="0" cy="0"/>
+        </a:xfrm>
+      </p:grpSpPr>
+      <p:grpSp>
+        <p:nvGrpSpPr>
+          <p:cNvPr id="2" name="Group 1">
+            <a:extLst>
+              <a:ext uri="{FF2B5EF4-FFF2-40B4-BE49-F238E27FC236}">
+                <a16:creationId xmlns:a16="http://schemas.microsoft.com/office/drawing/2014/main" id="{A585B42A-1C32-7D54-C418-8EC4D61D893E}"/>
+              </a:ext>
+            </a:extLst>
+          </p:cNvPr>
+          <p:cNvGrpSpPr/>
+          <p:nvPr/>
+        </p:nvGrpSpPr>
+        <p:grpSpPr>
+          <a:xfrm>
+            <a:off x="304800" y="714620"/>
+            <a:ext cx="1421219" cy="1618759"/>
+            <a:chOff x="5261639" y="42349"/>
+            <a:chExt cx="1421219" cy="1211352"/>
+          </a:xfrm>
+        </p:grpSpPr>
+        <p:pic>
+          <p:nvPicPr>
+            <p:cNvPr id="3" name="Graphic 2" descr="User with solid fill">
+              <a:extLst>
+                <a:ext uri="{FF2B5EF4-FFF2-40B4-BE49-F238E27FC236}">
+                  <a16:creationId xmlns:a16="http://schemas.microsoft.com/office/drawing/2014/main" id="{02693618-AA14-6A2B-9B2F-4CD4EAA3674E}"/>
+                </a:ext>
+              </a:extLst>
+            </p:cNvPr>
+            <p:cNvPicPr>
+              <a:picLocks noChangeAspect="1"/>
+            </p:cNvPicPr>
+            <p:nvPr/>
+          </p:nvPicPr>
+          <p:blipFill>
+            <a:blip r:embed="rId3">
+              <a:extLst>
+                <a:ext uri="{96DAC541-7B7A-43D3-8B79-37D633B846F1}">
+                  <asvg:svgBlip xmlns:asvg="http://schemas.microsoft.com/office/drawing/2016/SVG/main" r:embed="rId4"/>
+                </a:ext>
+              </a:extLst>
+            </a:blip>
+            <a:stretch>
+              <a:fillRect/>
+            </a:stretch>
+          </p:blipFill>
+          <p:spPr>
+            <a:xfrm>
+              <a:off x="5333030" y="42349"/>
+              <a:ext cx="1264935" cy="1003931"/>
+            </a:xfrm>
+            <a:prstGeom prst="rect">
+              <a:avLst/>
+            </a:prstGeom>
+          </p:spPr>
+        </p:pic>
+        <p:sp>
+          <p:nvSpPr>
+            <p:cNvPr id="4" name="TextBox 3">
+              <a:extLst>
+                <a:ext uri="{FF2B5EF4-FFF2-40B4-BE49-F238E27FC236}">
+                  <a16:creationId xmlns:a16="http://schemas.microsoft.com/office/drawing/2014/main" id="{1E635135-753B-9EA9-8C42-910757F91067}"/>
+                </a:ext>
+              </a:extLst>
+            </p:cNvPr>
+            <p:cNvSpPr txBox="1"/>
+            <p:nvPr/>
+          </p:nvSpPr>
+          <p:spPr>
+            <a:xfrm>
+              <a:off x="5261639" y="884369"/>
+              <a:ext cx="1421219" cy="369332"/>
+            </a:xfrm>
+            <a:prstGeom prst="rect">
+              <a:avLst/>
+            </a:prstGeom>
+            <a:noFill/>
+          </p:spPr>
+          <p:txBody>
+            <a:bodyPr wrap="square" rtlCol="0">
+              <a:spAutoFit/>
+            </a:bodyPr>
+            <a:lstStyle/>
+            <a:p>
+              <a:pPr algn="ctr"/>
+              <a:r>
+                <a:rPr lang="vi-VN">
+                  <a:latin typeface="+mj-lt"/>
+                </a:rPr>
+                <a:t>Người dùng</a:t>
+              </a:r>
+              <a:endParaRPr lang="en-US">
+                <a:latin typeface="+mj-lt"/>
+              </a:endParaRPr>
+            </a:p>
+          </p:txBody>
+        </p:sp>
+      </p:grpSp>
+      <p:sp>
+        <p:nvSpPr>
+          <p:cNvPr id="5" name="Rectangle: Rounded Corners 4">
+            <a:extLst>
+              <a:ext uri="{FF2B5EF4-FFF2-40B4-BE49-F238E27FC236}">
+                <a16:creationId xmlns:a16="http://schemas.microsoft.com/office/drawing/2014/main" id="{E57AEA57-B967-4A2B-7BDB-0BDE387A00DB}"/>
+              </a:ext>
+            </a:extLst>
+          </p:cNvPr>
+          <p:cNvSpPr/>
+          <p:nvPr/>
+        </p:nvSpPr>
+        <p:spPr>
+          <a:xfrm>
+            <a:off x="3002280" y="1051560"/>
+            <a:ext cx="3093720" cy="1066800"/>
+          </a:xfrm>
+          <a:prstGeom prst="roundRect">
+            <a:avLst/>
+          </a:prstGeom>
+          <a:solidFill>
+            <a:schemeClr val="bg2"/>
+          </a:solidFill>
+          <a:ln>
+            <a:solidFill>
+              <a:schemeClr val="tx1"/>
+            </a:solidFill>
+            <a:prstDash val="dash"/>
+          </a:ln>
+        </p:spPr>
+        <p:style>
+          <a:lnRef idx="2">
+            <a:schemeClr val="accent1">
+              <a:shade val="15000"/>
+            </a:schemeClr>
+          </a:lnRef>
+          <a:fillRef idx="1">
+            <a:schemeClr val="accent1"/>
+          </a:fillRef>
+          <a:effectRef idx="0">
+            <a:schemeClr val="accent1"/>
+          </a:effectRef>
+          <a:fontRef idx="minor">
+            <a:schemeClr val="lt1"/>
+          </a:fontRef>
+        </p:style>
+        <p:txBody>
+          <a:bodyPr rtlCol="0" anchor="ctr"/>
+          <a:lstStyle/>
+          <a:p>
+            <a:pPr algn="ctr"/>
+            <a:r>
+              <a:rPr lang="en-US" sz="2000">
+                <a:solidFill>
+                  <a:schemeClr val="tx1"/>
+                </a:solidFill>
+                <a:latin typeface="Times New Roman" panose="02020603050405020304" pitchFamily="18" charset="0"/>
+                <a:cs typeface="Times New Roman" panose="02020603050405020304" pitchFamily="18" charset="0"/>
+              </a:rPr>
+              <a:t>Giao diện chat</a:t>
+            </a:r>
+          </a:p>
+        </p:txBody>
+      </p:sp>
+      <p:sp>
+        <p:nvSpPr>
+          <p:cNvPr id="6" name="Rectangle: Rounded Corners 5">
+            <a:extLst>
+              <a:ext uri="{FF2B5EF4-FFF2-40B4-BE49-F238E27FC236}">
+                <a16:creationId xmlns:a16="http://schemas.microsoft.com/office/drawing/2014/main" id="{6969F48D-A52A-A475-7BBD-319E9F21F4E4}"/>
+              </a:ext>
+            </a:extLst>
+          </p:cNvPr>
+          <p:cNvSpPr/>
+          <p:nvPr/>
+        </p:nvSpPr>
+        <p:spPr>
+          <a:xfrm>
+            <a:off x="3002280" y="2895600"/>
+            <a:ext cx="3093720" cy="1066800"/>
+          </a:xfrm>
+          <a:prstGeom prst="roundRect">
+            <a:avLst/>
+          </a:prstGeom>
+          <a:solidFill>
+            <a:schemeClr val="bg2"/>
+          </a:solidFill>
+          <a:ln>
+            <a:solidFill>
+              <a:schemeClr val="tx1"/>
+            </a:solidFill>
+          </a:ln>
+        </p:spPr>
+        <p:style>
+          <a:lnRef idx="2">
+            <a:schemeClr val="accent1">
+              <a:shade val="15000"/>
+            </a:schemeClr>
+          </a:lnRef>
+          <a:fillRef idx="1">
+            <a:schemeClr val="accent1"/>
+          </a:fillRef>
+          <a:effectRef idx="0">
+            <a:schemeClr val="accent1"/>
+          </a:effectRef>
+          <a:fontRef idx="minor">
+            <a:schemeClr val="lt1"/>
+          </a:fontRef>
+        </p:style>
+        <p:txBody>
+          <a:bodyPr rtlCol="0" anchor="ctr"/>
+          <a:lstStyle/>
+          <a:p>
+            <a:pPr algn="ctr"/>
+            <a:r>
+              <a:rPr lang="en-US" sz="2000">
+                <a:solidFill>
+                  <a:schemeClr val="tx1"/>
+                </a:solidFill>
+                <a:latin typeface="Times New Roman" panose="02020603050405020304" pitchFamily="18" charset="0"/>
+                <a:cs typeface="Times New Roman" panose="02020603050405020304" pitchFamily="18" charset="0"/>
+              </a:rPr>
+              <a:t>Nhập truy vấn vào input</a:t>
+            </a:r>
+          </a:p>
+        </p:txBody>
+      </p:sp>
+      <p:sp>
+        <p:nvSpPr>
+          <p:cNvPr id="7" name="Rectangle: Rounded Corners 6">
+            <a:extLst>
+              <a:ext uri="{FF2B5EF4-FFF2-40B4-BE49-F238E27FC236}">
+                <a16:creationId xmlns:a16="http://schemas.microsoft.com/office/drawing/2014/main" id="{882F8322-D48B-42AC-EACB-B25214D49E15}"/>
+              </a:ext>
+            </a:extLst>
+          </p:cNvPr>
+          <p:cNvSpPr/>
+          <p:nvPr/>
+        </p:nvSpPr>
+        <p:spPr>
+          <a:xfrm>
+            <a:off x="3002280" y="4739640"/>
+            <a:ext cx="3093720" cy="1066800"/>
+          </a:xfrm>
+          <a:prstGeom prst="roundRect">
+            <a:avLst/>
+          </a:prstGeom>
+          <a:solidFill>
+            <a:schemeClr val="bg2"/>
+          </a:solidFill>
+          <a:ln>
+            <a:solidFill>
+              <a:schemeClr val="tx1"/>
+            </a:solidFill>
+          </a:ln>
+        </p:spPr>
+        <p:style>
+          <a:lnRef idx="2">
+            <a:schemeClr val="accent1">
+              <a:shade val="15000"/>
+            </a:schemeClr>
+          </a:lnRef>
+          <a:fillRef idx="1">
+            <a:schemeClr val="accent1"/>
+          </a:fillRef>
+          <a:effectRef idx="0">
+            <a:schemeClr val="accent1"/>
+          </a:effectRef>
+          <a:fontRef idx="minor">
+            <a:schemeClr val="lt1"/>
+          </a:fontRef>
+        </p:style>
+        <p:txBody>
+          <a:bodyPr rtlCol="0" anchor="ctr"/>
+          <a:lstStyle/>
+          <a:p>
+            <a:pPr algn="ctr"/>
+            <a:r>
+              <a:rPr lang="en-US" sz="2000">
+                <a:solidFill>
+                  <a:schemeClr val="tx1"/>
+                </a:solidFill>
+                <a:latin typeface="Times New Roman" panose="02020603050405020304" pitchFamily="18" charset="0"/>
+                <a:cs typeface="Times New Roman" panose="02020603050405020304" pitchFamily="18" charset="0"/>
+              </a:rPr>
+              <a:t>Gửi truy vấn đến hệ thống</a:t>
+            </a:r>
+          </a:p>
+        </p:txBody>
+      </p:sp>
+      <p:sp>
+        <p:nvSpPr>
+          <p:cNvPr id="8" name="Rectangle: Rounded Corners 7">
+            <a:extLst>
+              <a:ext uri="{FF2B5EF4-FFF2-40B4-BE49-F238E27FC236}">
+                <a16:creationId xmlns:a16="http://schemas.microsoft.com/office/drawing/2014/main" id="{EBA9A2C0-97DE-30E5-9CD8-52A1C87D0D4B}"/>
+              </a:ext>
+            </a:extLst>
+          </p:cNvPr>
+          <p:cNvSpPr/>
+          <p:nvPr/>
+        </p:nvSpPr>
+        <p:spPr>
+          <a:xfrm>
+            <a:off x="7372261" y="4739640"/>
+            <a:ext cx="3093720" cy="1066800"/>
+          </a:xfrm>
+          <a:prstGeom prst="roundRect">
+            <a:avLst/>
+          </a:prstGeom>
+          <a:solidFill>
+            <a:schemeClr val="bg2"/>
+          </a:solidFill>
+          <a:ln>
+            <a:solidFill>
+              <a:schemeClr val="tx1"/>
+            </a:solidFill>
+          </a:ln>
+        </p:spPr>
+        <p:style>
+          <a:lnRef idx="2">
+            <a:schemeClr val="accent1">
+              <a:shade val="15000"/>
+            </a:schemeClr>
+          </a:lnRef>
+          <a:fillRef idx="1">
+            <a:schemeClr val="accent1"/>
+          </a:fillRef>
+          <a:effectRef idx="0">
+            <a:schemeClr val="accent1"/>
+          </a:effectRef>
+          <a:fontRef idx="minor">
+            <a:schemeClr val="lt1"/>
+          </a:fontRef>
+        </p:style>
+        <p:txBody>
+          <a:bodyPr rtlCol="0" anchor="ctr"/>
+          <a:lstStyle/>
+          <a:p>
+            <a:pPr algn="ctr"/>
+            <a:r>
+              <a:rPr lang="en-US" sz="2000">
+                <a:solidFill>
+                  <a:schemeClr val="tx1"/>
+                </a:solidFill>
+                <a:latin typeface="Times New Roman" panose="02020603050405020304" pitchFamily="18" charset="0"/>
+                <a:cs typeface="Times New Roman" panose="02020603050405020304" pitchFamily="18" charset="0"/>
+              </a:rPr>
+              <a:t>Hệ thống gọi agent để sinh ra phản hồi</a:t>
+            </a:r>
+          </a:p>
+        </p:txBody>
+      </p:sp>
+      <p:sp>
+        <p:nvSpPr>
+          <p:cNvPr id="9" name="Rectangle: Rounded Corners 8">
+            <a:extLst>
+              <a:ext uri="{FF2B5EF4-FFF2-40B4-BE49-F238E27FC236}">
+                <a16:creationId xmlns:a16="http://schemas.microsoft.com/office/drawing/2014/main" id="{A7700EF7-0220-1662-D232-0B2779233B29}"/>
+              </a:ext>
+            </a:extLst>
+          </p:cNvPr>
+          <p:cNvSpPr/>
+          <p:nvPr/>
+        </p:nvSpPr>
+        <p:spPr>
+          <a:xfrm>
+            <a:off x="7372261" y="1051560"/>
+            <a:ext cx="3093720" cy="1066800"/>
+          </a:xfrm>
+          <a:prstGeom prst="roundRect">
+            <a:avLst/>
+          </a:prstGeom>
+          <a:solidFill>
+            <a:schemeClr val="bg2"/>
+          </a:solidFill>
+          <a:ln>
+            <a:solidFill>
+              <a:schemeClr val="tx1"/>
+            </a:solidFill>
+          </a:ln>
+        </p:spPr>
+        <p:style>
+          <a:lnRef idx="2">
+            <a:schemeClr val="accent1">
+              <a:shade val="15000"/>
+            </a:schemeClr>
+          </a:lnRef>
+          <a:fillRef idx="1">
+            <a:schemeClr val="accent1"/>
+          </a:fillRef>
+          <a:effectRef idx="0">
+            <a:schemeClr val="accent1"/>
+          </a:effectRef>
+          <a:fontRef idx="minor">
+            <a:schemeClr val="lt1"/>
+          </a:fontRef>
+        </p:style>
+        <p:txBody>
+          <a:bodyPr rtlCol="0" anchor="ctr"/>
+          <a:lstStyle/>
+          <a:p>
+            <a:pPr algn="ctr"/>
+            <a:r>
+              <a:rPr lang="en-US" sz="2000">
+                <a:solidFill>
+                  <a:schemeClr val="tx1"/>
+                </a:solidFill>
+                <a:latin typeface="Times New Roman" panose="02020603050405020304" pitchFamily="18" charset="0"/>
+                <a:cs typeface="Times New Roman" panose="02020603050405020304" pitchFamily="18" charset="0"/>
+              </a:rPr>
+              <a:t>Hệ thống hiển thị phản hồi đến người dùng</a:t>
+            </a:r>
+          </a:p>
+        </p:txBody>
+      </p:sp>
+      <p:cxnSp>
+        <p:nvCxnSpPr>
+          <p:cNvPr id="11" name="Straight Arrow Connector 10">
+            <a:extLst>
+              <a:ext uri="{FF2B5EF4-FFF2-40B4-BE49-F238E27FC236}">
+                <a16:creationId xmlns:a16="http://schemas.microsoft.com/office/drawing/2014/main" id="{8F72EBEE-B4C2-BFB0-E7A2-7F8023FA6CEA}"/>
+              </a:ext>
+            </a:extLst>
+          </p:cNvPr>
+          <p:cNvCxnSpPr>
+            <a:cxnSpLocks/>
+            <a:endCxn id="5" idx="1"/>
+          </p:cNvCxnSpPr>
+          <p:nvPr/>
+        </p:nvCxnSpPr>
+        <p:spPr>
+          <a:xfrm>
+            <a:off x="1641126" y="1584960"/>
+            <a:ext cx="1361154" cy="0"/>
+          </a:xfrm>
+          <a:prstGeom prst="straightConnector1">
+            <a:avLst/>
+          </a:prstGeom>
+          <a:ln>
+            <a:solidFill>
+              <a:schemeClr val="tx1"/>
+            </a:solidFill>
+            <a:tailEnd type="triangle"/>
+          </a:ln>
+        </p:spPr>
+        <p:style>
+          <a:lnRef idx="2">
+            <a:schemeClr val="accent1"/>
+          </a:lnRef>
+          <a:fillRef idx="0">
+            <a:schemeClr val="accent1"/>
+          </a:fillRef>
+          <a:effectRef idx="1">
+            <a:schemeClr val="accent1"/>
+          </a:effectRef>
+          <a:fontRef idx="minor">
+            <a:schemeClr val="tx1"/>
+          </a:fontRef>
+        </p:style>
+      </p:cxnSp>
+      <p:cxnSp>
+        <p:nvCxnSpPr>
+          <p:cNvPr id="13" name="Straight Arrow Connector 12">
+            <a:extLst>
+              <a:ext uri="{FF2B5EF4-FFF2-40B4-BE49-F238E27FC236}">
+                <a16:creationId xmlns:a16="http://schemas.microsoft.com/office/drawing/2014/main" id="{F423EDEE-6D00-A3AE-A0C3-ECF4B3AAFB7A}"/>
+              </a:ext>
+            </a:extLst>
+          </p:cNvPr>
+          <p:cNvCxnSpPr>
+            <a:cxnSpLocks/>
+            <a:stCxn id="5" idx="2"/>
+            <a:endCxn id="6" idx="0"/>
+          </p:cNvCxnSpPr>
+          <p:nvPr/>
+        </p:nvCxnSpPr>
+        <p:spPr>
+          <a:xfrm>
+            <a:off x="4549140" y="2118360"/>
+            <a:ext cx="0" cy="777240"/>
+          </a:xfrm>
+          <a:prstGeom prst="straightConnector1">
+            <a:avLst/>
+          </a:prstGeom>
+          <a:ln>
+            <a:solidFill>
+              <a:schemeClr val="tx1"/>
+            </a:solidFill>
+            <a:tailEnd type="triangle"/>
+          </a:ln>
+        </p:spPr>
+        <p:style>
+          <a:lnRef idx="2">
+            <a:schemeClr val="accent1"/>
+          </a:lnRef>
+          <a:fillRef idx="0">
+            <a:schemeClr val="accent1"/>
+          </a:fillRef>
+          <a:effectRef idx="1">
+            <a:schemeClr val="accent1"/>
+          </a:effectRef>
+          <a:fontRef idx="minor">
+            <a:schemeClr val="tx1"/>
+          </a:fontRef>
+        </p:style>
+      </p:cxnSp>
+      <p:cxnSp>
+        <p:nvCxnSpPr>
+          <p:cNvPr id="16" name="Straight Arrow Connector 15">
+            <a:extLst>
+              <a:ext uri="{FF2B5EF4-FFF2-40B4-BE49-F238E27FC236}">
+                <a16:creationId xmlns:a16="http://schemas.microsoft.com/office/drawing/2014/main" id="{EA2EBBA6-058E-288E-CAEF-9D4F43D8D44E}"/>
+              </a:ext>
+            </a:extLst>
+          </p:cNvPr>
+          <p:cNvCxnSpPr>
+            <a:cxnSpLocks/>
+            <a:stCxn id="6" idx="2"/>
+            <a:endCxn id="7" idx="0"/>
+          </p:cNvCxnSpPr>
+          <p:nvPr/>
+        </p:nvCxnSpPr>
+        <p:spPr>
+          <a:xfrm>
+            <a:off x="4549140" y="3962400"/>
+            <a:ext cx="0" cy="777240"/>
+          </a:xfrm>
+          <a:prstGeom prst="straightConnector1">
+            <a:avLst/>
+          </a:prstGeom>
+          <a:ln>
+            <a:solidFill>
+              <a:schemeClr val="tx1"/>
+            </a:solidFill>
+            <a:tailEnd type="triangle"/>
+          </a:ln>
+        </p:spPr>
+        <p:style>
+          <a:lnRef idx="2">
+            <a:schemeClr val="accent1"/>
+          </a:lnRef>
+          <a:fillRef idx="0">
+            <a:schemeClr val="accent1"/>
+          </a:fillRef>
+          <a:effectRef idx="1">
+            <a:schemeClr val="accent1"/>
+          </a:effectRef>
+          <a:fontRef idx="minor">
+            <a:schemeClr val="tx1"/>
+          </a:fontRef>
+        </p:style>
+      </p:cxnSp>
+      <p:cxnSp>
+        <p:nvCxnSpPr>
+          <p:cNvPr id="19" name="Straight Arrow Connector 18">
+            <a:extLst>
+              <a:ext uri="{FF2B5EF4-FFF2-40B4-BE49-F238E27FC236}">
+                <a16:creationId xmlns:a16="http://schemas.microsoft.com/office/drawing/2014/main" id="{EA6FC128-62B6-79F0-4945-61BBDB967433}"/>
+              </a:ext>
+            </a:extLst>
+          </p:cNvPr>
+          <p:cNvCxnSpPr>
+            <a:cxnSpLocks/>
+            <a:stCxn id="7" idx="3"/>
+            <a:endCxn id="8" idx="1"/>
+          </p:cNvCxnSpPr>
+          <p:nvPr/>
+        </p:nvCxnSpPr>
+        <p:spPr>
+          <a:xfrm>
+            <a:off x="6096000" y="5273040"/>
+            <a:ext cx="1276261" cy="0"/>
+          </a:xfrm>
+          <a:prstGeom prst="straightConnector1">
+            <a:avLst/>
+          </a:prstGeom>
+          <a:ln>
+            <a:solidFill>
+              <a:schemeClr val="tx1"/>
+            </a:solidFill>
+            <a:tailEnd type="triangle"/>
+          </a:ln>
+        </p:spPr>
+        <p:style>
+          <a:lnRef idx="2">
+            <a:schemeClr val="accent1"/>
+          </a:lnRef>
+          <a:fillRef idx="0">
+            <a:schemeClr val="accent1"/>
+          </a:fillRef>
+          <a:effectRef idx="1">
+            <a:schemeClr val="accent1"/>
+          </a:effectRef>
+          <a:fontRef idx="minor">
+            <a:schemeClr val="tx1"/>
+          </a:fontRef>
+        </p:style>
+      </p:cxnSp>
+      <p:cxnSp>
+        <p:nvCxnSpPr>
+          <p:cNvPr id="23" name="Straight Arrow Connector 22">
+            <a:extLst>
+              <a:ext uri="{FF2B5EF4-FFF2-40B4-BE49-F238E27FC236}">
+                <a16:creationId xmlns:a16="http://schemas.microsoft.com/office/drawing/2014/main" id="{776367B1-6D0B-92F0-BEAC-24AF6DA7FE15}"/>
+              </a:ext>
+            </a:extLst>
+          </p:cNvPr>
+          <p:cNvCxnSpPr>
+            <a:cxnSpLocks/>
+            <a:stCxn id="8" idx="0"/>
+            <a:endCxn id="9" idx="2"/>
+          </p:cNvCxnSpPr>
+          <p:nvPr/>
+        </p:nvCxnSpPr>
+        <p:spPr>
+          <a:xfrm flipV="1">
+            <a:off x="8919121" y="2118360"/>
+            <a:ext cx="0" cy="2621280"/>
+          </a:xfrm>
+          <a:prstGeom prst="straightConnector1">
+            <a:avLst/>
+          </a:prstGeom>
+          <a:ln>
+            <a:solidFill>
+              <a:schemeClr val="tx1"/>
+            </a:solidFill>
+            <a:tailEnd type="triangle"/>
+          </a:ln>
+        </p:spPr>
+        <p:style>
+          <a:lnRef idx="2">
+            <a:schemeClr val="accent1"/>
+          </a:lnRef>
+          <a:fillRef idx="0">
+            <a:schemeClr val="accent1"/>
+          </a:fillRef>
+          <a:effectRef idx="1">
+            <a:schemeClr val="accent1"/>
+          </a:effectRef>
+          <a:fontRef idx="minor">
+            <a:schemeClr val="tx1"/>
+          </a:fontRef>
+        </p:style>
+      </p:cxnSp>
+      <p:cxnSp>
+        <p:nvCxnSpPr>
+          <p:cNvPr id="26" name="Straight Arrow Connector 25">
+            <a:extLst>
+              <a:ext uri="{FF2B5EF4-FFF2-40B4-BE49-F238E27FC236}">
+                <a16:creationId xmlns:a16="http://schemas.microsoft.com/office/drawing/2014/main" id="{8168DBCE-37CD-6DB3-CF3B-71F4E2BEB66D}"/>
+              </a:ext>
+            </a:extLst>
+          </p:cNvPr>
+          <p:cNvCxnSpPr>
+            <a:cxnSpLocks/>
+            <a:stCxn id="9" idx="1"/>
+            <a:endCxn id="5" idx="3"/>
+          </p:cNvCxnSpPr>
+          <p:nvPr/>
+        </p:nvCxnSpPr>
+        <p:spPr>
+          <a:xfrm flipH="1">
+            <a:off x="6096000" y="1584960"/>
+            <a:ext cx="1276261" cy="0"/>
+          </a:xfrm>
+          <a:prstGeom prst="straightConnector1">
+            <a:avLst/>
+          </a:prstGeom>
+          <a:ln>
+            <a:solidFill>
+              <a:schemeClr val="tx1"/>
+            </a:solidFill>
+            <a:tailEnd type="triangle"/>
+          </a:ln>
+        </p:spPr>
+        <p:style>
+          <a:lnRef idx="2">
+            <a:schemeClr val="accent1"/>
+          </a:lnRef>
+          <a:fillRef idx="0">
+            <a:schemeClr val="accent1"/>
+          </a:fillRef>
+          <a:effectRef idx="1">
+            <a:schemeClr val="accent1"/>
+          </a:effectRef>
+          <a:fontRef idx="minor">
+            <a:schemeClr val="tx1"/>
+          </a:fontRef>
+        </p:style>
+      </p:cxnSp>
+      <p:sp>
+        <p:nvSpPr>
+          <p:cNvPr id="29" name="Rectangle 28">
+            <a:extLst>
+              <a:ext uri="{FF2B5EF4-FFF2-40B4-BE49-F238E27FC236}">
+                <a16:creationId xmlns:a16="http://schemas.microsoft.com/office/drawing/2014/main" id="{E575FACF-80D6-8930-F3AF-4C745674F7E2}"/>
+              </a:ext>
+            </a:extLst>
+          </p:cNvPr>
+          <p:cNvSpPr/>
+          <p:nvPr/>
+        </p:nvSpPr>
+        <p:spPr>
+          <a:xfrm>
+            <a:off x="7086600" y="714620"/>
+            <a:ext cx="3749038" cy="5427100"/>
+          </a:xfrm>
+          <a:prstGeom prst="rect">
+            <a:avLst/>
+          </a:prstGeom>
+          <a:noFill/>
+          <a:ln>
+            <a:prstDash val="dash"/>
+          </a:ln>
+        </p:spPr>
+        <p:style>
+          <a:lnRef idx="2">
+            <a:schemeClr val="dk1"/>
+          </a:lnRef>
+          <a:fillRef idx="1">
+            <a:schemeClr val="lt1"/>
+          </a:fillRef>
+          <a:effectRef idx="0">
+            <a:schemeClr val="dk1"/>
+          </a:effectRef>
+          <a:fontRef idx="minor">
+            <a:schemeClr val="dk1"/>
+          </a:fontRef>
+        </p:style>
+        <p:txBody>
+          <a:bodyPr rtlCol="0" anchor="ctr"/>
+          <a:lstStyle/>
+          <a:p>
+            <a:pPr algn="ctr"/>
+            <a:endParaRPr lang="en-US">
+              <a:noFill/>
+            </a:endParaRPr>
+          </a:p>
+        </p:txBody>
+      </p:sp>
+    </p:spTree>
+    <p:extLst>
+      <p:ext uri="{BB962C8B-B14F-4D97-AF65-F5344CB8AC3E}">
+        <p14:creationId xmlns:p14="http://schemas.microsoft.com/office/powerpoint/2010/main" val="3756769207"/>
+      </p:ext>
+    </p:extLst>
+  </p:cSld>
+  <p:clrMapOvr>
+    <a:masterClrMapping/>
+  </p:clrMapOvr>
+</p:sld>
+</file>
+
+<file path=ppt/slides/slide16.xml><?xml version="1.0" encoding="utf-8"?>
+<p:sld xmlns:a="http://schemas.openxmlformats.org/drawingml/2006/main" xmlns:r="http://schemas.openxmlformats.org/officeDocument/2006/relationships" xmlns:p="http://schemas.openxmlformats.org/presentationml/2006/main">
+  <p:cSld>
+    <p:spTree>
+      <p:nvGrpSpPr>
+        <p:cNvPr id="1" name=""/>
+        <p:cNvGrpSpPr/>
+        <p:nvPr/>
+      </p:nvGrpSpPr>
+      <p:grpSpPr>
+        <a:xfrm>
+          <a:off x="0" y="0"/>
+          <a:ext cx="0" cy="0"/>
+          <a:chOff x="0" y="0"/>
+          <a:chExt cx="0" cy="0"/>
+        </a:xfrm>
+      </p:grpSpPr>
+      <p:sp>
+        <p:nvSpPr>
+          <p:cNvPr id="2" name="Oval 1">
+            <a:extLst>
+              <a:ext uri="{FF2B5EF4-FFF2-40B4-BE49-F238E27FC236}">
+                <a16:creationId xmlns:a16="http://schemas.microsoft.com/office/drawing/2014/main" id="{8DF73D65-97C3-BEAD-5A4F-8C3D24005027}"/>
+              </a:ext>
+            </a:extLst>
+          </p:cNvPr>
+          <p:cNvSpPr/>
+          <p:nvPr/>
+        </p:nvSpPr>
+        <p:spPr>
+          <a:xfrm>
+            <a:off x="5173980" y="243840"/>
+            <a:ext cx="1844040" cy="838200"/>
+          </a:xfrm>
+          <a:prstGeom prst="ellipse">
+            <a:avLst/>
+          </a:prstGeom>
+          <a:solidFill>
+            <a:schemeClr val="bg2"/>
+          </a:solidFill>
+          <a:ln>
+            <a:solidFill>
+              <a:schemeClr val="tx1"/>
+            </a:solidFill>
+          </a:ln>
+        </p:spPr>
+        <p:style>
+          <a:lnRef idx="2">
+            <a:schemeClr val="dk1"/>
+          </a:lnRef>
+          <a:fillRef idx="1">
+            <a:schemeClr val="lt1"/>
+          </a:fillRef>
+          <a:effectRef idx="0">
+            <a:schemeClr val="dk1"/>
+          </a:effectRef>
+          <a:fontRef idx="minor">
+            <a:schemeClr val="dk1"/>
+          </a:fontRef>
+        </p:style>
+        <p:txBody>
+          <a:bodyPr rtlCol="0" anchor="ctr"/>
+          <a:lstStyle/>
+          <a:p>
+            <a:pPr algn="ctr"/>
+            <a:r>
+              <a:rPr lang="en-US" sz="2000">
+                <a:solidFill>
+                  <a:schemeClr val="tx1"/>
+                </a:solidFill>
+                <a:latin typeface="Times New Roman" panose="02020603050405020304" pitchFamily="18" charset="0"/>
+                <a:cs typeface="Times New Roman" panose="02020603050405020304" pitchFamily="18" charset="0"/>
+              </a:rPr>
+              <a:t>Bắt đầu</a:t>
+            </a:r>
+          </a:p>
+        </p:txBody>
+      </p:sp>
+      <p:sp>
+        <p:nvSpPr>
+          <p:cNvPr id="3" name="Rectangle: Rounded Corners 2">
+            <a:extLst>
+              <a:ext uri="{FF2B5EF4-FFF2-40B4-BE49-F238E27FC236}">
+                <a16:creationId xmlns:a16="http://schemas.microsoft.com/office/drawing/2014/main" id="{9C21F171-2A81-F478-BF9B-CB6B4EDEE9BC}"/>
+              </a:ext>
+            </a:extLst>
+          </p:cNvPr>
+          <p:cNvSpPr/>
+          <p:nvPr/>
+        </p:nvSpPr>
+        <p:spPr>
+          <a:xfrm>
+            <a:off x="4419600" y="1821180"/>
+            <a:ext cx="3352800" cy="777240"/>
+          </a:xfrm>
+          <a:prstGeom prst="roundRect">
+            <a:avLst/>
+          </a:prstGeom>
+          <a:solidFill>
+            <a:schemeClr val="bg2"/>
+          </a:solidFill>
+          <a:ln>
+            <a:solidFill>
+              <a:schemeClr val="tx1"/>
+            </a:solidFill>
+          </a:ln>
+        </p:spPr>
+        <p:style>
+          <a:lnRef idx="2">
+            <a:schemeClr val="accent1">
+              <a:shade val="15000"/>
+            </a:schemeClr>
+          </a:lnRef>
+          <a:fillRef idx="1">
+            <a:schemeClr val="accent1"/>
+          </a:fillRef>
+          <a:effectRef idx="0">
+            <a:schemeClr val="accent1"/>
+          </a:effectRef>
+          <a:fontRef idx="minor">
+            <a:schemeClr val="lt1"/>
+          </a:fontRef>
+        </p:style>
+        <p:txBody>
+          <a:bodyPr rtlCol="0" anchor="ctr"/>
+          <a:lstStyle/>
+          <a:p>
+            <a:pPr algn="ctr"/>
+            <a:r>
+              <a:rPr lang="en-US" sz="2000">
+                <a:solidFill>
+                  <a:schemeClr val="tx1"/>
+                </a:solidFill>
+                <a:latin typeface="Times New Roman" panose="02020603050405020304" pitchFamily="18" charset="0"/>
+                <a:cs typeface="Times New Roman" panose="02020603050405020304" pitchFamily="18" charset="0"/>
+              </a:rPr>
+              <a:t>Người dùng nhập truy vấn </a:t>
+            </a:r>
+          </a:p>
+          <a:p>
+            <a:pPr algn="ctr"/>
+            <a:r>
+              <a:rPr lang="en-US" sz="2000">
+                <a:solidFill>
+                  <a:schemeClr val="tx1"/>
+                </a:solidFill>
+                <a:latin typeface="Times New Roman" panose="02020603050405020304" pitchFamily="18" charset="0"/>
+                <a:cs typeface="Times New Roman" panose="02020603050405020304" pitchFamily="18" charset="0"/>
+              </a:rPr>
+              <a:t>đầu vào dạng văn bản</a:t>
+            </a:r>
+          </a:p>
+        </p:txBody>
+      </p:sp>
+      <p:sp>
+        <p:nvSpPr>
+          <p:cNvPr id="4" name="Rectangle: Rounded Corners 3">
+            <a:extLst>
+              <a:ext uri="{FF2B5EF4-FFF2-40B4-BE49-F238E27FC236}">
+                <a16:creationId xmlns:a16="http://schemas.microsoft.com/office/drawing/2014/main" id="{0C936821-1574-1D86-16D2-EFF03E7CFB13}"/>
+              </a:ext>
+            </a:extLst>
+          </p:cNvPr>
+          <p:cNvSpPr/>
+          <p:nvPr/>
+        </p:nvSpPr>
+        <p:spPr>
+          <a:xfrm>
+            <a:off x="4419600" y="3040380"/>
+            <a:ext cx="3352800" cy="777240"/>
+          </a:xfrm>
+          <a:prstGeom prst="roundRect">
+            <a:avLst/>
+          </a:prstGeom>
+          <a:solidFill>
+            <a:schemeClr val="bg2"/>
+          </a:solidFill>
+          <a:ln>
+            <a:solidFill>
+              <a:schemeClr val="tx1"/>
+            </a:solidFill>
+          </a:ln>
+        </p:spPr>
+        <p:style>
+          <a:lnRef idx="2">
+            <a:schemeClr val="accent1">
+              <a:shade val="15000"/>
+            </a:schemeClr>
+          </a:lnRef>
+          <a:fillRef idx="1">
+            <a:schemeClr val="accent1"/>
+          </a:fillRef>
+          <a:effectRef idx="0">
+            <a:schemeClr val="accent1"/>
+          </a:effectRef>
+          <a:fontRef idx="minor">
+            <a:schemeClr val="lt1"/>
+          </a:fontRef>
+        </p:style>
+        <p:txBody>
+          <a:bodyPr rtlCol="0" anchor="ctr"/>
+          <a:lstStyle/>
+          <a:p>
+            <a:pPr algn="ctr"/>
+            <a:r>
+              <a:rPr lang="en-US" sz="2000">
+                <a:solidFill>
+                  <a:schemeClr val="tx1"/>
+                </a:solidFill>
+                <a:latin typeface="Times New Roman" panose="02020603050405020304" pitchFamily="18" charset="0"/>
+                <a:cs typeface="Times New Roman" panose="02020603050405020304" pitchFamily="18" charset="0"/>
+              </a:rPr>
+              <a:t>Hệ thống gọi agent sinh ra phản hồi cho truy vấn</a:t>
+            </a:r>
+          </a:p>
+        </p:txBody>
+      </p:sp>
+      <p:sp>
+        <p:nvSpPr>
+          <p:cNvPr id="5" name="Rectangle: Rounded Corners 4">
+            <a:extLst>
+              <a:ext uri="{FF2B5EF4-FFF2-40B4-BE49-F238E27FC236}">
+                <a16:creationId xmlns:a16="http://schemas.microsoft.com/office/drawing/2014/main" id="{0607CC39-690B-02BF-E594-5E4FB3146DFE}"/>
+              </a:ext>
+            </a:extLst>
+          </p:cNvPr>
+          <p:cNvSpPr/>
+          <p:nvPr/>
+        </p:nvSpPr>
+        <p:spPr>
+          <a:xfrm>
+            <a:off x="4427220" y="4259580"/>
+            <a:ext cx="3352800" cy="777240"/>
+          </a:xfrm>
+          <a:prstGeom prst="roundRect">
+            <a:avLst/>
+          </a:prstGeom>
+          <a:solidFill>
+            <a:schemeClr val="bg2"/>
+          </a:solidFill>
+          <a:ln>
+            <a:solidFill>
+              <a:schemeClr val="tx1"/>
+            </a:solidFill>
+          </a:ln>
+        </p:spPr>
+        <p:style>
+          <a:lnRef idx="2">
+            <a:schemeClr val="accent1">
+              <a:shade val="15000"/>
+            </a:schemeClr>
+          </a:lnRef>
+          <a:fillRef idx="1">
+            <a:schemeClr val="accent1"/>
+          </a:fillRef>
+          <a:effectRef idx="0">
+            <a:schemeClr val="accent1"/>
+          </a:effectRef>
+          <a:fontRef idx="minor">
+            <a:schemeClr val="lt1"/>
+          </a:fontRef>
+        </p:style>
+        <p:txBody>
+          <a:bodyPr rtlCol="0" anchor="ctr"/>
+          <a:lstStyle/>
+          <a:p>
+            <a:pPr algn="ctr"/>
+            <a:r>
+              <a:rPr lang="en-US" sz="2000">
+                <a:solidFill>
+                  <a:schemeClr val="tx1"/>
+                </a:solidFill>
+                <a:latin typeface="Times New Roman" panose="02020603050405020304" pitchFamily="18" charset="0"/>
+                <a:cs typeface="Times New Roman" panose="02020603050405020304" pitchFamily="18" charset="0"/>
+              </a:rPr>
+              <a:t>Hệ thống hiển thị phản hồi cho người dùng</a:t>
+            </a:r>
+          </a:p>
+        </p:txBody>
+      </p:sp>
+      <p:sp>
+        <p:nvSpPr>
+          <p:cNvPr id="6" name="Oval 5">
+            <a:extLst>
+              <a:ext uri="{FF2B5EF4-FFF2-40B4-BE49-F238E27FC236}">
+                <a16:creationId xmlns:a16="http://schemas.microsoft.com/office/drawing/2014/main" id="{7E35F6CD-FDD4-53C0-E2A0-2CA0B0F4ECBA}"/>
+              </a:ext>
+            </a:extLst>
+          </p:cNvPr>
+          <p:cNvSpPr/>
+          <p:nvPr/>
+        </p:nvSpPr>
+        <p:spPr>
+          <a:xfrm>
+            <a:off x="5173980" y="5775960"/>
+            <a:ext cx="1844040" cy="838200"/>
+          </a:xfrm>
+          <a:prstGeom prst="ellipse">
+            <a:avLst/>
+          </a:prstGeom>
+          <a:solidFill>
+            <a:schemeClr val="bg2"/>
+          </a:solidFill>
+          <a:ln>
+            <a:solidFill>
+              <a:schemeClr val="tx1"/>
+            </a:solidFill>
+          </a:ln>
+        </p:spPr>
+        <p:style>
+          <a:lnRef idx="2">
+            <a:schemeClr val="dk1"/>
+          </a:lnRef>
+          <a:fillRef idx="1">
+            <a:schemeClr val="lt1"/>
+          </a:fillRef>
+          <a:effectRef idx="0">
+            <a:schemeClr val="dk1"/>
+          </a:effectRef>
+          <a:fontRef idx="minor">
+            <a:schemeClr val="dk1"/>
+          </a:fontRef>
+        </p:style>
+        <p:txBody>
+          <a:bodyPr rtlCol="0" anchor="ctr"/>
+          <a:lstStyle/>
+          <a:p>
+            <a:pPr algn="ctr"/>
+            <a:r>
+              <a:rPr lang="en-US" sz="2000">
+                <a:solidFill>
+                  <a:schemeClr val="tx1"/>
+                </a:solidFill>
+                <a:latin typeface="Times New Roman" panose="02020603050405020304" pitchFamily="18" charset="0"/>
+                <a:cs typeface="Times New Roman" panose="02020603050405020304" pitchFamily="18" charset="0"/>
+              </a:rPr>
+              <a:t>Kết thúc</a:t>
+            </a:r>
+          </a:p>
+        </p:txBody>
+      </p:sp>
+      <p:cxnSp>
+        <p:nvCxnSpPr>
+          <p:cNvPr id="8" name="Straight Arrow Connector 7">
+            <a:extLst>
+              <a:ext uri="{FF2B5EF4-FFF2-40B4-BE49-F238E27FC236}">
+                <a16:creationId xmlns:a16="http://schemas.microsoft.com/office/drawing/2014/main" id="{69FA62BF-F698-40A4-D21B-50E1DF524030}"/>
+              </a:ext>
+            </a:extLst>
+          </p:cNvPr>
+          <p:cNvCxnSpPr>
+            <a:cxnSpLocks/>
+            <a:stCxn id="2" idx="4"/>
+            <a:endCxn id="3" idx="0"/>
+          </p:cNvCxnSpPr>
+          <p:nvPr/>
+        </p:nvCxnSpPr>
+        <p:spPr>
+          <a:xfrm>
+            <a:off x="6096000" y="1082040"/>
+            <a:ext cx="0" cy="739140"/>
+          </a:xfrm>
+          <a:prstGeom prst="straightConnector1">
+            <a:avLst/>
+          </a:prstGeom>
+          <a:ln>
+            <a:tailEnd type="triangle"/>
+          </a:ln>
+        </p:spPr>
+        <p:style>
+          <a:lnRef idx="2">
+            <a:schemeClr val="dk1"/>
+          </a:lnRef>
+          <a:fillRef idx="0">
+            <a:schemeClr val="dk1"/>
+          </a:fillRef>
+          <a:effectRef idx="1">
+            <a:schemeClr val="dk1"/>
+          </a:effectRef>
+          <a:fontRef idx="minor">
+            <a:schemeClr val="tx1"/>
+          </a:fontRef>
+        </p:style>
+      </p:cxnSp>
+      <p:cxnSp>
+        <p:nvCxnSpPr>
+          <p:cNvPr id="10" name="Straight Arrow Connector 9">
+            <a:extLst>
+              <a:ext uri="{FF2B5EF4-FFF2-40B4-BE49-F238E27FC236}">
+                <a16:creationId xmlns:a16="http://schemas.microsoft.com/office/drawing/2014/main" id="{876E90C6-D117-8156-99B9-25EABE1FCACE}"/>
+              </a:ext>
+            </a:extLst>
+          </p:cNvPr>
+          <p:cNvCxnSpPr>
+            <a:cxnSpLocks/>
+            <a:stCxn id="3" idx="2"/>
+            <a:endCxn id="4" idx="0"/>
+          </p:cNvCxnSpPr>
+          <p:nvPr/>
+        </p:nvCxnSpPr>
+        <p:spPr>
+          <a:xfrm>
+            <a:off x="6096000" y="2598420"/>
+            <a:ext cx="0" cy="441960"/>
+          </a:xfrm>
+          <a:prstGeom prst="straightConnector1">
+            <a:avLst/>
+          </a:prstGeom>
+          <a:ln>
+            <a:tailEnd type="triangle"/>
+          </a:ln>
+        </p:spPr>
+        <p:style>
+          <a:lnRef idx="2">
+            <a:schemeClr val="dk1"/>
+          </a:lnRef>
+          <a:fillRef idx="0">
+            <a:schemeClr val="dk1"/>
+          </a:fillRef>
+          <a:effectRef idx="1">
+            <a:schemeClr val="dk1"/>
+          </a:effectRef>
+          <a:fontRef idx="minor">
+            <a:schemeClr val="tx1"/>
+          </a:fontRef>
+        </p:style>
+      </p:cxnSp>
+      <p:cxnSp>
+        <p:nvCxnSpPr>
+          <p:cNvPr id="12" name="Straight Arrow Connector 11">
+            <a:extLst>
+              <a:ext uri="{FF2B5EF4-FFF2-40B4-BE49-F238E27FC236}">
+                <a16:creationId xmlns:a16="http://schemas.microsoft.com/office/drawing/2014/main" id="{921AA626-1EAB-3757-5DBF-015B58B628C8}"/>
+              </a:ext>
+            </a:extLst>
+          </p:cNvPr>
+          <p:cNvCxnSpPr>
+            <a:stCxn id="4" idx="2"/>
+            <a:endCxn id="5" idx="0"/>
+          </p:cNvCxnSpPr>
+          <p:nvPr/>
+        </p:nvCxnSpPr>
+        <p:spPr>
+          <a:xfrm>
+            <a:off x="6096000" y="3817620"/>
+            <a:ext cx="7620" cy="441960"/>
+          </a:xfrm>
+          <a:prstGeom prst="straightConnector1">
+            <a:avLst/>
+          </a:prstGeom>
+          <a:ln>
+            <a:tailEnd type="triangle"/>
+          </a:ln>
+        </p:spPr>
+        <p:style>
+          <a:lnRef idx="2">
+            <a:schemeClr val="dk1"/>
+          </a:lnRef>
+          <a:fillRef idx="0">
+            <a:schemeClr val="dk1"/>
+          </a:fillRef>
+          <a:effectRef idx="1">
+            <a:schemeClr val="dk1"/>
+          </a:effectRef>
+          <a:fontRef idx="minor">
+            <a:schemeClr val="tx1"/>
+          </a:fontRef>
+        </p:style>
+      </p:cxnSp>
+      <p:cxnSp>
+        <p:nvCxnSpPr>
+          <p:cNvPr id="14" name="Straight Arrow Connector 13">
+            <a:extLst>
+              <a:ext uri="{FF2B5EF4-FFF2-40B4-BE49-F238E27FC236}">
+                <a16:creationId xmlns:a16="http://schemas.microsoft.com/office/drawing/2014/main" id="{F420C893-C5DD-077E-5EB9-E32AAF79350B}"/>
+              </a:ext>
+            </a:extLst>
+          </p:cNvPr>
+          <p:cNvCxnSpPr>
+            <a:stCxn id="5" idx="2"/>
+            <a:endCxn id="6" idx="0"/>
+          </p:cNvCxnSpPr>
+          <p:nvPr/>
+        </p:nvCxnSpPr>
+        <p:spPr>
+          <a:xfrm flipH="1">
+            <a:off x="6096000" y="5036820"/>
+            <a:ext cx="7620" cy="739140"/>
+          </a:xfrm>
+          <a:prstGeom prst="straightConnector1">
+            <a:avLst/>
+          </a:prstGeom>
+          <a:ln>
+            <a:tailEnd type="triangle"/>
+          </a:ln>
+        </p:spPr>
+        <p:style>
+          <a:lnRef idx="2">
+            <a:schemeClr val="dk1"/>
+          </a:lnRef>
+          <a:fillRef idx="0">
+            <a:schemeClr val="dk1"/>
+          </a:fillRef>
+          <a:effectRef idx="1">
+            <a:schemeClr val="dk1"/>
+          </a:effectRef>
+          <a:fontRef idx="minor">
+            <a:schemeClr val="tx1"/>
+          </a:fontRef>
+        </p:style>
+      </p:cxnSp>
+      <p:sp>
+        <p:nvSpPr>
+          <p:cNvPr id="15" name="TextBox 14">
+            <a:extLst>
+              <a:ext uri="{FF2B5EF4-FFF2-40B4-BE49-F238E27FC236}">
+                <a16:creationId xmlns:a16="http://schemas.microsoft.com/office/drawing/2014/main" id="{81A218BE-D2AA-47DF-3F2B-63F5EE9BECEC}"/>
+              </a:ext>
+            </a:extLst>
+          </p:cNvPr>
+          <p:cNvSpPr txBox="1"/>
+          <p:nvPr/>
+        </p:nvSpPr>
+        <p:spPr>
+          <a:xfrm>
+            <a:off x="6103620" y="1082278"/>
+            <a:ext cx="453970" cy="369332"/>
+          </a:xfrm>
+          <a:prstGeom prst="rect">
+            <a:avLst/>
+          </a:prstGeom>
+          <a:noFill/>
+        </p:spPr>
+        <p:txBody>
+          <a:bodyPr wrap="none" rtlCol="0">
+            <a:spAutoFit/>
+          </a:bodyPr>
+          <a:lstStyle/>
+          <a:p>
+            <a:r>
+              <a:rPr lang="en-US">
+                <a:latin typeface="Times New Roman" panose="02020603050405020304" pitchFamily="18" charset="0"/>
+                <a:cs typeface="Times New Roman" panose="02020603050405020304" pitchFamily="18" charset="0"/>
+              </a:rPr>
+              <a:t>(1)</a:t>
+            </a:r>
+          </a:p>
+        </p:txBody>
+      </p:sp>
+      <p:sp>
+        <p:nvSpPr>
+          <p:cNvPr id="16" name="TextBox 15">
+            <a:extLst>
+              <a:ext uri="{FF2B5EF4-FFF2-40B4-BE49-F238E27FC236}">
+                <a16:creationId xmlns:a16="http://schemas.microsoft.com/office/drawing/2014/main" id="{3D3B5D4B-1E84-6D42-1C99-8C376F36166E}"/>
+              </a:ext>
+            </a:extLst>
+          </p:cNvPr>
+          <p:cNvSpPr txBox="1"/>
+          <p:nvPr/>
+        </p:nvSpPr>
+        <p:spPr>
+          <a:xfrm>
+            <a:off x="6103620" y="2610088"/>
+            <a:ext cx="453970" cy="369332"/>
+          </a:xfrm>
+          <a:prstGeom prst="rect">
+            <a:avLst/>
+          </a:prstGeom>
+          <a:noFill/>
+        </p:spPr>
+        <p:txBody>
+          <a:bodyPr wrap="none" rtlCol="0">
+            <a:spAutoFit/>
+          </a:bodyPr>
+          <a:lstStyle/>
+          <a:p>
+            <a:r>
+              <a:rPr lang="en-US">
+                <a:latin typeface="Times New Roman" panose="02020603050405020304" pitchFamily="18" charset="0"/>
+                <a:cs typeface="Times New Roman" panose="02020603050405020304" pitchFamily="18" charset="0"/>
+              </a:rPr>
+              <a:t>(2)</a:t>
+            </a:r>
+          </a:p>
+        </p:txBody>
+      </p:sp>
+      <p:sp>
+        <p:nvSpPr>
+          <p:cNvPr id="17" name="TextBox 16">
+            <a:extLst>
+              <a:ext uri="{FF2B5EF4-FFF2-40B4-BE49-F238E27FC236}">
+                <a16:creationId xmlns:a16="http://schemas.microsoft.com/office/drawing/2014/main" id="{2FD84961-C70D-982C-BC23-5BD742DCBF4E}"/>
+              </a:ext>
+            </a:extLst>
+          </p:cNvPr>
+          <p:cNvSpPr txBox="1"/>
+          <p:nvPr/>
+        </p:nvSpPr>
+        <p:spPr>
+          <a:xfrm>
+            <a:off x="6096000" y="3817620"/>
+            <a:ext cx="453970" cy="369332"/>
+          </a:xfrm>
+          <a:prstGeom prst="rect">
+            <a:avLst/>
+          </a:prstGeom>
+          <a:noFill/>
+        </p:spPr>
+        <p:txBody>
+          <a:bodyPr wrap="none" rtlCol="0">
+            <a:spAutoFit/>
+          </a:bodyPr>
+          <a:lstStyle/>
+          <a:p>
+            <a:r>
+              <a:rPr lang="en-US">
+                <a:latin typeface="Times New Roman" panose="02020603050405020304" pitchFamily="18" charset="0"/>
+                <a:cs typeface="Times New Roman" panose="02020603050405020304" pitchFamily="18" charset="0"/>
+              </a:rPr>
+              <a:t>(3)</a:t>
+            </a:r>
+          </a:p>
+        </p:txBody>
+      </p:sp>
+      <p:sp>
+        <p:nvSpPr>
+          <p:cNvPr id="18" name="TextBox 17">
+            <a:extLst>
+              <a:ext uri="{FF2B5EF4-FFF2-40B4-BE49-F238E27FC236}">
+                <a16:creationId xmlns:a16="http://schemas.microsoft.com/office/drawing/2014/main" id="{85AD40F3-2C24-8D34-F831-ECD6E472C982}"/>
+              </a:ext>
+            </a:extLst>
+          </p:cNvPr>
+          <p:cNvSpPr txBox="1"/>
+          <p:nvPr/>
+        </p:nvSpPr>
+        <p:spPr>
+          <a:xfrm>
+            <a:off x="6103620" y="5036820"/>
+            <a:ext cx="453970" cy="369332"/>
+          </a:xfrm>
+          <a:prstGeom prst="rect">
+            <a:avLst/>
+          </a:prstGeom>
+          <a:noFill/>
+        </p:spPr>
+        <p:txBody>
+          <a:bodyPr wrap="none" rtlCol="0">
+            <a:spAutoFit/>
+          </a:bodyPr>
+          <a:lstStyle/>
+          <a:p>
+            <a:r>
+              <a:rPr lang="en-US">
+                <a:latin typeface="Times New Roman" panose="02020603050405020304" pitchFamily="18" charset="0"/>
+                <a:cs typeface="Times New Roman" panose="02020603050405020304" pitchFamily="18" charset="0"/>
+              </a:rPr>
+              <a:t>(4)</a:t>
+            </a:r>
+          </a:p>
+        </p:txBody>
+      </p:sp>
+    </p:spTree>
+    <p:extLst>
+      <p:ext uri="{BB962C8B-B14F-4D97-AF65-F5344CB8AC3E}">
+        <p14:creationId xmlns:p14="http://schemas.microsoft.com/office/powerpoint/2010/main" val="2596790291"/>
+      </p:ext>
+    </p:extLst>
+  </p:cSld>
+  <p:clrMapOvr>
+    <a:masterClrMapping/>
+  </p:clrMapOvr>
+</p:sld>
+</file>
+
+<file path=ppt/slides/slide17.xml><?xml version="1.0" encoding="utf-8"?>
+<p:sld xmlns:a="http://schemas.openxmlformats.org/drawingml/2006/main" xmlns:r="http://schemas.openxmlformats.org/officeDocument/2006/relationships" xmlns:p="http://schemas.openxmlformats.org/presentationml/2006/main">
+  <p:cSld>
+    <p:spTree>
+      <p:nvGrpSpPr>
+        <p:cNvPr id="1" name=""/>
+        <p:cNvGrpSpPr/>
+        <p:nvPr/>
+      </p:nvGrpSpPr>
+      <p:grpSpPr>
+        <a:xfrm>
+          <a:off x="0" y="0"/>
+          <a:ext cx="0" cy="0"/>
+          <a:chOff x="0" y="0"/>
+          <a:chExt cx="0" cy="0"/>
+        </a:xfrm>
+      </p:grpSpPr>
+      <p:grpSp>
+        <p:nvGrpSpPr>
+          <p:cNvPr id="14" name="Group 13">
+            <a:extLst>
+              <a:ext uri="{FF2B5EF4-FFF2-40B4-BE49-F238E27FC236}">
+                <a16:creationId xmlns:a16="http://schemas.microsoft.com/office/drawing/2014/main" id="{D1BA1C11-CDC2-5413-8166-474667ED4729}"/>
+              </a:ext>
+            </a:extLst>
+          </p:cNvPr>
+          <p:cNvGrpSpPr/>
+          <p:nvPr/>
+        </p:nvGrpSpPr>
+        <p:grpSpPr>
+          <a:xfrm>
+            <a:off x="304800" y="499601"/>
+            <a:ext cx="1421219" cy="1618759"/>
+            <a:chOff x="5261639" y="42349"/>
+            <a:chExt cx="1421219" cy="1211352"/>
+          </a:xfrm>
+        </p:grpSpPr>
+        <p:pic>
+          <p:nvPicPr>
+            <p:cNvPr id="15" name="Graphic 14" descr="User with solid fill">
+              <a:extLst>
+                <a:ext uri="{FF2B5EF4-FFF2-40B4-BE49-F238E27FC236}">
+                  <a16:creationId xmlns:a16="http://schemas.microsoft.com/office/drawing/2014/main" id="{AD84FC3F-E406-DC0B-1B1A-D1ABE3228FC7}"/>
+                </a:ext>
+              </a:extLst>
+            </p:cNvPr>
+            <p:cNvPicPr>
+              <a:picLocks noChangeAspect="1"/>
+            </p:cNvPicPr>
+            <p:nvPr/>
+          </p:nvPicPr>
+          <p:blipFill>
+            <a:blip r:embed="rId3">
+              <a:extLst>
+                <a:ext uri="{96DAC541-7B7A-43D3-8B79-37D633B846F1}">
+                  <asvg:svgBlip xmlns:asvg="http://schemas.microsoft.com/office/drawing/2016/SVG/main" r:embed="rId4"/>
+                </a:ext>
+              </a:extLst>
+            </a:blip>
+            <a:stretch>
+              <a:fillRect/>
+            </a:stretch>
+          </p:blipFill>
+          <p:spPr>
+            <a:xfrm>
+              <a:off x="5333030" y="42349"/>
+              <a:ext cx="1264935" cy="1003931"/>
+            </a:xfrm>
+            <a:prstGeom prst="rect">
+              <a:avLst/>
+            </a:prstGeom>
+          </p:spPr>
+        </p:pic>
+        <p:sp>
+          <p:nvSpPr>
+            <p:cNvPr id="16" name="TextBox 15">
+              <a:extLst>
+                <a:ext uri="{FF2B5EF4-FFF2-40B4-BE49-F238E27FC236}">
+                  <a16:creationId xmlns:a16="http://schemas.microsoft.com/office/drawing/2014/main" id="{8630D525-A484-9DE3-F7FC-3E4FB65F19E6}"/>
+                </a:ext>
+              </a:extLst>
+            </p:cNvPr>
+            <p:cNvSpPr txBox="1"/>
+            <p:nvPr/>
+          </p:nvSpPr>
+          <p:spPr>
+            <a:xfrm>
+              <a:off x="5261639" y="884369"/>
+              <a:ext cx="1421219" cy="369332"/>
+            </a:xfrm>
+            <a:prstGeom prst="rect">
+              <a:avLst/>
+            </a:prstGeom>
+            <a:noFill/>
+          </p:spPr>
+          <p:txBody>
+            <a:bodyPr wrap="square" rtlCol="0">
+              <a:spAutoFit/>
+            </a:bodyPr>
+            <a:lstStyle/>
+            <a:p>
+              <a:pPr algn="ctr"/>
+              <a:r>
+                <a:rPr lang="vi-VN">
+                  <a:latin typeface="+mj-lt"/>
+                </a:rPr>
+                <a:t>Người dùng</a:t>
+              </a:r>
+              <a:endParaRPr lang="en-US">
+                <a:latin typeface="+mj-lt"/>
+              </a:endParaRPr>
+            </a:p>
+          </p:txBody>
+        </p:sp>
+      </p:grpSp>
+      <p:sp>
+        <p:nvSpPr>
+          <p:cNvPr id="17" name="Rectangle: Rounded Corners 16">
+            <a:extLst>
+              <a:ext uri="{FF2B5EF4-FFF2-40B4-BE49-F238E27FC236}">
+                <a16:creationId xmlns:a16="http://schemas.microsoft.com/office/drawing/2014/main" id="{7559F31F-4558-AFB1-ECB7-601B3000C669}"/>
+              </a:ext>
+            </a:extLst>
+          </p:cNvPr>
+          <p:cNvSpPr/>
+          <p:nvPr/>
+        </p:nvSpPr>
+        <p:spPr>
+          <a:xfrm>
+            <a:off x="3002280" y="807720"/>
+            <a:ext cx="3093720" cy="1066800"/>
+          </a:xfrm>
+          <a:prstGeom prst="roundRect">
+            <a:avLst/>
+          </a:prstGeom>
+          <a:solidFill>
+            <a:schemeClr val="bg2"/>
+          </a:solidFill>
+          <a:ln>
+            <a:solidFill>
+              <a:schemeClr val="tx1"/>
+            </a:solidFill>
+            <a:prstDash val="dash"/>
+          </a:ln>
+        </p:spPr>
+        <p:style>
+          <a:lnRef idx="2">
+            <a:schemeClr val="accent1">
+              <a:shade val="15000"/>
+            </a:schemeClr>
+          </a:lnRef>
+          <a:fillRef idx="1">
+            <a:schemeClr val="accent1"/>
+          </a:fillRef>
+          <a:effectRef idx="0">
+            <a:schemeClr val="accent1"/>
+          </a:effectRef>
+          <a:fontRef idx="minor">
+            <a:schemeClr val="lt1"/>
+          </a:fontRef>
+        </p:style>
+        <p:txBody>
+          <a:bodyPr rtlCol="0" anchor="ctr"/>
+          <a:lstStyle/>
+          <a:p>
+            <a:pPr algn="ctr"/>
+            <a:r>
+              <a:rPr lang="en-US" sz="2000">
+                <a:solidFill>
+                  <a:schemeClr val="tx1"/>
+                </a:solidFill>
+                <a:latin typeface="Times New Roman" panose="02020603050405020304" pitchFamily="18" charset="0"/>
+                <a:cs typeface="Times New Roman" panose="02020603050405020304" pitchFamily="18" charset="0"/>
+              </a:rPr>
+              <a:t>Giao diện chat</a:t>
+            </a:r>
+          </a:p>
+        </p:txBody>
+      </p:sp>
+      <p:sp>
+        <p:nvSpPr>
+          <p:cNvPr id="18" name="Rectangle: Rounded Corners 17">
+            <a:extLst>
+              <a:ext uri="{FF2B5EF4-FFF2-40B4-BE49-F238E27FC236}">
+                <a16:creationId xmlns:a16="http://schemas.microsoft.com/office/drawing/2014/main" id="{409B12F3-EF3C-6FE6-2B3C-BC39A53BFE51}"/>
+              </a:ext>
+            </a:extLst>
+          </p:cNvPr>
+          <p:cNvSpPr/>
+          <p:nvPr/>
+        </p:nvSpPr>
+        <p:spPr>
+          <a:xfrm>
+            <a:off x="3002280" y="2773680"/>
+            <a:ext cx="3093720" cy="1066800"/>
+          </a:xfrm>
+          <a:prstGeom prst="roundRect">
+            <a:avLst/>
+          </a:prstGeom>
+          <a:solidFill>
+            <a:schemeClr val="bg2"/>
+          </a:solidFill>
+          <a:ln>
+            <a:solidFill>
+              <a:schemeClr val="tx1"/>
+            </a:solidFill>
+          </a:ln>
+        </p:spPr>
+        <p:style>
+          <a:lnRef idx="2">
+            <a:schemeClr val="accent1">
+              <a:shade val="15000"/>
+            </a:schemeClr>
+          </a:lnRef>
+          <a:fillRef idx="1">
+            <a:schemeClr val="accent1"/>
+          </a:fillRef>
+          <a:effectRef idx="0">
+            <a:schemeClr val="accent1"/>
+          </a:effectRef>
+          <a:fontRef idx="minor">
+            <a:schemeClr val="lt1"/>
+          </a:fontRef>
+        </p:style>
+        <p:txBody>
+          <a:bodyPr rtlCol="0" anchor="ctr"/>
+          <a:lstStyle/>
+          <a:p>
+            <a:pPr algn="ctr"/>
+            <a:r>
+              <a:rPr lang="en-US" sz="2000">
+                <a:solidFill>
+                  <a:schemeClr val="tx1"/>
+                </a:solidFill>
+                <a:latin typeface="Times New Roman" panose="02020603050405020304" pitchFamily="18" charset="0"/>
+                <a:cs typeface="Times New Roman" panose="02020603050405020304" pitchFamily="18" charset="0"/>
+              </a:rPr>
+              <a:t>Nhập truy vấn dạng âm thanh vào input</a:t>
+            </a:r>
+          </a:p>
+        </p:txBody>
+      </p:sp>
+      <p:sp>
+        <p:nvSpPr>
+          <p:cNvPr id="19" name="Rectangle: Rounded Corners 18">
+            <a:extLst>
+              <a:ext uri="{FF2B5EF4-FFF2-40B4-BE49-F238E27FC236}">
+                <a16:creationId xmlns:a16="http://schemas.microsoft.com/office/drawing/2014/main" id="{E0CD8A1C-D743-A891-0F81-DAA656C08EB3}"/>
+              </a:ext>
+            </a:extLst>
+          </p:cNvPr>
+          <p:cNvSpPr/>
+          <p:nvPr/>
+        </p:nvSpPr>
+        <p:spPr>
+          <a:xfrm>
+            <a:off x="3002280" y="4739640"/>
+            <a:ext cx="3093720" cy="1066800"/>
+          </a:xfrm>
+          <a:prstGeom prst="roundRect">
+            <a:avLst/>
+          </a:prstGeom>
+          <a:solidFill>
+            <a:schemeClr val="bg2"/>
+          </a:solidFill>
+          <a:ln>
+            <a:solidFill>
+              <a:schemeClr val="tx1"/>
+            </a:solidFill>
+          </a:ln>
+        </p:spPr>
+        <p:style>
+          <a:lnRef idx="2">
+            <a:schemeClr val="accent1">
+              <a:shade val="15000"/>
+            </a:schemeClr>
+          </a:lnRef>
+          <a:fillRef idx="1">
+            <a:schemeClr val="accent1"/>
+          </a:fillRef>
+          <a:effectRef idx="0">
+            <a:schemeClr val="accent1"/>
+          </a:effectRef>
+          <a:fontRef idx="minor">
+            <a:schemeClr val="lt1"/>
+          </a:fontRef>
+        </p:style>
+        <p:txBody>
+          <a:bodyPr rtlCol="0" anchor="ctr"/>
+          <a:lstStyle/>
+          <a:p>
+            <a:pPr algn="ctr"/>
+            <a:r>
+              <a:rPr lang="en-US" sz="2000">
+                <a:solidFill>
+                  <a:schemeClr val="tx1"/>
+                </a:solidFill>
+                <a:latin typeface="Times New Roman" panose="02020603050405020304" pitchFamily="18" charset="0"/>
+                <a:cs typeface="Times New Roman" panose="02020603050405020304" pitchFamily="18" charset="0"/>
+              </a:rPr>
+              <a:t>Gửi truy vấn đến hệ thống</a:t>
+            </a:r>
+          </a:p>
+        </p:txBody>
+      </p:sp>
+      <p:sp>
+        <p:nvSpPr>
+          <p:cNvPr id="20" name="Rectangle: Rounded Corners 19">
+            <a:extLst>
+              <a:ext uri="{FF2B5EF4-FFF2-40B4-BE49-F238E27FC236}">
+                <a16:creationId xmlns:a16="http://schemas.microsoft.com/office/drawing/2014/main" id="{63E0B451-3909-8BE9-05F9-23E0CC6EA898}"/>
+              </a:ext>
+            </a:extLst>
+          </p:cNvPr>
+          <p:cNvSpPr/>
+          <p:nvPr/>
+        </p:nvSpPr>
+        <p:spPr>
+          <a:xfrm>
+            <a:off x="7372261" y="4739640"/>
+            <a:ext cx="3093720" cy="1066800"/>
+          </a:xfrm>
+          <a:prstGeom prst="roundRect">
+            <a:avLst/>
+          </a:prstGeom>
+          <a:solidFill>
+            <a:schemeClr val="bg2"/>
+          </a:solidFill>
+          <a:ln>
+            <a:solidFill>
+              <a:schemeClr val="tx1"/>
+            </a:solidFill>
+          </a:ln>
+        </p:spPr>
+        <p:style>
+          <a:lnRef idx="2">
+            <a:schemeClr val="accent1">
+              <a:shade val="15000"/>
+            </a:schemeClr>
+          </a:lnRef>
+          <a:fillRef idx="1">
+            <a:schemeClr val="accent1"/>
+          </a:fillRef>
+          <a:effectRef idx="0">
+            <a:schemeClr val="accent1"/>
+          </a:effectRef>
+          <a:fontRef idx="minor">
+            <a:schemeClr val="lt1"/>
+          </a:fontRef>
+        </p:style>
+        <p:txBody>
+          <a:bodyPr rtlCol="0" anchor="ctr"/>
+          <a:lstStyle/>
+          <a:p>
+            <a:pPr algn="ctr"/>
+            <a:r>
+              <a:rPr lang="en-US" sz="2000">
+                <a:solidFill>
+                  <a:schemeClr val="tx1"/>
+                </a:solidFill>
+                <a:latin typeface="Times New Roman" panose="02020603050405020304" pitchFamily="18" charset="0"/>
+                <a:cs typeface="Times New Roman" panose="02020603050405020304" pitchFamily="18" charset="0"/>
+              </a:rPr>
+              <a:t>Hệ thống chuyển đổi truy vấn sang dạng văn bản</a:t>
+            </a:r>
+          </a:p>
+        </p:txBody>
+      </p:sp>
+      <p:sp>
+        <p:nvSpPr>
+          <p:cNvPr id="21" name="Rectangle: Rounded Corners 20">
+            <a:extLst>
+              <a:ext uri="{FF2B5EF4-FFF2-40B4-BE49-F238E27FC236}">
+                <a16:creationId xmlns:a16="http://schemas.microsoft.com/office/drawing/2014/main" id="{6EFD7980-A672-9F03-464A-7A2FFCBF9100}"/>
+              </a:ext>
+            </a:extLst>
+          </p:cNvPr>
+          <p:cNvSpPr/>
+          <p:nvPr/>
+        </p:nvSpPr>
+        <p:spPr>
+          <a:xfrm>
+            <a:off x="7372261" y="2118360"/>
+            <a:ext cx="3093720" cy="1066800"/>
+          </a:xfrm>
+          <a:prstGeom prst="roundRect">
+            <a:avLst/>
+          </a:prstGeom>
+          <a:solidFill>
+            <a:schemeClr val="bg2"/>
+          </a:solidFill>
+          <a:ln>
+            <a:solidFill>
+              <a:schemeClr val="tx1"/>
+            </a:solidFill>
+          </a:ln>
+        </p:spPr>
+        <p:style>
+          <a:lnRef idx="2">
+            <a:schemeClr val="accent1">
+              <a:shade val="15000"/>
+            </a:schemeClr>
+          </a:lnRef>
+          <a:fillRef idx="1">
+            <a:schemeClr val="accent1"/>
+          </a:fillRef>
+          <a:effectRef idx="0">
+            <a:schemeClr val="accent1"/>
+          </a:effectRef>
+          <a:fontRef idx="minor">
+            <a:schemeClr val="lt1"/>
+          </a:fontRef>
+        </p:style>
+        <p:txBody>
+          <a:bodyPr rtlCol="0" anchor="ctr"/>
+          <a:lstStyle/>
+          <a:p>
+            <a:pPr algn="ctr"/>
+            <a:r>
+              <a:rPr lang="en-US" sz="2000">
+                <a:solidFill>
+                  <a:schemeClr val="tx1"/>
+                </a:solidFill>
+                <a:latin typeface="Times New Roman" panose="02020603050405020304" pitchFamily="18" charset="0"/>
+                <a:cs typeface="Times New Roman" panose="02020603050405020304" pitchFamily="18" charset="0"/>
+              </a:rPr>
+              <a:t>Hệ thống chuyển đổi phản hồi về dạng âm thanh</a:t>
+            </a:r>
+          </a:p>
+        </p:txBody>
+      </p:sp>
+      <p:cxnSp>
+        <p:nvCxnSpPr>
+          <p:cNvPr id="22" name="Straight Arrow Connector 21">
+            <a:extLst>
+              <a:ext uri="{FF2B5EF4-FFF2-40B4-BE49-F238E27FC236}">
+                <a16:creationId xmlns:a16="http://schemas.microsoft.com/office/drawing/2014/main" id="{81066D0A-76F6-56CD-4427-DD1F01503123}"/>
+              </a:ext>
+            </a:extLst>
+          </p:cNvPr>
+          <p:cNvCxnSpPr>
+            <a:cxnSpLocks/>
+            <a:endCxn id="17" idx="1"/>
+          </p:cNvCxnSpPr>
+          <p:nvPr/>
+        </p:nvCxnSpPr>
+        <p:spPr>
+          <a:xfrm>
+            <a:off x="1641126" y="1341120"/>
+            <a:ext cx="1361154" cy="0"/>
+          </a:xfrm>
+          <a:prstGeom prst="straightConnector1">
+            <a:avLst/>
+          </a:prstGeom>
+          <a:ln>
+            <a:solidFill>
+              <a:schemeClr val="tx1"/>
+            </a:solidFill>
+            <a:tailEnd type="triangle"/>
+          </a:ln>
+        </p:spPr>
+        <p:style>
+          <a:lnRef idx="2">
+            <a:schemeClr val="accent1"/>
+          </a:lnRef>
+          <a:fillRef idx="0">
+            <a:schemeClr val="accent1"/>
+          </a:fillRef>
+          <a:effectRef idx="1">
+            <a:schemeClr val="accent1"/>
+          </a:effectRef>
+          <a:fontRef idx="minor">
+            <a:schemeClr val="tx1"/>
+          </a:fontRef>
+        </p:style>
+      </p:cxnSp>
+      <p:cxnSp>
+        <p:nvCxnSpPr>
+          <p:cNvPr id="23" name="Straight Arrow Connector 22">
+            <a:extLst>
+              <a:ext uri="{FF2B5EF4-FFF2-40B4-BE49-F238E27FC236}">
+                <a16:creationId xmlns:a16="http://schemas.microsoft.com/office/drawing/2014/main" id="{A8675842-D09A-5E09-D16F-3FBC2338CE0E}"/>
+              </a:ext>
+            </a:extLst>
+          </p:cNvPr>
+          <p:cNvCxnSpPr>
+            <a:cxnSpLocks/>
+            <a:stCxn id="17" idx="2"/>
+            <a:endCxn id="18" idx="0"/>
+          </p:cNvCxnSpPr>
+          <p:nvPr/>
+        </p:nvCxnSpPr>
+        <p:spPr>
+          <a:xfrm>
+            <a:off x="4549140" y="1874520"/>
+            <a:ext cx="0" cy="899160"/>
+          </a:xfrm>
+          <a:prstGeom prst="straightConnector1">
+            <a:avLst/>
+          </a:prstGeom>
+          <a:ln>
+            <a:solidFill>
+              <a:schemeClr val="tx1"/>
+            </a:solidFill>
+            <a:tailEnd type="triangle"/>
+          </a:ln>
+        </p:spPr>
+        <p:style>
+          <a:lnRef idx="2">
+            <a:schemeClr val="accent1"/>
+          </a:lnRef>
+          <a:fillRef idx="0">
+            <a:schemeClr val="accent1"/>
+          </a:fillRef>
+          <a:effectRef idx="1">
+            <a:schemeClr val="accent1"/>
+          </a:effectRef>
+          <a:fontRef idx="minor">
+            <a:schemeClr val="tx1"/>
+          </a:fontRef>
+        </p:style>
+      </p:cxnSp>
+      <p:cxnSp>
+        <p:nvCxnSpPr>
+          <p:cNvPr id="24" name="Straight Arrow Connector 23">
+            <a:extLst>
+              <a:ext uri="{FF2B5EF4-FFF2-40B4-BE49-F238E27FC236}">
+                <a16:creationId xmlns:a16="http://schemas.microsoft.com/office/drawing/2014/main" id="{45EFD3B1-2D41-48F5-3F27-B5B754EAB5FD}"/>
+              </a:ext>
+            </a:extLst>
+          </p:cNvPr>
+          <p:cNvCxnSpPr>
+            <a:cxnSpLocks/>
+            <a:stCxn id="18" idx="2"/>
+            <a:endCxn id="19" idx="0"/>
+          </p:cNvCxnSpPr>
+          <p:nvPr/>
+        </p:nvCxnSpPr>
+        <p:spPr>
+          <a:xfrm>
+            <a:off x="4549140" y="3840480"/>
+            <a:ext cx="0" cy="899160"/>
+          </a:xfrm>
+          <a:prstGeom prst="straightConnector1">
+            <a:avLst/>
+          </a:prstGeom>
+          <a:ln>
+            <a:solidFill>
+              <a:schemeClr val="tx1"/>
+            </a:solidFill>
+            <a:tailEnd type="triangle"/>
+          </a:ln>
+        </p:spPr>
+        <p:style>
+          <a:lnRef idx="2">
+            <a:schemeClr val="accent1"/>
+          </a:lnRef>
+          <a:fillRef idx="0">
+            <a:schemeClr val="accent1"/>
+          </a:fillRef>
+          <a:effectRef idx="1">
+            <a:schemeClr val="accent1"/>
+          </a:effectRef>
+          <a:fontRef idx="minor">
+            <a:schemeClr val="tx1"/>
+          </a:fontRef>
+        </p:style>
+      </p:cxnSp>
+      <p:cxnSp>
+        <p:nvCxnSpPr>
+          <p:cNvPr id="25" name="Straight Arrow Connector 24">
+            <a:extLst>
+              <a:ext uri="{FF2B5EF4-FFF2-40B4-BE49-F238E27FC236}">
+                <a16:creationId xmlns:a16="http://schemas.microsoft.com/office/drawing/2014/main" id="{BFA0D9C1-ECF9-CFD7-49B5-25254253E1F7}"/>
+              </a:ext>
+            </a:extLst>
+          </p:cNvPr>
+          <p:cNvCxnSpPr>
+            <a:cxnSpLocks/>
+            <a:stCxn id="19" idx="3"/>
+            <a:endCxn id="20" idx="1"/>
+          </p:cNvCxnSpPr>
+          <p:nvPr/>
+        </p:nvCxnSpPr>
+        <p:spPr>
+          <a:xfrm>
+            <a:off x="6096000" y="5273040"/>
+            <a:ext cx="1276261" cy="0"/>
+          </a:xfrm>
+          <a:prstGeom prst="straightConnector1">
+            <a:avLst/>
+          </a:prstGeom>
+          <a:ln>
+            <a:solidFill>
+              <a:schemeClr val="tx1"/>
+            </a:solidFill>
+            <a:tailEnd type="triangle"/>
+          </a:ln>
+        </p:spPr>
+        <p:style>
+          <a:lnRef idx="2">
+            <a:schemeClr val="accent1"/>
+          </a:lnRef>
+          <a:fillRef idx="0">
+            <a:schemeClr val="accent1"/>
+          </a:fillRef>
+          <a:effectRef idx="1">
+            <a:schemeClr val="accent1"/>
+          </a:effectRef>
+          <a:fontRef idx="minor">
+            <a:schemeClr val="tx1"/>
+          </a:fontRef>
+        </p:style>
+      </p:cxnSp>
+      <p:cxnSp>
+        <p:nvCxnSpPr>
+          <p:cNvPr id="26" name="Straight Arrow Connector 25">
+            <a:extLst>
+              <a:ext uri="{FF2B5EF4-FFF2-40B4-BE49-F238E27FC236}">
+                <a16:creationId xmlns:a16="http://schemas.microsoft.com/office/drawing/2014/main" id="{80EE3D5A-9799-2F89-BCB0-52C6A13AB481}"/>
+              </a:ext>
+            </a:extLst>
+          </p:cNvPr>
+          <p:cNvCxnSpPr>
+            <a:cxnSpLocks/>
+            <a:stCxn id="31" idx="0"/>
+            <a:endCxn id="21" idx="2"/>
+          </p:cNvCxnSpPr>
+          <p:nvPr/>
+        </p:nvCxnSpPr>
+        <p:spPr>
+          <a:xfrm flipV="1">
+            <a:off x="8919121" y="3185160"/>
+            <a:ext cx="0" cy="243840"/>
+          </a:xfrm>
+          <a:prstGeom prst="straightConnector1">
+            <a:avLst/>
+          </a:prstGeom>
+          <a:ln>
+            <a:solidFill>
+              <a:schemeClr val="tx1"/>
+            </a:solidFill>
+            <a:tailEnd type="triangle"/>
+          </a:ln>
+        </p:spPr>
+        <p:style>
+          <a:lnRef idx="2">
+            <a:schemeClr val="accent1"/>
+          </a:lnRef>
+          <a:fillRef idx="0">
+            <a:schemeClr val="accent1"/>
+          </a:fillRef>
+          <a:effectRef idx="1">
+            <a:schemeClr val="accent1"/>
+          </a:effectRef>
+          <a:fontRef idx="minor">
+            <a:schemeClr val="tx1"/>
+          </a:fontRef>
+        </p:style>
+      </p:cxnSp>
+      <p:cxnSp>
+        <p:nvCxnSpPr>
+          <p:cNvPr id="27" name="Straight Arrow Connector 26">
+            <a:extLst>
+              <a:ext uri="{FF2B5EF4-FFF2-40B4-BE49-F238E27FC236}">
+                <a16:creationId xmlns:a16="http://schemas.microsoft.com/office/drawing/2014/main" id="{9FB36C31-B826-54FC-39E9-E5FE88A66720}"/>
+              </a:ext>
+            </a:extLst>
+          </p:cNvPr>
+          <p:cNvCxnSpPr>
+            <a:cxnSpLocks/>
+            <a:stCxn id="44" idx="1"/>
+            <a:endCxn id="17" idx="3"/>
+          </p:cNvCxnSpPr>
+          <p:nvPr/>
+        </p:nvCxnSpPr>
+        <p:spPr>
+          <a:xfrm flipH="1">
+            <a:off x="6096000" y="1341120"/>
+            <a:ext cx="1276261" cy="0"/>
+          </a:xfrm>
+          <a:prstGeom prst="straightConnector1">
+            <a:avLst/>
+          </a:prstGeom>
+          <a:ln>
+            <a:solidFill>
+              <a:schemeClr val="tx1"/>
+            </a:solidFill>
+            <a:tailEnd type="triangle"/>
+          </a:ln>
+        </p:spPr>
+        <p:style>
+          <a:lnRef idx="2">
+            <a:schemeClr val="accent1"/>
+          </a:lnRef>
+          <a:fillRef idx="0">
+            <a:schemeClr val="accent1"/>
+          </a:fillRef>
+          <a:effectRef idx="1">
+            <a:schemeClr val="accent1"/>
+          </a:effectRef>
+          <a:fontRef idx="minor">
+            <a:schemeClr val="tx1"/>
+          </a:fontRef>
+        </p:style>
+      </p:cxnSp>
+      <p:sp>
+        <p:nvSpPr>
+          <p:cNvPr id="28" name="Rectangle 27">
+            <a:extLst>
+              <a:ext uri="{FF2B5EF4-FFF2-40B4-BE49-F238E27FC236}">
+                <a16:creationId xmlns:a16="http://schemas.microsoft.com/office/drawing/2014/main" id="{467545EF-3904-1FD4-532A-E8D4411E2C07}"/>
+              </a:ext>
+            </a:extLst>
+          </p:cNvPr>
+          <p:cNvSpPr/>
+          <p:nvPr/>
+        </p:nvSpPr>
+        <p:spPr>
+          <a:xfrm>
+            <a:off x="7086600" y="518162"/>
+            <a:ext cx="3749038" cy="5623558"/>
+          </a:xfrm>
+          <a:prstGeom prst="rect">
+            <a:avLst/>
+          </a:prstGeom>
+          <a:noFill/>
+          <a:ln>
+            <a:prstDash val="dash"/>
+          </a:ln>
+        </p:spPr>
+        <p:style>
+          <a:lnRef idx="2">
+            <a:schemeClr val="dk1"/>
+          </a:lnRef>
+          <a:fillRef idx="1">
+            <a:schemeClr val="lt1"/>
+          </a:fillRef>
+          <a:effectRef idx="0">
+            <a:schemeClr val="dk1"/>
+          </a:effectRef>
+          <a:fontRef idx="minor">
+            <a:schemeClr val="dk1"/>
+          </a:fontRef>
+        </p:style>
+        <p:txBody>
+          <a:bodyPr rtlCol="0" anchor="ctr"/>
+          <a:lstStyle/>
+          <a:p>
+            <a:pPr algn="ctr"/>
+            <a:endParaRPr lang="en-US">
+              <a:noFill/>
+            </a:endParaRPr>
+          </a:p>
+        </p:txBody>
+      </p:sp>
+      <p:sp>
+        <p:nvSpPr>
+          <p:cNvPr id="31" name="Rectangle: Rounded Corners 30">
+            <a:extLst>
+              <a:ext uri="{FF2B5EF4-FFF2-40B4-BE49-F238E27FC236}">
+                <a16:creationId xmlns:a16="http://schemas.microsoft.com/office/drawing/2014/main" id="{4C591672-62D1-E3EE-0DBA-517B0B9E2A58}"/>
+              </a:ext>
+            </a:extLst>
+          </p:cNvPr>
+          <p:cNvSpPr/>
+          <p:nvPr/>
+        </p:nvSpPr>
+        <p:spPr>
+          <a:xfrm>
+            <a:off x="7372261" y="3429000"/>
+            <a:ext cx="3093720" cy="1066800"/>
+          </a:xfrm>
+          <a:prstGeom prst="roundRect">
+            <a:avLst/>
+          </a:prstGeom>
+          <a:solidFill>
+            <a:schemeClr val="bg2"/>
+          </a:solidFill>
+          <a:ln>
+            <a:solidFill>
+              <a:schemeClr val="tx1"/>
+            </a:solidFill>
+          </a:ln>
+        </p:spPr>
+        <p:style>
+          <a:lnRef idx="2">
+            <a:schemeClr val="accent1">
+              <a:shade val="15000"/>
+            </a:schemeClr>
+          </a:lnRef>
+          <a:fillRef idx="1">
+            <a:schemeClr val="accent1"/>
+          </a:fillRef>
+          <a:effectRef idx="0">
+            <a:schemeClr val="accent1"/>
+          </a:effectRef>
+          <a:fontRef idx="minor">
+            <a:schemeClr val="lt1"/>
+          </a:fontRef>
+        </p:style>
+        <p:txBody>
+          <a:bodyPr rtlCol="0" anchor="ctr"/>
+          <a:lstStyle/>
+          <a:p>
+            <a:pPr algn="ctr"/>
+            <a:r>
+              <a:rPr lang="en-US" sz="2000">
+                <a:solidFill>
+                  <a:schemeClr val="tx1"/>
+                </a:solidFill>
+                <a:latin typeface="Times New Roman" panose="02020603050405020304" pitchFamily="18" charset="0"/>
+                <a:cs typeface="Times New Roman" panose="02020603050405020304" pitchFamily="18" charset="0"/>
+              </a:rPr>
+              <a:t>Hệ thống gọi agent để sinh ra phản hồi</a:t>
+            </a:r>
+          </a:p>
+        </p:txBody>
+      </p:sp>
+      <p:cxnSp>
+        <p:nvCxnSpPr>
+          <p:cNvPr id="33" name="Straight Arrow Connector 32">
+            <a:extLst>
+              <a:ext uri="{FF2B5EF4-FFF2-40B4-BE49-F238E27FC236}">
+                <a16:creationId xmlns:a16="http://schemas.microsoft.com/office/drawing/2014/main" id="{0DC72D8D-9EB6-F2FE-E5AE-C6F1B0DAAF65}"/>
+              </a:ext>
+            </a:extLst>
+          </p:cNvPr>
+          <p:cNvCxnSpPr>
+            <a:cxnSpLocks/>
+            <a:stCxn id="20" idx="0"/>
+            <a:endCxn id="31" idx="2"/>
+          </p:cNvCxnSpPr>
+          <p:nvPr/>
+        </p:nvCxnSpPr>
+        <p:spPr>
+          <a:xfrm flipV="1">
+            <a:off x="8919121" y="4495800"/>
+            <a:ext cx="0" cy="243840"/>
+          </a:xfrm>
+          <a:prstGeom prst="straightConnector1">
+            <a:avLst/>
+          </a:prstGeom>
+          <a:ln>
+            <a:solidFill>
+              <a:schemeClr val="tx1"/>
+            </a:solidFill>
+            <a:tailEnd type="triangle"/>
+          </a:ln>
+        </p:spPr>
+        <p:style>
+          <a:lnRef idx="2">
+            <a:schemeClr val="accent1"/>
+          </a:lnRef>
+          <a:fillRef idx="0">
+            <a:schemeClr val="accent1"/>
+          </a:fillRef>
+          <a:effectRef idx="1">
+            <a:schemeClr val="accent1"/>
+          </a:effectRef>
+          <a:fontRef idx="minor">
+            <a:schemeClr val="tx1"/>
+          </a:fontRef>
+        </p:style>
+      </p:cxnSp>
+      <p:sp>
+        <p:nvSpPr>
+          <p:cNvPr id="44" name="Rectangle: Rounded Corners 43">
+            <a:extLst>
+              <a:ext uri="{FF2B5EF4-FFF2-40B4-BE49-F238E27FC236}">
+                <a16:creationId xmlns:a16="http://schemas.microsoft.com/office/drawing/2014/main" id="{82F77918-AB1A-03C4-5203-CF557656D68F}"/>
+              </a:ext>
+            </a:extLst>
+          </p:cNvPr>
+          <p:cNvSpPr/>
+          <p:nvPr/>
+        </p:nvSpPr>
+        <p:spPr>
+          <a:xfrm>
+            <a:off x="7372261" y="807720"/>
+            <a:ext cx="3093720" cy="1066800"/>
+          </a:xfrm>
+          <a:prstGeom prst="roundRect">
+            <a:avLst/>
+          </a:prstGeom>
+          <a:solidFill>
+            <a:schemeClr val="bg2"/>
+          </a:solidFill>
+          <a:ln>
+            <a:solidFill>
+              <a:schemeClr val="tx1"/>
+            </a:solidFill>
+          </a:ln>
+        </p:spPr>
+        <p:style>
+          <a:lnRef idx="2">
+            <a:schemeClr val="accent1">
+              <a:shade val="15000"/>
+            </a:schemeClr>
+          </a:lnRef>
+          <a:fillRef idx="1">
+            <a:schemeClr val="accent1"/>
+          </a:fillRef>
+          <a:effectRef idx="0">
+            <a:schemeClr val="accent1"/>
+          </a:effectRef>
+          <a:fontRef idx="minor">
+            <a:schemeClr val="lt1"/>
+          </a:fontRef>
+        </p:style>
+        <p:txBody>
+          <a:bodyPr rtlCol="0" anchor="ctr"/>
+          <a:lstStyle/>
+          <a:p>
+            <a:pPr algn="ctr"/>
+            <a:r>
+              <a:rPr lang="en-US" sz="2000">
+                <a:solidFill>
+                  <a:schemeClr val="tx1"/>
+                </a:solidFill>
+                <a:latin typeface="Times New Roman" panose="02020603050405020304" pitchFamily="18" charset="0"/>
+                <a:cs typeface="Times New Roman" panose="02020603050405020304" pitchFamily="18" charset="0"/>
+              </a:rPr>
+              <a:t>Hệ thống đưa phản hồi đến người dùng</a:t>
+            </a:r>
+          </a:p>
+        </p:txBody>
+      </p:sp>
+      <p:cxnSp>
+        <p:nvCxnSpPr>
+          <p:cNvPr id="52" name="Straight Arrow Connector 51">
+            <a:extLst>
+              <a:ext uri="{FF2B5EF4-FFF2-40B4-BE49-F238E27FC236}">
+                <a16:creationId xmlns:a16="http://schemas.microsoft.com/office/drawing/2014/main" id="{F6757D95-F60C-2A29-404B-B61CD76E3110}"/>
+              </a:ext>
+            </a:extLst>
+          </p:cNvPr>
+          <p:cNvCxnSpPr>
+            <a:cxnSpLocks/>
+            <a:stCxn id="21" idx="0"/>
+            <a:endCxn id="44" idx="2"/>
+          </p:cNvCxnSpPr>
+          <p:nvPr/>
+        </p:nvCxnSpPr>
+        <p:spPr>
+          <a:xfrm flipV="1">
+            <a:off x="8919121" y="1874520"/>
+            <a:ext cx="0" cy="243840"/>
+          </a:xfrm>
+          <a:prstGeom prst="straightConnector1">
+            <a:avLst/>
+          </a:prstGeom>
+          <a:ln>
+            <a:solidFill>
+              <a:schemeClr val="tx1"/>
+            </a:solidFill>
+            <a:tailEnd type="triangle"/>
+          </a:ln>
+        </p:spPr>
+        <p:style>
+          <a:lnRef idx="2">
+            <a:schemeClr val="accent1"/>
+          </a:lnRef>
+          <a:fillRef idx="0">
+            <a:schemeClr val="accent1"/>
+          </a:fillRef>
+          <a:effectRef idx="1">
+            <a:schemeClr val="accent1"/>
+          </a:effectRef>
+          <a:fontRef idx="minor">
+            <a:schemeClr val="tx1"/>
+          </a:fontRef>
+        </p:style>
+      </p:cxnSp>
+    </p:spTree>
+    <p:extLst>
+      <p:ext uri="{BB962C8B-B14F-4D97-AF65-F5344CB8AC3E}">
+        <p14:creationId xmlns:p14="http://schemas.microsoft.com/office/powerpoint/2010/main" val="471283871"/>
+      </p:ext>
+    </p:extLst>
+  </p:cSld>
+  <p:clrMapOvr>
+    <a:masterClrMapping/>
+  </p:clrMapOvr>
+</p:sld>
+</file>
+
+<file path=ppt/slides/slide18.xml><?xml version="1.0" encoding="utf-8"?>
+<p:sld xmlns:a="http://schemas.openxmlformats.org/drawingml/2006/main" xmlns:r="http://schemas.openxmlformats.org/officeDocument/2006/relationships" xmlns:p="http://schemas.openxmlformats.org/presentationml/2006/main">
+  <p:cSld>
+    <p:spTree>
+      <p:nvGrpSpPr>
+        <p:cNvPr id="1" name=""/>
+        <p:cNvGrpSpPr/>
+        <p:nvPr/>
+      </p:nvGrpSpPr>
+      <p:grpSpPr>
+        <a:xfrm>
+          <a:off x="0" y="0"/>
+          <a:ext cx="0" cy="0"/>
+          <a:chOff x="0" y="0"/>
+          <a:chExt cx="0" cy="0"/>
+        </a:xfrm>
+      </p:grpSpPr>
+      <p:sp>
+        <p:nvSpPr>
+          <p:cNvPr id="2" name="Oval 1">
+            <a:extLst>
+              <a:ext uri="{FF2B5EF4-FFF2-40B4-BE49-F238E27FC236}">
+                <a16:creationId xmlns:a16="http://schemas.microsoft.com/office/drawing/2014/main" id="{26B05E5A-5774-6924-7ADA-F84796769A43}"/>
+              </a:ext>
+            </a:extLst>
+          </p:cNvPr>
+          <p:cNvSpPr/>
+          <p:nvPr/>
+        </p:nvSpPr>
+        <p:spPr>
+          <a:xfrm>
+            <a:off x="563300" y="1266944"/>
+            <a:ext cx="1844040" cy="777240"/>
+          </a:xfrm>
+          <a:prstGeom prst="ellipse">
+            <a:avLst/>
+          </a:prstGeom>
+          <a:solidFill>
+            <a:schemeClr val="bg2"/>
+          </a:solidFill>
+          <a:ln>
+            <a:solidFill>
+              <a:schemeClr val="tx1"/>
+            </a:solidFill>
+          </a:ln>
+        </p:spPr>
+        <p:style>
+          <a:lnRef idx="2">
+            <a:schemeClr val="dk1"/>
+          </a:lnRef>
+          <a:fillRef idx="1">
+            <a:schemeClr val="lt1"/>
+          </a:fillRef>
+          <a:effectRef idx="0">
+            <a:schemeClr val="dk1"/>
+          </a:effectRef>
+          <a:fontRef idx="minor">
+            <a:schemeClr val="dk1"/>
+          </a:fontRef>
+        </p:style>
+        <p:txBody>
+          <a:bodyPr rtlCol="0" anchor="ctr"/>
+          <a:lstStyle/>
+          <a:p>
+            <a:pPr algn="ctr"/>
+            <a:r>
+              <a:rPr lang="en-US" sz="2000">
+                <a:solidFill>
+                  <a:schemeClr val="tx1"/>
+                </a:solidFill>
+                <a:latin typeface="Times New Roman" panose="02020603050405020304" pitchFamily="18" charset="0"/>
+                <a:cs typeface="Times New Roman" panose="02020603050405020304" pitchFamily="18" charset="0"/>
+              </a:rPr>
+              <a:t>Bắt đầu</a:t>
+            </a:r>
+          </a:p>
+        </p:txBody>
+      </p:sp>
+      <p:sp>
+        <p:nvSpPr>
+          <p:cNvPr id="3" name="Rectangle: Rounded Corners 2">
+            <a:extLst>
+              <a:ext uri="{FF2B5EF4-FFF2-40B4-BE49-F238E27FC236}">
+                <a16:creationId xmlns:a16="http://schemas.microsoft.com/office/drawing/2014/main" id="{1FD55CFC-45CB-076F-E764-2798E3C31C69}"/>
+              </a:ext>
+            </a:extLst>
+          </p:cNvPr>
+          <p:cNvSpPr/>
+          <p:nvPr/>
+        </p:nvSpPr>
+        <p:spPr>
+          <a:xfrm>
+            <a:off x="3543300" y="1082278"/>
+            <a:ext cx="3352800" cy="1146572"/>
+          </a:xfrm>
+          <a:prstGeom prst="roundRect">
+            <a:avLst/>
+          </a:prstGeom>
+          <a:solidFill>
+            <a:schemeClr val="bg2"/>
+          </a:solidFill>
+          <a:ln>
+            <a:solidFill>
+              <a:schemeClr val="tx1"/>
+            </a:solidFill>
+          </a:ln>
+        </p:spPr>
+        <p:style>
+          <a:lnRef idx="2">
+            <a:schemeClr val="accent1">
+              <a:shade val="15000"/>
+            </a:schemeClr>
+          </a:lnRef>
+          <a:fillRef idx="1">
+            <a:schemeClr val="accent1"/>
+          </a:fillRef>
+          <a:effectRef idx="0">
+            <a:schemeClr val="accent1"/>
+          </a:effectRef>
+          <a:fontRef idx="minor">
+            <a:schemeClr val="lt1"/>
+          </a:fontRef>
+        </p:style>
+        <p:txBody>
+          <a:bodyPr rtlCol="0" anchor="ctr"/>
+          <a:lstStyle/>
+          <a:p>
+            <a:pPr algn="ctr"/>
+            <a:r>
+              <a:rPr lang="en-US" sz="2000">
+                <a:solidFill>
+                  <a:schemeClr val="tx1"/>
+                </a:solidFill>
+                <a:latin typeface="Times New Roman" panose="02020603050405020304" pitchFamily="18" charset="0"/>
+                <a:cs typeface="Times New Roman" panose="02020603050405020304" pitchFamily="18" charset="0"/>
+              </a:rPr>
+              <a:t>Người dùng nhập truy vấn </a:t>
+            </a:r>
+          </a:p>
+          <a:p>
+            <a:pPr algn="ctr"/>
+            <a:r>
+              <a:rPr lang="en-US" sz="2000">
+                <a:solidFill>
+                  <a:schemeClr val="tx1"/>
+                </a:solidFill>
+                <a:latin typeface="Times New Roman" panose="02020603050405020304" pitchFamily="18" charset="0"/>
+                <a:cs typeface="Times New Roman" panose="02020603050405020304" pitchFamily="18" charset="0"/>
+              </a:rPr>
+              <a:t>đầu vào dạng âm thanh</a:t>
+            </a:r>
+          </a:p>
+        </p:txBody>
+      </p:sp>
+      <p:sp>
+        <p:nvSpPr>
+          <p:cNvPr id="4" name="Rectangle: Rounded Corners 3">
+            <a:extLst>
+              <a:ext uri="{FF2B5EF4-FFF2-40B4-BE49-F238E27FC236}">
+                <a16:creationId xmlns:a16="http://schemas.microsoft.com/office/drawing/2014/main" id="{012BC32F-D488-40BE-E7AC-211C34DC428B}"/>
+              </a:ext>
+            </a:extLst>
+          </p:cNvPr>
+          <p:cNvSpPr/>
+          <p:nvPr/>
+        </p:nvSpPr>
+        <p:spPr>
+          <a:xfrm>
+            <a:off x="8260080" y="2855714"/>
+            <a:ext cx="3352800" cy="1146572"/>
+          </a:xfrm>
+          <a:prstGeom prst="roundRect">
+            <a:avLst/>
+          </a:prstGeom>
+          <a:solidFill>
+            <a:schemeClr val="bg2"/>
+          </a:solidFill>
+          <a:ln>
+            <a:solidFill>
+              <a:schemeClr val="tx1"/>
+            </a:solidFill>
+          </a:ln>
+        </p:spPr>
+        <p:style>
+          <a:lnRef idx="2">
+            <a:schemeClr val="accent1">
+              <a:shade val="15000"/>
+            </a:schemeClr>
+          </a:lnRef>
+          <a:fillRef idx="1">
+            <a:schemeClr val="accent1"/>
+          </a:fillRef>
+          <a:effectRef idx="0">
+            <a:schemeClr val="accent1"/>
+          </a:effectRef>
+          <a:fontRef idx="minor">
+            <a:schemeClr val="lt1"/>
+          </a:fontRef>
+        </p:style>
+        <p:txBody>
+          <a:bodyPr rtlCol="0" anchor="ctr"/>
+          <a:lstStyle/>
+          <a:p>
+            <a:pPr algn="ctr"/>
+            <a:r>
+              <a:rPr lang="en-US" sz="2000">
+                <a:solidFill>
+                  <a:schemeClr val="tx1"/>
+                </a:solidFill>
+                <a:latin typeface="Times New Roman" panose="02020603050405020304" pitchFamily="18" charset="0"/>
+                <a:cs typeface="Times New Roman" panose="02020603050405020304" pitchFamily="18" charset="0"/>
+              </a:rPr>
+              <a:t>Hệ thống gọi agent sinh ra phản hồi cho truy vấn văn bản</a:t>
+            </a:r>
+          </a:p>
+        </p:txBody>
+      </p:sp>
+      <p:sp>
+        <p:nvSpPr>
+          <p:cNvPr id="5" name="Rectangle: Rounded Corners 4">
+            <a:extLst>
+              <a:ext uri="{FF2B5EF4-FFF2-40B4-BE49-F238E27FC236}">
+                <a16:creationId xmlns:a16="http://schemas.microsoft.com/office/drawing/2014/main" id="{54B1920A-B421-7EFC-66B0-2A4A582AB950}"/>
+              </a:ext>
+            </a:extLst>
+          </p:cNvPr>
+          <p:cNvSpPr/>
+          <p:nvPr/>
+        </p:nvSpPr>
+        <p:spPr>
+          <a:xfrm>
+            <a:off x="3543300" y="4495562"/>
+            <a:ext cx="3352800" cy="1146572"/>
+          </a:xfrm>
+          <a:prstGeom prst="roundRect">
+            <a:avLst/>
+          </a:prstGeom>
+          <a:solidFill>
+            <a:schemeClr val="bg2"/>
+          </a:solidFill>
+          <a:ln>
+            <a:solidFill>
+              <a:schemeClr val="tx1"/>
+            </a:solidFill>
+          </a:ln>
+        </p:spPr>
+        <p:style>
+          <a:lnRef idx="2">
+            <a:schemeClr val="accent1">
+              <a:shade val="15000"/>
+            </a:schemeClr>
+          </a:lnRef>
+          <a:fillRef idx="1">
+            <a:schemeClr val="accent1"/>
+          </a:fillRef>
+          <a:effectRef idx="0">
+            <a:schemeClr val="accent1"/>
+          </a:effectRef>
+          <a:fontRef idx="minor">
+            <a:schemeClr val="lt1"/>
+          </a:fontRef>
+        </p:style>
+        <p:txBody>
+          <a:bodyPr rtlCol="0" anchor="ctr"/>
+          <a:lstStyle/>
+          <a:p>
+            <a:pPr algn="ctr"/>
+            <a:r>
+              <a:rPr lang="en-US" sz="2000">
+                <a:solidFill>
+                  <a:schemeClr val="tx1"/>
+                </a:solidFill>
+                <a:latin typeface="Times New Roman" panose="02020603050405020304" pitchFamily="18" charset="0"/>
+                <a:cs typeface="Times New Roman" panose="02020603050405020304" pitchFamily="18" charset="0"/>
+              </a:rPr>
+              <a:t>Hệ thống đưa ra phản hồi cho người dùng</a:t>
+            </a:r>
+          </a:p>
+        </p:txBody>
+      </p:sp>
+      <p:sp>
+        <p:nvSpPr>
+          <p:cNvPr id="6" name="Oval 5">
+            <a:extLst>
+              <a:ext uri="{FF2B5EF4-FFF2-40B4-BE49-F238E27FC236}">
+                <a16:creationId xmlns:a16="http://schemas.microsoft.com/office/drawing/2014/main" id="{15D19990-4494-20B0-3C52-25E34B2C5171}"/>
+              </a:ext>
+            </a:extLst>
+          </p:cNvPr>
+          <p:cNvSpPr/>
+          <p:nvPr/>
+        </p:nvSpPr>
+        <p:spPr>
+          <a:xfrm>
+            <a:off x="533254" y="4649748"/>
+            <a:ext cx="1844040" cy="838200"/>
+          </a:xfrm>
+          <a:prstGeom prst="ellipse">
+            <a:avLst/>
+          </a:prstGeom>
+          <a:solidFill>
+            <a:schemeClr val="bg2"/>
+          </a:solidFill>
+          <a:ln>
+            <a:solidFill>
+              <a:schemeClr val="tx1"/>
+            </a:solidFill>
+          </a:ln>
+        </p:spPr>
+        <p:style>
+          <a:lnRef idx="2">
+            <a:schemeClr val="dk1"/>
+          </a:lnRef>
+          <a:fillRef idx="1">
+            <a:schemeClr val="lt1"/>
+          </a:fillRef>
+          <a:effectRef idx="0">
+            <a:schemeClr val="dk1"/>
+          </a:effectRef>
+          <a:fontRef idx="minor">
+            <a:schemeClr val="dk1"/>
+          </a:fontRef>
+        </p:style>
+        <p:txBody>
+          <a:bodyPr rtlCol="0" anchor="ctr"/>
+          <a:lstStyle/>
+          <a:p>
+            <a:pPr algn="ctr"/>
+            <a:r>
+              <a:rPr lang="en-US" sz="2000">
+                <a:solidFill>
+                  <a:schemeClr val="tx1"/>
+                </a:solidFill>
+                <a:latin typeface="Times New Roman" panose="02020603050405020304" pitchFamily="18" charset="0"/>
+                <a:cs typeface="Times New Roman" panose="02020603050405020304" pitchFamily="18" charset="0"/>
+              </a:rPr>
+              <a:t>Kết thúc</a:t>
+            </a:r>
+          </a:p>
+        </p:txBody>
+      </p:sp>
+      <p:cxnSp>
+        <p:nvCxnSpPr>
+          <p:cNvPr id="10" name="Straight Arrow Connector 9">
+            <a:extLst>
+              <a:ext uri="{FF2B5EF4-FFF2-40B4-BE49-F238E27FC236}">
+                <a16:creationId xmlns:a16="http://schemas.microsoft.com/office/drawing/2014/main" id="{EEB03F82-25A2-151D-7732-8C2D919E83A8}"/>
+              </a:ext>
+            </a:extLst>
+          </p:cNvPr>
+          <p:cNvCxnSpPr>
+            <a:cxnSpLocks/>
+            <a:stCxn id="80" idx="1"/>
+            <a:endCxn id="5" idx="3"/>
+          </p:cNvCxnSpPr>
+          <p:nvPr/>
+        </p:nvCxnSpPr>
+        <p:spPr>
+          <a:xfrm flipH="1" flipV="1">
+            <a:off x="6896100" y="5068848"/>
+            <a:ext cx="1363980" cy="1548"/>
+          </a:xfrm>
+          <a:prstGeom prst="straightConnector1">
+            <a:avLst/>
+          </a:prstGeom>
+          <a:ln>
+            <a:tailEnd type="triangle"/>
+          </a:ln>
+        </p:spPr>
+        <p:style>
+          <a:lnRef idx="2">
+            <a:schemeClr val="dk1"/>
+          </a:lnRef>
+          <a:fillRef idx="0">
+            <a:schemeClr val="dk1"/>
+          </a:fillRef>
+          <a:effectRef idx="1">
+            <a:schemeClr val="dk1"/>
+          </a:effectRef>
+          <a:fontRef idx="minor">
+            <a:schemeClr val="tx1"/>
+          </a:fontRef>
+        </p:style>
+      </p:cxnSp>
+      <p:sp>
+        <p:nvSpPr>
+          <p:cNvPr id="11" name="TextBox 10">
+            <a:extLst>
+              <a:ext uri="{FF2B5EF4-FFF2-40B4-BE49-F238E27FC236}">
+                <a16:creationId xmlns:a16="http://schemas.microsoft.com/office/drawing/2014/main" id="{83DA8988-AE88-6FB4-DE9E-72AC01A75957}"/>
+              </a:ext>
+            </a:extLst>
+          </p:cNvPr>
+          <p:cNvSpPr txBox="1"/>
+          <p:nvPr/>
+        </p:nvSpPr>
+        <p:spPr>
+          <a:xfrm>
+            <a:off x="6897135" y="1286470"/>
+            <a:ext cx="453970" cy="369332"/>
+          </a:xfrm>
+          <a:prstGeom prst="rect">
+            <a:avLst/>
+          </a:prstGeom>
+          <a:noFill/>
+        </p:spPr>
+        <p:txBody>
+          <a:bodyPr wrap="none" rtlCol="0">
+            <a:spAutoFit/>
+          </a:bodyPr>
+          <a:lstStyle/>
+          <a:p>
+            <a:r>
+              <a:rPr lang="en-US">
+                <a:latin typeface="Times New Roman" panose="02020603050405020304" pitchFamily="18" charset="0"/>
+                <a:cs typeface="Times New Roman" panose="02020603050405020304" pitchFamily="18" charset="0"/>
+              </a:rPr>
+              <a:t>(2)</a:t>
+            </a:r>
+          </a:p>
+        </p:txBody>
+      </p:sp>
+      <p:sp>
+        <p:nvSpPr>
+          <p:cNvPr id="12" name="TextBox 11">
+            <a:extLst>
+              <a:ext uri="{FF2B5EF4-FFF2-40B4-BE49-F238E27FC236}">
+                <a16:creationId xmlns:a16="http://schemas.microsoft.com/office/drawing/2014/main" id="{6BDF8B9F-A792-6678-A237-8A18D79AA52A}"/>
+              </a:ext>
+            </a:extLst>
+          </p:cNvPr>
+          <p:cNvSpPr txBox="1"/>
+          <p:nvPr/>
+        </p:nvSpPr>
+        <p:spPr>
+          <a:xfrm>
+            <a:off x="9951140" y="2228850"/>
+            <a:ext cx="453970" cy="369332"/>
+          </a:xfrm>
+          <a:prstGeom prst="rect">
+            <a:avLst/>
+          </a:prstGeom>
+          <a:noFill/>
+        </p:spPr>
+        <p:txBody>
+          <a:bodyPr wrap="none" rtlCol="0">
+            <a:spAutoFit/>
+          </a:bodyPr>
+          <a:lstStyle/>
+          <a:p>
+            <a:r>
+              <a:rPr lang="en-US">
+                <a:latin typeface="Times New Roman" panose="02020603050405020304" pitchFamily="18" charset="0"/>
+                <a:cs typeface="Times New Roman" panose="02020603050405020304" pitchFamily="18" charset="0"/>
+              </a:rPr>
+              <a:t>(3)</a:t>
+            </a:r>
+          </a:p>
+        </p:txBody>
+      </p:sp>
+      <p:sp>
+        <p:nvSpPr>
+          <p:cNvPr id="13" name="TextBox 12">
+            <a:extLst>
+              <a:ext uri="{FF2B5EF4-FFF2-40B4-BE49-F238E27FC236}">
+                <a16:creationId xmlns:a16="http://schemas.microsoft.com/office/drawing/2014/main" id="{0AF1B328-25AD-5F94-8892-B231A3582966}"/>
+              </a:ext>
+            </a:extLst>
+          </p:cNvPr>
+          <p:cNvSpPr txBox="1"/>
+          <p:nvPr/>
+        </p:nvSpPr>
+        <p:spPr>
+          <a:xfrm>
+            <a:off x="7806110" y="4699279"/>
+            <a:ext cx="453970" cy="369332"/>
+          </a:xfrm>
+          <a:prstGeom prst="rect">
+            <a:avLst/>
+          </a:prstGeom>
+          <a:noFill/>
+        </p:spPr>
+        <p:txBody>
+          <a:bodyPr wrap="none" rtlCol="0">
+            <a:spAutoFit/>
+          </a:bodyPr>
+          <a:lstStyle/>
+          <a:p>
+            <a:r>
+              <a:rPr lang="en-US">
+                <a:latin typeface="Times New Roman" panose="02020603050405020304" pitchFamily="18" charset="0"/>
+                <a:cs typeface="Times New Roman" panose="02020603050405020304" pitchFamily="18" charset="0"/>
+              </a:rPr>
+              <a:t>(5)</a:t>
+            </a:r>
+          </a:p>
+        </p:txBody>
+      </p:sp>
+      <p:sp>
+        <p:nvSpPr>
+          <p:cNvPr id="14" name="TextBox 13">
+            <a:extLst>
+              <a:ext uri="{FF2B5EF4-FFF2-40B4-BE49-F238E27FC236}">
+                <a16:creationId xmlns:a16="http://schemas.microsoft.com/office/drawing/2014/main" id="{D9D70832-FA92-8019-E202-E206CDAD1F8B}"/>
+              </a:ext>
+            </a:extLst>
+          </p:cNvPr>
+          <p:cNvSpPr txBox="1"/>
+          <p:nvPr/>
+        </p:nvSpPr>
+        <p:spPr>
+          <a:xfrm>
+            <a:off x="3089330" y="4699279"/>
+            <a:ext cx="453970" cy="369332"/>
+          </a:xfrm>
+          <a:prstGeom prst="rect">
+            <a:avLst/>
+          </a:prstGeom>
+          <a:noFill/>
+        </p:spPr>
+        <p:txBody>
+          <a:bodyPr wrap="none" rtlCol="0">
+            <a:spAutoFit/>
+          </a:bodyPr>
+          <a:lstStyle/>
+          <a:p>
+            <a:r>
+              <a:rPr lang="en-US">
+                <a:latin typeface="Times New Roman" panose="02020603050405020304" pitchFamily="18" charset="0"/>
+                <a:cs typeface="Times New Roman" panose="02020603050405020304" pitchFamily="18" charset="0"/>
+              </a:rPr>
+              <a:t>(6)</a:t>
+            </a:r>
+          </a:p>
+        </p:txBody>
+      </p:sp>
+      <p:sp>
+        <p:nvSpPr>
+          <p:cNvPr id="19" name="Rectangle: Rounded Corners 18">
+            <a:extLst>
+              <a:ext uri="{FF2B5EF4-FFF2-40B4-BE49-F238E27FC236}">
+                <a16:creationId xmlns:a16="http://schemas.microsoft.com/office/drawing/2014/main" id="{0401DB0B-6A26-2921-74FF-83D321420B3B}"/>
+              </a:ext>
+            </a:extLst>
+          </p:cNvPr>
+          <p:cNvSpPr/>
+          <p:nvPr/>
+        </p:nvSpPr>
+        <p:spPr>
+          <a:xfrm>
+            <a:off x="8260080" y="1082278"/>
+            <a:ext cx="3352800" cy="1146572"/>
+          </a:xfrm>
+          <a:prstGeom prst="roundRect">
+            <a:avLst/>
+          </a:prstGeom>
+          <a:solidFill>
+            <a:schemeClr val="bg2"/>
+          </a:solidFill>
+          <a:ln>
+            <a:solidFill>
+              <a:schemeClr val="tx1"/>
+            </a:solidFill>
+          </a:ln>
+        </p:spPr>
+        <p:style>
+          <a:lnRef idx="2">
+            <a:schemeClr val="accent1">
+              <a:shade val="15000"/>
+            </a:schemeClr>
+          </a:lnRef>
+          <a:fillRef idx="1">
+            <a:schemeClr val="accent1"/>
+          </a:fillRef>
+          <a:effectRef idx="0">
+            <a:schemeClr val="accent1"/>
+          </a:effectRef>
+          <a:fontRef idx="minor">
+            <a:schemeClr val="lt1"/>
+          </a:fontRef>
+        </p:style>
+        <p:txBody>
+          <a:bodyPr rtlCol="0" anchor="ctr"/>
+          <a:lstStyle/>
+          <a:p>
+            <a:pPr algn="ctr"/>
+            <a:r>
+              <a:rPr lang="en-US" sz="2000">
+                <a:solidFill>
+                  <a:schemeClr val="tx1"/>
+                </a:solidFill>
+                <a:latin typeface="Times New Roman" panose="02020603050405020304" pitchFamily="18" charset="0"/>
+                <a:cs typeface="Times New Roman" panose="02020603050405020304" pitchFamily="18" charset="0"/>
+              </a:rPr>
+              <a:t>Hệ thống chuyển đổi truy vấn từ âm thanh sang văn bản</a:t>
+            </a:r>
+          </a:p>
+        </p:txBody>
+      </p:sp>
+      <p:cxnSp>
+        <p:nvCxnSpPr>
+          <p:cNvPr id="32" name="Straight Arrow Connector 31">
+            <a:extLst>
+              <a:ext uri="{FF2B5EF4-FFF2-40B4-BE49-F238E27FC236}">
+                <a16:creationId xmlns:a16="http://schemas.microsoft.com/office/drawing/2014/main" id="{69CA16BF-CFB6-3255-EE70-71A1800C7386}"/>
+              </a:ext>
+            </a:extLst>
+          </p:cNvPr>
+          <p:cNvCxnSpPr>
+            <a:cxnSpLocks/>
+            <a:stCxn id="2" idx="6"/>
+            <a:endCxn id="3" idx="1"/>
+          </p:cNvCxnSpPr>
+          <p:nvPr/>
+        </p:nvCxnSpPr>
+        <p:spPr>
+          <a:xfrm>
+            <a:off x="2407340" y="1655564"/>
+            <a:ext cx="1135960" cy="0"/>
+          </a:xfrm>
+          <a:prstGeom prst="straightConnector1">
+            <a:avLst/>
+          </a:prstGeom>
+          <a:ln>
+            <a:tailEnd type="triangle"/>
+          </a:ln>
+        </p:spPr>
+        <p:style>
+          <a:lnRef idx="2">
+            <a:schemeClr val="dk1"/>
+          </a:lnRef>
+          <a:fillRef idx="0">
+            <a:schemeClr val="dk1"/>
+          </a:fillRef>
+          <a:effectRef idx="1">
+            <a:schemeClr val="dk1"/>
+          </a:effectRef>
+          <a:fontRef idx="minor">
+            <a:schemeClr val="tx1"/>
+          </a:fontRef>
+        </p:style>
+      </p:cxnSp>
+      <p:cxnSp>
+        <p:nvCxnSpPr>
+          <p:cNvPr id="37" name="Straight Arrow Connector 36">
+            <a:extLst>
+              <a:ext uri="{FF2B5EF4-FFF2-40B4-BE49-F238E27FC236}">
+                <a16:creationId xmlns:a16="http://schemas.microsoft.com/office/drawing/2014/main" id="{6F9A9B17-2BF5-D280-1052-147247FF1DC9}"/>
+              </a:ext>
+            </a:extLst>
+          </p:cNvPr>
+          <p:cNvCxnSpPr>
+            <a:cxnSpLocks/>
+            <a:stCxn id="3" idx="3"/>
+            <a:endCxn id="19" idx="1"/>
+          </p:cNvCxnSpPr>
+          <p:nvPr/>
+        </p:nvCxnSpPr>
+        <p:spPr>
+          <a:xfrm>
+            <a:off x="6896100" y="1655564"/>
+            <a:ext cx="1363980" cy="0"/>
+          </a:xfrm>
+          <a:prstGeom prst="straightConnector1">
+            <a:avLst/>
+          </a:prstGeom>
+          <a:ln>
+            <a:tailEnd type="triangle"/>
+          </a:ln>
+        </p:spPr>
+        <p:style>
+          <a:lnRef idx="2">
+            <a:schemeClr val="dk1"/>
+          </a:lnRef>
+          <a:fillRef idx="0">
+            <a:schemeClr val="dk1"/>
+          </a:fillRef>
+          <a:effectRef idx="1">
+            <a:schemeClr val="dk1"/>
+          </a:effectRef>
+          <a:fontRef idx="minor">
+            <a:schemeClr val="tx1"/>
+          </a:fontRef>
+        </p:style>
+      </p:cxnSp>
+      <p:cxnSp>
+        <p:nvCxnSpPr>
+          <p:cNvPr id="40" name="Straight Arrow Connector 39">
+            <a:extLst>
+              <a:ext uri="{FF2B5EF4-FFF2-40B4-BE49-F238E27FC236}">
+                <a16:creationId xmlns:a16="http://schemas.microsoft.com/office/drawing/2014/main" id="{D93911F4-290D-D63C-C1A1-C249AA350DC4}"/>
+              </a:ext>
+            </a:extLst>
+          </p:cNvPr>
+          <p:cNvCxnSpPr>
+            <a:cxnSpLocks/>
+            <a:stCxn id="19" idx="2"/>
+            <a:endCxn id="4" idx="0"/>
+          </p:cNvCxnSpPr>
+          <p:nvPr/>
+        </p:nvCxnSpPr>
+        <p:spPr>
+          <a:xfrm>
+            <a:off x="9936480" y="2228850"/>
+            <a:ext cx="0" cy="626864"/>
+          </a:xfrm>
+          <a:prstGeom prst="straightConnector1">
+            <a:avLst/>
+          </a:prstGeom>
+          <a:ln>
+            <a:tailEnd type="triangle"/>
+          </a:ln>
+        </p:spPr>
+        <p:style>
+          <a:lnRef idx="2">
+            <a:schemeClr val="dk1"/>
+          </a:lnRef>
+          <a:fillRef idx="0">
+            <a:schemeClr val="dk1"/>
+          </a:fillRef>
+          <a:effectRef idx="1">
+            <a:schemeClr val="dk1"/>
+          </a:effectRef>
+          <a:fontRef idx="minor">
+            <a:schemeClr val="tx1"/>
+          </a:fontRef>
+        </p:style>
+      </p:cxnSp>
+      <p:sp>
+        <p:nvSpPr>
+          <p:cNvPr id="43" name="TextBox 42">
+            <a:extLst>
+              <a:ext uri="{FF2B5EF4-FFF2-40B4-BE49-F238E27FC236}">
+                <a16:creationId xmlns:a16="http://schemas.microsoft.com/office/drawing/2014/main" id="{DDF65E27-7ED9-F013-8222-13C703D45D29}"/>
+              </a:ext>
+            </a:extLst>
+          </p:cNvPr>
+          <p:cNvSpPr txBox="1"/>
+          <p:nvPr/>
+        </p:nvSpPr>
+        <p:spPr>
+          <a:xfrm>
+            <a:off x="2408375" y="1286470"/>
+            <a:ext cx="453970" cy="369332"/>
+          </a:xfrm>
+          <a:prstGeom prst="rect">
+            <a:avLst/>
+          </a:prstGeom>
+          <a:noFill/>
+        </p:spPr>
+        <p:txBody>
+          <a:bodyPr wrap="none" rtlCol="0">
+            <a:spAutoFit/>
+          </a:bodyPr>
+          <a:lstStyle/>
+          <a:p>
+            <a:r>
+              <a:rPr lang="en-US">
+                <a:latin typeface="Times New Roman" panose="02020603050405020304" pitchFamily="18" charset="0"/>
+                <a:cs typeface="Times New Roman" panose="02020603050405020304" pitchFamily="18" charset="0"/>
+              </a:rPr>
+              <a:t>(1)</a:t>
+            </a:r>
+          </a:p>
+        </p:txBody>
+      </p:sp>
+      <p:cxnSp>
+        <p:nvCxnSpPr>
+          <p:cNvPr id="76" name="Straight Arrow Connector 75">
+            <a:extLst>
+              <a:ext uri="{FF2B5EF4-FFF2-40B4-BE49-F238E27FC236}">
+                <a16:creationId xmlns:a16="http://schemas.microsoft.com/office/drawing/2014/main" id="{B8461CB0-63ED-4A9D-1B90-E2949619306C}"/>
+              </a:ext>
+            </a:extLst>
+          </p:cNvPr>
+          <p:cNvCxnSpPr>
+            <a:stCxn id="5" idx="1"/>
+            <a:endCxn id="6" idx="6"/>
+          </p:cNvCxnSpPr>
+          <p:nvPr/>
+        </p:nvCxnSpPr>
+        <p:spPr>
+          <a:xfrm flipH="1">
+            <a:off x="2377294" y="5068848"/>
+            <a:ext cx="1166006" cy="0"/>
+          </a:xfrm>
+          <a:prstGeom prst="straightConnector1">
+            <a:avLst/>
+          </a:prstGeom>
+          <a:ln>
+            <a:tailEnd type="triangle"/>
+          </a:ln>
+        </p:spPr>
+        <p:style>
+          <a:lnRef idx="2">
+            <a:schemeClr val="dk1"/>
+          </a:lnRef>
+          <a:fillRef idx="0">
+            <a:schemeClr val="dk1"/>
+          </a:fillRef>
+          <a:effectRef idx="1">
+            <a:schemeClr val="dk1"/>
+          </a:effectRef>
+          <a:fontRef idx="minor">
+            <a:schemeClr val="tx1"/>
+          </a:fontRef>
+        </p:style>
+      </p:cxnSp>
+      <p:sp>
+        <p:nvSpPr>
+          <p:cNvPr id="80" name="Rectangle: Rounded Corners 79">
+            <a:extLst>
+              <a:ext uri="{FF2B5EF4-FFF2-40B4-BE49-F238E27FC236}">
+                <a16:creationId xmlns:a16="http://schemas.microsoft.com/office/drawing/2014/main" id="{BCC66C11-250E-00AA-715E-FE85F08CD21D}"/>
+              </a:ext>
+            </a:extLst>
+          </p:cNvPr>
+          <p:cNvSpPr/>
+          <p:nvPr/>
+        </p:nvSpPr>
+        <p:spPr>
+          <a:xfrm>
+            <a:off x="8260080" y="4497110"/>
+            <a:ext cx="3352800" cy="1146572"/>
+          </a:xfrm>
+          <a:prstGeom prst="roundRect">
+            <a:avLst/>
+          </a:prstGeom>
+          <a:solidFill>
+            <a:schemeClr val="bg2"/>
+          </a:solidFill>
+          <a:ln>
+            <a:solidFill>
+              <a:schemeClr val="tx1"/>
+            </a:solidFill>
+          </a:ln>
+        </p:spPr>
+        <p:style>
+          <a:lnRef idx="2">
+            <a:schemeClr val="accent1">
+              <a:shade val="15000"/>
+            </a:schemeClr>
+          </a:lnRef>
+          <a:fillRef idx="1">
+            <a:schemeClr val="accent1"/>
+          </a:fillRef>
+          <a:effectRef idx="0">
+            <a:schemeClr val="accent1"/>
+          </a:effectRef>
+          <a:fontRef idx="minor">
+            <a:schemeClr val="lt1"/>
+          </a:fontRef>
+        </p:style>
+        <p:txBody>
+          <a:bodyPr rtlCol="0" anchor="ctr"/>
+          <a:lstStyle/>
+          <a:p>
+            <a:pPr algn="ctr"/>
+            <a:r>
+              <a:rPr lang="en-US" sz="2000">
+                <a:solidFill>
+                  <a:schemeClr val="tx1"/>
+                </a:solidFill>
+                <a:latin typeface="Times New Roman" panose="02020603050405020304" pitchFamily="18" charset="0"/>
+                <a:cs typeface="Times New Roman" panose="02020603050405020304" pitchFamily="18" charset="0"/>
+              </a:rPr>
+              <a:t>Hệ thống chuyển đổi phản hồi sang dạng âm thanh</a:t>
+            </a:r>
+          </a:p>
+        </p:txBody>
+      </p:sp>
+      <p:cxnSp>
+        <p:nvCxnSpPr>
+          <p:cNvPr id="82" name="Straight Arrow Connector 81">
+            <a:extLst>
+              <a:ext uri="{FF2B5EF4-FFF2-40B4-BE49-F238E27FC236}">
+                <a16:creationId xmlns:a16="http://schemas.microsoft.com/office/drawing/2014/main" id="{D38BA67F-B673-C314-25C9-C505F698BF19}"/>
+              </a:ext>
+            </a:extLst>
+          </p:cNvPr>
+          <p:cNvCxnSpPr>
+            <a:cxnSpLocks/>
+            <a:stCxn id="4" idx="2"/>
+            <a:endCxn id="80" idx="0"/>
+          </p:cNvCxnSpPr>
+          <p:nvPr/>
+        </p:nvCxnSpPr>
+        <p:spPr>
+          <a:xfrm>
+            <a:off x="9936480" y="4002286"/>
+            <a:ext cx="0" cy="494824"/>
+          </a:xfrm>
+          <a:prstGeom prst="straightConnector1">
+            <a:avLst/>
+          </a:prstGeom>
+          <a:ln>
+            <a:tailEnd type="triangle"/>
+          </a:ln>
+        </p:spPr>
+        <p:style>
+          <a:lnRef idx="2">
+            <a:schemeClr val="dk1"/>
+          </a:lnRef>
+          <a:fillRef idx="0">
+            <a:schemeClr val="dk1"/>
+          </a:fillRef>
+          <a:effectRef idx="1">
+            <a:schemeClr val="dk1"/>
+          </a:effectRef>
+          <a:fontRef idx="minor">
+            <a:schemeClr val="tx1"/>
+          </a:fontRef>
+        </p:style>
+      </p:cxnSp>
+      <p:sp>
+        <p:nvSpPr>
+          <p:cNvPr id="85" name="TextBox 84">
+            <a:extLst>
+              <a:ext uri="{FF2B5EF4-FFF2-40B4-BE49-F238E27FC236}">
+                <a16:creationId xmlns:a16="http://schemas.microsoft.com/office/drawing/2014/main" id="{693B2600-13EF-9684-55D5-F2EC963AFB97}"/>
+              </a:ext>
+            </a:extLst>
+          </p:cNvPr>
+          <p:cNvSpPr txBox="1"/>
+          <p:nvPr/>
+        </p:nvSpPr>
+        <p:spPr>
+          <a:xfrm>
+            <a:off x="9951140" y="4002286"/>
+            <a:ext cx="453970" cy="369332"/>
+          </a:xfrm>
+          <a:prstGeom prst="rect">
+            <a:avLst/>
+          </a:prstGeom>
+          <a:noFill/>
+        </p:spPr>
+        <p:txBody>
+          <a:bodyPr wrap="none" rtlCol="0">
+            <a:spAutoFit/>
+          </a:bodyPr>
+          <a:lstStyle/>
+          <a:p>
+            <a:r>
+              <a:rPr lang="en-US">
+                <a:latin typeface="Times New Roman" panose="02020603050405020304" pitchFamily="18" charset="0"/>
+                <a:cs typeface="Times New Roman" panose="02020603050405020304" pitchFamily="18" charset="0"/>
+              </a:rPr>
+              <a:t>(4)</a:t>
+            </a:r>
+          </a:p>
+        </p:txBody>
+      </p:sp>
+    </p:spTree>
+    <p:extLst>
+      <p:ext uri="{BB962C8B-B14F-4D97-AF65-F5344CB8AC3E}">
+        <p14:creationId xmlns:p14="http://schemas.microsoft.com/office/powerpoint/2010/main" val="354594061"/>
+      </p:ext>
+    </p:extLst>
+  </p:cSld>
+  <p:clrMapOvr>
+    <a:masterClrMapping/>
+  </p:clrMapOvr>
+</p:sld>
+</file>
+
+<file path=ppt/slides/slide19.xml><?xml version="1.0" encoding="utf-8"?>
+<p:sld xmlns:a="http://schemas.openxmlformats.org/drawingml/2006/main" xmlns:r="http://schemas.openxmlformats.org/officeDocument/2006/relationships" xmlns:p="http://schemas.openxmlformats.org/presentationml/2006/main">
+  <p:cSld>
+    <p:spTree>
+      <p:nvGrpSpPr>
+        <p:cNvPr id="1" name=""/>
+        <p:cNvGrpSpPr/>
+        <p:nvPr/>
+      </p:nvGrpSpPr>
+      <p:grpSpPr>
+        <a:xfrm>
+          <a:off x="0" y="0"/>
+          <a:ext cx="0" cy="0"/>
+          <a:chOff x="0" y="0"/>
+          <a:chExt cx="0" cy="0"/>
+        </a:xfrm>
+      </p:grpSpPr>
+      <p:grpSp>
+        <p:nvGrpSpPr>
+          <p:cNvPr id="2" name="Group 1">
+            <a:extLst>
+              <a:ext uri="{FF2B5EF4-FFF2-40B4-BE49-F238E27FC236}">
+                <a16:creationId xmlns:a16="http://schemas.microsoft.com/office/drawing/2014/main" id="{73E2BB15-81E6-3CB5-6208-9BA2561B03A4}"/>
+              </a:ext>
+            </a:extLst>
+          </p:cNvPr>
+          <p:cNvGrpSpPr/>
+          <p:nvPr/>
+        </p:nvGrpSpPr>
+        <p:grpSpPr>
+          <a:xfrm>
+            <a:off x="607650" y="3679295"/>
+            <a:ext cx="1436459" cy="1447800"/>
+            <a:chOff x="5261639" y="42349"/>
+            <a:chExt cx="1421219" cy="1211352"/>
+          </a:xfrm>
+        </p:grpSpPr>
+        <p:pic>
+          <p:nvPicPr>
+            <p:cNvPr id="3" name="Graphic 2" descr="User with solid fill">
+              <a:extLst>
+                <a:ext uri="{FF2B5EF4-FFF2-40B4-BE49-F238E27FC236}">
+                  <a16:creationId xmlns:a16="http://schemas.microsoft.com/office/drawing/2014/main" id="{FD767353-39B8-8AA6-8B81-94A0638867C7}"/>
+                </a:ext>
+              </a:extLst>
+            </p:cNvPr>
+            <p:cNvPicPr>
+              <a:picLocks noChangeAspect="1"/>
+            </p:cNvPicPr>
+            <p:nvPr/>
+          </p:nvPicPr>
+          <p:blipFill>
+            <a:blip r:embed="rId3">
+              <a:extLst>
+                <a:ext uri="{96DAC541-7B7A-43D3-8B79-37D633B846F1}">
+                  <asvg:svgBlip xmlns:asvg="http://schemas.microsoft.com/office/drawing/2016/SVG/main" r:embed="rId4"/>
+                </a:ext>
+              </a:extLst>
+            </a:blip>
+            <a:stretch>
+              <a:fillRect/>
+            </a:stretch>
+          </p:blipFill>
+          <p:spPr>
+            <a:xfrm>
+              <a:off x="5333030" y="42349"/>
+              <a:ext cx="1264935" cy="1003931"/>
+            </a:xfrm>
+            <a:prstGeom prst="rect">
+              <a:avLst/>
+            </a:prstGeom>
+          </p:spPr>
+        </p:pic>
+        <p:sp>
+          <p:nvSpPr>
+            <p:cNvPr id="4" name="TextBox 3">
+              <a:extLst>
+                <a:ext uri="{FF2B5EF4-FFF2-40B4-BE49-F238E27FC236}">
+                  <a16:creationId xmlns:a16="http://schemas.microsoft.com/office/drawing/2014/main" id="{BCFDA823-BB4C-071E-8243-66DEA1FB2565}"/>
+                </a:ext>
+              </a:extLst>
+            </p:cNvPr>
+            <p:cNvSpPr txBox="1"/>
+            <p:nvPr/>
+          </p:nvSpPr>
+          <p:spPr>
+            <a:xfrm>
+              <a:off x="5261639" y="884369"/>
+              <a:ext cx="1421219" cy="369332"/>
+            </a:xfrm>
+            <a:prstGeom prst="rect">
+              <a:avLst/>
+            </a:prstGeom>
+            <a:noFill/>
+          </p:spPr>
+          <p:txBody>
+            <a:bodyPr wrap="square" rtlCol="0">
+              <a:spAutoFit/>
+            </a:bodyPr>
+            <a:lstStyle/>
+            <a:p>
+              <a:pPr algn="ctr"/>
+              <a:r>
+                <a:rPr lang="vi-VN">
+                  <a:latin typeface="+mj-lt"/>
+                </a:rPr>
+                <a:t>Người dùng</a:t>
+              </a:r>
+              <a:endParaRPr lang="en-US">
+                <a:latin typeface="+mj-lt"/>
+              </a:endParaRPr>
+            </a:p>
+          </p:txBody>
+        </p:sp>
+      </p:grpSp>
+      <p:sp>
+        <p:nvSpPr>
+          <p:cNvPr id="5" name="Rectangle: Rounded Corners 4">
+            <a:extLst>
+              <a:ext uri="{FF2B5EF4-FFF2-40B4-BE49-F238E27FC236}">
+                <a16:creationId xmlns:a16="http://schemas.microsoft.com/office/drawing/2014/main" id="{64FD7EBA-7EE3-D3C7-0711-82AA3FBA6B0A}"/>
+              </a:ext>
+            </a:extLst>
+          </p:cNvPr>
+          <p:cNvSpPr/>
+          <p:nvPr/>
+        </p:nvSpPr>
+        <p:spPr>
+          <a:xfrm>
+            <a:off x="3230880" y="3841973"/>
+            <a:ext cx="2453640" cy="874535"/>
+          </a:xfrm>
+          <a:prstGeom prst="roundRect">
+            <a:avLst/>
+          </a:prstGeom>
+          <a:solidFill>
+            <a:schemeClr val="bg2"/>
+          </a:solidFill>
+          <a:ln>
+            <a:solidFill>
+              <a:schemeClr val="tx1"/>
+            </a:solidFill>
+            <a:prstDash val="dash"/>
+          </a:ln>
+        </p:spPr>
+        <p:style>
+          <a:lnRef idx="2">
+            <a:schemeClr val="accent1">
+              <a:shade val="15000"/>
+            </a:schemeClr>
+          </a:lnRef>
+          <a:fillRef idx="1">
+            <a:schemeClr val="accent1"/>
+          </a:fillRef>
+          <a:effectRef idx="0">
+            <a:schemeClr val="accent1"/>
+          </a:effectRef>
+          <a:fontRef idx="minor">
+            <a:schemeClr val="lt1"/>
+          </a:fontRef>
+        </p:style>
+        <p:txBody>
+          <a:bodyPr rtlCol="0" anchor="ctr"/>
+          <a:lstStyle/>
+          <a:p>
+            <a:pPr algn="ctr"/>
+            <a:r>
+              <a:rPr lang="en-US">
+                <a:solidFill>
+                  <a:schemeClr val="tx1"/>
+                </a:solidFill>
+                <a:latin typeface="Times New Roman" panose="02020603050405020304" pitchFamily="18" charset="0"/>
+                <a:cs typeface="Times New Roman" panose="02020603050405020304" pitchFamily="18" charset="0"/>
+              </a:rPr>
+              <a:t>Giao diện chat</a:t>
+            </a:r>
+          </a:p>
+        </p:txBody>
+      </p:sp>
+      <p:sp>
+        <p:nvSpPr>
+          <p:cNvPr id="6" name="Rectangle: Rounded Corners 5">
+            <a:extLst>
+              <a:ext uri="{FF2B5EF4-FFF2-40B4-BE49-F238E27FC236}">
+                <a16:creationId xmlns:a16="http://schemas.microsoft.com/office/drawing/2014/main" id="{A2D447F5-D6BF-EE51-5696-41A2E5E6EB71}"/>
+              </a:ext>
+            </a:extLst>
+          </p:cNvPr>
+          <p:cNvSpPr/>
+          <p:nvPr/>
+        </p:nvSpPr>
+        <p:spPr>
+          <a:xfrm>
+            <a:off x="8602980" y="325356"/>
+            <a:ext cx="2453640" cy="874535"/>
+          </a:xfrm>
+          <a:prstGeom prst="roundRect">
+            <a:avLst/>
+          </a:prstGeom>
+          <a:solidFill>
+            <a:schemeClr val="bg2"/>
+          </a:solidFill>
+          <a:ln>
+            <a:solidFill>
+              <a:schemeClr val="tx1"/>
+            </a:solidFill>
+          </a:ln>
+        </p:spPr>
+        <p:style>
+          <a:lnRef idx="2">
+            <a:schemeClr val="accent1">
+              <a:shade val="15000"/>
+            </a:schemeClr>
+          </a:lnRef>
+          <a:fillRef idx="1">
+            <a:schemeClr val="accent1"/>
+          </a:fillRef>
+          <a:effectRef idx="0">
+            <a:schemeClr val="accent1"/>
+          </a:effectRef>
+          <a:fontRef idx="minor">
+            <a:schemeClr val="lt1"/>
+          </a:fontRef>
+        </p:style>
+        <p:txBody>
+          <a:bodyPr rtlCol="0" anchor="ctr"/>
+          <a:lstStyle/>
+          <a:p>
+            <a:pPr algn="ctr"/>
+            <a:r>
+              <a:rPr lang="en-US">
+                <a:solidFill>
+                  <a:schemeClr val="tx1"/>
+                </a:solidFill>
+                <a:latin typeface="Times New Roman" panose="02020603050405020304" pitchFamily="18" charset="0"/>
+                <a:cs typeface="Times New Roman" panose="02020603050405020304" pitchFamily="18" charset="0"/>
+              </a:rPr>
+              <a:t>Truy xuất ngữ cảnh của các lần trò chuyện trước đó</a:t>
+            </a:r>
+          </a:p>
+        </p:txBody>
+      </p:sp>
+      <p:sp>
+        <p:nvSpPr>
+          <p:cNvPr id="7" name="Rectangle: Rounded Corners 6">
+            <a:extLst>
+              <a:ext uri="{FF2B5EF4-FFF2-40B4-BE49-F238E27FC236}">
+                <a16:creationId xmlns:a16="http://schemas.microsoft.com/office/drawing/2014/main" id="{0823B489-FD20-7463-67B4-AD014E669E4E}"/>
+              </a:ext>
+            </a:extLst>
+          </p:cNvPr>
+          <p:cNvSpPr/>
+          <p:nvPr/>
+        </p:nvSpPr>
+        <p:spPr>
+          <a:xfrm>
+            <a:off x="8602980" y="1608029"/>
+            <a:ext cx="2453640" cy="874535"/>
+          </a:xfrm>
+          <a:prstGeom prst="roundRect">
+            <a:avLst/>
+          </a:prstGeom>
+          <a:solidFill>
+            <a:schemeClr val="bg2"/>
+          </a:solidFill>
+          <a:ln>
+            <a:solidFill>
+              <a:schemeClr val="tx1"/>
+            </a:solidFill>
+          </a:ln>
+        </p:spPr>
+        <p:style>
+          <a:lnRef idx="2">
+            <a:schemeClr val="accent1">
+              <a:shade val="15000"/>
+            </a:schemeClr>
+          </a:lnRef>
+          <a:fillRef idx="1">
+            <a:schemeClr val="accent1"/>
+          </a:fillRef>
+          <a:effectRef idx="0">
+            <a:schemeClr val="accent1"/>
+          </a:effectRef>
+          <a:fontRef idx="minor">
+            <a:schemeClr val="lt1"/>
+          </a:fontRef>
+        </p:style>
+        <p:txBody>
+          <a:bodyPr rtlCol="0" anchor="ctr"/>
+          <a:lstStyle/>
+          <a:p>
+            <a:pPr algn="ctr"/>
+            <a:r>
+              <a:rPr lang="en-US">
+                <a:solidFill>
+                  <a:schemeClr val="tx1"/>
+                </a:solidFill>
+                <a:latin typeface="Times New Roman" panose="02020603050405020304" pitchFamily="18" charset="0"/>
+                <a:cs typeface="Times New Roman" panose="02020603050405020304" pitchFamily="18" charset="0"/>
+              </a:rPr>
+              <a:t>Tạo prompt chứa ngữ cảnh cuộc trò chuyện</a:t>
+            </a:r>
+          </a:p>
+        </p:txBody>
+      </p:sp>
+      <p:sp>
+        <p:nvSpPr>
+          <p:cNvPr id="8" name="Rectangle: Rounded Corners 7">
+            <a:extLst>
+              <a:ext uri="{FF2B5EF4-FFF2-40B4-BE49-F238E27FC236}">
+                <a16:creationId xmlns:a16="http://schemas.microsoft.com/office/drawing/2014/main" id="{02C54032-82CE-752D-B8D6-9CADCCB908FB}"/>
+              </a:ext>
+            </a:extLst>
+          </p:cNvPr>
+          <p:cNvSpPr/>
+          <p:nvPr/>
+        </p:nvSpPr>
+        <p:spPr>
+          <a:xfrm>
+            <a:off x="8602980" y="2890702"/>
+            <a:ext cx="2453640" cy="874535"/>
+          </a:xfrm>
+          <a:prstGeom prst="roundRect">
+            <a:avLst/>
+          </a:prstGeom>
+          <a:solidFill>
+            <a:schemeClr val="bg2"/>
+          </a:solidFill>
+          <a:ln>
+            <a:solidFill>
+              <a:schemeClr val="tx1"/>
+            </a:solidFill>
+          </a:ln>
+        </p:spPr>
+        <p:style>
+          <a:lnRef idx="2">
+            <a:schemeClr val="accent1">
+              <a:shade val="15000"/>
+            </a:schemeClr>
+          </a:lnRef>
+          <a:fillRef idx="1">
+            <a:schemeClr val="accent1"/>
+          </a:fillRef>
+          <a:effectRef idx="0">
+            <a:schemeClr val="accent1"/>
+          </a:effectRef>
+          <a:fontRef idx="minor">
+            <a:schemeClr val="lt1"/>
+          </a:fontRef>
+        </p:style>
+        <p:txBody>
+          <a:bodyPr rtlCol="0" anchor="ctr"/>
+          <a:lstStyle/>
+          <a:p>
+            <a:pPr algn="ctr"/>
+            <a:r>
+              <a:rPr lang="en-US">
+                <a:solidFill>
+                  <a:schemeClr val="tx1"/>
+                </a:solidFill>
+                <a:latin typeface="Times New Roman" panose="02020603050405020304" pitchFamily="18" charset="0"/>
+                <a:cs typeface="Times New Roman" panose="02020603050405020304" pitchFamily="18" charset="0"/>
+              </a:rPr>
+              <a:t>Gửi prompt và truy vấn của người dùng đến LLM</a:t>
+            </a:r>
+          </a:p>
+        </p:txBody>
+      </p:sp>
+      <p:sp>
+        <p:nvSpPr>
+          <p:cNvPr id="9" name="Rectangle: Rounded Corners 8">
+            <a:extLst>
+              <a:ext uri="{FF2B5EF4-FFF2-40B4-BE49-F238E27FC236}">
+                <a16:creationId xmlns:a16="http://schemas.microsoft.com/office/drawing/2014/main" id="{D43600C6-CA1C-B945-8F86-C4B94FE02C48}"/>
+              </a:ext>
+            </a:extLst>
+          </p:cNvPr>
+          <p:cNvSpPr/>
+          <p:nvPr/>
+        </p:nvSpPr>
+        <p:spPr>
+          <a:xfrm>
+            <a:off x="8159393" y="4173375"/>
+            <a:ext cx="3352800" cy="874535"/>
+          </a:xfrm>
+          <a:prstGeom prst="roundRect">
+            <a:avLst/>
+          </a:prstGeom>
+          <a:solidFill>
+            <a:schemeClr val="bg2"/>
+          </a:solidFill>
+          <a:ln>
+            <a:solidFill>
+              <a:schemeClr val="tx1"/>
+            </a:solidFill>
+          </a:ln>
+        </p:spPr>
+        <p:style>
+          <a:lnRef idx="2">
+            <a:schemeClr val="accent1">
+              <a:shade val="15000"/>
+            </a:schemeClr>
+          </a:lnRef>
+          <a:fillRef idx="1">
+            <a:schemeClr val="accent1"/>
+          </a:fillRef>
+          <a:effectRef idx="0">
+            <a:schemeClr val="accent1"/>
+          </a:effectRef>
+          <a:fontRef idx="minor">
+            <a:schemeClr val="lt1"/>
+          </a:fontRef>
+        </p:style>
+        <p:txBody>
+          <a:bodyPr rtlCol="0" anchor="ctr"/>
+          <a:lstStyle/>
+          <a:p>
+            <a:pPr algn="ctr"/>
+            <a:r>
+              <a:rPr lang="en-US">
+                <a:solidFill>
+                  <a:schemeClr val="tx1"/>
+                </a:solidFill>
+                <a:latin typeface="Times New Roman" panose="02020603050405020304" pitchFamily="18" charset="0"/>
+                <a:cs typeface="Times New Roman" panose="02020603050405020304" pitchFamily="18" charset="0"/>
+              </a:rPr>
+              <a:t>Lưu truy vấn của người dùng</a:t>
+            </a:r>
+          </a:p>
+          <a:p>
+            <a:pPr algn="ctr"/>
+            <a:r>
+              <a:rPr lang="en-US">
+                <a:solidFill>
+                  <a:schemeClr val="tx1"/>
+                </a:solidFill>
+                <a:latin typeface="Times New Roman" panose="02020603050405020304" pitchFamily="18" charset="0"/>
+                <a:cs typeface="Times New Roman" panose="02020603050405020304" pitchFamily="18" charset="0"/>
+              </a:rPr>
+              <a:t>và phản hồi được sinh ra</a:t>
+            </a:r>
+          </a:p>
+          <a:p>
+            <a:pPr algn="ctr"/>
+            <a:r>
+              <a:rPr lang="en-US">
+                <a:solidFill>
+                  <a:schemeClr val="tx1"/>
+                </a:solidFill>
+                <a:latin typeface="Times New Roman" panose="02020603050405020304" pitchFamily="18" charset="0"/>
+                <a:cs typeface="Times New Roman" panose="02020603050405020304" pitchFamily="18" charset="0"/>
+              </a:rPr>
+              <a:t>vào ngữ cảnh hội thoại</a:t>
+            </a:r>
+          </a:p>
+        </p:txBody>
+      </p:sp>
+      <p:sp>
+        <p:nvSpPr>
+          <p:cNvPr id="10" name="Rectangle: Rounded Corners 9">
+            <a:extLst>
+              <a:ext uri="{FF2B5EF4-FFF2-40B4-BE49-F238E27FC236}">
+                <a16:creationId xmlns:a16="http://schemas.microsoft.com/office/drawing/2014/main" id="{D20EEECC-99C2-04DD-62E8-C175F74DB0B9}"/>
+              </a:ext>
+            </a:extLst>
+          </p:cNvPr>
+          <p:cNvSpPr/>
+          <p:nvPr/>
+        </p:nvSpPr>
+        <p:spPr>
+          <a:xfrm>
+            <a:off x="8602980" y="5454345"/>
+            <a:ext cx="2453640" cy="874535"/>
+          </a:xfrm>
+          <a:prstGeom prst="roundRect">
+            <a:avLst/>
+          </a:prstGeom>
+          <a:solidFill>
+            <a:schemeClr val="bg2"/>
+          </a:solidFill>
+          <a:ln>
+            <a:solidFill>
+              <a:schemeClr val="tx1"/>
+            </a:solidFill>
+          </a:ln>
+        </p:spPr>
+        <p:style>
+          <a:lnRef idx="2">
+            <a:schemeClr val="accent1">
+              <a:shade val="15000"/>
+            </a:schemeClr>
+          </a:lnRef>
+          <a:fillRef idx="1">
+            <a:schemeClr val="accent1"/>
+          </a:fillRef>
+          <a:effectRef idx="0">
+            <a:schemeClr val="accent1"/>
+          </a:effectRef>
+          <a:fontRef idx="minor">
+            <a:schemeClr val="lt1"/>
+          </a:fontRef>
+        </p:style>
+        <p:txBody>
+          <a:bodyPr rtlCol="0" anchor="ctr"/>
+          <a:lstStyle/>
+          <a:p>
+            <a:pPr algn="ctr"/>
+            <a:r>
+              <a:rPr lang="en-US">
+                <a:solidFill>
+                  <a:schemeClr val="tx1"/>
+                </a:solidFill>
+                <a:latin typeface="Times New Roman" panose="02020603050405020304" pitchFamily="18" charset="0"/>
+                <a:cs typeface="Times New Roman" panose="02020603050405020304" pitchFamily="18" charset="0"/>
+              </a:rPr>
+              <a:t>Gửi phản hồi đến người dùng</a:t>
+            </a:r>
+          </a:p>
+        </p:txBody>
+      </p:sp>
+      <p:sp>
+        <p:nvSpPr>
+          <p:cNvPr id="11" name="Rectangle: Rounded Corners 10">
+            <a:extLst>
+              <a:ext uri="{FF2B5EF4-FFF2-40B4-BE49-F238E27FC236}">
+                <a16:creationId xmlns:a16="http://schemas.microsoft.com/office/drawing/2014/main" id="{4EE5273F-A0E6-E986-3008-5B217D85258A}"/>
+              </a:ext>
+            </a:extLst>
+          </p:cNvPr>
+          <p:cNvSpPr/>
+          <p:nvPr/>
+        </p:nvSpPr>
+        <p:spPr>
+          <a:xfrm>
+            <a:off x="3230880" y="325355"/>
+            <a:ext cx="2453640" cy="874535"/>
+          </a:xfrm>
+          <a:prstGeom prst="roundRect">
+            <a:avLst/>
+          </a:prstGeom>
+          <a:solidFill>
+            <a:schemeClr val="bg2"/>
+          </a:solidFill>
+          <a:ln>
+            <a:solidFill>
+              <a:schemeClr val="tx1"/>
+            </a:solidFill>
+          </a:ln>
+        </p:spPr>
+        <p:style>
+          <a:lnRef idx="2">
+            <a:schemeClr val="accent1">
+              <a:shade val="15000"/>
+            </a:schemeClr>
+          </a:lnRef>
+          <a:fillRef idx="1">
+            <a:schemeClr val="accent1"/>
+          </a:fillRef>
+          <a:effectRef idx="0">
+            <a:schemeClr val="accent1"/>
+          </a:effectRef>
+          <a:fontRef idx="minor">
+            <a:schemeClr val="lt1"/>
+          </a:fontRef>
+        </p:style>
+        <p:txBody>
+          <a:bodyPr rtlCol="0" anchor="ctr"/>
+          <a:lstStyle/>
+          <a:p>
+            <a:pPr algn="ctr"/>
+            <a:r>
+              <a:rPr lang="en-US">
+                <a:solidFill>
+                  <a:schemeClr val="tx1"/>
+                </a:solidFill>
+                <a:latin typeface="Times New Roman" panose="02020603050405020304" pitchFamily="18" charset="0"/>
+                <a:cs typeface="Times New Roman" panose="02020603050405020304" pitchFamily="18" charset="0"/>
+              </a:rPr>
+              <a:t>Gửi truy vấn mới</a:t>
+            </a:r>
+          </a:p>
+        </p:txBody>
+      </p:sp>
+      <p:cxnSp>
+        <p:nvCxnSpPr>
+          <p:cNvPr id="13" name="Straight Arrow Connector 12">
+            <a:extLst>
+              <a:ext uri="{FF2B5EF4-FFF2-40B4-BE49-F238E27FC236}">
+                <a16:creationId xmlns:a16="http://schemas.microsoft.com/office/drawing/2014/main" id="{937485D5-4C3F-A79F-4276-9EF8C79023CD}"/>
+              </a:ext>
+            </a:extLst>
+          </p:cNvPr>
+          <p:cNvCxnSpPr>
+            <a:endCxn id="5" idx="1"/>
+          </p:cNvCxnSpPr>
+          <p:nvPr/>
+        </p:nvCxnSpPr>
+        <p:spPr>
+          <a:xfrm>
+            <a:off x="1958306" y="4279240"/>
+            <a:ext cx="1272574" cy="1"/>
+          </a:xfrm>
+          <a:prstGeom prst="straightConnector1">
+            <a:avLst/>
+          </a:prstGeom>
+          <a:ln>
+            <a:tailEnd type="triangle"/>
+          </a:ln>
+        </p:spPr>
+        <p:style>
+          <a:lnRef idx="2">
+            <a:schemeClr val="dk1"/>
+          </a:lnRef>
+          <a:fillRef idx="0">
+            <a:schemeClr val="dk1"/>
+          </a:fillRef>
+          <a:effectRef idx="1">
+            <a:schemeClr val="dk1"/>
+          </a:effectRef>
+          <a:fontRef idx="minor">
+            <a:schemeClr val="tx1"/>
+          </a:fontRef>
+        </p:style>
+      </p:cxnSp>
+      <p:cxnSp>
+        <p:nvCxnSpPr>
+          <p:cNvPr id="14" name="Straight Arrow Connector 13">
+            <a:extLst>
+              <a:ext uri="{FF2B5EF4-FFF2-40B4-BE49-F238E27FC236}">
+                <a16:creationId xmlns:a16="http://schemas.microsoft.com/office/drawing/2014/main" id="{77FED575-B5A9-7B4C-6FDC-C975275330FB}"/>
+              </a:ext>
+            </a:extLst>
+          </p:cNvPr>
+          <p:cNvCxnSpPr>
+            <a:cxnSpLocks/>
+            <a:stCxn id="5" idx="0"/>
+            <a:endCxn id="11" idx="2"/>
+          </p:cNvCxnSpPr>
+          <p:nvPr/>
+        </p:nvCxnSpPr>
+        <p:spPr>
+          <a:xfrm flipV="1">
+            <a:off x="4457700" y="1199890"/>
+            <a:ext cx="0" cy="2642083"/>
+          </a:xfrm>
+          <a:prstGeom prst="straightConnector1">
+            <a:avLst/>
+          </a:prstGeom>
+          <a:ln>
+            <a:tailEnd type="triangle"/>
+          </a:ln>
+        </p:spPr>
+        <p:style>
+          <a:lnRef idx="2">
+            <a:schemeClr val="dk1"/>
+          </a:lnRef>
+          <a:fillRef idx="0">
+            <a:schemeClr val="dk1"/>
+          </a:fillRef>
+          <a:effectRef idx="1">
+            <a:schemeClr val="dk1"/>
+          </a:effectRef>
+          <a:fontRef idx="minor">
+            <a:schemeClr val="tx1"/>
+          </a:fontRef>
+        </p:style>
+      </p:cxnSp>
+      <p:cxnSp>
+        <p:nvCxnSpPr>
+          <p:cNvPr id="17" name="Straight Arrow Connector 16">
+            <a:extLst>
+              <a:ext uri="{FF2B5EF4-FFF2-40B4-BE49-F238E27FC236}">
+                <a16:creationId xmlns:a16="http://schemas.microsoft.com/office/drawing/2014/main" id="{F0156F64-FBE6-DABD-5B66-8E4EEF850344}"/>
+              </a:ext>
+            </a:extLst>
+          </p:cNvPr>
+          <p:cNvCxnSpPr>
+            <a:cxnSpLocks/>
+            <a:stCxn id="11" idx="3"/>
+            <a:endCxn id="6" idx="1"/>
+          </p:cNvCxnSpPr>
+          <p:nvPr/>
+        </p:nvCxnSpPr>
+        <p:spPr>
+          <a:xfrm>
+            <a:off x="5684520" y="762623"/>
+            <a:ext cx="2918460" cy="1"/>
+          </a:xfrm>
+          <a:prstGeom prst="straightConnector1">
+            <a:avLst/>
+          </a:prstGeom>
+          <a:ln>
+            <a:tailEnd type="triangle"/>
+          </a:ln>
+        </p:spPr>
+        <p:style>
+          <a:lnRef idx="2">
+            <a:schemeClr val="dk1"/>
+          </a:lnRef>
+          <a:fillRef idx="0">
+            <a:schemeClr val="dk1"/>
+          </a:fillRef>
+          <a:effectRef idx="1">
+            <a:schemeClr val="dk1"/>
+          </a:effectRef>
+          <a:fontRef idx="minor">
+            <a:schemeClr val="tx1"/>
+          </a:fontRef>
+        </p:style>
+      </p:cxnSp>
+      <p:cxnSp>
+        <p:nvCxnSpPr>
+          <p:cNvPr id="20" name="Straight Arrow Connector 19">
+            <a:extLst>
+              <a:ext uri="{FF2B5EF4-FFF2-40B4-BE49-F238E27FC236}">
+                <a16:creationId xmlns:a16="http://schemas.microsoft.com/office/drawing/2014/main" id="{557EDD7E-37A6-0FD6-4EAA-88C4D5F15BC0}"/>
+              </a:ext>
+            </a:extLst>
+          </p:cNvPr>
+          <p:cNvCxnSpPr>
+            <a:cxnSpLocks/>
+            <a:stCxn id="6" idx="2"/>
+            <a:endCxn id="7" idx="0"/>
+          </p:cNvCxnSpPr>
+          <p:nvPr/>
+        </p:nvCxnSpPr>
+        <p:spPr>
+          <a:xfrm>
+            <a:off x="9829800" y="1199891"/>
+            <a:ext cx="0" cy="408138"/>
+          </a:xfrm>
+          <a:prstGeom prst="straightConnector1">
+            <a:avLst/>
+          </a:prstGeom>
+          <a:ln>
+            <a:tailEnd type="triangle"/>
+          </a:ln>
+        </p:spPr>
+        <p:style>
+          <a:lnRef idx="2">
+            <a:schemeClr val="dk1"/>
+          </a:lnRef>
+          <a:fillRef idx="0">
+            <a:schemeClr val="dk1"/>
+          </a:fillRef>
+          <a:effectRef idx="1">
+            <a:schemeClr val="dk1"/>
+          </a:effectRef>
+          <a:fontRef idx="minor">
+            <a:schemeClr val="tx1"/>
+          </a:fontRef>
+        </p:style>
+      </p:cxnSp>
+      <p:cxnSp>
+        <p:nvCxnSpPr>
+          <p:cNvPr id="23" name="Straight Arrow Connector 22">
+            <a:extLst>
+              <a:ext uri="{FF2B5EF4-FFF2-40B4-BE49-F238E27FC236}">
+                <a16:creationId xmlns:a16="http://schemas.microsoft.com/office/drawing/2014/main" id="{FCFBAE7B-86C4-F6D0-74C4-C757A0C87B01}"/>
+              </a:ext>
+            </a:extLst>
+          </p:cNvPr>
+          <p:cNvCxnSpPr>
+            <a:cxnSpLocks/>
+            <a:stCxn id="7" idx="2"/>
+            <a:endCxn id="8" idx="0"/>
+          </p:cNvCxnSpPr>
+          <p:nvPr/>
+        </p:nvCxnSpPr>
+        <p:spPr>
+          <a:xfrm>
+            <a:off x="9829800" y="2482564"/>
+            <a:ext cx="0" cy="408138"/>
+          </a:xfrm>
+          <a:prstGeom prst="straightConnector1">
+            <a:avLst/>
+          </a:prstGeom>
+          <a:ln>
+            <a:tailEnd type="triangle"/>
+          </a:ln>
+        </p:spPr>
+        <p:style>
+          <a:lnRef idx="2">
+            <a:schemeClr val="dk1"/>
+          </a:lnRef>
+          <a:fillRef idx="0">
+            <a:schemeClr val="dk1"/>
+          </a:fillRef>
+          <a:effectRef idx="1">
+            <a:schemeClr val="dk1"/>
+          </a:effectRef>
+          <a:fontRef idx="minor">
+            <a:schemeClr val="tx1"/>
+          </a:fontRef>
+        </p:style>
+      </p:cxnSp>
+      <p:cxnSp>
+        <p:nvCxnSpPr>
+          <p:cNvPr id="26" name="Straight Arrow Connector 25">
+            <a:extLst>
+              <a:ext uri="{FF2B5EF4-FFF2-40B4-BE49-F238E27FC236}">
+                <a16:creationId xmlns:a16="http://schemas.microsoft.com/office/drawing/2014/main" id="{ACC19592-6DBD-5627-3399-1CBA71D55512}"/>
+              </a:ext>
+            </a:extLst>
+          </p:cNvPr>
+          <p:cNvCxnSpPr>
+            <a:cxnSpLocks/>
+            <a:stCxn id="8" idx="2"/>
+            <a:endCxn id="9" idx="0"/>
+          </p:cNvCxnSpPr>
+          <p:nvPr/>
+        </p:nvCxnSpPr>
+        <p:spPr>
+          <a:xfrm>
+            <a:off x="9829800" y="3765237"/>
+            <a:ext cx="5993" cy="408138"/>
+          </a:xfrm>
+          <a:prstGeom prst="straightConnector1">
+            <a:avLst/>
+          </a:prstGeom>
+          <a:ln>
+            <a:tailEnd type="triangle"/>
+          </a:ln>
+        </p:spPr>
+        <p:style>
+          <a:lnRef idx="2">
+            <a:schemeClr val="dk1"/>
+          </a:lnRef>
+          <a:fillRef idx="0">
+            <a:schemeClr val="dk1"/>
+          </a:fillRef>
+          <a:effectRef idx="1">
+            <a:schemeClr val="dk1"/>
+          </a:effectRef>
+          <a:fontRef idx="minor">
+            <a:schemeClr val="tx1"/>
+          </a:fontRef>
+        </p:style>
+      </p:cxnSp>
+      <p:cxnSp>
+        <p:nvCxnSpPr>
+          <p:cNvPr id="29" name="Straight Arrow Connector 28">
+            <a:extLst>
+              <a:ext uri="{FF2B5EF4-FFF2-40B4-BE49-F238E27FC236}">
+                <a16:creationId xmlns:a16="http://schemas.microsoft.com/office/drawing/2014/main" id="{06D5D322-71CB-1139-DC68-03B731AA888D}"/>
+              </a:ext>
+            </a:extLst>
+          </p:cNvPr>
+          <p:cNvCxnSpPr>
+            <a:cxnSpLocks/>
+            <a:stCxn id="9" idx="2"/>
+            <a:endCxn id="10" idx="0"/>
+          </p:cNvCxnSpPr>
+          <p:nvPr/>
+        </p:nvCxnSpPr>
+        <p:spPr>
+          <a:xfrm flipH="1">
+            <a:off x="9829800" y="5047910"/>
+            <a:ext cx="5993" cy="406435"/>
+          </a:xfrm>
+          <a:prstGeom prst="straightConnector1">
+            <a:avLst/>
+          </a:prstGeom>
+          <a:ln>
+            <a:tailEnd type="triangle"/>
+          </a:ln>
+        </p:spPr>
+        <p:style>
+          <a:lnRef idx="2">
+            <a:schemeClr val="dk1"/>
+          </a:lnRef>
+          <a:fillRef idx="0">
+            <a:schemeClr val="dk1"/>
+          </a:fillRef>
+          <a:effectRef idx="1">
+            <a:schemeClr val="dk1"/>
+          </a:effectRef>
+          <a:fontRef idx="minor">
+            <a:schemeClr val="tx1"/>
+          </a:fontRef>
+        </p:style>
+      </p:cxnSp>
+      <p:cxnSp>
+        <p:nvCxnSpPr>
+          <p:cNvPr id="33" name="Connector: Elbow 32">
+            <a:extLst>
+              <a:ext uri="{FF2B5EF4-FFF2-40B4-BE49-F238E27FC236}">
+                <a16:creationId xmlns:a16="http://schemas.microsoft.com/office/drawing/2014/main" id="{3F3ED029-88E5-1CB2-94B3-1D32D28E135B}"/>
+              </a:ext>
+            </a:extLst>
+          </p:cNvPr>
+          <p:cNvCxnSpPr>
+            <a:stCxn id="10" idx="1"/>
+            <a:endCxn id="5" idx="2"/>
+          </p:cNvCxnSpPr>
+          <p:nvPr/>
+        </p:nvCxnSpPr>
+        <p:spPr>
+          <a:xfrm rot="10800000">
+            <a:off x="4457700" y="4716509"/>
+            <a:ext cx="4145280" cy="1175105"/>
+          </a:xfrm>
+          <a:prstGeom prst="bentConnector2">
+            <a:avLst/>
+          </a:prstGeom>
+          <a:ln>
+            <a:tailEnd type="triangle"/>
+          </a:ln>
+        </p:spPr>
+        <p:style>
+          <a:lnRef idx="2">
+            <a:schemeClr val="dk1"/>
+          </a:lnRef>
+          <a:fillRef idx="0">
+            <a:schemeClr val="dk1"/>
+          </a:fillRef>
+          <a:effectRef idx="1">
+            <a:schemeClr val="dk1"/>
+          </a:effectRef>
+          <a:fontRef idx="minor">
+            <a:schemeClr val="tx1"/>
+          </a:fontRef>
+        </p:style>
+      </p:cxnSp>
+      <p:sp>
+        <p:nvSpPr>
+          <p:cNvPr id="34" name="Rectangle 33">
+            <a:extLst>
+              <a:ext uri="{FF2B5EF4-FFF2-40B4-BE49-F238E27FC236}">
+                <a16:creationId xmlns:a16="http://schemas.microsoft.com/office/drawing/2014/main" id="{65C336BD-7A22-40B6-6B08-12161FB5CCC8}"/>
+              </a:ext>
+            </a:extLst>
+          </p:cNvPr>
+          <p:cNvSpPr/>
+          <p:nvPr/>
+        </p:nvSpPr>
+        <p:spPr>
+          <a:xfrm>
+            <a:off x="6507482" y="182880"/>
+            <a:ext cx="5349232" cy="6349762"/>
+          </a:xfrm>
+          <a:prstGeom prst="rect">
+            <a:avLst/>
+          </a:prstGeom>
+          <a:noFill/>
+          <a:ln>
+            <a:prstDash val="dash"/>
+          </a:ln>
+        </p:spPr>
+        <p:style>
+          <a:lnRef idx="2">
+            <a:schemeClr val="dk1"/>
+          </a:lnRef>
+          <a:fillRef idx="1">
+            <a:schemeClr val="lt1"/>
+          </a:fillRef>
+          <a:effectRef idx="0">
+            <a:schemeClr val="dk1"/>
+          </a:effectRef>
+          <a:fontRef idx="minor">
+            <a:schemeClr val="dk1"/>
+          </a:fontRef>
+        </p:style>
+        <p:txBody>
+          <a:bodyPr rtlCol="0" anchor="ctr"/>
+          <a:lstStyle/>
+          <a:p>
+            <a:pPr algn="ctr"/>
+            <a:endParaRPr lang="en-US"/>
+          </a:p>
+        </p:txBody>
+      </p:sp>
+      <p:sp>
+        <p:nvSpPr>
+          <p:cNvPr id="35" name="TextBox 34">
+            <a:extLst>
+              <a:ext uri="{FF2B5EF4-FFF2-40B4-BE49-F238E27FC236}">
+                <a16:creationId xmlns:a16="http://schemas.microsoft.com/office/drawing/2014/main" id="{0B6547D6-03EF-8A55-3773-4540FBC160C1}"/>
+              </a:ext>
+            </a:extLst>
+          </p:cNvPr>
+          <p:cNvSpPr txBox="1"/>
+          <p:nvPr/>
+        </p:nvSpPr>
+        <p:spPr>
+          <a:xfrm>
+            <a:off x="6979920" y="1608029"/>
+            <a:ext cx="1037463" cy="369332"/>
+          </a:xfrm>
+          <a:prstGeom prst="rect">
+            <a:avLst/>
+          </a:prstGeom>
+          <a:solidFill>
+            <a:schemeClr val="bg1"/>
+          </a:solidFill>
+        </p:spPr>
+        <p:txBody>
+          <a:bodyPr wrap="none" rtlCol="0">
+            <a:spAutoFit/>
+          </a:bodyPr>
+          <a:lstStyle/>
+          <a:p>
+            <a:r>
+              <a:rPr lang="en-US">
+                <a:latin typeface="Times New Roman" panose="02020603050405020304" pitchFamily="18" charset="0"/>
+                <a:cs typeface="Times New Roman" panose="02020603050405020304" pitchFamily="18" charset="0"/>
+              </a:rPr>
+              <a:t>Hệ thống</a:t>
+            </a:r>
+          </a:p>
+        </p:txBody>
+      </p:sp>
+    </p:spTree>
+    <p:extLst>
+      <p:ext uri="{BB962C8B-B14F-4D97-AF65-F5344CB8AC3E}">
+        <p14:creationId xmlns:p14="http://schemas.microsoft.com/office/powerpoint/2010/main" val="4212201884"/>
       </p:ext>
     </p:extLst>
   </p:cSld>
@@ -8309,6 +15175,1276 @@
     <p:extLst>
       <p:ext uri="{BB962C8B-B14F-4D97-AF65-F5344CB8AC3E}">
         <p14:creationId xmlns:p14="http://schemas.microsoft.com/office/powerpoint/2010/main" val="244051927"/>
+      </p:ext>
+    </p:extLst>
+  </p:cSld>
+  <p:clrMapOvr>
+    <a:masterClrMapping/>
+  </p:clrMapOvr>
+</p:sld>
+</file>
+
+<file path=ppt/slides/slide20.xml><?xml version="1.0" encoding="utf-8"?>
+<p:sld xmlns:a="http://schemas.openxmlformats.org/drawingml/2006/main" xmlns:r="http://schemas.openxmlformats.org/officeDocument/2006/relationships" xmlns:p="http://schemas.openxmlformats.org/presentationml/2006/main">
+  <p:cSld>
+    <p:spTree>
+      <p:nvGrpSpPr>
+        <p:cNvPr id="1" name=""/>
+        <p:cNvGrpSpPr/>
+        <p:nvPr/>
+      </p:nvGrpSpPr>
+      <p:grpSpPr>
+        <a:xfrm>
+          <a:off x="0" y="0"/>
+          <a:ext cx="0" cy="0"/>
+          <a:chOff x="0" y="0"/>
+          <a:chExt cx="0" cy="0"/>
+        </a:xfrm>
+      </p:grpSpPr>
+      <p:sp>
+        <p:nvSpPr>
+          <p:cNvPr id="2" name="Oval 1">
+            <a:extLst>
+              <a:ext uri="{FF2B5EF4-FFF2-40B4-BE49-F238E27FC236}">
+                <a16:creationId xmlns:a16="http://schemas.microsoft.com/office/drawing/2014/main" id="{D1F9A03D-A133-BE5E-905F-4926FA7AD192}"/>
+              </a:ext>
+            </a:extLst>
+          </p:cNvPr>
+          <p:cNvSpPr/>
+          <p:nvPr/>
+        </p:nvSpPr>
+        <p:spPr>
+          <a:xfrm>
+            <a:off x="5173980" y="472440"/>
+            <a:ext cx="1844040" cy="777240"/>
+          </a:xfrm>
+          <a:prstGeom prst="ellipse">
+            <a:avLst/>
+          </a:prstGeom>
+          <a:solidFill>
+            <a:schemeClr val="bg2"/>
+          </a:solidFill>
+          <a:ln>
+            <a:solidFill>
+              <a:schemeClr val="tx1"/>
+            </a:solidFill>
+          </a:ln>
+        </p:spPr>
+        <p:style>
+          <a:lnRef idx="2">
+            <a:schemeClr val="dk1"/>
+          </a:lnRef>
+          <a:fillRef idx="1">
+            <a:schemeClr val="lt1"/>
+          </a:fillRef>
+          <a:effectRef idx="0">
+            <a:schemeClr val="dk1"/>
+          </a:effectRef>
+          <a:fontRef idx="minor">
+            <a:schemeClr val="dk1"/>
+          </a:fontRef>
+        </p:style>
+        <p:txBody>
+          <a:bodyPr rtlCol="0" anchor="ctr"/>
+          <a:lstStyle/>
+          <a:p>
+            <a:pPr algn="ctr"/>
+            <a:r>
+              <a:rPr lang="en-US" sz="2000">
+                <a:solidFill>
+                  <a:schemeClr val="tx1"/>
+                </a:solidFill>
+                <a:latin typeface="Times New Roman" panose="02020603050405020304" pitchFamily="18" charset="0"/>
+                <a:cs typeface="Times New Roman" panose="02020603050405020304" pitchFamily="18" charset="0"/>
+              </a:rPr>
+              <a:t>Bắt đầu</a:t>
+            </a:r>
+          </a:p>
+        </p:txBody>
+      </p:sp>
+      <p:sp>
+        <p:nvSpPr>
+          <p:cNvPr id="3" name="Rectangle: Rounded Corners 2">
+            <a:extLst>
+              <a:ext uri="{FF2B5EF4-FFF2-40B4-BE49-F238E27FC236}">
+                <a16:creationId xmlns:a16="http://schemas.microsoft.com/office/drawing/2014/main" id="{A45711EC-4701-1DA9-E3E0-B62D9A39BB28}"/>
+              </a:ext>
+            </a:extLst>
+          </p:cNvPr>
+          <p:cNvSpPr/>
+          <p:nvPr/>
+        </p:nvSpPr>
+        <p:spPr>
+          <a:xfrm>
+            <a:off x="4511040" y="1973580"/>
+            <a:ext cx="3169920" cy="777240"/>
+          </a:xfrm>
+          <a:prstGeom prst="roundRect">
+            <a:avLst/>
+          </a:prstGeom>
+          <a:solidFill>
+            <a:schemeClr val="bg2"/>
+          </a:solidFill>
+          <a:ln>
+            <a:solidFill>
+              <a:schemeClr val="tx1"/>
+            </a:solidFill>
+          </a:ln>
+        </p:spPr>
+        <p:style>
+          <a:lnRef idx="2">
+            <a:schemeClr val="accent1">
+              <a:shade val="15000"/>
+            </a:schemeClr>
+          </a:lnRef>
+          <a:fillRef idx="1">
+            <a:schemeClr val="accent1"/>
+          </a:fillRef>
+          <a:effectRef idx="0">
+            <a:schemeClr val="accent1"/>
+          </a:effectRef>
+          <a:fontRef idx="minor">
+            <a:schemeClr val="lt1"/>
+          </a:fontRef>
+        </p:style>
+        <p:txBody>
+          <a:bodyPr rtlCol="0" anchor="ctr"/>
+          <a:lstStyle/>
+          <a:p>
+            <a:pPr algn="ctr"/>
+            <a:r>
+              <a:rPr lang="en-US">
+                <a:solidFill>
+                  <a:schemeClr val="tx1"/>
+                </a:solidFill>
+                <a:latin typeface="Times New Roman" panose="02020603050405020304" pitchFamily="18" charset="0"/>
+                <a:cs typeface="Times New Roman" panose="02020603050405020304" pitchFamily="18" charset="0"/>
+              </a:rPr>
+              <a:t>Người dùng gửi</a:t>
+            </a:r>
+          </a:p>
+          <a:p>
+            <a:pPr algn="ctr"/>
+            <a:r>
+              <a:rPr lang="en-US">
+                <a:solidFill>
+                  <a:schemeClr val="tx1"/>
+                </a:solidFill>
+                <a:latin typeface="Times New Roman" panose="02020603050405020304" pitchFamily="18" charset="0"/>
+                <a:cs typeface="Times New Roman" panose="02020603050405020304" pitchFamily="18" charset="0"/>
+              </a:rPr>
+              <a:t>một truy vấn mới</a:t>
+            </a:r>
+          </a:p>
+        </p:txBody>
+      </p:sp>
+      <p:sp>
+        <p:nvSpPr>
+          <p:cNvPr id="4" name="Rectangle: Rounded Corners 3">
+            <a:extLst>
+              <a:ext uri="{FF2B5EF4-FFF2-40B4-BE49-F238E27FC236}">
+                <a16:creationId xmlns:a16="http://schemas.microsoft.com/office/drawing/2014/main" id="{B94077CE-F070-6D77-B4F3-60A9F598BB3B}"/>
+              </a:ext>
+            </a:extLst>
+          </p:cNvPr>
+          <p:cNvSpPr/>
+          <p:nvPr/>
+        </p:nvSpPr>
+        <p:spPr>
+          <a:xfrm>
+            <a:off x="410900" y="2750820"/>
+            <a:ext cx="3169920" cy="784860"/>
+          </a:xfrm>
+          <a:prstGeom prst="roundRect">
+            <a:avLst/>
+          </a:prstGeom>
+          <a:solidFill>
+            <a:schemeClr val="bg2"/>
+          </a:solidFill>
+          <a:ln>
+            <a:solidFill>
+              <a:schemeClr val="tx1"/>
+            </a:solidFill>
+          </a:ln>
+        </p:spPr>
+        <p:style>
+          <a:lnRef idx="2">
+            <a:schemeClr val="accent1">
+              <a:shade val="15000"/>
+            </a:schemeClr>
+          </a:lnRef>
+          <a:fillRef idx="1">
+            <a:schemeClr val="accent1"/>
+          </a:fillRef>
+          <a:effectRef idx="0">
+            <a:schemeClr val="accent1"/>
+          </a:effectRef>
+          <a:fontRef idx="minor">
+            <a:schemeClr val="lt1"/>
+          </a:fontRef>
+        </p:style>
+        <p:txBody>
+          <a:bodyPr rtlCol="0" anchor="ctr"/>
+          <a:lstStyle/>
+          <a:p>
+            <a:pPr algn="ctr"/>
+            <a:r>
+              <a:rPr lang="en-US">
+                <a:solidFill>
+                  <a:schemeClr val="tx1"/>
+                </a:solidFill>
+                <a:latin typeface="Times New Roman" panose="02020603050405020304" pitchFamily="18" charset="0"/>
+                <a:cs typeface="Times New Roman" panose="02020603050405020304" pitchFamily="18" charset="0"/>
+              </a:rPr>
+              <a:t>Truy xuất ngữ cảnh của các lần trò chuyện trước đó</a:t>
+            </a:r>
+          </a:p>
+        </p:txBody>
+      </p:sp>
+      <p:sp>
+        <p:nvSpPr>
+          <p:cNvPr id="5" name="Rectangle: Rounded Corners 4">
+            <a:extLst>
+              <a:ext uri="{FF2B5EF4-FFF2-40B4-BE49-F238E27FC236}">
+                <a16:creationId xmlns:a16="http://schemas.microsoft.com/office/drawing/2014/main" id="{98F1F850-8F2C-A55E-BBAE-914DC0AF2379}"/>
+              </a:ext>
+            </a:extLst>
+          </p:cNvPr>
+          <p:cNvSpPr/>
+          <p:nvPr/>
+        </p:nvSpPr>
+        <p:spPr>
+          <a:xfrm>
+            <a:off x="4511040" y="3535680"/>
+            <a:ext cx="3169920" cy="777240"/>
+          </a:xfrm>
+          <a:prstGeom prst="roundRect">
+            <a:avLst/>
+          </a:prstGeom>
+          <a:solidFill>
+            <a:schemeClr val="bg2"/>
+          </a:solidFill>
+          <a:ln>
+            <a:solidFill>
+              <a:schemeClr val="tx1"/>
+            </a:solidFill>
+          </a:ln>
+        </p:spPr>
+        <p:style>
+          <a:lnRef idx="2">
+            <a:schemeClr val="accent1">
+              <a:shade val="15000"/>
+            </a:schemeClr>
+          </a:lnRef>
+          <a:fillRef idx="1">
+            <a:schemeClr val="accent1"/>
+          </a:fillRef>
+          <a:effectRef idx="0">
+            <a:schemeClr val="accent1"/>
+          </a:effectRef>
+          <a:fontRef idx="minor">
+            <a:schemeClr val="lt1"/>
+          </a:fontRef>
+        </p:style>
+        <p:txBody>
+          <a:bodyPr rtlCol="0" anchor="ctr"/>
+          <a:lstStyle/>
+          <a:p>
+            <a:pPr algn="ctr"/>
+            <a:r>
+              <a:rPr lang="en-US">
+                <a:solidFill>
+                  <a:schemeClr val="tx1"/>
+                </a:solidFill>
+                <a:latin typeface="Times New Roman" panose="02020603050405020304" pitchFamily="18" charset="0"/>
+                <a:cs typeface="Times New Roman" panose="02020603050405020304" pitchFamily="18" charset="0"/>
+              </a:rPr>
+              <a:t>Tạo prompt về </a:t>
+            </a:r>
+          </a:p>
+          <a:p>
+            <a:pPr algn="ctr"/>
+            <a:r>
+              <a:rPr lang="en-US">
+                <a:solidFill>
+                  <a:schemeClr val="tx1"/>
+                </a:solidFill>
+                <a:latin typeface="Times New Roman" panose="02020603050405020304" pitchFamily="18" charset="0"/>
+                <a:cs typeface="Times New Roman" panose="02020603050405020304" pitchFamily="18" charset="0"/>
+              </a:rPr>
+              <a:t>ngữ cảnh cuộc trò chuyện</a:t>
+            </a:r>
+          </a:p>
+        </p:txBody>
+      </p:sp>
+      <p:sp>
+        <p:nvSpPr>
+          <p:cNvPr id="6" name="Rectangle: Rounded Corners 5">
+            <a:extLst>
+              <a:ext uri="{FF2B5EF4-FFF2-40B4-BE49-F238E27FC236}">
+                <a16:creationId xmlns:a16="http://schemas.microsoft.com/office/drawing/2014/main" id="{51354A01-C876-E99B-D6F5-5D69947C24FE}"/>
+              </a:ext>
+            </a:extLst>
+          </p:cNvPr>
+          <p:cNvSpPr/>
+          <p:nvPr/>
+        </p:nvSpPr>
+        <p:spPr>
+          <a:xfrm>
+            <a:off x="4511040" y="5280660"/>
+            <a:ext cx="3169920" cy="777240"/>
+          </a:xfrm>
+          <a:prstGeom prst="roundRect">
+            <a:avLst/>
+          </a:prstGeom>
+          <a:solidFill>
+            <a:schemeClr val="bg2"/>
+          </a:solidFill>
+          <a:ln>
+            <a:solidFill>
+              <a:schemeClr val="tx1"/>
+            </a:solidFill>
+          </a:ln>
+        </p:spPr>
+        <p:style>
+          <a:lnRef idx="2">
+            <a:schemeClr val="accent1">
+              <a:shade val="15000"/>
+            </a:schemeClr>
+          </a:lnRef>
+          <a:fillRef idx="1">
+            <a:schemeClr val="accent1"/>
+          </a:fillRef>
+          <a:effectRef idx="0">
+            <a:schemeClr val="accent1"/>
+          </a:effectRef>
+          <a:fontRef idx="minor">
+            <a:schemeClr val="lt1"/>
+          </a:fontRef>
+        </p:style>
+        <p:txBody>
+          <a:bodyPr rtlCol="0" anchor="ctr"/>
+          <a:lstStyle/>
+          <a:p>
+            <a:pPr algn="ctr"/>
+            <a:r>
+              <a:rPr lang="en-US">
+                <a:solidFill>
+                  <a:schemeClr val="tx1"/>
+                </a:solidFill>
+                <a:latin typeface="Times New Roman" panose="02020603050405020304" pitchFamily="18" charset="0"/>
+                <a:cs typeface="Times New Roman" panose="02020603050405020304" pitchFamily="18" charset="0"/>
+              </a:rPr>
+              <a:t>Gửi prompt ngữ cảnh</a:t>
+            </a:r>
+          </a:p>
+          <a:p>
+            <a:pPr algn="ctr"/>
+            <a:r>
+              <a:rPr lang="en-US">
+                <a:solidFill>
+                  <a:schemeClr val="tx1"/>
+                </a:solidFill>
+                <a:latin typeface="Times New Roman" panose="02020603050405020304" pitchFamily="18" charset="0"/>
+                <a:cs typeface="Times New Roman" panose="02020603050405020304" pitchFamily="18" charset="0"/>
+              </a:rPr>
+              <a:t>cuộc trò chuyện đến LLM</a:t>
+            </a:r>
+          </a:p>
+        </p:txBody>
+      </p:sp>
+      <p:sp>
+        <p:nvSpPr>
+          <p:cNvPr id="7" name="Rectangle: Rounded Corners 6">
+            <a:extLst>
+              <a:ext uri="{FF2B5EF4-FFF2-40B4-BE49-F238E27FC236}">
+                <a16:creationId xmlns:a16="http://schemas.microsoft.com/office/drawing/2014/main" id="{B2BC939C-6FE9-DD51-9094-30F144640FBD}"/>
+              </a:ext>
+            </a:extLst>
+          </p:cNvPr>
+          <p:cNvSpPr/>
+          <p:nvPr/>
+        </p:nvSpPr>
+        <p:spPr>
+          <a:xfrm>
+            <a:off x="8786440" y="5280660"/>
+            <a:ext cx="3169920" cy="777240"/>
+          </a:xfrm>
+          <a:prstGeom prst="roundRect">
+            <a:avLst/>
+          </a:prstGeom>
+          <a:solidFill>
+            <a:schemeClr val="bg2"/>
+          </a:solidFill>
+          <a:ln>
+            <a:solidFill>
+              <a:schemeClr val="tx1"/>
+            </a:solidFill>
+          </a:ln>
+        </p:spPr>
+        <p:style>
+          <a:lnRef idx="2">
+            <a:schemeClr val="accent1">
+              <a:shade val="15000"/>
+            </a:schemeClr>
+          </a:lnRef>
+          <a:fillRef idx="1">
+            <a:schemeClr val="accent1"/>
+          </a:fillRef>
+          <a:effectRef idx="0">
+            <a:schemeClr val="accent1"/>
+          </a:effectRef>
+          <a:fontRef idx="minor">
+            <a:schemeClr val="lt1"/>
+          </a:fontRef>
+        </p:style>
+        <p:txBody>
+          <a:bodyPr rtlCol="0" anchor="ctr"/>
+          <a:lstStyle/>
+          <a:p>
+            <a:pPr algn="ctr"/>
+            <a:r>
+              <a:rPr lang="en-US">
+                <a:solidFill>
+                  <a:schemeClr val="tx1"/>
+                </a:solidFill>
+                <a:latin typeface="Times New Roman" panose="02020603050405020304" pitchFamily="18" charset="0"/>
+                <a:cs typeface="Times New Roman" panose="02020603050405020304" pitchFamily="18" charset="0"/>
+              </a:rPr>
+              <a:t>LLM sinh ra phản hồi</a:t>
+            </a:r>
+          </a:p>
+        </p:txBody>
+      </p:sp>
+      <p:sp>
+        <p:nvSpPr>
+          <p:cNvPr id="8" name="Rectangle: Rounded Corners 7">
+            <a:extLst>
+              <a:ext uri="{FF2B5EF4-FFF2-40B4-BE49-F238E27FC236}">
+                <a16:creationId xmlns:a16="http://schemas.microsoft.com/office/drawing/2014/main" id="{79D2E3A1-DF88-BF38-01CF-B70EEA7AF35B}"/>
+              </a:ext>
+            </a:extLst>
+          </p:cNvPr>
+          <p:cNvSpPr/>
+          <p:nvPr/>
+        </p:nvSpPr>
+        <p:spPr>
+          <a:xfrm>
+            <a:off x="8786440" y="3352800"/>
+            <a:ext cx="3169920" cy="1143000"/>
+          </a:xfrm>
+          <a:prstGeom prst="roundRect">
+            <a:avLst/>
+          </a:prstGeom>
+          <a:solidFill>
+            <a:schemeClr val="bg2"/>
+          </a:solidFill>
+          <a:ln>
+            <a:solidFill>
+              <a:schemeClr val="tx1"/>
+            </a:solidFill>
+            <a:prstDash val="solid"/>
+          </a:ln>
+        </p:spPr>
+        <p:style>
+          <a:lnRef idx="2">
+            <a:schemeClr val="accent1">
+              <a:shade val="15000"/>
+            </a:schemeClr>
+          </a:lnRef>
+          <a:fillRef idx="1">
+            <a:schemeClr val="accent1"/>
+          </a:fillRef>
+          <a:effectRef idx="0">
+            <a:schemeClr val="accent1"/>
+          </a:effectRef>
+          <a:fontRef idx="minor">
+            <a:schemeClr val="lt1"/>
+          </a:fontRef>
+        </p:style>
+        <p:txBody>
+          <a:bodyPr rtlCol="0" anchor="ctr"/>
+          <a:lstStyle/>
+          <a:p>
+            <a:pPr algn="ctr"/>
+            <a:r>
+              <a:rPr lang="en-US">
+                <a:solidFill>
+                  <a:schemeClr val="tx1"/>
+                </a:solidFill>
+                <a:latin typeface="Times New Roman" panose="02020603050405020304" pitchFamily="18" charset="0"/>
+                <a:cs typeface="Times New Roman" panose="02020603050405020304" pitchFamily="18" charset="0"/>
+              </a:rPr>
+              <a:t>Lưu truy vấn và phản hồi để truy xuất cho các lần trò chuyện tiếp theo</a:t>
+            </a:r>
+          </a:p>
+        </p:txBody>
+      </p:sp>
+      <p:sp>
+        <p:nvSpPr>
+          <p:cNvPr id="9" name="Oval 8">
+            <a:extLst>
+              <a:ext uri="{FF2B5EF4-FFF2-40B4-BE49-F238E27FC236}">
+                <a16:creationId xmlns:a16="http://schemas.microsoft.com/office/drawing/2014/main" id="{AA9CC6A9-E2DD-CF25-1752-6F130EB97E7A}"/>
+              </a:ext>
+            </a:extLst>
+          </p:cNvPr>
+          <p:cNvSpPr/>
+          <p:nvPr/>
+        </p:nvSpPr>
+        <p:spPr>
+          <a:xfrm>
+            <a:off x="9449380" y="1973580"/>
+            <a:ext cx="1844040" cy="777240"/>
+          </a:xfrm>
+          <a:prstGeom prst="ellipse">
+            <a:avLst/>
+          </a:prstGeom>
+          <a:solidFill>
+            <a:schemeClr val="bg2"/>
+          </a:solidFill>
+          <a:ln>
+            <a:solidFill>
+              <a:schemeClr val="tx1"/>
+            </a:solidFill>
+          </a:ln>
+        </p:spPr>
+        <p:style>
+          <a:lnRef idx="2">
+            <a:schemeClr val="dk1"/>
+          </a:lnRef>
+          <a:fillRef idx="1">
+            <a:schemeClr val="lt1"/>
+          </a:fillRef>
+          <a:effectRef idx="0">
+            <a:schemeClr val="dk1"/>
+          </a:effectRef>
+          <a:fontRef idx="minor">
+            <a:schemeClr val="dk1"/>
+          </a:fontRef>
+        </p:style>
+        <p:txBody>
+          <a:bodyPr rtlCol="0" anchor="ctr"/>
+          <a:lstStyle/>
+          <a:p>
+            <a:pPr algn="ctr"/>
+            <a:r>
+              <a:rPr lang="en-US" sz="2000">
+                <a:solidFill>
+                  <a:schemeClr val="tx1"/>
+                </a:solidFill>
+                <a:latin typeface="Times New Roman" panose="02020603050405020304" pitchFamily="18" charset="0"/>
+                <a:cs typeface="Times New Roman" panose="02020603050405020304" pitchFamily="18" charset="0"/>
+              </a:rPr>
+              <a:t>Kết thúc</a:t>
+            </a:r>
+          </a:p>
+        </p:txBody>
+      </p:sp>
+      <p:cxnSp>
+        <p:nvCxnSpPr>
+          <p:cNvPr id="11" name="Straight Arrow Connector 10">
+            <a:extLst>
+              <a:ext uri="{FF2B5EF4-FFF2-40B4-BE49-F238E27FC236}">
+                <a16:creationId xmlns:a16="http://schemas.microsoft.com/office/drawing/2014/main" id="{869DB297-C82C-04D4-BAF8-DC619830AA73}"/>
+              </a:ext>
+            </a:extLst>
+          </p:cNvPr>
+          <p:cNvCxnSpPr>
+            <a:stCxn id="2" idx="4"/>
+            <a:endCxn id="3" idx="0"/>
+          </p:cNvCxnSpPr>
+          <p:nvPr/>
+        </p:nvCxnSpPr>
+        <p:spPr>
+          <a:xfrm>
+            <a:off x="6096000" y="1249680"/>
+            <a:ext cx="0" cy="723900"/>
+          </a:xfrm>
+          <a:prstGeom prst="straightConnector1">
+            <a:avLst/>
+          </a:prstGeom>
+          <a:ln>
+            <a:tailEnd type="triangle"/>
+          </a:ln>
+        </p:spPr>
+        <p:style>
+          <a:lnRef idx="2">
+            <a:schemeClr val="dk1"/>
+          </a:lnRef>
+          <a:fillRef idx="0">
+            <a:schemeClr val="dk1"/>
+          </a:fillRef>
+          <a:effectRef idx="1">
+            <a:schemeClr val="dk1"/>
+          </a:effectRef>
+          <a:fontRef idx="minor">
+            <a:schemeClr val="tx1"/>
+          </a:fontRef>
+        </p:style>
+      </p:cxnSp>
+      <p:cxnSp>
+        <p:nvCxnSpPr>
+          <p:cNvPr id="13" name="Straight Arrow Connector 12">
+            <a:extLst>
+              <a:ext uri="{FF2B5EF4-FFF2-40B4-BE49-F238E27FC236}">
+                <a16:creationId xmlns:a16="http://schemas.microsoft.com/office/drawing/2014/main" id="{5CCCD291-3C38-6ECF-75B6-AD1C2AB293B4}"/>
+              </a:ext>
+            </a:extLst>
+          </p:cNvPr>
+          <p:cNvCxnSpPr>
+            <a:stCxn id="3" idx="2"/>
+            <a:endCxn id="5" idx="0"/>
+          </p:cNvCxnSpPr>
+          <p:nvPr/>
+        </p:nvCxnSpPr>
+        <p:spPr>
+          <a:xfrm>
+            <a:off x="6096000" y="2750820"/>
+            <a:ext cx="0" cy="784860"/>
+          </a:xfrm>
+          <a:prstGeom prst="straightConnector1">
+            <a:avLst/>
+          </a:prstGeom>
+          <a:ln>
+            <a:tailEnd type="triangle"/>
+          </a:ln>
+        </p:spPr>
+        <p:style>
+          <a:lnRef idx="2">
+            <a:schemeClr val="dk1"/>
+          </a:lnRef>
+          <a:fillRef idx="0">
+            <a:schemeClr val="dk1"/>
+          </a:fillRef>
+          <a:effectRef idx="1">
+            <a:schemeClr val="dk1"/>
+          </a:effectRef>
+          <a:fontRef idx="minor">
+            <a:schemeClr val="tx1"/>
+          </a:fontRef>
+        </p:style>
+      </p:cxnSp>
+      <p:cxnSp>
+        <p:nvCxnSpPr>
+          <p:cNvPr id="15" name="Straight Arrow Connector 14">
+            <a:extLst>
+              <a:ext uri="{FF2B5EF4-FFF2-40B4-BE49-F238E27FC236}">
+                <a16:creationId xmlns:a16="http://schemas.microsoft.com/office/drawing/2014/main" id="{98D0300A-B310-AAD8-9C0E-97CEC24EA085}"/>
+              </a:ext>
+            </a:extLst>
+          </p:cNvPr>
+          <p:cNvCxnSpPr>
+            <a:stCxn id="5" idx="2"/>
+            <a:endCxn id="6" idx="0"/>
+          </p:cNvCxnSpPr>
+          <p:nvPr/>
+        </p:nvCxnSpPr>
+        <p:spPr>
+          <a:xfrm>
+            <a:off x="6096000" y="4312920"/>
+            <a:ext cx="0" cy="967740"/>
+          </a:xfrm>
+          <a:prstGeom prst="straightConnector1">
+            <a:avLst/>
+          </a:prstGeom>
+          <a:ln>
+            <a:tailEnd type="triangle"/>
+          </a:ln>
+        </p:spPr>
+        <p:style>
+          <a:lnRef idx="2">
+            <a:schemeClr val="dk1"/>
+          </a:lnRef>
+          <a:fillRef idx="0">
+            <a:schemeClr val="dk1"/>
+          </a:fillRef>
+          <a:effectRef idx="1">
+            <a:schemeClr val="dk1"/>
+          </a:effectRef>
+          <a:fontRef idx="minor">
+            <a:schemeClr val="tx1"/>
+          </a:fontRef>
+        </p:style>
+      </p:cxnSp>
+      <p:cxnSp>
+        <p:nvCxnSpPr>
+          <p:cNvPr id="17" name="Straight Arrow Connector 16">
+            <a:extLst>
+              <a:ext uri="{FF2B5EF4-FFF2-40B4-BE49-F238E27FC236}">
+                <a16:creationId xmlns:a16="http://schemas.microsoft.com/office/drawing/2014/main" id="{B2CECBBB-2BE4-B906-E80B-E9D5E321BD48}"/>
+              </a:ext>
+            </a:extLst>
+          </p:cNvPr>
+          <p:cNvCxnSpPr>
+            <a:stCxn id="6" idx="3"/>
+            <a:endCxn id="7" idx="1"/>
+          </p:cNvCxnSpPr>
+          <p:nvPr/>
+        </p:nvCxnSpPr>
+        <p:spPr>
+          <a:xfrm>
+            <a:off x="7680960" y="5669280"/>
+            <a:ext cx="1105480" cy="0"/>
+          </a:xfrm>
+          <a:prstGeom prst="straightConnector1">
+            <a:avLst/>
+          </a:prstGeom>
+          <a:ln>
+            <a:tailEnd type="triangle"/>
+          </a:ln>
+        </p:spPr>
+        <p:style>
+          <a:lnRef idx="2">
+            <a:schemeClr val="dk1"/>
+          </a:lnRef>
+          <a:fillRef idx="0">
+            <a:schemeClr val="dk1"/>
+          </a:fillRef>
+          <a:effectRef idx="1">
+            <a:schemeClr val="dk1"/>
+          </a:effectRef>
+          <a:fontRef idx="minor">
+            <a:schemeClr val="tx1"/>
+          </a:fontRef>
+        </p:style>
+      </p:cxnSp>
+      <p:cxnSp>
+        <p:nvCxnSpPr>
+          <p:cNvPr id="19" name="Straight Arrow Connector 18">
+            <a:extLst>
+              <a:ext uri="{FF2B5EF4-FFF2-40B4-BE49-F238E27FC236}">
+                <a16:creationId xmlns:a16="http://schemas.microsoft.com/office/drawing/2014/main" id="{7938B7A0-4D13-47DD-9D00-645303EF7845}"/>
+              </a:ext>
+            </a:extLst>
+          </p:cNvPr>
+          <p:cNvCxnSpPr>
+            <a:stCxn id="7" idx="0"/>
+            <a:endCxn id="8" idx="2"/>
+          </p:cNvCxnSpPr>
+          <p:nvPr/>
+        </p:nvCxnSpPr>
+        <p:spPr>
+          <a:xfrm flipV="1">
+            <a:off x="10371400" y="4495800"/>
+            <a:ext cx="0" cy="784860"/>
+          </a:xfrm>
+          <a:prstGeom prst="straightConnector1">
+            <a:avLst/>
+          </a:prstGeom>
+          <a:ln>
+            <a:tailEnd type="triangle"/>
+          </a:ln>
+        </p:spPr>
+        <p:style>
+          <a:lnRef idx="2">
+            <a:schemeClr val="dk1"/>
+          </a:lnRef>
+          <a:fillRef idx="0">
+            <a:schemeClr val="dk1"/>
+          </a:fillRef>
+          <a:effectRef idx="1">
+            <a:schemeClr val="dk1"/>
+          </a:effectRef>
+          <a:fontRef idx="minor">
+            <a:schemeClr val="tx1"/>
+          </a:fontRef>
+        </p:style>
+      </p:cxnSp>
+      <p:cxnSp>
+        <p:nvCxnSpPr>
+          <p:cNvPr id="21" name="Straight Arrow Connector 20">
+            <a:extLst>
+              <a:ext uri="{FF2B5EF4-FFF2-40B4-BE49-F238E27FC236}">
+                <a16:creationId xmlns:a16="http://schemas.microsoft.com/office/drawing/2014/main" id="{2852821B-65BE-2306-1A7A-3463BAB5D4AA}"/>
+              </a:ext>
+            </a:extLst>
+          </p:cNvPr>
+          <p:cNvCxnSpPr>
+            <a:stCxn id="8" idx="0"/>
+            <a:endCxn id="9" idx="4"/>
+          </p:cNvCxnSpPr>
+          <p:nvPr/>
+        </p:nvCxnSpPr>
+        <p:spPr>
+          <a:xfrm flipV="1">
+            <a:off x="10371400" y="2750820"/>
+            <a:ext cx="0" cy="601980"/>
+          </a:xfrm>
+          <a:prstGeom prst="straightConnector1">
+            <a:avLst/>
+          </a:prstGeom>
+          <a:ln>
+            <a:tailEnd type="triangle"/>
+          </a:ln>
+        </p:spPr>
+        <p:style>
+          <a:lnRef idx="2">
+            <a:schemeClr val="dk1"/>
+          </a:lnRef>
+          <a:fillRef idx="0">
+            <a:schemeClr val="dk1"/>
+          </a:fillRef>
+          <a:effectRef idx="1">
+            <a:schemeClr val="dk1"/>
+          </a:effectRef>
+          <a:fontRef idx="minor">
+            <a:schemeClr val="tx1"/>
+          </a:fontRef>
+        </p:style>
+      </p:cxnSp>
+      <p:cxnSp>
+        <p:nvCxnSpPr>
+          <p:cNvPr id="23" name="Connector: Elbow 22">
+            <a:extLst>
+              <a:ext uri="{FF2B5EF4-FFF2-40B4-BE49-F238E27FC236}">
+                <a16:creationId xmlns:a16="http://schemas.microsoft.com/office/drawing/2014/main" id="{FA6C5239-DAD3-33C8-2206-5E10C678670C}"/>
+              </a:ext>
+            </a:extLst>
+          </p:cNvPr>
+          <p:cNvCxnSpPr>
+            <a:stCxn id="3" idx="1"/>
+            <a:endCxn id="4" idx="0"/>
+          </p:cNvCxnSpPr>
+          <p:nvPr/>
+        </p:nvCxnSpPr>
+        <p:spPr>
+          <a:xfrm rot="10800000" flipV="1">
+            <a:off x="1995860" y="2362200"/>
+            <a:ext cx="2515180" cy="388620"/>
+          </a:xfrm>
+          <a:prstGeom prst="bentConnector2">
+            <a:avLst/>
+          </a:prstGeom>
+          <a:ln>
+            <a:tailEnd type="triangle"/>
+          </a:ln>
+        </p:spPr>
+        <p:style>
+          <a:lnRef idx="2">
+            <a:schemeClr val="dk1"/>
+          </a:lnRef>
+          <a:fillRef idx="0">
+            <a:schemeClr val="dk1"/>
+          </a:fillRef>
+          <a:effectRef idx="1">
+            <a:schemeClr val="dk1"/>
+          </a:effectRef>
+          <a:fontRef idx="minor">
+            <a:schemeClr val="tx1"/>
+          </a:fontRef>
+        </p:style>
+      </p:cxnSp>
+      <p:cxnSp>
+        <p:nvCxnSpPr>
+          <p:cNvPr id="25" name="Connector: Elbow 24">
+            <a:extLst>
+              <a:ext uri="{FF2B5EF4-FFF2-40B4-BE49-F238E27FC236}">
+                <a16:creationId xmlns:a16="http://schemas.microsoft.com/office/drawing/2014/main" id="{5C2F3936-BEF5-5387-57F2-6A28A1653566}"/>
+              </a:ext>
+            </a:extLst>
+          </p:cNvPr>
+          <p:cNvCxnSpPr>
+            <a:stCxn id="4" idx="2"/>
+            <a:endCxn id="5" idx="1"/>
+          </p:cNvCxnSpPr>
+          <p:nvPr/>
+        </p:nvCxnSpPr>
+        <p:spPr>
+          <a:xfrm rot="16200000" flipH="1">
+            <a:off x="3059140" y="2472400"/>
+            <a:ext cx="388620" cy="2515180"/>
+          </a:xfrm>
+          <a:prstGeom prst="bentConnector2">
+            <a:avLst/>
+          </a:prstGeom>
+          <a:ln>
+            <a:tailEnd type="triangle"/>
+          </a:ln>
+        </p:spPr>
+        <p:style>
+          <a:lnRef idx="2">
+            <a:schemeClr val="dk1"/>
+          </a:lnRef>
+          <a:fillRef idx="0">
+            <a:schemeClr val="dk1"/>
+          </a:fillRef>
+          <a:effectRef idx="1">
+            <a:schemeClr val="dk1"/>
+          </a:effectRef>
+          <a:fontRef idx="minor">
+            <a:schemeClr val="tx1"/>
+          </a:fontRef>
+        </p:style>
+      </p:cxnSp>
+      <p:sp>
+        <p:nvSpPr>
+          <p:cNvPr id="26" name="TextBox 25">
+            <a:extLst>
+              <a:ext uri="{FF2B5EF4-FFF2-40B4-BE49-F238E27FC236}">
+                <a16:creationId xmlns:a16="http://schemas.microsoft.com/office/drawing/2014/main" id="{F9D756F0-2651-6D4F-6EA0-C3F6B5358A8C}"/>
+              </a:ext>
+            </a:extLst>
+          </p:cNvPr>
+          <p:cNvSpPr txBox="1"/>
+          <p:nvPr/>
+        </p:nvSpPr>
+        <p:spPr>
+          <a:xfrm>
+            <a:off x="6096000" y="1249679"/>
+            <a:ext cx="453970" cy="369332"/>
+          </a:xfrm>
+          <a:prstGeom prst="rect">
+            <a:avLst/>
+          </a:prstGeom>
+          <a:noFill/>
+        </p:spPr>
+        <p:txBody>
+          <a:bodyPr wrap="none" rtlCol="0">
+            <a:spAutoFit/>
+          </a:bodyPr>
+          <a:lstStyle/>
+          <a:p>
+            <a:r>
+              <a:rPr lang="en-US">
+                <a:latin typeface="Times New Roman" panose="02020603050405020304" pitchFamily="18" charset="0"/>
+                <a:cs typeface="Times New Roman" panose="02020603050405020304" pitchFamily="18" charset="0"/>
+              </a:rPr>
+              <a:t>(1)</a:t>
+            </a:r>
+          </a:p>
+        </p:txBody>
+      </p:sp>
+      <p:sp>
+        <p:nvSpPr>
+          <p:cNvPr id="27" name="TextBox 26">
+            <a:extLst>
+              <a:ext uri="{FF2B5EF4-FFF2-40B4-BE49-F238E27FC236}">
+                <a16:creationId xmlns:a16="http://schemas.microsoft.com/office/drawing/2014/main" id="{C5DE8007-3427-2872-00D0-21B9F00D6BC9}"/>
+              </a:ext>
+            </a:extLst>
+          </p:cNvPr>
+          <p:cNvSpPr txBox="1"/>
+          <p:nvPr/>
+        </p:nvSpPr>
+        <p:spPr>
+          <a:xfrm>
+            <a:off x="6114260" y="2750820"/>
+            <a:ext cx="620683" cy="369332"/>
+          </a:xfrm>
+          <a:prstGeom prst="rect">
+            <a:avLst/>
+          </a:prstGeom>
+          <a:noFill/>
+        </p:spPr>
+        <p:txBody>
+          <a:bodyPr wrap="none" rtlCol="0">
+            <a:spAutoFit/>
+          </a:bodyPr>
+          <a:lstStyle/>
+          <a:p>
+            <a:r>
+              <a:rPr lang="en-US">
+                <a:latin typeface="Times New Roman" panose="02020603050405020304" pitchFamily="18" charset="0"/>
+                <a:cs typeface="Times New Roman" panose="02020603050405020304" pitchFamily="18" charset="0"/>
+              </a:rPr>
+              <a:t>(2A)</a:t>
+            </a:r>
+          </a:p>
+        </p:txBody>
+      </p:sp>
+      <p:sp>
+        <p:nvSpPr>
+          <p:cNvPr id="28" name="TextBox 27">
+            <a:extLst>
+              <a:ext uri="{FF2B5EF4-FFF2-40B4-BE49-F238E27FC236}">
+                <a16:creationId xmlns:a16="http://schemas.microsoft.com/office/drawing/2014/main" id="{AAF32708-7FE3-B75E-4064-D84034B58EF8}"/>
+              </a:ext>
+            </a:extLst>
+          </p:cNvPr>
+          <p:cNvSpPr txBox="1"/>
+          <p:nvPr/>
+        </p:nvSpPr>
+        <p:spPr>
+          <a:xfrm>
+            <a:off x="3932035" y="2362199"/>
+            <a:ext cx="607859" cy="369332"/>
+          </a:xfrm>
+          <a:prstGeom prst="rect">
+            <a:avLst/>
+          </a:prstGeom>
+          <a:noFill/>
+        </p:spPr>
+        <p:txBody>
+          <a:bodyPr wrap="none" rtlCol="0">
+            <a:spAutoFit/>
+          </a:bodyPr>
+          <a:lstStyle/>
+          <a:p>
+            <a:r>
+              <a:rPr lang="en-US">
+                <a:latin typeface="Times New Roman" panose="02020603050405020304" pitchFamily="18" charset="0"/>
+                <a:cs typeface="Times New Roman" panose="02020603050405020304" pitchFamily="18" charset="0"/>
+              </a:rPr>
+              <a:t>(2B)</a:t>
+            </a:r>
+          </a:p>
+        </p:txBody>
+      </p:sp>
+      <p:sp>
+        <p:nvSpPr>
+          <p:cNvPr id="29" name="TextBox 28">
+            <a:extLst>
+              <a:ext uri="{FF2B5EF4-FFF2-40B4-BE49-F238E27FC236}">
+                <a16:creationId xmlns:a16="http://schemas.microsoft.com/office/drawing/2014/main" id="{9F738B39-F32C-9923-B8A0-5ECDC80236DB}"/>
+              </a:ext>
+            </a:extLst>
+          </p:cNvPr>
+          <p:cNvSpPr txBox="1"/>
+          <p:nvPr/>
+        </p:nvSpPr>
+        <p:spPr>
+          <a:xfrm>
+            <a:off x="1995860" y="3547347"/>
+            <a:ext cx="780983" cy="369332"/>
+          </a:xfrm>
+          <a:prstGeom prst="rect">
+            <a:avLst/>
+          </a:prstGeom>
+          <a:noFill/>
+        </p:spPr>
+        <p:txBody>
+          <a:bodyPr wrap="none" rtlCol="0">
+            <a:spAutoFit/>
+          </a:bodyPr>
+          <a:lstStyle/>
+          <a:p>
+            <a:r>
+              <a:rPr lang="en-US">
+                <a:latin typeface="Times New Roman" panose="02020603050405020304" pitchFamily="18" charset="0"/>
+                <a:cs typeface="Times New Roman" panose="02020603050405020304" pitchFamily="18" charset="0"/>
+              </a:rPr>
+              <a:t>(2B.1)</a:t>
+            </a:r>
+          </a:p>
+        </p:txBody>
+      </p:sp>
+      <p:sp>
+        <p:nvSpPr>
+          <p:cNvPr id="30" name="TextBox 29">
+            <a:extLst>
+              <a:ext uri="{FF2B5EF4-FFF2-40B4-BE49-F238E27FC236}">
+                <a16:creationId xmlns:a16="http://schemas.microsoft.com/office/drawing/2014/main" id="{31C81094-E0F8-BD3C-09ED-86B6960531C6}"/>
+              </a:ext>
+            </a:extLst>
+          </p:cNvPr>
+          <p:cNvSpPr txBox="1"/>
+          <p:nvPr/>
+        </p:nvSpPr>
+        <p:spPr>
+          <a:xfrm>
+            <a:off x="6114260" y="4311134"/>
+            <a:ext cx="453970" cy="369332"/>
+          </a:xfrm>
+          <a:prstGeom prst="rect">
+            <a:avLst/>
+          </a:prstGeom>
+          <a:noFill/>
+        </p:spPr>
+        <p:txBody>
+          <a:bodyPr wrap="none" rtlCol="0">
+            <a:spAutoFit/>
+          </a:bodyPr>
+          <a:lstStyle/>
+          <a:p>
+            <a:r>
+              <a:rPr lang="en-US">
+                <a:latin typeface="Times New Roman" panose="02020603050405020304" pitchFamily="18" charset="0"/>
+                <a:cs typeface="Times New Roman" panose="02020603050405020304" pitchFamily="18" charset="0"/>
+              </a:rPr>
+              <a:t>(3)</a:t>
+            </a:r>
+          </a:p>
+        </p:txBody>
+      </p:sp>
+      <p:sp>
+        <p:nvSpPr>
+          <p:cNvPr id="31" name="TextBox 30">
+            <a:extLst>
+              <a:ext uri="{FF2B5EF4-FFF2-40B4-BE49-F238E27FC236}">
+                <a16:creationId xmlns:a16="http://schemas.microsoft.com/office/drawing/2014/main" id="{751F22D1-043A-2EF9-A1FF-C15D0ADB770D}"/>
+              </a:ext>
+            </a:extLst>
+          </p:cNvPr>
+          <p:cNvSpPr txBox="1"/>
+          <p:nvPr/>
+        </p:nvSpPr>
+        <p:spPr>
+          <a:xfrm>
+            <a:off x="7680960" y="5669280"/>
+            <a:ext cx="453970" cy="369332"/>
+          </a:xfrm>
+          <a:prstGeom prst="rect">
+            <a:avLst/>
+          </a:prstGeom>
+          <a:noFill/>
+        </p:spPr>
+        <p:txBody>
+          <a:bodyPr wrap="none" rtlCol="0">
+            <a:spAutoFit/>
+          </a:bodyPr>
+          <a:lstStyle/>
+          <a:p>
+            <a:r>
+              <a:rPr lang="en-US">
+                <a:latin typeface="Times New Roman" panose="02020603050405020304" pitchFamily="18" charset="0"/>
+                <a:cs typeface="Times New Roman" panose="02020603050405020304" pitchFamily="18" charset="0"/>
+              </a:rPr>
+              <a:t>(4)</a:t>
+            </a:r>
+          </a:p>
+        </p:txBody>
+      </p:sp>
+      <p:sp>
+        <p:nvSpPr>
+          <p:cNvPr id="32" name="TextBox 31">
+            <a:extLst>
+              <a:ext uri="{FF2B5EF4-FFF2-40B4-BE49-F238E27FC236}">
+                <a16:creationId xmlns:a16="http://schemas.microsoft.com/office/drawing/2014/main" id="{EF0490C2-1BBA-478B-3D53-97E054C432B6}"/>
+              </a:ext>
+            </a:extLst>
+          </p:cNvPr>
+          <p:cNvSpPr txBox="1"/>
+          <p:nvPr/>
+        </p:nvSpPr>
+        <p:spPr>
+          <a:xfrm>
+            <a:off x="10371400" y="4913114"/>
+            <a:ext cx="453970" cy="369332"/>
+          </a:xfrm>
+          <a:prstGeom prst="rect">
+            <a:avLst/>
+          </a:prstGeom>
+          <a:noFill/>
+        </p:spPr>
+        <p:txBody>
+          <a:bodyPr wrap="none" rtlCol="0">
+            <a:spAutoFit/>
+          </a:bodyPr>
+          <a:lstStyle/>
+          <a:p>
+            <a:r>
+              <a:rPr lang="en-US">
+                <a:latin typeface="Times New Roman" panose="02020603050405020304" pitchFamily="18" charset="0"/>
+                <a:cs typeface="Times New Roman" panose="02020603050405020304" pitchFamily="18" charset="0"/>
+              </a:rPr>
+              <a:t>(5)</a:t>
+            </a:r>
+          </a:p>
+        </p:txBody>
+      </p:sp>
+      <p:sp>
+        <p:nvSpPr>
+          <p:cNvPr id="33" name="TextBox 32">
+            <a:extLst>
+              <a:ext uri="{FF2B5EF4-FFF2-40B4-BE49-F238E27FC236}">
+                <a16:creationId xmlns:a16="http://schemas.microsoft.com/office/drawing/2014/main" id="{67B727BD-535D-ECDB-BF89-0CB6E2362669}"/>
+              </a:ext>
+            </a:extLst>
+          </p:cNvPr>
+          <p:cNvSpPr txBox="1"/>
+          <p:nvPr/>
+        </p:nvSpPr>
+        <p:spPr>
+          <a:xfrm>
+            <a:off x="10371400" y="2984361"/>
+            <a:ext cx="453970" cy="369332"/>
+          </a:xfrm>
+          <a:prstGeom prst="rect">
+            <a:avLst/>
+          </a:prstGeom>
+          <a:noFill/>
+        </p:spPr>
+        <p:txBody>
+          <a:bodyPr wrap="none" rtlCol="0">
+            <a:spAutoFit/>
+          </a:bodyPr>
+          <a:lstStyle/>
+          <a:p>
+            <a:r>
+              <a:rPr lang="en-US">
+                <a:latin typeface="Times New Roman" panose="02020603050405020304" pitchFamily="18" charset="0"/>
+                <a:cs typeface="Times New Roman" panose="02020603050405020304" pitchFamily="18" charset="0"/>
+              </a:rPr>
+              <a:t>(6)</a:t>
+            </a:r>
+          </a:p>
+        </p:txBody>
+      </p:sp>
+    </p:spTree>
+    <p:extLst>
+      <p:ext uri="{BB962C8B-B14F-4D97-AF65-F5344CB8AC3E}">
+        <p14:creationId xmlns:p14="http://schemas.microsoft.com/office/powerpoint/2010/main" val="484954333"/>
+      </p:ext>
+    </p:extLst>
+  </p:cSld>
+  <p:clrMapOvr>
+    <a:masterClrMapping/>
+  </p:clrMapOvr>
+</p:sld>
+</file>
+
+<file path=ppt/slides/slide21.xml><?xml version="1.0" encoding="utf-8"?>
+<p:sld xmlns:a="http://schemas.openxmlformats.org/drawingml/2006/main" xmlns:r="http://schemas.openxmlformats.org/officeDocument/2006/relationships" xmlns:p="http://schemas.openxmlformats.org/presentationml/2006/main">
+  <p:cSld>
+    <p:spTree>
+      <p:nvGrpSpPr>
+        <p:cNvPr id="1" name=""/>
+        <p:cNvGrpSpPr/>
+        <p:nvPr/>
+      </p:nvGrpSpPr>
+      <p:grpSpPr>
+        <a:xfrm>
+          <a:off x="0" y="0"/>
+          <a:ext cx="0" cy="0"/>
+          <a:chOff x="0" y="0"/>
+          <a:chExt cx="0" cy="0"/>
+        </a:xfrm>
+      </p:grpSpPr>
+      <p:pic>
+        <p:nvPicPr>
+          <p:cNvPr id="3" name="Picture 2">
+            <a:extLst>
+              <a:ext uri="{FF2B5EF4-FFF2-40B4-BE49-F238E27FC236}">
+                <a16:creationId xmlns:a16="http://schemas.microsoft.com/office/drawing/2014/main" id="{75821577-64B6-E0C7-06AB-59F7A4584752}"/>
+              </a:ext>
+            </a:extLst>
+          </p:cNvPr>
+          <p:cNvPicPr>
+            <a:picLocks noChangeAspect="1"/>
+          </p:cNvPicPr>
+          <p:nvPr/>
+        </p:nvPicPr>
+        <p:blipFill>
+          <a:blip r:embed="rId3"/>
+          <a:stretch>
+            <a:fillRect/>
+          </a:stretch>
+        </p:blipFill>
+        <p:spPr>
+          <a:xfrm>
+            <a:off x="1143675" y="1"/>
+            <a:ext cx="11048325" cy="6858000"/>
+          </a:xfrm>
+          <a:prstGeom prst="rect">
+            <a:avLst/>
+          </a:prstGeom>
+        </p:spPr>
+      </p:pic>
+    </p:spTree>
+    <p:extLst>
+      <p:ext uri="{BB962C8B-B14F-4D97-AF65-F5344CB8AC3E}">
+        <p14:creationId xmlns:p14="http://schemas.microsoft.com/office/powerpoint/2010/main" val="2467334427"/>
       </p:ext>
     </p:extLst>
   </p:cSld>
@@ -17249,7 +25385,19 @@
             </a:pPr>
             <a:r>
               <a:rPr lang="vi-VN"/>
-              <a:t>Chức năng đăng nhập/đăng xuất: biểu đồ chức năng, usecase, tuần tự</a:t>
+              <a:t>Chức năng đăng nhập/đăng xuất: </a:t>
+            </a:r>
+            <a:r>
+              <a:rPr lang="vi-VN">
+                <a:solidFill>
+                  <a:srgbClr val="00B0F0"/>
+                </a:solidFill>
+              </a:rPr>
+              <a:t>biểu đồ chức năng, usecase</a:t>
+            </a:r>
+            <a:r>
+              <a:rPr lang="vi-VN"/>
+              <a:t>, tuần tự</a:t>
             </a:r>
           </a:p>
           <a:p>
@@ -17259,7 +25407,19 @@
             </a:pPr>
             <a:r>
               <a:rPr lang="vi-VN"/>
-              <a:t>Chức năng cài đặt người dùng tùy chọn: biểu đồ  chức năng, usecase, tuần tự</a:t>
+              <a:t>Chức năng cài đặt người dùng tùy chọn: </a:t>
+            </a:r>
+            <a:r>
+              <a:rPr lang="vi-VN">
+                <a:solidFill>
+                  <a:srgbClr val="00B0F0"/>
+                </a:solidFill>
+              </a:rPr>
+              <a:t>biểu đồ  chức năng, usecase,</a:t>
+            </a:r>
+            <a:r>
+              <a:rPr lang="vi-VN"/>
+              <a:t> tuần tự</a:t>
             </a:r>
           </a:p>
           <a:p>
@@ -17279,7 +25439,19 @@
             </a:pPr>
             <a:r>
               <a:rPr lang="vi-VN"/>
-              <a:t>Chức năng trò chuyện văn bản: biểu đồ chức năng, usecase, tuần tự</a:t>
+              <a:t>Chức năng trò chuyện văn bản: </a:t>
+            </a:r>
+            <a:r>
+              <a:rPr lang="vi-VN">
+                <a:solidFill>
+                  <a:srgbClr val="00B0F0"/>
+                </a:solidFill>
+              </a:rPr>
+              <a:t>biểu đồ chức năng, usecase</a:t>
+            </a:r>
+            <a:r>
+              <a:rPr lang="vi-VN"/>
+              <a:t>, tuần tự</a:t>
             </a:r>
           </a:p>
           <a:p>
@@ -17289,7 +25461,19 @@
             </a:pPr>
             <a:r>
               <a:rPr lang="vi-VN"/>
-              <a:t>Chức năng trò chuyện âm thanh: chức năng, usecase, tuần tự</a:t>
+              <a:t>Chức năng trò chuyện âm thanh: </a:t>
+            </a:r>
+            <a:r>
+              <a:rPr lang="vi-VN">
+                <a:solidFill>
+                  <a:srgbClr val="00B0F0"/>
+                </a:solidFill>
+              </a:rPr>
+              <a:t>chức năng, usecase</a:t>
+            </a:r>
+            <a:r>
+              <a:rPr lang="vi-VN"/>
+              <a:t>, tuần tự</a:t>
             </a:r>
           </a:p>
           <a:p>
@@ -17299,7 +25483,19 @@
             </a:pPr>
             <a:r>
               <a:rPr lang="vi-VN"/>
-              <a:t>Chức năng tăng cường trí nhớ hội thoại: chức năng, usecase, tuần tự</a:t>
+              <a:t>Chức năng tăng cường trí nhớ hội thoại: </a:t>
+            </a:r>
+            <a:r>
+              <a:rPr lang="vi-VN">
+                <a:solidFill>
+                  <a:srgbClr val="00B0F0"/>
+                </a:solidFill>
+              </a:rPr>
+              <a:t>chức năng, usecase</a:t>
+            </a:r>
+            <a:r>
+              <a:rPr lang="vi-VN"/>
+              <a:t>, tuần tự</a:t>
             </a:r>
           </a:p>
           <a:p>

--- a/documents/hinh_ve_trong_cao_cao_do_an.pptx
+++ b/documents/hinh_ve_trong_cao_cao_do_an.pptx
@@ -8964,9 +8964,9 @@
         <p:grpSpPr>
           <a:xfrm>
             <a:off x="1752601" y="371194"/>
-            <a:ext cx="1421219" cy="1618759"/>
+            <a:ext cx="1421219" cy="1494544"/>
             <a:chOff x="5261639" y="42349"/>
-            <a:chExt cx="1421219" cy="1211352"/>
+            <a:chExt cx="1421219" cy="1118399"/>
           </a:xfrm>
         </p:grpSpPr>
         <p:pic>
@@ -9020,7 +9020,7 @@
           <p:spPr>
             <a:xfrm>
               <a:off x="5261639" y="884369"/>
-              <a:ext cx="1421219" cy="369332"/>
+              <a:ext cx="1421219" cy="276379"/>
             </a:xfrm>
             <a:prstGeom prst="rect">
               <a:avLst/>
@@ -9104,7 +9104,7 @@
                 <a:solidFill>
                   <a:schemeClr val="tx1"/>
                 </a:solidFill>
-                <a:latin typeface="+mj-lt"/>
+                <a:latin typeface="Times New Roman" panose="02020603050405020304" pitchFamily="18" charset="0"/>
                 <a:cs typeface="Times New Roman" panose="02020603050405020304" pitchFamily="18" charset="0"/>
               </a:rPr>
               <a:t>Khởi tạo phiên chat mới</a:t>
@@ -9169,7 +9169,7 @@
                 <a:solidFill>
                   <a:schemeClr val="tx1"/>
                 </a:solidFill>
-                <a:latin typeface="+mj-lt"/>
+                <a:latin typeface="Times New Roman" panose="02020603050405020304" pitchFamily="18" charset="0"/>
                 <a:cs typeface="Times New Roman" panose="02020603050405020304" pitchFamily="18" charset="0"/>
               </a:rPr>
               <a:t>LLM tạo ra phản hồi</a:t>
@@ -9234,7 +9234,7 @@
                 <a:solidFill>
                   <a:schemeClr val="tx1"/>
                 </a:solidFill>
-                <a:latin typeface="+mj-lt"/>
+                <a:latin typeface="Times New Roman" panose="02020603050405020304" pitchFamily="18" charset="0"/>
                 <a:cs typeface="Times New Roman" panose="02020603050405020304" pitchFamily="18" charset="0"/>
               </a:rPr>
               <a:t>Hệ thống gửi prompt sinh starter đến LLM</a:t>
@@ -9299,7 +9299,7 @@
                 <a:solidFill>
                   <a:schemeClr val="tx1"/>
                 </a:solidFill>
-                <a:latin typeface="+mj-lt"/>
+                <a:latin typeface="Times New Roman" panose="02020603050405020304" pitchFamily="18" charset="0"/>
                 <a:cs typeface="Times New Roman" panose="02020603050405020304" pitchFamily="18" charset="0"/>
               </a:rPr>
               <a:t>Hệ thống trích xuất starter và hiển thị lên UI</a:t>
@@ -9365,7 +9365,7 @@
                 <a:solidFill>
                   <a:schemeClr val="tx1"/>
                 </a:solidFill>
-                <a:latin typeface="+mj-lt"/>
+                <a:latin typeface="Times New Roman" panose="02020603050405020304" pitchFamily="18" charset="0"/>
                 <a:cs typeface="Times New Roman" panose="02020603050405020304" pitchFamily="18" charset="0"/>
               </a:rPr>
               <a:t>Giao diện </a:t>
@@ -9378,7 +9378,7 @@
                 <a:solidFill>
                   <a:schemeClr val="tx1"/>
                 </a:solidFill>
-                <a:latin typeface="+mj-lt"/>
+                <a:latin typeface="Times New Roman" panose="02020603050405020304" pitchFamily="18" charset="0"/>
                 <a:cs typeface="Times New Roman" panose="02020603050405020304" pitchFamily="18" charset="0"/>
               </a:rPr>
               <a:t>phiên chat mới</a:t>
@@ -9673,7 +9673,8 @@
           <a:p>
             <a:r>
               <a:rPr lang="en-US">
-                <a:latin typeface="+mj-lt"/>
+                <a:latin typeface="Times New Roman" panose="02020603050405020304" pitchFamily="18" charset="0"/>
+                <a:cs typeface="Times New Roman" panose="02020603050405020304" pitchFamily="18" charset="0"/>
               </a:rPr>
               <a:t>tự động</a:t>
             </a:r>
@@ -9738,6 +9739,7 @@
               <a:solidFill>
                 <a:schemeClr val="bg1"/>
               </a:solidFill>
+              <a:latin typeface="+mj-lt"/>
             </a:endParaRPr>
           </a:p>
         </p:txBody>

--- a/documents/hinh_ve_trong_cao_cao_do_an.pptx
+++ b/documents/hinh_ve_trong_cao_cao_do_an.pptx
@@ -5,30 +5,31 @@
     <p:sldMasterId id="2147483648" r:id="rId1"/>
   </p:sldMasterIdLst>
   <p:notesMasterIdLst>
-    <p:notesMasterId r:id="rId23"/>
+    <p:notesMasterId r:id="rId24"/>
   </p:notesMasterIdLst>
   <p:sldIdLst>
     <p:sldId id="263" r:id="rId2"/>
     <p:sldId id="264" r:id="rId3"/>
     <p:sldId id="265" r:id="rId4"/>
-    <p:sldId id="261" r:id="rId5"/>
-    <p:sldId id="266" r:id="rId6"/>
-    <p:sldId id="267" r:id="rId7"/>
-    <p:sldId id="260" r:id="rId8"/>
-    <p:sldId id="262" r:id="rId9"/>
-    <p:sldId id="269" r:id="rId10"/>
-    <p:sldId id="268" r:id="rId11"/>
-    <p:sldId id="272" r:id="rId12"/>
-    <p:sldId id="271" r:id="rId13"/>
-    <p:sldId id="274" r:id="rId14"/>
-    <p:sldId id="273" r:id="rId15"/>
-    <p:sldId id="276" r:id="rId16"/>
-    <p:sldId id="275" r:id="rId17"/>
-    <p:sldId id="278" r:id="rId18"/>
-    <p:sldId id="277" r:id="rId19"/>
-    <p:sldId id="280" r:id="rId20"/>
-    <p:sldId id="279" r:id="rId21"/>
-    <p:sldId id="270" r:id="rId22"/>
+    <p:sldId id="281" r:id="rId5"/>
+    <p:sldId id="261" r:id="rId6"/>
+    <p:sldId id="266" r:id="rId7"/>
+    <p:sldId id="267" r:id="rId8"/>
+    <p:sldId id="260" r:id="rId9"/>
+    <p:sldId id="262" r:id="rId10"/>
+    <p:sldId id="269" r:id="rId11"/>
+    <p:sldId id="268" r:id="rId12"/>
+    <p:sldId id="272" r:id="rId13"/>
+    <p:sldId id="271" r:id="rId14"/>
+    <p:sldId id="274" r:id="rId15"/>
+    <p:sldId id="273" r:id="rId16"/>
+    <p:sldId id="276" r:id="rId17"/>
+    <p:sldId id="275" r:id="rId18"/>
+    <p:sldId id="278" r:id="rId19"/>
+    <p:sldId id="277" r:id="rId20"/>
+    <p:sldId id="280" r:id="rId21"/>
+    <p:sldId id="279" r:id="rId22"/>
+    <p:sldId id="270" r:id="rId23"/>
   </p:sldIdLst>
   <p:sldSz cx="12192000" cy="6858000"/>
   <p:notesSz cx="6858000" cy="9144000"/>
@@ -618,7 +619,7 @@
           <a:p>
             <a:r>
               <a:rPr lang="en-US"/>
-              <a:t>Biểu đồ use case chức năng người dùng cài đặt tùy chọn</a:t>
+              <a:t>Biểu đồ chức năng đăng nhập – đăng ký</a:t>
             </a:r>
           </a:p>
         </p:txBody>
@@ -649,7 +650,7 @@
     </p:spTree>
     <p:extLst>
       <p:ext uri="{BB962C8B-B14F-4D97-AF65-F5344CB8AC3E}">
-        <p14:creationId xmlns:p14="http://schemas.microsoft.com/office/powerpoint/2010/main" val="1828968213"/>
+        <p14:creationId xmlns:p14="http://schemas.microsoft.com/office/powerpoint/2010/main" val="3689453927"/>
       </p:ext>
     </p:extLst>
   </p:cSld>
@@ -705,7 +706,7 @@
           <a:p>
             <a:r>
               <a:rPr lang="en-US"/>
-              <a:t>Biểu đồ chức năng người dùng cài đặt tùy chọn</a:t>
+              <a:t>Biểu đồ use case chức năng người dùng cài đặt tùy chọn</a:t>
             </a:r>
           </a:p>
         </p:txBody>
@@ -736,7 +737,7 @@
     </p:spTree>
     <p:extLst>
       <p:ext uri="{BB962C8B-B14F-4D97-AF65-F5344CB8AC3E}">
-        <p14:creationId xmlns:p14="http://schemas.microsoft.com/office/powerpoint/2010/main" val="2854509630"/>
+        <p14:creationId xmlns:p14="http://schemas.microsoft.com/office/powerpoint/2010/main" val="1828968213"/>
       </p:ext>
     </p:extLst>
   </p:cSld>
@@ -792,7 +793,7 @@
           <a:p>
             <a:r>
               <a:rPr lang="en-US"/>
-              <a:t>Biểu đồ use case chức năng khởi tạo starter</a:t>
+              <a:t>Biểu đồ chức năng người dùng cài đặt tùy chọn</a:t>
             </a:r>
           </a:p>
         </p:txBody>
@@ -823,7 +824,7 @@
     </p:spTree>
     <p:extLst>
       <p:ext uri="{BB962C8B-B14F-4D97-AF65-F5344CB8AC3E}">
-        <p14:creationId xmlns:p14="http://schemas.microsoft.com/office/powerpoint/2010/main" val="4197391801"/>
+        <p14:creationId xmlns:p14="http://schemas.microsoft.com/office/powerpoint/2010/main" val="2854509630"/>
       </p:ext>
     </p:extLst>
   </p:cSld>
@@ -879,7 +880,7 @@
           <a:p>
             <a:r>
               <a:rPr lang="en-US"/>
-              <a:t>Biểu đồ chức năng của chức năng khởi tạo starter</a:t>
+              <a:t>Biểu đồ use case chức năng khởi tạo starter</a:t>
             </a:r>
           </a:p>
         </p:txBody>
@@ -910,7 +911,7 @@
     </p:spTree>
     <p:extLst>
       <p:ext uri="{BB962C8B-B14F-4D97-AF65-F5344CB8AC3E}">
-        <p14:creationId xmlns:p14="http://schemas.microsoft.com/office/powerpoint/2010/main" val="3138939907"/>
+        <p14:creationId xmlns:p14="http://schemas.microsoft.com/office/powerpoint/2010/main" val="4197391801"/>
       </p:ext>
     </p:extLst>
   </p:cSld>
@@ -966,7 +967,7 @@
           <a:p>
             <a:r>
               <a:rPr lang="en-US"/>
-              <a:t>Biểu đồ usecase của chức năng trò chuyện văn b</a:t>
+              <a:t>Biểu đồ chức năng của chức năng khởi tạo starter</a:t>
             </a:r>
           </a:p>
         </p:txBody>
@@ -997,7 +998,7 @@
     </p:spTree>
     <p:extLst>
       <p:ext uri="{BB962C8B-B14F-4D97-AF65-F5344CB8AC3E}">
-        <p14:creationId xmlns:p14="http://schemas.microsoft.com/office/powerpoint/2010/main" val="3002454543"/>
+        <p14:creationId xmlns:p14="http://schemas.microsoft.com/office/powerpoint/2010/main" val="3138939907"/>
       </p:ext>
     </p:extLst>
   </p:cSld>
@@ -1053,7 +1054,7 @@
           <a:p>
             <a:r>
               <a:rPr lang="en-US"/>
-              <a:t>Biểu đồ chức năng của chức năng trò chuyện văn bản.</a:t>
+              <a:t>Biểu đồ usecase của chức năng trò chuyện văn b</a:t>
             </a:r>
           </a:p>
         </p:txBody>
@@ -1084,7 +1085,7 @@
     </p:spTree>
     <p:extLst>
       <p:ext uri="{BB962C8B-B14F-4D97-AF65-F5344CB8AC3E}">
-        <p14:creationId xmlns:p14="http://schemas.microsoft.com/office/powerpoint/2010/main" val="2285672054"/>
+        <p14:creationId xmlns:p14="http://schemas.microsoft.com/office/powerpoint/2010/main" val="3002454543"/>
       </p:ext>
     </p:extLst>
   </p:cSld>
@@ -1140,7 +1141,7 @@
           <a:p>
             <a:r>
               <a:rPr lang="en-US"/>
-              <a:t>Biểu đồ use case chức năng trò chuyện âm thanh</a:t>
+              <a:t>Biểu đồ chức năng của chức năng trò chuyện văn bản.</a:t>
             </a:r>
           </a:p>
         </p:txBody>
@@ -1171,7 +1172,7 @@
     </p:spTree>
     <p:extLst>
       <p:ext uri="{BB962C8B-B14F-4D97-AF65-F5344CB8AC3E}">
-        <p14:creationId xmlns:p14="http://schemas.microsoft.com/office/powerpoint/2010/main" val="3879826595"/>
+        <p14:creationId xmlns:p14="http://schemas.microsoft.com/office/powerpoint/2010/main" val="2285672054"/>
       </p:ext>
     </p:extLst>
   </p:cSld>
@@ -1227,7 +1228,7 @@
           <a:p>
             <a:r>
               <a:rPr lang="en-US"/>
-              <a:t>Biểu đồ chức năng của chức năng trò chuyện âm thanh</a:t>
+              <a:t>Biểu đồ use case chức năng trò chuyện âm thanh</a:t>
             </a:r>
           </a:p>
         </p:txBody>
@@ -1258,7 +1259,7 @@
     </p:spTree>
     <p:extLst>
       <p:ext uri="{BB962C8B-B14F-4D97-AF65-F5344CB8AC3E}">
-        <p14:creationId xmlns:p14="http://schemas.microsoft.com/office/powerpoint/2010/main" val="1458376165"/>
+        <p14:creationId xmlns:p14="http://schemas.microsoft.com/office/powerpoint/2010/main" val="3879826595"/>
       </p:ext>
     </p:extLst>
   </p:cSld>
@@ -1314,7 +1315,7 @@
           <a:p>
             <a:r>
               <a:rPr lang="en-US"/>
-              <a:t>Biểu đồ use case chức năng tăng cường trí nhớ hội thoại</a:t>
+              <a:t>Biểu đồ chức năng của chức năng trò chuyện âm thanh</a:t>
             </a:r>
           </a:p>
         </p:txBody>
@@ -1345,7 +1346,7 @@
     </p:spTree>
     <p:extLst>
       <p:ext uri="{BB962C8B-B14F-4D97-AF65-F5344CB8AC3E}">
-        <p14:creationId xmlns:p14="http://schemas.microsoft.com/office/powerpoint/2010/main" val="2737796367"/>
+        <p14:creationId xmlns:p14="http://schemas.microsoft.com/office/powerpoint/2010/main" val="1458376165"/>
       </p:ext>
     </p:extLst>
   </p:cSld>
@@ -1401,7 +1402,7 @@
           <a:p>
             <a:r>
               <a:rPr lang="en-US"/>
-              <a:t>Biểu đồ chức năng của chức năng tăng cường trí nhớ hội thoại</a:t>
+              <a:t>Biểu đồ use case chức năng tăng cường trí nhớ hội thoại</a:t>
             </a:r>
           </a:p>
         </p:txBody>
@@ -1432,7 +1433,7 @@
     </p:spTree>
     <p:extLst>
       <p:ext uri="{BB962C8B-B14F-4D97-AF65-F5344CB8AC3E}">
-        <p14:creationId xmlns:p14="http://schemas.microsoft.com/office/powerpoint/2010/main" val="123994773"/>
+        <p14:creationId xmlns:p14="http://schemas.microsoft.com/office/powerpoint/2010/main" val="2737796367"/>
       </p:ext>
     </p:extLst>
   </p:cSld>
@@ -1574,10 +1575,9 @@
           <a:lstStyle/>
           <a:p>
             <a:r>
-              <a:rPr lang="vi-VN"/>
-              <a:t>Style</a:t>
-            </a:r>
-            <a:endParaRPr lang="en-US"/>
+              <a:rPr lang="en-US"/>
+              <a:t>Biểu đồ chức năng của chức năng tăng cường trí nhớ hội thoại</a:t>
+            </a:r>
           </a:p>
         </p:txBody>
       </p:sp>
@@ -1599,6 +1599,94 @@
             <a:fld id="{959F4E64-33AD-4E03-A94E-822473CE3B48}" type="slidenum">
               <a:rPr lang="en-US" smtClean="0"/>
               <a:t>21</a:t>
+            </a:fld>
+            <a:endParaRPr lang="en-US"/>
+          </a:p>
+        </p:txBody>
+      </p:sp>
+    </p:spTree>
+    <p:extLst>
+      <p:ext uri="{BB962C8B-B14F-4D97-AF65-F5344CB8AC3E}">
+        <p14:creationId xmlns:p14="http://schemas.microsoft.com/office/powerpoint/2010/main" val="123994773"/>
+      </p:ext>
+    </p:extLst>
+  </p:cSld>
+  <p:clrMapOvr>
+    <a:masterClrMapping/>
+  </p:clrMapOvr>
+</p:notes>
+</file>
+
+<file path=ppt/notesSlides/notesSlide21.xml><?xml version="1.0" encoding="utf-8"?>
+<p:notes xmlns:a="http://schemas.openxmlformats.org/drawingml/2006/main" xmlns:r="http://schemas.openxmlformats.org/officeDocument/2006/relationships" xmlns:p="http://schemas.openxmlformats.org/presentationml/2006/main">
+  <p:cSld>
+    <p:spTree>
+      <p:nvGrpSpPr>
+        <p:cNvPr id="1" name=""/>
+        <p:cNvGrpSpPr/>
+        <p:nvPr/>
+      </p:nvGrpSpPr>
+      <p:grpSpPr>
+        <a:xfrm>
+          <a:off x="0" y="0"/>
+          <a:ext cx="0" cy="0"/>
+          <a:chOff x="0" y="0"/>
+          <a:chExt cx="0" cy="0"/>
+        </a:xfrm>
+      </p:grpSpPr>
+      <p:sp>
+        <p:nvSpPr>
+          <p:cNvPr id="2" name="Slide Image Placeholder 1"/>
+          <p:cNvSpPr>
+            <a:spLocks noGrp="1" noRot="1" noChangeAspect="1"/>
+          </p:cNvSpPr>
+          <p:nvPr>
+            <p:ph type="sldImg"/>
+          </p:nvPr>
+        </p:nvSpPr>
+        <p:spPr/>
+      </p:sp>
+      <p:sp>
+        <p:nvSpPr>
+          <p:cNvPr id="3" name="Notes Placeholder 2"/>
+          <p:cNvSpPr>
+            <a:spLocks noGrp="1"/>
+          </p:cNvSpPr>
+          <p:nvPr>
+            <p:ph type="body" idx="1"/>
+          </p:nvPr>
+        </p:nvSpPr>
+        <p:spPr/>
+        <p:txBody>
+          <a:bodyPr/>
+          <a:lstStyle/>
+          <a:p>
+            <a:r>
+              <a:rPr lang="vi-VN"/>
+              <a:t>Style</a:t>
+            </a:r>
+            <a:endParaRPr lang="en-US"/>
+          </a:p>
+        </p:txBody>
+      </p:sp>
+      <p:sp>
+        <p:nvSpPr>
+          <p:cNvPr id="4" name="Slide Number Placeholder 3"/>
+          <p:cNvSpPr>
+            <a:spLocks noGrp="1"/>
+          </p:cNvSpPr>
+          <p:nvPr>
+            <p:ph type="sldNum" sz="quarter" idx="5"/>
+          </p:nvPr>
+        </p:nvSpPr>
+        <p:spPr/>
+        <p:txBody>
+          <a:bodyPr/>
+          <a:lstStyle/>
+          <a:p>
+            <a:fld id="{959F4E64-33AD-4E03-A94E-822473CE3B48}" type="slidenum">
+              <a:rPr lang="en-US" smtClean="0"/>
+              <a:t>22</a:t>
             </a:fld>
             <a:endParaRPr lang="en-US"/>
           </a:p>
@@ -1750,10 +1838,9 @@
           <a:lstStyle/>
           <a:p>
             <a:r>
-              <a:rPr lang="vi-VN"/>
-              <a:t>Biểu đồ phương pháp đề xuất từ đầu tới cuối</a:t>
-            </a:r>
-            <a:endParaRPr lang="en-US"/>
+              <a:rPr lang="en-US"/>
+              <a:t>Mô tả phát biểu bài toán</a:t>
+            </a:r>
           </a:p>
         </p:txBody>
       </p:sp>
@@ -1783,7 +1870,7 @@
     </p:spTree>
     <p:extLst>
       <p:ext uri="{BB962C8B-B14F-4D97-AF65-F5344CB8AC3E}">
-        <p14:creationId xmlns:p14="http://schemas.microsoft.com/office/powerpoint/2010/main" val="873667190"/>
+        <p14:creationId xmlns:p14="http://schemas.microsoft.com/office/powerpoint/2010/main" val="3861476132"/>
       </p:ext>
     </p:extLst>
   </p:cSld>
@@ -1839,7 +1926,7 @@
           <a:p>
             <a:r>
               <a:rPr lang="vi-VN"/>
-              <a:t>Các bước thu thập dữ liệu</a:t>
+              <a:t>Biểu đồ phương pháp đề xuất từ đầu tới cuối</a:t>
             </a:r>
             <a:endParaRPr lang="en-US"/>
           </a:p>
@@ -1871,7 +1958,7 @@
     </p:spTree>
     <p:extLst>
       <p:ext uri="{BB962C8B-B14F-4D97-AF65-F5344CB8AC3E}">
-        <p14:creationId xmlns:p14="http://schemas.microsoft.com/office/powerpoint/2010/main" val="1750388144"/>
+        <p14:creationId xmlns:p14="http://schemas.microsoft.com/office/powerpoint/2010/main" val="873667190"/>
       </p:ext>
     </p:extLst>
   </p:cSld>
@@ -1927,7 +2014,7 @@
           <a:p>
             <a:r>
               <a:rPr lang="vi-VN"/>
-              <a:t>Các bước tiền xử lý dữ liệu</a:t>
+              <a:t>Các bước thu thập dữ liệu</a:t>
             </a:r>
             <a:endParaRPr lang="en-US"/>
           </a:p>
@@ -1959,7 +2046,7 @@
     </p:spTree>
     <p:extLst>
       <p:ext uri="{BB962C8B-B14F-4D97-AF65-F5344CB8AC3E}">
-        <p14:creationId xmlns:p14="http://schemas.microsoft.com/office/powerpoint/2010/main" val="2492166615"/>
+        <p14:creationId xmlns:p14="http://schemas.microsoft.com/office/powerpoint/2010/main" val="1750388144"/>
       </p:ext>
     </p:extLst>
   </p:cSld>
@@ -2013,27 +2100,11 @@
           <a:bodyPr/>
           <a:lstStyle/>
           <a:p>
-            <a:pPr marL="0" marR="0" lvl="0" indent="0" algn="l" defTabSz="914400" rtl="0" eaLnBrk="1" fontAlgn="auto" latinLnBrk="0" hangingPunct="1">
-              <a:lnSpc>
-                <a:spcPct val="100000"/>
-              </a:lnSpc>
-              <a:spcBef>
-                <a:spcPts val="0"/>
-              </a:spcBef>
-              <a:spcAft>
-                <a:spcPts val="0"/>
-              </a:spcAft>
-              <a:buClrTx/>
-              <a:buSzTx/>
-              <a:buFontTx/>
-              <a:buNone/>
-              <a:tabLst/>
-              <a:defRPr/>
-            </a:pPr>
-            <a:r>
-              <a:rPr lang="en-US"/>
-              <a:t>Minh họa tại sao phải đánh giá các mô hình embedding</a:t>
-            </a:r>
+            <a:r>
+              <a:rPr lang="vi-VN"/>
+              <a:t>Các bước tiền xử lý dữ liệu</a:t>
+            </a:r>
+            <a:endParaRPr lang="en-US"/>
           </a:p>
         </p:txBody>
       </p:sp>
@@ -2063,7 +2134,7 @@
     </p:spTree>
     <p:extLst>
       <p:ext uri="{BB962C8B-B14F-4D97-AF65-F5344CB8AC3E}">
-        <p14:creationId xmlns:p14="http://schemas.microsoft.com/office/powerpoint/2010/main" val="2160103746"/>
+        <p14:creationId xmlns:p14="http://schemas.microsoft.com/office/powerpoint/2010/main" val="2492166615"/>
       </p:ext>
     </p:extLst>
   </p:cSld>
@@ -2117,11 +2188,27 @@
           <a:bodyPr/>
           <a:lstStyle/>
           <a:p>
-            <a:r>
-              <a:rPr lang="vi-VN"/>
-              <a:t>Biểu đồ usecase đăng ký/đăng nhập</a:t>
-            </a:r>
-            <a:endParaRPr lang="en-US"/>
+            <a:pPr marL="0" marR="0" lvl="0" indent="0" algn="l" defTabSz="914400" rtl="0" eaLnBrk="1" fontAlgn="auto" latinLnBrk="0" hangingPunct="1">
+              <a:lnSpc>
+                <a:spcPct val="100000"/>
+              </a:lnSpc>
+              <a:spcBef>
+                <a:spcPts val="0"/>
+              </a:spcBef>
+              <a:spcAft>
+                <a:spcPts val="0"/>
+              </a:spcAft>
+              <a:buClrTx/>
+              <a:buSzTx/>
+              <a:buFontTx/>
+              <a:buNone/>
+              <a:tabLst/>
+              <a:defRPr/>
+            </a:pPr>
+            <a:r>
+              <a:rPr lang="en-US"/>
+              <a:t>Minh họa tại sao phải đánh giá các mô hình embedding</a:t>
+            </a:r>
           </a:p>
         </p:txBody>
       </p:sp>
@@ -2142,7 +2229,7 @@
           <a:p>
             <a:fld id="{959F4E64-33AD-4E03-A94E-822473CE3B48}" type="slidenum">
               <a:rPr lang="en-US" smtClean="0"/>
-              <a:t>9</a:t>
+              <a:t>8</a:t>
             </a:fld>
             <a:endParaRPr lang="en-US"/>
           </a:p>
@@ -2151,7 +2238,7 @@
     </p:spTree>
     <p:extLst>
       <p:ext uri="{BB962C8B-B14F-4D97-AF65-F5344CB8AC3E}">
-        <p14:creationId xmlns:p14="http://schemas.microsoft.com/office/powerpoint/2010/main" val="3113383046"/>
+        <p14:creationId xmlns:p14="http://schemas.microsoft.com/office/powerpoint/2010/main" val="2160103746"/>
       </p:ext>
     </p:extLst>
   </p:cSld>
@@ -2206,9 +2293,10 @@
           <a:lstStyle/>
           <a:p>
             <a:r>
-              <a:rPr lang="en-US"/>
-              <a:t>Biểu đồ chức năng đăng nhập – đăng ký</a:t>
-            </a:r>
+              <a:rPr lang="vi-VN"/>
+              <a:t>Biểu đồ usecase đăng ký/đăng nhập</a:t>
+            </a:r>
+            <a:endParaRPr lang="en-US"/>
           </a:p>
         </p:txBody>
       </p:sp>
@@ -2238,7 +2326,7 @@
     </p:spTree>
     <p:extLst>
       <p:ext uri="{BB962C8B-B14F-4D97-AF65-F5344CB8AC3E}">
-        <p14:creationId xmlns:p14="http://schemas.microsoft.com/office/powerpoint/2010/main" val="3689453927"/>
+        <p14:creationId xmlns:p14="http://schemas.microsoft.com/office/powerpoint/2010/main" val="3113383046"/>
       </p:ext>
     </p:extLst>
   </p:cSld>
@@ -5494,6 +5582,1390 @@
       </p:grpSpPr>
       <p:sp>
         <p:nvSpPr>
+          <p:cNvPr id="3" name="Rectangle: Rounded Corners 2">
+            <a:extLst>
+              <a:ext uri="{FF2B5EF4-FFF2-40B4-BE49-F238E27FC236}">
+                <a16:creationId xmlns:a16="http://schemas.microsoft.com/office/drawing/2014/main" id="{2EA15317-0687-82A7-8F34-E245BF7496A2}"/>
+              </a:ext>
+            </a:extLst>
+          </p:cNvPr>
+          <p:cNvSpPr/>
+          <p:nvPr/>
+        </p:nvSpPr>
+        <p:spPr>
+          <a:xfrm>
+            <a:off x="4710543" y="1888300"/>
+            <a:ext cx="2770912" cy="436418"/>
+          </a:xfrm>
+          <a:prstGeom prst="roundRect">
+            <a:avLst/>
+          </a:prstGeom>
+          <a:solidFill>
+            <a:schemeClr val="bg1">
+              <a:lumMod val="95000"/>
+            </a:schemeClr>
+          </a:solidFill>
+          <a:ln>
+            <a:solidFill>
+              <a:schemeClr val="tx1"/>
+            </a:solidFill>
+            <a:prstDash val="dash"/>
+          </a:ln>
+        </p:spPr>
+        <p:style>
+          <a:lnRef idx="2">
+            <a:schemeClr val="accent1">
+              <a:shade val="15000"/>
+            </a:schemeClr>
+          </a:lnRef>
+          <a:fillRef idx="1">
+            <a:schemeClr val="accent1"/>
+          </a:fillRef>
+          <a:effectRef idx="0">
+            <a:schemeClr val="accent1"/>
+          </a:effectRef>
+          <a:fontRef idx="minor">
+            <a:schemeClr val="lt1"/>
+          </a:fontRef>
+        </p:style>
+        <p:txBody>
+          <a:bodyPr rtlCol="0" anchor="ctr"/>
+          <a:lstStyle/>
+          <a:p>
+            <a:pPr algn="ctr"/>
+            <a:r>
+              <a:rPr lang="vi-VN" sz="1600">
+                <a:solidFill>
+                  <a:schemeClr val="tx1"/>
+                </a:solidFill>
+                <a:latin typeface="+mj-lt"/>
+              </a:rPr>
+              <a:t>Giao diện đăng ký/đăng nhập</a:t>
+            </a:r>
+            <a:endParaRPr lang="en-US" sz="1600">
+              <a:solidFill>
+                <a:schemeClr val="tx1"/>
+              </a:solidFill>
+              <a:latin typeface="+mj-lt"/>
+            </a:endParaRPr>
+          </a:p>
+        </p:txBody>
+      </p:sp>
+      <p:sp>
+        <p:nvSpPr>
+          <p:cNvPr id="4" name="Rectangle: Rounded Corners 3">
+            <a:extLst>
+              <a:ext uri="{FF2B5EF4-FFF2-40B4-BE49-F238E27FC236}">
+                <a16:creationId xmlns:a16="http://schemas.microsoft.com/office/drawing/2014/main" id="{840EBFA2-C2F3-9787-724E-2BF7ED3F6604}"/>
+              </a:ext>
+            </a:extLst>
+          </p:cNvPr>
+          <p:cNvSpPr/>
+          <p:nvPr/>
+        </p:nvSpPr>
+        <p:spPr>
+          <a:xfrm>
+            <a:off x="2614180" y="3052081"/>
+            <a:ext cx="1588078" cy="675409"/>
+          </a:xfrm>
+          <a:prstGeom prst="roundRect">
+            <a:avLst/>
+          </a:prstGeom>
+          <a:solidFill>
+            <a:schemeClr val="bg1">
+              <a:lumMod val="95000"/>
+            </a:schemeClr>
+          </a:solidFill>
+          <a:ln>
+            <a:solidFill>
+              <a:schemeClr val="tx1"/>
+            </a:solidFill>
+          </a:ln>
+        </p:spPr>
+        <p:style>
+          <a:lnRef idx="2">
+            <a:schemeClr val="accent1">
+              <a:shade val="15000"/>
+            </a:schemeClr>
+          </a:lnRef>
+          <a:fillRef idx="1">
+            <a:schemeClr val="accent1"/>
+          </a:fillRef>
+          <a:effectRef idx="0">
+            <a:schemeClr val="accent1"/>
+          </a:effectRef>
+          <a:fontRef idx="minor">
+            <a:schemeClr val="lt1"/>
+          </a:fontRef>
+        </p:style>
+        <p:txBody>
+          <a:bodyPr rtlCol="0" anchor="ctr"/>
+          <a:lstStyle/>
+          <a:p>
+            <a:pPr algn="ctr"/>
+            <a:r>
+              <a:rPr lang="vi-VN" sz="1600">
+                <a:solidFill>
+                  <a:schemeClr val="tx1"/>
+                </a:solidFill>
+                <a:latin typeface="+mj-lt"/>
+              </a:rPr>
+              <a:t>Đăng ký</a:t>
+            </a:r>
+            <a:endParaRPr lang="en-US" sz="1600">
+              <a:solidFill>
+                <a:schemeClr val="tx1"/>
+              </a:solidFill>
+              <a:latin typeface="+mj-lt"/>
+            </a:endParaRPr>
+          </a:p>
+        </p:txBody>
+      </p:sp>
+      <p:sp>
+        <p:nvSpPr>
+          <p:cNvPr id="5" name="Rectangle: Rounded Corners 4">
+            <a:extLst>
+              <a:ext uri="{FF2B5EF4-FFF2-40B4-BE49-F238E27FC236}">
+                <a16:creationId xmlns:a16="http://schemas.microsoft.com/office/drawing/2014/main" id="{0C64B575-A76D-5036-8FA9-2AFD31831522}"/>
+              </a:ext>
+            </a:extLst>
+          </p:cNvPr>
+          <p:cNvSpPr/>
+          <p:nvPr/>
+        </p:nvSpPr>
+        <p:spPr>
+          <a:xfrm>
+            <a:off x="5301959" y="3052082"/>
+            <a:ext cx="1588078" cy="675409"/>
+          </a:xfrm>
+          <a:prstGeom prst="roundRect">
+            <a:avLst/>
+          </a:prstGeom>
+          <a:solidFill>
+            <a:schemeClr val="bg1">
+              <a:lumMod val="95000"/>
+            </a:schemeClr>
+          </a:solidFill>
+          <a:ln>
+            <a:solidFill>
+              <a:schemeClr val="tx1"/>
+            </a:solidFill>
+          </a:ln>
+        </p:spPr>
+        <p:style>
+          <a:lnRef idx="2">
+            <a:schemeClr val="accent1">
+              <a:shade val="15000"/>
+            </a:schemeClr>
+          </a:lnRef>
+          <a:fillRef idx="1">
+            <a:schemeClr val="accent1"/>
+          </a:fillRef>
+          <a:effectRef idx="0">
+            <a:schemeClr val="accent1"/>
+          </a:effectRef>
+          <a:fontRef idx="minor">
+            <a:schemeClr val="lt1"/>
+          </a:fontRef>
+        </p:style>
+        <p:txBody>
+          <a:bodyPr rtlCol="0" anchor="ctr"/>
+          <a:lstStyle/>
+          <a:p>
+            <a:pPr algn="ctr"/>
+            <a:r>
+              <a:rPr lang="vi-VN" sz="1600">
+                <a:solidFill>
+                  <a:schemeClr val="tx1"/>
+                </a:solidFill>
+                <a:latin typeface="+mj-lt"/>
+              </a:rPr>
+              <a:t>Đăng nhập</a:t>
+            </a:r>
+            <a:endParaRPr lang="en-US" sz="1600">
+              <a:solidFill>
+                <a:schemeClr val="tx1"/>
+              </a:solidFill>
+              <a:latin typeface="+mj-lt"/>
+            </a:endParaRPr>
+          </a:p>
+        </p:txBody>
+      </p:sp>
+      <p:sp>
+        <p:nvSpPr>
+          <p:cNvPr id="6" name="Rectangle: Rounded Corners 5">
+            <a:extLst>
+              <a:ext uri="{FF2B5EF4-FFF2-40B4-BE49-F238E27FC236}">
+                <a16:creationId xmlns:a16="http://schemas.microsoft.com/office/drawing/2014/main" id="{6E28BFBE-3429-1418-D209-77F555515ECD}"/>
+              </a:ext>
+            </a:extLst>
+          </p:cNvPr>
+          <p:cNvSpPr/>
+          <p:nvPr/>
+        </p:nvSpPr>
+        <p:spPr>
+          <a:xfrm>
+            <a:off x="5301959" y="4454854"/>
+            <a:ext cx="1588078" cy="675409"/>
+          </a:xfrm>
+          <a:prstGeom prst="roundRect">
+            <a:avLst/>
+          </a:prstGeom>
+          <a:solidFill>
+            <a:schemeClr val="bg1">
+              <a:lumMod val="95000"/>
+            </a:schemeClr>
+          </a:solidFill>
+          <a:ln>
+            <a:solidFill>
+              <a:schemeClr val="tx1"/>
+            </a:solidFill>
+            <a:prstDash val="dash"/>
+          </a:ln>
+        </p:spPr>
+        <p:style>
+          <a:lnRef idx="2">
+            <a:schemeClr val="accent1">
+              <a:shade val="15000"/>
+            </a:schemeClr>
+          </a:lnRef>
+          <a:fillRef idx="1">
+            <a:schemeClr val="accent1"/>
+          </a:fillRef>
+          <a:effectRef idx="0">
+            <a:schemeClr val="accent1"/>
+          </a:effectRef>
+          <a:fontRef idx="minor">
+            <a:schemeClr val="lt1"/>
+          </a:fontRef>
+        </p:style>
+        <p:txBody>
+          <a:bodyPr rtlCol="0" anchor="ctr"/>
+          <a:lstStyle/>
+          <a:p>
+            <a:pPr algn="ctr"/>
+            <a:r>
+              <a:rPr lang="vi-VN" sz="1600">
+                <a:solidFill>
+                  <a:schemeClr val="tx1"/>
+                </a:solidFill>
+                <a:latin typeface="+mj-lt"/>
+              </a:rPr>
+              <a:t>Người dùng nhập thông tin</a:t>
+            </a:r>
+            <a:endParaRPr lang="en-US" sz="1600">
+              <a:solidFill>
+                <a:schemeClr val="tx1"/>
+              </a:solidFill>
+              <a:latin typeface="+mj-lt"/>
+            </a:endParaRPr>
+          </a:p>
+        </p:txBody>
+      </p:sp>
+      <p:sp>
+        <p:nvSpPr>
+          <p:cNvPr id="8" name="Rectangle: Rounded Corners 7">
+            <a:extLst>
+              <a:ext uri="{FF2B5EF4-FFF2-40B4-BE49-F238E27FC236}">
+                <a16:creationId xmlns:a16="http://schemas.microsoft.com/office/drawing/2014/main" id="{8BEBDE03-5A5E-50A8-0CAA-9BA9D30EF15A}"/>
+              </a:ext>
+            </a:extLst>
+          </p:cNvPr>
+          <p:cNvSpPr/>
+          <p:nvPr/>
+        </p:nvSpPr>
+        <p:spPr>
+          <a:xfrm>
+            <a:off x="2614180" y="4413288"/>
+            <a:ext cx="1588078" cy="675409"/>
+          </a:xfrm>
+          <a:prstGeom prst="roundRect">
+            <a:avLst/>
+          </a:prstGeom>
+          <a:solidFill>
+            <a:schemeClr val="bg1">
+              <a:lumMod val="95000"/>
+            </a:schemeClr>
+          </a:solidFill>
+          <a:ln>
+            <a:solidFill>
+              <a:schemeClr val="tx1"/>
+            </a:solidFill>
+            <a:prstDash val="dash"/>
+          </a:ln>
+        </p:spPr>
+        <p:style>
+          <a:lnRef idx="2">
+            <a:schemeClr val="accent1">
+              <a:shade val="15000"/>
+            </a:schemeClr>
+          </a:lnRef>
+          <a:fillRef idx="1">
+            <a:schemeClr val="accent1"/>
+          </a:fillRef>
+          <a:effectRef idx="0">
+            <a:schemeClr val="accent1"/>
+          </a:effectRef>
+          <a:fontRef idx="minor">
+            <a:schemeClr val="lt1"/>
+          </a:fontRef>
+        </p:style>
+        <p:txBody>
+          <a:bodyPr rtlCol="0" anchor="ctr"/>
+          <a:lstStyle/>
+          <a:p>
+            <a:pPr algn="ctr"/>
+            <a:r>
+              <a:rPr lang="vi-VN" sz="1600">
+                <a:solidFill>
+                  <a:schemeClr val="tx1"/>
+                </a:solidFill>
+                <a:latin typeface="+mj-lt"/>
+              </a:rPr>
+              <a:t>Người dùng nhập thông tin</a:t>
+            </a:r>
+            <a:endParaRPr lang="en-US" sz="1600">
+              <a:solidFill>
+                <a:schemeClr val="tx1"/>
+              </a:solidFill>
+              <a:latin typeface="+mj-lt"/>
+            </a:endParaRPr>
+          </a:p>
+        </p:txBody>
+      </p:sp>
+      <p:sp>
+        <p:nvSpPr>
+          <p:cNvPr id="10" name="Rectangle: Rounded Corners 9">
+            <a:extLst>
+              <a:ext uri="{FF2B5EF4-FFF2-40B4-BE49-F238E27FC236}">
+                <a16:creationId xmlns:a16="http://schemas.microsoft.com/office/drawing/2014/main" id="{C74779B1-D515-1EF6-1900-5F8D609F013D}"/>
+              </a:ext>
+            </a:extLst>
+          </p:cNvPr>
+          <p:cNvSpPr/>
+          <p:nvPr/>
+        </p:nvSpPr>
+        <p:spPr>
+          <a:xfrm>
+            <a:off x="2614180" y="5816061"/>
+            <a:ext cx="6963636" cy="675409"/>
+          </a:xfrm>
+          <a:prstGeom prst="roundRect">
+            <a:avLst/>
+          </a:prstGeom>
+          <a:solidFill>
+            <a:schemeClr val="bg1">
+              <a:lumMod val="95000"/>
+            </a:schemeClr>
+          </a:solidFill>
+          <a:ln>
+            <a:solidFill>
+              <a:schemeClr val="tx1"/>
+            </a:solidFill>
+          </a:ln>
+        </p:spPr>
+        <p:style>
+          <a:lnRef idx="2">
+            <a:schemeClr val="accent1">
+              <a:shade val="15000"/>
+            </a:schemeClr>
+          </a:lnRef>
+          <a:fillRef idx="1">
+            <a:schemeClr val="accent1"/>
+          </a:fillRef>
+          <a:effectRef idx="0">
+            <a:schemeClr val="accent1"/>
+          </a:effectRef>
+          <a:fontRef idx="minor">
+            <a:schemeClr val="lt1"/>
+          </a:fontRef>
+        </p:style>
+        <p:txBody>
+          <a:bodyPr rtlCol="0" anchor="ctr"/>
+          <a:lstStyle/>
+          <a:p>
+            <a:pPr algn="ctr"/>
+            <a:r>
+              <a:rPr lang="vi-VN" sz="1600">
+                <a:solidFill>
+                  <a:schemeClr val="tx1"/>
+                </a:solidFill>
+                <a:latin typeface="+mj-lt"/>
+              </a:rPr>
+              <a:t>Giao diện người dùng chatbot</a:t>
+            </a:r>
+            <a:endParaRPr lang="en-US" sz="1600">
+              <a:solidFill>
+                <a:schemeClr val="tx1"/>
+              </a:solidFill>
+              <a:latin typeface="+mj-lt"/>
+            </a:endParaRPr>
+          </a:p>
+        </p:txBody>
+      </p:sp>
+      <p:sp>
+        <p:nvSpPr>
+          <p:cNvPr id="11" name="Rectangle: Rounded Corners 10">
+            <a:extLst>
+              <a:ext uri="{FF2B5EF4-FFF2-40B4-BE49-F238E27FC236}">
+                <a16:creationId xmlns:a16="http://schemas.microsoft.com/office/drawing/2014/main" id="{AAF0A63F-FBD6-2D94-6DCC-10B1FCC92632}"/>
+              </a:ext>
+            </a:extLst>
+          </p:cNvPr>
+          <p:cNvSpPr/>
+          <p:nvPr/>
+        </p:nvSpPr>
+        <p:spPr>
+          <a:xfrm>
+            <a:off x="7989738" y="4444460"/>
+            <a:ext cx="1588078" cy="675409"/>
+          </a:xfrm>
+          <a:prstGeom prst="roundRect">
+            <a:avLst/>
+          </a:prstGeom>
+          <a:solidFill>
+            <a:schemeClr val="bg1">
+              <a:lumMod val="95000"/>
+            </a:schemeClr>
+          </a:solidFill>
+          <a:ln>
+            <a:solidFill>
+              <a:schemeClr val="tx1"/>
+            </a:solidFill>
+          </a:ln>
+        </p:spPr>
+        <p:style>
+          <a:lnRef idx="2">
+            <a:schemeClr val="accent1">
+              <a:shade val="15000"/>
+            </a:schemeClr>
+          </a:lnRef>
+          <a:fillRef idx="1">
+            <a:schemeClr val="accent1"/>
+          </a:fillRef>
+          <a:effectRef idx="0">
+            <a:schemeClr val="accent1"/>
+          </a:effectRef>
+          <a:fontRef idx="minor">
+            <a:schemeClr val="lt1"/>
+          </a:fontRef>
+        </p:style>
+        <p:txBody>
+          <a:bodyPr rtlCol="0" anchor="ctr"/>
+          <a:lstStyle/>
+          <a:p>
+            <a:pPr algn="ctr"/>
+            <a:r>
+              <a:rPr lang="vi-VN" sz="1600">
+                <a:solidFill>
+                  <a:schemeClr val="tx1"/>
+                </a:solidFill>
+                <a:latin typeface="+mj-lt"/>
+              </a:rPr>
+              <a:t>Đăng xuất</a:t>
+            </a:r>
+            <a:endParaRPr lang="en-US" sz="1600">
+              <a:solidFill>
+                <a:schemeClr val="tx1"/>
+              </a:solidFill>
+              <a:latin typeface="+mj-lt"/>
+            </a:endParaRPr>
+          </a:p>
+        </p:txBody>
+      </p:sp>
+      <p:cxnSp>
+        <p:nvCxnSpPr>
+          <p:cNvPr id="13" name="Straight Arrow Connector 12">
+            <a:extLst>
+              <a:ext uri="{FF2B5EF4-FFF2-40B4-BE49-F238E27FC236}">
+                <a16:creationId xmlns:a16="http://schemas.microsoft.com/office/drawing/2014/main" id="{C3BA0F59-8489-6D44-D3EB-8179377580FA}"/>
+              </a:ext>
+            </a:extLst>
+          </p:cNvPr>
+          <p:cNvCxnSpPr>
+            <a:cxnSpLocks/>
+            <a:endCxn id="3" idx="0"/>
+          </p:cNvCxnSpPr>
+          <p:nvPr/>
+        </p:nvCxnSpPr>
+        <p:spPr>
+          <a:xfrm>
+            <a:off x="6095999" y="1479068"/>
+            <a:ext cx="0" cy="409232"/>
+          </a:xfrm>
+          <a:prstGeom prst="straightConnector1">
+            <a:avLst/>
+          </a:prstGeom>
+          <a:ln>
+            <a:tailEnd type="triangle"/>
+          </a:ln>
+        </p:spPr>
+        <p:style>
+          <a:lnRef idx="2">
+            <a:schemeClr val="dk1"/>
+          </a:lnRef>
+          <a:fillRef idx="0">
+            <a:schemeClr val="dk1"/>
+          </a:fillRef>
+          <a:effectRef idx="1">
+            <a:schemeClr val="dk1"/>
+          </a:effectRef>
+          <a:fontRef idx="minor">
+            <a:schemeClr val="tx1"/>
+          </a:fontRef>
+        </p:style>
+      </p:cxnSp>
+      <p:cxnSp>
+        <p:nvCxnSpPr>
+          <p:cNvPr id="15" name="Straight Arrow Connector 14">
+            <a:extLst>
+              <a:ext uri="{FF2B5EF4-FFF2-40B4-BE49-F238E27FC236}">
+                <a16:creationId xmlns:a16="http://schemas.microsoft.com/office/drawing/2014/main" id="{DA813B6C-58AF-F8F9-FA69-4AECEA469ABE}"/>
+              </a:ext>
+            </a:extLst>
+          </p:cNvPr>
+          <p:cNvCxnSpPr>
+            <a:cxnSpLocks/>
+            <a:stCxn id="3" idx="2"/>
+            <a:endCxn id="5" idx="0"/>
+          </p:cNvCxnSpPr>
+          <p:nvPr/>
+        </p:nvCxnSpPr>
+        <p:spPr>
+          <a:xfrm flipH="1">
+            <a:off x="6095998" y="2324718"/>
+            <a:ext cx="1" cy="727364"/>
+          </a:xfrm>
+          <a:prstGeom prst="straightConnector1">
+            <a:avLst/>
+          </a:prstGeom>
+          <a:ln>
+            <a:tailEnd type="triangle"/>
+          </a:ln>
+        </p:spPr>
+        <p:style>
+          <a:lnRef idx="2">
+            <a:schemeClr val="dk1"/>
+          </a:lnRef>
+          <a:fillRef idx="0">
+            <a:schemeClr val="dk1"/>
+          </a:fillRef>
+          <a:effectRef idx="1">
+            <a:schemeClr val="dk1"/>
+          </a:effectRef>
+          <a:fontRef idx="minor">
+            <a:schemeClr val="tx1"/>
+          </a:fontRef>
+        </p:style>
+      </p:cxnSp>
+      <p:cxnSp>
+        <p:nvCxnSpPr>
+          <p:cNvPr id="17" name="Connector: Elbow 16">
+            <a:extLst>
+              <a:ext uri="{FF2B5EF4-FFF2-40B4-BE49-F238E27FC236}">
+                <a16:creationId xmlns:a16="http://schemas.microsoft.com/office/drawing/2014/main" id="{E6831E9B-2008-4202-FB03-7485722821DA}"/>
+              </a:ext>
+            </a:extLst>
+          </p:cNvPr>
+          <p:cNvCxnSpPr>
+            <a:cxnSpLocks/>
+            <a:stCxn id="3" idx="2"/>
+            <a:endCxn id="4" idx="0"/>
+          </p:cNvCxnSpPr>
+          <p:nvPr/>
+        </p:nvCxnSpPr>
+        <p:spPr>
+          <a:xfrm rot="5400000">
+            <a:off x="4388428" y="1344509"/>
+            <a:ext cx="727363" cy="2687780"/>
+          </a:xfrm>
+          <a:prstGeom prst="bentConnector3">
+            <a:avLst/>
+          </a:prstGeom>
+          <a:ln>
+            <a:tailEnd type="triangle"/>
+          </a:ln>
+        </p:spPr>
+        <p:style>
+          <a:lnRef idx="2">
+            <a:schemeClr val="dk1"/>
+          </a:lnRef>
+          <a:fillRef idx="0">
+            <a:schemeClr val="dk1"/>
+          </a:fillRef>
+          <a:effectRef idx="1">
+            <a:schemeClr val="dk1"/>
+          </a:effectRef>
+          <a:fontRef idx="minor">
+            <a:schemeClr val="tx1"/>
+          </a:fontRef>
+        </p:style>
+      </p:cxnSp>
+      <p:cxnSp>
+        <p:nvCxnSpPr>
+          <p:cNvPr id="19" name="Straight Arrow Connector 18">
+            <a:extLst>
+              <a:ext uri="{FF2B5EF4-FFF2-40B4-BE49-F238E27FC236}">
+                <a16:creationId xmlns:a16="http://schemas.microsoft.com/office/drawing/2014/main" id="{1355E5A9-3368-5FE1-631A-DF73C9926095}"/>
+              </a:ext>
+            </a:extLst>
+          </p:cNvPr>
+          <p:cNvCxnSpPr>
+            <a:stCxn id="5" idx="2"/>
+            <a:endCxn id="6" idx="0"/>
+          </p:cNvCxnSpPr>
+          <p:nvPr/>
+        </p:nvCxnSpPr>
+        <p:spPr>
+          <a:xfrm>
+            <a:off x="6095998" y="3727491"/>
+            <a:ext cx="0" cy="727363"/>
+          </a:xfrm>
+          <a:prstGeom prst="straightConnector1">
+            <a:avLst/>
+          </a:prstGeom>
+          <a:ln>
+            <a:tailEnd type="triangle"/>
+          </a:ln>
+        </p:spPr>
+        <p:style>
+          <a:lnRef idx="2">
+            <a:schemeClr val="dk1"/>
+          </a:lnRef>
+          <a:fillRef idx="0">
+            <a:schemeClr val="dk1"/>
+          </a:fillRef>
+          <a:effectRef idx="1">
+            <a:schemeClr val="dk1"/>
+          </a:effectRef>
+          <a:fontRef idx="minor">
+            <a:schemeClr val="tx1"/>
+          </a:fontRef>
+        </p:style>
+      </p:cxnSp>
+      <p:cxnSp>
+        <p:nvCxnSpPr>
+          <p:cNvPr id="21" name="Straight Arrow Connector 20">
+            <a:extLst>
+              <a:ext uri="{FF2B5EF4-FFF2-40B4-BE49-F238E27FC236}">
+                <a16:creationId xmlns:a16="http://schemas.microsoft.com/office/drawing/2014/main" id="{E652D558-672F-1A4C-D571-A74E57862B81}"/>
+              </a:ext>
+            </a:extLst>
+          </p:cNvPr>
+          <p:cNvCxnSpPr>
+            <a:stCxn id="4" idx="2"/>
+            <a:endCxn id="8" idx="0"/>
+          </p:cNvCxnSpPr>
+          <p:nvPr/>
+        </p:nvCxnSpPr>
+        <p:spPr>
+          <a:xfrm>
+            <a:off x="3408219" y="3727490"/>
+            <a:ext cx="0" cy="685798"/>
+          </a:xfrm>
+          <a:prstGeom prst="straightConnector1">
+            <a:avLst/>
+          </a:prstGeom>
+          <a:ln>
+            <a:tailEnd type="triangle"/>
+          </a:ln>
+        </p:spPr>
+        <p:style>
+          <a:lnRef idx="2">
+            <a:schemeClr val="dk1"/>
+          </a:lnRef>
+          <a:fillRef idx="0">
+            <a:schemeClr val="dk1"/>
+          </a:fillRef>
+          <a:effectRef idx="1">
+            <a:schemeClr val="dk1"/>
+          </a:effectRef>
+          <a:fontRef idx="minor">
+            <a:schemeClr val="tx1"/>
+          </a:fontRef>
+        </p:style>
+      </p:cxnSp>
+      <p:cxnSp>
+        <p:nvCxnSpPr>
+          <p:cNvPr id="33" name="Straight Connector 32">
+            <a:extLst>
+              <a:ext uri="{FF2B5EF4-FFF2-40B4-BE49-F238E27FC236}">
+                <a16:creationId xmlns:a16="http://schemas.microsoft.com/office/drawing/2014/main" id="{4BA61D56-544D-3777-00ED-74D7C273C477}"/>
+              </a:ext>
+            </a:extLst>
+          </p:cNvPr>
+          <p:cNvCxnSpPr>
+            <a:cxnSpLocks/>
+            <a:stCxn id="8" idx="2"/>
+          </p:cNvCxnSpPr>
+          <p:nvPr/>
+        </p:nvCxnSpPr>
+        <p:spPr>
+          <a:xfrm>
+            <a:off x="3408219" y="5088697"/>
+            <a:ext cx="0" cy="374076"/>
+          </a:xfrm>
+          <a:prstGeom prst="line">
+            <a:avLst/>
+          </a:prstGeom>
+        </p:spPr>
+        <p:style>
+          <a:lnRef idx="2">
+            <a:schemeClr val="dk1"/>
+          </a:lnRef>
+          <a:fillRef idx="0">
+            <a:schemeClr val="dk1"/>
+          </a:fillRef>
+          <a:effectRef idx="1">
+            <a:schemeClr val="dk1"/>
+          </a:effectRef>
+          <a:fontRef idx="minor">
+            <a:schemeClr val="tx1"/>
+          </a:fontRef>
+        </p:style>
+      </p:cxnSp>
+      <p:cxnSp>
+        <p:nvCxnSpPr>
+          <p:cNvPr id="35" name="Straight Connector 34">
+            <a:extLst>
+              <a:ext uri="{FF2B5EF4-FFF2-40B4-BE49-F238E27FC236}">
+                <a16:creationId xmlns:a16="http://schemas.microsoft.com/office/drawing/2014/main" id="{4ADD7E55-E2CA-B3E2-9813-6E78261D1520}"/>
+              </a:ext>
+            </a:extLst>
+          </p:cNvPr>
+          <p:cNvCxnSpPr/>
+          <p:nvPr/>
+        </p:nvCxnSpPr>
+        <p:spPr>
+          <a:xfrm>
+            <a:off x="3408219" y="5462773"/>
+            <a:ext cx="2185814" cy="0"/>
+          </a:xfrm>
+          <a:prstGeom prst="line">
+            <a:avLst/>
+          </a:prstGeom>
+        </p:spPr>
+        <p:style>
+          <a:lnRef idx="2">
+            <a:schemeClr val="dk1"/>
+          </a:lnRef>
+          <a:fillRef idx="0">
+            <a:schemeClr val="dk1"/>
+          </a:fillRef>
+          <a:effectRef idx="1">
+            <a:schemeClr val="dk1"/>
+          </a:effectRef>
+          <a:fontRef idx="minor">
+            <a:schemeClr val="tx1"/>
+          </a:fontRef>
+        </p:style>
+      </p:cxnSp>
+      <p:cxnSp>
+        <p:nvCxnSpPr>
+          <p:cNvPr id="37" name="Straight Arrow Connector 36">
+            <a:extLst>
+              <a:ext uri="{FF2B5EF4-FFF2-40B4-BE49-F238E27FC236}">
+                <a16:creationId xmlns:a16="http://schemas.microsoft.com/office/drawing/2014/main" id="{42F78551-9762-E155-4B6D-961F07218F4B}"/>
+              </a:ext>
+            </a:extLst>
+          </p:cNvPr>
+          <p:cNvCxnSpPr>
+            <a:cxnSpLocks/>
+          </p:cNvCxnSpPr>
+          <p:nvPr/>
+        </p:nvCxnSpPr>
+        <p:spPr>
+          <a:xfrm>
+            <a:off x="5594033" y="5462773"/>
+            <a:ext cx="0" cy="353288"/>
+          </a:xfrm>
+          <a:prstGeom prst="straightConnector1">
+            <a:avLst/>
+          </a:prstGeom>
+          <a:ln>
+            <a:tailEnd type="triangle"/>
+          </a:ln>
+        </p:spPr>
+        <p:style>
+          <a:lnRef idx="2">
+            <a:schemeClr val="dk1"/>
+          </a:lnRef>
+          <a:fillRef idx="0">
+            <a:schemeClr val="dk1"/>
+          </a:fillRef>
+          <a:effectRef idx="1">
+            <a:schemeClr val="dk1"/>
+          </a:effectRef>
+          <a:fontRef idx="minor">
+            <a:schemeClr val="tx1"/>
+          </a:fontRef>
+        </p:style>
+      </p:cxnSp>
+      <p:cxnSp>
+        <p:nvCxnSpPr>
+          <p:cNvPr id="39" name="Straight Arrow Connector 38">
+            <a:extLst>
+              <a:ext uri="{FF2B5EF4-FFF2-40B4-BE49-F238E27FC236}">
+                <a16:creationId xmlns:a16="http://schemas.microsoft.com/office/drawing/2014/main" id="{3033B4EB-A950-B53B-26CD-5A7783A71260}"/>
+              </a:ext>
+            </a:extLst>
+          </p:cNvPr>
+          <p:cNvCxnSpPr>
+            <a:stCxn id="6" idx="2"/>
+            <a:endCxn id="10" idx="0"/>
+          </p:cNvCxnSpPr>
+          <p:nvPr/>
+        </p:nvCxnSpPr>
+        <p:spPr>
+          <a:xfrm>
+            <a:off x="6095998" y="5130263"/>
+            <a:ext cx="0" cy="685798"/>
+          </a:xfrm>
+          <a:prstGeom prst="straightConnector1">
+            <a:avLst/>
+          </a:prstGeom>
+          <a:ln>
+            <a:tailEnd type="triangle"/>
+          </a:ln>
+        </p:spPr>
+        <p:style>
+          <a:lnRef idx="2">
+            <a:schemeClr val="dk1"/>
+          </a:lnRef>
+          <a:fillRef idx="0">
+            <a:schemeClr val="dk1"/>
+          </a:fillRef>
+          <a:effectRef idx="1">
+            <a:schemeClr val="dk1"/>
+          </a:effectRef>
+          <a:fontRef idx="minor">
+            <a:schemeClr val="tx1"/>
+          </a:fontRef>
+        </p:style>
+      </p:cxnSp>
+      <p:cxnSp>
+        <p:nvCxnSpPr>
+          <p:cNvPr id="46" name="Connector: Elbow 45">
+            <a:extLst>
+              <a:ext uri="{FF2B5EF4-FFF2-40B4-BE49-F238E27FC236}">
+                <a16:creationId xmlns:a16="http://schemas.microsoft.com/office/drawing/2014/main" id="{066B987A-3824-6F03-B748-175C64F11F8D}"/>
+              </a:ext>
+            </a:extLst>
+          </p:cNvPr>
+          <p:cNvCxnSpPr>
+            <a:cxnSpLocks/>
+            <a:stCxn id="6" idx="3"/>
+            <a:endCxn id="3" idx="3"/>
+          </p:cNvCxnSpPr>
+          <p:nvPr/>
+        </p:nvCxnSpPr>
+        <p:spPr>
+          <a:xfrm flipV="1">
+            <a:off x="6890037" y="2106509"/>
+            <a:ext cx="591418" cy="2686050"/>
+          </a:xfrm>
+          <a:prstGeom prst="bentConnector3">
+            <a:avLst>
+              <a:gd name="adj1" fmla="val 156223"/>
+            </a:avLst>
+          </a:prstGeom>
+          <a:ln>
+            <a:tailEnd type="triangle"/>
+          </a:ln>
+        </p:spPr>
+        <p:style>
+          <a:lnRef idx="2">
+            <a:schemeClr val="dk1"/>
+          </a:lnRef>
+          <a:fillRef idx="0">
+            <a:schemeClr val="dk1"/>
+          </a:fillRef>
+          <a:effectRef idx="1">
+            <a:schemeClr val="dk1"/>
+          </a:effectRef>
+          <a:fontRef idx="minor">
+            <a:schemeClr val="tx1"/>
+          </a:fontRef>
+        </p:style>
+      </p:cxnSp>
+      <p:cxnSp>
+        <p:nvCxnSpPr>
+          <p:cNvPr id="49" name="Connector: Elbow 48">
+            <a:extLst>
+              <a:ext uri="{FF2B5EF4-FFF2-40B4-BE49-F238E27FC236}">
+                <a16:creationId xmlns:a16="http://schemas.microsoft.com/office/drawing/2014/main" id="{1D38D816-4CA9-2DF2-9B2B-46532840AE4D}"/>
+              </a:ext>
+            </a:extLst>
+          </p:cNvPr>
+          <p:cNvCxnSpPr>
+            <a:stCxn id="10" idx="3"/>
+            <a:endCxn id="11" idx="3"/>
+          </p:cNvCxnSpPr>
+          <p:nvPr/>
+        </p:nvCxnSpPr>
+        <p:spPr>
+          <a:xfrm flipV="1">
+            <a:off x="9577816" y="4782165"/>
+            <a:ext cx="12700" cy="1371601"/>
+          </a:xfrm>
+          <a:prstGeom prst="bentConnector3">
+            <a:avLst>
+              <a:gd name="adj1" fmla="val 1800000"/>
+            </a:avLst>
+          </a:prstGeom>
+          <a:ln>
+            <a:tailEnd type="triangle"/>
+          </a:ln>
+        </p:spPr>
+        <p:style>
+          <a:lnRef idx="2">
+            <a:schemeClr val="dk1"/>
+          </a:lnRef>
+          <a:fillRef idx="0">
+            <a:schemeClr val="dk1"/>
+          </a:fillRef>
+          <a:effectRef idx="1">
+            <a:schemeClr val="dk1"/>
+          </a:effectRef>
+          <a:fontRef idx="minor">
+            <a:schemeClr val="tx1"/>
+          </a:fontRef>
+        </p:style>
+      </p:cxnSp>
+      <p:cxnSp>
+        <p:nvCxnSpPr>
+          <p:cNvPr id="51" name="Connector: Elbow 50">
+            <a:extLst>
+              <a:ext uri="{FF2B5EF4-FFF2-40B4-BE49-F238E27FC236}">
+                <a16:creationId xmlns:a16="http://schemas.microsoft.com/office/drawing/2014/main" id="{F9A40D3E-EEEC-5419-76DE-483B0D80C761}"/>
+              </a:ext>
+            </a:extLst>
+          </p:cNvPr>
+          <p:cNvCxnSpPr>
+            <a:cxnSpLocks/>
+            <a:stCxn id="11" idx="0"/>
+            <a:endCxn id="3" idx="3"/>
+          </p:cNvCxnSpPr>
+          <p:nvPr/>
+        </p:nvCxnSpPr>
+        <p:spPr>
+          <a:xfrm rot="16200000" flipV="1">
+            <a:off x="6963641" y="2624324"/>
+            <a:ext cx="2337951" cy="1302322"/>
+          </a:xfrm>
+          <a:prstGeom prst="bentConnector2">
+            <a:avLst/>
+          </a:prstGeom>
+          <a:ln>
+            <a:tailEnd type="triangle"/>
+          </a:ln>
+        </p:spPr>
+        <p:style>
+          <a:lnRef idx="2">
+            <a:schemeClr val="dk1"/>
+          </a:lnRef>
+          <a:fillRef idx="0">
+            <a:schemeClr val="dk1"/>
+          </a:fillRef>
+          <a:effectRef idx="1">
+            <a:schemeClr val="dk1"/>
+          </a:effectRef>
+          <a:fontRef idx="minor">
+            <a:schemeClr val="tx1"/>
+          </a:fontRef>
+        </p:style>
+      </p:cxnSp>
+      <p:grpSp>
+        <p:nvGrpSpPr>
+          <p:cNvPr id="68" name="Group 67">
+            <a:extLst>
+              <a:ext uri="{FF2B5EF4-FFF2-40B4-BE49-F238E27FC236}">
+                <a16:creationId xmlns:a16="http://schemas.microsoft.com/office/drawing/2014/main" id="{22213870-BA24-1EB9-AA5E-2E2878BFED94}"/>
+              </a:ext>
+            </a:extLst>
+          </p:cNvPr>
+          <p:cNvGrpSpPr/>
+          <p:nvPr/>
+        </p:nvGrpSpPr>
+        <p:grpSpPr>
+          <a:xfrm>
+            <a:off x="5509138" y="214652"/>
+            <a:ext cx="1173719" cy="1180574"/>
+            <a:chOff x="5509139" y="42349"/>
+            <a:chExt cx="1173719" cy="1180574"/>
+          </a:xfrm>
+        </p:grpSpPr>
+        <p:pic>
+          <p:nvPicPr>
+            <p:cNvPr id="2" name="Graphic 1" descr="User with solid fill">
+              <a:extLst>
+                <a:ext uri="{FF2B5EF4-FFF2-40B4-BE49-F238E27FC236}">
+                  <a16:creationId xmlns:a16="http://schemas.microsoft.com/office/drawing/2014/main" id="{A4CB7FE8-230F-062F-36CC-A4F2FC4E821C}"/>
+                </a:ext>
+              </a:extLst>
+            </p:cNvPr>
+            <p:cNvPicPr>
+              <a:picLocks noChangeAspect="1"/>
+            </p:cNvPicPr>
+            <p:nvPr/>
+          </p:nvPicPr>
+          <p:blipFill>
+            <a:blip r:embed="rId3">
+              <a:extLst>
+                <a:ext uri="{96DAC541-7B7A-43D3-8B79-37D633B846F1}">
+                  <asvg:svgBlip xmlns:asvg="http://schemas.microsoft.com/office/drawing/2016/SVG/main" r:embed="rId4"/>
+                </a:ext>
+              </a:extLst>
+            </a:blip>
+            <a:stretch>
+              <a:fillRect/>
+            </a:stretch>
+          </p:blipFill>
+          <p:spPr>
+            <a:xfrm>
+              <a:off x="5594034" y="42349"/>
+              <a:ext cx="1003931" cy="1003931"/>
+            </a:xfrm>
+            <a:prstGeom prst="rect">
+              <a:avLst/>
+            </a:prstGeom>
+          </p:spPr>
+        </p:pic>
+        <p:sp>
+          <p:nvSpPr>
+            <p:cNvPr id="67" name="TextBox 66">
+              <a:extLst>
+                <a:ext uri="{FF2B5EF4-FFF2-40B4-BE49-F238E27FC236}">
+                  <a16:creationId xmlns:a16="http://schemas.microsoft.com/office/drawing/2014/main" id="{A2BC84E2-0875-1FC8-BDCA-F2E5059A2D34}"/>
+                </a:ext>
+              </a:extLst>
+            </p:cNvPr>
+            <p:cNvSpPr txBox="1"/>
+            <p:nvPr/>
+          </p:nvSpPr>
+          <p:spPr>
+            <a:xfrm>
+              <a:off x="5509139" y="884369"/>
+              <a:ext cx="1173719" cy="338554"/>
+            </a:xfrm>
+            <a:prstGeom prst="rect">
+              <a:avLst/>
+            </a:prstGeom>
+            <a:noFill/>
+          </p:spPr>
+          <p:txBody>
+            <a:bodyPr wrap="none" rtlCol="0">
+              <a:spAutoFit/>
+            </a:bodyPr>
+            <a:lstStyle/>
+            <a:p>
+              <a:r>
+                <a:rPr lang="vi-VN" sz="1600">
+                  <a:latin typeface="+mj-lt"/>
+                </a:rPr>
+                <a:t>Người dùng</a:t>
+              </a:r>
+              <a:endParaRPr lang="en-US" sz="1600">
+                <a:latin typeface="+mj-lt"/>
+              </a:endParaRPr>
+            </a:p>
+          </p:txBody>
+        </p:sp>
+      </p:grpSp>
+      <p:sp>
+        <p:nvSpPr>
+          <p:cNvPr id="69" name="TextBox 68">
+            <a:extLst>
+              <a:ext uri="{FF2B5EF4-FFF2-40B4-BE49-F238E27FC236}">
+                <a16:creationId xmlns:a16="http://schemas.microsoft.com/office/drawing/2014/main" id="{27D9A431-6C12-C75D-2E21-ED8350B2BD23}"/>
+              </a:ext>
+            </a:extLst>
+          </p:cNvPr>
+          <p:cNvSpPr txBox="1"/>
+          <p:nvPr/>
+        </p:nvSpPr>
+        <p:spPr>
+          <a:xfrm>
+            <a:off x="2547236" y="5201164"/>
+            <a:ext cx="978153" cy="523220"/>
+          </a:xfrm>
+          <a:prstGeom prst="rect">
+            <a:avLst/>
+          </a:prstGeom>
+          <a:noFill/>
+        </p:spPr>
+        <p:txBody>
+          <a:bodyPr wrap="none" rtlCol="0">
+            <a:spAutoFit/>
+          </a:bodyPr>
+          <a:lstStyle/>
+          <a:p>
+            <a:r>
+              <a:rPr lang="vi-VN" sz="1400">
+                <a:latin typeface="+mj-lt"/>
+              </a:rPr>
+              <a:t>Đăng ký</a:t>
+            </a:r>
+          </a:p>
+          <a:p>
+            <a:r>
+              <a:rPr lang="vi-VN" sz="1400">
+                <a:latin typeface="+mj-lt"/>
+              </a:rPr>
+              <a:t>thành công</a:t>
+            </a:r>
+            <a:endParaRPr lang="en-US" sz="1400">
+              <a:latin typeface="+mj-lt"/>
+            </a:endParaRPr>
+          </a:p>
+        </p:txBody>
+      </p:sp>
+      <p:sp>
+        <p:nvSpPr>
+          <p:cNvPr id="7" name="TextBox 6">
+            <a:extLst>
+              <a:ext uri="{FF2B5EF4-FFF2-40B4-BE49-F238E27FC236}">
+                <a16:creationId xmlns:a16="http://schemas.microsoft.com/office/drawing/2014/main" id="{41DDCBEC-3C22-77D3-FA32-656909EE95EC}"/>
+              </a:ext>
+            </a:extLst>
+          </p:cNvPr>
+          <p:cNvSpPr txBox="1"/>
+          <p:nvPr/>
+        </p:nvSpPr>
+        <p:spPr>
+          <a:xfrm>
+            <a:off x="6095997" y="5228556"/>
+            <a:ext cx="978153" cy="523220"/>
+          </a:xfrm>
+          <a:prstGeom prst="rect">
+            <a:avLst/>
+          </a:prstGeom>
+          <a:noFill/>
+        </p:spPr>
+        <p:txBody>
+          <a:bodyPr wrap="none" rtlCol="0">
+            <a:spAutoFit/>
+          </a:bodyPr>
+          <a:lstStyle/>
+          <a:p>
+            <a:r>
+              <a:rPr lang="vi-VN" sz="1400">
+                <a:latin typeface="+mj-lt"/>
+              </a:rPr>
+              <a:t>Đăng</a:t>
+            </a:r>
+            <a:r>
+              <a:rPr lang="en-US" sz="1400">
+                <a:latin typeface="Times New Roman" panose="02020603050405020304" pitchFamily="18" charset="0"/>
+                <a:cs typeface="Times New Roman" panose="02020603050405020304" pitchFamily="18" charset="0"/>
+              </a:rPr>
+              <a:t> nhập</a:t>
+            </a:r>
+            <a:endParaRPr lang="vi-VN" sz="1400">
+              <a:latin typeface="+mj-lt"/>
+            </a:endParaRPr>
+          </a:p>
+          <a:p>
+            <a:r>
+              <a:rPr lang="vi-VN" sz="1400">
+                <a:latin typeface="+mj-lt"/>
+              </a:rPr>
+              <a:t>thành công</a:t>
+            </a:r>
+            <a:endParaRPr lang="en-US" sz="1400">
+              <a:latin typeface="+mj-lt"/>
+            </a:endParaRPr>
+          </a:p>
+        </p:txBody>
+      </p:sp>
+      <p:sp>
+        <p:nvSpPr>
+          <p:cNvPr id="9" name="TextBox 8">
+            <a:extLst>
+              <a:ext uri="{FF2B5EF4-FFF2-40B4-BE49-F238E27FC236}">
+                <a16:creationId xmlns:a16="http://schemas.microsoft.com/office/drawing/2014/main" id="{F2AAA943-F699-9525-C9F3-9D5D1B642FF4}"/>
+              </a:ext>
+            </a:extLst>
+          </p:cNvPr>
+          <p:cNvSpPr txBox="1"/>
+          <p:nvPr/>
+        </p:nvSpPr>
+        <p:spPr>
+          <a:xfrm>
+            <a:off x="6890036" y="4298973"/>
+            <a:ext cx="978153" cy="523220"/>
+          </a:xfrm>
+          <a:prstGeom prst="rect">
+            <a:avLst/>
+          </a:prstGeom>
+          <a:noFill/>
+        </p:spPr>
+        <p:txBody>
+          <a:bodyPr wrap="none" rtlCol="0">
+            <a:spAutoFit/>
+          </a:bodyPr>
+          <a:lstStyle/>
+          <a:p>
+            <a:r>
+              <a:rPr lang="vi-VN" sz="1400">
+                <a:latin typeface="+mj-lt"/>
+              </a:rPr>
+              <a:t>Đăng</a:t>
+            </a:r>
+            <a:r>
+              <a:rPr lang="en-US" sz="1400">
+                <a:latin typeface="Times New Roman" panose="02020603050405020304" pitchFamily="18" charset="0"/>
+                <a:cs typeface="Times New Roman" panose="02020603050405020304" pitchFamily="18" charset="0"/>
+              </a:rPr>
+              <a:t> nhập</a:t>
+            </a:r>
+            <a:endParaRPr lang="vi-VN" sz="1400">
+              <a:latin typeface="+mj-lt"/>
+            </a:endParaRPr>
+          </a:p>
+          <a:p>
+            <a:r>
+              <a:rPr lang="en-US" sz="1400">
+                <a:latin typeface="Times New Roman" panose="02020603050405020304" pitchFamily="18" charset="0"/>
+                <a:cs typeface="Times New Roman" panose="02020603050405020304" pitchFamily="18" charset="0"/>
+              </a:rPr>
+              <a:t>thất bại</a:t>
+            </a:r>
+          </a:p>
+        </p:txBody>
+      </p:sp>
+      <p:cxnSp>
+        <p:nvCxnSpPr>
+          <p:cNvPr id="14" name="Connector: Elbow 13">
+            <a:extLst>
+              <a:ext uri="{FF2B5EF4-FFF2-40B4-BE49-F238E27FC236}">
+                <a16:creationId xmlns:a16="http://schemas.microsoft.com/office/drawing/2014/main" id="{B7249117-E893-AF9B-3863-275BDB8E792F}"/>
+              </a:ext>
+            </a:extLst>
+          </p:cNvPr>
+          <p:cNvCxnSpPr>
+            <a:stCxn id="8" idx="1"/>
+            <a:endCxn id="3" idx="1"/>
+          </p:cNvCxnSpPr>
+          <p:nvPr/>
+        </p:nvCxnSpPr>
+        <p:spPr>
+          <a:xfrm rot="10800000" flipH="1">
+            <a:off x="2614179" y="2106509"/>
+            <a:ext cx="2096363" cy="2644484"/>
+          </a:xfrm>
+          <a:prstGeom prst="bentConnector3">
+            <a:avLst>
+              <a:gd name="adj1" fmla="val -44346"/>
+            </a:avLst>
+          </a:prstGeom>
+          <a:ln>
+            <a:tailEnd type="triangle"/>
+          </a:ln>
+        </p:spPr>
+        <p:style>
+          <a:lnRef idx="2">
+            <a:schemeClr val="dk1"/>
+          </a:lnRef>
+          <a:fillRef idx="0">
+            <a:schemeClr val="dk1"/>
+          </a:fillRef>
+          <a:effectRef idx="1">
+            <a:schemeClr val="dk1"/>
+          </a:effectRef>
+          <a:fontRef idx="minor">
+            <a:schemeClr val="tx1"/>
+          </a:fontRef>
+        </p:style>
+      </p:cxnSp>
+      <p:sp>
+        <p:nvSpPr>
+          <p:cNvPr id="18" name="TextBox 17">
+            <a:extLst>
+              <a:ext uri="{FF2B5EF4-FFF2-40B4-BE49-F238E27FC236}">
+                <a16:creationId xmlns:a16="http://schemas.microsoft.com/office/drawing/2014/main" id="{81D1CD00-98EB-8336-7B7B-0E6774E3C2D1}"/>
+              </a:ext>
+            </a:extLst>
+          </p:cNvPr>
+          <p:cNvSpPr txBox="1"/>
+          <p:nvPr/>
+        </p:nvSpPr>
+        <p:spPr>
+          <a:xfrm>
+            <a:off x="1813273" y="4227772"/>
+            <a:ext cx="798617" cy="523220"/>
+          </a:xfrm>
+          <a:prstGeom prst="rect">
+            <a:avLst/>
+          </a:prstGeom>
+          <a:noFill/>
+        </p:spPr>
+        <p:txBody>
+          <a:bodyPr wrap="none" rtlCol="0">
+            <a:spAutoFit/>
+          </a:bodyPr>
+          <a:lstStyle/>
+          <a:p>
+            <a:r>
+              <a:rPr lang="vi-VN" sz="1400">
+                <a:latin typeface="+mj-lt"/>
+              </a:rPr>
+              <a:t>Đăng</a:t>
+            </a:r>
+            <a:r>
+              <a:rPr lang="en-US" sz="1400">
+                <a:latin typeface="Times New Roman" panose="02020603050405020304" pitchFamily="18" charset="0"/>
+                <a:cs typeface="Times New Roman" panose="02020603050405020304" pitchFamily="18" charset="0"/>
+              </a:rPr>
+              <a:t> ký</a:t>
+            </a:r>
+            <a:endParaRPr lang="vi-VN" sz="1400">
+              <a:latin typeface="+mj-lt"/>
+            </a:endParaRPr>
+          </a:p>
+          <a:p>
+            <a:r>
+              <a:rPr lang="en-US" sz="1400">
+                <a:latin typeface="Times New Roman" panose="02020603050405020304" pitchFamily="18" charset="0"/>
+                <a:cs typeface="Times New Roman" panose="02020603050405020304" pitchFamily="18" charset="0"/>
+              </a:rPr>
+              <a:t>thất bại</a:t>
+            </a:r>
+          </a:p>
+        </p:txBody>
+      </p:sp>
+    </p:spTree>
+    <p:extLst>
+      <p:ext uri="{BB962C8B-B14F-4D97-AF65-F5344CB8AC3E}">
+        <p14:creationId xmlns:p14="http://schemas.microsoft.com/office/powerpoint/2010/main" val="3049573887"/>
+      </p:ext>
+    </p:extLst>
+  </p:cSld>
+  <p:clrMapOvr>
+    <a:masterClrMapping/>
+  </p:clrMapOvr>
+</p:sld>
+</file>
+
+<file path=ppt/slides/slide11.xml><?xml version="1.0" encoding="utf-8"?>
+<p:sld xmlns:a="http://schemas.openxmlformats.org/drawingml/2006/main" xmlns:r="http://schemas.openxmlformats.org/officeDocument/2006/relationships" xmlns:p="http://schemas.openxmlformats.org/presentationml/2006/main">
+  <p:cSld>
+    <p:spTree>
+      <p:nvGrpSpPr>
+        <p:cNvPr id="1" name=""/>
+        <p:cNvGrpSpPr/>
+        <p:nvPr/>
+      </p:nvGrpSpPr>
+      <p:grpSpPr>
+        <a:xfrm>
+          <a:off x="0" y="0"/>
+          <a:ext cx="0" cy="0"/>
+          <a:chOff x="0" y="0"/>
+          <a:chExt cx="0" cy="0"/>
+        </a:xfrm>
+      </p:grpSpPr>
+      <p:sp>
+        <p:nvSpPr>
           <p:cNvPr id="104" name="Oval 103">
             <a:extLst>
               <a:ext uri="{FF2B5EF4-FFF2-40B4-BE49-F238E27FC236}">
@@ -6886,7 +8358,7 @@
 </p:sld>
 </file>
 
-<file path=ppt/slides/slide11.xml><?xml version="1.0" encoding="utf-8"?>
+<file path=ppt/slides/slide12.xml><?xml version="1.0" encoding="utf-8"?>
 <p:sld xmlns:a="http://schemas.openxmlformats.org/drawingml/2006/main" xmlns:r="http://schemas.openxmlformats.org/officeDocument/2006/relationships" xmlns:p="http://schemas.openxmlformats.org/presentationml/2006/main">
   <p:cSld>
     <p:spTree>
@@ -7056,6 +8528,8 @@
                 <a:solidFill>
                   <a:schemeClr val="tx1"/>
                 </a:solidFill>
+                <a:latin typeface="Times New Roman" panose="02020603050405020304" pitchFamily="18" charset="0"/>
+                <a:cs typeface="Times New Roman" panose="02020603050405020304" pitchFamily="18" charset="0"/>
               </a:rPr>
               <a:t>Giao diện chat</a:t>
             </a:r>
@@ -7117,6 +8591,8 @@
                 <a:solidFill>
                   <a:schemeClr val="tx1"/>
                 </a:solidFill>
+                <a:latin typeface="Times New Roman" panose="02020603050405020304" pitchFamily="18" charset="0"/>
+                <a:cs typeface="Times New Roman" panose="02020603050405020304" pitchFamily="18" charset="0"/>
               </a:rPr>
               <a:t>Mở giao diện cài đặt tùy chọn</a:t>
             </a:r>
@@ -7179,6 +8655,8 @@
                 <a:solidFill>
                   <a:schemeClr val="tx1"/>
                 </a:solidFill>
+                <a:latin typeface="Times New Roman" panose="02020603050405020304" pitchFamily="18" charset="0"/>
+                <a:cs typeface="Times New Roman" panose="02020603050405020304" pitchFamily="18" charset="0"/>
               </a:rPr>
               <a:t>Điều chỉnh temperature</a:t>
             </a:r>
@@ -7240,6 +8718,8 @@
                 <a:solidFill>
                   <a:schemeClr val="tx1"/>
                 </a:solidFill>
+                <a:latin typeface="Times New Roman" panose="02020603050405020304" pitchFamily="18" charset="0"/>
+                <a:cs typeface="Times New Roman" panose="02020603050405020304" pitchFamily="18" charset="0"/>
               </a:rPr>
               <a:t>Lưu và áp dụng tùy chọn</a:t>
             </a:r>
@@ -7302,6 +8782,8 @@
                 <a:solidFill>
                   <a:schemeClr val="tx1"/>
                 </a:solidFill>
+                <a:latin typeface="Times New Roman" panose="02020603050405020304" pitchFamily="18" charset="0"/>
+                <a:cs typeface="Times New Roman" panose="02020603050405020304" pitchFamily="18" charset="0"/>
               </a:rPr>
               <a:t>Lựa chọn LLM</a:t>
             </a:r>
@@ -7364,6 +8846,8 @@
                 <a:solidFill>
                   <a:schemeClr val="tx1"/>
                 </a:solidFill>
+                <a:latin typeface="Times New Roman" panose="02020603050405020304" pitchFamily="18" charset="0"/>
+                <a:cs typeface="Times New Roman" panose="02020603050405020304" pitchFamily="18" charset="0"/>
               </a:rPr>
               <a:t>Bật/tắt streaming</a:t>
             </a:r>
@@ -7837,7 +9321,7 @@
 </p:sld>
 </file>
 
-<file path=ppt/slides/slide12.xml><?xml version="1.0" encoding="utf-8"?>
+<file path=ppt/slides/slide13.xml><?xml version="1.0" encoding="utf-8"?>
 <p:sld xmlns:a="http://schemas.openxmlformats.org/drawingml/2006/main" xmlns:r="http://schemas.openxmlformats.org/officeDocument/2006/relationships" xmlns:p="http://schemas.openxmlformats.org/presentationml/2006/main">
   <p:cSld>
     <p:spTree>
@@ -8932,7 +10416,7 @@
 </p:sld>
 </file>
 
-<file path=ppt/slides/slide13.xml><?xml version="1.0" encoding="utf-8"?>
+<file path=ppt/slides/slide14.xml><?xml version="1.0" encoding="utf-8"?>
 <p:sld xmlns:a="http://schemas.openxmlformats.org/drawingml/2006/main" xmlns:r="http://schemas.openxmlformats.org/officeDocument/2006/relationships" xmlns:p="http://schemas.openxmlformats.org/presentationml/2006/main">
   <p:cSld>
     <p:spTree>
@@ -9704,9 +11188,7 @@
           <a:noFill/>
           <a:ln>
             <a:solidFill>
-              <a:schemeClr val="accent1">
-                <a:shade val="15000"/>
-              </a:schemeClr>
+              <a:srgbClr val="FF0000"/>
             </a:solidFill>
             <a:prstDash val="dash"/>
           </a:ln>
@@ -9757,7 +11239,7 @@
 </p:sld>
 </file>
 
-<file path=ppt/slides/slide14.xml><?xml version="1.0" encoding="utf-8"?>
+<file path=ppt/slides/slide15.xml><?xml version="1.0" encoding="utf-8"?>
 <p:sld xmlns:a="http://schemas.openxmlformats.org/drawingml/2006/main" xmlns:r="http://schemas.openxmlformats.org/officeDocument/2006/relationships" xmlns:p="http://schemas.openxmlformats.org/presentationml/2006/main">
   <p:cSld>
     <p:spTree>
@@ -10734,7 +12216,7 @@
 </p:sld>
 </file>
 
-<file path=ppt/slides/slide15.xml><?xml version="1.0" encoding="utf-8"?>
+<file path=ppt/slides/slide16.xml><?xml version="1.0" encoding="utf-8"?>
 <p:sld xmlns:a="http://schemas.openxmlformats.org/drawingml/2006/main" xmlns:r="http://schemas.openxmlformats.org/officeDocument/2006/relationships" xmlns:p="http://schemas.openxmlformats.org/presentationml/2006/main">
   <p:cSld>
     <p:spTree>
@@ -11462,6 +12944,9 @@
           </a:prstGeom>
           <a:noFill/>
           <a:ln>
+            <a:solidFill>
+              <a:srgbClr val="FF0000"/>
+            </a:solidFill>
             <a:prstDash val="dash"/>
           </a:ln>
         </p:spPr>
@@ -11503,7 +12988,7 @@
 </p:sld>
 </file>
 
-<file path=ppt/slides/slide16.xml><?xml version="1.0" encoding="utf-8"?>
+<file path=ppt/slides/slide17.xml><?xml version="1.0" encoding="utf-8"?>
 <p:sld xmlns:a="http://schemas.openxmlformats.org/drawingml/2006/main" xmlns:r="http://schemas.openxmlformats.org/officeDocument/2006/relationships" xmlns:p="http://schemas.openxmlformats.org/presentationml/2006/main">
   <p:cSld>
     <p:spTree>
@@ -12179,7 +13664,7 @@
 </p:sld>
 </file>
 
-<file path=ppt/slides/slide17.xml><?xml version="1.0" encoding="utf-8"?>
+<file path=ppt/slides/slide18.xml><?xml version="1.0" encoding="utf-8"?>
 <p:sld xmlns:a="http://schemas.openxmlformats.org/drawingml/2006/main" xmlns:r="http://schemas.openxmlformats.org/officeDocument/2006/relationships" xmlns:p="http://schemas.openxmlformats.org/presentationml/2006/main">
   <p:cSld>
     <p:spTree>
@@ -12907,6 +14392,9 @@
           </a:prstGeom>
           <a:noFill/>
           <a:ln>
+            <a:solidFill>
+              <a:srgbClr val="FF0000"/>
+            </a:solidFill>
             <a:prstDash val="dash"/>
           </a:ln>
         </p:spPr>
@@ -13166,7 +14654,7 @@
 </p:sld>
 </file>
 
-<file path=ppt/slides/slide18.xml><?xml version="1.0" encoding="utf-8"?>
+<file path=ppt/slides/slide19.xml><?xml version="1.0" encoding="utf-8"?>
 <p:sld xmlns:a="http://schemas.openxmlformats.org/drawingml/2006/main" xmlns:r="http://schemas.openxmlformats.org/officeDocument/2006/relationships" xmlns:p="http://schemas.openxmlformats.org/presentationml/2006/main">
   <p:cSld>
     <p:spTree>
@@ -14131,7 +15619,37 @@
 </p:sld>
 </file>
 
-<file path=ppt/slides/slide19.xml><?xml version="1.0" encoding="utf-8"?>
+<file path=ppt/slides/slide2.xml><?xml version="1.0" encoding="utf-8"?>
+<p:sld xmlns:a="http://schemas.openxmlformats.org/drawingml/2006/main" xmlns:r="http://schemas.openxmlformats.org/officeDocument/2006/relationships" xmlns:p="http://schemas.openxmlformats.org/presentationml/2006/main">
+  <p:cSld>
+    <p:spTree>
+      <p:nvGrpSpPr>
+        <p:cNvPr id="1" name=""/>
+        <p:cNvGrpSpPr/>
+        <p:nvPr/>
+      </p:nvGrpSpPr>
+      <p:grpSpPr>
+        <a:xfrm>
+          <a:off x="0" y="0"/>
+          <a:ext cx="0" cy="0"/>
+          <a:chOff x="0" y="0"/>
+          <a:chExt cx="0" cy="0"/>
+        </a:xfrm>
+      </p:grpSpPr>
+    </p:spTree>
+    <p:extLst>
+      <p:ext uri="{BB962C8B-B14F-4D97-AF65-F5344CB8AC3E}">
+        <p14:creationId xmlns:p14="http://schemas.microsoft.com/office/powerpoint/2010/main" val="244051927"/>
+      </p:ext>
+    </p:extLst>
+  </p:cSld>
+  <p:clrMapOvr>
+    <a:masterClrMapping/>
+  </p:clrMapOvr>
+</p:sld>
+</file>
+
+<file path=ppt/slides/slide20.xml><?xml version="1.0" encoding="utf-8"?>
 <p:sld xmlns:a="http://schemas.openxmlformats.org/drawingml/2006/main" xmlns:r="http://schemas.openxmlformats.org/officeDocument/2006/relationships" xmlns:p="http://schemas.openxmlformats.org/presentationml/2006/main">
   <p:cSld>
     <p:spTree>
@@ -15077,6 +16595,9 @@
           </a:prstGeom>
           <a:noFill/>
           <a:ln>
+            <a:solidFill>
+              <a:srgbClr val="FF0000"/>
+            </a:solidFill>
             <a:prstDash val="dash"/>
           </a:ln>
         </p:spPr>
@@ -15156,37 +16677,7 @@
 </p:sld>
 </file>
 
-<file path=ppt/slides/slide2.xml><?xml version="1.0" encoding="utf-8"?>
-<p:sld xmlns:a="http://schemas.openxmlformats.org/drawingml/2006/main" xmlns:r="http://schemas.openxmlformats.org/officeDocument/2006/relationships" xmlns:p="http://schemas.openxmlformats.org/presentationml/2006/main">
-  <p:cSld>
-    <p:spTree>
-      <p:nvGrpSpPr>
-        <p:cNvPr id="1" name=""/>
-        <p:cNvGrpSpPr/>
-        <p:nvPr/>
-      </p:nvGrpSpPr>
-      <p:grpSpPr>
-        <a:xfrm>
-          <a:off x="0" y="0"/>
-          <a:ext cx="0" cy="0"/>
-          <a:chOff x="0" y="0"/>
-          <a:chExt cx="0" cy="0"/>
-        </a:xfrm>
-      </p:grpSpPr>
-    </p:spTree>
-    <p:extLst>
-      <p:ext uri="{BB962C8B-B14F-4D97-AF65-F5344CB8AC3E}">
-        <p14:creationId xmlns:p14="http://schemas.microsoft.com/office/powerpoint/2010/main" val="244051927"/>
-      </p:ext>
-    </p:extLst>
-  </p:cSld>
-  <p:clrMapOvr>
-    <a:masterClrMapping/>
-  </p:clrMapOvr>
-</p:sld>
-</file>
-
-<file path=ppt/slides/slide20.xml><?xml version="1.0" encoding="utf-8"?>
+<file path=ppt/slides/slide21.xml><?xml version="1.0" encoding="utf-8"?>
 <p:sld xmlns:a="http://schemas.openxmlformats.org/drawingml/2006/main" xmlns:r="http://schemas.openxmlformats.org/officeDocument/2006/relationships" xmlns:p="http://schemas.openxmlformats.org/presentationml/2006/main">
   <p:cSld>
     <p:spTree>
@@ -16396,7 +17887,7 @@
 </p:sld>
 </file>
 
-<file path=ppt/slides/slide21.xml><?xml version="1.0" encoding="utf-8"?>
+<file path=ppt/slides/slide22.xml><?xml version="1.0" encoding="utf-8"?>
 <p:sld xmlns:a="http://schemas.openxmlformats.org/drawingml/2006/main" xmlns:r="http://schemas.openxmlformats.org/officeDocument/2006/relationships" xmlns:p="http://schemas.openxmlformats.org/presentationml/2006/main">
   <p:cSld>
     <p:spTree>
@@ -17001,6 +18492,1190 @@
 </file>
 
 <file path=ppt/slides/slide4.xml><?xml version="1.0" encoding="utf-8"?>
+<p:sld xmlns:a="http://schemas.openxmlformats.org/drawingml/2006/main" xmlns:r="http://schemas.openxmlformats.org/officeDocument/2006/relationships" xmlns:p="http://schemas.openxmlformats.org/presentationml/2006/main">
+  <p:cSld>
+    <p:spTree>
+      <p:nvGrpSpPr>
+        <p:cNvPr id="1" name=""/>
+        <p:cNvGrpSpPr/>
+        <p:nvPr/>
+      </p:nvGrpSpPr>
+      <p:grpSpPr>
+        <a:xfrm>
+          <a:off x="0" y="0"/>
+          <a:ext cx="0" cy="0"/>
+          <a:chOff x="0" y="0"/>
+          <a:chExt cx="0" cy="0"/>
+        </a:xfrm>
+      </p:grpSpPr>
+      <p:sp>
+        <p:nvSpPr>
+          <p:cNvPr id="2" name="Oval 1">
+            <a:extLst>
+              <a:ext uri="{FF2B5EF4-FFF2-40B4-BE49-F238E27FC236}">
+                <a16:creationId xmlns:a16="http://schemas.microsoft.com/office/drawing/2014/main" id="{70E941A3-54DE-67E3-D11E-FE8F7583CEBF}"/>
+              </a:ext>
+            </a:extLst>
+          </p:cNvPr>
+          <p:cNvSpPr/>
+          <p:nvPr/>
+        </p:nvSpPr>
+        <p:spPr>
+          <a:xfrm>
+            <a:off x="4754880" y="2526030"/>
+            <a:ext cx="2682240" cy="1805940"/>
+          </a:xfrm>
+          <a:prstGeom prst="ellipse">
+            <a:avLst/>
+          </a:prstGeom>
+          <a:solidFill>
+            <a:schemeClr val="bg2"/>
+          </a:solidFill>
+        </p:spPr>
+        <p:style>
+          <a:lnRef idx="2">
+            <a:schemeClr val="dk1"/>
+          </a:lnRef>
+          <a:fillRef idx="1">
+            <a:schemeClr val="lt1"/>
+          </a:fillRef>
+          <a:effectRef idx="0">
+            <a:schemeClr val="dk1"/>
+          </a:effectRef>
+          <a:fontRef idx="minor">
+            <a:schemeClr val="dk1"/>
+          </a:fontRef>
+        </p:style>
+        <p:txBody>
+          <a:bodyPr rtlCol="0" anchor="ctr"/>
+          <a:lstStyle/>
+          <a:p>
+            <a:pPr algn="ctr"/>
+            <a:r>
+              <a:rPr lang="en-US" sz="2000">
+                <a:solidFill>
+                  <a:schemeClr val="tx1"/>
+                </a:solidFill>
+                <a:latin typeface="Times New Roman" panose="02020603050405020304" pitchFamily="18" charset="0"/>
+                <a:cs typeface="Times New Roman" panose="02020603050405020304" pitchFamily="18" charset="0"/>
+              </a:rPr>
+              <a:t>Hệ thống chatbot</a:t>
+            </a:r>
+          </a:p>
+          <a:p>
+            <a:pPr algn="ctr"/>
+            <a:r>
+              <a:rPr lang="en-US" sz="2000">
+                <a:solidFill>
+                  <a:schemeClr val="tx1"/>
+                </a:solidFill>
+                <a:latin typeface="Times New Roman" panose="02020603050405020304" pitchFamily="18" charset="0"/>
+                <a:cs typeface="Times New Roman" panose="02020603050405020304" pitchFamily="18" charset="0"/>
+              </a:rPr>
+              <a:t>hỗ trợ học</a:t>
+            </a:r>
+          </a:p>
+          <a:p>
+            <a:pPr algn="ctr"/>
+            <a:r>
+              <a:rPr lang="en-US" sz="2000">
+                <a:solidFill>
+                  <a:schemeClr val="tx1"/>
+                </a:solidFill>
+                <a:latin typeface="Times New Roman" panose="02020603050405020304" pitchFamily="18" charset="0"/>
+                <a:cs typeface="Times New Roman" panose="02020603050405020304" pitchFamily="18" charset="0"/>
+              </a:rPr>
+              <a:t>Lịch sử Việt Nam</a:t>
+            </a:r>
+          </a:p>
+        </p:txBody>
+      </p:sp>
+      <p:sp>
+        <p:nvSpPr>
+          <p:cNvPr id="3" name="Rectangle: Rounded Corners 2">
+            <a:extLst>
+              <a:ext uri="{FF2B5EF4-FFF2-40B4-BE49-F238E27FC236}">
+                <a16:creationId xmlns:a16="http://schemas.microsoft.com/office/drawing/2014/main" id="{F6A84239-E2F6-B996-A55F-0A9D0AB459D6}"/>
+              </a:ext>
+            </a:extLst>
+          </p:cNvPr>
+          <p:cNvSpPr/>
+          <p:nvPr/>
+        </p:nvSpPr>
+        <p:spPr>
+          <a:xfrm>
+            <a:off x="2286000" y="215594"/>
+            <a:ext cx="2232660" cy="701040"/>
+          </a:xfrm>
+          <a:prstGeom prst="roundRect">
+            <a:avLst/>
+          </a:prstGeom>
+          <a:solidFill>
+            <a:schemeClr val="bg2"/>
+          </a:solidFill>
+        </p:spPr>
+        <p:style>
+          <a:lnRef idx="2">
+            <a:schemeClr val="dk1"/>
+          </a:lnRef>
+          <a:fillRef idx="1">
+            <a:schemeClr val="lt1"/>
+          </a:fillRef>
+          <a:effectRef idx="0">
+            <a:schemeClr val="dk1"/>
+          </a:effectRef>
+          <a:fontRef idx="minor">
+            <a:schemeClr val="dk1"/>
+          </a:fontRef>
+        </p:style>
+        <p:txBody>
+          <a:bodyPr rtlCol="0" anchor="ctr"/>
+          <a:lstStyle/>
+          <a:p>
+            <a:pPr algn="ctr"/>
+            <a:r>
+              <a:rPr lang="en-US" sz="2000">
+                <a:solidFill>
+                  <a:schemeClr val="tx1"/>
+                </a:solidFill>
+                <a:latin typeface="Times New Roman" panose="02020603050405020304" pitchFamily="18" charset="0"/>
+                <a:cs typeface="Times New Roman" panose="02020603050405020304" pitchFamily="18" charset="0"/>
+              </a:rPr>
+              <a:t>Đổi mới phương pháp học tập</a:t>
+            </a:r>
+          </a:p>
+        </p:txBody>
+      </p:sp>
+      <p:sp>
+        <p:nvSpPr>
+          <p:cNvPr id="4" name="Rectangle: Rounded Corners 3">
+            <a:extLst>
+              <a:ext uri="{FF2B5EF4-FFF2-40B4-BE49-F238E27FC236}">
+                <a16:creationId xmlns:a16="http://schemas.microsoft.com/office/drawing/2014/main" id="{990C6347-D29F-2FFC-34DE-BA5DC078D010}"/>
+              </a:ext>
+            </a:extLst>
+          </p:cNvPr>
+          <p:cNvSpPr/>
+          <p:nvPr/>
+        </p:nvSpPr>
+        <p:spPr>
+          <a:xfrm>
+            <a:off x="62865" y="1828800"/>
+            <a:ext cx="2087880" cy="701040"/>
+          </a:xfrm>
+          <a:prstGeom prst="roundRect">
+            <a:avLst/>
+          </a:prstGeom>
+          <a:solidFill>
+            <a:schemeClr val="bg2"/>
+          </a:solidFill>
+        </p:spPr>
+        <p:style>
+          <a:lnRef idx="2">
+            <a:schemeClr val="dk1"/>
+          </a:lnRef>
+          <a:fillRef idx="1">
+            <a:schemeClr val="lt1"/>
+          </a:fillRef>
+          <a:effectRef idx="0">
+            <a:schemeClr val="dk1"/>
+          </a:effectRef>
+          <a:fontRef idx="minor">
+            <a:schemeClr val="dk1"/>
+          </a:fontRef>
+        </p:style>
+        <p:txBody>
+          <a:bodyPr rtlCol="0" anchor="ctr"/>
+          <a:lstStyle/>
+          <a:p>
+            <a:pPr algn="ctr"/>
+            <a:r>
+              <a:rPr lang="en-US" sz="2000">
+                <a:solidFill>
+                  <a:schemeClr val="tx1"/>
+                </a:solidFill>
+                <a:latin typeface="Times New Roman" panose="02020603050405020304" pitchFamily="18" charset="0"/>
+                <a:cs typeface="Times New Roman" panose="02020603050405020304" pitchFamily="18" charset="0"/>
+              </a:rPr>
+              <a:t>Tăng cường hiệu suất học tập</a:t>
+            </a:r>
+          </a:p>
+        </p:txBody>
+      </p:sp>
+      <p:sp>
+        <p:nvSpPr>
+          <p:cNvPr id="5" name="Oval 4">
+            <a:extLst>
+              <a:ext uri="{FF2B5EF4-FFF2-40B4-BE49-F238E27FC236}">
+                <a16:creationId xmlns:a16="http://schemas.microsoft.com/office/drawing/2014/main" id="{E2B4FB11-04DA-3102-AFDA-278EA077DE41}"/>
+              </a:ext>
+            </a:extLst>
+          </p:cNvPr>
+          <p:cNvSpPr/>
+          <p:nvPr/>
+        </p:nvSpPr>
+        <p:spPr>
+          <a:xfrm>
+            <a:off x="2910840" y="1828800"/>
+            <a:ext cx="1844040" cy="864870"/>
+          </a:xfrm>
+          <a:prstGeom prst="ellipse">
+            <a:avLst/>
+          </a:prstGeom>
+          <a:solidFill>
+            <a:schemeClr val="bg2"/>
+          </a:solidFill>
+        </p:spPr>
+        <p:style>
+          <a:lnRef idx="2">
+            <a:schemeClr val="dk1"/>
+          </a:lnRef>
+          <a:fillRef idx="1">
+            <a:schemeClr val="lt1"/>
+          </a:fillRef>
+          <a:effectRef idx="0">
+            <a:schemeClr val="dk1"/>
+          </a:effectRef>
+          <a:fontRef idx="minor">
+            <a:schemeClr val="dk1"/>
+          </a:fontRef>
+        </p:style>
+        <p:txBody>
+          <a:bodyPr rtlCol="0" anchor="ctr"/>
+          <a:lstStyle/>
+          <a:p>
+            <a:pPr algn="ctr"/>
+            <a:r>
+              <a:rPr lang="en-US" sz="2000">
+                <a:solidFill>
+                  <a:schemeClr val="tx1"/>
+                </a:solidFill>
+                <a:latin typeface="Times New Roman" panose="02020603050405020304" pitchFamily="18" charset="0"/>
+                <a:cs typeface="Times New Roman" panose="02020603050405020304" pitchFamily="18" charset="0"/>
+              </a:rPr>
+              <a:t>Mục tiêu giáo dục</a:t>
+            </a:r>
+          </a:p>
+        </p:txBody>
+      </p:sp>
+      <p:sp>
+        <p:nvSpPr>
+          <p:cNvPr id="6" name="Oval 5">
+            <a:extLst>
+              <a:ext uri="{FF2B5EF4-FFF2-40B4-BE49-F238E27FC236}">
+                <a16:creationId xmlns:a16="http://schemas.microsoft.com/office/drawing/2014/main" id="{27814A9F-BB31-4277-5198-15FF7D4FA416}"/>
+              </a:ext>
+            </a:extLst>
+          </p:cNvPr>
+          <p:cNvSpPr/>
+          <p:nvPr/>
+        </p:nvSpPr>
+        <p:spPr>
+          <a:xfrm>
+            <a:off x="2369820" y="4331970"/>
+            <a:ext cx="2385060" cy="1245870"/>
+          </a:xfrm>
+          <a:prstGeom prst="ellipse">
+            <a:avLst/>
+          </a:prstGeom>
+          <a:solidFill>
+            <a:schemeClr val="bg2"/>
+          </a:solidFill>
+        </p:spPr>
+        <p:style>
+          <a:lnRef idx="2">
+            <a:schemeClr val="dk1"/>
+          </a:lnRef>
+          <a:fillRef idx="1">
+            <a:schemeClr val="lt1"/>
+          </a:fillRef>
+          <a:effectRef idx="0">
+            <a:schemeClr val="dk1"/>
+          </a:effectRef>
+          <a:fontRef idx="minor">
+            <a:schemeClr val="dk1"/>
+          </a:fontRef>
+        </p:style>
+        <p:txBody>
+          <a:bodyPr rtlCol="0" anchor="ctr"/>
+          <a:lstStyle/>
+          <a:p>
+            <a:pPr algn="ctr"/>
+            <a:r>
+              <a:rPr lang="en-US" sz="2000">
+                <a:solidFill>
+                  <a:schemeClr val="tx1"/>
+                </a:solidFill>
+                <a:latin typeface="Times New Roman" panose="02020603050405020304" pitchFamily="18" charset="0"/>
+                <a:cs typeface="Times New Roman" panose="02020603050405020304" pitchFamily="18" charset="0"/>
+              </a:rPr>
+              <a:t>Chức năng</a:t>
+            </a:r>
+          </a:p>
+          <a:p>
+            <a:pPr algn="ctr"/>
+            <a:r>
+              <a:rPr lang="en-US" sz="2000">
+                <a:solidFill>
+                  <a:schemeClr val="tx1"/>
+                </a:solidFill>
+                <a:latin typeface="Times New Roman" panose="02020603050405020304" pitchFamily="18" charset="0"/>
+                <a:cs typeface="Times New Roman" panose="02020603050405020304" pitchFamily="18" charset="0"/>
+              </a:rPr>
+              <a:t>hỏi đáp</a:t>
+            </a:r>
+          </a:p>
+        </p:txBody>
+      </p:sp>
+      <p:sp>
+        <p:nvSpPr>
+          <p:cNvPr id="7" name="Oval 6">
+            <a:extLst>
+              <a:ext uri="{FF2B5EF4-FFF2-40B4-BE49-F238E27FC236}">
+                <a16:creationId xmlns:a16="http://schemas.microsoft.com/office/drawing/2014/main" id="{5515661D-2E1A-19B4-9708-922EE68310FD}"/>
+              </a:ext>
+            </a:extLst>
+          </p:cNvPr>
+          <p:cNvSpPr/>
+          <p:nvPr/>
+        </p:nvSpPr>
+        <p:spPr>
+          <a:xfrm>
+            <a:off x="7437120" y="1828800"/>
+            <a:ext cx="1844040" cy="864870"/>
+          </a:xfrm>
+          <a:prstGeom prst="ellipse">
+            <a:avLst/>
+          </a:prstGeom>
+          <a:solidFill>
+            <a:schemeClr val="bg2"/>
+          </a:solidFill>
+        </p:spPr>
+        <p:style>
+          <a:lnRef idx="2">
+            <a:schemeClr val="dk1"/>
+          </a:lnRef>
+          <a:fillRef idx="1">
+            <a:schemeClr val="lt1"/>
+          </a:fillRef>
+          <a:effectRef idx="0">
+            <a:schemeClr val="dk1"/>
+          </a:effectRef>
+          <a:fontRef idx="minor">
+            <a:schemeClr val="dk1"/>
+          </a:fontRef>
+        </p:style>
+        <p:txBody>
+          <a:bodyPr rtlCol="0" anchor="ctr"/>
+          <a:lstStyle/>
+          <a:p>
+            <a:pPr algn="ctr"/>
+            <a:r>
+              <a:rPr lang="en-US" sz="2000">
+                <a:solidFill>
+                  <a:schemeClr val="tx1"/>
+                </a:solidFill>
+                <a:latin typeface="Times New Roman" panose="02020603050405020304" pitchFamily="18" charset="0"/>
+                <a:cs typeface="Times New Roman" panose="02020603050405020304" pitchFamily="18" charset="0"/>
+              </a:rPr>
+              <a:t>Yêu cầu </a:t>
+            </a:r>
+          </a:p>
+          <a:p>
+            <a:pPr algn="ctr"/>
+            <a:r>
+              <a:rPr lang="en-US" sz="2000">
+                <a:solidFill>
+                  <a:schemeClr val="tx1"/>
+                </a:solidFill>
+                <a:latin typeface="Times New Roman" panose="02020603050405020304" pitchFamily="18" charset="0"/>
+                <a:cs typeface="Times New Roman" panose="02020603050405020304" pitchFamily="18" charset="0"/>
+              </a:rPr>
+              <a:t>kỹ thuật</a:t>
+            </a:r>
+          </a:p>
+        </p:txBody>
+      </p:sp>
+      <p:sp>
+        <p:nvSpPr>
+          <p:cNvPr id="8" name="Rectangle: Rounded Corners 7">
+            <a:extLst>
+              <a:ext uri="{FF2B5EF4-FFF2-40B4-BE49-F238E27FC236}">
+                <a16:creationId xmlns:a16="http://schemas.microsoft.com/office/drawing/2014/main" id="{CBD216D5-A62F-AC52-CDB8-6EE533EDC105}"/>
+              </a:ext>
+            </a:extLst>
+          </p:cNvPr>
+          <p:cNvSpPr/>
+          <p:nvPr/>
+        </p:nvSpPr>
+        <p:spPr>
+          <a:xfrm>
+            <a:off x="7764780" y="110820"/>
+            <a:ext cx="1844040" cy="701040"/>
+          </a:xfrm>
+          <a:prstGeom prst="roundRect">
+            <a:avLst/>
+          </a:prstGeom>
+          <a:solidFill>
+            <a:schemeClr val="bg2"/>
+          </a:solidFill>
+        </p:spPr>
+        <p:style>
+          <a:lnRef idx="2">
+            <a:schemeClr val="dk1"/>
+          </a:lnRef>
+          <a:fillRef idx="1">
+            <a:schemeClr val="lt1"/>
+          </a:fillRef>
+          <a:effectRef idx="0">
+            <a:schemeClr val="dk1"/>
+          </a:effectRef>
+          <a:fontRef idx="minor">
+            <a:schemeClr val="dk1"/>
+          </a:fontRef>
+        </p:style>
+        <p:txBody>
+          <a:bodyPr rtlCol="0" anchor="ctr"/>
+          <a:lstStyle/>
+          <a:p>
+            <a:pPr algn="ctr"/>
+            <a:r>
+              <a:rPr lang="en-US" sz="2000">
+                <a:solidFill>
+                  <a:schemeClr val="tx1"/>
+                </a:solidFill>
+                <a:latin typeface="Times New Roman" panose="02020603050405020304" pitchFamily="18" charset="0"/>
+                <a:cs typeface="Times New Roman" panose="02020603050405020304" pitchFamily="18" charset="0"/>
+              </a:rPr>
+              <a:t>Sử dụng công nghệ hiện đại</a:t>
+            </a:r>
+          </a:p>
+        </p:txBody>
+      </p:sp>
+      <p:sp>
+        <p:nvSpPr>
+          <p:cNvPr id="9" name="Rectangle: Rounded Corners 8">
+            <a:extLst>
+              <a:ext uri="{FF2B5EF4-FFF2-40B4-BE49-F238E27FC236}">
+                <a16:creationId xmlns:a16="http://schemas.microsoft.com/office/drawing/2014/main" id="{2E29EE6E-EB1D-1AC5-BE29-453C06508D4A}"/>
+              </a:ext>
+            </a:extLst>
+          </p:cNvPr>
+          <p:cNvSpPr/>
+          <p:nvPr/>
+        </p:nvSpPr>
+        <p:spPr>
+          <a:xfrm>
+            <a:off x="10203180" y="1735455"/>
+            <a:ext cx="1844040" cy="701040"/>
+          </a:xfrm>
+          <a:prstGeom prst="roundRect">
+            <a:avLst/>
+          </a:prstGeom>
+          <a:solidFill>
+            <a:schemeClr val="bg2"/>
+          </a:solidFill>
+        </p:spPr>
+        <p:style>
+          <a:lnRef idx="2">
+            <a:schemeClr val="dk1"/>
+          </a:lnRef>
+          <a:fillRef idx="1">
+            <a:schemeClr val="lt1"/>
+          </a:fillRef>
+          <a:effectRef idx="0">
+            <a:schemeClr val="dk1"/>
+          </a:effectRef>
+          <a:fontRef idx="minor">
+            <a:schemeClr val="dk1"/>
+          </a:fontRef>
+        </p:style>
+        <p:txBody>
+          <a:bodyPr rtlCol="0" anchor="ctr"/>
+          <a:lstStyle/>
+          <a:p>
+            <a:pPr algn="ctr"/>
+            <a:r>
+              <a:rPr lang="en-US" sz="2000">
+                <a:solidFill>
+                  <a:schemeClr val="tx1"/>
+                </a:solidFill>
+                <a:latin typeface="Times New Roman" panose="02020603050405020304" pitchFamily="18" charset="0"/>
+                <a:cs typeface="Times New Roman" panose="02020603050405020304" pitchFamily="18" charset="0"/>
+              </a:rPr>
+              <a:t>Phản hồi chinh xác, tự nhiên</a:t>
+            </a:r>
+          </a:p>
+        </p:txBody>
+      </p:sp>
+      <p:sp>
+        <p:nvSpPr>
+          <p:cNvPr id="10" name="Oval 9">
+            <a:extLst>
+              <a:ext uri="{FF2B5EF4-FFF2-40B4-BE49-F238E27FC236}">
+                <a16:creationId xmlns:a16="http://schemas.microsoft.com/office/drawing/2014/main" id="{91B686CE-5089-396C-6022-CB159C50E559}"/>
+              </a:ext>
+            </a:extLst>
+          </p:cNvPr>
+          <p:cNvSpPr/>
+          <p:nvPr/>
+        </p:nvSpPr>
+        <p:spPr>
+          <a:xfrm>
+            <a:off x="7437120" y="4331970"/>
+            <a:ext cx="1844040" cy="864870"/>
+          </a:xfrm>
+          <a:prstGeom prst="ellipse">
+            <a:avLst/>
+          </a:prstGeom>
+          <a:solidFill>
+            <a:schemeClr val="bg2"/>
+          </a:solidFill>
+        </p:spPr>
+        <p:style>
+          <a:lnRef idx="2">
+            <a:schemeClr val="dk1"/>
+          </a:lnRef>
+          <a:fillRef idx="1">
+            <a:schemeClr val="lt1"/>
+          </a:fillRef>
+          <a:effectRef idx="0">
+            <a:schemeClr val="dk1"/>
+          </a:effectRef>
+          <a:fontRef idx="minor">
+            <a:schemeClr val="dk1"/>
+          </a:fontRef>
+        </p:style>
+        <p:txBody>
+          <a:bodyPr rtlCol="0" anchor="ctr"/>
+          <a:lstStyle/>
+          <a:p>
+            <a:pPr algn="ctr"/>
+            <a:r>
+              <a:rPr lang="en-US" sz="2000">
+                <a:solidFill>
+                  <a:schemeClr val="tx1"/>
+                </a:solidFill>
+                <a:latin typeface="Times New Roman" panose="02020603050405020304" pitchFamily="18" charset="0"/>
+                <a:cs typeface="Times New Roman" panose="02020603050405020304" pitchFamily="18" charset="0"/>
+              </a:rPr>
+              <a:t>Tính năng nâng cao</a:t>
+            </a:r>
+          </a:p>
+        </p:txBody>
+      </p:sp>
+      <p:sp>
+        <p:nvSpPr>
+          <p:cNvPr id="11" name="Rectangle: Rounded Corners 10">
+            <a:extLst>
+              <a:ext uri="{FF2B5EF4-FFF2-40B4-BE49-F238E27FC236}">
+                <a16:creationId xmlns:a16="http://schemas.microsoft.com/office/drawing/2014/main" id="{3CFBD387-080D-8A16-A064-41C9BD3D17CA}"/>
+              </a:ext>
+            </a:extLst>
+          </p:cNvPr>
+          <p:cNvSpPr/>
+          <p:nvPr/>
+        </p:nvSpPr>
+        <p:spPr>
+          <a:xfrm>
+            <a:off x="10119360" y="4413885"/>
+            <a:ext cx="1844040" cy="701040"/>
+          </a:xfrm>
+          <a:prstGeom prst="roundRect">
+            <a:avLst/>
+          </a:prstGeom>
+          <a:solidFill>
+            <a:schemeClr val="bg2"/>
+          </a:solidFill>
+        </p:spPr>
+        <p:style>
+          <a:lnRef idx="2">
+            <a:schemeClr val="dk1"/>
+          </a:lnRef>
+          <a:fillRef idx="1">
+            <a:schemeClr val="lt1"/>
+          </a:fillRef>
+          <a:effectRef idx="0">
+            <a:schemeClr val="dk1"/>
+          </a:effectRef>
+          <a:fontRef idx="minor">
+            <a:schemeClr val="dk1"/>
+          </a:fontRef>
+        </p:style>
+        <p:txBody>
+          <a:bodyPr rtlCol="0" anchor="ctr"/>
+          <a:lstStyle/>
+          <a:p>
+            <a:pPr algn="ctr"/>
+            <a:r>
+              <a:rPr lang="en-US" sz="2000">
+                <a:solidFill>
+                  <a:schemeClr val="tx1"/>
+                </a:solidFill>
+                <a:latin typeface="Times New Roman" panose="02020603050405020304" pitchFamily="18" charset="0"/>
+                <a:cs typeface="Times New Roman" panose="02020603050405020304" pitchFamily="18" charset="0"/>
+              </a:rPr>
+              <a:t>Các tùy chọn cá nhân hóa</a:t>
+            </a:r>
+          </a:p>
+        </p:txBody>
+      </p:sp>
+      <p:sp>
+        <p:nvSpPr>
+          <p:cNvPr id="12" name="Rectangle: Rounded Corners 11">
+            <a:extLst>
+              <a:ext uri="{FF2B5EF4-FFF2-40B4-BE49-F238E27FC236}">
+                <a16:creationId xmlns:a16="http://schemas.microsoft.com/office/drawing/2014/main" id="{B885AE00-1325-E81E-1C32-073054BF7C8D}"/>
+              </a:ext>
+            </a:extLst>
+          </p:cNvPr>
+          <p:cNvSpPr/>
+          <p:nvPr/>
+        </p:nvSpPr>
+        <p:spPr>
+          <a:xfrm>
+            <a:off x="8686800" y="5577840"/>
+            <a:ext cx="1844040" cy="701040"/>
+          </a:xfrm>
+          <a:prstGeom prst="roundRect">
+            <a:avLst/>
+          </a:prstGeom>
+          <a:solidFill>
+            <a:schemeClr val="bg2"/>
+          </a:solidFill>
+        </p:spPr>
+        <p:style>
+          <a:lnRef idx="2">
+            <a:schemeClr val="dk1"/>
+          </a:lnRef>
+          <a:fillRef idx="1">
+            <a:schemeClr val="lt1"/>
+          </a:fillRef>
+          <a:effectRef idx="0">
+            <a:schemeClr val="dk1"/>
+          </a:effectRef>
+          <a:fontRef idx="minor">
+            <a:schemeClr val="dk1"/>
+          </a:fontRef>
+        </p:style>
+        <p:txBody>
+          <a:bodyPr rtlCol="0" anchor="ctr"/>
+          <a:lstStyle/>
+          <a:p>
+            <a:pPr algn="ctr"/>
+            <a:r>
+              <a:rPr lang="en-US" sz="2000">
+                <a:solidFill>
+                  <a:schemeClr val="tx1"/>
+                </a:solidFill>
+                <a:latin typeface="Times New Roman" panose="02020603050405020304" pitchFamily="18" charset="0"/>
+                <a:cs typeface="Times New Roman" panose="02020603050405020304" pitchFamily="18" charset="0"/>
+              </a:rPr>
+              <a:t>Voicechat,…</a:t>
+            </a:r>
+          </a:p>
+        </p:txBody>
+      </p:sp>
+      <p:sp>
+        <p:nvSpPr>
+          <p:cNvPr id="13" name="Rectangle: Rounded Corners 12">
+            <a:extLst>
+              <a:ext uri="{FF2B5EF4-FFF2-40B4-BE49-F238E27FC236}">
+                <a16:creationId xmlns:a16="http://schemas.microsoft.com/office/drawing/2014/main" id="{AC04F432-56C3-5DFC-90FC-F6DBD87FF59C}"/>
+              </a:ext>
+            </a:extLst>
+          </p:cNvPr>
+          <p:cNvSpPr/>
+          <p:nvPr/>
+        </p:nvSpPr>
+        <p:spPr>
+          <a:xfrm>
+            <a:off x="10119360" y="228600"/>
+            <a:ext cx="1844040" cy="701040"/>
+          </a:xfrm>
+          <a:prstGeom prst="roundRect">
+            <a:avLst/>
+          </a:prstGeom>
+          <a:solidFill>
+            <a:schemeClr val="bg2"/>
+          </a:solidFill>
+        </p:spPr>
+        <p:style>
+          <a:lnRef idx="2">
+            <a:schemeClr val="dk1"/>
+          </a:lnRef>
+          <a:fillRef idx="1">
+            <a:schemeClr val="lt1"/>
+          </a:fillRef>
+          <a:effectRef idx="0">
+            <a:schemeClr val="dk1"/>
+          </a:effectRef>
+          <a:fontRef idx="minor">
+            <a:schemeClr val="dk1"/>
+          </a:fontRef>
+        </p:style>
+        <p:txBody>
+          <a:bodyPr rtlCol="0" anchor="ctr"/>
+          <a:lstStyle/>
+          <a:p>
+            <a:pPr algn="ctr"/>
+            <a:r>
+              <a:rPr lang="en-US" sz="2000">
+                <a:solidFill>
+                  <a:schemeClr val="tx1"/>
+                </a:solidFill>
+                <a:latin typeface="Times New Roman" panose="02020603050405020304" pitchFamily="18" charset="0"/>
+                <a:cs typeface="Times New Roman" panose="02020603050405020304" pitchFamily="18" charset="0"/>
+              </a:rPr>
+              <a:t>Kiến trúc dễ mở rộng</a:t>
+            </a:r>
+          </a:p>
+        </p:txBody>
+      </p:sp>
+      <p:cxnSp>
+        <p:nvCxnSpPr>
+          <p:cNvPr id="14" name="Straight Connector 13">
+            <a:extLst>
+              <a:ext uri="{FF2B5EF4-FFF2-40B4-BE49-F238E27FC236}">
+                <a16:creationId xmlns:a16="http://schemas.microsoft.com/office/drawing/2014/main" id="{734F8C7C-D774-FB9C-30C8-C7C037E45B67}"/>
+              </a:ext>
+            </a:extLst>
+          </p:cNvPr>
+          <p:cNvCxnSpPr>
+            <a:cxnSpLocks/>
+            <a:stCxn id="2" idx="1"/>
+            <a:endCxn id="5" idx="5"/>
+          </p:cNvCxnSpPr>
+          <p:nvPr/>
+        </p:nvCxnSpPr>
+        <p:spPr>
+          <a:xfrm flipH="1" flipV="1">
+            <a:off x="4484827" y="2567013"/>
+            <a:ext cx="662858" cy="223491"/>
+          </a:xfrm>
+          <a:prstGeom prst="line">
+            <a:avLst/>
+          </a:prstGeom>
+        </p:spPr>
+        <p:style>
+          <a:lnRef idx="2">
+            <a:schemeClr val="dk1"/>
+          </a:lnRef>
+          <a:fillRef idx="0">
+            <a:schemeClr val="dk1"/>
+          </a:fillRef>
+          <a:effectRef idx="1">
+            <a:schemeClr val="dk1"/>
+          </a:effectRef>
+          <a:fontRef idx="minor">
+            <a:schemeClr val="tx1"/>
+          </a:fontRef>
+        </p:style>
+      </p:cxnSp>
+      <p:cxnSp>
+        <p:nvCxnSpPr>
+          <p:cNvPr id="15" name="Straight Connector 14">
+            <a:extLst>
+              <a:ext uri="{FF2B5EF4-FFF2-40B4-BE49-F238E27FC236}">
+                <a16:creationId xmlns:a16="http://schemas.microsoft.com/office/drawing/2014/main" id="{75945FBE-B18B-17B3-A534-F2FFAB2B4AD2}"/>
+              </a:ext>
+            </a:extLst>
+          </p:cNvPr>
+          <p:cNvCxnSpPr>
+            <a:stCxn id="2" idx="3"/>
+            <a:endCxn id="6" idx="7"/>
+          </p:cNvCxnSpPr>
+          <p:nvPr/>
+        </p:nvCxnSpPr>
+        <p:spPr>
+          <a:xfrm flipH="1">
+            <a:off x="4405596" y="4067496"/>
+            <a:ext cx="742089" cy="446927"/>
+          </a:xfrm>
+          <a:prstGeom prst="line">
+            <a:avLst/>
+          </a:prstGeom>
+        </p:spPr>
+        <p:style>
+          <a:lnRef idx="2">
+            <a:schemeClr val="dk1"/>
+          </a:lnRef>
+          <a:fillRef idx="0">
+            <a:schemeClr val="dk1"/>
+          </a:fillRef>
+          <a:effectRef idx="1">
+            <a:schemeClr val="dk1"/>
+          </a:effectRef>
+          <a:fontRef idx="minor">
+            <a:schemeClr val="tx1"/>
+          </a:fontRef>
+        </p:style>
+      </p:cxnSp>
+      <p:cxnSp>
+        <p:nvCxnSpPr>
+          <p:cNvPr id="16" name="Straight Connector 15">
+            <a:extLst>
+              <a:ext uri="{FF2B5EF4-FFF2-40B4-BE49-F238E27FC236}">
+                <a16:creationId xmlns:a16="http://schemas.microsoft.com/office/drawing/2014/main" id="{FC5BAFB3-7492-5EA0-04ED-33345C5D7C61}"/>
+              </a:ext>
+            </a:extLst>
+          </p:cNvPr>
+          <p:cNvCxnSpPr>
+            <a:stCxn id="2" idx="5"/>
+            <a:endCxn id="10" idx="1"/>
+          </p:cNvCxnSpPr>
+          <p:nvPr/>
+        </p:nvCxnSpPr>
+        <p:spPr>
+          <a:xfrm>
+            <a:off x="7044315" y="4067496"/>
+            <a:ext cx="662858" cy="391131"/>
+          </a:xfrm>
+          <a:prstGeom prst="line">
+            <a:avLst/>
+          </a:prstGeom>
+        </p:spPr>
+        <p:style>
+          <a:lnRef idx="2">
+            <a:schemeClr val="dk1"/>
+          </a:lnRef>
+          <a:fillRef idx="0">
+            <a:schemeClr val="dk1"/>
+          </a:fillRef>
+          <a:effectRef idx="1">
+            <a:schemeClr val="dk1"/>
+          </a:effectRef>
+          <a:fontRef idx="minor">
+            <a:schemeClr val="tx1"/>
+          </a:fontRef>
+        </p:style>
+      </p:cxnSp>
+      <p:cxnSp>
+        <p:nvCxnSpPr>
+          <p:cNvPr id="17" name="Straight Connector 16">
+            <a:extLst>
+              <a:ext uri="{FF2B5EF4-FFF2-40B4-BE49-F238E27FC236}">
+                <a16:creationId xmlns:a16="http://schemas.microsoft.com/office/drawing/2014/main" id="{6F64C0BA-48F1-0279-7841-32894E6262A4}"/>
+              </a:ext>
+            </a:extLst>
+          </p:cNvPr>
+          <p:cNvCxnSpPr>
+            <a:stCxn id="2" idx="7"/>
+          </p:cNvCxnSpPr>
+          <p:nvPr/>
+        </p:nvCxnSpPr>
+        <p:spPr>
+          <a:xfrm flipV="1">
+            <a:off x="7044315" y="2526030"/>
+            <a:ext cx="545205" cy="264474"/>
+          </a:xfrm>
+          <a:prstGeom prst="line">
+            <a:avLst/>
+          </a:prstGeom>
+        </p:spPr>
+        <p:style>
+          <a:lnRef idx="2">
+            <a:schemeClr val="dk1"/>
+          </a:lnRef>
+          <a:fillRef idx="0">
+            <a:schemeClr val="dk1"/>
+          </a:fillRef>
+          <a:effectRef idx="1">
+            <a:schemeClr val="dk1"/>
+          </a:effectRef>
+          <a:fontRef idx="minor">
+            <a:schemeClr val="tx1"/>
+          </a:fontRef>
+        </p:style>
+      </p:cxnSp>
+      <p:cxnSp>
+        <p:nvCxnSpPr>
+          <p:cNvPr id="18" name="Straight Connector 17">
+            <a:extLst>
+              <a:ext uri="{FF2B5EF4-FFF2-40B4-BE49-F238E27FC236}">
+                <a16:creationId xmlns:a16="http://schemas.microsoft.com/office/drawing/2014/main" id="{0BB01216-492A-B15F-39E0-0EAAC63B01C7}"/>
+              </a:ext>
+            </a:extLst>
+          </p:cNvPr>
+          <p:cNvCxnSpPr>
+            <a:stCxn id="5" idx="2"/>
+            <a:endCxn id="4" idx="3"/>
+          </p:cNvCxnSpPr>
+          <p:nvPr/>
+        </p:nvCxnSpPr>
+        <p:spPr>
+          <a:xfrm flipH="1" flipV="1">
+            <a:off x="2150745" y="2179320"/>
+            <a:ext cx="760095" cy="81915"/>
+          </a:xfrm>
+          <a:prstGeom prst="line">
+            <a:avLst/>
+          </a:prstGeom>
+        </p:spPr>
+        <p:style>
+          <a:lnRef idx="2">
+            <a:schemeClr val="dk1"/>
+          </a:lnRef>
+          <a:fillRef idx="0">
+            <a:schemeClr val="dk1"/>
+          </a:fillRef>
+          <a:effectRef idx="1">
+            <a:schemeClr val="dk1"/>
+          </a:effectRef>
+          <a:fontRef idx="minor">
+            <a:schemeClr val="tx1"/>
+          </a:fontRef>
+        </p:style>
+      </p:cxnSp>
+      <p:cxnSp>
+        <p:nvCxnSpPr>
+          <p:cNvPr id="19" name="Straight Connector 18">
+            <a:extLst>
+              <a:ext uri="{FF2B5EF4-FFF2-40B4-BE49-F238E27FC236}">
+                <a16:creationId xmlns:a16="http://schemas.microsoft.com/office/drawing/2014/main" id="{B3DFD0F8-AD31-F595-B2DF-2C6B0FED6ADF}"/>
+              </a:ext>
+            </a:extLst>
+          </p:cNvPr>
+          <p:cNvCxnSpPr>
+            <a:cxnSpLocks/>
+            <a:stCxn id="5" idx="0"/>
+            <a:endCxn id="3" idx="2"/>
+          </p:cNvCxnSpPr>
+          <p:nvPr/>
+        </p:nvCxnSpPr>
+        <p:spPr>
+          <a:xfrm flipH="1" flipV="1">
+            <a:off x="3402330" y="916634"/>
+            <a:ext cx="430530" cy="912166"/>
+          </a:xfrm>
+          <a:prstGeom prst="line">
+            <a:avLst/>
+          </a:prstGeom>
+        </p:spPr>
+        <p:style>
+          <a:lnRef idx="2">
+            <a:schemeClr val="dk1"/>
+          </a:lnRef>
+          <a:fillRef idx="0">
+            <a:schemeClr val="dk1"/>
+          </a:fillRef>
+          <a:effectRef idx="1">
+            <a:schemeClr val="dk1"/>
+          </a:effectRef>
+          <a:fontRef idx="minor">
+            <a:schemeClr val="tx1"/>
+          </a:fontRef>
+        </p:style>
+      </p:cxnSp>
+      <p:cxnSp>
+        <p:nvCxnSpPr>
+          <p:cNvPr id="20" name="Straight Connector 19">
+            <a:extLst>
+              <a:ext uri="{FF2B5EF4-FFF2-40B4-BE49-F238E27FC236}">
+                <a16:creationId xmlns:a16="http://schemas.microsoft.com/office/drawing/2014/main" id="{03B88DF3-E08B-F05D-B62D-3A553AE1C6FB}"/>
+              </a:ext>
+            </a:extLst>
+          </p:cNvPr>
+          <p:cNvCxnSpPr>
+            <a:stCxn id="7" idx="0"/>
+            <a:endCxn id="8" idx="2"/>
+          </p:cNvCxnSpPr>
+          <p:nvPr/>
+        </p:nvCxnSpPr>
+        <p:spPr>
+          <a:xfrm flipV="1">
+            <a:off x="8359140" y="811860"/>
+            <a:ext cx="327660" cy="1016940"/>
+          </a:xfrm>
+          <a:prstGeom prst="line">
+            <a:avLst/>
+          </a:prstGeom>
+        </p:spPr>
+        <p:style>
+          <a:lnRef idx="2">
+            <a:schemeClr val="dk1"/>
+          </a:lnRef>
+          <a:fillRef idx="0">
+            <a:schemeClr val="dk1"/>
+          </a:fillRef>
+          <a:effectRef idx="1">
+            <a:schemeClr val="dk1"/>
+          </a:effectRef>
+          <a:fontRef idx="minor">
+            <a:schemeClr val="tx1"/>
+          </a:fontRef>
+        </p:style>
+      </p:cxnSp>
+      <p:cxnSp>
+        <p:nvCxnSpPr>
+          <p:cNvPr id="21" name="Straight Connector 20">
+            <a:extLst>
+              <a:ext uri="{FF2B5EF4-FFF2-40B4-BE49-F238E27FC236}">
+                <a16:creationId xmlns:a16="http://schemas.microsoft.com/office/drawing/2014/main" id="{9F086B33-5B88-68F4-F5E4-F72BEB69127C}"/>
+              </a:ext>
+            </a:extLst>
+          </p:cNvPr>
+          <p:cNvCxnSpPr>
+            <a:stCxn id="7" idx="6"/>
+            <a:endCxn id="9" idx="1"/>
+          </p:cNvCxnSpPr>
+          <p:nvPr/>
+        </p:nvCxnSpPr>
+        <p:spPr>
+          <a:xfrm flipV="1">
+            <a:off x="9281160" y="2085975"/>
+            <a:ext cx="922020" cy="175260"/>
+          </a:xfrm>
+          <a:prstGeom prst="line">
+            <a:avLst/>
+          </a:prstGeom>
+        </p:spPr>
+        <p:style>
+          <a:lnRef idx="2">
+            <a:schemeClr val="dk1"/>
+          </a:lnRef>
+          <a:fillRef idx="0">
+            <a:schemeClr val="dk1"/>
+          </a:fillRef>
+          <a:effectRef idx="1">
+            <a:schemeClr val="dk1"/>
+          </a:effectRef>
+          <a:fontRef idx="minor">
+            <a:schemeClr val="tx1"/>
+          </a:fontRef>
+        </p:style>
+      </p:cxnSp>
+      <p:cxnSp>
+        <p:nvCxnSpPr>
+          <p:cNvPr id="22" name="Straight Connector 21">
+            <a:extLst>
+              <a:ext uri="{FF2B5EF4-FFF2-40B4-BE49-F238E27FC236}">
+                <a16:creationId xmlns:a16="http://schemas.microsoft.com/office/drawing/2014/main" id="{85D2DE2B-88DB-8FE5-42DC-588C2253EA3D}"/>
+              </a:ext>
+            </a:extLst>
+          </p:cNvPr>
+          <p:cNvCxnSpPr>
+            <a:cxnSpLocks/>
+            <a:stCxn id="7" idx="7"/>
+          </p:cNvCxnSpPr>
+          <p:nvPr/>
+        </p:nvCxnSpPr>
+        <p:spPr>
+          <a:xfrm flipV="1">
+            <a:off x="9011107" y="886154"/>
+            <a:ext cx="1142543" cy="1069303"/>
+          </a:xfrm>
+          <a:prstGeom prst="line">
+            <a:avLst/>
+          </a:prstGeom>
+        </p:spPr>
+        <p:style>
+          <a:lnRef idx="2">
+            <a:schemeClr val="dk1"/>
+          </a:lnRef>
+          <a:fillRef idx="0">
+            <a:schemeClr val="dk1"/>
+          </a:fillRef>
+          <a:effectRef idx="1">
+            <a:schemeClr val="dk1"/>
+          </a:effectRef>
+          <a:fontRef idx="minor">
+            <a:schemeClr val="tx1"/>
+          </a:fontRef>
+        </p:style>
+      </p:cxnSp>
+      <p:cxnSp>
+        <p:nvCxnSpPr>
+          <p:cNvPr id="23" name="Straight Connector 22">
+            <a:extLst>
+              <a:ext uri="{FF2B5EF4-FFF2-40B4-BE49-F238E27FC236}">
+                <a16:creationId xmlns:a16="http://schemas.microsoft.com/office/drawing/2014/main" id="{1829DAF2-E2FE-8BE0-28DF-37A001244C41}"/>
+              </a:ext>
+            </a:extLst>
+          </p:cNvPr>
+          <p:cNvCxnSpPr>
+            <a:stCxn id="10" idx="6"/>
+            <a:endCxn id="11" idx="1"/>
+          </p:cNvCxnSpPr>
+          <p:nvPr/>
+        </p:nvCxnSpPr>
+        <p:spPr>
+          <a:xfrm>
+            <a:off x="9281160" y="4764405"/>
+            <a:ext cx="838200" cy="0"/>
+          </a:xfrm>
+          <a:prstGeom prst="line">
+            <a:avLst/>
+          </a:prstGeom>
+        </p:spPr>
+        <p:style>
+          <a:lnRef idx="2">
+            <a:schemeClr val="dk1"/>
+          </a:lnRef>
+          <a:fillRef idx="0">
+            <a:schemeClr val="dk1"/>
+          </a:fillRef>
+          <a:effectRef idx="1">
+            <a:schemeClr val="dk1"/>
+          </a:effectRef>
+          <a:fontRef idx="minor">
+            <a:schemeClr val="tx1"/>
+          </a:fontRef>
+        </p:style>
+      </p:cxnSp>
+      <p:cxnSp>
+        <p:nvCxnSpPr>
+          <p:cNvPr id="24" name="Straight Connector 23">
+            <a:extLst>
+              <a:ext uri="{FF2B5EF4-FFF2-40B4-BE49-F238E27FC236}">
+                <a16:creationId xmlns:a16="http://schemas.microsoft.com/office/drawing/2014/main" id="{478EC1AA-44C0-297B-868E-2182A652E7C1}"/>
+              </a:ext>
+            </a:extLst>
+          </p:cNvPr>
+          <p:cNvCxnSpPr>
+            <a:stCxn id="10" idx="5"/>
+            <a:endCxn id="12" idx="0"/>
+          </p:cNvCxnSpPr>
+          <p:nvPr/>
+        </p:nvCxnSpPr>
+        <p:spPr>
+          <a:xfrm>
+            <a:off x="9011107" y="5070183"/>
+            <a:ext cx="597713" cy="507657"/>
+          </a:xfrm>
+          <a:prstGeom prst="line">
+            <a:avLst/>
+          </a:prstGeom>
+        </p:spPr>
+        <p:style>
+          <a:lnRef idx="2">
+            <a:schemeClr val="dk1"/>
+          </a:lnRef>
+          <a:fillRef idx="0">
+            <a:schemeClr val="dk1"/>
+          </a:fillRef>
+          <a:effectRef idx="1">
+            <a:schemeClr val="dk1"/>
+          </a:effectRef>
+          <a:fontRef idx="minor">
+            <a:schemeClr val="tx1"/>
+          </a:fontRef>
+        </p:style>
+      </p:cxnSp>
+    </p:spTree>
+    <p:extLst>
+      <p:ext uri="{BB962C8B-B14F-4D97-AF65-F5344CB8AC3E}">
+        <p14:creationId xmlns:p14="http://schemas.microsoft.com/office/powerpoint/2010/main" val="3609310139"/>
+      </p:ext>
+    </p:extLst>
+  </p:cSld>
+  <p:clrMapOvr>
+    <a:masterClrMapping/>
+  </p:clrMapOvr>
+</p:sld>
+</file>
+
+<file path=ppt/slides/slide5.xml><?xml version="1.0" encoding="utf-8"?>
 <p:sld xmlns:a="http://schemas.openxmlformats.org/drawingml/2006/main" xmlns:r="http://schemas.openxmlformats.org/officeDocument/2006/relationships" xmlns:p="http://schemas.openxmlformats.org/presentationml/2006/main">
   <p:cSld>
     <p:spTree>
@@ -22408,7 +25083,7 @@
 </p:sld>
 </file>
 
-<file path=ppt/slides/slide5.xml><?xml version="1.0" encoding="utf-8"?>
+<file path=ppt/slides/slide6.xml><?xml version="1.0" encoding="utf-8"?>
 <p:sld xmlns:a="http://schemas.openxmlformats.org/drawingml/2006/main" xmlns:r="http://schemas.openxmlformats.org/officeDocument/2006/relationships" xmlns:p="http://schemas.openxmlformats.org/presentationml/2006/main">
   <p:cSld>
     <p:spTree>
@@ -23040,7 +25715,7 @@
 </p:sld>
 </file>
 
-<file path=ppt/slides/slide6.xml><?xml version="1.0" encoding="utf-8"?>
+<file path=ppt/slides/slide7.xml><?xml version="1.0" encoding="utf-8"?>
 <p:sld xmlns:a="http://schemas.openxmlformats.org/drawingml/2006/main" xmlns:r="http://schemas.openxmlformats.org/officeDocument/2006/relationships" xmlns:p="http://schemas.openxmlformats.org/presentationml/2006/main">
   <p:cSld>
     <p:spTree>
@@ -24280,7 +26955,7 @@
 </p:sld>
 </file>
 
-<file path=ppt/slides/slide7.xml><?xml version="1.0" encoding="utf-8"?>
+<file path=ppt/slides/slide8.xml><?xml version="1.0" encoding="utf-8"?>
 <p:sld xmlns:a="http://schemas.openxmlformats.org/drawingml/2006/main" xmlns:r="http://schemas.openxmlformats.org/officeDocument/2006/relationships" xmlns:p="http://schemas.openxmlformats.org/presentationml/2006/main">
   <p:cSld>
     <p:spTree>
@@ -25327,253 +28002,6 @@
     <p:extLst>
       <p:ext uri="{BB962C8B-B14F-4D97-AF65-F5344CB8AC3E}">
         <p14:creationId xmlns:p14="http://schemas.microsoft.com/office/powerpoint/2010/main" val="3763551740"/>
-      </p:ext>
-    </p:extLst>
-  </p:cSld>
-  <p:clrMapOvr>
-    <a:masterClrMapping/>
-  </p:clrMapOvr>
-</p:sld>
-</file>
-
-<file path=ppt/slides/slide8.xml><?xml version="1.0" encoding="utf-8"?>
-<p:sld xmlns:a="http://schemas.openxmlformats.org/drawingml/2006/main" xmlns:r="http://schemas.openxmlformats.org/officeDocument/2006/relationships" xmlns:p="http://schemas.openxmlformats.org/presentationml/2006/main">
-  <p:cSld>
-    <p:spTree>
-      <p:nvGrpSpPr>
-        <p:cNvPr id="1" name=""/>
-        <p:cNvGrpSpPr/>
-        <p:nvPr/>
-      </p:nvGrpSpPr>
-      <p:grpSpPr>
-        <a:xfrm>
-          <a:off x="0" y="0"/>
-          <a:ext cx="0" cy="0"/>
-          <a:chOff x="0" y="0"/>
-          <a:chExt cx="0" cy="0"/>
-        </a:xfrm>
-      </p:grpSpPr>
-      <p:sp>
-        <p:nvSpPr>
-          <p:cNvPr id="2" name="TextBox 1">
-            <a:extLst>
-              <a:ext uri="{FF2B5EF4-FFF2-40B4-BE49-F238E27FC236}">
-                <a16:creationId xmlns:a16="http://schemas.microsoft.com/office/drawing/2014/main" id="{A76BB85E-EAB6-2089-5682-48447CE032A4}"/>
-              </a:ext>
-            </a:extLst>
-          </p:cNvPr>
-          <p:cNvSpPr txBox="1"/>
-          <p:nvPr/>
-        </p:nvSpPr>
-        <p:spPr>
-          <a:xfrm>
-            <a:off x="612648" y="795528"/>
-            <a:ext cx="8497839" cy="3693319"/>
-          </a:xfrm>
-          <a:prstGeom prst="rect">
-            <a:avLst/>
-          </a:prstGeom>
-          <a:noFill/>
-        </p:spPr>
-        <p:txBody>
-          <a:bodyPr wrap="none" rtlCol="0">
-            <a:spAutoFit/>
-          </a:bodyPr>
-          <a:lstStyle/>
-          <a:p>
-            <a:pPr marL="285750" indent="-285750">
-              <a:buFontTx/>
-              <a:buChar char="-"/>
-            </a:pPr>
-            <a:r>
-              <a:rPr lang="vi-VN"/>
-              <a:t>Chức năng đăng nhập/đăng xuất: </a:t>
-            </a:r>
-            <a:r>
-              <a:rPr lang="vi-VN">
-                <a:solidFill>
-                  <a:srgbClr val="00B0F0"/>
-                </a:solidFill>
-              </a:rPr>
-              <a:t>biểu đồ chức năng, usecase</a:t>
-            </a:r>
-            <a:r>
-              <a:rPr lang="vi-VN"/>
-              <a:t>, tuần tự</a:t>
-            </a:r>
-          </a:p>
-          <a:p>
-            <a:pPr marL="285750" indent="-285750">
-              <a:buFontTx/>
-              <a:buChar char="-"/>
-            </a:pPr>
-            <a:r>
-              <a:rPr lang="vi-VN"/>
-              <a:t>Chức năng cài đặt người dùng tùy chọn: </a:t>
-            </a:r>
-            <a:r>
-              <a:rPr lang="vi-VN">
-                <a:solidFill>
-                  <a:srgbClr val="00B0F0"/>
-                </a:solidFill>
-              </a:rPr>
-              <a:t>biểu đồ  chức năng, usecase,</a:t>
-            </a:r>
-            <a:r>
-              <a:rPr lang="vi-VN"/>
-              <a:t> tuần tự</a:t>
-            </a:r>
-          </a:p>
-          <a:p>
-            <a:pPr marL="285750" indent="-285750">
-              <a:buFontTx/>
-              <a:buChar char="-"/>
-            </a:pPr>
-            <a:r>
-              <a:rPr lang="vi-VN"/>
-              <a:t>Chức năng khởi tạo starter: biểu đồ tuần tự</a:t>
-            </a:r>
-          </a:p>
-          <a:p>
-            <a:pPr marL="285750" indent="-285750">
-              <a:buFontTx/>
-              <a:buChar char="-"/>
-            </a:pPr>
-            <a:r>
-              <a:rPr lang="vi-VN"/>
-              <a:t>Chức năng trò chuyện văn bản: </a:t>
-            </a:r>
-            <a:r>
-              <a:rPr lang="vi-VN">
-                <a:solidFill>
-                  <a:srgbClr val="00B0F0"/>
-                </a:solidFill>
-              </a:rPr>
-              <a:t>biểu đồ chức năng, usecase</a:t>
-            </a:r>
-            <a:r>
-              <a:rPr lang="vi-VN"/>
-              <a:t>, tuần tự</a:t>
-            </a:r>
-          </a:p>
-          <a:p>
-            <a:pPr marL="285750" indent="-285750">
-              <a:buFontTx/>
-              <a:buChar char="-"/>
-            </a:pPr>
-            <a:r>
-              <a:rPr lang="vi-VN"/>
-              <a:t>Chức năng trò chuyện âm thanh: </a:t>
-            </a:r>
-            <a:r>
-              <a:rPr lang="vi-VN">
-                <a:solidFill>
-                  <a:srgbClr val="00B0F0"/>
-                </a:solidFill>
-              </a:rPr>
-              <a:t>chức năng, usecase</a:t>
-            </a:r>
-            <a:r>
-              <a:rPr lang="vi-VN"/>
-              <a:t>, tuần tự</a:t>
-            </a:r>
-          </a:p>
-          <a:p>
-            <a:pPr marL="285750" indent="-285750">
-              <a:buFontTx/>
-              <a:buChar char="-"/>
-            </a:pPr>
-            <a:r>
-              <a:rPr lang="vi-VN"/>
-              <a:t>Chức năng tăng cường trí nhớ hội thoại: </a:t>
-            </a:r>
-            <a:r>
-              <a:rPr lang="vi-VN">
-                <a:solidFill>
-                  <a:srgbClr val="00B0F0"/>
-                </a:solidFill>
-              </a:rPr>
-              <a:t>chức năng, usecase</a:t>
-            </a:r>
-            <a:r>
-              <a:rPr lang="vi-VN"/>
-              <a:t>, tuần tự</a:t>
-            </a:r>
-          </a:p>
-          <a:p>
-            <a:pPr marL="285750" indent="-285750">
-              <a:buFontTx/>
-              <a:buChar char="-"/>
-            </a:pPr>
-            <a:r>
-              <a:rPr lang="vi-VN"/>
-              <a:t>Chức năng quản lý hành vi người dùng: chức năng, usecase, tuần tự</a:t>
-            </a:r>
-          </a:p>
-          <a:p>
-            <a:pPr marL="285750" indent="-285750">
-              <a:buFontTx/>
-              <a:buChar char="-"/>
-            </a:pPr>
-            <a:r>
-              <a:rPr lang="vi-VN"/>
-              <a:t>Chức năng quản lý hội thoại: chức năng, usecase, tuần tự</a:t>
-            </a:r>
-          </a:p>
-          <a:p>
-            <a:pPr marL="285750" indent="-285750">
-              <a:buFontTx/>
-              <a:buChar char="-"/>
-            </a:pPr>
-            <a:r>
-              <a:rPr lang="vi-VN"/>
-              <a:t>Chức năng xử lý trích xuất thông tin trò chuyện</a:t>
-            </a:r>
-          </a:p>
-          <a:p>
-            <a:pPr marL="285750" indent="-285750">
-              <a:buFontTx/>
-              <a:buChar char="-"/>
-            </a:pPr>
-            <a:endParaRPr lang="vi-VN"/>
-          </a:p>
-          <a:p>
-            <a:pPr marL="285750" indent="-285750">
-              <a:buFontTx/>
-              <a:buChar char="-"/>
-            </a:pPr>
-            <a:r>
-              <a:rPr lang="vi-VN"/>
-              <a:t>Thiết kế cơ sở dữ liệu embedding: có những trường nào</a:t>
-            </a:r>
-          </a:p>
-          <a:p>
-            <a:pPr marL="285750" indent="-285750">
-              <a:buFontTx/>
-              <a:buChar char="-"/>
-            </a:pPr>
-            <a:r>
-              <a:rPr lang="vi-VN"/>
-              <a:t>Cơ sở dữ liệu lưu trữ lịch sử hội thoại</a:t>
-            </a:r>
-          </a:p>
-          <a:p>
-            <a:pPr marL="285750" indent="-285750">
-              <a:buFontTx/>
-              <a:buChar char="-"/>
-            </a:pPr>
-            <a:r>
-              <a:rPr lang="vi-VN"/>
-              <a:t>Co sơ dữ liệu lưu trữ thông tin người dùng</a:t>
-            </a:r>
-            <a:endParaRPr lang="en-US"/>
-          </a:p>
-        </p:txBody>
-      </p:sp>
-    </p:spTree>
-    <p:extLst>
-      <p:ext uri="{BB962C8B-B14F-4D97-AF65-F5344CB8AC3E}">
-        <p14:creationId xmlns:p14="http://schemas.microsoft.com/office/powerpoint/2010/main" val="629964740"/>
       </p:ext>
     </p:extLst>
   </p:cSld>
@@ -25602,1102 +28030,10 @@
       </p:grpSpPr>
       <p:sp>
         <p:nvSpPr>
-          <p:cNvPr id="3" name="Rectangle: Rounded Corners 2">
-            <a:extLst>
-              <a:ext uri="{FF2B5EF4-FFF2-40B4-BE49-F238E27FC236}">
-                <a16:creationId xmlns:a16="http://schemas.microsoft.com/office/drawing/2014/main" id="{2EA15317-0687-82A7-8F34-E245BF7496A2}"/>
-              </a:ext>
-            </a:extLst>
-          </p:cNvPr>
-          <p:cNvSpPr/>
-          <p:nvPr/>
-        </p:nvSpPr>
-        <p:spPr>
-          <a:xfrm>
-            <a:off x="4710543" y="1888300"/>
-            <a:ext cx="2770912" cy="436418"/>
-          </a:xfrm>
-          <a:prstGeom prst="roundRect">
-            <a:avLst/>
-          </a:prstGeom>
-          <a:solidFill>
-            <a:schemeClr val="bg1">
-              <a:lumMod val="95000"/>
-            </a:schemeClr>
-          </a:solidFill>
-          <a:ln>
-            <a:solidFill>
-              <a:schemeClr val="tx1"/>
-            </a:solidFill>
-            <a:prstDash val="dash"/>
-          </a:ln>
-        </p:spPr>
-        <p:style>
-          <a:lnRef idx="2">
-            <a:schemeClr val="accent1">
-              <a:shade val="15000"/>
-            </a:schemeClr>
-          </a:lnRef>
-          <a:fillRef idx="1">
-            <a:schemeClr val="accent1"/>
-          </a:fillRef>
-          <a:effectRef idx="0">
-            <a:schemeClr val="accent1"/>
-          </a:effectRef>
-          <a:fontRef idx="minor">
-            <a:schemeClr val="lt1"/>
-          </a:fontRef>
-        </p:style>
-        <p:txBody>
-          <a:bodyPr rtlCol="0" anchor="ctr"/>
-          <a:lstStyle/>
-          <a:p>
-            <a:pPr algn="ctr"/>
-            <a:r>
-              <a:rPr lang="vi-VN" sz="1600">
-                <a:solidFill>
-                  <a:schemeClr val="tx1"/>
-                </a:solidFill>
-                <a:latin typeface="+mj-lt"/>
-              </a:rPr>
-              <a:t>Giao diện đăng ký/đăng nhập</a:t>
-            </a:r>
-            <a:endParaRPr lang="en-US" sz="1600">
-              <a:solidFill>
-                <a:schemeClr val="tx1"/>
-              </a:solidFill>
-              <a:latin typeface="+mj-lt"/>
-            </a:endParaRPr>
-          </a:p>
-        </p:txBody>
-      </p:sp>
-      <p:sp>
-        <p:nvSpPr>
-          <p:cNvPr id="4" name="Rectangle: Rounded Corners 3">
-            <a:extLst>
-              <a:ext uri="{FF2B5EF4-FFF2-40B4-BE49-F238E27FC236}">
-                <a16:creationId xmlns:a16="http://schemas.microsoft.com/office/drawing/2014/main" id="{840EBFA2-C2F3-9787-724E-2BF7ED3F6604}"/>
-              </a:ext>
-            </a:extLst>
-          </p:cNvPr>
-          <p:cNvSpPr/>
-          <p:nvPr/>
-        </p:nvSpPr>
-        <p:spPr>
-          <a:xfrm>
-            <a:off x="2614180" y="3052081"/>
-            <a:ext cx="1588078" cy="675409"/>
-          </a:xfrm>
-          <a:prstGeom prst="roundRect">
-            <a:avLst/>
-          </a:prstGeom>
-          <a:solidFill>
-            <a:schemeClr val="bg1">
-              <a:lumMod val="95000"/>
-            </a:schemeClr>
-          </a:solidFill>
-          <a:ln>
-            <a:solidFill>
-              <a:schemeClr val="tx1"/>
-            </a:solidFill>
-          </a:ln>
-        </p:spPr>
-        <p:style>
-          <a:lnRef idx="2">
-            <a:schemeClr val="accent1">
-              <a:shade val="15000"/>
-            </a:schemeClr>
-          </a:lnRef>
-          <a:fillRef idx="1">
-            <a:schemeClr val="accent1"/>
-          </a:fillRef>
-          <a:effectRef idx="0">
-            <a:schemeClr val="accent1"/>
-          </a:effectRef>
-          <a:fontRef idx="minor">
-            <a:schemeClr val="lt1"/>
-          </a:fontRef>
-        </p:style>
-        <p:txBody>
-          <a:bodyPr rtlCol="0" anchor="ctr"/>
-          <a:lstStyle/>
-          <a:p>
-            <a:pPr algn="ctr"/>
-            <a:r>
-              <a:rPr lang="vi-VN" sz="1600">
-                <a:solidFill>
-                  <a:schemeClr val="tx1"/>
-                </a:solidFill>
-                <a:latin typeface="+mj-lt"/>
-              </a:rPr>
-              <a:t>Đăng ký</a:t>
-            </a:r>
-            <a:endParaRPr lang="en-US" sz="1600">
-              <a:solidFill>
-                <a:schemeClr val="tx1"/>
-              </a:solidFill>
-              <a:latin typeface="+mj-lt"/>
-            </a:endParaRPr>
-          </a:p>
-        </p:txBody>
-      </p:sp>
-      <p:sp>
-        <p:nvSpPr>
-          <p:cNvPr id="5" name="Rectangle: Rounded Corners 4">
-            <a:extLst>
-              <a:ext uri="{FF2B5EF4-FFF2-40B4-BE49-F238E27FC236}">
-                <a16:creationId xmlns:a16="http://schemas.microsoft.com/office/drawing/2014/main" id="{0C64B575-A76D-5036-8FA9-2AFD31831522}"/>
-              </a:ext>
-            </a:extLst>
-          </p:cNvPr>
-          <p:cNvSpPr/>
-          <p:nvPr/>
-        </p:nvSpPr>
-        <p:spPr>
-          <a:xfrm>
-            <a:off x="5301959" y="3052082"/>
-            <a:ext cx="1588078" cy="675409"/>
-          </a:xfrm>
-          <a:prstGeom prst="roundRect">
-            <a:avLst/>
-          </a:prstGeom>
-          <a:solidFill>
-            <a:schemeClr val="bg1">
-              <a:lumMod val="95000"/>
-            </a:schemeClr>
-          </a:solidFill>
-          <a:ln>
-            <a:solidFill>
-              <a:schemeClr val="tx1"/>
-            </a:solidFill>
-          </a:ln>
-        </p:spPr>
-        <p:style>
-          <a:lnRef idx="2">
-            <a:schemeClr val="accent1">
-              <a:shade val="15000"/>
-            </a:schemeClr>
-          </a:lnRef>
-          <a:fillRef idx="1">
-            <a:schemeClr val="accent1"/>
-          </a:fillRef>
-          <a:effectRef idx="0">
-            <a:schemeClr val="accent1"/>
-          </a:effectRef>
-          <a:fontRef idx="minor">
-            <a:schemeClr val="lt1"/>
-          </a:fontRef>
-        </p:style>
-        <p:txBody>
-          <a:bodyPr rtlCol="0" anchor="ctr"/>
-          <a:lstStyle/>
-          <a:p>
-            <a:pPr algn="ctr"/>
-            <a:r>
-              <a:rPr lang="vi-VN" sz="1600">
-                <a:solidFill>
-                  <a:schemeClr val="tx1"/>
-                </a:solidFill>
-                <a:latin typeface="+mj-lt"/>
-              </a:rPr>
-              <a:t>Đăng nhập</a:t>
-            </a:r>
-            <a:endParaRPr lang="en-US" sz="1600">
-              <a:solidFill>
-                <a:schemeClr val="tx1"/>
-              </a:solidFill>
-              <a:latin typeface="+mj-lt"/>
-            </a:endParaRPr>
-          </a:p>
-        </p:txBody>
-      </p:sp>
-      <p:sp>
-        <p:nvSpPr>
-          <p:cNvPr id="6" name="Rectangle: Rounded Corners 5">
-            <a:extLst>
-              <a:ext uri="{FF2B5EF4-FFF2-40B4-BE49-F238E27FC236}">
-                <a16:creationId xmlns:a16="http://schemas.microsoft.com/office/drawing/2014/main" id="{6E28BFBE-3429-1418-D209-77F555515ECD}"/>
-              </a:ext>
-            </a:extLst>
-          </p:cNvPr>
-          <p:cNvSpPr/>
-          <p:nvPr/>
-        </p:nvSpPr>
-        <p:spPr>
-          <a:xfrm>
-            <a:off x="5301959" y="4454854"/>
-            <a:ext cx="1588078" cy="675409"/>
-          </a:xfrm>
-          <a:prstGeom prst="roundRect">
-            <a:avLst/>
-          </a:prstGeom>
-          <a:solidFill>
-            <a:schemeClr val="bg1">
-              <a:lumMod val="95000"/>
-            </a:schemeClr>
-          </a:solidFill>
-          <a:ln>
-            <a:solidFill>
-              <a:schemeClr val="tx1"/>
-            </a:solidFill>
-            <a:prstDash val="dash"/>
-          </a:ln>
-        </p:spPr>
-        <p:style>
-          <a:lnRef idx="2">
-            <a:schemeClr val="accent1">
-              <a:shade val="15000"/>
-            </a:schemeClr>
-          </a:lnRef>
-          <a:fillRef idx="1">
-            <a:schemeClr val="accent1"/>
-          </a:fillRef>
-          <a:effectRef idx="0">
-            <a:schemeClr val="accent1"/>
-          </a:effectRef>
-          <a:fontRef idx="minor">
-            <a:schemeClr val="lt1"/>
-          </a:fontRef>
-        </p:style>
-        <p:txBody>
-          <a:bodyPr rtlCol="0" anchor="ctr"/>
-          <a:lstStyle/>
-          <a:p>
-            <a:pPr algn="ctr"/>
-            <a:r>
-              <a:rPr lang="vi-VN" sz="1600">
-                <a:solidFill>
-                  <a:schemeClr val="tx1"/>
-                </a:solidFill>
-                <a:latin typeface="+mj-lt"/>
-              </a:rPr>
-              <a:t>Người dùng nhập thông tin</a:t>
-            </a:r>
-            <a:endParaRPr lang="en-US" sz="1600">
-              <a:solidFill>
-                <a:schemeClr val="tx1"/>
-              </a:solidFill>
-              <a:latin typeface="+mj-lt"/>
-            </a:endParaRPr>
-          </a:p>
-        </p:txBody>
-      </p:sp>
-      <p:sp>
-        <p:nvSpPr>
-          <p:cNvPr id="8" name="Rectangle: Rounded Corners 7">
-            <a:extLst>
-              <a:ext uri="{FF2B5EF4-FFF2-40B4-BE49-F238E27FC236}">
-                <a16:creationId xmlns:a16="http://schemas.microsoft.com/office/drawing/2014/main" id="{8BEBDE03-5A5E-50A8-0CAA-9BA9D30EF15A}"/>
-              </a:ext>
-            </a:extLst>
-          </p:cNvPr>
-          <p:cNvSpPr/>
-          <p:nvPr/>
-        </p:nvSpPr>
-        <p:spPr>
-          <a:xfrm>
-            <a:off x="2614180" y="4413288"/>
-            <a:ext cx="1588078" cy="675409"/>
-          </a:xfrm>
-          <a:prstGeom prst="roundRect">
-            <a:avLst/>
-          </a:prstGeom>
-          <a:solidFill>
-            <a:schemeClr val="bg1">
-              <a:lumMod val="95000"/>
-            </a:schemeClr>
-          </a:solidFill>
-          <a:ln>
-            <a:solidFill>
-              <a:schemeClr val="tx1"/>
-            </a:solidFill>
-            <a:prstDash val="dash"/>
-          </a:ln>
-        </p:spPr>
-        <p:style>
-          <a:lnRef idx="2">
-            <a:schemeClr val="accent1">
-              <a:shade val="15000"/>
-            </a:schemeClr>
-          </a:lnRef>
-          <a:fillRef idx="1">
-            <a:schemeClr val="accent1"/>
-          </a:fillRef>
-          <a:effectRef idx="0">
-            <a:schemeClr val="accent1"/>
-          </a:effectRef>
-          <a:fontRef idx="minor">
-            <a:schemeClr val="lt1"/>
-          </a:fontRef>
-        </p:style>
-        <p:txBody>
-          <a:bodyPr rtlCol="0" anchor="ctr"/>
-          <a:lstStyle/>
-          <a:p>
-            <a:pPr algn="ctr"/>
-            <a:r>
-              <a:rPr lang="vi-VN" sz="1600">
-                <a:solidFill>
-                  <a:schemeClr val="tx1"/>
-                </a:solidFill>
-                <a:latin typeface="+mj-lt"/>
-              </a:rPr>
-              <a:t>Người dùng nhập thông tin</a:t>
-            </a:r>
-            <a:endParaRPr lang="en-US" sz="1600">
-              <a:solidFill>
-                <a:schemeClr val="tx1"/>
-              </a:solidFill>
-              <a:latin typeface="+mj-lt"/>
-            </a:endParaRPr>
-          </a:p>
-        </p:txBody>
-      </p:sp>
-      <p:sp>
-        <p:nvSpPr>
-          <p:cNvPr id="10" name="Rectangle: Rounded Corners 9">
-            <a:extLst>
-              <a:ext uri="{FF2B5EF4-FFF2-40B4-BE49-F238E27FC236}">
-                <a16:creationId xmlns:a16="http://schemas.microsoft.com/office/drawing/2014/main" id="{C74779B1-D515-1EF6-1900-5F8D609F013D}"/>
-              </a:ext>
-            </a:extLst>
-          </p:cNvPr>
-          <p:cNvSpPr/>
-          <p:nvPr/>
-        </p:nvSpPr>
-        <p:spPr>
-          <a:xfrm>
-            <a:off x="2614180" y="5816061"/>
-            <a:ext cx="6963636" cy="675409"/>
-          </a:xfrm>
-          <a:prstGeom prst="roundRect">
-            <a:avLst/>
-          </a:prstGeom>
-          <a:solidFill>
-            <a:schemeClr val="bg1">
-              <a:lumMod val="95000"/>
-            </a:schemeClr>
-          </a:solidFill>
-          <a:ln>
-            <a:solidFill>
-              <a:schemeClr val="tx1"/>
-            </a:solidFill>
-          </a:ln>
-        </p:spPr>
-        <p:style>
-          <a:lnRef idx="2">
-            <a:schemeClr val="accent1">
-              <a:shade val="15000"/>
-            </a:schemeClr>
-          </a:lnRef>
-          <a:fillRef idx="1">
-            <a:schemeClr val="accent1"/>
-          </a:fillRef>
-          <a:effectRef idx="0">
-            <a:schemeClr val="accent1"/>
-          </a:effectRef>
-          <a:fontRef idx="minor">
-            <a:schemeClr val="lt1"/>
-          </a:fontRef>
-        </p:style>
-        <p:txBody>
-          <a:bodyPr rtlCol="0" anchor="ctr"/>
-          <a:lstStyle/>
-          <a:p>
-            <a:pPr algn="ctr"/>
-            <a:r>
-              <a:rPr lang="vi-VN" sz="1600">
-                <a:solidFill>
-                  <a:schemeClr val="tx1"/>
-                </a:solidFill>
-                <a:latin typeface="+mj-lt"/>
-              </a:rPr>
-              <a:t>Giao diện người dùng chatbot</a:t>
-            </a:r>
-            <a:endParaRPr lang="en-US" sz="1600">
-              <a:solidFill>
-                <a:schemeClr val="tx1"/>
-              </a:solidFill>
-              <a:latin typeface="+mj-lt"/>
-            </a:endParaRPr>
-          </a:p>
-        </p:txBody>
-      </p:sp>
-      <p:sp>
-        <p:nvSpPr>
-          <p:cNvPr id="11" name="Rectangle: Rounded Corners 10">
-            <a:extLst>
-              <a:ext uri="{FF2B5EF4-FFF2-40B4-BE49-F238E27FC236}">
-                <a16:creationId xmlns:a16="http://schemas.microsoft.com/office/drawing/2014/main" id="{AAF0A63F-FBD6-2D94-6DCC-10B1FCC92632}"/>
-              </a:ext>
-            </a:extLst>
-          </p:cNvPr>
-          <p:cNvSpPr/>
-          <p:nvPr/>
-        </p:nvSpPr>
-        <p:spPr>
-          <a:xfrm>
-            <a:off x="7989738" y="4444460"/>
-            <a:ext cx="1588078" cy="675409"/>
-          </a:xfrm>
-          <a:prstGeom prst="roundRect">
-            <a:avLst/>
-          </a:prstGeom>
-          <a:solidFill>
-            <a:schemeClr val="bg1">
-              <a:lumMod val="95000"/>
-            </a:schemeClr>
-          </a:solidFill>
-          <a:ln>
-            <a:solidFill>
-              <a:schemeClr val="tx1"/>
-            </a:solidFill>
-          </a:ln>
-        </p:spPr>
-        <p:style>
-          <a:lnRef idx="2">
-            <a:schemeClr val="accent1">
-              <a:shade val="15000"/>
-            </a:schemeClr>
-          </a:lnRef>
-          <a:fillRef idx="1">
-            <a:schemeClr val="accent1"/>
-          </a:fillRef>
-          <a:effectRef idx="0">
-            <a:schemeClr val="accent1"/>
-          </a:effectRef>
-          <a:fontRef idx="minor">
-            <a:schemeClr val="lt1"/>
-          </a:fontRef>
-        </p:style>
-        <p:txBody>
-          <a:bodyPr rtlCol="0" anchor="ctr"/>
-          <a:lstStyle/>
-          <a:p>
-            <a:pPr algn="ctr"/>
-            <a:r>
-              <a:rPr lang="vi-VN" sz="1600">
-                <a:solidFill>
-                  <a:schemeClr val="tx1"/>
-                </a:solidFill>
-                <a:latin typeface="+mj-lt"/>
-              </a:rPr>
-              <a:t>Đăng xuất</a:t>
-            </a:r>
-            <a:endParaRPr lang="en-US" sz="1600">
-              <a:solidFill>
-                <a:schemeClr val="tx1"/>
-              </a:solidFill>
-              <a:latin typeface="+mj-lt"/>
-            </a:endParaRPr>
-          </a:p>
-        </p:txBody>
-      </p:sp>
-      <p:cxnSp>
-        <p:nvCxnSpPr>
-          <p:cNvPr id="13" name="Straight Arrow Connector 12">
-            <a:extLst>
-              <a:ext uri="{FF2B5EF4-FFF2-40B4-BE49-F238E27FC236}">
-                <a16:creationId xmlns:a16="http://schemas.microsoft.com/office/drawing/2014/main" id="{C3BA0F59-8489-6D44-D3EB-8179377580FA}"/>
-              </a:ext>
-            </a:extLst>
-          </p:cNvPr>
-          <p:cNvCxnSpPr>
-            <a:cxnSpLocks/>
-            <a:endCxn id="3" idx="0"/>
-          </p:cNvCxnSpPr>
-          <p:nvPr/>
-        </p:nvCxnSpPr>
-        <p:spPr>
-          <a:xfrm>
-            <a:off x="6095999" y="1479068"/>
-            <a:ext cx="0" cy="409232"/>
-          </a:xfrm>
-          <a:prstGeom prst="straightConnector1">
-            <a:avLst/>
-          </a:prstGeom>
-          <a:ln>
-            <a:tailEnd type="triangle"/>
-          </a:ln>
-        </p:spPr>
-        <p:style>
-          <a:lnRef idx="2">
-            <a:schemeClr val="dk1"/>
-          </a:lnRef>
-          <a:fillRef idx="0">
-            <a:schemeClr val="dk1"/>
-          </a:fillRef>
-          <a:effectRef idx="1">
-            <a:schemeClr val="dk1"/>
-          </a:effectRef>
-          <a:fontRef idx="minor">
-            <a:schemeClr val="tx1"/>
-          </a:fontRef>
-        </p:style>
-      </p:cxnSp>
-      <p:cxnSp>
-        <p:nvCxnSpPr>
-          <p:cNvPr id="15" name="Straight Arrow Connector 14">
-            <a:extLst>
-              <a:ext uri="{FF2B5EF4-FFF2-40B4-BE49-F238E27FC236}">
-                <a16:creationId xmlns:a16="http://schemas.microsoft.com/office/drawing/2014/main" id="{DA813B6C-58AF-F8F9-FA69-4AECEA469ABE}"/>
-              </a:ext>
-            </a:extLst>
-          </p:cNvPr>
-          <p:cNvCxnSpPr>
-            <a:cxnSpLocks/>
-            <a:stCxn id="3" idx="2"/>
-            <a:endCxn id="5" idx="0"/>
-          </p:cNvCxnSpPr>
-          <p:nvPr/>
-        </p:nvCxnSpPr>
-        <p:spPr>
-          <a:xfrm flipH="1">
-            <a:off x="6095998" y="2324718"/>
-            <a:ext cx="1" cy="727364"/>
-          </a:xfrm>
-          <a:prstGeom prst="straightConnector1">
-            <a:avLst/>
-          </a:prstGeom>
-          <a:ln>
-            <a:tailEnd type="triangle"/>
-          </a:ln>
-        </p:spPr>
-        <p:style>
-          <a:lnRef idx="2">
-            <a:schemeClr val="dk1"/>
-          </a:lnRef>
-          <a:fillRef idx="0">
-            <a:schemeClr val="dk1"/>
-          </a:fillRef>
-          <a:effectRef idx="1">
-            <a:schemeClr val="dk1"/>
-          </a:effectRef>
-          <a:fontRef idx="minor">
-            <a:schemeClr val="tx1"/>
-          </a:fontRef>
-        </p:style>
-      </p:cxnSp>
-      <p:cxnSp>
-        <p:nvCxnSpPr>
-          <p:cNvPr id="17" name="Connector: Elbow 16">
-            <a:extLst>
-              <a:ext uri="{FF2B5EF4-FFF2-40B4-BE49-F238E27FC236}">
-                <a16:creationId xmlns:a16="http://schemas.microsoft.com/office/drawing/2014/main" id="{E6831E9B-2008-4202-FB03-7485722821DA}"/>
-              </a:ext>
-            </a:extLst>
-          </p:cNvPr>
-          <p:cNvCxnSpPr>
-            <a:cxnSpLocks/>
-            <a:stCxn id="3" idx="2"/>
-            <a:endCxn id="4" idx="0"/>
-          </p:cNvCxnSpPr>
-          <p:nvPr/>
-        </p:nvCxnSpPr>
-        <p:spPr>
-          <a:xfrm rot="5400000">
-            <a:off x="4388428" y="1344509"/>
-            <a:ext cx="727363" cy="2687780"/>
-          </a:xfrm>
-          <a:prstGeom prst="bentConnector3">
-            <a:avLst/>
-          </a:prstGeom>
-          <a:ln>
-            <a:tailEnd type="triangle"/>
-          </a:ln>
-        </p:spPr>
-        <p:style>
-          <a:lnRef idx="2">
-            <a:schemeClr val="dk1"/>
-          </a:lnRef>
-          <a:fillRef idx="0">
-            <a:schemeClr val="dk1"/>
-          </a:fillRef>
-          <a:effectRef idx="1">
-            <a:schemeClr val="dk1"/>
-          </a:effectRef>
-          <a:fontRef idx="minor">
-            <a:schemeClr val="tx1"/>
-          </a:fontRef>
-        </p:style>
-      </p:cxnSp>
-      <p:cxnSp>
-        <p:nvCxnSpPr>
-          <p:cNvPr id="19" name="Straight Arrow Connector 18">
-            <a:extLst>
-              <a:ext uri="{FF2B5EF4-FFF2-40B4-BE49-F238E27FC236}">
-                <a16:creationId xmlns:a16="http://schemas.microsoft.com/office/drawing/2014/main" id="{1355E5A9-3368-5FE1-631A-DF73C9926095}"/>
-              </a:ext>
-            </a:extLst>
-          </p:cNvPr>
-          <p:cNvCxnSpPr>
-            <a:stCxn id="5" idx="2"/>
-            <a:endCxn id="6" idx="0"/>
-          </p:cNvCxnSpPr>
-          <p:nvPr/>
-        </p:nvCxnSpPr>
-        <p:spPr>
-          <a:xfrm>
-            <a:off x="6095998" y="3727491"/>
-            <a:ext cx="0" cy="727363"/>
-          </a:xfrm>
-          <a:prstGeom prst="straightConnector1">
-            <a:avLst/>
-          </a:prstGeom>
-          <a:ln>
-            <a:tailEnd type="triangle"/>
-          </a:ln>
-        </p:spPr>
-        <p:style>
-          <a:lnRef idx="2">
-            <a:schemeClr val="dk1"/>
-          </a:lnRef>
-          <a:fillRef idx="0">
-            <a:schemeClr val="dk1"/>
-          </a:fillRef>
-          <a:effectRef idx="1">
-            <a:schemeClr val="dk1"/>
-          </a:effectRef>
-          <a:fontRef idx="minor">
-            <a:schemeClr val="tx1"/>
-          </a:fontRef>
-        </p:style>
-      </p:cxnSp>
-      <p:cxnSp>
-        <p:nvCxnSpPr>
-          <p:cNvPr id="21" name="Straight Arrow Connector 20">
-            <a:extLst>
-              <a:ext uri="{FF2B5EF4-FFF2-40B4-BE49-F238E27FC236}">
-                <a16:creationId xmlns:a16="http://schemas.microsoft.com/office/drawing/2014/main" id="{E652D558-672F-1A4C-D571-A74E57862B81}"/>
-              </a:ext>
-            </a:extLst>
-          </p:cNvPr>
-          <p:cNvCxnSpPr>
-            <a:stCxn id="4" idx="2"/>
-            <a:endCxn id="8" idx="0"/>
-          </p:cNvCxnSpPr>
-          <p:nvPr/>
-        </p:nvCxnSpPr>
-        <p:spPr>
-          <a:xfrm>
-            <a:off x="3408219" y="3727490"/>
-            <a:ext cx="0" cy="685798"/>
-          </a:xfrm>
-          <a:prstGeom prst="straightConnector1">
-            <a:avLst/>
-          </a:prstGeom>
-          <a:ln>
-            <a:tailEnd type="triangle"/>
-          </a:ln>
-        </p:spPr>
-        <p:style>
-          <a:lnRef idx="2">
-            <a:schemeClr val="dk1"/>
-          </a:lnRef>
-          <a:fillRef idx="0">
-            <a:schemeClr val="dk1"/>
-          </a:fillRef>
-          <a:effectRef idx="1">
-            <a:schemeClr val="dk1"/>
-          </a:effectRef>
-          <a:fontRef idx="minor">
-            <a:schemeClr val="tx1"/>
-          </a:fontRef>
-        </p:style>
-      </p:cxnSp>
-      <p:cxnSp>
-        <p:nvCxnSpPr>
-          <p:cNvPr id="33" name="Straight Connector 32">
-            <a:extLst>
-              <a:ext uri="{FF2B5EF4-FFF2-40B4-BE49-F238E27FC236}">
-                <a16:creationId xmlns:a16="http://schemas.microsoft.com/office/drawing/2014/main" id="{4BA61D56-544D-3777-00ED-74D7C273C477}"/>
-              </a:ext>
-            </a:extLst>
-          </p:cNvPr>
-          <p:cNvCxnSpPr>
-            <a:cxnSpLocks/>
-            <a:stCxn id="8" idx="2"/>
-          </p:cNvCxnSpPr>
-          <p:nvPr/>
-        </p:nvCxnSpPr>
-        <p:spPr>
-          <a:xfrm>
-            <a:off x="3408219" y="5088697"/>
-            <a:ext cx="0" cy="374076"/>
-          </a:xfrm>
-          <a:prstGeom prst="line">
-            <a:avLst/>
-          </a:prstGeom>
-        </p:spPr>
-        <p:style>
-          <a:lnRef idx="2">
-            <a:schemeClr val="dk1"/>
-          </a:lnRef>
-          <a:fillRef idx="0">
-            <a:schemeClr val="dk1"/>
-          </a:fillRef>
-          <a:effectRef idx="1">
-            <a:schemeClr val="dk1"/>
-          </a:effectRef>
-          <a:fontRef idx="minor">
-            <a:schemeClr val="tx1"/>
-          </a:fontRef>
-        </p:style>
-      </p:cxnSp>
-      <p:cxnSp>
-        <p:nvCxnSpPr>
-          <p:cNvPr id="35" name="Straight Connector 34">
-            <a:extLst>
-              <a:ext uri="{FF2B5EF4-FFF2-40B4-BE49-F238E27FC236}">
-                <a16:creationId xmlns:a16="http://schemas.microsoft.com/office/drawing/2014/main" id="{4ADD7E55-E2CA-B3E2-9813-6E78261D1520}"/>
-              </a:ext>
-            </a:extLst>
-          </p:cNvPr>
-          <p:cNvCxnSpPr/>
-          <p:nvPr/>
-        </p:nvCxnSpPr>
-        <p:spPr>
-          <a:xfrm>
-            <a:off x="3408219" y="5462773"/>
-            <a:ext cx="2185814" cy="0"/>
-          </a:xfrm>
-          <a:prstGeom prst="line">
-            <a:avLst/>
-          </a:prstGeom>
-        </p:spPr>
-        <p:style>
-          <a:lnRef idx="2">
-            <a:schemeClr val="dk1"/>
-          </a:lnRef>
-          <a:fillRef idx="0">
-            <a:schemeClr val="dk1"/>
-          </a:fillRef>
-          <a:effectRef idx="1">
-            <a:schemeClr val="dk1"/>
-          </a:effectRef>
-          <a:fontRef idx="minor">
-            <a:schemeClr val="tx1"/>
-          </a:fontRef>
-        </p:style>
-      </p:cxnSp>
-      <p:cxnSp>
-        <p:nvCxnSpPr>
-          <p:cNvPr id="37" name="Straight Arrow Connector 36">
-            <a:extLst>
-              <a:ext uri="{FF2B5EF4-FFF2-40B4-BE49-F238E27FC236}">
-                <a16:creationId xmlns:a16="http://schemas.microsoft.com/office/drawing/2014/main" id="{42F78551-9762-E155-4B6D-961F07218F4B}"/>
-              </a:ext>
-            </a:extLst>
-          </p:cNvPr>
-          <p:cNvCxnSpPr>
-            <a:cxnSpLocks/>
-          </p:cNvCxnSpPr>
-          <p:nvPr/>
-        </p:nvCxnSpPr>
-        <p:spPr>
-          <a:xfrm>
-            <a:off x="5594033" y="5462773"/>
-            <a:ext cx="0" cy="353288"/>
-          </a:xfrm>
-          <a:prstGeom prst="straightConnector1">
-            <a:avLst/>
-          </a:prstGeom>
-          <a:ln>
-            <a:tailEnd type="triangle"/>
-          </a:ln>
-        </p:spPr>
-        <p:style>
-          <a:lnRef idx="2">
-            <a:schemeClr val="dk1"/>
-          </a:lnRef>
-          <a:fillRef idx="0">
-            <a:schemeClr val="dk1"/>
-          </a:fillRef>
-          <a:effectRef idx="1">
-            <a:schemeClr val="dk1"/>
-          </a:effectRef>
-          <a:fontRef idx="minor">
-            <a:schemeClr val="tx1"/>
-          </a:fontRef>
-        </p:style>
-      </p:cxnSp>
-      <p:cxnSp>
-        <p:nvCxnSpPr>
-          <p:cNvPr id="39" name="Straight Arrow Connector 38">
-            <a:extLst>
-              <a:ext uri="{FF2B5EF4-FFF2-40B4-BE49-F238E27FC236}">
-                <a16:creationId xmlns:a16="http://schemas.microsoft.com/office/drawing/2014/main" id="{3033B4EB-A950-B53B-26CD-5A7783A71260}"/>
-              </a:ext>
-            </a:extLst>
-          </p:cNvPr>
-          <p:cNvCxnSpPr>
-            <a:stCxn id="6" idx="2"/>
-            <a:endCxn id="10" idx="0"/>
-          </p:cNvCxnSpPr>
-          <p:nvPr/>
-        </p:nvCxnSpPr>
-        <p:spPr>
-          <a:xfrm>
-            <a:off x="6095998" y="5130263"/>
-            <a:ext cx="0" cy="685798"/>
-          </a:xfrm>
-          <a:prstGeom prst="straightConnector1">
-            <a:avLst/>
-          </a:prstGeom>
-          <a:ln>
-            <a:tailEnd type="triangle"/>
-          </a:ln>
-        </p:spPr>
-        <p:style>
-          <a:lnRef idx="2">
-            <a:schemeClr val="dk1"/>
-          </a:lnRef>
-          <a:fillRef idx="0">
-            <a:schemeClr val="dk1"/>
-          </a:fillRef>
-          <a:effectRef idx="1">
-            <a:schemeClr val="dk1"/>
-          </a:effectRef>
-          <a:fontRef idx="minor">
-            <a:schemeClr val="tx1"/>
-          </a:fontRef>
-        </p:style>
-      </p:cxnSp>
-      <p:cxnSp>
-        <p:nvCxnSpPr>
-          <p:cNvPr id="46" name="Connector: Elbow 45">
-            <a:extLst>
-              <a:ext uri="{FF2B5EF4-FFF2-40B4-BE49-F238E27FC236}">
-                <a16:creationId xmlns:a16="http://schemas.microsoft.com/office/drawing/2014/main" id="{066B987A-3824-6F03-B748-175C64F11F8D}"/>
-              </a:ext>
-            </a:extLst>
-          </p:cNvPr>
-          <p:cNvCxnSpPr>
-            <a:cxnSpLocks/>
-            <a:stCxn id="6" idx="3"/>
-            <a:endCxn id="3" idx="3"/>
-          </p:cNvCxnSpPr>
-          <p:nvPr/>
-        </p:nvCxnSpPr>
-        <p:spPr>
-          <a:xfrm flipV="1">
-            <a:off x="6890037" y="2106509"/>
-            <a:ext cx="591418" cy="2686050"/>
-          </a:xfrm>
-          <a:prstGeom prst="bentConnector3">
-            <a:avLst>
-              <a:gd name="adj1" fmla="val 156223"/>
-            </a:avLst>
-          </a:prstGeom>
-          <a:ln>
-            <a:tailEnd type="triangle"/>
-          </a:ln>
-        </p:spPr>
-        <p:style>
-          <a:lnRef idx="2">
-            <a:schemeClr val="dk1"/>
-          </a:lnRef>
-          <a:fillRef idx="0">
-            <a:schemeClr val="dk1"/>
-          </a:fillRef>
-          <a:effectRef idx="1">
-            <a:schemeClr val="dk1"/>
-          </a:effectRef>
-          <a:fontRef idx="minor">
-            <a:schemeClr val="tx1"/>
-          </a:fontRef>
-        </p:style>
-      </p:cxnSp>
-      <p:cxnSp>
-        <p:nvCxnSpPr>
-          <p:cNvPr id="49" name="Connector: Elbow 48">
-            <a:extLst>
-              <a:ext uri="{FF2B5EF4-FFF2-40B4-BE49-F238E27FC236}">
-                <a16:creationId xmlns:a16="http://schemas.microsoft.com/office/drawing/2014/main" id="{1D38D816-4CA9-2DF2-9B2B-46532840AE4D}"/>
-              </a:ext>
-            </a:extLst>
-          </p:cNvPr>
-          <p:cNvCxnSpPr>
-            <a:stCxn id="10" idx="3"/>
-            <a:endCxn id="11" idx="3"/>
-          </p:cNvCxnSpPr>
-          <p:nvPr/>
-        </p:nvCxnSpPr>
-        <p:spPr>
-          <a:xfrm flipV="1">
-            <a:off x="9577816" y="4782165"/>
-            <a:ext cx="12700" cy="1371601"/>
-          </a:xfrm>
-          <a:prstGeom prst="bentConnector3">
-            <a:avLst>
-              <a:gd name="adj1" fmla="val 1800000"/>
-            </a:avLst>
-          </a:prstGeom>
-          <a:ln>
-            <a:tailEnd type="triangle"/>
-          </a:ln>
-        </p:spPr>
-        <p:style>
-          <a:lnRef idx="2">
-            <a:schemeClr val="dk1"/>
-          </a:lnRef>
-          <a:fillRef idx="0">
-            <a:schemeClr val="dk1"/>
-          </a:fillRef>
-          <a:effectRef idx="1">
-            <a:schemeClr val="dk1"/>
-          </a:effectRef>
-          <a:fontRef idx="minor">
-            <a:schemeClr val="tx1"/>
-          </a:fontRef>
-        </p:style>
-      </p:cxnSp>
-      <p:cxnSp>
-        <p:nvCxnSpPr>
-          <p:cNvPr id="51" name="Connector: Elbow 50">
-            <a:extLst>
-              <a:ext uri="{FF2B5EF4-FFF2-40B4-BE49-F238E27FC236}">
-                <a16:creationId xmlns:a16="http://schemas.microsoft.com/office/drawing/2014/main" id="{F9A40D3E-EEEC-5419-76DE-483B0D80C761}"/>
-              </a:ext>
-            </a:extLst>
-          </p:cNvPr>
-          <p:cNvCxnSpPr>
-            <a:cxnSpLocks/>
-            <a:stCxn id="11" idx="0"/>
-            <a:endCxn id="3" idx="3"/>
-          </p:cNvCxnSpPr>
-          <p:nvPr/>
-        </p:nvCxnSpPr>
-        <p:spPr>
-          <a:xfrm rot="16200000" flipV="1">
-            <a:off x="6963641" y="2624324"/>
-            <a:ext cx="2337951" cy="1302322"/>
-          </a:xfrm>
-          <a:prstGeom prst="bentConnector2">
-            <a:avLst/>
-          </a:prstGeom>
-          <a:ln>
-            <a:tailEnd type="triangle"/>
-          </a:ln>
-        </p:spPr>
-        <p:style>
-          <a:lnRef idx="2">
-            <a:schemeClr val="dk1"/>
-          </a:lnRef>
-          <a:fillRef idx="0">
-            <a:schemeClr val="dk1"/>
-          </a:fillRef>
-          <a:effectRef idx="1">
-            <a:schemeClr val="dk1"/>
-          </a:effectRef>
-          <a:fontRef idx="minor">
-            <a:schemeClr val="tx1"/>
-          </a:fontRef>
-        </p:style>
-      </p:cxnSp>
-      <p:grpSp>
-        <p:nvGrpSpPr>
-          <p:cNvPr id="68" name="Group 67">
-            <a:extLst>
-              <a:ext uri="{FF2B5EF4-FFF2-40B4-BE49-F238E27FC236}">
-                <a16:creationId xmlns:a16="http://schemas.microsoft.com/office/drawing/2014/main" id="{22213870-BA24-1EB9-AA5E-2E2878BFED94}"/>
-              </a:ext>
-            </a:extLst>
-          </p:cNvPr>
-          <p:cNvGrpSpPr/>
-          <p:nvPr/>
-        </p:nvGrpSpPr>
-        <p:grpSpPr>
-          <a:xfrm>
-            <a:off x="5509138" y="214652"/>
-            <a:ext cx="1173719" cy="1180574"/>
-            <a:chOff x="5509139" y="42349"/>
-            <a:chExt cx="1173719" cy="1180574"/>
-          </a:xfrm>
-        </p:grpSpPr>
-        <p:pic>
-          <p:nvPicPr>
-            <p:cNvPr id="2" name="Graphic 1" descr="User with solid fill">
-              <a:extLst>
-                <a:ext uri="{FF2B5EF4-FFF2-40B4-BE49-F238E27FC236}">
-                  <a16:creationId xmlns:a16="http://schemas.microsoft.com/office/drawing/2014/main" id="{A4CB7FE8-230F-062F-36CC-A4F2FC4E821C}"/>
-                </a:ext>
-              </a:extLst>
-            </p:cNvPr>
-            <p:cNvPicPr>
-              <a:picLocks noChangeAspect="1"/>
-            </p:cNvPicPr>
-            <p:nvPr/>
-          </p:nvPicPr>
-          <p:blipFill>
-            <a:blip r:embed="rId3">
-              <a:extLst>
-                <a:ext uri="{96DAC541-7B7A-43D3-8B79-37D633B846F1}">
-                  <asvg:svgBlip xmlns:asvg="http://schemas.microsoft.com/office/drawing/2016/SVG/main" r:embed="rId4"/>
-                </a:ext>
-              </a:extLst>
-            </a:blip>
-            <a:stretch>
-              <a:fillRect/>
-            </a:stretch>
-          </p:blipFill>
-          <p:spPr>
-            <a:xfrm>
-              <a:off x="5594034" y="42349"/>
-              <a:ext cx="1003931" cy="1003931"/>
-            </a:xfrm>
-            <a:prstGeom prst="rect">
-              <a:avLst/>
-            </a:prstGeom>
-          </p:spPr>
-        </p:pic>
-        <p:sp>
-          <p:nvSpPr>
-            <p:cNvPr id="67" name="TextBox 66">
-              <a:extLst>
-                <a:ext uri="{FF2B5EF4-FFF2-40B4-BE49-F238E27FC236}">
-                  <a16:creationId xmlns:a16="http://schemas.microsoft.com/office/drawing/2014/main" id="{A2BC84E2-0875-1FC8-BDCA-F2E5059A2D34}"/>
-                </a:ext>
-              </a:extLst>
-            </p:cNvPr>
-            <p:cNvSpPr txBox="1"/>
-            <p:nvPr/>
-          </p:nvSpPr>
-          <p:spPr>
-            <a:xfrm>
-              <a:off x="5509139" y="884369"/>
-              <a:ext cx="1173719" cy="338554"/>
-            </a:xfrm>
-            <a:prstGeom prst="rect">
-              <a:avLst/>
-            </a:prstGeom>
-            <a:noFill/>
-          </p:spPr>
-          <p:txBody>
-            <a:bodyPr wrap="none" rtlCol="0">
-              <a:spAutoFit/>
-            </a:bodyPr>
-            <a:lstStyle/>
-            <a:p>
-              <a:r>
-                <a:rPr lang="vi-VN" sz="1600">
-                  <a:latin typeface="+mj-lt"/>
-                </a:rPr>
-                <a:t>Người dùng</a:t>
-              </a:r>
-              <a:endParaRPr lang="en-US" sz="1600">
-                <a:latin typeface="+mj-lt"/>
-              </a:endParaRPr>
-            </a:p>
-          </p:txBody>
-        </p:sp>
-      </p:grpSp>
-      <p:sp>
-        <p:nvSpPr>
-          <p:cNvPr id="69" name="TextBox 68">
-            <a:extLst>
-              <a:ext uri="{FF2B5EF4-FFF2-40B4-BE49-F238E27FC236}">
-                <a16:creationId xmlns:a16="http://schemas.microsoft.com/office/drawing/2014/main" id="{27D9A431-6C12-C75D-2E21-ED8350B2BD23}"/>
+          <p:cNvPr id="2" name="TextBox 1">
+            <a:extLst>
+              <a:ext uri="{FF2B5EF4-FFF2-40B4-BE49-F238E27FC236}">
+                <a16:creationId xmlns:a16="http://schemas.microsoft.com/office/drawing/2014/main" id="{A76BB85E-EAB6-2089-5682-48447CE032A4}"/>
               </a:ext>
             </a:extLst>
           </p:cNvPr>
@@ -26706,8 +28042,8 @@
         </p:nvSpPr>
         <p:spPr>
           <a:xfrm>
-            <a:off x="2547236" y="5201164"/>
-            <a:ext cx="978153" cy="523220"/>
+            <a:off x="612648" y="795528"/>
+            <a:ext cx="8497839" cy="3693319"/>
           </a:xfrm>
           <a:prstGeom prst="rect">
             <a:avLst/>
@@ -26720,144 +28056,199 @@
           </a:bodyPr>
           <a:lstStyle/>
           <a:p>
-            <a:r>
-              <a:rPr lang="vi-VN" sz="1400">
-                <a:latin typeface="+mj-lt"/>
+            <a:pPr marL="285750" indent="-285750">
+              <a:buFontTx/>
+              <a:buChar char="-"/>
+            </a:pPr>
+            <a:r>
+              <a:rPr lang="vi-VN"/>
+              <a:t>Chức năng đăng nhập/đăng xuất: </a:t>
+            </a:r>
+            <a:r>
+              <a:rPr lang="vi-VN">
+                <a:solidFill>
+                  <a:srgbClr val="00B0F0"/>
+                </a:solidFill>
               </a:rPr>
-              <a:t>Đăng ký</a:t>
-            </a:r>
-          </a:p>
-          <a:p>
-            <a:r>
-              <a:rPr lang="vi-VN" sz="1400">
-                <a:latin typeface="+mj-lt"/>
+              <a:t>biểu đồ chức năng, usecase</a:t>
+            </a:r>
+            <a:r>
+              <a:rPr lang="vi-VN"/>
+              <a:t>, tuần tự</a:t>
+            </a:r>
+          </a:p>
+          <a:p>
+            <a:pPr marL="285750" indent="-285750">
+              <a:buFontTx/>
+              <a:buChar char="-"/>
+            </a:pPr>
+            <a:r>
+              <a:rPr lang="vi-VN"/>
+              <a:t>Chức năng cài đặt người dùng tùy chọn: </a:t>
+            </a:r>
+            <a:r>
+              <a:rPr lang="vi-VN">
+                <a:solidFill>
+                  <a:srgbClr val="00B0F0"/>
+                </a:solidFill>
               </a:rPr>
-              <a:t>thành công</a:t>
-            </a:r>
-            <a:endParaRPr lang="en-US" sz="1400">
-              <a:latin typeface="+mj-lt"/>
-            </a:endParaRPr>
-          </a:p>
-        </p:txBody>
-      </p:sp>
-      <p:sp>
-        <p:nvSpPr>
-          <p:cNvPr id="7" name="TextBox 6">
-            <a:extLst>
-              <a:ext uri="{FF2B5EF4-FFF2-40B4-BE49-F238E27FC236}">
-                <a16:creationId xmlns:a16="http://schemas.microsoft.com/office/drawing/2014/main" id="{41DDCBEC-3C22-77D3-FA32-656909EE95EC}"/>
-              </a:ext>
-            </a:extLst>
-          </p:cNvPr>
-          <p:cNvSpPr txBox="1"/>
-          <p:nvPr/>
-        </p:nvSpPr>
-        <p:spPr>
-          <a:xfrm>
-            <a:off x="6095997" y="5228556"/>
-            <a:ext cx="978153" cy="523220"/>
-          </a:xfrm>
-          <a:prstGeom prst="rect">
-            <a:avLst/>
-          </a:prstGeom>
-          <a:noFill/>
-        </p:spPr>
-        <p:txBody>
-          <a:bodyPr wrap="none" rtlCol="0">
-            <a:spAutoFit/>
-          </a:bodyPr>
-          <a:lstStyle/>
-          <a:p>
-            <a:r>
-              <a:rPr lang="vi-VN" sz="1400">
-                <a:latin typeface="+mj-lt"/>
+              <a:t>biểu đồ  chức năng, usecase,</a:t>
+            </a:r>
+            <a:r>
+              <a:rPr lang="vi-VN"/>
+              <a:t> tuần tự</a:t>
+            </a:r>
+          </a:p>
+          <a:p>
+            <a:pPr marL="285750" indent="-285750">
+              <a:buFontTx/>
+              <a:buChar char="-"/>
+            </a:pPr>
+            <a:r>
+              <a:rPr lang="vi-VN"/>
+              <a:t>Chức năng khởi tạo starter: biểu đồ tuần tự</a:t>
+            </a:r>
+          </a:p>
+          <a:p>
+            <a:pPr marL="285750" indent="-285750">
+              <a:buFontTx/>
+              <a:buChar char="-"/>
+            </a:pPr>
+            <a:r>
+              <a:rPr lang="vi-VN"/>
+              <a:t>Chức năng trò chuyện văn bản: </a:t>
+            </a:r>
+            <a:r>
+              <a:rPr lang="vi-VN">
+                <a:solidFill>
+                  <a:srgbClr val="00B0F0"/>
+                </a:solidFill>
               </a:rPr>
-              <a:t>Đăng</a:t>
-            </a:r>
-            <a:r>
-              <a:rPr lang="en-US" sz="1400">
-                <a:latin typeface="Times New Roman" panose="02020603050405020304" pitchFamily="18" charset="0"/>
-                <a:cs typeface="Times New Roman" panose="02020603050405020304" pitchFamily="18" charset="0"/>
+              <a:t>biểu đồ chức năng, usecase</a:t>
+            </a:r>
+            <a:r>
+              <a:rPr lang="vi-VN"/>
+              <a:t>, tuần tự</a:t>
+            </a:r>
+          </a:p>
+          <a:p>
+            <a:pPr marL="285750" indent="-285750">
+              <a:buFontTx/>
+              <a:buChar char="-"/>
+            </a:pPr>
+            <a:r>
+              <a:rPr lang="vi-VN"/>
+              <a:t>Chức năng trò chuyện âm thanh: </a:t>
+            </a:r>
+            <a:r>
+              <a:rPr lang="vi-VN">
+                <a:solidFill>
+                  <a:srgbClr val="00B0F0"/>
+                </a:solidFill>
               </a:rPr>
-              <a:t> nhập</a:t>
-            </a:r>
-            <a:endParaRPr lang="vi-VN" sz="1400">
-              <a:latin typeface="+mj-lt"/>
-            </a:endParaRPr>
-          </a:p>
-          <a:p>
-            <a:r>
-              <a:rPr lang="vi-VN" sz="1400">
-                <a:latin typeface="+mj-lt"/>
+              <a:t>chức năng, usecase</a:t>
+            </a:r>
+            <a:r>
+              <a:rPr lang="vi-VN"/>
+              <a:t>, tuần tự</a:t>
+            </a:r>
+          </a:p>
+          <a:p>
+            <a:pPr marL="285750" indent="-285750">
+              <a:buFontTx/>
+              <a:buChar char="-"/>
+            </a:pPr>
+            <a:r>
+              <a:rPr lang="vi-VN"/>
+              <a:t>Chức năng tăng cường trí nhớ hội thoại: </a:t>
+            </a:r>
+            <a:r>
+              <a:rPr lang="vi-VN">
+                <a:solidFill>
+                  <a:srgbClr val="00B0F0"/>
+                </a:solidFill>
               </a:rPr>
-              <a:t>thành công</a:t>
-            </a:r>
-            <a:endParaRPr lang="en-US" sz="1400">
-              <a:latin typeface="+mj-lt"/>
-            </a:endParaRPr>
-          </a:p>
-        </p:txBody>
-      </p:sp>
-      <p:sp>
-        <p:nvSpPr>
-          <p:cNvPr id="9" name="TextBox 8">
-            <a:extLst>
-              <a:ext uri="{FF2B5EF4-FFF2-40B4-BE49-F238E27FC236}">
-                <a16:creationId xmlns:a16="http://schemas.microsoft.com/office/drawing/2014/main" id="{F2AAA943-F699-9525-C9F3-9D5D1B642FF4}"/>
-              </a:ext>
-            </a:extLst>
-          </p:cNvPr>
-          <p:cNvSpPr txBox="1"/>
-          <p:nvPr/>
-        </p:nvSpPr>
-        <p:spPr>
-          <a:xfrm>
-            <a:off x="6890036" y="4298973"/>
-            <a:ext cx="978153" cy="523220"/>
-          </a:xfrm>
-          <a:prstGeom prst="rect">
-            <a:avLst/>
-          </a:prstGeom>
-          <a:noFill/>
-        </p:spPr>
-        <p:txBody>
-          <a:bodyPr wrap="none" rtlCol="0">
-            <a:spAutoFit/>
-          </a:bodyPr>
-          <a:lstStyle/>
-          <a:p>
-            <a:r>
-              <a:rPr lang="vi-VN" sz="1400">
-                <a:latin typeface="+mj-lt"/>
-              </a:rPr>
-              <a:t>Đăng</a:t>
-            </a:r>
-            <a:r>
-              <a:rPr lang="en-US" sz="1400">
-                <a:latin typeface="Times New Roman" panose="02020603050405020304" pitchFamily="18" charset="0"/>
-                <a:cs typeface="Times New Roman" panose="02020603050405020304" pitchFamily="18" charset="0"/>
-              </a:rPr>
-              <a:t> nhập</a:t>
-            </a:r>
-            <a:endParaRPr lang="vi-VN" sz="1400">
-              <a:latin typeface="+mj-lt"/>
-            </a:endParaRPr>
-          </a:p>
-          <a:p>
-            <a:r>
-              <a:rPr lang="en-US" sz="1400">
-                <a:latin typeface="Times New Roman" panose="02020603050405020304" pitchFamily="18" charset="0"/>
-                <a:cs typeface="Times New Roman" panose="02020603050405020304" pitchFamily="18" charset="0"/>
-              </a:rPr>
-              <a:t>thất bại</a:t>
-            </a:r>
+              <a:t>chức năng, usecase</a:t>
+            </a:r>
+            <a:r>
+              <a:rPr lang="vi-VN"/>
+              <a:t>, tuần tự</a:t>
+            </a:r>
+          </a:p>
+          <a:p>
+            <a:pPr marL="285750" indent="-285750">
+              <a:buFontTx/>
+              <a:buChar char="-"/>
+            </a:pPr>
+            <a:r>
+              <a:rPr lang="vi-VN"/>
+              <a:t>Chức năng quản lý hành vi người dùng: chức năng, usecase, tuần tự</a:t>
+            </a:r>
+          </a:p>
+          <a:p>
+            <a:pPr marL="285750" indent="-285750">
+              <a:buFontTx/>
+              <a:buChar char="-"/>
+            </a:pPr>
+            <a:r>
+              <a:rPr lang="vi-VN"/>
+              <a:t>Chức năng quản lý hội thoại: chức năng, usecase, tuần tự</a:t>
+            </a:r>
+          </a:p>
+          <a:p>
+            <a:pPr marL="285750" indent="-285750">
+              <a:buFontTx/>
+              <a:buChar char="-"/>
+            </a:pPr>
+            <a:r>
+              <a:rPr lang="vi-VN"/>
+              <a:t>Chức năng xử lý trích xuất thông tin trò chuyện</a:t>
+            </a:r>
+          </a:p>
+          <a:p>
+            <a:pPr marL="285750" indent="-285750">
+              <a:buFontTx/>
+              <a:buChar char="-"/>
+            </a:pPr>
+            <a:endParaRPr lang="vi-VN"/>
+          </a:p>
+          <a:p>
+            <a:pPr marL="285750" indent="-285750">
+              <a:buFontTx/>
+              <a:buChar char="-"/>
+            </a:pPr>
+            <a:r>
+              <a:rPr lang="vi-VN"/>
+              <a:t>Thiết kế cơ sở dữ liệu embedding: có những trường nào</a:t>
+            </a:r>
+          </a:p>
+          <a:p>
+            <a:pPr marL="285750" indent="-285750">
+              <a:buFontTx/>
+              <a:buChar char="-"/>
+            </a:pPr>
+            <a:r>
+              <a:rPr lang="vi-VN"/>
+              <a:t>Cơ sở dữ liệu lưu trữ lịch sử hội thoại</a:t>
+            </a:r>
+          </a:p>
+          <a:p>
+            <a:pPr marL="285750" indent="-285750">
+              <a:buFontTx/>
+              <a:buChar char="-"/>
+            </a:pPr>
+            <a:r>
+              <a:rPr lang="vi-VN"/>
+              <a:t>Co sơ dữ liệu lưu trữ thông tin người dùng</a:t>
+            </a:r>
+            <a:endParaRPr lang="en-US"/>
           </a:p>
         </p:txBody>
       </p:sp>
     </p:spTree>
     <p:extLst>
       <p:ext uri="{BB962C8B-B14F-4D97-AF65-F5344CB8AC3E}">
-        <p14:creationId xmlns:p14="http://schemas.microsoft.com/office/powerpoint/2010/main" val="3049573887"/>
+        <p14:creationId xmlns:p14="http://schemas.microsoft.com/office/powerpoint/2010/main" val="629964740"/>
       </p:ext>
     </p:extLst>
   </p:cSld>

--- a/documents/hinh_ve_trong_cao_cao_do_an.pptx
+++ b/documents/hinh_ve_trong_cao_cao_do_an.pptx
@@ -29470,8 +29470,8 @@
         </p:nvSpPr>
         <p:spPr>
           <a:xfrm>
-            <a:off x="984353" y="488573"/>
-            <a:ext cx="1947969" cy="646331"/>
+            <a:off x="993971" y="488573"/>
+            <a:ext cx="1928734" cy="707886"/>
           </a:xfrm>
           <a:prstGeom prst="rect">
             <a:avLst/>
@@ -29486,21 +29486,21 @@
           <a:p>
             <a:pPr algn="ctr"/>
             <a:r>
-              <a:rPr lang="en-US">
+              <a:rPr lang="en-US" sz="2000">
                 <a:latin typeface="Times New Roman" panose="02020603050405020304" pitchFamily="18" charset="0"/>
                 <a:cs typeface="Times New Roman" panose="02020603050405020304" pitchFamily="18" charset="0"/>
               </a:rPr>
-              <a:t>Turing Test</a:t>
+              <a:t>Turing Test,</a:t>
             </a:r>
           </a:p>
           <a:p>
             <a:pPr algn="ctr"/>
             <a:r>
-              <a:rPr lang="en-US">
+              <a:rPr lang="en-US" sz="2000">
                 <a:latin typeface="Times New Roman" panose="02020603050405020304" pitchFamily="18" charset="0"/>
                 <a:cs typeface="Times New Roman" panose="02020603050405020304" pitchFamily="18" charset="0"/>
               </a:rPr>
-              <a:t>Syntactic Structure</a:t>
+              <a:t>Cấu trúc cú pháp</a:t>
             </a:r>
           </a:p>
         </p:txBody>
@@ -29519,8 +29519,8 @@
         </p:nvSpPr>
         <p:spPr>
           <a:xfrm>
-            <a:off x="3732892" y="485001"/>
-            <a:ext cx="2059218" cy="646331"/>
+            <a:off x="3621003" y="485001"/>
+            <a:ext cx="2282997" cy="707886"/>
           </a:xfrm>
           <a:prstGeom prst="rect">
             <a:avLst/>
@@ -29535,21 +29535,21 @@
           <a:p>
             <a:pPr algn="ctr"/>
             <a:r>
-              <a:rPr lang="en-US">
+              <a:rPr lang="en-US" sz="2000">
                 <a:latin typeface="Times New Roman" panose="02020603050405020304" pitchFamily="18" charset="0"/>
                 <a:cs typeface="Times New Roman" panose="02020603050405020304" pitchFamily="18" charset="0"/>
               </a:rPr>
-              <a:t>Conceptual</a:t>
+              <a:t>Lý thuyết</a:t>
             </a:r>
           </a:p>
           <a:p>
             <a:pPr algn="ctr"/>
             <a:r>
-              <a:rPr lang="en-US">
+              <a:rPr lang="en-US" sz="2000">
                 <a:latin typeface="Times New Roman" panose="02020603050405020304" pitchFamily="18" charset="0"/>
                 <a:cs typeface="Times New Roman" panose="02020603050405020304" pitchFamily="18" charset="0"/>
               </a:rPr>
-              <a:t>Dependency Theory</a:t>
+              <a:t>phụ thuộc khái niệm</a:t>
             </a:r>
           </a:p>
         </p:txBody>
@@ -29568,8 +29568,8 @@
         </p:nvSpPr>
         <p:spPr>
           <a:xfrm>
-            <a:off x="6301370" y="485001"/>
-            <a:ext cx="2256259" cy="646331"/>
+            <a:off x="6412237" y="485001"/>
+            <a:ext cx="2034531" cy="707886"/>
           </a:xfrm>
           <a:prstGeom prst="rect">
             <a:avLst/>
@@ -29584,21 +29584,21 @@
           <a:p>
             <a:pPr algn="ctr"/>
             <a:r>
-              <a:rPr lang="en-US">
+              <a:rPr lang="en-US" sz="2000">
                 <a:latin typeface="Times New Roman" panose="02020603050405020304" pitchFamily="18" charset="0"/>
                 <a:cs typeface="Times New Roman" panose="02020603050405020304" pitchFamily="18" charset="0"/>
               </a:rPr>
-              <a:t>Augmented Transition</a:t>
+              <a:t>Mạng chuyển tiếp</a:t>
             </a:r>
           </a:p>
           <a:p>
             <a:pPr algn="ctr"/>
             <a:r>
-              <a:rPr lang="en-US">
+              <a:rPr lang="en-US" sz="2000">
                 <a:latin typeface="Times New Roman" panose="02020603050405020304" pitchFamily="18" charset="0"/>
                 <a:cs typeface="Times New Roman" panose="02020603050405020304" pitchFamily="18" charset="0"/>
               </a:rPr>
-              <a:t>Network</a:t>
+              <a:t>tăng cường</a:t>
             </a:r>
           </a:p>
         </p:txBody>
@@ -29617,8 +29617,8 @@
         </p:nvSpPr>
         <p:spPr>
           <a:xfrm>
-            <a:off x="9096971" y="485001"/>
-            <a:ext cx="2273378" cy="646331"/>
+            <a:off x="9014416" y="485001"/>
+            <a:ext cx="2438488" cy="707886"/>
           </a:xfrm>
           <a:prstGeom prst="rect">
             <a:avLst/>
@@ -29633,7 +29633,7 @@
           <a:p>
             <a:pPr algn="ctr"/>
             <a:r>
-              <a:rPr lang="en-US">
+              <a:rPr lang="en-US" sz="2000">
                 <a:latin typeface="Times New Roman" panose="02020603050405020304" pitchFamily="18" charset="0"/>
                 <a:cs typeface="Times New Roman" panose="02020603050405020304" pitchFamily="18" charset="0"/>
               </a:rPr>
@@ -29643,11 +29643,11 @@
           <a:p>
             <a:pPr algn="ctr"/>
             <a:r>
-              <a:rPr lang="en-US">
+              <a:rPr lang="en-US" sz="2000">
                 <a:latin typeface="Times New Roman" panose="02020603050405020304" pitchFamily="18" charset="0"/>
                 <a:cs typeface="Times New Roman" panose="02020603050405020304" pitchFamily="18" charset="0"/>
               </a:rPr>
-              <a:t>Symbolic NLP</a:t>
+              <a:t>NLP bằng quy tắc</a:t>
             </a:r>
           </a:p>
         </p:txBody>
@@ -29666,8 +29666,8 @@
         </p:nvSpPr>
         <p:spPr>
           <a:xfrm>
-            <a:off x="1227751" y="5330428"/>
-            <a:ext cx="1461169" cy="646331"/>
+            <a:off x="800808" y="5330428"/>
+            <a:ext cx="2315056" cy="1015663"/>
           </a:xfrm>
           <a:prstGeom prst="rect">
             <a:avLst/>
@@ -29682,21 +29682,31 @@
           <a:p>
             <a:pPr algn="ctr"/>
             <a:r>
-              <a:rPr lang="en-US">
+              <a:rPr lang="en-US" sz="2000">
                 <a:latin typeface="Times New Roman" panose="02020603050405020304" pitchFamily="18" charset="0"/>
                 <a:cs typeface="Times New Roman" panose="02020603050405020304" pitchFamily="18" charset="0"/>
               </a:rPr>
-              <a:t>ML ra đời</a:t>
+              <a:t>ML ra đời,</a:t>
             </a:r>
           </a:p>
           <a:p>
             <a:pPr algn="ctr"/>
             <a:r>
-              <a:rPr lang="en-US">
+              <a:rPr lang="en-US" sz="2000">
                 <a:latin typeface="Times New Roman" panose="02020603050405020304" pitchFamily="18" charset="0"/>
                 <a:cs typeface="Times New Roman" panose="02020603050405020304" pitchFamily="18" charset="0"/>
               </a:rPr>
-              <a:t>Statistic NLP</a:t>
+              <a:t>Bắt đầu thời kỳ NLP</a:t>
+            </a:r>
+          </a:p>
+          <a:p>
+            <a:pPr algn="ctr"/>
+            <a:r>
+              <a:rPr lang="en-US" sz="2000">
+                <a:latin typeface="Times New Roman" panose="02020603050405020304" pitchFamily="18" charset="0"/>
+                <a:cs typeface="Times New Roman" panose="02020603050405020304" pitchFamily="18" charset="0"/>
+              </a:rPr>
+              <a:t>bằng thống kê</a:t>
             </a:r>
           </a:p>
         </p:txBody>
@@ -29778,8 +29788,8 @@
         </p:nvSpPr>
         <p:spPr>
           <a:xfrm>
-            <a:off x="3583364" y="5468927"/>
-            <a:ext cx="2358274" cy="369332"/>
+            <a:off x="3511201" y="5468927"/>
+            <a:ext cx="2502608" cy="707886"/>
           </a:xfrm>
           <a:prstGeom prst="rect">
             <a:avLst/>
@@ -29794,11 +29804,21 @@
           <a:p>
             <a:pPr algn="ctr"/>
             <a:r>
-              <a:rPr lang="en-US">
+              <a:rPr lang="en-US" sz="2000">
                 <a:latin typeface="Times New Roman" panose="02020603050405020304" pitchFamily="18" charset="0"/>
                 <a:cs typeface="Times New Roman" panose="02020603050405020304" pitchFamily="18" charset="0"/>
               </a:rPr>
-              <a:t>Mô hình hóa ngôn ngữ</a:t>
+              <a:t>Các nghiên cứu về</a:t>
+            </a:r>
+          </a:p>
+          <a:p>
+            <a:pPr algn="ctr"/>
+            <a:r>
+              <a:rPr lang="en-US" sz="2000">
+                <a:latin typeface="Times New Roman" panose="02020603050405020304" pitchFamily="18" charset="0"/>
+                <a:cs typeface="Times New Roman" panose="02020603050405020304" pitchFamily="18" charset="0"/>
+              </a:rPr>
+              <a:t>mô hình hóa ngôn ngữ</a:t>
             </a:r>
           </a:p>
         </p:txBody>
@@ -29880,8 +29900,8 @@
         </p:nvSpPr>
         <p:spPr>
           <a:xfrm>
-            <a:off x="6285673" y="5334000"/>
-            <a:ext cx="2283254" cy="923330"/>
+            <a:off x="5917051" y="5334000"/>
+            <a:ext cx="3020507" cy="1015663"/>
           </a:xfrm>
           <a:prstGeom prst="rect">
             <a:avLst/>
@@ -29896,31 +29916,31 @@
           <a:p>
             <a:pPr algn="ctr"/>
             <a:r>
-              <a:rPr lang="en-US">
+              <a:rPr lang="en-US" sz="2000">
                 <a:latin typeface="Times New Roman" panose="02020603050405020304" pitchFamily="18" charset="0"/>
                 <a:cs typeface="Times New Roman" panose="02020603050405020304" pitchFamily="18" charset="0"/>
               </a:rPr>
-              <a:t>NLP với NN</a:t>
+              <a:t>Thời kỳ của NLP bằng NN,</a:t>
             </a:r>
           </a:p>
           <a:p>
             <a:pPr algn="ctr"/>
             <a:r>
-              <a:rPr lang="en-US">
+              <a:rPr lang="en-US" sz="2000">
                 <a:latin typeface="Times New Roman" panose="02020603050405020304" pitchFamily="18" charset="0"/>
                 <a:cs typeface="Times New Roman" panose="02020603050405020304" pitchFamily="18" charset="0"/>
               </a:rPr>
-              <a:t>Mô hình Transformer</a:t>
+              <a:t>với sự xuất hiện của </a:t>
             </a:r>
           </a:p>
           <a:p>
             <a:pPr algn="ctr"/>
             <a:r>
-              <a:rPr lang="en-US">
+              <a:rPr lang="en-US" sz="2000">
                 <a:latin typeface="Times New Roman" panose="02020603050405020304" pitchFamily="18" charset="0"/>
                 <a:cs typeface="Times New Roman" panose="02020603050405020304" pitchFamily="18" charset="0"/>
               </a:rPr>
-              <a:t>Sự xuất hiện của LLM</a:t>
+              <a:t>Transformer và LLM</a:t>
             </a:r>
           </a:p>
         </p:txBody>
@@ -30500,8 +30520,8 @@
         </p:nvCxnSpPr>
         <p:spPr>
           <a:xfrm flipH="1" flipV="1">
-            <a:off x="1958338" y="1134904"/>
-            <a:ext cx="2" cy="389096"/>
+            <a:off x="1958338" y="1196459"/>
+            <a:ext cx="2" cy="327541"/>
           </a:xfrm>
           <a:prstGeom prst="line">
             <a:avLst/>
@@ -33374,8 +33394,8 @@
         </p:nvSpPr>
         <p:spPr>
           <a:xfrm>
-            <a:off x="853440" y="2045970"/>
-            <a:ext cx="2438400" cy="838200"/>
+            <a:off x="655320" y="2045970"/>
+            <a:ext cx="2758440" cy="838200"/>
           </a:xfrm>
           <a:prstGeom prst="roundRect">
             <a:avLst/>
@@ -33406,7 +33426,7 @@
           <a:p>
             <a:pPr algn="ctr"/>
             <a:r>
-              <a:rPr lang="en-US">
+              <a:rPr lang="en-US" sz="2400">
                 <a:solidFill>
                   <a:schemeClr val="tx1"/>
                 </a:solidFill>
@@ -33432,8 +33452,8 @@
         </p:nvSpPr>
         <p:spPr>
           <a:xfrm>
-            <a:off x="2499360" y="754380"/>
-            <a:ext cx="2438400" cy="838200"/>
+            <a:off x="2301240" y="754380"/>
+            <a:ext cx="2758440" cy="838200"/>
           </a:xfrm>
           <a:prstGeom prst="roundRect">
             <a:avLst/>
@@ -33464,7 +33484,7 @@
           <a:p>
             <a:pPr algn="ctr"/>
             <a:r>
-              <a:rPr lang="en-US">
+              <a:rPr lang="en-US" sz="2400">
                 <a:solidFill>
                   <a:schemeClr val="tx1"/>
                 </a:solidFill>
@@ -33490,8 +33510,8 @@
         </p:nvSpPr>
         <p:spPr>
           <a:xfrm>
-            <a:off x="853440" y="3756660"/>
-            <a:ext cx="2438400" cy="838200"/>
+            <a:off x="655320" y="3756660"/>
+            <a:ext cx="2758440" cy="838200"/>
           </a:xfrm>
           <a:prstGeom prst="roundRect">
             <a:avLst/>
@@ -33522,7 +33542,7 @@
           <a:p>
             <a:pPr algn="ctr"/>
             <a:r>
-              <a:rPr lang="en-US">
+              <a:rPr lang="en-US" sz="2400">
                 <a:solidFill>
                   <a:schemeClr val="tx1"/>
                 </a:solidFill>
@@ -33548,8 +33568,8 @@
         </p:nvSpPr>
         <p:spPr>
           <a:xfrm>
-            <a:off x="2499360" y="5227320"/>
-            <a:ext cx="2438400" cy="838200"/>
+            <a:off x="2301240" y="5227320"/>
+            <a:ext cx="2758440" cy="838200"/>
           </a:xfrm>
           <a:prstGeom prst="roundRect">
             <a:avLst/>
@@ -33580,7 +33600,7 @@
           <a:p>
             <a:pPr algn="ctr"/>
             <a:r>
-              <a:rPr lang="en-US">
+              <a:rPr lang="en-US" sz="2400">
                 <a:solidFill>
                   <a:schemeClr val="tx1"/>
                 </a:solidFill>
@@ -33606,8 +33626,8 @@
         </p:nvSpPr>
         <p:spPr>
           <a:xfrm>
-            <a:off x="7254240" y="765810"/>
-            <a:ext cx="2438400" cy="838200"/>
+            <a:off x="7056120" y="765810"/>
+            <a:ext cx="2758440" cy="838200"/>
           </a:xfrm>
           <a:prstGeom prst="roundRect">
             <a:avLst/>
@@ -33638,7 +33658,7 @@
           <a:p>
             <a:pPr algn="ctr"/>
             <a:r>
-              <a:rPr lang="en-US">
+              <a:rPr lang="en-US" sz="2400">
                 <a:solidFill>
                   <a:schemeClr val="tx1"/>
                 </a:solidFill>
@@ -33651,7 +33671,7 @@
           <a:p>
             <a:pPr algn="ctr"/>
             <a:r>
-              <a:rPr lang="en-US">
+              <a:rPr lang="en-US" sz="2400">
                 <a:solidFill>
                   <a:schemeClr val="tx1"/>
                 </a:solidFill>
@@ -33677,8 +33697,8 @@
         </p:nvSpPr>
         <p:spPr>
           <a:xfrm>
-            <a:off x="8900160" y="2045970"/>
-            <a:ext cx="2438400" cy="838200"/>
+            <a:off x="8702040" y="2045970"/>
+            <a:ext cx="2758440" cy="838200"/>
           </a:xfrm>
           <a:prstGeom prst="roundRect">
             <a:avLst/>
@@ -33709,7 +33729,7 @@
           <a:p>
             <a:pPr algn="ctr"/>
             <a:r>
-              <a:rPr lang="en-US">
+              <a:rPr lang="en-US" sz="2400">
                 <a:solidFill>
                   <a:schemeClr val="tx1"/>
                 </a:solidFill>
@@ -33735,8 +33755,8 @@
         </p:nvSpPr>
         <p:spPr>
           <a:xfrm>
-            <a:off x="8900160" y="3756660"/>
-            <a:ext cx="2438400" cy="838200"/>
+            <a:off x="8702040" y="3756660"/>
+            <a:ext cx="2758440" cy="838200"/>
           </a:xfrm>
           <a:prstGeom prst="roundRect">
             <a:avLst/>
@@ -33767,7 +33787,7 @@
           <a:p>
             <a:pPr algn="ctr"/>
             <a:r>
-              <a:rPr lang="en-US">
+              <a:rPr lang="en-US" sz="2400">
                 <a:solidFill>
                   <a:schemeClr val="tx1"/>
                 </a:solidFill>
@@ -33793,8 +33813,8 @@
         </p:nvSpPr>
         <p:spPr>
           <a:xfrm>
-            <a:off x="7254240" y="5227320"/>
-            <a:ext cx="2438400" cy="838200"/>
+            <a:off x="7056120" y="5227320"/>
+            <a:ext cx="2758440" cy="838200"/>
           </a:xfrm>
           <a:prstGeom prst="roundRect">
             <a:avLst/>
@@ -33825,7 +33845,7 @@
           <a:p>
             <a:pPr algn="ctr"/>
             <a:r>
-              <a:rPr lang="en-US">
+              <a:rPr lang="en-US" sz="2400">
                 <a:solidFill>
                   <a:schemeClr val="tx1"/>
                 </a:solidFill>
@@ -34206,8 +34226,8 @@
         </p:nvSpPr>
         <p:spPr>
           <a:xfrm>
-            <a:off x="8534400" y="1228634"/>
-            <a:ext cx="2772229" cy="919480"/>
+            <a:off x="8061960" y="1094014"/>
+            <a:ext cx="3244669" cy="1188720"/>
           </a:xfrm>
           <a:prstGeom prst="roundRect">
             <a:avLst/>
@@ -34243,7 +34263,7 @@
           <a:p>
             <a:pPr algn="ctr"/>
             <a:r>
-              <a:rPr lang="en-US" sz="2000">
+              <a:rPr lang="en-US" sz="2400">
                 <a:solidFill>
                   <a:schemeClr val="tx1"/>
                 </a:solidFill>
@@ -34269,8 +34289,8 @@
         </p:nvSpPr>
         <p:spPr>
           <a:xfrm>
-            <a:off x="8708572" y="2969260"/>
-            <a:ext cx="2772229" cy="919480"/>
+            <a:off x="8236132" y="2834640"/>
+            <a:ext cx="3244669" cy="1188720"/>
           </a:xfrm>
           <a:prstGeom prst="roundRect">
             <a:avLst/>
@@ -34306,7 +34326,7 @@
           <a:p>
             <a:pPr algn="ctr"/>
             <a:r>
-              <a:rPr lang="en-US" sz="2000">
+              <a:rPr lang="en-US" sz="2400">
                 <a:solidFill>
                   <a:schemeClr val="tx1"/>
                 </a:solidFill>
@@ -34319,7 +34339,7 @@
           <a:p>
             <a:pPr algn="ctr"/>
             <a:r>
-              <a:rPr lang="en-US" sz="2000">
+              <a:rPr lang="en-US" sz="2400">
                 <a:solidFill>
                   <a:schemeClr val="tx1"/>
                 </a:solidFill>
@@ -34345,8 +34365,8 @@
         </p:nvSpPr>
         <p:spPr>
           <a:xfrm>
-            <a:off x="8534400" y="4709886"/>
-            <a:ext cx="2772229" cy="919480"/>
+            <a:off x="8061960" y="4575266"/>
+            <a:ext cx="3244669" cy="1188720"/>
           </a:xfrm>
           <a:prstGeom prst="roundRect">
             <a:avLst/>
@@ -34382,7 +34402,7 @@
           <a:p>
             <a:pPr algn="ctr"/>
             <a:r>
-              <a:rPr lang="en-US" sz="2000">
+              <a:rPr lang="en-US" sz="2400">
                 <a:solidFill>
                   <a:schemeClr val="tx1"/>
                 </a:solidFill>
@@ -34395,7 +34415,7 @@
           <a:p>
             <a:pPr algn="ctr"/>
             <a:r>
-              <a:rPr lang="en-US" sz="2000">
+              <a:rPr lang="en-US" sz="2400">
                 <a:solidFill>
                   <a:schemeClr val="tx1"/>
                 </a:solidFill>
@@ -34545,6 +34565,7 @@
             </a:extLst>
           </p:cNvPr>
           <p:cNvCxnSpPr>
+            <a:cxnSpLocks/>
             <a:stCxn id="3" idx="7"/>
             <a:endCxn id="6" idx="1"/>
           </p:cNvCxnSpPr>
@@ -34553,7 +34574,7 @@
         <p:spPr>
           <a:xfrm flipV="1">
             <a:off x="6742578" y="1688374"/>
-            <a:ext cx="1791822" cy="1094048"/>
+            <a:ext cx="1319382" cy="1094048"/>
           </a:xfrm>
           <a:prstGeom prst="line">
             <a:avLst/>
@@ -34593,7 +34614,7 @@
         <p:spPr>
           <a:xfrm>
             <a:off x="6742578" y="4075578"/>
-            <a:ext cx="1791822" cy="1094048"/>
+            <a:ext cx="1319382" cy="1094048"/>
           </a:xfrm>
           <a:prstGeom prst="line">
             <a:avLst/>
@@ -34633,7 +34654,7 @@
         <p:spPr>
           <a:xfrm>
             <a:off x="7010400" y="3429000"/>
-            <a:ext cx="1698172" cy="0"/>
+            <a:ext cx="1225732" cy="0"/>
           </a:xfrm>
           <a:prstGeom prst="line">
             <a:avLst/>
@@ -35369,14 +35390,14 @@
           <a:p>
             <a:pPr algn="ctr"/>
             <a:r>
-              <a:rPr lang="en-US" sz="2000">
+              <a:rPr lang="en-US" sz="2800">
                 <a:solidFill>
                   <a:schemeClr val="tx1"/>
                 </a:solidFill>
                 <a:latin typeface="Times New Roman" panose="02020603050405020304" pitchFamily="18" charset="0"/>
                 <a:cs typeface="Times New Roman" panose="02020603050405020304" pitchFamily="18" charset="0"/>
               </a:rPr>
-              <a:t>Các kiến trúc mạng neural, như ANN, CNN, RNN,…</a:t>
+              <a:t>Các kiến trúc mạng neural như ANN, CNN, RNN,…</a:t>
             </a:r>
           </a:p>
         </p:txBody>
@@ -35503,7 +35524,7 @@
         </p:nvSpPr>
         <p:spPr>
           <a:xfrm>
-            <a:off x="2804160" y="1854200"/>
+            <a:off x="2804160" y="2341880"/>
             <a:ext cx="1828800" cy="1828800"/>
           </a:xfrm>
           <a:prstGeom prst="ellipse">
@@ -35540,7 +35561,7 @@
           <a:p>
             <a:pPr algn="ctr"/>
             <a:r>
-              <a:rPr lang="en-US" sz="2000" b="1">
+              <a:rPr lang="en-US" sz="2800" b="1">
                 <a:solidFill>
                   <a:schemeClr val="tx1"/>
                 </a:solidFill>
@@ -35566,7 +35587,7 @@
         </p:nvSpPr>
         <p:spPr>
           <a:xfrm>
-            <a:off x="6096000" y="4155440"/>
+            <a:off x="6096000" y="4643120"/>
             <a:ext cx="2956560" cy="990600"/>
           </a:xfrm>
           <a:prstGeom prst="roundRect">
@@ -35603,7 +35624,7 @@
           <a:p>
             <a:pPr algn="ctr"/>
             <a:r>
-              <a:rPr lang="en-US" sz="2000">
+              <a:rPr lang="en-US" sz="2800">
                 <a:solidFill>
                   <a:schemeClr val="tx1"/>
                 </a:solidFill>
@@ -35629,7 +35650,7 @@
         </p:nvSpPr>
         <p:spPr>
           <a:xfrm>
-            <a:off x="6096000" y="1678940"/>
+            <a:off x="6096000" y="2166620"/>
             <a:ext cx="2956560" cy="990600"/>
           </a:xfrm>
           <a:prstGeom prst="roundRect">
@@ -35666,7 +35687,7 @@
           <a:p>
             <a:pPr algn="ctr"/>
             <a:r>
-              <a:rPr lang="en-US" sz="2000">
+              <a:rPr lang="en-US" sz="2800">
                 <a:solidFill>
                   <a:schemeClr val="tx1"/>
                 </a:solidFill>
@@ -35692,7 +35713,7 @@
         </p:nvSpPr>
         <p:spPr>
           <a:xfrm>
-            <a:off x="6096000" y="2917190"/>
+            <a:off x="6096000" y="3404870"/>
             <a:ext cx="2956560" cy="990600"/>
           </a:xfrm>
           <a:prstGeom prst="roundRect">
@@ -35729,7 +35750,7 @@
           <a:p>
             <a:pPr algn="ctr"/>
             <a:r>
-              <a:rPr lang="en-US" sz="2000">
+              <a:rPr lang="en-US" sz="2800">
                 <a:solidFill>
                   <a:schemeClr val="tx1"/>
                 </a:solidFill>
@@ -35755,7 +35776,7 @@
         </p:nvSpPr>
         <p:spPr>
           <a:xfrm>
-            <a:off x="6096000" y="440690"/>
+            <a:off x="6096000" y="928370"/>
             <a:ext cx="2956560" cy="990600"/>
           </a:xfrm>
           <a:prstGeom prst="roundRect">
@@ -35792,7 +35813,7 @@
           <a:p>
             <a:pPr algn="ctr"/>
             <a:r>
-              <a:rPr lang="en-US" sz="2000">
+              <a:rPr lang="en-US" sz="2800">
                 <a:solidFill>
                   <a:schemeClr val="tx1"/>
                 </a:solidFill>
@@ -35821,7 +35842,7 @@
         </p:nvCxnSpPr>
         <p:spPr>
           <a:xfrm flipV="1">
-            <a:off x="4632960" y="935990"/>
+            <a:off x="4632960" y="1423670"/>
             <a:ext cx="1463040" cy="1832610"/>
           </a:xfrm>
           <a:prstGeom prst="bentConnector3">
@@ -35863,7 +35884,7 @@
         </p:nvCxnSpPr>
         <p:spPr>
           <a:xfrm flipV="1">
-            <a:off x="4632960" y="2174240"/>
+            <a:off x="4632960" y="2661920"/>
             <a:ext cx="1463040" cy="594360"/>
           </a:xfrm>
           <a:prstGeom prst="bentConnector3">
@@ -35905,7 +35926,7 @@
         </p:nvCxnSpPr>
         <p:spPr>
           <a:xfrm>
-            <a:off x="4632960" y="2768600"/>
+            <a:off x="4632960" y="3256280"/>
             <a:ext cx="1463040" cy="643890"/>
           </a:xfrm>
           <a:prstGeom prst="bentConnector3">
@@ -35947,7 +35968,7 @@
         </p:nvCxnSpPr>
         <p:spPr>
           <a:xfrm>
-            <a:off x="4632960" y="2768600"/>
+            <a:off x="4632960" y="3256280"/>
             <a:ext cx="1463040" cy="1882140"/>
           </a:xfrm>
           <a:prstGeom prst="bentConnector3">

--- a/documents/hinh_ve_trong_cao_cao_do_an.pptx
+++ b/documents/hinh_ve_trong_cao_cao_do_an.pptx
@@ -5,7 +5,7 @@
     <p:sldMasterId id="2147483648" r:id="rId1"/>
   </p:sldMasterIdLst>
   <p:notesMasterIdLst>
-    <p:notesMasterId r:id="rId34"/>
+    <p:notesMasterId r:id="rId38"/>
   </p:notesMasterIdLst>
   <p:sldIdLst>
     <p:sldId id="263" r:id="rId2"/>
@@ -39,7 +39,11 @@
     <p:sldId id="277" r:id="rId30"/>
     <p:sldId id="280" r:id="rId31"/>
     <p:sldId id="279" r:id="rId32"/>
-    <p:sldId id="270" r:id="rId33"/>
+    <p:sldId id="294" r:id="rId33"/>
+    <p:sldId id="295" r:id="rId34"/>
+    <p:sldId id="292" r:id="rId35"/>
+    <p:sldId id="293" r:id="rId36"/>
+    <p:sldId id="270" r:id="rId37"/>
   </p:sldIdLst>
   <p:sldSz cx="12192000" cy="6858000"/>
   <p:notesSz cx="6858000" cy="9144000"/>
@@ -228,7 +232,7 @@
           <a:p>
             <a:fld id="{1699B688-3183-4F5A-8B47-70F70E2DF15B}" type="datetimeFigureOut">
               <a:rPr lang="en-US" smtClean="0"/>
-              <a:t>5/29/2025</a:t>
+              <a:t>5/30/2025</a:t>
             </a:fld>
             <a:endParaRPr lang="en-US"/>
           </a:p>
@@ -2564,10 +2568,9 @@
           <a:lstStyle/>
           <a:p>
             <a:r>
-              <a:rPr lang="vi-VN"/>
-              <a:t>Style</a:t>
-            </a:r>
-            <a:endParaRPr lang="en-US"/>
+              <a:rPr lang="en-US"/>
+              <a:t>Bieu do chuc nang quan ly hanh vi nguoi dung</a:t>
+            </a:r>
           </a:p>
         </p:txBody>
       </p:sp>
@@ -2589,6 +2592,355 @@
             <a:fld id="{959F4E64-33AD-4E03-A94E-822473CE3B48}" type="slidenum">
               <a:rPr lang="en-US" smtClean="0"/>
               <a:t>32</a:t>
+            </a:fld>
+            <a:endParaRPr lang="en-US"/>
+          </a:p>
+        </p:txBody>
+      </p:sp>
+    </p:spTree>
+    <p:extLst>
+      <p:ext uri="{BB962C8B-B14F-4D97-AF65-F5344CB8AC3E}">
+        <p14:creationId xmlns:p14="http://schemas.microsoft.com/office/powerpoint/2010/main" val="2235046049"/>
+      </p:ext>
+    </p:extLst>
+  </p:cSld>
+  <p:clrMapOvr>
+    <a:masterClrMapping/>
+  </p:clrMapOvr>
+</p:notes>
+</file>
+
+<file path=ppt/notesSlides/notesSlide31.xml><?xml version="1.0" encoding="utf-8"?>
+<p:notes xmlns:a="http://schemas.openxmlformats.org/drawingml/2006/main" xmlns:r="http://schemas.openxmlformats.org/officeDocument/2006/relationships" xmlns:p="http://schemas.openxmlformats.org/presentationml/2006/main">
+  <p:cSld>
+    <p:spTree>
+      <p:nvGrpSpPr>
+        <p:cNvPr id="1" name=""/>
+        <p:cNvGrpSpPr/>
+        <p:nvPr/>
+      </p:nvGrpSpPr>
+      <p:grpSpPr>
+        <a:xfrm>
+          <a:off x="0" y="0"/>
+          <a:ext cx="0" cy="0"/>
+          <a:chOff x="0" y="0"/>
+          <a:chExt cx="0" cy="0"/>
+        </a:xfrm>
+      </p:grpSpPr>
+      <p:sp>
+        <p:nvSpPr>
+          <p:cNvPr id="2" name="Slide Image Placeholder 1"/>
+          <p:cNvSpPr>
+            <a:spLocks noGrp="1" noRot="1" noChangeAspect="1"/>
+          </p:cNvSpPr>
+          <p:nvPr>
+            <p:ph type="sldImg"/>
+          </p:nvPr>
+        </p:nvSpPr>
+        <p:spPr/>
+      </p:sp>
+      <p:sp>
+        <p:nvSpPr>
+          <p:cNvPr id="3" name="Notes Placeholder 2"/>
+          <p:cNvSpPr>
+            <a:spLocks noGrp="1"/>
+          </p:cNvSpPr>
+          <p:nvPr>
+            <p:ph type="body" idx="1"/>
+          </p:nvPr>
+        </p:nvSpPr>
+        <p:spPr/>
+        <p:txBody>
+          <a:bodyPr/>
+          <a:lstStyle/>
+          <a:p>
+            <a:r>
+              <a:rPr lang="en-US"/>
+              <a:t>Cau truc prompt khoi tao starter</a:t>
+            </a:r>
+          </a:p>
+        </p:txBody>
+      </p:sp>
+      <p:sp>
+        <p:nvSpPr>
+          <p:cNvPr id="4" name="Slide Number Placeholder 3"/>
+          <p:cNvSpPr>
+            <a:spLocks noGrp="1"/>
+          </p:cNvSpPr>
+          <p:nvPr>
+            <p:ph type="sldNum" sz="quarter" idx="5"/>
+          </p:nvPr>
+        </p:nvSpPr>
+        <p:spPr/>
+        <p:txBody>
+          <a:bodyPr/>
+          <a:lstStyle/>
+          <a:p>
+            <a:fld id="{959F4E64-33AD-4E03-A94E-822473CE3B48}" type="slidenum">
+              <a:rPr lang="en-US" smtClean="0"/>
+              <a:t>33</a:t>
+            </a:fld>
+            <a:endParaRPr lang="en-US"/>
+          </a:p>
+        </p:txBody>
+      </p:sp>
+    </p:spTree>
+    <p:extLst>
+      <p:ext uri="{BB962C8B-B14F-4D97-AF65-F5344CB8AC3E}">
+        <p14:creationId xmlns:p14="http://schemas.microsoft.com/office/powerpoint/2010/main" val="2281483521"/>
+      </p:ext>
+    </p:extLst>
+  </p:cSld>
+  <p:clrMapOvr>
+    <a:masterClrMapping/>
+  </p:clrMapOvr>
+</p:notes>
+</file>
+
+<file path=ppt/notesSlides/notesSlide32.xml><?xml version="1.0" encoding="utf-8"?>
+<p:notes xmlns:a="http://schemas.openxmlformats.org/drawingml/2006/main" xmlns:r="http://schemas.openxmlformats.org/officeDocument/2006/relationships" xmlns:p="http://schemas.openxmlformats.org/presentationml/2006/main">
+  <p:cSld>
+    <p:spTree>
+      <p:nvGrpSpPr>
+        <p:cNvPr id="1" name=""/>
+        <p:cNvGrpSpPr/>
+        <p:nvPr/>
+      </p:nvGrpSpPr>
+      <p:grpSpPr>
+        <a:xfrm>
+          <a:off x="0" y="0"/>
+          <a:ext cx="0" cy="0"/>
+          <a:chOff x="0" y="0"/>
+          <a:chExt cx="0" cy="0"/>
+        </a:xfrm>
+      </p:grpSpPr>
+      <p:sp>
+        <p:nvSpPr>
+          <p:cNvPr id="2" name="Slide Image Placeholder 1"/>
+          <p:cNvSpPr>
+            <a:spLocks noGrp="1" noRot="1" noChangeAspect="1"/>
+          </p:cNvSpPr>
+          <p:nvPr>
+            <p:ph type="sldImg"/>
+          </p:nvPr>
+        </p:nvSpPr>
+        <p:spPr/>
+      </p:sp>
+      <p:sp>
+        <p:nvSpPr>
+          <p:cNvPr id="3" name="Notes Placeholder 2"/>
+          <p:cNvSpPr>
+            <a:spLocks noGrp="1"/>
+          </p:cNvSpPr>
+          <p:nvPr>
+            <p:ph type="body" idx="1"/>
+          </p:nvPr>
+        </p:nvSpPr>
+        <p:spPr/>
+        <p:txBody>
+          <a:bodyPr/>
+          <a:lstStyle/>
+          <a:p>
+            <a:r>
+              <a:rPr lang="en-US"/>
+              <a:t>Cau truc prompt tro chuyen voi nguoi dung</a:t>
+            </a:r>
+          </a:p>
+        </p:txBody>
+      </p:sp>
+      <p:sp>
+        <p:nvSpPr>
+          <p:cNvPr id="4" name="Slide Number Placeholder 3"/>
+          <p:cNvSpPr>
+            <a:spLocks noGrp="1"/>
+          </p:cNvSpPr>
+          <p:nvPr>
+            <p:ph type="sldNum" sz="quarter" idx="5"/>
+          </p:nvPr>
+        </p:nvSpPr>
+        <p:spPr/>
+        <p:txBody>
+          <a:bodyPr/>
+          <a:lstStyle/>
+          <a:p>
+            <a:fld id="{959F4E64-33AD-4E03-A94E-822473CE3B48}" type="slidenum">
+              <a:rPr lang="en-US" smtClean="0"/>
+              <a:t>34</a:t>
+            </a:fld>
+            <a:endParaRPr lang="en-US"/>
+          </a:p>
+        </p:txBody>
+      </p:sp>
+    </p:spTree>
+    <p:extLst>
+      <p:ext uri="{BB962C8B-B14F-4D97-AF65-F5344CB8AC3E}">
+        <p14:creationId xmlns:p14="http://schemas.microsoft.com/office/powerpoint/2010/main" val="2988671580"/>
+      </p:ext>
+    </p:extLst>
+  </p:cSld>
+  <p:clrMapOvr>
+    <a:masterClrMapping/>
+  </p:clrMapOvr>
+</p:notes>
+</file>
+
+<file path=ppt/notesSlides/notesSlide33.xml><?xml version="1.0" encoding="utf-8"?>
+<p:notes xmlns:a="http://schemas.openxmlformats.org/drawingml/2006/main" xmlns:r="http://schemas.openxmlformats.org/officeDocument/2006/relationships" xmlns:p="http://schemas.openxmlformats.org/presentationml/2006/main">
+  <p:cSld>
+    <p:spTree>
+      <p:nvGrpSpPr>
+        <p:cNvPr id="1" name=""/>
+        <p:cNvGrpSpPr/>
+        <p:nvPr/>
+      </p:nvGrpSpPr>
+      <p:grpSpPr>
+        <a:xfrm>
+          <a:off x="0" y="0"/>
+          <a:ext cx="0" cy="0"/>
+          <a:chOff x="0" y="0"/>
+          <a:chExt cx="0" cy="0"/>
+        </a:xfrm>
+      </p:grpSpPr>
+      <p:sp>
+        <p:nvSpPr>
+          <p:cNvPr id="2" name="Slide Image Placeholder 1"/>
+          <p:cNvSpPr>
+            <a:spLocks noGrp="1" noRot="1" noChangeAspect="1"/>
+          </p:cNvSpPr>
+          <p:nvPr>
+            <p:ph type="sldImg"/>
+          </p:nvPr>
+        </p:nvSpPr>
+        <p:spPr/>
+      </p:sp>
+      <p:sp>
+        <p:nvSpPr>
+          <p:cNvPr id="3" name="Notes Placeholder 2"/>
+          <p:cNvSpPr>
+            <a:spLocks noGrp="1"/>
+          </p:cNvSpPr>
+          <p:nvPr>
+            <p:ph type="body" idx="1"/>
+          </p:nvPr>
+        </p:nvSpPr>
+        <p:spPr/>
+        <p:txBody>
+          <a:bodyPr/>
+          <a:lstStyle/>
+          <a:p>
+            <a:r>
+              <a:rPr lang="en-US"/>
+              <a:t>Cau truc prompt trich xuat thong tin</a:t>
+            </a:r>
+          </a:p>
+        </p:txBody>
+      </p:sp>
+      <p:sp>
+        <p:nvSpPr>
+          <p:cNvPr id="4" name="Slide Number Placeholder 3"/>
+          <p:cNvSpPr>
+            <a:spLocks noGrp="1"/>
+          </p:cNvSpPr>
+          <p:nvPr>
+            <p:ph type="sldNum" sz="quarter" idx="5"/>
+          </p:nvPr>
+        </p:nvSpPr>
+        <p:spPr/>
+        <p:txBody>
+          <a:bodyPr/>
+          <a:lstStyle/>
+          <a:p>
+            <a:fld id="{959F4E64-33AD-4E03-A94E-822473CE3B48}" type="slidenum">
+              <a:rPr lang="en-US" smtClean="0"/>
+              <a:t>35</a:t>
+            </a:fld>
+            <a:endParaRPr lang="en-US"/>
+          </a:p>
+        </p:txBody>
+      </p:sp>
+    </p:spTree>
+    <p:extLst>
+      <p:ext uri="{BB962C8B-B14F-4D97-AF65-F5344CB8AC3E}">
+        <p14:creationId xmlns:p14="http://schemas.microsoft.com/office/powerpoint/2010/main" val="819052166"/>
+      </p:ext>
+    </p:extLst>
+  </p:cSld>
+  <p:clrMapOvr>
+    <a:masterClrMapping/>
+  </p:clrMapOvr>
+</p:notes>
+</file>
+
+<file path=ppt/notesSlides/notesSlide34.xml><?xml version="1.0" encoding="utf-8"?>
+<p:notes xmlns:a="http://schemas.openxmlformats.org/drawingml/2006/main" xmlns:r="http://schemas.openxmlformats.org/officeDocument/2006/relationships" xmlns:p="http://schemas.openxmlformats.org/presentationml/2006/main">
+  <p:cSld>
+    <p:spTree>
+      <p:nvGrpSpPr>
+        <p:cNvPr id="1" name=""/>
+        <p:cNvGrpSpPr/>
+        <p:nvPr/>
+      </p:nvGrpSpPr>
+      <p:grpSpPr>
+        <a:xfrm>
+          <a:off x="0" y="0"/>
+          <a:ext cx="0" cy="0"/>
+          <a:chOff x="0" y="0"/>
+          <a:chExt cx="0" cy="0"/>
+        </a:xfrm>
+      </p:grpSpPr>
+      <p:sp>
+        <p:nvSpPr>
+          <p:cNvPr id="2" name="Slide Image Placeholder 1"/>
+          <p:cNvSpPr>
+            <a:spLocks noGrp="1" noRot="1" noChangeAspect="1"/>
+          </p:cNvSpPr>
+          <p:nvPr>
+            <p:ph type="sldImg"/>
+          </p:nvPr>
+        </p:nvSpPr>
+        <p:spPr/>
+      </p:sp>
+      <p:sp>
+        <p:nvSpPr>
+          <p:cNvPr id="3" name="Notes Placeholder 2"/>
+          <p:cNvSpPr>
+            <a:spLocks noGrp="1"/>
+          </p:cNvSpPr>
+          <p:nvPr>
+            <p:ph type="body" idx="1"/>
+          </p:nvPr>
+        </p:nvSpPr>
+        <p:spPr/>
+        <p:txBody>
+          <a:bodyPr/>
+          <a:lstStyle/>
+          <a:p>
+            <a:r>
+              <a:rPr lang="vi-VN"/>
+              <a:t>Style</a:t>
+            </a:r>
+            <a:endParaRPr lang="en-US"/>
+          </a:p>
+        </p:txBody>
+      </p:sp>
+      <p:sp>
+        <p:nvSpPr>
+          <p:cNvPr id="4" name="Slide Number Placeholder 3"/>
+          <p:cNvSpPr>
+            <a:spLocks noGrp="1"/>
+          </p:cNvSpPr>
+          <p:nvPr>
+            <p:ph type="sldNum" sz="quarter" idx="5"/>
+          </p:nvPr>
+        </p:nvSpPr>
+        <p:spPr/>
+        <p:txBody>
+          <a:bodyPr/>
+          <a:lstStyle/>
+          <a:p>
+            <a:fld id="{959F4E64-33AD-4E03-A94E-822473CE3B48}" type="slidenum">
+              <a:rPr lang="en-US" smtClean="0"/>
+              <a:t>36</a:t>
             </a:fld>
             <a:endParaRPr lang="en-US"/>
           </a:p>
@@ -3276,7 +3628,7 @@
           <a:p>
             <a:fld id="{1274BF1E-CB95-4284-9B4D-720351FD5384}" type="datetimeFigureOut">
               <a:rPr lang="en-US" smtClean="0"/>
-              <a:t>5/29/2025</a:t>
+              <a:t>5/30/2025</a:t>
             </a:fld>
             <a:endParaRPr lang="en-US"/>
           </a:p>
@@ -3474,7 +3826,7 @@
           <a:p>
             <a:fld id="{1274BF1E-CB95-4284-9B4D-720351FD5384}" type="datetimeFigureOut">
               <a:rPr lang="en-US" smtClean="0"/>
-              <a:t>5/29/2025</a:t>
+              <a:t>5/30/2025</a:t>
             </a:fld>
             <a:endParaRPr lang="en-US"/>
           </a:p>
@@ -3682,7 +4034,7 @@
           <a:p>
             <a:fld id="{1274BF1E-CB95-4284-9B4D-720351FD5384}" type="datetimeFigureOut">
               <a:rPr lang="en-US" smtClean="0"/>
-              <a:t>5/29/2025</a:t>
+              <a:t>5/30/2025</a:t>
             </a:fld>
             <a:endParaRPr lang="en-US"/>
           </a:p>
@@ -3880,7 +4232,7 @@
           <a:p>
             <a:fld id="{1274BF1E-CB95-4284-9B4D-720351FD5384}" type="datetimeFigureOut">
               <a:rPr lang="en-US" smtClean="0"/>
-              <a:t>5/29/2025</a:t>
+              <a:t>5/30/2025</a:t>
             </a:fld>
             <a:endParaRPr lang="en-US"/>
           </a:p>
@@ -4155,7 +4507,7 @@
           <a:p>
             <a:fld id="{1274BF1E-CB95-4284-9B4D-720351FD5384}" type="datetimeFigureOut">
               <a:rPr lang="en-US" smtClean="0"/>
-              <a:t>5/29/2025</a:t>
+              <a:t>5/30/2025</a:t>
             </a:fld>
             <a:endParaRPr lang="en-US"/>
           </a:p>
@@ -4420,7 +4772,7 @@
           <a:p>
             <a:fld id="{1274BF1E-CB95-4284-9B4D-720351FD5384}" type="datetimeFigureOut">
               <a:rPr lang="en-US" smtClean="0"/>
-              <a:t>5/29/2025</a:t>
+              <a:t>5/30/2025</a:t>
             </a:fld>
             <a:endParaRPr lang="en-US"/>
           </a:p>
@@ -4832,7 +5184,7 @@
           <a:p>
             <a:fld id="{1274BF1E-CB95-4284-9B4D-720351FD5384}" type="datetimeFigureOut">
               <a:rPr lang="en-US" smtClean="0"/>
-              <a:t>5/29/2025</a:t>
+              <a:t>5/30/2025</a:t>
             </a:fld>
             <a:endParaRPr lang="en-US"/>
           </a:p>
@@ -4973,7 +5325,7 @@
           <a:p>
             <a:fld id="{1274BF1E-CB95-4284-9B4D-720351FD5384}" type="datetimeFigureOut">
               <a:rPr lang="en-US" smtClean="0"/>
-              <a:t>5/29/2025</a:t>
+              <a:t>5/30/2025</a:t>
             </a:fld>
             <a:endParaRPr lang="en-US"/>
           </a:p>
@@ -5086,7 +5438,7 @@
           <a:p>
             <a:fld id="{1274BF1E-CB95-4284-9B4D-720351FD5384}" type="datetimeFigureOut">
               <a:rPr lang="en-US" smtClean="0"/>
-              <a:t>5/29/2025</a:t>
+              <a:t>5/30/2025</a:t>
             </a:fld>
             <a:endParaRPr lang="en-US"/>
           </a:p>
@@ -5397,7 +5749,7 @@
           <a:p>
             <a:fld id="{1274BF1E-CB95-4284-9B4D-720351FD5384}" type="datetimeFigureOut">
               <a:rPr lang="en-US" smtClean="0"/>
-              <a:t>5/29/2025</a:t>
+              <a:t>5/30/2025</a:t>
             </a:fld>
             <a:endParaRPr lang="en-US"/>
           </a:p>
@@ -5685,7 +6037,7 @@
           <a:p>
             <a:fld id="{1274BF1E-CB95-4284-9B4D-720351FD5384}" type="datetimeFigureOut">
               <a:rPr lang="en-US" smtClean="0"/>
-              <a:t>5/29/2025</a:t>
+              <a:t>5/30/2025</a:t>
             </a:fld>
             <a:endParaRPr lang="en-US"/>
           </a:p>
@@ -5926,7 +6278,7 @@
           <a:p>
             <a:fld id="{1274BF1E-CB95-4284-9B4D-720351FD5384}" type="datetimeFigureOut">
               <a:rPr lang="en-US" smtClean="0"/>
-              <a:t>5/29/2025</a:t>
+              <a:t>5/30/2025</a:t>
             </a:fld>
             <a:endParaRPr lang="en-US"/>
           </a:p>
@@ -33320,6 +33672,2518 @@
           <a:chExt cx="0" cy="0"/>
         </a:xfrm>
       </p:grpSpPr>
+      <p:sp>
+        <p:nvSpPr>
+          <p:cNvPr id="2" name="Oval 1">
+            <a:extLst>
+              <a:ext uri="{FF2B5EF4-FFF2-40B4-BE49-F238E27FC236}">
+                <a16:creationId xmlns:a16="http://schemas.microsoft.com/office/drawing/2014/main" id="{71B2C4F9-1C0F-1CF9-481D-E75171FFEB29}"/>
+              </a:ext>
+            </a:extLst>
+          </p:cNvPr>
+          <p:cNvSpPr/>
+          <p:nvPr/>
+        </p:nvSpPr>
+        <p:spPr>
+          <a:xfrm>
+            <a:off x="1327694" y="1014002"/>
+            <a:ext cx="1844040" cy="777240"/>
+          </a:xfrm>
+          <a:prstGeom prst="ellipse">
+            <a:avLst/>
+          </a:prstGeom>
+          <a:solidFill>
+            <a:schemeClr val="bg2"/>
+          </a:solidFill>
+          <a:ln>
+            <a:solidFill>
+              <a:schemeClr val="tx1"/>
+            </a:solidFill>
+          </a:ln>
+        </p:spPr>
+        <p:style>
+          <a:lnRef idx="2">
+            <a:schemeClr val="dk1"/>
+          </a:lnRef>
+          <a:fillRef idx="1">
+            <a:schemeClr val="lt1"/>
+          </a:fillRef>
+          <a:effectRef idx="0">
+            <a:schemeClr val="dk1"/>
+          </a:effectRef>
+          <a:fontRef idx="minor">
+            <a:schemeClr val="dk1"/>
+          </a:fontRef>
+        </p:style>
+        <p:txBody>
+          <a:bodyPr rtlCol="0" anchor="ctr"/>
+          <a:lstStyle/>
+          <a:p>
+            <a:pPr algn="ctr"/>
+            <a:r>
+              <a:rPr lang="en-US" sz="2400">
+                <a:solidFill>
+                  <a:schemeClr val="tx1"/>
+                </a:solidFill>
+                <a:latin typeface="Times New Roman" panose="02020603050405020304" pitchFamily="18" charset="0"/>
+                <a:cs typeface="Times New Roman" panose="02020603050405020304" pitchFamily="18" charset="0"/>
+              </a:rPr>
+              <a:t>Bắt đầu</a:t>
+            </a:r>
+          </a:p>
+        </p:txBody>
+      </p:sp>
+      <p:sp>
+        <p:nvSpPr>
+          <p:cNvPr id="3" name="Rectangle: Rounded Corners 2">
+            <a:extLst>
+              <a:ext uri="{FF2B5EF4-FFF2-40B4-BE49-F238E27FC236}">
+                <a16:creationId xmlns:a16="http://schemas.microsoft.com/office/drawing/2014/main" id="{E9423A58-5224-8B0E-F5F4-8BEB42C3EAEF}"/>
+              </a:ext>
+            </a:extLst>
+          </p:cNvPr>
+          <p:cNvSpPr/>
+          <p:nvPr/>
+        </p:nvSpPr>
+        <p:spPr>
+          <a:xfrm>
+            <a:off x="2794000" y="2450434"/>
+            <a:ext cx="3302000" cy="924618"/>
+          </a:xfrm>
+          <a:prstGeom prst="roundRect">
+            <a:avLst/>
+          </a:prstGeom>
+          <a:solidFill>
+            <a:schemeClr val="bg2"/>
+          </a:solidFill>
+          <a:ln>
+            <a:solidFill>
+              <a:schemeClr val="tx1"/>
+            </a:solidFill>
+          </a:ln>
+        </p:spPr>
+        <p:style>
+          <a:lnRef idx="2">
+            <a:schemeClr val="accent1">
+              <a:shade val="15000"/>
+            </a:schemeClr>
+          </a:lnRef>
+          <a:fillRef idx="1">
+            <a:schemeClr val="accent1"/>
+          </a:fillRef>
+          <a:effectRef idx="0">
+            <a:schemeClr val="accent1"/>
+          </a:effectRef>
+          <a:fontRef idx="minor">
+            <a:schemeClr val="lt1"/>
+          </a:fontRef>
+        </p:style>
+        <p:txBody>
+          <a:bodyPr rtlCol="0" anchor="ctr"/>
+          <a:lstStyle/>
+          <a:p>
+            <a:pPr algn="ctr"/>
+            <a:r>
+              <a:rPr lang="en-US" sz="2000">
+                <a:solidFill>
+                  <a:schemeClr val="tx1"/>
+                </a:solidFill>
+                <a:latin typeface="Times New Roman" panose="02020603050405020304" pitchFamily="18" charset="0"/>
+                <a:cs typeface="Times New Roman" panose="02020603050405020304" pitchFamily="18" charset="0"/>
+              </a:rPr>
+              <a:t>Người dùng thực hiện</a:t>
+            </a:r>
+          </a:p>
+          <a:p>
+            <a:pPr algn="ctr"/>
+            <a:r>
+              <a:rPr lang="en-US" sz="2000">
+                <a:solidFill>
+                  <a:schemeClr val="tx1"/>
+                </a:solidFill>
+                <a:latin typeface="Times New Roman" panose="02020603050405020304" pitchFamily="18" charset="0"/>
+                <a:cs typeface="Times New Roman" panose="02020603050405020304" pitchFamily="18" charset="0"/>
+              </a:rPr>
+              <a:t>một hành vi đánh giá</a:t>
+            </a:r>
+          </a:p>
+        </p:txBody>
+      </p:sp>
+      <p:sp>
+        <p:nvSpPr>
+          <p:cNvPr id="4" name="Rectangle: Rounded Corners 3">
+            <a:extLst>
+              <a:ext uri="{FF2B5EF4-FFF2-40B4-BE49-F238E27FC236}">
+                <a16:creationId xmlns:a16="http://schemas.microsoft.com/office/drawing/2014/main" id="{62133B71-7D08-E4AD-3AB4-C3CF9EF83B1A}"/>
+              </a:ext>
+            </a:extLst>
+          </p:cNvPr>
+          <p:cNvSpPr/>
+          <p:nvPr/>
+        </p:nvSpPr>
+        <p:spPr>
+          <a:xfrm>
+            <a:off x="6096000" y="3710882"/>
+            <a:ext cx="3302000" cy="924618"/>
+          </a:xfrm>
+          <a:prstGeom prst="roundRect">
+            <a:avLst/>
+          </a:prstGeom>
+          <a:solidFill>
+            <a:schemeClr val="bg2"/>
+          </a:solidFill>
+          <a:ln>
+            <a:solidFill>
+              <a:schemeClr val="tx1"/>
+            </a:solidFill>
+          </a:ln>
+        </p:spPr>
+        <p:style>
+          <a:lnRef idx="2">
+            <a:schemeClr val="accent1">
+              <a:shade val="15000"/>
+            </a:schemeClr>
+          </a:lnRef>
+          <a:fillRef idx="1">
+            <a:schemeClr val="accent1"/>
+          </a:fillRef>
+          <a:effectRef idx="0">
+            <a:schemeClr val="accent1"/>
+          </a:effectRef>
+          <a:fontRef idx="minor">
+            <a:schemeClr val="lt1"/>
+          </a:fontRef>
+        </p:style>
+        <p:txBody>
+          <a:bodyPr rtlCol="0" anchor="ctr"/>
+          <a:lstStyle/>
+          <a:p>
+            <a:pPr algn="ctr"/>
+            <a:r>
+              <a:rPr lang="en-US" sz="2000">
+                <a:solidFill>
+                  <a:schemeClr val="tx1"/>
+                </a:solidFill>
+                <a:latin typeface="Times New Roman" panose="02020603050405020304" pitchFamily="18" charset="0"/>
+                <a:cs typeface="Times New Roman" panose="02020603050405020304" pitchFamily="18" charset="0"/>
+              </a:rPr>
+              <a:t>Hệ thống cập nhật hành vi</a:t>
+            </a:r>
+          </a:p>
+          <a:p>
+            <a:pPr algn="ctr"/>
+            <a:r>
+              <a:rPr lang="en-US" sz="2000">
+                <a:solidFill>
+                  <a:schemeClr val="tx1"/>
+                </a:solidFill>
+                <a:latin typeface="Times New Roman" panose="02020603050405020304" pitchFamily="18" charset="0"/>
+                <a:cs typeface="Times New Roman" panose="02020603050405020304" pitchFamily="18" charset="0"/>
+              </a:rPr>
+              <a:t>của người dùng vào CSDL</a:t>
+            </a:r>
+          </a:p>
+        </p:txBody>
+      </p:sp>
+      <p:sp>
+        <p:nvSpPr>
+          <p:cNvPr id="6" name="Oval 5">
+            <a:extLst>
+              <a:ext uri="{FF2B5EF4-FFF2-40B4-BE49-F238E27FC236}">
+                <a16:creationId xmlns:a16="http://schemas.microsoft.com/office/drawing/2014/main" id="{41E78B99-0B43-8090-58DE-2DC7F0DAF15C}"/>
+              </a:ext>
+            </a:extLst>
+          </p:cNvPr>
+          <p:cNvSpPr/>
+          <p:nvPr/>
+        </p:nvSpPr>
+        <p:spPr>
+          <a:xfrm>
+            <a:off x="9042400" y="4969096"/>
+            <a:ext cx="1844040" cy="777240"/>
+          </a:xfrm>
+          <a:prstGeom prst="ellipse">
+            <a:avLst/>
+          </a:prstGeom>
+          <a:solidFill>
+            <a:schemeClr val="bg2"/>
+          </a:solidFill>
+          <a:ln>
+            <a:solidFill>
+              <a:schemeClr val="tx1"/>
+            </a:solidFill>
+          </a:ln>
+        </p:spPr>
+        <p:style>
+          <a:lnRef idx="2">
+            <a:schemeClr val="dk1"/>
+          </a:lnRef>
+          <a:fillRef idx="1">
+            <a:schemeClr val="lt1"/>
+          </a:fillRef>
+          <a:effectRef idx="0">
+            <a:schemeClr val="dk1"/>
+          </a:effectRef>
+          <a:fontRef idx="minor">
+            <a:schemeClr val="dk1"/>
+          </a:fontRef>
+        </p:style>
+        <p:txBody>
+          <a:bodyPr rtlCol="0" anchor="ctr"/>
+          <a:lstStyle/>
+          <a:p>
+            <a:pPr algn="ctr"/>
+            <a:r>
+              <a:rPr lang="en-US" sz="2400">
+                <a:solidFill>
+                  <a:schemeClr val="tx1"/>
+                </a:solidFill>
+                <a:latin typeface="Times New Roman" panose="02020603050405020304" pitchFamily="18" charset="0"/>
+                <a:cs typeface="Times New Roman" panose="02020603050405020304" pitchFamily="18" charset="0"/>
+              </a:rPr>
+              <a:t>Kết thúc</a:t>
+            </a:r>
+          </a:p>
+        </p:txBody>
+      </p:sp>
+      <p:sp>
+        <p:nvSpPr>
+          <p:cNvPr id="18" name="TextBox 17">
+            <a:extLst>
+              <a:ext uri="{FF2B5EF4-FFF2-40B4-BE49-F238E27FC236}">
+                <a16:creationId xmlns:a16="http://schemas.microsoft.com/office/drawing/2014/main" id="{350D8F2E-A5EA-2C12-2109-C38A249237E7}"/>
+              </a:ext>
+            </a:extLst>
+          </p:cNvPr>
+          <p:cNvSpPr txBox="1"/>
+          <p:nvPr/>
+        </p:nvSpPr>
+        <p:spPr>
+          <a:xfrm>
+            <a:off x="3171734" y="1002512"/>
+            <a:ext cx="482824" cy="400110"/>
+          </a:xfrm>
+          <a:prstGeom prst="rect">
+            <a:avLst/>
+          </a:prstGeom>
+          <a:noFill/>
+        </p:spPr>
+        <p:txBody>
+          <a:bodyPr wrap="none" rtlCol="0">
+            <a:spAutoFit/>
+          </a:bodyPr>
+          <a:lstStyle/>
+          <a:p>
+            <a:r>
+              <a:rPr lang="en-US" sz="2000">
+                <a:latin typeface="Times New Roman" panose="02020603050405020304" pitchFamily="18" charset="0"/>
+                <a:cs typeface="Times New Roman" panose="02020603050405020304" pitchFamily="18" charset="0"/>
+              </a:rPr>
+              <a:t>(1)</a:t>
+            </a:r>
+          </a:p>
+        </p:txBody>
+      </p:sp>
+      <p:sp>
+        <p:nvSpPr>
+          <p:cNvPr id="19" name="TextBox 18">
+            <a:extLst>
+              <a:ext uri="{FF2B5EF4-FFF2-40B4-BE49-F238E27FC236}">
+                <a16:creationId xmlns:a16="http://schemas.microsoft.com/office/drawing/2014/main" id="{A541460D-3078-ACE9-FC0C-77F71E274E2D}"/>
+              </a:ext>
+            </a:extLst>
+          </p:cNvPr>
+          <p:cNvSpPr txBox="1"/>
+          <p:nvPr/>
+        </p:nvSpPr>
+        <p:spPr>
+          <a:xfrm>
+            <a:off x="6096000" y="2512633"/>
+            <a:ext cx="482824" cy="400110"/>
+          </a:xfrm>
+          <a:prstGeom prst="rect">
+            <a:avLst/>
+          </a:prstGeom>
+          <a:noFill/>
+        </p:spPr>
+        <p:txBody>
+          <a:bodyPr wrap="none" rtlCol="0">
+            <a:spAutoFit/>
+          </a:bodyPr>
+          <a:lstStyle/>
+          <a:p>
+            <a:r>
+              <a:rPr lang="en-US" sz="2000">
+                <a:latin typeface="Times New Roman" panose="02020603050405020304" pitchFamily="18" charset="0"/>
+                <a:cs typeface="Times New Roman" panose="02020603050405020304" pitchFamily="18" charset="0"/>
+              </a:rPr>
+              <a:t>(2)</a:t>
+            </a:r>
+          </a:p>
+        </p:txBody>
+      </p:sp>
+      <p:sp>
+        <p:nvSpPr>
+          <p:cNvPr id="20" name="TextBox 19">
+            <a:extLst>
+              <a:ext uri="{FF2B5EF4-FFF2-40B4-BE49-F238E27FC236}">
+                <a16:creationId xmlns:a16="http://schemas.microsoft.com/office/drawing/2014/main" id="{1EF642F4-A632-F076-ECA9-894516DA9C81}"/>
+              </a:ext>
+            </a:extLst>
+          </p:cNvPr>
+          <p:cNvSpPr txBox="1"/>
+          <p:nvPr/>
+        </p:nvSpPr>
+        <p:spPr>
+          <a:xfrm>
+            <a:off x="9398000" y="3773081"/>
+            <a:ext cx="482824" cy="400110"/>
+          </a:xfrm>
+          <a:prstGeom prst="rect">
+            <a:avLst/>
+          </a:prstGeom>
+          <a:noFill/>
+        </p:spPr>
+        <p:txBody>
+          <a:bodyPr wrap="none" rtlCol="0">
+            <a:spAutoFit/>
+          </a:bodyPr>
+          <a:lstStyle/>
+          <a:p>
+            <a:r>
+              <a:rPr lang="en-US" sz="2000">
+                <a:latin typeface="Times New Roman" panose="02020603050405020304" pitchFamily="18" charset="0"/>
+                <a:cs typeface="Times New Roman" panose="02020603050405020304" pitchFamily="18" charset="0"/>
+              </a:rPr>
+              <a:t>(3)</a:t>
+            </a:r>
+          </a:p>
+        </p:txBody>
+      </p:sp>
+      <p:cxnSp>
+        <p:nvCxnSpPr>
+          <p:cNvPr id="29" name="Connector: Elbow 28">
+            <a:extLst>
+              <a:ext uri="{FF2B5EF4-FFF2-40B4-BE49-F238E27FC236}">
+                <a16:creationId xmlns:a16="http://schemas.microsoft.com/office/drawing/2014/main" id="{F4D02D3B-11BE-D88E-3232-2AF9C20A721B}"/>
+              </a:ext>
+            </a:extLst>
+          </p:cNvPr>
+          <p:cNvCxnSpPr>
+            <a:cxnSpLocks/>
+            <a:stCxn id="2" idx="6"/>
+            <a:endCxn id="3" idx="0"/>
+          </p:cNvCxnSpPr>
+          <p:nvPr/>
+        </p:nvCxnSpPr>
+        <p:spPr>
+          <a:xfrm>
+            <a:off x="3171734" y="1402622"/>
+            <a:ext cx="1273266" cy="1047812"/>
+          </a:xfrm>
+          <a:prstGeom prst="bentConnector2">
+            <a:avLst/>
+          </a:prstGeom>
+          <a:ln>
+            <a:tailEnd type="triangle"/>
+          </a:ln>
+        </p:spPr>
+        <p:style>
+          <a:lnRef idx="2">
+            <a:schemeClr val="dk1"/>
+          </a:lnRef>
+          <a:fillRef idx="0">
+            <a:schemeClr val="dk1"/>
+          </a:fillRef>
+          <a:effectRef idx="1">
+            <a:schemeClr val="dk1"/>
+          </a:effectRef>
+          <a:fontRef idx="minor">
+            <a:schemeClr val="tx1"/>
+          </a:fontRef>
+        </p:style>
+      </p:cxnSp>
+      <p:cxnSp>
+        <p:nvCxnSpPr>
+          <p:cNvPr id="31" name="Connector: Elbow 30">
+            <a:extLst>
+              <a:ext uri="{FF2B5EF4-FFF2-40B4-BE49-F238E27FC236}">
+                <a16:creationId xmlns:a16="http://schemas.microsoft.com/office/drawing/2014/main" id="{DBC04417-11EE-9F9F-5B12-FA8212176C2A}"/>
+              </a:ext>
+            </a:extLst>
+          </p:cNvPr>
+          <p:cNvCxnSpPr>
+            <a:cxnSpLocks/>
+            <a:stCxn id="3" idx="3"/>
+            <a:endCxn id="4" idx="0"/>
+          </p:cNvCxnSpPr>
+          <p:nvPr/>
+        </p:nvCxnSpPr>
+        <p:spPr>
+          <a:xfrm>
+            <a:off x="6096000" y="2912743"/>
+            <a:ext cx="1651000" cy="798139"/>
+          </a:xfrm>
+          <a:prstGeom prst="bentConnector2">
+            <a:avLst/>
+          </a:prstGeom>
+          <a:ln>
+            <a:tailEnd type="triangle"/>
+          </a:ln>
+        </p:spPr>
+        <p:style>
+          <a:lnRef idx="2">
+            <a:schemeClr val="dk1"/>
+          </a:lnRef>
+          <a:fillRef idx="0">
+            <a:schemeClr val="dk1"/>
+          </a:fillRef>
+          <a:effectRef idx="1">
+            <a:schemeClr val="dk1"/>
+          </a:effectRef>
+          <a:fontRef idx="minor">
+            <a:schemeClr val="tx1"/>
+          </a:fontRef>
+        </p:style>
+      </p:cxnSp>
+      <p:cxnSp>
+        <p:nvCxnSpPr>
+          <p:cNvPr id="33" name="Connector: Elbow 32">
+            <a:extLst>
+              <a:ext uri="{FF2B5EF4-FFF2-40B4-BE49-F238E27FC236}">
+                <a16:creationId xmlns:a16="http://schemas.microsoft.com/office/drawing/2014/main" id="{EDF04D07-B273-B93A-F8F4-5475F0D810F2}"/>
+              </a:ext>
+            </a:extLst>
+          </p:cNvPr>
+          <p:cNvCxnSpPr>
+            <a:cxnSpLocks/>
+            <a:stCxn id="4" idx="3"/>
+            <a:endCxn id="6" idx="0"/>
+          </p:cNvCxnSpPr>
+          <p:nvPr/>
+        </p:nvCxnSpPr>
+        <p:spPr>
+          <a:xfrm>
+            <a:off x="9398000" y="4173191"/>
+            <a:ext cx="566420" cy="795905"/>
+          </a:xfrm>
+          <a:prstGeom prst="bentConnector2">
+            <a:avLst/>
+          </a:prstGeom>
+          <a:ln>
+            <a:tailEnd type="triangle"/>
+          </a:ln>
+        </p:spPr>
+        <p:style>
+          <a:lnRef idx="2">
+            <a:schemeClr val="dk1"/>
+          </a:lnRef>
+          <a:fillRef idx="0">
+            <a:schemeClr val="dk1"/>
+          </a:fillRef>
+          <a:effectRef idx="1">
+            <a:schemeClr val="dk1"/>
+          </a:effectRef>
+          <a:fontRef idx="minor">
+            <a:schemeClr val="tx1"/>
+          </a:fontRef>
+        </p:style>
+      </p:cxnSp>
+    </p:spTree>
+    <p:extLst>
+      <p:ext uri="{BB962C8B-B14F-4D97-AF65-F5344CB8AC3E}">
+        <p14:creationId xmlns:p14="http://schemas.microsoft.com/office/powerpoint/2010/main" val="285086992"/>
+      </p:ext>
+    </p:extLst>
+  </p:cSld>
+  <p:clrMapOvr>
+    <a:masterClrMapping/>
+  </p:clrMapOvr>
+</p:sld>
+</file>
+
+<file path=ppt/slides/slide33.xml><?xml version="1.0" encoding="utf-8"?>
+<p:sld xmlns:a="http://schemas.openxmlformats.org/drawingml/2006/main" xmlns:r="http://schemas.openxmlformats.org/officeDocument/2006/relationships" xmlns:p="http://schemas.openxmlformats.org/presentationml/2006/main">
+  <p:cSld>
+    <p:spTree>
+      <p:nvGrpSpPr>
+        <p:cNvPr id="1" name=""/>
+        <p:cNvGrpSpPr/>
+        <p:nvPr/>
+      </p:nvGrpSpPr>
+      <p:grpSpPr>
+        <a:xfrm>
+          <a:off x="0" y="0"/>
+          <a:ext cx="0" cy="0"/>
+          <a:chOff x="0" y="0"/>
+          <a:chExt cx="0" cy="0"/>
+        </a:xfrm>
+      </p:grpSpPr>
+      <p:sp>
+        <p:nvSpPr>
+          <p:cNvPr id="2" name="Rectangle: Rounded Corners 1">
+            <a:extLst>
+              <a:ext uri="{FF2B5EF4-FFF2-40B4-BE49-F238E27FC236}">
+                <a16:creationId xmlns:a16="http://schemas.microsoft.com/office/drawing/2014/main" id="{E4ADF9A4-DE0B-8F8B-4DF4-46018C8FE330}"/>
+              </a:ext>
+            </a:extLst>
+          </p:cNvPr>
+          <p:cNvSpPr/>
+          <p:nvPr/>
+        </p:nvSpPr>
+        <p:spPr>
+          <a:xfrm>
+            <a:off x="4957151" y="1317577"/>
+            <a:ext cx="2277687" cy="465513"/>
+          </a:xfrm>
+          <a:prstGeom prst="roundRect">
+            <a:avLst/>
+          </a:prstGeom>
+          <a:solidFill>
+            <a:schemeClr val="bg2"/>
+          </a:solidFill>
+          <a:ln>
+            <a:solidFill>
+              <a:schemeClr val="tx1"/>
+            </a:solidFill>
+          </a:ln>
+        </p:spPr>
+        <p:style>
+          <a:lnRef idx="2">
+            <a:schemeClr val="accent1">
+              <a:shade val="15000"/>
+            </a:schemeClr>
+          </a:lnRef>
+          <a:fillRef idx="1">
+            <a:schemeClr val="accent1"/>
+          </a:fillRef>
+          <a:effectRef idx="0">
+            <a:schemeClr val="accent1"/>
+          </a:effectRef>
+          <a:fontRef idx="minor">
+            <a:schemeClr val="lt1"/>
+          </a:fontRef>
+        </p:style>
+        <p:txBody>
+          <a:bodyPr rtlCol="0" anchor="ctr"/>
+          <a:lstStyle/>
+          <a:p>
+            <a:pPr algn="ctr"/>
+            <a:r>
+              <a:rPr lang="en-US" sz="2000">
+                <a:solidFill>
+                  <a:schemeClr val="tx1"/>
+                </a:solidFill>
+                <a:latin typeface="Times New Roman" panose="02020603050405020304" pitchFamily="18" charset="0"/>
+                <a:cs typeface="Times New Roman" panose="02020603050405020304" pitchFamily="18" charset="0"/>
+              </a:rPr>
+              <a:t>Vai trò</a:t>
+            </a:r>
+          </a:p>
+        </p:txBody>
+      </p:sp>
+      <p:sp>
+        <p:nvSpPr>
+          <p:cNvPr id="3" name="Rectangle: Rounded Corners 2">
+            <a:extLst>
+              <a:ext uri="{FF2B5EF4-FFF2-40B4-BE49-F238E27FC236}">
+                <a16:creationId xmlns:a16="http://schemas.microsoft.com/office/drawing/2014/main" id="{8CC44113-62FE-B628-2505-D75FDEFC7AE5}"/>
+              </a:ext>
+            </a:extLst>
+          </p:cNvPr>
+          <p:cNvSpPr/>
+          <p:nvPr/>
+        </p:nvSpPr>
+        <p:spPr>
+          <a:xfrm>
+            <a:off x="4957151" y="1941045"/>
+            <a:ext cx="2277687" cy="465513"/>
+          </a:xfrm>
+          <a:prstGeom prst="roundRect">
+            <a:avLst/>
+          </a:prstGeom>
+          <a:solidFill>
+            <a:schemeClr val="bg2"/>
+          </a:solidFill>
+          <a:ln>
+            <a:solidFill>
+              <a:schemeClr val="tx1"/>
+            </a:solidFill>
+          </a:ln>
+        </p:spPr>
+        <p:style>
+          <a:lnRef idx="2">
+            <a:schemeClr val="accent1">
+              <a:shade val="15000"/>
+            </a:schemeClr>
+          </a:lnRef>
+          <a:fillRef idx="1">
+            <a:schemeClr val="accent1"/>
+          </a:fillRef>
+          <a:effectRef idx="0">
+            <a:schemeClr val="accent1"/>
+          </a:effectRef>
+          <a:fontRef idx="minor">
+            <a:schemeClr val="lt1"/>
+          </a:fontRef>
+        </p:style>
+        <p:txBody>
+          <a:bodyPr rtlCol="0" anchor="ctr"/>
+          <a:lstStyle/>
+          <a:p>
+            <a:pPr algn="ctr"/>
+            <a:r>
+              <a:rPr lang="en-US" sz="2000">
+                <a:solidFill>
+                  <a:schemeClr val="tx1"/>
+                </a:solidFill>
+                <a:latin typeface="Times New Roman" panose="02020603050405020304" pitchFamily="18" charset="0"/>
+                <a:cs typeface="Times New Roman" panose="02020603050405020304" pitchFamily="18" charset="0"/>
+              </a:rPr>
+              <a:t>Bối cảnh</a:t>
+            </a:r>
+          </a:p>
+        </p:txBody>
+      </p:sp>
+      <p:sp>
+        <p:nvSpPr>
+          <p:cNvPr id="4" name="Rectangle: Rounded Corners 3">
+            <a:extLst>
+              <a:ext uri="{FF2B5EF4-FFF2-40B4-BE49-F238E27FC236}">
+                <a16:creationId xmlns:a16="http://schemas.microsoft.com/office/drawing/2014/main" id="{9AF6F156-0943-2C06-9194-54696915F448}"/>
+              </a:ext>
+            </a:extLst>
+          </p:cNvPr>
+          <p:cNvSpPr/>
+          <p:nvPr/>
+        </p:nvSpPr>
+        <p:spPr>
+          <a:xfrm>
+            <a:off x="4957151" y="2564513"/>
+            <a:ext cx="2277687" cy="465513"/>
+          </a:xfrm>
+          <a:prstGeom prst="roundRect">
+            <a:avLst/>
+          </a:prstGeom>
+          <a:solidFill>
+            <a:schemeClr val="bg2"/>
+          </a:solidFill>
+          <a:ln>
+            <a:solidFill>
+              <a:schemeClr val="tx1"/>
+            </a:solidFill>
+          </a:ln>
+        </p:spPr>
+        <p:style>
+          <a:lnRef idx="2">
+            <a:schemeClr val="accent1">
+              <a:shade val="15000"/>
+            </a:schemeClr>
+          </a:lnRef>
+          <a:fillRef idx="1">
+            <a:schemeClr val="accent1"/>
+          </a:fillRef>
+          <a:effectRef idx="0">
+            <a:schemeClr val="accent1"/>
+          </a:effectRef>
+          <a:fontRef idx="minor">
+            <a:schemeClr val="lt1"/>
+          </a:fontRef>
+        </p:style>
+        <p:txBody>
+          <a:bodyPr rtlCol="0" anchor="ctr"/>
+          <a:lstStyle/>
+          <a:p>
+            <a:pPr algn="ctr"/>
+            <a:r>
+              <a:rPr lang="en-US" sz="2000">
+                <a:solidFill>
+                  <a:schemeClr val="tx1"/>
+                </a:solidFill>
+                <a:latin typeface="Times New Roman" panose="02020603050405020304" pitchFamily="18" charset="0"/>
+                <a:cs typeface="Times New Roman" panose="02020603050405020304" pitchFamily="18" charset="0"/>
+              </a:rPr>
+              <a:t>Nhiệm vụ</a:t>
+            </a:r>
+          </a:p>
+        </p:txBody>
+      </p:sp>
+      <p:sp>
+        <p:nvSpPr>
+          <p:cNvPr id="5" name="Rectangle: Rounded Corners 4">
+            <a:extLst>
+              <a:ext uri="{FF2B5EF4-FFF2-40B4-BE49-F238E27FC236}">
+                <a16:creationId xmlns:a16="http://schemas.microsoft.com/office/drawing/2014/main" id="{6AE5A87F-B9A7-AA4E-457F-FA124B5068AB}"/>
+              </a:ext>
+            </a:extLst>
+          </p:cNvPr>
+          <p:cNvSpPr/>
+          <p:nvPr/>
+        </p:nvSpPr>
+        <p:spPr>
+          <a:xfrm>
+            <a:off x="4957151" y="3811341"/>
+            <a:ext cx="2277687" cy="465513"/>
+          </a:xfrm>
+          <a:prstGeom prst="roundRect">
+            <a:avLst/>
+          </a:prstGeom>
+          <a:solidFill>
+            <a:schemeClr val="bg2"/>
+          </a:solidFill>
+          <a:ln>
+            <a:solidFill>
+              <a:schemeClr val="tx1"/>
+            </a:solidFill>
+          </a:ln>
+        </p:spPr>
+        <p:style>
+          <a:lnRef idx="2">
+            <a:schemeClr val="accent1">
+              <a:shade val="15000"/>
+            </a:schemeClr>
+          </a:lnRef>
+          <a:fillRef idx="1">
+            <a:schemeClr val="accent1"/>
+          </a:fillRef>
+          <a:effectRef idx="0">
+            <a:schemeClr val="accent1"/>
+          </a:effectRef>
+          <a:fontRef idx="minor">
+            <a:schemeClr val="lt1"/>
+          </a:fontRef>
+        </p:style>
+        <p:txBody>
+          <a:bodyPr rtlCol="0" anchor="ctr"/>
+          <a:lstStyle/>
+          <a:p>
+            <a:pPr algn="ctr"/>
+            <a:r>
+              <a:rPr lang="en-US" sz="2000">
+                <a:solidFill>
+                  <a:schemeClr val="tx1"/>
+                </a:solidFill>
+                <a:latin typeface="Times New Roman" panose="02020603050405020304" pitchFamily="18" charset="0"/>
+                <a:cs typeface="Times New Roman" panose="02020603050405020304" pitchFamily="18" charset="0"/>
+              </a:rPr>
+              <a:t>Ví dụ 1</a:t>
+            </a:r>
+          </a:p>
+        </p:txBody>
+      </p:sp>
+      <p:sp>
+        <p:nvSpPr>
+          <p:cNvPr id="6" name="Rectangle: Rounded Corners 5">
+            <a:extLst>
+              <a:ext uri="{FF2B5EF4-FFF2-40B4-BE49-F238E27FC236}">
+                <a16:creationId xmlns:a16="http://schemas.microsoft.com/office/drawing/2014/main" id="{F7CCF113-E741-D820-34D8-31288E48EA5F}"/>
+              </a:ext>
+            </a:extLst>
+          </p:cNvPr>
+          <p:cNvSpPr/>
+          <p:nvPr/>
+        </p:nvSpPr>
+        <p:spPr>
+          <a:xfrm>
+            <a:off x="4957151" y="4434809"/>
+            <a:ext cx="2277687" cy="465513"/>
+          </a:xfrm>
+          <a:prstGeom prst="roundRect">
+            <a:avLst/>
+          </a:prstGeom>
+          <a:solidFill>
+            <a:schemeClr val="bg2"/>
+          </a:solidFill>
+          <a:ln>
+            <a:solidFill>
+              <a:schemeClr val="tx1"/>
+            </a:solidFill>
+          </a:ln>
+        </p:spPr>
+        <p:style>
+          <a:lnRef idx="2">
+            <a:schemeClr val="accent1">
+              <a:shade val="15000"/>
+            </a:schemeClr>
+          </a:lnRef>
+          <a:fillRef idx="1">
+            <a:schemeClr val="accent1"/>
+          </a:fillRef>
+          <a:effectRef idx="0">
+            <a:schemeClr val="accent1"/>
+          </a:effectRef>
+          <a:fontRef idx="minor">
+            <a:schemeClr val="lt1"/>
+          </a:fontRef>
+        </p:style>
+        <p:txBody>
+          <a:bodyPr rtlCol="0" anchor="ctr"/>
+          <a:lstStyle/>
+          <a:p>
+            <a:pPr algn="ctr"/>
+            <a:r>
+              <a:rPr lang="en-US" sz="2000">
+                <a:solidFill>
+                  <a:schemeClr val="tx1"/>
+                </a:solidFill>
+                <a:latin typeface="Times New Roman" panose="02020603050405020304" pitchFamily="18" charset="0"/>
+                <a:cs typeface="Times New Roman" panose="02020603050405020304" pitchFamily="18" charset="0"/>
+              </a:rPr>
+              <a:t>Ví dụ …</a:t>
+            </a:r>
+          </a:p>
+        </p:txBody>
+      </p:sp>
+      <p:sp>
+        <p:nvSpPr>
+          <p:cNvPr id="7" name="Rectangle: Rounded Corners 6">
+            <a:extLst>
+              <a:ext uri="{FF2B5EF4-FFF2-40B4-BE49-F238E27FC236}">
+                <a16:creationId xmlns:a16="http://schemas.microsoft.com/office/drawing/2014/main" id="{4BFFF11C-3CBC-D614-936E-224461FB2ACF}"/>
+              </a:ext>
+            </a:extLst>
+          </p:cNvPr>
+          <p:cNvSpPr/>
+          <p:nvPr/>
+        </p:nvSpPr>
+        <p:spPr>
+          <a:xfrm>
+            <a:off x="4957151" y="5058277"/>
+            <a:ext cx="2277687" cy="465513"/>
+          </a:xfrm>
+          <a:prstGeom prst="roundRect">
+            <a:avLst/>
+          </a:prstGeom>
+          <a:solidFill>
+            <a:schemeClr val="bg2"/>
+          </a:solidFill>
+          <a:ln>
+            <a:solidFill>
+              <a:schemeClr val="tx1"/>
+            </a:solidFill>
+          </a:ln>
+        </p:spPr>
+        <p:style>
+          <a:lnRef idx="2">
+            <a:schemeClr val="accent1">
+              <a:shade val="15000"/>
+            </a:schemeClr>
+          </a:lnRef>
+          <a:fillRef idx="1">
+            <a:schemeClr val="accent1"/>
+          </a:fillRef>
+          <a:effectRef idx="0">
+            <a:schemeClr val="accent1"/>
+          </a:effectRef>
+          <a:fontRef idx="minor">
+            <a:schemeClr val="lt1"/>
+          </a:fontRef>
+        </p:style>
+        <p:txBody>
+          <a:bodyPr rtlCol="0" anchor="ctr"/>
+          <a:lstStyle/>
+          <a:p>
+            <a:pPr algn="ctr"/>
+            <a:r>
+              <a:rPr lang="en-US" sz="2000">
+                <a:solidFill>
+                  <a:schemeClr val="tx1"/>
+                </a:solidFill>
+                <a:latin typeface="Times New Roman" panose="02020603050405020304" pitchFamily="18" charset="0"/>
+                <a:cs typeface="Times New Roman" panose="02020603050405020304" pitchFamily="18" charset="0"/>
+              </a:rPr>
+              <a:t>Hướng dẫn</a:t>
+            </a:r>
+          </a:p>
+        </p:txBody>
+      </p:sp>
+      <p:sp>
+        <p:nvSpPr>
+          <p:cNvPr id="8" name="Rectangle: Rounded Corners 7">
+            <a:extLst>
+              <a:ext uri="{FF2B5EF4-FFF2-40B4-BE49-F238E27FC236}">
+                <a16:creationId xmlns:a16="http://schemas.microsoft.com/office/drawing/2014/main" id="{87AE8872-DB4B-0CAC-7DB2-0F81067540C1}"/>
+              </a:ext>
+            </a:extLst>
+          </p:cNvPr>
+          <p:cNvSpPr/>
+          <p:nvPr/>
+        </p:nvSpPr>
+        <p:spPr>
+          <a:xfrm>
+            <a:off x="4957151" y="5681745"/>
+            <a:ext cx="2277687" cy="465513"/>
+          </a:xfrm>
+          <a:prstGeom prst="roundRect">
+            <a:avLst/>
+          </a:prstGeom>
+          <a:solidFill>
+            <a:schemeClr val="bg2"/>
+          </a:solidFill>
+          <a:ln>
+            <a:solidFill>
+              <a:schemeClr val="tx1"/>
+            </a:solidFill>
+          </a:ln>
+        </p:spPr>
+        <p:style>
+          <a:lnRef idx="2">
+            <a:schemeClr val="accent1">
+              <a:shade val="15000"/>
+            </a:schemeClr>
+          </a:lnRef>
+          <a:fillRef idx="1">
+            <a:schemeClr val="accent1"/>
+          </a:fillRef>
+          <a:effectRef idx="0">
+            <a:schemeClr val="accent1"/>
+          </a:effectRef>
+          <a:fontRef idx="minor">
+            <a:schemeClr val="lt1"/>
+          </a:fontRef>
+        </p:style>
+        <p:txBody>
+          <a:bodyPr rtlCol="0" anchor="ctr"/>
+          <a:lstStyle/>
+          <a:p>
+            <a:pPr algn="ctr"/>
+            <a:r>
+              <a:rPr lang="en-US" sz="2000">
+                <a:solidFill>
+                  <a:schemeClr val="tx1"/>
+                </a:solidFill>
+                <a:latin typeface="Times New Roman" panose="02020603050405020304" pitchFamily="18" charset="0"/>
+                <a:cs typeface="Times New Roman" panose="02020603050405020304" pitchFamily="18" charset="0"/>
+              </a:rPr>
+              <a:t>Lưu ý</a:t>
+            </a:r>
+          </a:p>
+        </p:txBody>
+      </p:sp>
+      <p:sp>
+        <p:nvSpPr>
+          <p:cNvPr id="9" name="Rectangle: Rounded Corners 8">
+            <a:extLst>
+              <a:ext uri="{FF2B5EF4-FFF2-40B4-BE49-F238E27FC236}">
+                <a16:creationId xmlns:a16="http://schemas.microsoft.com/office/drawing/2014/main" id="{C97A42C2-BBE0-F9E1-48F5-620BDEE672F5}"/>
+              </a:ext>
+            </a:extLst>
+          </p:cNvPr>
+          <p:cNvSpPr/>
+          <p:nvPr/>
+        </p:nvSpPr>
+        <p:spPr>
+          <a:xfrm>
+            <a:off x="3535675" y="536181"/>
+            <a:ext cx="5120640" cy="6001790"/>
+          </a:xfrm>
+          <a:prstGeom prst="roundRect">
+            <a:avLst/>
+          </a:prstGeom>
+          <a:noFill/>
+          <a:ln>
+            <a:solidFill>
+              <a:srgbClr val="FF0000"/>
+            </a:solidFill>
+            <a:prstDash val="dash"/>
+          </a:ln>
+        </p:spPr>
+        <p:style>
+          <a:lnRef idx="2">
+            <a:schemeClr val="accent1">
+              <a:shade val="15000"/>
+            </a:schemeClr>
+          </a:lnRef>
+          <a:fillRef idx="1">
+            <a:schemeClr val="accent1"/>
+          </a:fillRef>
+          <a:effectRef idx="0">
+            <a:schemeClr val="accent1"/>
+          </a:effectRef>
+          <a:fontRef idx="minor">
+            <a:schemeClr val="lt1"/>
+          </a:fontRef>
+        </p:style>
+        <p:txBody>
+          <a:bodyPr rtlCol="0" anchor="ctr"/>
+          <a:lstStyle/>
+          <a:p>
+            <a:pPr algn="ctr"/>
+            <a:endParaRPr lang="en-US" sz="2000">
+              <a:latin typeface="Times New Roman" panose="02020603050405020304" pitchFamily="18" charset="0"/>
+              <a:cs typeface="Times New Roman" panose="02020603050405020304" pitchFamily="18" charset="0"/>
+            </a:endParaRPr>
+          </a:p>
+        </p:txBody>
+      </p:sp>
+      <p:sp>
+        <p:nvSpPr>
+          <p:cNvPr id="10" name="Rectangle: Rounded Corners 9">
+            <a:extLst>
+              <a:ext uri="{FF2B5EF4-FFF2-40B4-BE49-F238E27FC236}">
+                <a16:creationId xmlns:a16="http://schemas.microsoft.com/office/drawing/2014/main" id="{E2031F3D-9150-2123-189F-AF63D3578697}"/>
+              </a:ext>
+            </a:extLst>
+          </p:cNvPr>
+          <p:cNvSpPr/>
+          <p:nvPr/>
+        </p:nvSpPr>
+        <p:spPr>
+          <a:xfrm>
+            <a:off x="4574766" y="145469"/>
+            <a:ext cx="3042458" cy="781396"/>
+          </a:xfrm>
+          <a:prstGeom prst="roundRect">
+            <a:avLst/>
+          </a:prstGeom>
+          <a:solidFill>
+            <a:srgbClr val="FFFFFF"/>
+          </a:solidFill>
+          <a:ln>
+            <a:solidFill>
+              <a:srgbClr val="FF0000"/>
+            </a:solidFill>
+          </a:ln>
+        </p:spPr>
+        <p:style>
+          <a:lnRef idx="2">
+            <a:schemeClr val="accent1">
+              <a:shade val="15000"/>
+            </a:schemeClr>
+          </a:lnRef>
+          <a:fillRef idx="1">
+            <a:schemeClr val="accent1"/>
+          </a:fillRef>
+          <a:effectRef idx="0">
+            <a:schemeClr val="accent1"/>
+          </a:effectRef>
+          <a:fontRef idx="minor">
+            <a:schemeClr val="lt1"/>
+          </a:fontRef>
+        </p:style>
+        <p:txBody>
+          <a:bodyPr rtlCol="0" anchor="ctr"/>
+          <a:lstStyle/>
+          <a:p>
+            <a:pPr algn="ctr"/>
+            <a:r>
+              <a:rPr lang="en-US" sz="2000">
+                <a:ln w="0">
+                  <a:solidFill>
+                    <a:schemeClr val="tx1"/>
+                  </a:solidFill>
+                </a:ln>
+                <a:solidFill>
+                  <a:schemeClr val="tx1"/>
+                </a:solidFill>
+                <a:latin typeface="Times New Roman" panose="02020603050405020304" pitchFamily="18" charset="0"/>
+                <a:cs typeface="Times New Roman" panose="02020603050405020304" pitchFamily="18" charset="0"/>
+              </a:rPr>
+              <a:t>Prompt cho tác vụ</a:t>
+            </a:r>
+          </a:p>
+          <a:p>
+            <a:pPr algn="ctr"/>
+            <a:r>
+              <a:rPr lang="en-US" sz="2000">
+                <a:ln w="0">
+                  <a:solidFill>
+                    <a:schemeClr val="tx1"/>
+                  </a:solidFill>
+                </a:ln>
+                <a:solidFill>
+                  <a:schemeClr val="tx1"/>
+                </a:solidFill>
+                <a:latin typeface="Times New Roman" panose="02020603050405020304" pitchFamily="18" charset="0"/>
+                <a:cs typeface="Times New Roman" panose="02020603050405020304" pitchFamily="18" charset="0"/>
+              </a:rPr>
+              <a:t>trích xuất thông tin</a:t>
+            </a:r>
+          </a:p>
+        </p:txBody>
+      </p:sp>
+      <p:sp>
+        <p:nvSpPr>
+          <p:cNvPr id="11" name="Rectangle: Rounded Corners 10">
+            <a:extLst>
+              <a:ext uri="{FF2B5EF4-FFF2-40B4-BE49-F238E27FC236}">
+                <a16:creationId xmlns:a16="http://schemas.microsoft.com/office/drawing/2014/main" id="{1CB039DE-91EA-0092-CC10-04B3DF401AD0}"/>
+              </a:ext>
+            </a:extLst>
+          </p:cNvPr>
+          <p:cNvSpPr/>
+          <p:nvPr/>
+        </p:nvSpPr>
+        <p:spPr>
+          <a:xfrm>
+            <a:off x="4957151" y="3187927"/>
+            <a:ext cx="2277687" cy="465513"/>
+          </a:xfrm>
+          <a:prstGeom prst="roundRect">
+            <a:avLst/>
+          </a:prstGeom>
+          <a:solidFill>
+            <a:schemeClr val="bg2"/>
+          </a:solidFill>
+          <a:ln>
+            <a:solidFill>
+              <a:schemeClr val="tx1"/>
+            </a:solidFill>
+          </a:ln>
+        </p:spPr>
+        <p:style>
+          <a:lnRef idx="2">
+            <a:schemeClr val="accent1">
+              <a:shade val="15000"/>
+            </a:schemeClr>
+          </a:lnRef>
+          <a:fillRef idx="1">
+            <a:schemeClr val="accent1"/>
+          </a:fillRef>
+          <a:effectRef idx="0">
+            <a:schemeClr val="accent1"/>
+          </a:effectRef>
+          <a:fontRef idx="minor">
+            <a:schemeClr val="lt1"/>
+          </a:fontRef>
+        </p:style>
+        <p:txBody>
+          <a:bodyPr rtlCol="0" anchor="ctr"/>
+          <a:lstStyle/>
+          <a:p>
+            <a:pPr algn="ctr"/>
+            <a:r>
+              <a:rPr lang="en-US" sz="2000">
+                <a:solidFill>
+                  <a:schemeClr val="tx1"/>
+                </a:solidFill>
+                <a:latin typeface="Times New Roman" panose="02020603050405020304" pitchFamily="18" charset="0"/>
+                <a:cs typeface="Times New Roman" panose="02020603050405020304" pitchFamily="18" charset="0"/>
+              </a:rPr>
+              <a:t>Đầu ra có cấu trúc</a:t>
+            </a:r>
+          </a:p>
+        </p:txBody>
+      </p:sp>
+    </p:spTree>
+    <p:extLst>
+      <p:ext uri="{BB962C8B-B14F-4D97-AF65-F5344CB8AC3E}">
+        <p14:creationId xmlns:p14="http://schemas.microsoft.com/office/powerpoint/2010/main" val="2705721519"/>
+      </p:ext>
+    </p:extLst>
+  </p:cSld>
+  <p:clrMapOvr>
+    <a:masterClrMapping/>
+  </p:clrMapOvr>
+</p:sld>
+</file>
+
+<file path=ppt/slides/slide34.xml><?xml version="1.0" encoding="utf-8"?>
+<p:sld xmlns:a="http://schemas.openxmlformats.org/drawingml/2006/main" xmlns:r="http://schemas.openxmlformats.org/officeDocument/2006/relationships" xmlns:p="http://schemas.openxmlformats.org/presentationml/2006/main">
+  <p:cSld>
+    <p:spTree>
+      <p:nvGrpSpPr>
+        <p:cNvPr id="1" name=""/>
+        <p:cNvGrpSpPr/>
+        <p:nvPr/>
+      </p:nvGrpSpPr>
+      <p:grpSpPr>
+        <a:xfrm>
+          <a:off x="0" y="0"/>
+          <a:ext cx="0" cy="0"/>
+          <a:chOff x="0" y="0"/>
+          <a:chExt cx="0" cy="0"/>
+        </a:xfrm>
+      </p:grpSpPr>
+      <p:sp>
+        <p:nvSpPr>
+          <p:cNvPr id="3" name="Rectangle: Rounded Corners 2">
+            <a:extLst>
+              <a:ext uri="{FF2B5EF4-FFF2-40B4-BE49-F238E27FC236}">
+                <a16:creationId xmlns:a16="http://schemas.microsoft.com/office/drawing/2014/main" id="{048EB605-C214-F543-6B11-029AC50FDEBD}"/>
+              </a:ext>
+            </a:extLst>
+          </p:cNvPr>
+          <p:cNvSpPr/>
+          <p:nvPr/>
+        </p:nvSpPr>
+        <p:spPr>
+          <a:xfrm>
+            <a:off x="4957153" y="1404850"/>
+            <a:ext cx="2277687" cy="465513"/>
+          </a:xfrm>
+          <a:prstGeom prst="roundRect">
+            <a:avLst/>
+          </a:prstGeom>
+          <a:solidFill>
+            <a:schemeClr val="bg2"/>
+          </a:solidFill>
+          <a:ln>
+            <a:solidFill>
+              <a:schemeClr val="tx1"/>
+            </a:solidFill>
+          </a:ln>
+        </p:spPr>
+        <p:style>
+          <a:lnRef idx="2">
+            <a:schemeClr val="accent1">
+              <a:shade val="15000"/>
+            </a:schemeClr>
+          </a:lnRef>
+          <a:fillRef idx="1">
+            <a:schemeClr val="accent1"/>
+          </a:fillRef>
+          <a:effectRef idx="0">
+            <a:schemeClr val="accent1"/>
+          </a:effectRef>
+          <a:fontRef idx="minor">
+            <a:schemeClr val="lt1"/>
+          </a:fontRef>
+        </p:style>
+        <p:txBody>
+          <a:bodyPr rtlCol="0" anchor="ctr"/>
+          <a:lstStyle/>
+          <a:p>
+            <a:pPr algn="ctr"/>
+            <a:r>
+              <a:rPr lang="en-US" sz="2000">
+                <a:solidFill>
+                  <a:schemeClr val="tx1"/>
+                </a:solidFill>
+                <a:latin typeface="Times New Roman" panose="02020603050405020304" pitchFamily="18" charset="0"/>
+                <a:cs typeface="Times New Roman" panose="02020603050405020304" pitchFamily="18" charset="0"/>
+              </a:rPr>
+              <a:t>Vai trò</a:t>
+            </a:r>
+          </a:p>
+        </p:txBody>
+      </p:sp>
+      <p:sp>
+        <p:nvSpPr>
+          <p:cNvPr id="4" name="Rectangle: Rounded Corners 3">
+            <a:extLst>
+              <a:ext uri="{FF2B5EF4-FFF2-40B4-BE49-F238E27FC236}">
+                <a16:creationId xmlns:a16="http://schemas.microsoft.com/office/drawing/2014/main" id="{54BC9C70-A4ED-0B89-64FD-D4C0E2B71AA4}"/>
+              </a:ext>
+            </a:extLst>
+          </p:cNvPr>
+          <p:cNvSpPr/>
+          <p:nvPr/>
+        </p:nvSpPr>
+        <p:spPr>
+          <a:xfrm>
+            <a:off x="4957153" y="2115592"/>
+            <a:ext cx="2277687" cy="465513"/>
+          </a:xfrm>
+          <a:prstGeom prst="roundRect">
+            <a:avLst/>
+          </a:prstGeom>
+          <a:solidFill>
+            <a:schemeClr val="bg2"/>
+          </a:solidFill>
+          <a:ln>
+            <a:solidFill>
+              <a:schemeClr val="tx1"/>
+            </a:solidFill>
+          </a:ln>
+        </p:spPr>
+        <p:style>
+          <a:lnRef idx="2">
+            <a:schemeClr val="accent1">
+              <a:shade val="15000"/>
+            </a:schemeClr>
+          </a:lnRef>
+          <a:fillRef idx="1">
+            <a:schemeClr val="accent1"/>
+          </a:fillRef>
+          <a:effectRef idx="0">
+            <a:schemeClr val="accent1"/>
+          </a:effectRef>
+          <a:fontRef idx="minor">
+            <a:schemeClr val="lt1"/>
+          </a:fontRef>
+        </p:style>
+        <p:txBody>
+          <a:bodyPr rtlCol="0" anchor="ctr"/>
+          <a:lstStyle/>
+          <a:p>
+            <a:pPr algn="ctr"/>
+            <a:r>
+              <a:rPr lang="en-US" sz="2000">
+                <a:solidFill>
+                  <a:schemeClr val="tx1"/>
+                </a:solidFill>
+                <a:latin typeface="Times New Roman" panose="02020603050405020304" pitchFamily="18" charset="0"/>
+                <a:cs typeface="Times New Roman" panose="02020603050405020304" pitchFamily="18" charset="0"/>
+              </a:rPr>
+              <a:t>Bối cảnh</a:t>
+            </a:r>
+          </a:p>
+        </p:txBody>
+      </p:sp>
+      <p:sp>
+        <p:nvSpPr>
+          <p:cNvPr id="5" name="Rectangle: Rounded Corners 4">
+            <a:extLst>
+              <a:ext uri="{FF2B5EF4-FFF2-40B4-BE49-F238E27FC236}">
+                <a16:creationId xmlns:a16="http://schemas.microsoft.com/office/drawing/2014/main" id="{ABB99AF4-2C14-05D1-265A-F78135C3126E}"/>
+              </a:ext>
+            </a:extLst>
+          </p:cNvPr>
+          <p:cNvSpPr/>
+          <p:nvPr/>
+        </p:nvSpPr>
+        <p:spPr>
+          <a:xfrm>
+            <a:off x="4957153" y="2826334"/>
+            <a:ext cx="2277687" cy="465513"/>
+          </a:xfrm>
+          <a:prstGeom prst="roundRect">
+            <a:avLst/>
+          </a:prstGeom>
+          <a:solidFill>
+            <a:schemeClr val="bg2"/>
+          </a:solidFill>
+          <a:ln>
+            <a:solidFill>
+              <a:schemeClr val="tx1"/>
+            </a:solidFill>
+          </a:ln>
+        </p:spPr>
+        <p:style>
+          <a:lnRef idx="2">
+            <a:schemeClr val="accent1">
+              <a:shade val="15000"/>
+            </a:schemeClr>
+          </a:lnRef>
+          <a:fillRef idx="1">
+            <a:schemeClr val="accent1"/>
+          </a:fillRef>
+          <a:effectRef idx="0">
+            <a:schemeClr val="accent1"/>
+          </a:effectRef>
+          <a:fontRef idx="minor">
+            <a:schemeClr val="lt1"/>
+          </a:fontRef>
+        </p:style>
+        <p:txBody>
+          <a:bodyPr rtlCol="0" anchor="ctr"/>
+          <a:lstStyle/>
+          <a:p>
+            <a:pPr algn="ctr"/>
+            <a:r>
+              <a:rPr lang="en-US" sz="2000">
+                <a:solidFill>
+                  <a:schemeClr val="tx1"/>
+                </a:solidFill>
+                <a:latin typeface="Times New Roman" panose="02020603050405020304" pitchFamily="18" charset="0"/>
+                <a:cs typeface="Times New Roman" panose="02020603050405020304" pitchFamily="18" charset="0"/>
+              </a:rPr>
+              <a:t>Câu hỏi</a:t>
+            </a:r>
+          </a:p>
+        </p:txBody>
+      </p:sp>
+      <p:sp>
+        <p:nvSpPr>
+          <p:cNvPr id="6" name="Rectangle: Rounded Corners 5">
+            <a:extLst>
+              <a:ext uri="{FF2B5EF4-FFF2-40B4-BE49-F238E27FC236}">
+                <a16:creationId xmlns:a16="http://schemas.microsoft.com/office/drawing/2014/main" id="{15D95F07-863A-45BC-041C-86202B8CE299}"/>
+              </a:ext>
+            </a:extLst>
+          </p:cNvPr>
+          <p:cNvSpPr/>
+          <p:nvPr/>
+        </p:nvSpPr>
+        <p:spPr>
+          <a:xfrm>
+            <a:off x="4957152" y="3537076"/>
+            <a:ext cx="2277687" cy="465513"/>
+          </a:xfrm>
+          <a:prstGeom prst="roundRect">
+            <a:avLst/>
+          </a:prstGeom>
+          <a:solidFill>
+            <a:schemeClr val="bg2"/>
+          </a:solidFill>
+          <a:ln>
+            <a:solidFill>
+              <a:schemeClr val="tx1"/>
+            </a:solidFill>
+          </a:ln>
+        </p:spPr>
+        <p:style>
+          <a:lnRef idx="2">
+            <a:schemeClr val="accent1">
+              <a:shade val="15000"/>
+            </a:schemeClr>
+          </a:lnRef>
+          <a:fillRef idx="1">
+            <a:schemeClr val="accent1"/>
+          </a:fillRef>
+          <a:effectRef idx="0">
+            <a:schemeClr val="accent1"/>
+          </a:effectRef>
+          <a:fontRef idx="minor">
+            <a:schemeClr val="lt1"/>
+          </a:fontRef>
+        </p:style>
+        <p:txBody>
+          <a:bodyPr rtlCol="0" anchor="ctr"/>
+          <a:lstStyle/>
+          <a:p>
+            <a:pPr algn="ctr"/>
+            <a:r>
+              <a:rPr lang="en-US" sz="2000">
+                <a:solidFill>
+                  <a:schemeClr val="tx1"/>
+                </a:solidFill>
+                <a:latin typeface="Times New Roman" panose="02020603050405020304" pitchFamily="18" charset="0"/>
+                <a:cs typeface="Times New Roman" panose="02020603050405020304" pitchFamily="18" charset="0"/>
+              </a:rPr>
+              <a:t>Ví dụ 1</a:t>
+            </a:r>
+          </a:p>
+        </p:txBody>
+      </p:sp>
+      <p:sp>
+        <p:nvSpPr>
+          <p:cNvPr id="7" name="Rectangle: Rounded Corners 6">
+            <a:extLst>
+              <a:ext uri="{FF2B5EF4-FFF2-40B4-BE49-F238E27FC236}">
+                <a16:creationId xmlns:a16="http://schemas.microsoft.com/office/drawing/2014/main" id="{A7B5ECB3-AC0A-79C1-04C3-54D8536F115C}"/>
+              </a:ext>
+            </a:extLst>
+          </p:cNvPr>
+          <p:cNvSpPr/>
+          <p:nvPr/>
+        </p:nvSpPr>
+        <p:spPr>
+          <a:xfrm>
+            <a:off x="4957152" y="4247818"/>
+            <a:ext cx="2277687" cy="465513"/>
+          </a:xfrm>
+          <a:prstGeom prst="roundRect">
+            <a:avLst/>
+          </a:prstGeom>
+          <a:solidFill>
+            <a:schemeClr val="bg2"/>
+          </a:solidFill>
+          <a:ln>
+            <a:solidFill>
+              <a:schemeClr val="tx1"/>
+            </a:solidFill>
+          </a:ln>
+        </p:spPr>
+        <p:style>
+          <a:lnRef idx="2">
+            <a:schemeClr val="accent1">
+              <a:shade val="15000"/>
+            </a:schemeClr>
+          </a:lnRef>
+          <a:fillRef idx="1">
+            <a:schemeClr val="accent1"/>
+          </a:fillRef>
+          <a:effectRef idx="0">
+            <a:schemeClr val="accent1"/>
+          </a:effectRef>
+          <a:fontRef idx="minor">
+            <a:schemeClr val="lt1"/>
+          </a:fontRef>
+        </p:style>
+        <p:txBody>
+          <a:bodyPr rtlCol="0" anchor="ctr"/>
+          <a:lstStyle/>
+          <a:p>
+            <a:pPr algn="ctr"/>
+            <a:r>
+              <a:rPr lang="en-US" sz="2000">
+                <a:solidFill>
+                  <a:schemeClr val="tx1"/>
+                </a:solidFill>
+                <a:latin typeface="Times New Roman" panose="02020603050405020304" pitchFamily="18" charset="0"/>
+                <a:cs typeface="Times New Roman" panose="02020603050405020304" pitchFamily="18" charset="0"/>
+              </a:rPr>
+              <a:t>Ví dụ …</a:t>
+            </a:r>
+          </a:p>
+        </p:txBody>
+      </p:sp>
+      <p:sp>
+        <p:nvSpPr>
+          <p:cNvPr id="8" name="Rectangle: Rounded Corners 7">
+            <a:extLst>
+              <a:ext uri="{FF2B5EF4-FFF2-40B4-BE49-F238E27FC236}">
+                <a16:creationId xmlns:a16="http://schemas.microsoft.com/office/drawing/2014/main" id="{EA8C18FB-766B-5769-7A4B-4DE68340C0A0}"/>
+              </a:ext>
+            </a:extLst>
+          </p:cNvPr>
+          <p:cNvSpPr/>
+          <p:nvPr/>
+        </p:nvSpPr>
+        <p:spPr>
+          <a:xfrm>
+            <a:off x="4957152" y="4958560"/>
+            <a:ext cx="2277687" cy="465513"/>
+          </a:xfrm>
+          <a:prstGeom prst="roundRect">
+            <a:avLst/>
+          </a:prstGeom>
+          <a:solidFill>
+            <a:schemeClr val="bg2"/>
+          </a:solidFill>
+          <a:ln>
+            <a:solidFill>
+              <a:schemeClr val="tx1"/>
+            </a:solidFill>
+          </a:ln>
+        </p:spPr>
+        <p:style>
+          <a:lnRef idx="2">
+            <a:schemeClr val="accent1">
+              <a:shade val="15000"/>
+            </a:schemeClr>
+          </a:lnRef>
+          <a:fillRef idx="1">
+            <a:schemeClr val="accent1"/>
+          </a:fillRef>
+          <a:effectRef idx="0">
+            <a:schemeClr val="accent1"/>
+          </a:effectRef>
+          <a:fontRef idx="minor">
+            <a:schemeClr val="lt1"/>
+          </a:fontRef>
+        </p:style>
+        <p:txBody>
+          <a:bodyPr rtlCol="0" anchor="ctr"/>
+          <a:lstStyle/>
+          <a:p>
+            <a:pPr algn="ctr"/>
+            <a:r>
+              <a:rPr lang="en-US" sz="2000">
+                <a:solidFill>
+                  <a:schemeClr val="tx1"/>
+                </a:solidFill>
+                <a:latin typeface="Times New Roman" panose="02020603050405020304" pitchFamily="18" charset="0"/>
+                <a:cs typeface="Times New Roman" panose="02020603050405020304" pitchFamily="18" charset="0"/>
+              </a:rPr>
+              <a:t>Hướng dẫn</a:t>
+            </a:r>
+          </a:p>
+        </p:txBody>
+      </p:sp>
+      <p:sp>
+        <p:nvSpPr>
+          <p:cNvPr id="9" name="Rectangle: Rounded Corners 8">
+            <a:extLst>
+              <a:ext uri="{FF2B5EF4-FFF2-40B4-BE49-F238E27FC236}">
+                <a16:creationId xmlns:a16="http://schemas.microsoft.com/office/drawing/2014/main" id="{E2667497-E73D-C9B7-735A-15EA3A038FC9}"/>
+              </a:ext>
+            </a:extLst>
+          </p:cNvPr>
+          <p:cNvSpPr/>
+          <p:nvPr/>
+        </p:nvSpPr>
+        <p:spPr>
+          <a:xfrm>
+            <a:off x="4957152" y="5669302"/>
+            <a:ext cx="2277687" cy="465513"/>
+          </a:xfrm>
+          <a:prstGeom prst="roundRect">
+            <a:avLst/>
+          </a:prstGeom>
+          <a:solidFill>
+            <a:schemeClr val="bg2"/>
+          </a:solidFill>
+          <a:ln>
+            <a:solidFill>
+              <a:schemeClr val="tx1"/>
+            </a:solidFill>
+          </a:ln>
+        </p:spPr>
+        <p:style>
+          <a:lnRef idx="2">
+            <a:schemeClr val="accent1">
+              <a:shade val="15000"/>
+            </a:schemeClr>
+          </a:lnRef>
+          <a:fillRef idx="1">
+            <a:schemeClr val="accent1"/>
+          </a:fillRef>
+          <a:effectRef idx="0">
+            <a:schemeClr val="accent1"/>
+          </a:effectRef>
+          <a:fontRef idx="minor">
+            <a:schemeClr val="lt1"/>
+          </a:fontRef>
+        </p:style>
+        <p:txBody>
+          <a:bodyPr rtlCol="0" anchor="ctr"/>
+          <a:lstStyle/>
+          <a:p>
+            <a:pPr algn="ctr"/>
+            <a:r>
+              <a:rPr lang="en-US" sz="2000">
+                <a:solidFill>
+                  <a:schemeClr val="tx1"/>
+                </a:solidFill>
+                <a:latin typeface="Times New Roman" panose="02020603050405020304" pitchFamily="18" charset="0"/>
+                <a:cs typeface="Times New Roman" panose="02020603050405020304" pitchFamily="18" charset="0"/>
+              </a:rPr>
+              <a:t>Lưu ý</a:t>
+            </a:r>
+          </a:p>
+        </p:txBody>
+      </p:sp>
+      <p:sp>
+        <p:nvSpPr>
+          <p:cNvPr id="12" name="Rectangle: Rounded Corners 11">
+            <a:extLst>
+              <a:ext uri="{FF2B5EF4-FFF2-40B4-BE49-F238E27FC236}">
+                <a16:creationId xmlns:a16="http://schemas.microsoft.com/office/drawing/2014/main" id="{31359D66-3D89-0106-62D7-169807288848}"/>
+              </a:ext>
+            </a:extLst>
+          </p:cNvPr>
+          <p:cNvSpPr/>
+          <p:nvPr/>
+        </p:nvSpPr>
+        <p:spPr>
+          <a:xfrm>
+            <a:off x="3535675" y="536181"/>
+            <a:ext cx="5120640" cy="6001790"/>
+          </a:xfrm>
+          <a:prstGeom prst="roundRect">
+            <a:avLst/>
+          </a:prstGeom>
+          <a:noFill/>
+          <a:ln>
+            <a:solidFill>
+              <a:srgbClr val="FF0000"/>
+            </a:solidFill>
+            <a:prstDash val="dash"/>
+          </a:ln>
+        </p:spPr>
+        <p:style>
+          <a:lnRef idx="2">
+            <a:schemeClr val="accent1">
+              <a:shade val="15000"/>
+            </a:schemeClr>
+          </a:lnRef>
+          <a:fillRef idx="1">
+            <a:schemeClr val="accent1"/>
+          </a:fillRef>
+          <a:effectRef idx="0">
+            <a:schemeClr val="accent1"/>
+          </a:effectRef>
+          <a:fontRef idx="minor">
+            <a:schemeClr val="lt1"/>
+          </a:fontRef>
+        </p:style>
+        <p:txBody>
+          <a:bodyPr rtlCol="0" anchor="ctr"/>
+          <a:lstStyle/>
+          <a:p>
+            <a:pPr algn="ctr"/>
+            <a:endParaRPr lang="en-US" sz="2000">
+              <a:latin typeface="Times New Roman" panose="02020603050405020304" pitchFamily="18" charset="0"/>
+              <a:cs typeface="Times New Roman" panose="02020603050405020304" pitchFamily="18" charset="0"/>
+            </a:endParaRPr>
+          </a:p>
+        </p:txBody>
+      </p:sp>
+      <p:sp>
+        <p:nvSpPr>
+          <p:cNvPr id="2" name="Rectangle: Rounded Corners 1">
+            <a:extLst>
+              <a:ext uri="{FF2B5EF4-FFF2-40B4-BE49-F238E27FC236}">
+                <a16:creationId xmlns:a16="http://schemas.microsoft.com/office/drawing/2014/main" id="{68358D49-BEFB-0F3C-74B3-68D07EFC7EF5}"/>
+              </a:ext>
+            </a:extLst>
+          </p:cNvPr>
+          <p:cNvSpPr/>
+          <p:nvPr/>
+        </p:nvSpPr>
+        <p:spPr>
+          <a:xfrm>
+            <a:off x="4574766" y="145469"/>
+            <a:ext cx="3042458" cy="781396"/>
+          </a:xfrm>
+          <a:prstGeom prst="roundRect">
+            <a:avLst/>
+          </a:prstGeom>
+          <a:solidFill>
+            <a:srgbClr val="FFFFFF"/>
+          </a:solidFill>
+          <a:ln>
+            <a:solidFill>
+              <a:srgbClr val="FF0000"/>
+            </a:solidFill>
+          </a:ln>
+        </p:spPr>
+        <p:style>
+          <a:lnRef idx="2">
+            <a:schemeClr val="accent1">
+              <a:shade val="15000"/>
+            </a:schemeClr>
+          </a:lnRef>
+          <a:fillRef idx="1">
+            <a:schemeClr val="accent1"/>
+          </a:fillRef>
+          <a:effectRef idx="0">
+            <a:schemeClr val="accent1"/>
+          </a:effectRef>
+          <a:fontRef idx="minor">
+            <a:schemeClr val="lt1"/>
+          </a:fontRef>
+        </p:style>
+        <p:txBody>
+          <a:bodyPr rtlCol="0" anchor="ctr"/>
+          <a:lstStyle/>
+          <a:p>
+            <a:pPr algn="ctr"/>
+            <a:r>
+              <a:rPr lang="en-US" sz="2000">
+                <a:ln w="0">
+                  <a:solidFill>
+                    <a:schemeClr val="tx1"/>
+                  </a:solidFill>
+                </a:ln>
+                <a:solidFill>
+                  <a:schemeClr val="tx1"/>
+                </a:solidFill>
+                <a:latin typeface="Times New Roman" panose="02020603050405020304" pitchFamily="18" charset="0"/>
+                <a:cs typeface="Times New Roman" panose="02020603050405020304" pitchFamily="18" charset="0"/>
+              </a:rPr>
+              <a:t>Prompt cho chức năng</a:t>
+            </a:r>
+          </a:p>
+          <a:p>
+            <a:pPr algn="ctr"/>
+            <a:r>
+              <a:rPr lang="en-US" sz="2000">
+                <a:ln w="0">
+                  <a:solidFill>
+                    <a:schemeClr val="tx1"/>
+                  </a:solidFill>
+                </a:ln>
+                <a:solidFill>
+                  <a:schemeClr val="tx1"/>
+                </a:solidFill>
+                <a:latin typeface="Times New Roman" panose="02020603050405020304" pitchFamily="18" charset="0"/>
+                <a:cs typeface="Times New Roman" panose="02020603050405020304" pitchFamily="18" charset="0"/>
+              </a:rPr>
+              <a:t>trò chuyện với người dùng</a:t>
+            </a:r>
+          </a:p>
+        </p:txBody>
+      </p:sp>
+    </p:spTree>
+    <p:extLst>
+      <p:ext uri="{BB962C8B-B14F-4D97-AF65-F5344CB8AC3E}">
+        <p14:creationId xmlns:p14="http://schemas.microsoft.com/office/powerpoint/2010/main" val="2964644478"/>
+      </p:ext>
+    </p:extLst>
+  </p:cSld>
+  <p:clrMapOvr>
+    <a:masterClrMapping/>
+  </p:clrMapOvr>
+</p:sld>
+</file>
+
+<file path=ppt/slides/slide35.xml><?xml version="1.0" encoding="utf-8"?>
+<p:sld xmlns:a="http://schemas.openxmlformats.org/drawingml/2006/main" xmlns:r="http://schemas.openxmlformats.org/officeDocument/2006/relationships" xmlns:p="http://schemas.openxmlformats.org/presentationml/2006/main">
+  <p:cSld>
+    <p:spTree>
+      <p:nvGrpSpPr>
+        <p:cNvPr id="1" name=""/>
+        <p:cNvGrpSpPr/>
+        <p:nvPr/>
+      </p:nvGrpSpPr>
+      <p:grpSpPr>
+        <a:xfrm>
+          <a:off x="0" y="0"/>
+          <a:ext cx="0" cy="0"/>
+          <a:chOff x="0" y="0"/>
+          <a:chExt cx="0" cy="0"/>
+        </a:xfrm>
+      </p:grpSpPr>
+      <p:sp>
+        <p:nvSpPr>
+          <p:cNvPr id="2" name="Rectangle: Rounded Corners 1">
+            <a:extLst>
+              <a:ext uri="{FF2B5EF4-FFF2-40B4-BE49-F238E27FC236}">
+                <a16:creationId xmlns:a16="http://schemas.microsoft.com/office/drawing/2014/main" id="{AB2F63C9-07C9-28F7-CACF-8CC92E29BBF1}"/>
+              </a:ext>
+            </a:extLst>
+          </p:cNvPr>
+          <p:cNvSpPr/>
+          <p:nvPr/>
+        </p:nvSpPr>
+        <p:spPr>
+          <a:xfrm>
+            <a:off x="4957151" y="1317577"/>
+            <a:ext cx="2277687" cy="465513"/>
+          </a:xfrm>
+          <a:prstGeom prst="roundRect">
+            <a:avLst/>
+          </a:prstGeom>
+          <a:solidFill>
+            <a:schemeClr val="bg2"/>
+          </a:solidFill>
+          <a:ln>
+            <a:solidFill>
+              <a:schemeClr val="tx1"/>
+            </a:solidFill>
+          </a:ln>
+        </p:spPr>
+        <p:style>
+          <a:lnRef idx="2">
+            <a:schemeClr val="accent1">
+              <a:shade val="15000"/>
+            </a:schemeClr>
+          </a:lnRef>
+          <a:fillRef idx="1">
+            <a:schemeClr val="accent1"/>
+          </a:fillRef>
+          <a:effectRef idx="0">
+            <a:schemeClr val="accent1"/>
+          </a:effectRef>
+          <a:fontRef idx="minor">
+            <a:schemeClr val="lt1"/>
+          </a:fontRef>
+        </p:style>
+        <p:txBody>
+          <a:bodyPr rtlCol="0" anchor="ctr"/>
+          <a:lstStyle/>
+          <a:p>
+            <a:pPr algn="ctr"/>
+            <a:r>
+              <a:rPr lang="en-US" sz="2000">
+                <a:solidFill>
+                  <a:schemeClr val="tx1"/>
+                </a:solidFill>
+                <a:latin typeface="Times New Roman" panose="02020603050405020304" pitchFamily="18" charset="0"/>
+                <a:cs typeface="Times New Roman" panose="02020603050405020304" pitchFamily="18" charset="0"/>
+              </a:rPr>
+              <a:t>Vai trò</a:t>
+            </a:r>
+          </a:p>
+        </p:txBody>
+      </p:sp>
+      <p:sp>
+        <p:nvSpPr>
+          <p:cNvPr id="3" name="Rectangle: Rounded Corners 2">
+            <a:extLst>
+              <a:ext uri="{FF2B5EF4-FFF2-40B4-BE49-F238E27FC236}">
+                <a16:creationId xmlns:a16="http://schemas.microsoft.com/office/drawing/2014/main" id="{A9748CE9-C615-3005-D1A7-04AD7FAC795C}"/>
+              </a:ext>
+            </a:extLst>
+          </p:cNvPr>
+          <p:cNvSpPr/>
+          <p:nvPr/>
+        </p:nvSpPr>
+        <p:spPr>
+          <a:xfrm>
+            <a:off x="4957151" y="1941045"/>
+            <a:ext cx="2277687" cy="465513"/>
+          </a:xfrm>
+          <a:prstGeom prst="roundRect">
+            <a:avLst/>
+          </a:prstGeom>
+          <a:solidFill>
+            <a:schemeClr val="bg2"/>
+          </a:solidFill>
+          <a:ln>
+            <a:solidFill>
+              <a:schemeClr val="tx1"/>
+            </a:solidFill>
+          </a:ln>
+        </p:spPr>
+        <p:style>
+          <a:lnRef idx="2">
+            <a:schemeClr val="accent1">
+              <a:shade val="15000"/>
+            </a:schemeClr>
+          </a:lnRef>
+          <a:fillRef idx="1">
+            <a:schemeClr val="accent1"/>
+          </a:fillRef>
+          <a:effectRef idx="0">
+            <a:schemeClr val="accent1"/>
+          </a:effectRef>
+          <a:fontRef idx="minor">
+            <a:schemeClr val="lt1"/>
+          </a:fontRef>
+        </p:style>
+        <p:txBody>
+          <a:bodyPr rtlCol="0" anchor="ctr"/>
+          <a:lstStyle/>
+          <a:p>
+            <a:pPr algn="ctr"/>
+            <a:r>
+              <a:rPr lang="en-US" sz="2000">
+                <a:solidFill>
+                  <a:schemeClr val="tx1"/>
+                </a:solidFill>
+                <a:latin typeface="Times New Roman" panose="02020603050405020304" pitchFamily="18" charset="0"/>
+                <a:cs typeface="Times New Roman" panose="02020603050405020304" pitchFamily="18" charset="0"/>
+              </a:rPr>
+              <a:t>Bối cảnh</a:t>
+            </a:r>
+          </a:p>
+        </p:txBody>
+      </p:sp>
+      <p:sp>
+        <p:nvSpPr>
+          <p:cNvPr id="4" name="Rectangle: Rounded Corners 3">
+            <a:extLst>
+              <a:ext uri="{FF2B5EF4-FFF2-40B4-BE49-F238E27FC236}">
+                <a16:creationId xmlns:a16="http://schemas.microsoft.com/office/drawing/2014/main" id="{523FB17A-2C6D-D419-B862-CAC1F16E1338}"/>
+              </a:ext>
+            </a:extLst>
+          </p:cNvPr>
+          <p:cNvSpPr/>
+          <p:nvPr/>
+        </p:nvSpPr>
+        <p:spPr>
+          <a:xfrm>
+            <a:off x="4957151" y="2564513"/>
+            <a:ext cx="2277687" cy="465513"/>
+          </a:xfrm>
+          <a:prstGeom prst="roundRect">
+            <a:avLst/>
+          </a:prstGeom>
+          <a:solidFill>
+            <a:schemeClr val="bg2"/>
+          </a:solidFill>
+          <a:ln>
+            <a:solidFill>
+              <a:schemeClr val="tx1"/>
+            </a:solidFill>
+          </a:ln>
+        </p:spPr>
+        <p:style>
+          <a:lnRef idx="2">
+            <a:schemeClr val="accent1">
+              <a:shade val="15000"/>
+            </a:schemeClr>
+          </a:lnRef>
+          <a:fillRef idx="1">
+            <a:schemeClr val="accent1"/>
+          </a:fillRef>
+          <a:effectRef idx="0">
+            <a:schemeClr val="accent1"/>
+          </a:effectRef>
+          <a:fontRef idx="minor">
+            <a:schemeClr val="lt1"/>
+          </a:fontRef>
+        </p:style>
+        <p:txBody>
+          <a:bodyPr rtlCol="0" anchor="ctr"/>
+          <a:lstStyle/>
+          <a:p>
+            <a:pPr algn="ctr"/>
+            <a:r>
+              <a:rPr lang="en-US" sz="2000">
+                <a:solidFill>
+                  <a:schemeClr val="tx1"/>
+                </a:solidFill>
+                <a:latin typeface="Times New Roman" panose="02020603050405020304" pitchFamily="18" charset="0"/>
+                <a:cs typeface="Times New Roman" panose="02020603050405020304" pitchFamily="18" charset="0"/>
+              </a:rPr>
+              <a:t>Câu hỏi</a:t>
+            </a:r>
+          </a:p>
+        </p:txBody>
+      </p:sp>
+      <p:sp>
+        <p:nvSpPr>
+          <p:cNvPr id="5" name="Rectangle: Rounded Corners 4">
+            <a:extLst>
+              <a:ext uri="{FF2B5EF4-FFF2-40B4-BE49-F238E27FC236}">
+                <a16:creationId xmlns:a16="http://schemas.microsoft.com/office/drawing/2014/main" id="{52A1AEB5-777B-E184-7C3D-ED57EC360533}"/>
+              </a:ext>
+            </a:extLst>
+          </p:cNvPr>
+          <p:cNvSpPr/>
+          <p:nvPr/>
+        </p:nvSpPr>
+        <p:spPr>
+          <a:xfrm>
+            <a:off x="4957151" y="3811341"/>
+            <a:ext cx="2277687" cy="465513"/>
+          </a:xfrm>
+          <a:prstGeom prst="roundRect">
+            <a:avLst/>
+          </a:prstGeom>
+          <a:solidFill>
+            <a:schemeClr val="bg2"/>
+          </a:solidFill>
+          <a:ln>
+            <a:solidFill>
+              <a:schemeClr val="tx1"/>
+            </a:solidFill>
+          </a:ln>
+        </p:spPr>
+        <p:style>
+          <a:lnRef idx="2">
+            <a:schemeClr val="accent1">
+              <a:shade val="15000"/>
+            </a:schemeClr>
+          </a:lnRef>
+          <a:fillRef idx="1">
+            <a:schemeClr val="accent1"/>
+          </a:fillRef>
+          <a:effectRef idx="0">
+            <a:schemeClr val="accent1"/>
+          </a:effectRef>
+          <a:fontRef idx="minor">
+            <a:schemeClr val="lt1"/>
+          </a:fontRef>
+        </p:style>
+        <p:txBody>
+          <a:bodyPr rtlCol="0" anchor="ctr"/>
+          <a:lstStyle/>
+          <a:p>
+            <a:pPr algn="ctr"/>
+            <a:r>
+              <a:rPr lang="en-US" sz="2000">
+                <a:solidFill>
+                  <a:schemeClr val="tx1"/>
+                </a:solidFill>
+                <a:latin typeface="Times New Roman" panose="02020603050405020304" pitchFamily="18" charset="0"/>
+                <a:cs typeface="Times New Roman" panose="02020603050405020304" pitchFamily="18" charset="0"/>
+              </a:rPr>
+              <a:t>Ví dụ 1</a:t>
+            </a:r>
+          </a:p>
+        </p:txBody>
+      </p:sp>
+      <p:sp>
+        <p:nvSpPr>
+          <p:cNvPr id="6" name="Rectangle: Rounded Corners 5">
+            <a:extLst>
+              <a:ext uri="{FF2B5EF4-FFF2-40B4-BE49-F238E27FC236}">
+                <a16:creationId xmlns:a16="http://schemas.microsoft.com/office/drawing/2014/main" id="{4C0C7C49-EAAD-F3F6-4482-427D3CDA991E}"/>
+              </a:ext>
+            </a:extLst>
+          </p:cNvPr>
+          <p:cNvSpPr/>
+          <p:nvPr/>
+        </p:nvSpPr>
+        <p:spPr>
+          <a:xfrm>
+            <a:off x="4957151" y="4434809"/>
+            <a:ext cx="2277687" cy="465513"/>
+          </a:xfrm>
+          <a:prstGeom prst="roundRect">
+            <a:avLst/>
+          </a:prstGeom>
+          <a:solidFill>
+            <a:schemeClr val="bg2"/>
+          </a:solidFill>
+          <a:ln>
+            <a:solidFill>
+              <a:schemeClr val="tx1"/>
+            </a:solidFill>
+          </a:ln>
+        </p:spPr>
+        <p:style>
+          <a:lnRef idx="2">
+            <a:schemeClr val="accent1">
+              <a:shade val="15000"/>
+            </a:schemeClr>
+          </a:lnRef>
+          <a:fillRef idx="1">
+            <a:schemeClr val="accent1"/>
+          </a:fillRef>
+          <a:effectRef idx="0">
+            <a:schemeClr val="accent1"/>
+          </a:effectRef>
+          <a:fontRef idx="minor">
+            <a:schemeClr val="lt1"/>
+          </a:fontRef>
+        </p:style>
+        <p:txBody>
+          <a:bodyPr rtlCol="0" anchor="ctr"/>
+          <a:lstStyle/>
+          <a:p>
+            <a:pPr algn="ctr"/>
+            <a:r>
+              <a:rPr lang="en-US" sz="2000">
+                <a:solidFill>
+                  <a:schemeClr val="tx1"/>
+                </a:solidFill>
+                <a:latin typeface="Times New Roman" panose="02020603050405020304" pitchFamily="18" charset="0"/>
+                <a:cs typeface="Times New Roman" panose="02020603050405020304" pitchFamily="18" charset="0"/>
+              </a:rPr>
+              <a:t>Ví dụ …</a:t>
+            </a:r>
+          </a:p>
+        </p:txBody>
+      </p:sp>
+      <p:sp>
+        <p:nvSpPr>
+          <p:cNvPr id="7" name="Rectangle: Rounded Corners 6">
+            <a:extLst>
+              <a:ext uri="{FF2B5EF4-FFF2-40B4-BE49-F238E27FC236}">
+                <a16:creationId xmlns:a16="http://schemas.microsoft.com/office/drawing/2014/main" id="{71D9D5E7-CE64-04CF-C0A7-0AB82FF47521}"/>
+              </a:ext>
+            </a:extLst>
+          </p:cNvPr>
+          <p:cNvSpPr/>
+          <p:nvPr/>
+        </p:nvSpPr>
+        <p:spPr>
+          <a:xfrm>
+            <a:off x="4957151" y="5058277"/>
+            <a:ext cx="2277687" cy="465513"/>
+          </a:xfrm>
+          <a:prstGeom prst="roundRect">
+            <a:avLst/>
+          </a:prstGeom>
+          <a:solidFill>
+            <a:schemeClr val="bg2"/>
+          </a:solidFill>
+          <a:ln>
+            <a:solidFill>
+              <a:schemeClr val="tx1"/>
+            </a:solidFill>
+          </a:ln>
+        </p:spPr>
+        <p:style>
+          <a:lnRef idx="2">
+            <a:schemeClr val="accent1">
+              <a:shade val="15000"/>
+            </a:schemeClr>
+          </a:lnRef>
+          <a:fillRef idx="1">
+            <a:schemeClr val="accent1"/>
+          </a:fillRef>
+          <a:effectRef idx="0">
+            <a:schemeClr val="accent1"/>
+          </a:effectRef>
+          <a:fontRef idx="minor">
+            <a:schemeClr val="lt1"/>
+          </a:fontRef>
+        </p:style>
+        <p:txBody>
+          <a:bodyPr rtlCol="0" anchor="ctr"/>
+          <a:lstStyle/>
+          <a:p>
+            <a:pPr algn="ctr"/>
+            <a:r>
+              <a:rPr lang="en-US" sz="2000">
+                <a:solidFill>
+                  <a:schemeClr val="tx1"/>
+                </a:solidFill>
+                <a:latin typeface="Times New Roman" panose="02020603050405020304" pitchFamily="18" charset="0"/>
+                <a:cs typeface="Times New Roman" panose="02020603050405020304" pitchFamily="18" charset="0"/>
+              </a:rPr>
+              <a:t>Hướng dẫn</a:t>
+            </a:r>
+          </a:p>
+        </p:txBody>
+      </p:sp>
+      <p:sp>
+        <p:nvSpPr>
+          <p:cNvPr id="8" name="Rectangle: Rounded Corners 7">
+            <a:extLst>
+              <a:ext uri="{FF2B5EF4-FFF2-40B4-BE49-F238E27FC236}">
+                <a16:creationId xmlns:a16="http://schemas.microsoft.com/office/drawing/2014/main" id="{0AB434B3-C344-31F7-495F-0AA705CD2676}"/>
+              </a:ext>
+            </a:extLst>
+          </p:cNvPr>
+          <p:cNvSpPr/>
+          <p:nvPr/>
+        </p:nvSpPr>
+        <p:spPr>
+          <a:xfrm>
+            <a:off x="4957151" y="5681745"/>
+            <a:ext cx="2277687" cy="465513"/>
+          </a:xfrm>
+          <a:prstGeom prst="roundRect">
+            <a:avLst/>
+          </a:prstGeom>
+          <a:solidFill>
+            <a:schemeClr val="bg2"/>
+          </a:solidFill>
+          <a:ln>
+            <a:solidFill>
+              <a:schemeClr val="tx1"/>
+            </a:solidFill>
+          </a:ln>
+        </p:spPr>
+        <p:style>
+          <a:lnRef idx="2">
+            <a:schemeClr val="accent1">
+              <a:shade val="15000"/>
+            </a:schemeClr>
+          </a:lnRef>
+          <a:fillRef idx="1">
+            <a:schemeClr val="accent1"/>
+          </a:fillRef>
+          <a:effectRef idx="0">
+            <a:schemeClr val="accent1"/>
+          </a:effectRef>
+          <a:fontRef idx="minor">
+            <a:schemeClr val="lt1"/>
+          </a:fontRef>
+        </p:style>
+        <p:txBody>
+          <a:bodyPr rtlCol="0" anchor="ctr"/>
+          <a:lstStyle/>
+          <a:p>
+            <a:pPr algn="ctr"/>
+            <a:r>
+              <a:rPr lang="en-US" sz="2000">
+                <a:solidFill>
+                  <a:schemeClr val="tx1"/>
+                </a:solidFill>
+                <a:latin typeface="Times New Roman" panose="02020603050405020304" pitchFamily="18" charset="0"/>
+                <a:cs typeface="Times New Roman" panose="02020603050405020304" pitchFamily="18" charset="0"/>
+              </a:rPr>
+              <a:t>Lưu ý</a:t>
+            </a:r>
+          </a:p>
+        </p:txBody>
+      </p:sp>
+      <p:sp>
+        <p:nvSpPr>
+          <p:cNvPr id="9" name="Rectangle: Rounded Corners 8">
+            <a:extLst>
+              <a:ext uri="{FF2B5EF4-FFF2-40B4-BE49-F238E27FC236}">
+                <a16:creationId xmlns:a16="http://schemas.microsoft.com/office/drawing/2014/main" id="{D800047B-C85B-E86D-B48E-E40693192A88}"/>
+              </a:ext>
+            </a:extLst>
+          </p:cNvPr>
+          <p:cNvSpPr/>
+          <p:nvPr/>
+        </p:nvSpPr>
+        <p:spPr>
+          <a:xfrm>
+            <a:off x="3535675" y="536181"/>
+            <a:ext cx="5120640" cy="6001790"/>
+          </a:xfrm>
+          <a:prstGeom prst="roundRect">
+            <a:avLst/>
+          </a:prstGeom>
+          <a:noFill/>
+          <a:ln>
+            <a:solidFill>
+              <a:srgbClr val="FF0000"/>
+            </a:solidFill>
+            <a:prstDash val="dash"/>
+          </a:ln>
+        </p:spPr>
+        <p:style>
+          <a:lnRef idx="2">
+            <a:schemeClr val="accent1">
+              <a:shade val="15000"/>
+            </a:schemeClr>
+          </a:lnRef>
+          <a:fillRef idx="1">
+            <a:schemeClr val="accent1"/>
+          </a:fillRef>
+          <a:effectRef idx="0">
+            <a:schemeClr val="accent1"/>
+          </a:effectRef>
+          <a:fontRef idx="minor">
+            <a:schemeClr val="lt1"/>
+          </a:fontRef>
+        </p:style>
+        <p:txBody>
+          <a:bodyPr rtlCol="0" anchor="ctr"/>
+          <a:lstStyle/>
+          <a:p>
+            <a:pPr algn="ctr"/>
+            <a:endParaRPr lang="en-US" sz="2000">
+              <a:latin typeface="Times New Roman" panose="02020603050405020304" pitchFamily="18" charset="0"/>
+              <a:cs typeface="Times New Roman" panose="02020603050405020304" pitchFamily="18" charset="0"/>
+            </a:endParaRPr>
+          </a:p>
+        </p:txBody>
+      </p:sp>
+      <p:sp>
+        <p:nvSpPr>
+          <p:cNvPr id="10" name="Rectangle: Rounded Corners 9">
+            <a:extLst>
+              <a:ext uri="{FF2B5EF4-FFF2-40B4-BE49-F238E27FC236}">
+                <a16:creationId xmlns:a16="http://schemas.microsoft.com/office/drawing/2014/main" id="{2260C8B5-26F6-45A9-6F8F-27DB4488B198}"/>
+              </a:ext>
+            </a:extLst>
+          </p:cNvPr>
+          <p:cNvSpPr/>
+          <p:nvPr/>
+        </p:nvSpPr>
+        <p:spPr>
+          <a:xfrm>
+            <a:off x="4574766" y="145469"/>
+            <a:ext cx="3042458" cy="781396"/>
+          </a:xfrm>
+          <a:prstGeom prst="roundRect">
+            <a:avLst/>
+          </a:prstGeom>
+          <a:solidFill>
+            <a:srgbClr val="FFFFFF"/>
+          </a:solidFill>
+          <a:ln>
+            <a:solidFill>
+              <a:srgbClr val="FF0000"/>
+            </a:solidFill>
+          </a:ln>
+        </p:spPr>
+        <p:style>
+          <a:lnRef idx="2">
+            <a:schemeClr val="accent1">
+              <a:shade val="15000"/>
+            </a:schemeClr>
+          </a:lnRef>
+          <a:fillRef idx="1">
+            <a:schemeClr val="accent1"/>
+          </a:fillRef>
+          <a:effectRef idx="0">
+            <a:schemeClr val="accent1"/>
+          </a:effectRef>
+          <a:fontRef idx="minor">
+            <a:schemeClr val="lt1"/>
+          </a:fontRef>
+        </p:style>
+        <p:txBody>
+          <a:bodyPr rtlCol="0" anchor="ctr"/>
+          <a:lstStyle/>
+          <a:p>
+            <a:pPr algn="ctr"/>
+            <a:r>
+              <a:rPr lang="en-US" sz="2000">
+                <a:ln w="0">
+                  <a:solidFill>
+                    <a:schemeClr val="tx1"/>
+                  </a:solidFill>
+                </a:ln>
+                <a:solidFill>
+                  <a:schemeClr val="tx1"/>
+                </a:solidFill>
+                <a:latin typeface="Times New Roman" panose="02020603050405020304" pitchFamily="18" charset="0"/>
+                <a:cs typeface="Times New Roman" panose="02020603050405020304" pitchFamily="18" charset="0"/>
+              </a:rPr>
+              <a:t>Prompt cho tác vụ</a:t>
+            </a:r>
+          </a:p>
+          <a:p>
+            <a:pPr algn="ctr"/>
+            <a:r>
+              <a:rPr lang="en-US" sz="2000">
+                <a:ln w="0">
+                  <a:solidFill>
+                    <a:schemeClr val="tx1"/>
+                  </a:solidFill>
+                </a:ln>
+                <a:solidFill>
+                  <a:schemeClr val="tx1"/>
+                </a:solidFill>
+                <a:latin typeface="Times New Roman" panose="02020603050405020304" pitchFamily="18" charset="0"/>
+                <a:cs typeface="Times New Roman" panose="02020603050405020304" pitchFamily="18" charset="0"/>
+              </a:rPr>
+              <a:t>trích xuất thông tin</a:t>
+            </a:r>
+          </a:p>
+        </p:txBody>
+      </p:sp>
+      <p:sp>
+        <p:nvSpPr>
+          <p:cNvPr id="11" name="Rectangle: Rounded Corners 10">
+            <a:extLst>
+              <a:ext uri="{FF2B5EF4-FFF2-40B4-BE49-F238E27FC236}">
+                <a16:creationId xmlns:a16="http://schemas.microsoft.com/office/drawing/2014/main" id="{F4D89389-FC1C-90EA-1BC5-0AE4888836C0}"/>
+              </a:ext>
+            </a:extLst>
+          </p:cNvPr>
+          <p:cNvSpPr/>
+          <p:nvPr/>
+        </p:nvSpPr>
+        <p:spPr>
+          <a:xfrm>
+            <a:off x="4957151" y="3187927"/>
+            <a:ext cx="2277687" cy="465513"/>
+          </a:xfrm>
+          <a:prstGeom prst="roundRect">
+            <a:avLst/>
+          </a:prstGeom>
+          <a:solidFill>
+            <a:schemeClr val="bg2"/>
+          </a:solidFill>
+          <a:ln>
+            <a:solidFill>
+              <a:schemeClr val="tx1"/>
+            </a:solidFill>
+          </a:ln>
+        </p:spPr>
+        <p:style>
+          <a:lnRef idx="2">
+            <a:schemeClr val="accent1">
+              <a:shade val="15000"/>
+            </a:schemeClr>
+          </a:lnRef>
+          <a:fillRef idx="1">
+            <a:schemeClr val="accent1"/>
+          </a:fillRef>
+          <a:effectRef idx="0">
+            <a:schemeClr val="accent1"/>
+          </a:effectRef>
+          <a:fontRef idx="minor">
+            <a:schemeClr val="lt1"/>
+          </a:fontRef>
+        </p:style>
+        <p:txBody>
+          <a:bodyPr rtlCol="0" anchor="ctr"/>
+          <a:lstStyle/>
+          <a:p>
+            <a:pPr algn="ctr"/>
+            <a:r>
+              <a:rPr lang="en-US" sz="2000">
+                <a:solidFill>
+                  <a:schemeClr val="tx1"/>
+                </a:solidFill>
+                <a:latin typeface="Times New Roman" panose="02020603050405020304" pitchFamily="18" charset="0"/>
+                <a:cs typeface="Times New Roman" panose="02020603050405020304" pitchFamily="18" charset="0"/>
+              </a:rPr>
+              <a:t>Đầu ra có cấu trúc</a:t>
+            </a:r>
+          </a:p>
+        </p:txBody>
+      </p:sp>
+    </p:spTree>
+    <p:extLst>
+      <p:ext uri="{BB962C8B-B14F-4D97-AF65-F5344CB8AC3E}">
+        <p14:creationId xmlns:p14="http://schemas.microsoft.com/office/powerpoint/2010/main" val="3447625200"/>
+      </p:ext>
+    </p:extLst>
+  </p:cSld>
+  <p:clrMapOvr>
+    <a:masterClrMapping/>
+  </p:clrMapOvr>
+</p:sld>
+</file>
+
+<file path=ppt/slides/slide36.xml><?xml version="1.0" encoding="utf-8"?>
+<p:sld xmlns:a="http://schemas.openxmlformats.org/drawingml/2006/main" xmlns:r="http://schemas.openxmlformats.org/officeDocument/2006/relationships" xmlns:p="http://schemas.openxmlformats.org/presentationml/2006/main">
+  <p:cSld>
+    <p:spTree>
+      <p:nvGrpSpPr>
+        <p:cNvPr id="1" name=""/>
+        <p:cNvGrpSpPr/>
+        <p:nvPr/>
+      </p:nvGrpSpPr>
+      <p:grpSpPr>
+        <a:xfrm>
+          <a:off x="0" y="0"/>
+          <a:ext cx="0" cy="0"/>
+          <a:chOff x="0" y="0"/>
+          <a:chExt cx="0" cy="0"/>
+        </a:xfrm>
+      </p:grpSpPr>
       <p:pic>
         <p:nvPicPr>
           <p:cNvPr id="3" name="Picture 2">

--- a/documents/hinh_ve_trong_cao_cao_do_an.pptx
+++ b/documents/hinh_ve_trong_cao_cao_do_an.pptx
@@ -5,7 +5,7 @@
     <p:sldMasterId id="2147483648" r:id="rId1"/>
   </p:sldMasterIdLst>
   <p:notesMasterIdLst>
-    <p:notesMasterId r:id="rId38"/>
+    <p:notesMasterId r:id="rId39"/>
   </p:notesMasterIdLst>
   <p:sldIdLst>
     <p:sldId id="263" r:id="rId2"/>
@@ -23,27 +23,28 @@
     <p:sldId id="265" r:id="rId14"/>
     <p:sldId id="281" r:id="rId15"/>
     <p:sldId id="261" r:id="rId16"/>
-    <p:sldId id="266" r:id="rId17"/>
-    <p:sldId id="267" r:id="rId18"/>
-    <p:sldId id="260" r:id="rId19"/>
-    <p:sldId id="262" r:id="rId20"/>
-    <p:sldId id="269" r:id="rId21"/>
-    <p:sldId id="268" r:id="rId22"/>
-    <p:sldId id="272" r:id="rId23"/>
-    <p:sldId id="271" r:id="rId24"/>
-    <p:sldId id="274" r:id="rId25"/>
-    <p:sldId id="273" r:id="rId26"/>
-    <p:sldId id="276" r:id="rId27"/>
-    <p:sldId id="275" r:id="rId28"/>
-    <p:sldId id="278" r:id="rId29"/>
-    <p:sldId id="277" r:id="rId30"/>
-    <p:sldId id="280" r:id="rId31"/>
-    <p:sldId id="279" r:id="rId32"/>
-    <p:sldId id="294" r:id="rId33"/>
-    <p:sldId id="295" r:id="rId34"/>
-    <p:sldId id="292" r:id="rId35"/>
-    <p:sldId id="293" r:id="rId36"/>
-    <p:sldId id="270" r:id="rId37"/>
+    <p:sldId id="296" r:id="rId17"/>
+    <p:sldId id="266" r:id="rId18"/>
+    <p:sldId id="267" r:id="rId19"/>
+    <p:sldId id="260" r:id="rId20"/>
+    <p:sldId id="262" r:id="rId21"/>
+    <p:sldId id="269" r:id="rId22"/>
+    <p:sldId id="268" r:id="rId23"/>
+    <p:sldId id="272" r:id="rId24"/>
+    <p:sldId id="271" r:id="rId25"/>
+    <p:sldId id="274" r:id="rId26"/>
+    <p:sldId id="273" r:id="rId27"/>
+    <p:sldId id="276" r:id="rId28"/>
+    <p:sldId id="275" r:id="rId29"/>
+    <p:sldId id="278" r:id="rId30"/>
+    <p:sldId id="277" r:id="rId31"/>
+    <p:sldId id="280" r:id="rId32"/>
+    <p:sldId id="279" r:id="rId33"/>
+    <p:sldId id="294" r:id="rId34"/>
+    <p:sldId id="295" r:id="rId35"/>
+    <p:sldId id="292" r:id="rId36"/>
+    <p:sldId id="293" r:id="rId37"/>
+    <p:sldId id="270" r:id="rId38"/>
   </p:sldIdLst>
   <p:sldSz cx="12192000" cy="6858000"/>
   <p:notesSz cx="6858000" cy="9144000"/>
@@ -232,7 +233,7 @@
           <a:p>
             <a:fld id="{1699B688-3183-4F5A-8B47-70F70E2DF15B}" type="datetimeFigureOut">
               <a:rPr lang="en-US" smtClean="0"/>
-              <a:t>5/30/2025</a:t>
+              <a:t>6/1/2025</a:t>
             </a:fld>
             <a:endParaRPr lang="en-US"/>
           </a:p>
@@ -1029,7 +1030,13 @@
   <p:cSld>
     <p:spTree>
       <p:nvGrpSpPr>
-        <p:cNvPr id="1" name=""/>
+        <p:cNvPr id="1" name="">
+          <a:extLst>
+            <a:ext uri="{FF2B5EF4-FFF2-40B4-BE49-F238E27FC236}">
+              <a16:creationId xmlns:a16="http://schemas.microsoft.com/office/drawing/2014/main" id="{B4AF3952-BD35-2A1B-2A4C-9EA2F22A7638}"/>
+            </a:ext>
+          </a:extLst>
+        </p:cNvPr>
         <p:cNvGrpSpPr/>
         <p:nvPr/>
       </p:nvGrpSpPr>
@@ -1043,7 +1050,13 @@
       </p:grpSpPr>
       <p:sp>
         <p:nvSpPr>
-          <p:cNvPr id="2" name="Slide Image Placeholder 1"/>
+          <p:cNvPr id="2" name="Slide Image Placeholder 1">
+            <a:extLst>
+              <a:ext uri="{FF2B5EF4-FFF2-40B4-BE49-F238E27FC236}">
+                <a16:creationId xmlns:a16="http://schemas.microsoft.com/office/drawing/2014/main" id="{14315B6B-1CBB-A872-614C-E59FF75E3644}"/>
+              </a:ext>
+            </a:extLst>
+          </p:cNvPr>
           <p:cNvSpPr>
             <a:spLocks noGrp="1" noRot="1" noChangeAspect="1"/>
           </p:cNvSpPr>
@@ -1055,7 +1068,13 @@
       </p:sp>
       <p:sp>
         <p:nvSpPr>
-          <p:cNvPr id="3" name="Notes Placeholder 2"/>
+          <p:cNvPr id="3" name="Notes Placeholder 2">
+            <a:extLst>
+              <a:ext uri="{FF2B5EF4-FFF2-40B4-BE49-F238E27FC236}">
+                <a16:creationId xmlns:a16="http://schemas.microsoft.com/office/drawing/2014/main" id="{5071C78B-E7A3-9E23-C632-600A3FAEC438}"/>
+              </a:ext>
+            </a:extLst>
+          </p:cNvPr>
           <p:cNvSpPr>
             <a:spLocks noGrp="1"/>
           </p:cNvSpPr>
@@ -1070,15 +1089,24 @@
           <a:p>
             <a:r>
               <a:rPr lang="vi-VN"/>
-              <a:t>Các bước thu thập dữ liệu</a:t>
-            </a:r>
-            <a:endParaRPr lang="en-US"/>
+              <a:t>Biểu đồ</a:t>
+            </a:r>
+            <a:r>
+              <a:rPr lang="en-US"/>
+              <a:t> hệ thống RAG đề xuất</a:t>
+            </a:r>
           </a:p>
         </p:txBody>
       </p:sp>
       <p:sp>
         <p:nvSpPr>
-          <p:cNvPr id="4" name="Slide Number Placeholder 3"/>
+          <p:cNvPr id="4" name="Slide Number Placeholder 3">
+            <a:extLst>
+              <a:ext uri="{FF2B5EF4-FFF2-40B4-BE49-F238E27FC236}">
+                <a16:creationId xmlns:a16="http://schemas.microsoft.com/office/drawing/2014/main" id="{68DB8ECE-D0D9-0AA7-0B8C-BCEBAC1D2601}"/>
+              </a:ext>
+            </a:extLst>
+          </p:cNvPr>
           <p:cNvSpPr>
             <a:spLocks noGrp="1"/>
           </p:cNvSpPr>
@@ -1102,7 +1130,7 @@
     </p:spTree>
     <p:extLst>
       <p:ext uri="{BB962C8B-B14F-4D97-AF65-F5344CB8AC3E}">
-        <p14:creationId xmlns:p14="http://schemas.microsoft.com/office/powerpoint/2010/main" val="1750388144"/>
+        <p14:creationId xmlns:p14="http://schemas.microsoft.com/office/powerpoint/2010/main" val="523582403"/>
       </p:ext>
     </p:extLst>
   </p:cSld>
@@ -1158,7 +1186,7 @@
           <a:p>
             <a:r>
               <a:rPr lang="vi-VN"/>
-              <a:t>Các bước tiền xử lý dữ liệu</a:t>
+              <a:t>Các bước thu thập dữ liệu</a:t>
             </a:r>
             <a:endParaRPr lang="en-US"/>
           </a:p>
@@ -1190,7 +1218,7 @@
     </p:spTree>
     <p:extLst>
       <p:ext uri="{BB962C8B-B14F-4D97-AF65-F5344CB8AC3E}">
-        <p14:creationId xmlns:p14="http://schemas.microsoft.com/office/powerpoint/2010/main" val="2492166615"/>
+        <p14:creationId xmlns:p14="http://schemas.microsoft.com/office/powerpoint/2010/main" val="1750388144"/>
       </p:ext>
     </p:extLst>
   </p:cSld>
@@ -1244,27 +1272,11 @@
           <a:bodyPr/>
           <a:lstStyle/>
           <a:p>
-            <a:pPr marL="0" marR="0" lvl="0" indent="0" algn="l" defTabSz="914400" rtl="0" eaLnBrk="1" fontAlgn="auto" latinLnBrk="0" hangingPunct="1">
-              <a:lnSpc>
-                <a:spcPct val="100000"/>
-              </a:lnSpc>
-              <a:spcBef>
-                <a:spcPts val="0"/>
-              </a:spcBef>
-              <a:spcAft>
-                <a:spcPts val="0"/>
-              </a:spcAft>
-              <a:buClrTx/>
-              <a:buSzTx/>
-              <a:buFontTx/>
-              <a:buNone/>
-              <a:tabLst/>
-              <a:defRPr/>
-            </a:pPr>
-            <a:r>
-              <a:rPr lang="en-US"/>
-              <a:t>Minh họa tại sao phải đánh giá các mô hình embedding</a:t>
-            </a:r>
+            <a:r>
+              <a:rPr lang="vi-VN"/>
+              <a:t>Các bước tiền xử lý dữ liệu</a:t>
+            </a:r>
+            <a:endParaRPr lang="en-US"/>
           </a:p>
         </p:txBody>
       </p:sp>
@@ -1294,7 +1306,7 @@
     </p:spTree>
     <p:extLst>
       <p:ext uri="{BB962C8B-B14F-4D97-AF65-F5344CB8AC3E}">
-        <p14:creationId xmlns:p14="http://schemas.microsoft.com/office/powerpoint/2010/main" val="2160103746"/>
+        <p14:creationId xmlns:p14="http://schemas.microsoft.com/office/powerpoint/2010/main" val="2492166615"/>
       </p:ext>
     </p:extLst>
   </p:cSld>
@@ -1348,11 +1360,27 @@
           <a:bodyPr/>
           <a:lstStyle/>
           <a:p>
-            <a:r>
-              <a:rPr lang="vi-VN"/>
-              <a:t>Biểu đồ usecase đăng ký/đăng nhập</a:t>
-            </a:r>
-            <a:endParaRPr lang="en-US"/>
+            <a:pPr marL="0" marR="0" lvl="0" indent="0" algn="l" defTabSz="914400" rtl="0" eaLnBrk="1" fontAlgn="auto" latinLnBrk="0" hangingPunct="1">
+              <a:lnSpc>
+                <a:spcPct val="100000"/>
+              </a:lnSpc>
+              <a:spcBef>
+                <a:spcPts val="0"/>
+              </a:spcBef>
+              <a:spcAft>
+                <a:spcPts val="0"/>
+              </a:spcAft>
+              <a:buClrTx/>
+              <a:buSzTx/>
+              <a:buFontTx/>
+              <a:buNone/>
+              <a:tabLst/>
+              <a:defRPr/>
+            </a:pPr>
+            <a:r>
+              <a:rPr lang="en-US"/>
+              <a:t>Minh họa tại sao phải đánh giá các mô hình embedding</a:t>
+            </a:r>
           </a:p>
         </p:txBody>
       </p:sp>
@@ -1373,7 +1401,7 @@
           <a:p>
             <a:fld id="{959F4E64-33AD-4E03-A94E-822473CE3B48}" type="slidenum">
               <a:rPr lang="en-US" smtClean="0"/>
-              <a:t>20</a:t>
+              <a:t>19</a:t>
             </a:fld>
             <a:endParaRPr lang="en-US"/>
           </a:p>
@@ -1382,7 +1410,7 @@
     </p:spTree>
     <p:extLst>
       <p:ext uri="{BB962C8B-B14F-4D97-AF65-F5344CB8AC3E}">
-        <p14:creationId xmlns:p14="http://schemas.microsoft.com/office/powerpoint/2010/main" val="3113383046"/>
+        <p14:creationId xmlns:p14="http://schemas.microsoft.com/office/powerpoint/2010/main" val="2160103746"/>
       </p:ext>
     </p:extLst>
   </p:cSld>
@@ -1437,9 +1465,10 @@
           <a:lstStyle/>
           <a:p>
             <a:r>
-              <a:rPr lang="en-US"/>
-              <a:t>Biểu đồ chức năng đăng nhập – đăng ký</a:t>
-            </a:r>
+              <a:rPr lang="vi-VN"/>
+              <a:t>Biểu đồ usecase đăng ký/đăng nhập</a:t>
+            </a:r>
+            <a:endParaRPr lang="en-US"/>
           </a:p>
         </p:txBody>
       </p:sp>
@@ -1469,7 +1498,7 @@
     </p:spTree>
     <p:extLst>
       <p:ext uri="{BB962C8B-B14F-4D97-AF65-F5344CB8AC3E}">
-        <p14:creationId xmlns:p14="http://schemas.microsoft.com/office/powerpoint/2010/main" val="3689453927"/>
+        <p14:creationId xmlns:p14="http://schemas.microsoft.com/office/powerpoint/2010/main" val="3113383046"/>
       </p:ext>
     </p:extLst>
   </p:cSld>
@@ -1612,7 +1641,7 @@
           <a:p>
             <a:r>
               <a:rPr lang="en-US"/>
-              <a:t>Biểu đồ use case chức năng người dùng cài đặt tùy chọn</a:t>
+              <a:t>Biểu đồ chức năng đăng nhập – đăng ký</a:t>
             </a:r>
           </a:p>
         </p:txBody>
@@ -1643,7 +1672,7 @@
     </p:spTree>
     <p:extLst>
       <p:ext uri="{BB962C8B-B14F-4D97-AF65-F5344CB8AC3E}">
-        <p14:creationId xmlns:p14="http://schemas.microsoft.com/office/powerpoint/2010/main" val="1828968213"/>
+        <p14:creationId xmlns:p14="http://schemas.microsoft.com/office/powerpoint/2010/main" val="3689453927"/>
       </p:ext>
     </p:extLst>
   </p:cSld>
@@ -1699,7 +1728,7 @@
           <a:p>
             <a:r>
               <a:rPr lang="en-US"/>
-              <a:t>Biểu đồ chức năng người dùng cài đặt tùy chọn</a:t>
+              <a:t>Biểu đồ use case chức năng người dùng cài đặt tùy chọn</a:t>
             </a:r>
           </a:p>
         </p:txBody>
@@ -1730,7 +1759,7 @@
     </p:spTree>
     <p:extLst>
       <p:ext uri="{BB962C8B-B14F-4D97-AF65-F5344CB8AC3E}">
-        <p14:creationId xmlns:p14="http://schemas.microsoft.com/office/powerpoint/2010/main" val="2854509630"/>
+        <p14:creationId xmlns:p14="http://schemas.microsoft.com/office/powerpoint/2010/main" val="1828968213"/>
       </p:ext>
     </p:extLst>
   </p:cSld>
@@ -1786,7 +1815,7 @@
           <a:p>
             <a:r>
               <a:rPr lang="en-US"/>
-              <a:t>Biểu đồ use case chức năng khởi tạo starter</a:t>
+              <a:t>Biểu đồ chức năng người dùng cài đặt tùy chọn</a:t>
             </a:r>
           </a:p>
         </p:txBody>
@@ -1817,7 +1846,7 @@
     </p:spTree>
     <p:extLst>
       <p:ext uri="{BB962C8B-B14F-4D97-AF65-F5344CB8AC3E}">
-        <p14:creationId xmlns:p14="http://schemas.microsoft.com/office/powerpoint/2010/main" val="4197391801"/>
+        <p14:creationId xmlns:p14="http://schemas.microsoft.com/office/powerpoint/2010/main" val="2854509630"/>
       </p:ext>
     </p:extLst>
   </p:cSld>
@@ -1873,7 +1902,7 @@
           <a:p>
             <a:r>
               <a:rPr lang="en-US"/>
-              <a:t>Biểu đồ chức năng của chức năng khởi tạo starter</a:t>
+              <a:t>Biểu đồ use case chức năng khởi tạo starter</a:t>
             </a:r>
           </a:p>
         </p:txBody>
@@ -1904,7 +1933,7 @@
     </p:spTree>
     <p:extLst>
       <p:ext uri="{BB962C8B-B14F-4D97-AF65-F5344CB8AC3E}">
-        <p14:creationId xmlns:p14="http://schemas.microsoft.com/office/powerpoint/2010/main" val="3138939907"/>
+        <p14:creationId xmlns:p14="http://schemas.microsoft.com/office/powerpoint/2010/main" val="4197391801"/>
       </p:ext>
     </p:extLst>
   </p:cSld>
@@ -1960,7 +1989,7 @@
           <a:p>
             <a:r>
               <a:rPr lang="en-US"/>
-              <a:t>Biểu đồ usecase của chức năng trò chuyện văn b</a:t>
+              <a:t>Biểu đồ chức năng của chức năng khởi tạo starter</a:t>
             </a:r>
           </a:p>
         </p:txBody>
@@ -1991,7 +2020,7 @@
     </p:spTree>
     <p:extLst>
       <p:ext uri="{BB962C8B-B14F-4D97-AF65-F5344CB8AC3E}">
-        <p14:creationId xmlns:p14="http://schemas.microsoft.com/office/powerpoint/2010/main" val="3002454543"/>
+        <p14:creationId xmlns:p14="http://schemas.microsoft.com/office/powerpoint/2010/main" val="3138939907"/>
       </p:ext>
     </p:extLst>
   </p:cSld>
@@ -2047,7 +2076,7 @@
           <a:p>
             <a:r>
               <a:rPr lang="en-US"/>
-              <a:t>Biểu đồ chức năng của chức năng trò chuyện văn bản.</a:t>
+              <a:t>Biểu đồ usecase của chức năng trò chuyện văn b</a:t>
             </a:r>
           </a:p>
         </p:txBody>
@@ -2078,7 +2107,7 @@
     </p:spTree>
     <p:extLst>
       <p:ext uri="{BB962C8B-B14F-4D97-AF65-F5344CB8AC3E}">
-        <p14:creationId xmlns:p14="http://schemas.microsoft.com/office/powerpoint/2010/main" val="2285672054"/>
+        <p14:creationId xmlns:p14="http://schemas.microsoft.com/office/powerpoint/2010/main" val="3002454543"/>
       </p:ext>
     </p:extLst>
   </p:cSld>
@@ -2134,7 +2163,7 @@
           <a:p>
             <a:r>
               <a:rPr lang="en-US"/>
-              <a:t>Biểu đồ use case chức năng trò chuyện âm thanh</a:t>
+              <a:t>Biểu đồ chức năng của chức năng trò chuyện văn bản.</a:t>
             </a:r>
           </a:p>
         </p:txBody>
@@ -2165,7 +2194,7 @@
     </p:spTree>
     <p:extLst>
       <p:ext uri="{BB962C8B-B14F-4D97-AF65-F5344CB8AC3E}">
-        <p14:creationId xmlns:p14="http://schemas.microsoft.com/office/powerpoint/2010/main" val="3879826595"/>
+        <p14:creationId xmlns:p14="http://schemas.microsoft.com/office/powerpoint/2010/main" val="2285672054"/>
       </p:ext>
     </p:extLst>
   </p:cSld>
@@ -2221,7 +2250,7 @@
           <a:p>
             <a:r>
               <a:rPr lang="en-US"/>
-              <a:t>Biểu đồ chức năng của chức năng trò chuyện âm thanh</a:t>
+              <a:t>Biểu đồ use case chức năng trò chuyện âm thanh</a:t>
             </a:r>
           </a:p>
         </p:txBody>
@@ -2252,7 +2281,7 @@
     </p:spTree>
     <p:extLst>
       <p:ext uri="{BB962C8B-B14F-4D97-AF65-F5344CB8AC3E}">
-        <p14:creationId xmlns:p14="http://schemas.microsoft.com/office/powerpoint/2010/main" val="1458376165"/>
+        <p14:creationId xmlns:p14="http://schemas.microsoft.com/office/powerpoint/2010/main" val="3879826595"/>
       </p:ext>
     </p:extLst>
   </p:cSld>
@@ -2308,7 +2337,7 @@
           <a:p>
             <a:r>
               <a:rPr lang="en-US"/>
-              <a:t>Biểu đồ use case chức năng tăng cường trí nhớ hội thoại</a:t>
+              <a:t>Biểu đồ chức năng của chức năng trò chuyện âm thanh</a:t>
             </a:r>
           </a:p>
         </p:txBody>
@@ -2339,7 +2368,7 @@
     </p:spTree>
     <p:extLst>
       <p:ext uri="{BB962C8B-B14F-4D97-AF65-F5344CB8AC3E}">
-        <p14:creationId xmlns:p14="http://schemas.microsoft.com/office/powerpoint/2010/main" val="2737796367"/>
+        <p14:creationId xmlns:p14="http://schemas.microsoft.com/office/powerpoint/2010/main" val="1458376165"/>
       </p:ext>
     </p:extLst>
   </p:cSld>
@@ -2395,7 +2424,7 @@
           <a:p>
             <a:r>
               <a:rPr lang="en-US"/>
-              <a:t>Biểu đồ chức năng của chức năng tăng cường trí nhớ hội thoại</a:t>
+              <a:t>Biểu đồ use case chức năng tăng cường trí nhớ hội thoại</a:t>
             </a:r>
           </a:p>
         </p:txBody>
@@ -2426,7 +2455,7 @@
     </p:spTree>
     <p:extLst>
       <p:ext uri="{BB962C8B-B14F-4D97-AF65-F5344CB8AC3E}">
-        <p14:creationId xmlns:p14="http://schemas.microsoft.com/office/powerpoint/2010/main" val="123994773"/>
+        <p14:creationId xmlns:p14="http://schemas.microsoft.com/office/powerpoint/2010/main" val="2737796367"/>
       </p:ext>
     </p:extLst>
   </p:cSld>
@@ -2569,7 +2598,7 @@
           <a:p>
             <a:r>
               <a:rPr lang="en-US"/>
-              <a:t>Bieu do chuc nang quan ly hanh vi nguoi dung</a:t>
+              <a:t>Biểu đồ chức năng của chức năng tăng cường trí nhớ hội thoại</a:t>
             </a:r>
           </a:p>
         </p:txBody>
@@ -2600,7 +2629,7 @@
     </p:spTree>
     <p:extLst>
       <p:ext uri="{BB962C8B-B14F-4D97-AF65-F5344CB8AC3E}">
-        <p14:creationId xmlns:p14="http://schemas.microsoft.com/office/powerpoint/2010/main" val="2235046049"/>
+        <p14:creationId xmlns:p14="http://schemas.microsoft.com/office/powerpoint/2010/main" val="123994773"/>
       </p:ext>
     </p:extLst>
   </p:cSld>
@@ -2656,7 +2685,7 @@
           <a:p>
             <a:r>
               <a:rPr lang="en-US"/>
-              <a:t>Cau truc prompt khoi tao starter</a:t>
+              <a:t>Bieu do chuc nang quan ly hanh vi nguoi dung</a:t>
             </a:r>
           </a:p>
         </p:txBody>
@@ -2687,7 +2716,7 @@
     </p:spTree>
     <p:extLst>
       <p:ext uri="{BB962C8B-B14F-4D97-AF65-F5344CB8AC3E}">
-        <p14:creationId xmlns:p14="http://schemas.microsoft.com/office/powerpoint/2010/main" val="2281483521"/>
+        <p14:creationId xmlns:p14="http://schemas.microsoft.com/office/powerpoint/2010/main" val="2235046049"/>
       </p:ext>
     </p:extLst>
   </p:cSld>
@@ -2743,7 +2772,7 @@
           <a:p>
             <a:r>
               <a:rPr lang="en-US"/>
-              <a:t>Cau truc prompt tro chuyen voi nguoi dung</a:t>
+              <a:t>Cau truc prompt khoi tao starter</a:t>
             </a:r>
           </a:p>
         </p:txBody>
@@ -2774,7 +2803,7 @@
     </p:spTree>
     <p:extLst>
       <p:ext uri="{BB962C8B-B14F-4D97-AF65-F5344CB8AC3E}">
-        <p14:creationId xmlns:p14="http://schemas.microsoft.com/office/powerpoint/2010/main" val="2988671580"/>
+        <p14:creationId xmlns:p14="http://schemas.microsoft.com/office/powerpoint/2010/main" val="2281483521"/>
       </p:ext>
     </p:extLst>
   </p:cSld>
@@ -2830,7 +2859,7 @@
           <a:p>
             <a:r>
               <a:rPr lang="en-US"/>
-              <a:t>Cau truc prompt trich xuat thong tin</a:t>
+              <a:t>Cau truc prompt tro chuyen voi nguoi dung</a:t>
             </a:r>
           </a:p>
         </p:txBody>
@@ -2861,7 +2890,7 @@
     </p:spTree>
     <p:extLst>
       <p:ext uri="{BB962C8B-B14F-4D97-AF65-F5344CB8AC3E}">
-        <p14:creationId xmlns:p14="http://schemas.microsoft.com/office/powerpoint/2010/main" val="819052166"/>
+        <p14:creationId xmlns:p14="http://schemas.microsoft.com/office/powerpoint/2010/main" val="2988671580"/>
       </p:ext>
     </p:extLst>
   </p:cSld>
@@ -2916,10 +2945,9 @@
           <a:lstStyle/>
           <a:p>
             <a:r>
-              <a:rPr lang="vi-VN"/>
-              <a:t>Style</a:t>
-            </a:r>
-            <a:endParaRPr lang="en-US"/>
+              <a:rPr lang="en-US"/>
+              <a:t>Cau truc prompt trich xuat thong tin</a:t>
+            </a:r>
           </a:p>
         </p:txBody>
       </p:sp>
@@ -2941,6 +2969,94 @@
             <a:fld id="{959F4E64-33AD-4E03-A94E-822473CE3B48}" type="slidenum">
               <a:rPr lang="en-US" smtClean="0"/>
               <a:t>36</a:t>
+            </a:fld>
+            <a:endParaRPr lang="en-US"/>
+          </a:p>
+        </p:txBody>
+      </p:sp>
+    </p:spTree>
+    <p:extLst>
+      <p:ext uri="{BB962C8B-B14F-4D97-AF65-F5344CB8AC3E}">
+        <p14:creationId xmlns:p14="http://schemas.microsoft.com/office/powerpoint/2010/main" val="819052166"/>
+      </p:ext>
+    </p:extLst>
+  </p:cSld>
+  <p:clrMapOvr>
+    <a:masterClrMapping/>
+  </p:clrMapOvr>
+</p:notes>
+</file>
+
+<file path=ppt/notesSlides/notesSlide35.xml><?xml version="1.0" encoding="utf-8"?>
+<p:notes xmlns:a="http://schemas.openxmlformats.org/drawingml/2006/main" xmlns:r="http://schemas.openxmlformats.org/officeDocument/2006/relationships" xmlns:p="http://schemas.openxmlformats.org/presentationml/2006/main">
+  <p:cSld>
+    <p:spTree>
+      <p:nvGrpSpPr>
+        <p:cNvPr id="1" name=""/>
+        <p:cNvGrpSpPr/>
+        <p:nvPr/>
+      </p:nvGrpSpPr>
+      <p:grpSpPr>
+        <a:xfrm>
+          <a:off x="0" y="0"/>
+          <a:ext cx="0" cy="0"/>
+          <a:chOff x="0" y="0"/>
+          <a:chExt cx="0" cy="0"/>
+        </a:xfrm>
+      </p:grpSpPr>
+      <p:sp>
+        <p:nvSpPr>
+          <p:cNvPr id="2" name="Slide Image Placeholder 1"/>
+          <p:cNvSpPr>
+            <a:spLocks noGrp="1" noRot="1" noChangeAspect="1"/>
+          </p:cNvSpPr>
+          <p:nvPr>
+            <p:ph type="sldImg"/>
+          </p:nvPr>
+        </p:nvSpPr>
+        <p:spPr/>
+      </p:sp>
+      <p:sp>
+        <p:nvSpPr>
+          <p:cNvPr id="3" name="Notes Placeholder 2"/>
+          <p:cNvSpPr>
+            <a:spLocks noGrp="1"/>
+          </p:cNvSpPr>
+          <p:nvPr>
+            <p:ph type="body" idx="1"/>
+          </p:nvPr>
+        </p:nvSpPr>
+        <p:spPr/>
+        <p:txBody>
+          <a:bodyPr/>
+          <a:lstStyle/>
+          <a:p>
+            <a:r>
+              <a:rPr lang="vi-VN"/>
+              <a:t>Style</a:t>
+            </a:r>
+            <a:endParaRPr lang="en-US"/>
+          </a:p>
+        </p:txBody>
+      </p:sp>
+      <p:sp>
+        <p:nvSpPr>
+          <p:cNvPr id="4" name="Slide Number Placeholder 3"/>
+          <p:cNvSpPr>
+            <a:spLocks noGrp="1"/>
+          </p:cNvSpPr>
+          <p:nvPr>
+            <p:ph type="sldNum" sz="quarter" idx="5"/>
+          </p:nvPr>
+        </p:nvSpPr>
+        <p:spPr/>
+        <p:txBody>
+          <a:bodyPr/>
+          <a:lstStyle/>
+          <a:p>
+            <a:fld id="{959F4E64-33AD-4E03-A94E-822473CE3B48}" type="slidenum">
+              <a:rPr lang="en-US" smtClean="0"/>
+              <a:t>37</a:t>
             </a:fld>
             <a:endParaRPr lang="en-US"/>
           </a:p>
@@ -3628,7 +3744,7 @@
           <a:p>
             <a:fld id="{1274BF1E-CB95-4284-9B4D-720351FD5384}" type="datetimeFigureOut">
               <a:rPr lang="en-US" smtClean="0"/>
-              <a:t>5/30/2025</a:t>
+              <a:t>6/1/2025</a:t>
             </a:fld>
             <a:endParaRPr lang="en-US"/>
           </a:p>
@@ -3826,7 +3942,7 @@
           <a:p>
             <a:fld id="{1274BF1E-CB95-4284-9B4D-720351FD5384}" type="datetimeFigureOut">
               <a:rPr lang="en-US" smtClean="0"/>
-              <a:t>5/30/2025</a:t>
+              <a:t>6/1/2025</a:t>
             </a:fld>
             <a:endParaRPr lang="en-US"/>
           </a:p>
@@ -4034,7 +4150,7 @@
           <a:p>
             <a:fld id="{1274BF1E-CB95-4284-9B4D-720351FD5384}" type="datetimeFigureOut">
               <a:rPr lang="en-US" smtClean="0"/>
-              <a:t>5/30/2025</a:t>
+              <a:t>6/1/2025</a:t>
             </a:fld>
             <a:endParaRPr lang="en-US"/>
           </a:p>
@@ -4232,7 +4348,7 @@
           <a:p>
             <a:fld id="{1274BF1E-CB95-4284-9B4D-720351FD5384}" type="datetimeFigureOut">
               <a:rPr lang="en-US" smtClean="0"/>
-              <a:t>5/30/2025</a:t>
+              <a:t>6/1/2025</a:t>
             </a:fld>
             <a:endParaRPr lang="en-US"/>
           </a:p>
@@ -4507,7 +4623,7 @@
           <a:p>
             <a:fld id="{1274BF1E-CB95-4284-9B4D-720351FD5384}" type="datetimeFigureOut">
               <a:rPr lang="en-US" smtClean="0"/>
-              <a:t>5/30/2025</a:t>
+              <a:t>6/1/2025</a:t>
             </a:fld>
             <a:endParaRPr lang="en-US"/>
           </a:p>
@@ -4772,7 +4888,7 @@
           <a:p>
             <a:fld id="{1274BF1E-CB95-4284-9B4D-720351FD5384}" type="datetimeFigureOut">
               <a:rPr lang="en-US" smtClean="0"/>
-              <a:t>5/30/2025</a:t>
+              <a:t>6/1/2025</a:t>
             </a:fld>
             <a:endParaRPr lang="en-US"/>
           </a:p>
@@ -5184,7 +5300,7 @@
           <a:p>
             <a:fld id="{1274BF1E-CB95-4284-9B4D-720351FD5384}" type="datetimeFigureOut">
               <a:rPr lang="en-US" smtClean="0"/>
-              <a:t>5/30/2025</a:t>
+              <a:t>6/1/2025</a:t>
             </a:fld>
             <a:endParaRPr lang="en-US"/>
           </a:p>
@@ -5325,7 +5441,7 @@
           <a:p>
             <a:fld id="{1274BF1E-CB95-4284-9B4D-720351FD5384}" type="datetimeFigureOut">
               <a:rPr lang="en-US" smtClean="0"/>
-              <a:t>5/30/2025</a:t>
+              <a:t>6/1/2025</a:t>
             </a:fld>
             <a:endParaRPr lang="en-US"/>
           </a:p>
@@ -5438,7 +5554,7 @@
           <a:p>
             <a:fld id="{1274BF1E-CB95-4284-9B4D-720351FD5384}" type="datetimeFigureOut">
               <a:rPr lang="en-US" smtClean="0"/>
-              <a:t>5/30/2025</a:t>
+              <a:t>6/1/2025</a:t>
             </a:fld>
             <a:endParaRPr lang="en-US"/>
           </a:p>
@@ -5749,7 +5865,7 @@
           <a:p>
             <a:fld id="{1274BF1E-CB95-4284-9B4D-720351FD5384}" type="datetimeFigureOut">
               <a:rPr lang="en-US" smtClean="0"/>
-              <a:t>5/30/2025</a:t>
+              <a:t>6/1/2025</a:t>
             </a:fld>
             <a:endParaRPr lang="en-US"/>
           </a:p>
@@ -6037,7 +6153,7 @@
           <a:p>
             <a:fld id="{1274BF1E-CB95-4284-9B4D-720351FD5384}" type="datetimeFigureOut">
               <a:rPr lang="en-US" smtClean="0"/>
-              <a:t>5/30/2025</a:t>
+              <a:t>6/1/2025</a:t>
             </a:fld>
             <a:endParaRPr lang="en-US"/>
           </a:p>
@@ -6278,7 +6394,7 @@
           <a:p>
             <a:fld id="{1274BF1E-CB95-4284-9B4D-720351FD5384}" type="datetimeFigureOut">
               <a:rPr lang="en-US" smtClean="0"/>
-              <a:t>5/30/2025</a:t>
+              <a:t>6/1/2025</a:t>
             </a:fld>
             <a:endParaRPr lang="en-US"/>
           </a:p>
@@ -16205,6 +16321,2740 @@
   <p:cSld>
     <p:spTree>
       <p:nvGrpSpPr>
+        <p:cNvPr id="1" name="">
+          <a:extLst>
+            <a:ext uri="{FF2B5EF4-FFF2-40B4-BE49-F238E27FC236}">
+              <a16:creationId xmlns:a16="http://schemas.microsoft.com/office/drawing/2014/main" id="{930BF8CD-98F8-6DE2-0B01-DFB2F30AFE9D}"/>
+            </a:ext>
+          </a:extLst>
+        </p:cNvPr>
+        <p:cNvGrpSpPr/>
+        <p:nvPr/>
+      </p:nvGrpSpPr>
+      <p:grpSpPr>
+        <a:xfrm>
+          <a:off x="0" y="0"/>
+          <a:ext cx="0" cy="0"/>
+          <a:chOff x="0" y="0"/>
+          <a:chExt cx="0" cy="0"/>
+        </a:xfrm>
+      </p:grpSpPr>
+      <p:grpSp>
+        <p:nvGrpSpPr>
+          <p:cNvPr id="2" name="Group 1">
+            <a:extLst>
+              <a:ext uri="{FF2B5EF4-FFF2-40B4-BE49-F238E27FC236}">
+                <a16:creationId xmlns:a16="http://schemas.microsoft.com/office/drawing/2014/main" id="{E0BC422B-1DEB-694F-F004-D5EDF514B9D3}"/>
+              </a:ext>
+            </a:extLst>
+          </p:cNvPr>
+          <p:cNvGrpSpPr/>
+          <p:nvPr/>
+        </p:nvGrpSpPr>
+        <p:grpSpPr>
+          <a:xfrm>
+            <a:off x="131059" y="1002030"/>
+            <a:ext cx="11929881" cy="4853940"/>
+            <a:chOff x="146303" y="1226820"/>
+            <a:chExt cx="11929881" cy="4853940"/>
+          </a:xfrm>
+        </p:grpSpPr>
+        <p:sp>
+          <p:nvSpPr>
+            <p:cNvPr id="13" name="Cube 12">
+              <a:extLst>
+                <a:ext uri="{FF2B5EF4-FFF2-40B4-BE49-F238E27FC236}">
+                  <a16:creationId xmlns:a16="http://schemas.microsoft.com/office/drawing/2014/main" id="{BD31DFE8-BDB5-11DD-FC12-21E2E69D8DA9}"/>
+                </a:ext>
+              </a:extLst>
+            </p:cNvPr>
+            <p:cNvSpPr/>
+            <p:nvPr/>
+          </p:nvSpPr>
+          <p:spPr>
+            <a:xfrm>
+              <a:off x="8450421" y="1226820"/>
+              <a:ext cx="1511804" cy="530352"/>
+            </a:xfrm>
+            <a:prstGeom prst="cube">
+              <a:avLst>
+                <a:gd name="adj" fmla="val 19444"/>
+              </a:avLst>
+            </a:prstGeom>
+            <a:solidFill>
+              <a:schemeClr val="bg1">
+                <a:lumMod val="95000"/>
+              </a:schemeClr>
+            </a:solidFill>
+            <a:ln>
+              <a:solidFill>
+                <a:schemeClr val="tx1"/>
+              </a:solidFill>
+            </a:ln>
+          </p:spPr>
+          <p:style>
+            <a:lnRef idx="2">
+              <a:schemeClr val="accent1">
+                <a:shade val="15000"/>
+              </a:schemeClr>
+            </a:lnRef>
+            <a:fillRef idx="1">
+              <a:schemeClr val="accent1"/>
+            </a:fillRef>
+            <a:effectRef idx="0">
+              <a:schemeClr val="accent1"/>
+            </a:effectRef>
+            <a:fontRef idx="minor">
+              <a:schemeClr val="lt1"/>
+            </a:fontRef>
+          </p:style>
+          <p:txBody>
+            <a:bodyPr rtlCol="0" anchor="ctr"/>
+            <a:lstStyle/>
+            <a:p>
+              <a:pPr algn="ctr"/>
+              <a:r>
+                <a:rPr lang="vi-VN" sz="1300" dirty="0" err="1">
+                  <a:solidFill>
+                    <a:schemeClr val="tx1"/>
+                  </a:solidFill>
+                  <a:latin typeface="+mj-lt"/>
+                </a:rPr>
+                <a:t>Model</a:t>
+              </a:r>
+              <a:r>
+                <a:rPr lang="vi-VN" sz="1300" dirty="0">
+                  <a:solidFill>
+                    <a:schemeClr val="tx1"/>
+                  </a:solidFill>
+                  <a:latin typeface="+mj-lt"/>
+                </a:rPr>
+                <a:t> </a:t>
+              </a:r>
+              <a:r>
+                <a:rPr lang="vi-VN" sz="1300" dirty="0" err="1">
+                  <a:solidFill>
+                    <a:schemeClr val="tx1"/>
+                  </a:solidFill>
+                  <a:latin typeface="+mj-lt"/>
+                </a:rPr>
+                <a:t>embedding</a:t>
+              </a:r>
+              <a:endParaRPr lang="vi-VN" sz="1300" dirty="0">
+                <a:solidFill>
+                  <a:schemeClr val="tx1"/>
+                </a:solidFill>
+                <a:latin typeface="+mj-lt"/>
+              </a:endParaRPr>
+            </a:p>
+            <a:p>
+              <a:pPr algn="ctr"/>
+              <a:r>
+                <a:rPr lang="vi-VN" sz="1300" dirty="0">
+                  <a:solidFill>
+                    <a:schemeClr val="tx1"/>
+                  </a:solidFill>
+                  <a:latin typeface="+mj-lt"/>
+                </a:rPr>
+                <a:t>tốt nhất</a:t>
+              </a:r>
+              <a:endParaRPr lang="en-US" sz="1300" dirty="0">
+                <a:solidFill>
+                  <a:schemeClr val="tx1"/>
+                </a:solidFill>
+                <a:latin typeface="+mj-lt"/>
+              </a:endParaRPr>
+            </a:p>
+          </p:txBody>
+        </p:sp>
+        <p:sp>
+          <p:nvSpPr>
+            <p:cNvPr id="14" name="Cylinder 13">
+              <a:extLst>
+                <a:ext uri="{FF2B5EF4-FFF2-40B4-BE49-F238E27FC236}">
+                  <a16:creationId xmlns:a16="http://schemas.microsoft.com/office/drawing/2014/main" id="{91FBAE4C-47B3-3419-C3C4-8A0B2366AD81}"/>
+                </a:ext>
+              </a:extLst>
+            </p:cNvPr>
+            <p:cNvSpPr/>
+            <p:nvPr/>
+          </p:nvSpPr>
+          <p:spPr>
+            <a:xfrm>
+              <a:off x="10553140" y="1281684"/>
+              <a:ext cx="1523044" cy="1691640"/>
+            </a:xfrm>
+            <a:prstGeom prst="can">
+              <a:avLst>
+                <a:gd name="adj" fmla="val 10620"/>
+              </a:avLst>
+            </a:prstGeom>
+            <a:solidFill>
+              <a:schemeClr val="bg1">
+                <a:lumMod val="95000"/>
+              </a:schemeClr>
+            </a:solidFill>
+            <a:ln>
+              <a:solidFill>
+                <a:schemeClr val="tx1"/>
+              </a:solidFill>
+            </a:ln>
+          </p:spPr>
+          <p:style>
+            <a:lnRef idx="2">
+              <a:schemeClr val="accent1">
+                <a:shade val="15000"/>
+              </a:schemeClr>
+            </a:lnRef>
+            <a:fillRef idx="1">
+              <a:schemeClr val="accent1"/>
+            </a:fillRef>
+            <a:effectRef idx="0">
+              <a:schemeClr val="accent1"/>
+            </a:effectRef>
+            <a:fontRef idx="minor">
+              <a:schemeClr val="lt1"/>
+            </a:fontRef>
+          </p:style>
+          <p:txBody>
+            <a:bodyPr rtlCol="0" anchor="ctr"/>
+            <a:lstStyle/>
+            <a:p>
+              <a:pPr algn="ctr"/>
+              <a:r>
+                <a:rPr lang="vi-VN" sz="1300" dirty="0">
+                  <a:solidFill>
+                    <a:schemeClr val="tx1"/>
+                  </a:solidFill>
+                  <a:latin typeface="Times New Roman" panose="02020603050405020304" pitchFamily="18" charset="0"/>
+                  <a:cs typeface="Times New Roman" panose="02020603050405020304" pitchFamily="18" charset="0"/>
+                </a:rPr>
+                <a:t>Lưu trữ dữ liệu</a:t>
+              </a:r>
+            </a:p>
+            <a:p>
+              <a:pPr algn="ctr"/>
+              <a:r>
+                <a:rPr lang="vi-VN" sz="1300" dirty="0" err="1">
+                  <a:solidFill>
+                    <a:schemeClr val="tx1"/>
+                  </a:solidFill>
+                  <a:latin typeface="Times New Roman" panose="02020603050405020304" pitchFamily="18" charset="0"/>
+                  <a:cs typeface="Times New Roman" panose="02020603050405020304" pitchFamily="18" charset="0"/>
+                </a:rPr>
+                <a:t>vector</a:t>
+              </a:r>
+              <a:r>
+                <a:rPr lang="vi-VN" sz="1300" dirty="0">
+                  <a:solidFill>
+                    <a:schemeClr val="tx1"/>
+                  </a:solidFill>
+                  <a:latin typeface="Times New Roman" panose="02020603050405020304" pitchFamily="18" charset="0"/>
+                  <a:cs typeface="Times New Roman" panose="02020603050405020304" pitchFamily="18" charset="0"/>
+                </a:rPr>
+                <a:t> </a:t>
+              </a:r>
+              <a:r>
+                <a:rPr lang="vi-VN" sz="1300" dirty="0" err="1">
+                  <a:solidFill>
+                    <a:schemeClr val="tx1"/>
+                  </a:solidFill>
+                  <a:latin typeface="Times New Roman" panose="02020603050405020304" pitchFamily="18" charset="0"/>
+                  <a:cs typeface="Times New Roman" panose="02020603050405020304" pitchFamily="18" charset="0"/>
+                </a:rPr>
+                <a:t>database</a:t>
+              </a:r>
+              <a:endParaRPr lang="en-US" sz="1300" dirty="0">
+                <a:solidFill>
+                  <a:schemeClr val="tx1"/>
+                </a:solidFill>
+                <a:latin typeface="Times New Roman" panose="02020603050405020304" pitchFamily="18" charset="0"/>
+                <a:cs typeface="Times New Roman" panose="02020603050405020304" pitchFamily="18" charset="0"/>
+              </a:endParaRPr>
+            </a:p>
+          </p:txBody>
+        </p:sp>
+        <p:pic>
+          <p:nvPicPr>
+            <p:cNvPr id="17" name="Graphic 16" descr="User with solid fill">
+              <a:extLst>
+                <a:ext uri="{FF2B5EF4-FFF2-40B4-BE49-F238E27FC236}">
+                  <a16:creationId xmlns:a16="http://schemas.microsoft.com/office/drawing/2014/main" id="{5A8AE510-F0E3-520E-169B-036360B3138B}"/>
+                </a:ext>
+              </a:extLst>
+            </p:cNvPr>
+            <p:cNvPicPr>
+              <a:picLocks noChangeAspect="1"/>
+            </p:cNvPicPr>
+            <p:nvPr/>
+          </p:nvPicPr>
+          <p:blipFill>
+            <a:blip r:embed="rId3">
+              <a:extLst>
+                <a:ext uri="{96DAC541-7B7A-43D3-8B79-37D633B846F1}">
+                  <asvg:svgBlip xmlns:asvg="http://schemas.microsoft.com/office/drawing/2016/SVG/main" r:embed="rId4"/>
+                </a:ext>
+              </a:extLst>
+            </a:blip>
+            <a:stretch>
+              <a:fillRect/>
+            </a:stretch>
+          </p:blipFill>
+          <p:spPr>
+            <a:xfrm>
+              <a:off x="443327" y="3015957"/>
+              <a:ext cx="1003931" cy="1003931"/>
+            </a:xfrm>
+            <a:prstGeom prst="rect">
+              <a:avLst/>
+            </a:prstGeom>
+          </p:spPr>
+        </p:pic>
+        <p:sp>
+          <p:nvSpPr>
+            <p:cNvPr id="20" name="Rectangle: Rounded Corners 19">
+              <a:extLst>
+                <a:ext uri="{FF2B5EF4-FFF2-40B4-BE49-F238E27FC236}">
+                  <a16:creationId xmlns:a16="http://schemas.microsoft.com/office/drawing/2014/main" id="{2C674645-48E3-F6AE-C51C-07D1BDD2C145}"/>
+                </a:ext>
+              </a:extLst>
+            </p:cNvPr>
+            <p:cNvSpPr/>
+            <p:nvPr/>
+          </p:nvSpPr>
+          <p:spPr>
+            <a:xfrm>
+              <a:off x="6347700" y="1281684"/>
+              <a:ext cx="1456943" cy="530352"/>
+            </a:xfrm>
+            <a:prstGeom prst="roundRect">
+              <a:avLst/>
+            </a:prstGeom>
+            <a:solidFill>
+              <a:schemeClr val="bg1">
+                <a:lumMod val="95000"/>
+              </a:schemeClr>
+            </a:solidFill>
+            <a:ln>
+              <a:solidFill>
+                <a:schemeClr val="tx1"/>
+              </a:solidFill>
+            </a:ln>
+          </p:spPr>
+          <p:style>
+            <a:lnRef idx="2">
+              <a:schemeClr val="accent1">
+                <a:shade val="15000"/>
+              </a:schemeClr>
+            </a:lnRef>
+            <a:fillRef idx="1">
+              <a:schemeClr val="accent1"/>
+            </a:fillRef>
+            <a:effectRef idx="0">
+              <a:schemeClr val="accent1"/>
+            </a:effectRef>
+            <a:fontRef idx="minor">
+              <a:schemeClr val="lt1"/>
+            </a:fontRef>
+          </p:style>
+          <p:txBody>
+            <a:bodyPr rtlCol="0" anchor="ctr"/>
+            <a:lstStyle/>
+            <a:p>
+              <a:pPr algn="ctr"/>
+              <a:r>
+                <a:rPr lang="vi-VN" sz="1300" dirty="0">
+                  <a:solidFill>
+                    <a:schemeClr val="tx1"/>
+                  </a:solidFill>
+                  <a:latin typeface="+mj-lt"/>
+                </a:rPr>
+                <a:t>Thông tin được trích xuất</a:t>
+              </a:r>
+              <a:endParaRPr lang="en-US" sz="1300" dirty="0">
+                <a:solidFill>
+                  <a:schemeClr val="tx1"/>
+                </a:solidFill>
+                <a:latin typeface="+mj-lt"/>
+              </a:endParaRPr>
+            </a:p>
+          </p:txBody>
+        </p:sp>
+        <p:sp>
+          <p:nvSpPr>
+            <p:cNvPr id="24" name="Rectangle: Rounded Corners 23">
+              <a:extLst>
+                <a:ext uri="{FF2B5EF4-FFF2-40B4-BE49-F238E27FC236}">
+                  <a16:creationId xmlns:a16="http://schemas.microsoft.com/office/drawing/2014/main" id="{783DD35C-A313-5376-CBCD-A5EC36F48569}"/>
+                </a:ext>
+              </a:extLst>
+            </p:cNvPr>
+            <p:cNvSpPr/>
+            <p:nvPr/>
+          </p:nvSpPr>
+          <p:spPr>
+            <a:xfrm>
+              <a:off x="4395216" y="1281684"/>
+              <a:ext cx="1456944" cy="530352"/>
+            </a:xfrm>
+            <a:prstGeom prst="roundRect">
+              <a:avLst/>
+            </a:prstGeom>
+            <a:solidFill>
+              <a:schemeClr val="bg1">
+                <a:lumMod val="95000"/>
+              </a:schemeClr>
+            </a:solidFill>
+            <a:ln>
+              <a:solidFill>
+                <a:schemeClr val="tx1"/>
+              </a:solidFill>
+              <a:prstDash val="dash"/>
+            </a:ln>
+          </p:spPr>
+          <p:style>
+            <a:lnRef idx="2">
+              <a:schemeClr val="accent1">
+                <a:shade val="15000"/>
+              </a:schemeClr>
+            </a:lnRef>
+            <a:fillRef idx="1">
+              <a:schemeClr val="accent1"/>
+            </a:fillRef>
+            <a:effectRef idx="0">
+              <a:schemeClr val="accent1"/>
+            </a:effectRef>
+            <a:fontRef idx="minor">
+              <a:schemeClr val="lt1"/>
+            </a:fontRef>
+          </p:style>
+          <p:txBody>
+            <a:bodyPr rtlCol="0" anchor="ctr"/>
+            <a:lstStyle/>
+            <a:p>
+              <a:pPr algn="ctr"/>
+              <a:r>
+                <a:rPr lang="vi-VN" sz="1300" dirty="0">
+                  <a:solidFill>
+                    <a:schemeClr val="tx1"/>
+                  </a:solidFill>
+                  <a:latin typeface="+mj-lt"/>
+                </a:rPr>
+                <a:t>Trích xuất thông tin câu hỏi</a:t>
+              </a:r>
+              <a:endParaRPr lang="en-US" sz="1300" dirty="0">
+                <a:solidFill>
+                  <a:schemeClr val="tx1"/>
+                </a:solidFill>
+                <a:latin typeface="+mj-lt"/>
+              </a:endParaRPr>
+            </a:p>
+          </p:txBody>
+        </p:sp>
+        <p:sp>
+          <p:nvSpPr>
+            <p:cNvPr id="54" name="Cube 53">
+              <a:extLst>
+                <a:ext uri="{FF2B5EF4-FFF2-40B4-BE49-F238E27FC236}">
+                  <a16:creationId xmlns:a16="http://schemas.microsoft.com/office/drawing/2014/main" id="{9FA2A168-26B0-28B9-E0A1-0CB1ABAD8FF0}"/>
+                </a:ext>
+              </a:extLst>
+            </p:cNvPr>
+            <p:cNvSpPr/>
+            <p:nvPr/>
+          </p:nvSpPr>
+          <p:spPr>
+            <a:xfrm>
+              <a:off x="2223277" y="1235964"/>
+              <a:ext cx="1676400" cy="530352"/>
+            </a:xfrm>
+            <a:prstGeom prst="cube">
+              <a:avLst>
+                <a:gd name="adj" fmla="val 17720"/>
+              </a:avLst>
+            </a:prstGeom>
+            <a:solidFill>
+              <a:schemeClr val="bg1">
+                <a:lumMod val="95000"/>
+              </a:schemeClr>
+            </a:solidFill>
+            <a:ln>
+              <a:solidFill>
+                <a:schemeClr val="tx1"/>
+              </a:solidFill>
+            </a:ln>
+          </p:spPr>
+          <p:style>
+            <a:lnRef idx="2">
+              <a:schemeClr val="accent1">
+                <a:shade val="15000"/>
+              </a:schemeClr>
+            </a:lnRef>
+            <a:fillRef idx="1">
+              <a:schemeClr val="accent1"/>
+            </a:fillRef>
+            <a:effectRef idx="0">
+              <a:schemeClr val="accent1"/>
+            </a:effectRef>
+            <a:fontRef idx="minor">
+              <a:schemeClr val="lt1"/>
+            </a:fontRef>
+          </p:style>
+          <p:txBody>
+            <a:bodyPr rtlCol="0" anchor="ctr"/>
+            <a:lstStyle/>
+            <a:p>
+              <a:pPr algn="ctr"/>
+              <a:r>
+                <a:rPr lang="vi-VN" sz="1300" dirty="0">
+                  <a:solidFill>
+                    <a:schemeClr val="tx1"/>
+                  </a:solidFill>
+                  <a:latin typeface="+mj-lt"/>
+                </a:rPr>
+                <a:t>LLM</a:t>
+              </a:r>
+              <a:endParaRPr lang="en-US" sz="1300" dirty="0">
+                <a:solidFill>
+                  <a:schemeClr val="tx1"/>
+                </a:solidFill>
+                <a:latin typeface="+mj-lt"/>
+              </a:endParaRPr>
+            </a:p>
+          </p:txBody>
+        </p:sp>
+        <p:sp>
+          <p:nvSpPr>
+            <p:cNvPr id="55" name="Rectangle: Rounded Corners 54">
+              <a:extLst>
+                <a:ext uri="{FF2B5EF4-FFF2-40B4-BE49-F238E27FC236}">
+                  <a16:creationId xmlns:a16="http://schemas.microsoft.com/office/drawing/2014/main" id="{B71E1647-5230-2E3B-26FC-90BC5134D04A}"/>
+                </a:ext>
+              </a:extLst>
+            </p:cNvPr>
+            <p:cNvSpPr/>
+            <p:nvPr/>
+          </p:nvSpPr>
+          <p:spPr>
+            <a:xfrm>
+              <a:off x="146303" y="1263396"/>
+              <a:ext cx="1597981" cy="573024"/>
+            </a:xfrm>
+            <a:prstGeom prst="roundRect">
+              <a:avLst/>
+            </a:prstGeom>
+            <a:solidFill>
+              <a:schemeClr val="bg1">
+                <a:lumMod val="95000"/>
+              </a:schemeClr>
+            </a:solidFill>
+            <a:ln>
+              <a:solidFill>
+                <a:schemeClr val="tx1"/>
+              </a:solidFill>
+            </a:ln>
+          </p:spPr>
+          <p:style>
+            <a:lnRef idx="2">
+              <a:schemeClr val="accent1">
+                <a:shade val="15000"/>
+              </a:schemeClr>
+            </a:lnRef>
+            <a:fillRef idx="1">
+              <a:schemeClr val="accent1"/>
+            </a:fillRef>
+            <a:effectRef idx="0">
+              <a:schemeClr val="accent1"/>
+            </a:effectRef>
+            <a:fontRef idx="minor">
+              <a:schemeClr val="lt1"/>
+            </a:fontRef>
+          </p:style>
+          <p:txBody>
+            <a:bodyPr rtlCol="0" anchor="ctr"/>
+            <a:lstStyle/>
+            <a:p>
+              <a:pPr algn="ctr"/>
+              <a:r>
+                <a:rPr lang="vi-VN" sz="1300" dirty="0">
+                  <a:solidFill>
+                    <a:schemeClr val="tx1"/>
+                  </a:solidFill>
+                  <a:latin typeface="+mj-lt"/>
+                </a:rPr>
+                <a:t>Câu hỏi văn bản</a:t>
+              </a:r>
+              <a:endParaRPr lang="en-US" sz="1300" dirty="0">
+                <a:solidFill>
+                  <a:schemeClr val="tx1"/>
+                </a:solidFill>
+                <a:latin typeface="+mj-lt"/>
+              </a:endParaRPr>
+            </a:p>
+          </p:txBody>
+        </p:sp>
+        <p:sp>
+          <p:nvSpPr>
+            <p:cNvPr id="57" name="Rectangle: Rounded Corners 56">
+              <a:extLst>
+                <a:ext uri="{FF2B5EF4-FFF2-40B4-BE49-F238E27FC236}">
+                  <a16:creationId xmlns:a16="http://schemas.microsoft.com/office/drawing/2014/main" id="{0854BEBD-7B19-7859-DAC8-44FF400A1D8B}"/>
+                </a:ext>
+              </a:extLst>
+            </p:cNvPr>
+            <p:cNvSpPr/>
+            <p:nvPr/>
+          </p:nvSpPr>
+          <p:spPr>
+            <a:xfrm>
+              <a:off x="8392925" y="2250948"/>
+              <a:ext cx="1524983" cy="722376"/>
+            </a:xfrm>
+            <a:prstGeom prst="roundRect">
+              <a:avLst/>
+            </a:prstGeom>
+            <a:solidFill>
+              <a:schemeClr val="bg1">
+                <a:lumMod val="95000"/>
+              </a:schemeClr>
+            </a:solidFill>
+            <a:ln>
+              <a:solidFill>
+                <a:schemeClr val="tx1"/>
+              </a:solidFill>
+              <a:prstDash val="dash"/>
+            </a:ln>
+          </p:spPr>
+          <p:style>
+            <a:lnRef idx="2">
+              <a:schemeClr val="accent1">
+                <a:shade val="15000"/>
+              </a:schemeClr>
+            </a:lnRef>
+            <a:fillRef idx="1">
+              <a:schemeClr val="accent1"/>
+            </a:fillRef>
+            <a:effectRef idx="0">
+              <a:schemeClr val="accent1"/>
+            </a:effectRef>
+            <a:fontRef idx="minor">
+              <a:schemeClr val="lt1"/>
+            </a:fontRef>
+          </p:style>
+          <p:txBody>
+            <a:bodyPr rtlCol="0" anchor="ctr"/>
+            <a:lstStyle/>
+            <a:p>
+              <a:pPr algn="ctr"/>
+              <a:r>
+                <a:rPr lang="vi-VN" sz="1300" dirty="0">
+                  <a:solidFill>
+                    <a:schemeClr val="tx1"/>
+                  </a:solidFill>
+                  <a:latin typeface="+mj-lt"/>
+                </a:rPr>
+                <a:t>Trích xuất thông tin liên quan</a:t>
+              </a:r>
+              <a:endParaRPr lang="en-US" sz="1300" dirty="0">
+                <a:solidFill>
+                  <a:schemeClr val="tx1"/>
+                </a:solidFill>
+                <a:latin typeface="+mj-lt"/>
+              </a:endParaRPr>
+            </a:p>
+          </p:txBody>
+        </p:sp>
+        <p:sp>
+          <p:nvSpPr>
+            <p:cNvPr id="58" name="Cylinder 57">
+              <a:extLst>
+                <a:ext uri="{FF2B5EF4-FFF2-40B4-BE49-F238E27FC236}">
+                  <a16:creationId xmlns:a16="http://schemas.microsoft.com/office/drawing/2014/main" id="{60A8CD88-1F12-80B2-9467-B74510CBCEDF}"/>
+                </a:ext>
+              </a:extLst>
+            </p:cNvPr>
+            <p:cNvSpPr/>
+            <p:nvPr/>
+          </p:nvSpPr>
+          <p:spPr>
+            <a:xfrm>
+              <a:off x="6347700" y="2252472"/>
+              <a:ext cx="1456944" cy="722376"/>
+            </a:xfrm>
+            <a:prstGeom prst="can">
+              <a:avLst>
+                <a:gd name="adj" fmla="val 13615"/>
+              </a:avLst>
+            </a:prstGeom>
+            <a:solidFill>
+              <a:schemeClr val="bg1">
+                <a:lumMod val="95000"/>
+              </a:schemeClr>
+            </a:solidFill>
+            <a:ln>
+              <a:solidFill>
+                <a:schemeClr val="tx1"/>
+              </a:solidFill>
+            </a:ln>
+          </p:spPr>
+          <p:style>
+            <a:lnRef idx="2">
+              <a:schemeClr val="accent1">
+                <a:shade val="15000"/>
+              </a:schemeClr>
+            </a:lnRef>
+            <a:fillRef idx="1">
+              <a:schemeClr val="accent1"/>
+            </a:fillRef>
+            <a:effectRef idx="0">
+              <a:schemeClr val="accent1"/>
+            </a:effectRef>
+            <a:fontRef idx="minor">
+              <a:schemeClr val="lt1"/>
+            </a:fontRef>
+          </p:style>
+          <p:txBody>
+            <a:bodyPr rtlCol="0" anchor="ctr"/>
+            <a:lstStyle/>
+            <a:p>
+              <a:pPr algn="ctr"/>
+              <a:r>
+                <a:rPr lang="vi-VN" sz="1300" dirty="0">
+                  <a:solidFill>
+                    <a:schemeClr val="tx1"/>
+                  </a:solidFill>
+                  <a:latin typeface="+mj-lt"/>
+                </a:rPr>
+                <a:t>CSDL thông tin người dùng</a:t>
+              </a:r>
+              <a:endParaRPr lang="en-US" sz="1300" dirty="0">
+                <a:solidFill>
+                  <a:schemeClr val="tx1"/>
+                </a:solidFill>
+                <a:latin typeface="+mj-lt"/>
+              </a:endParaRPr>
+            </a:p>
+          </p:txBody>
+        </p:sp>
+        <p:sp>
+          <p:nvSpPr>
+            <p:cNvPr id="59" name="Rectangle: Rounded Corners 58">
+              <a:extLst>
+                <a:ext uri="{FF2B5EF4-FFF2-40B4-BE49-F238E27FC236}">
+                  <a16:creationId xmlns:a16="http://schemas.microsoft.com/office/drawing/2014/main" id="{B5A5B6AB-CB8D-AF8B-4DCD-B128206E4CD1}"/>
+                </a:ext>
+              </a:extLst>
+            </p:cNvPr>
+            <p:cNvSpPr/>
+            <p:nvPr/>
+          </p:nvSpPr>
+          <p:spPr>
+            <a:xfrm>
+              <a:off x="10553140" y="3412236"/>
+              <a:ext cx="1523044" cy="632460"/>
+            </a:xfrm>
+            <a:prstGeom prst="roundRect">
+              <a:avLst/>
+            </a:prstGeom>
+            <a:solidFill>
+              <a:schemeClr val="bg1">
+                <a:lumMod val="95000"/>
+              </a:schemeClr>
+            </a:solidFill>
+            <a:ln>
+              <a:solidFill>
+                <a:schemeClr val="tx1"/>
+              </a:solidFill>
+            </a:ln>
+          </p:spPr>
+          <p:style>
+            <a:lnRef idx="2">
+              <a:schemeClr val="accent1">
+                <a:shade val="15000"/>
+              </a:schemeClr>
+            </a:lnRef>
+            <a:fillRef idx="1">
+              <a:schemeClr val="accent1"/>
+            </a:fillRef>
+            <a:effectRef idx="0">
+              <a:schemeClr val="accent1"/>
+            </a:effectRef>
+            <a:fontRef idx="minor">
+              <a:schemeClr val="lt1"/>
+            </a:fontRef>
+          </p:style>
+          <p:txBody>
+            <a:bodyPr rtlCol="0" anchor="ctr"/>
+            <a:lstStyle/>
+            <a:p>
+              <a:pPr algn="ctr"/>
+              <a:r>
+                <a:rPr lang="vi-VN" sz="1300" dirty="0">
+                  <a:solidFill>
+                    <a:schemeClr val="tx1"/>
+                  </a:solidFill>
+                  <a:latin typeface="+mj-lt"/>
+                </a:rPr>
+                <a:t>Tạo </a:t>
+              </a:r>
+              <a:r>
+                <a:rPr lang="vi-VN" sz="1300" dirty="0" err="1">
+                  <a:solidFill>
+                    <a:schemeClr val="tx1"/>
+                  </a:solidFill>
+                  <a:latin typeface="+mj-lt"/>
+                </a:rPr>
+                <a:t>prompt</a:t>
+              </a:r>
+              <a:endParaRPr lang="vi-VN" sz="1300" dirty="0">
+                <a:solidFill>
+                  <a:schemeClr val="tx1"/>
+                </a:solidFill>
+                <a:latin typeface="+mj-lt"/>
+              </a:endParaRPr>
+            </a:p>
+            <a:p>
+              <a:pPr algn="ctr"/>
+              <a:r>
+                <a:rPr lang="vi-VN" sz="1300" dirty="0">
+                  <a:solidFill>
+                    <a:schemeClr val="tx1"/>
+                  </a:solidFill>
+                  <a:latin typeface="+mj-lt"/>
+                </a:rPr>
+                <a:t>hoàn chỉnh</a:t>
+              </a:r>
+              <a:endParaRPr lang="en-US" sz="1300" dirty="0">
+                <a:solidFill>
+                  <a:schemeClr val="tx1"/>
+                </a:solidFill>
+                <a:latin typeface="+mj-lt"/>
+              </a:endParaRPr>
+            </a:p>
+          </p:txBody>
+        </p:sp>
+        <p:sp>
+          <p:nvSpPr>
+            <p:cNvPr id="60" name="Cube 59">
+              <a:extLst>
+                <a:ext uri="{FF2B5EF4-FFF2-40B4-BE49-F238E27FC236}">
+                  <a16:creationId xmlns:a16="http://schemas.microsoft.com/office/drawing/2014/main" id="{6158BE2C-F608-E546-2FDF-751293D69717}"/>
+                </a:ext>
+              </a:extLst>
+            </p:cNvPr>
+            <p:cNvSpPr/>
+            <p:nvPr/>
+          </p:nvSpPr>
+          <p:spPr>
+            <a:xfrm>
+              <a:off x="8450119" y="4418076"/>
+              <a:ext cx="1524983" cy="632460"/>
+            </a:xfrm>
+            <a:prstGeom prst="cube">
+              <a:avLst>
+                <a:gd name="adj" fmla="val 17720"/>
+              </a:avLst>
+            </a:prstGeom>
+            <a:solidFill>
+              <a:schemeClr val="bg1">
+                <a:lumMod val="95000"/>
+              </a:schemeClr>
+            </a:solidFill>
+            <a:ln>
+              <a:solidFill>
+                <a:schemeClr val="tx1"/>
+              </a:solidFill>
+            </a:ln>
+          </p:spPr>
+          <p:style>
+            <a:lnRef idx="2">
+              <a:schemeClr val="accent1">
+                <a:shade val="15000"/>
+              </a:schemeClr>
+            </a:lnRef>
+            <a:fillRef idx="1">
+              <a:schemeClr val="accent1"/>
+            </a:fillRef>
+            <a:effectRef idx="0">
+              <a:schemeClr val="accent1"/>
+            </a:effectRef>
+            <a:fontRef idx="minor">
+              <a:schemeClr val="lt1"/>
+            </a:fontRef>
+          </p:style>
+          <p:txBody>
+            <a:bodyPr rtlCol="0" anchor="ctr"/>
+            <a:lstStyle/>
+            <a:p>
+              <a:pPr algn="ctr"/>
+              <a:r>
+                <a:rPr lang="vi-VN" sz="1300" dirty="0">
+                  <a:solidFill>
+                    <a:schemeClr val="tx1"/>
+                  </a:solidFill>
+                  <a:latin typeface="+mj-lt"/>
+                </a:rPr>
+                <a:t>LLM</a:t>
+              </a:r>
+              <a:endParaRPr lang="en-US" sz="1300" dirty="0">
+                <a:solidFill>
+                  <a:schemeClr val="tx1"/>
+                </a:solidFill>
+                <a:latin typeface="+mj-lt"/>
+              </a:endParaRPr>
+            </a:p>
+          </p:txBody>
+        </p:sp>
+        <p:sp>
+          <p:nvSpPr>
+            <p:cNvPr id="63" name="Rectangle: Rounded Corners 62">
+              <a:extLst>
+                <a:ext uri="{FF2B5EF4-FFF2-40B4-BE49-F238E27FC236}">
+                  <a16:creationId xmlns:a16="http://schemas.microsoft.com/office/drawing/2014/main" id="{0296C90D-249F-DB56-FA26-C962B7049701}"/>
+                </a:ext>
+              </a:extLst>
+            </p:cNvPr>
+            <p:cNvSpPr/>
+            <p:nvPr/>
+          </p:nvSpPr>
+          <p:spPr>
+            <a:xfrm>
+              <a:off x="4395214" y="4472940"/>
+              <a:ext cx="2220657" cy="632460"/>
+            </a:xfrm>
+            <a:prstGeom prst="roundRect">
+              <a:avLst/>
+            </a:prstGeom>
+            <a:solidFill>
+              <a:schemeClr val="bg1">
+                <a:lumMod val="95000"/>
+              </a:schemeClr>
+            </a:solidFill>
+            <a:ln>
+              <a:solidFill>
+                <a:schemeClr val="tx1"/>
+              </a:solidFill>
+              <a:prstDash val="solid"/>
+            </a:ln>
+          </p:spPr>
+          <p:style>
+            <a:lnRef idx="2">
+              <a:schemeClr val="accent1">
+                <a:shade val="15000"/>
+              </a:schemeClr>
+            </a:lnRef>
+            <a:fillRef idx="1">
+              <a:schemeClr val="accent1"/>
+            </a:fillRef>
+            <a:effectRef idx="0">
+              <a:schemeClr val="accent1"/>
+            </a:effectRef>
+            <a:fontRef idx="minor">
+              <a:schemeClr val="lt1"/>
+            </a:fontRef>
+          </p:style>
+          <p:txBody>
+            <a:bodyPr rtlCol="0" anchor="ctr"/>
+            <a:lstStyle/>
+            <a:p>
+              <a:pPr algn="ctr"/>
+              <a:r>
+                <a:rPr lang="vi-VN" sz="1300" dirty="0">
+                  <a:solidFill>
+                    <a:schemeClr val="tx1"/>
+                  </a:solidFill>
+                  <a:latin typeface="+mj-lt"/>
+                </a:rPr>
+                <a:t>Bộ phân tích cú pháp và</a:t>
+              </a:r>
+            </a:p>
+            <a:p>
+              <a:pPr algn="ctr"/>
+              <a:r>
+                <a:rPr lang="vi-VN" sz="1300" dirty="0">
+                  <a:solidFill>
+                    <a:schemeClr val="tx1"/>
+                  </a:solidFill>
+                  <a:latin typeface="+mj-lt"/>
+                </a:rPr>
+                <a:t>dữ liệu phản hồi</a:t>
+              </a:r>
+            </a:p>
+          </p:txBody>
+        </p:sp>
+        <p:sp>
+          <p:nvSpPr>
+            <p:cNvPr id="65" name="Rectangle: Rounded Corners 64">
+              <a:extLst>
+                <a:ext uri="{FF2B5EF4-FFF2-40B4-BE49-F238E27FC236}">
+                  <a16:creationId xmlns:a16="http://schemas.microsoft.com/office/drawing/2014/main" id="{EA77A18D-9FEA-6984-0655-1B6A3B91095D}"/>
+                </a:ext>
+              </a:extLst>
+            </p:cNvPr>
+            <p:cNvSpPr/>
+            <p:nvPr/>
+          </p:nvSpPr>
+          <p:spPr>
+            <a:xfrm>
+              <a:off x="8397195" y="3412236"/>
+              <a:ext cx="1511805" cy="632460"/>
+            </a:xfrm>
+            <a:prstGeom prst="roundRect">
+              <a:avLst/>
+            </a:prstGeom>
+            <a:solidFill>
+              <a:schemeClr val="bg1">
+                <a:lumMod val="95000"/>
+              </a:schemeClr>
+            </a:solidFill>
+            <a:ln>
+              <a:solidFill>
+                <a:schemeClr val="tx1"/>
+              </a:solidFill>
+            </a:ln>
+          </p:spPr>
+          <p:style>
+            <a:lnRef idx="2">
+              <a:schemeClr val="accent1">
+                <a:shade val="15000"/>
+              </a:schemeClr>
+            </a:lnRef>
+            <a:fillRef idx="1">
+              <a:schemeClr val="accent1"/>
+            </a:fillRef>
+            <a:effectRef idx="0">
+              <a:schemeClr val="accent1"/>
+            </a:effectRef>
+            <a:fontRef idx="minor">
+              <a:schemeClr val="lt1"/>
+            </a:fontRef>
+          </p:style>
+          <p:txBody>
+            <a:bodyPr rtlCol="0" anchor="ctr"/>
+            <a:lstStyle/>
+            <a:p>
+              <a:pPr algn="ctr"/>
+              <a:r>
+                <a:rPr lang="vi-VN" sz="1300" dirty="0">
+                  <a:solidFill>
+                    <a:schemeClr val="tx1"/>
+                  </a:solidFill>
+                  <a:latin typeface="+mj-lt"/>
+                </a:rPr>
+                <a:t>Thông tin ngữ cảnh trò chuyện</a:t>
+              </a:r>
+              <a:endParaRPr lang="en-US" sz="1300" dirty="0">
+                <a:solidFill>
+                  <a:schemeClr val="tx1"/>
+                </a:solidFill>
+                <a:latin typeface="+mj-lt"/>
+              </a:endParaRPr>
+            </a:p>
+          </p:txBody>
+        </p:sp>
+        <p:sp>
+          <p:nvSpPr>
+            <p:cNvPr id="66" name="Rectangle: Rounded Corners 65">
+              <a:extLst>
+                <a:ext uri="{FF2B5EF4-FFF2-40B4-BE49-F238E27FC236}">
+                  <a16:creationId xmlns:a16="http://schemas.microsoft.com/office/drawing/2014/main" id="{7F35D1B6-911D-F224-57AD-49B318E72813}"/>
+                </a:ext>
+              </a:extLst>
+            </p:cNvPr>
+            <p:cNvSpPr/>
+            <p:nvPr/>
+          </p:nvSpPr>
+          <p:spPr>
+            <a:xfrm>
+              <a:off x="8450119" y="5448300"/>
+              <a:ext cx="1919177" cy="632460"/>
+            </a:xfrm>
+            <a:prstGeom prst="roundRect">
+              <a:avLst/>
+            </a:prstGeom>
+            <a:solidFill>
+              <a:schemeClr val="bg1">
+                <a:lumMod val="95000"/>
+              </a:schemeClr>
+            </a:solidFill>
+            <a:ln>
+              <a:solidFill>
+                <a:schemeClr val="tx1"/>
+              </a:solidFill>
+              <a:prstDash val="dash"/>
+            </a:ln>
+          </p:spPr>
+          <p:style>
+            <a:lnRef idx="2">
+              <a:schemeClr val="accent1">
+                <a:shade val="15000"/>
+              </a:schemeClr>
+            </a:lnRef>
+            <a:fillRef idx="1">
+              <a:schemeClr val="accent1"/>
+            </a:fillRef>
+            <a:effectRef idx="0">
+              <a:schemeClr val="accent1"/>
+            </a:effectRef>
+            <a:fontRef idx="minor">
+              <a:schemeClr val="lt1"/>
+            </a:fontRef>
+          </p:style>
+          <p:txBody>
+            <a:bodyPr rtlCol="0" anchor="ctr"/>
+            <a:lstStyle/>
+            <a:p>
+              <a:pPr algn="ctr"/>
+              <a:r>
+                <a:rPr lang="vi-VN" sz="1300" dirty="0">
+                  <a:solidFill>
+                    <a:schemeClr val="tx1"/>
+                  </a:solidFill>
+                  <a:latin typeface="+mj-lt"/>
+                </a:rPr>
+                <a:t>Xử lý sau phản hồi và</a:t>
+              </a:r>
+            </a:p>
+            <a:p>
+              <a:pPr algn="ctr"/>
+              <a:r>
+                <a:rPr lang="vi-VN" sz="1300" dirty="0">
+                  <a:solidFill>
+                    <a:schemeClr val="tx1"/>
+                  </a:solidFill>
+                  <a:latin typeface="+mj-lt"/>
+                </a:rPr>
+                <a:t>trích xuất thông tin</a:t>
+              </a:r>
+            </a:p>
+          </p:txBody>
+        </p:sp>
+        <p:sp>
+          <p:nvSpPr>
+            <p:cNvPr id="67" name="Cube 66">
+              <a:extLst>
+                <a:ext uri="{FF2B5EF4-FFF2-40B4-BE49-F238E27FC236}">
+                  <a16:creationId xmlns:a16="http://schemas.microsoft.com/office/drawing/2014/main" id="{01B4BE50-BC08-C0F2-A6DA-495B86613801}"/>
+                </a:ext>
+              </a:extLst>
+            </p:cNvPr>
+            <p:cNvSpPr/>
+            <p:nvPr/>
+          </p:nvSpPr>
+          <p:spPr>
+            <a:xfrm>
+              <a:off x="6425763" y="5393436"/>
+              <a:ext cx="1197834" cy="632460"/>
+            </a:xfrm>
+            <a:prstGeom prst="cube">
+              <a:avLst>
+                <a:gd name="adj" fmla="val 17720"/>
+              </a:avLst>
+            </a:prstGeom>
+            <a:solidFill>
+              <a:schemeClr val="bg1">
+                <a:lumMod val="95000"/>
+              </a:schemeClr>
+            </a:solidFill>
+            <a:ln>
+              <a:solidFill>
+                <a:schemeClr val="tx1"/>
+              </a:solidFill>
+            </a:ln>
+          </p:spPr>
+          <p:style>
+            <a:lnRef idx="2">
+              <a:schemeClr val="accent1">
+                <a:shade val="15000"/>
+              </a:schemeClr>
+            </a:lnRef>
+            <a:fillRef idx="1">
+              <a:schemeClr val="accent1"/>
+            </a:fillRef>
+            <a:effectRef idx="0">
+              <a:schemeClr val="accent1"/>
+            </a:effectRef>
+            <a:fontRef idx="minor">
+              <a:schemeClr val="lt1"/>
+            </a:fontRef>
+          </p:style>
+          <p:txBody>
+            <a:bodyPr rtlCol="0" anchor="ctr"/>
+            <a:lstStyle/>
+            <a:p>
+              <a:pPr algn="ctr"/>
+              <a:r>
+                <a:rPr lang="vi-VN" sz="1300" dirty="0">
+                  <a:solidFill>
+                    <a:schemeClr val="tx1"/>
+                  </a:solidFill>
+                  <a:latin typeface="+mj-lt"/>
+                </a:rPr>
+                <a:t>LLM</a:t>
+              </a:r>
+              <a:endParaRPr lang="en-US" sz="1300" dirty="0">
+                <a:solidFill>
+                  <a:schemeClr val="tx1"/>
+                </a:solidFill>
+                <a:latin typeface="+mj-lt"/>
+              </a:endParaRPr>
+            </a:p>
+          </p:txBody>
+        </p:sp>
+        <p:cxnSp>
+          <p:nvCxnSpPr>
+            <p:cNvPr id="29" name="Straight Arrow Connector 28">
+              <a:extLst>
+                <a:ext uri="{FF2B5EF4-FFF2-40B4-BE49-F238E27FC236}">
+                  <a16:creationId xmlns:a16="http://schemas.microsoft.com/office/drawing/2014/main" id="{5185EC97-73B8-FE69-4B27-5BD46DE6A46E}"/>
+                </a:ext>
+              </a:extLst>
+            </p:cNvPr>
+            <p:cNvCxnSpPr>
+              <a:cxnSpLocks/>
+              <a:stCxn id="17" idx="0"/>
+              <a:endCxn id="55" idx="2"/>
+            </p:cNvCxnSpPr>
+            <p:nvPr/>
+          </p:nvCxnSpPr>
+          <p:spPr>
+            <a:xfrm flipV="1">
+              <a:off x="945293" y="1836420"/>
+              <a:ext cx="1" cy="1179537"/>
+            </a:xfrm>
+            <a:prstGeom prst="straightConnector1">
+              <a:avLst/>
+            </a:prstGeom>
+            <a:ln>
+              <a:tailEnd type="triangle"/>
+            </a:ln>
+          </p:spPr>
+          <p:style>
+            <a:lnRef idx="2">
+              <a:schemeClr val="dk1"/>
+            </a:lnRef>
+            <a:fillRef idx="0">
+              <a:schemeClr val="dk1"/>
+            </a:fillRef>
+            <a:effectRef idx="1">
+              <a:schemeClr val="dk1"/>
+            </a:effectRef>
+            <a:fontRef idx="minor">
+              <a:schemeClr val="tx1"/>
+            </a:fontRef>
+          </p:style>
+        </p:cxnSp>
+        <p:cxnSp>
+          <p:nvCxnSpPr>
+            <p:cNvPr id="34" name="Straight Arrow Connector 33">
+              <a:extLst>
+                <a:ext uri="{FF2B5EF4-FFF2-40B4-BE49-F238E27FC236}">
+                  <a16:creationId xmlns:a16="http://schemas.microsoft.com/office/drawing/2014/main" id="{A6F1B776-AFD1-D99E-8130-BD6F106FC8B3}"/>
+                </a:ext>
+              </a:extLst>
+            </p:cNvPr>
+            <p:cNvCxnSpPr>
+              <a:cxnSpLocks/>
+              <a:stCxn id="54" idx="4"/>
+              <a:endCxn id="24" idx="1"/>
+            </p:cNvCxnSpPr>
+            <p:nvPr/>
+          </p:nvCxnSpPr>
+          <p:spPr>
+            <a:xfrm flipV="1">
+              <a:off x="3805699" y="1546860"/>
+              <a:ext cx="589517" cy="1269"/>
+            </a:xfrm>
+            <a:prstGeom prst="straightConnector1">
+              <a:avLst/>
+            </a:prstGeom>
+            <a:ln>
+              <a:tailEnd type="triangle"/>
+            </a:ln>
+          </p:spPr>
+          <p:style>
+            <a:lnRef idx="2">
+              <a:schemeClr val="dk1"/>
+            </a:lnRef>
+            <a:fillRef idx="0">
+              <a:schemeClr val="dk1"/>
+            </a:fillRef>
+            <a:effectRef idx="1">
+              <a:schemeClr val="dk1"/>
+            </a:effectRef>
+            <a:fontRef idx="minor">
+              <a:schemeClr val="tx1"/>
+            </a:fontRef>
+          </p:style>
+        </p:cxnSp>
+        <p:cxnSp>
+          <p:nvCxnSpPr>
+            <p:cNvPr id="36" name="Straight Arrow Connector 35">
+              <a:extLst>
+                <a:ext uri="{FF2B5EF4-FFF2-40B4-BE49-F238E27FC236}">
+                  <a16:creationId xmlns:a16="http://schemas.microsoft.com/office/drawing/2014/main" id="{3B579111-A5B6-E2A4-E0DD-E645317FAAD8}"/>
+                </a:ext>
+              </a:extLst>
+            </p:cNvPr>
+            <p:cNvCxnSpPr>
+              <a:cxnSpLocks/>
+              <a:stCxn id="24" idx="3"/>
+              <a:endCxn id="20" idx="1"/>
+            </p:cNvCxnSpPr>
+            <p:nvPr/>
+          </p:nvCxnSpPr>
+          <p:spPr>
+            <a:xfrm>
+              <a:off x="5852160" y="1546860"/>
+              <a:ext cx="495540" cy="0"/>
+            </a:xfrm>
+            <a:prstGeom prst="straightConnector1">
+              <a:avLst/>
+            </a:prstGeom>
+            <a:ln>
+              <a:tailEnd type="triangle"/>
+            </a:ln>
+          </p:spPr>
+          <p:style>
+            <a:lnRef idx="2">
+              <a:schemeClr val="dk1"/>
+            </a:lnRef>
+            <a:fillRef idx="0">
+              <a:schemeClr val="dk1"/>
+            </a:fillRef>
+            <a:effectRef idx="1">
+              <a:schemeClr val="dk1"/>
+            </a:effectRef>
+            <a:fontRef idx="minor">
+              <a:schemeClr val="tx1"/>
+            </a:fontRef>
+          </p:style>
+        </p:cxnSp>
+        <p:cxnSp>
+          <p:nvCxnSpPr>
+            <p:cNvPr id="38" name="Straight Arrow Connector 37">
+              <a:extLst>
+                <a:ext uri="{FF2B5EF4-FFF2-40B4-BE49-F238E27FC236}">
+                  <a16:creationId xmlns:a16="http://schemas.microsoft.com/office/drawing/2014/main" id="{1CD3DAC8-7BC9-420A-E1CC-3D96BA797614}"/>
+                </a:ext>
+              </a:extLst>
+            </p:cNvPr>
+            <p:cNvCxnSpPr>
+              <a:cxnSpLocks/>
+              <a:stCxn id="20" idx="3"/>
+              <a:endCxn id="13" idx="2"/>
+            </p:cNvCxnSpPr>
+            <p:nvPr/>
+          </p:nvCxnSpPr>
+          <p:spPr>
+            <a:xfrm flipV="1">
+              <a:off x="7804643" y="1543557"/>
+              <a:ext cx="645778" cy="3303"/>
+            </a:xfrm>
+            <a:prstGeom prst="straightConnector1">
+              <a:avLst/>
+            </a:prstGeom>
+            <a:ln>
+              <a:tailEnd type="triangle"/>
+            </a:ln>
+          </p:spPr>
+          <p:style>
+            <a:lnRef idx="2">
+              <a:schemeClr val="dk1"/>
+            </a:lnRef>
+            <a:fillRef idx="0">
+              <a:schemeClr val="dk1"/>
+            </a:fillRef>
+            <a:effectRef idx="1">
+              <a:schemeClr val="dk1"/>
+            </a:effectRef>
+            <a:fontRef idx="minor">
+              <a:schemeClr val="tx1"/>
+            </a:fontRef>
+          </p:style>
+        </p:cxnSp>
+        <p:cxnSp>
+          <p:nvCxnSpPr>
+            <p:cNvPr id="40" name="Straight Arrow Connector 39">
+              <a:extLst>
+                <a:ext uri="{FF2B5EF4-FFF2-40B4-BE49-F238E27FC236}">
+                  <a16:creationId xmlns:a16="http://schemas.microsoft.com/office/drawing/2014/main" id="{62F64B5E-AFEC-AED5-52BE-F1A5DD5E8CE8}"/>
+                </a:ext>
+              </a:extLst>
+            </p:cNvPr>
+            <p:cNvCxnSpPr>
+              <a:cxnSpLocks/>
+              <a:stCxn id="20" idx="2"/>
+              <a:endCxn id="58" idx="0"/>
+            </p:cNvCxnSpPr>
+            <p:nvPr/>
+          </p:nvCxnSpPr>
+          <p:spPr>
+            <a:xfrm>
+              <a:off x="7076172" y="1812036"/>
+              <a:ext cx="0" cy="538787"/>
+            </a:xfrm>
+            <a:prstGeom prst="straightConnector1">
+              <a:avLst/>
+            </a:prstGeom>
+            <a:ln>
+              <a:tailEnd type="triangle"/>
+            </a:ln>
+          </p:spPr>
+          <p:style>
+            <a:lnRef idx="2">
+              <a:schemeClr val="dk1"/>
+            </a:lnRef>
+            <a:fillRef idx="0">
+              <a:schemeClr val="dk1"/>
+            </a:fillRef>
+            <a:effectRef idx="1">
+              <a:schemeClr val="dk1"/>
+            </a:effectRef>
+            <a:fontRef idx="minor">
+              <a:schemeClr val="tx1"/>
+            </a:fontRef>
+          </p:style>
+        </p:cxnSp>
+        <p:cxnSp>
+          <p:nvCxnSpPr>
+            <p:cNvPr id="42" name="Straight Arrow Connector 41">
+              <a:extLst>
+                <a:ext uri="{FF2B5EF4-FFF2-40B4-BE49-F238E27FC236}">
+                  <a16:creationId xmlns:a16="http://schemas.microsoft.com/office/drawing/2014/main" id="{66A0A411-8CCE-BE72-7F0C-11B1840BCAE9}"/>
+                </a:ext>
+              </a:extLst>
+            </p:cNvPr>
+            <p:cNvCxnSpPr>
+              <a:cxnSpLocks/>
+              <a:stCxn id="13" idx="3"/>
+              <a:endCxn id="57" idx="0"/>
+            </p:cNvCxnSpPr>
+            <p:nvPr/>
+          </p:nvCxnSpPr>
+          <p:spPr>
+            <a:xfrm>
+              <a:off x="9154762" y="1757172"/>
+              <a:ext cx="655" cy="493776"/>
+            </a:xfrm>
+            <a:prstGeom prst="straightConnector1">
+              <a:avLst/>
+            </a:prstGeom>
+            <a:ln>
+              <a:tailEnd type="triangle"/>
+            </a:ln>
+          </p:spPr>
+          <p:style>
+            <a:lnRef idx="2">
+              <a:schemeClr val="dk1"/>
+            </a:lnRef>
+            <a:fillRef idx="0">
+              <a:schemeClr val="dk1"/>
+            </a:fillRef>
+            <a:effectRef idx="1">
+              <a:schemeClr val="dk1"/>
+            </a:effectRef>
+            <a:fontRef idx="minor">
+              <a:schemeClr val="tx1"/>
+            </a:fontRef>
+          </p:style>
+        </p:cxnSp>
+        <p:cxnSp>
+          <p:nvCxnSpPr>
+            <p:cNvPr id="78" name="Straight Arrow Connector 77">
+              <a:extLst>
+                <a:ext uri="{FF2B5EF4-FFF2-40B4-BE49-F238E27FC236}">
+                  <a16:creationId xmlns:a16="http://schemas.microsoft.com/office/drawing/2014/main" id="{217B1BA4-C76A-B354-B59A-1FE17A0DDF23}"/>
+                </a:ext>
+              </a:extLst>
+            </p:cNvPr>
+            <p:cNvCxnSpPr/>
+            <p:nvPr/>
+          </p:nvCxnSpPr>
+          <p:spPr>
+            <a:xfrm>
+              <a:off x="9917908" y="2496408"/>
+              <a:ext cx="635232" cy="0"/>
+            </a:xfrm>
+            <a:prstGeom prst="straightConnector1">
+              <a:avLst/>
+            </a:prstGeom>
+            <a:ln>
+              <a:tailEnd type="triangle"/>
+            </a:ln>
+          </p:spPr>
+          <p:style>
+            <a:lnRef idx="2">
+              <a:schemeClr val="dk1"/>
+            </a:lnRef>
+            <a:fillRef idx="0">
+              <a:schemeClr val="dk1"/>
+            </a:fillRef>
+            <a:effectRef idx="1">
+              <a:schemeClr val="dk1"/>
+            </a:effectRef>
+            <a:fontRef idx="minor">
+              <a:schemeClr val="tx1"/>
+            </a:fontRef>
+          </p:style>
+        </p:cxnSp>
+        <p:cxnSp>
+          <p:nvCxnSpPr>
+            <p:cNvPr id="80" name="Straight Arrow Connector 79">
+              <a:extLst>
+                <a:ext uri="{FF2B5EF4-FFF2-40B4-BE49-F238E27FC236}">
+                  <a16:creationId xmlns:a16="http://schemas.microsoft.com/office/drawing/2014/main" id="{91838F50-068A-0448-EC96-6537EBB9C52E}"/>
+                </a:ext>
+              </a:extLst>
+            </p:cNvPr>
+            <p:cNvCxnSpPr/>
+            <p:nvPr/>
+          </p:nvCxnSpPr>
+          <p:spPr>
+            <a:xfrm flipH="1">
+              <a:off x="9917908" y="2679192"/>
+              <a:ext cx="635232" cy="0"/>
+            </a:xfrm>
+            <a:prstGeom prst="straightConnector1">
+              <a:avLst/>
+            </a:prstGeom>
+            <a:ln>
+              <a:tailEnd type="triangle"/>
+            </a:ln>
+          </p:spPr>
+          <p:style>
+            <a:lnRef idx="2">
+              <a:schemeClr val="dk1"/>
+            </a:lnRef>
+            <a:fillRef idx="0">
+              <a:schemeClr val="dk1"/>
+            </a:fillRef>
+            <a:effectRef idx="1">
+              <a:schemeClr val="dk1"/>
+            </a:effectRef>
+            <a:fontRef idx="minor">
+              <a:schemeClr val="tx1"/>
+            </a:fontRef>
+          </p:style>
+        </p:cxnSp>
+        <p:cxnSp>
+          <p:nvCxnSpPr>
+            <p:cNvPr id="82" name="Straight Arrow Connector 81">
+              <a:extLst>
+                <a:ext uri="{FF2B5EF4-FFF2-40B4-BE49-F238E27FC236}">
+                  <a16:creationId xmlns:a16="http://schemas.microsoft.com/office/drawing/2014/main" id="{F28F7C08-9BCC-3121-ACAF-3A37A8C9B3DE}"/>
+                </a:ext>
+              </a:extLst>
+            </p:cNvPr>
+            <p:cNvCxnSpPr/>
+            <p:nvPr/>
+          </p:nvCxnSpPr>
+          <p:spPr>
+            <a:xfrm>
+              <a:off x="7804643" y="2688432"/>
+              <a:ext cx="583408" cy="0"/>
+            </a:xfrm>
+            <a:prstGeom prst="straightConnector1">
+              <a:avLst/>
+            </a:prstGeom>
+            <a:ln>
+              <a:tailEnd type="triangle"/>
+            </a:ln>
+          </p:spPr>
+          <p:style>
+            <a:lnRef idx="2">
+              <a:schemeClr val="dk1"/>
+            </a:lnRef>
+            <a:fillRef idx="0">
+              <a:schemeClr val="dk1"/>
+            </a:fillRef>
+            <a:effectRef idx="1">
+              <a:schemeClr val="dk1"/>
+            </a:effectRef>
+            <a:fontRef idx="minor">
+              <a:schemeClr val="tx1"/>
+            </a:fontRef>
+          </p:style>
+        </p:cxnSp>
+        <p:cxnSp>
+          <p:nvCxnSpPr>
+            <p:cNvPr id="83" name="Straight Arrow Connector 82">
+              <a:extLst>
+                <a:ext uri="{FF2B5EF4-FFF2-40B4-BE49-F238E27FC236}">
+                  <a16:creationId xmlns:a16="http://schemas.microsoft.com/office/drawing/2014/main" id="{92CD4434-2083-6E8E-1214-18BAEE7496F3}"/>
+                </a:ext>
+              </a:extLst>
+            </p:cNvPr>
+            <p:cNvCxnSpPr>
+              <a:cxnSpLocks/>
+            </p:cNvCxnSpPr>
+            <p:nvPr/>
+          </p:nvCxnSpPr>
+          <p:spPr>
+            <a:xfrm flipH="1">
+              <a:off x="7804643" y="2487264"/>
+              <a:ext cx="588282" cy="0"/>
+            </a:xfrm>
+            <a:prstGeom prst="straightConnector1">
+              <a:avLst/>
+            </a:prstGeom>
+            <a:ln>
+              <a:tailEnd type="triangle"/>
+            </a:ln>
+          </p:spPr>
+          <p:style>
+            <a:lnRef idx="2">
+              <a:schemeClr val="dk1"/>
+            </a:lnRef>
+            <a:fillRef idx="0">
+              <a:schemeClr val="dk1"/>
+            </a:fillRef>
+            <a:effectRef idx="1">
+              <a:schemeClr val="dk1"/>
+            </a:effectRef>
+            <a:fontRef idx="minor">
+              <a:schemeClr val="tx1"/>
+            </a:fontRef>
+          </p:style>
+        </p:cxnSp>
+        <p:cxnSp>
+          <p:nvCxnSpPr>
+            <p:cNvPr id="86" name="Straight Arrow Connector 85">
+              <a:extLst>
+                <a:ext uri="{FF2B5EF4-FFF2-40B4-BE49-F238E27FC236}">
+                  <a16:creationId xmlns:a16="http://schemas.microsoft.com/office/drawing/2014/main" id="{75E4E9EC-0319-EBD7-DEE6-D859B2F1AC23}"/>
+                </a:ext>
+              </a:extLst>
+            </p:cNvPr>
+            <p:cNvCxnSpPr>
+              <a:cxnSpLocks/>
+              <a:stCxn id="57" idx="2"/>
+              <a:endCxn id="65" idx="0"/>
+            </p:cNvCxnSpPr>
+            <p:nvPr/>
+          </p:nvCxnSpPr>
+          <p:spPr>
+            <a:xfrm flipH="1">
+              <a:off x="9153098" y="2973324"/>
+              <a:ext cx="2319" cy="438912"/>
+            </a:xfrm>
+            <a:prstGeom prst="straightConnector1">
+              <a:avLst/>
+            </a:prstGeom>
+            <a:ln>
+              <a:tailEnd type="triangle"/>
+            </a:ln>
+          </p:spPr>
+          <p:style>
+            <a:lnRef idx="2">
+              <a:schemeClr val="dk1"/>
+            </a:lnRef>
+            <a:fillRef idx="0">
+              <a:schemeClr val="dk1"/>
+            </a:fillRef>
+            <a:effectRef idx="1">
+              <a:schemeClr val="dk1"/>
+            </a:effectRef>
+            <a:fontRef idx="minor">
+              <a:schemeClr val="tx1"/>
+            </a:fontRef>
+          </p:style>
+        </p:cxnSp>
+        <p:cxnSp>
+          <p:nvCxnSpPr>
+            <p:cNvPr id="88" name="Straight Arrow Connector 87">
+              <a:extLst>
+                <a:ext uri="{FF2B5EF4-FFF2-40B4-BE49-F238E27FC236}">
+                  <a16:creationId xmlns:a16="http://schemas.microsoft.com/office/drawing/2014/main" id="{516DA1DB-D733-427E-CB22-F1CF45E27615}"/>
+                </a:ext>
+              </a:extLst>
+            </p:cNvPr>
+            <p:cNvCxnSpPr>
+              <a:cxnSpLocks/>
+              <a:stCxn id="65" idx="3"/>
+              <a:endCxn id="59" idx="1"/>
+            </p:cNvCxnSpPr>
+            <p:nvPr/>
+          </p:nvCxnSpPr>
+          <p:spPr>
+            <a:xfrm>
+              <a:off x="9909000" y="3728466"/>
+              <a:ext cx="644140" cy="0"/>
+            </a:xfrm>
+            <a:prstGeom prst="straightConnector1">
+              <a:avLst/>
+            </a:prstGeom>
+            <a:ln>
+              <a:tailEnd type="triangle"/>
+            </a:ln>
+          </p:spPr>
+          <p:style>
+            <a:lnRef idx="2">
+              <a:schemeClr val="dk1"/>
+            </a:lnRef>
+            <a:fillRef idx="0">
+              <a:schemeClr val="dk1"/>
+            </a:fillRef>
+            <a:effectRef idx="1">
+              <a:schemeClr val="dk1"/>
+            </a:effectRef>
+            <a:fontRef idx="minor">
+              <a:schemeClr val="tx1"/>
+            </a:fontRef>
+          </p:style>
+        </p:cxnSp>
+        <p:cxnSp>
+          <p:nvCxnSpPr>
+            <p:cNvPr id="90" name="Straight Arrow Connector 89">
+              <a:extLst>
+                <a:ext uri="{FF2B5EF4-FFF2-40B4-BE49-F238E27FC236}">
+                  <a16:creationId xmlns:a16="http://schemas.microsoft.com/office/drawing/2014/main" id="{9A502FC5-5A6B-76B6-80C8-180C0C61DCCA}"/>
+                </a:ext>
+              </a:extLst>
+            </p:cNvPr>
+            <p:cNvCxnSpPr>
+              <a:cxnSpLocks/>
+              <a:stCxn id="65" idx="2"/>
+              <a:endCxn id="60" idx="1"/>
+            </p:cNvCxnSpPr>
+            <p:nvPr/>
+          </p:nvCxnSpPr>
+          <p:spPr>
+            <a:xfrm>
+              <a:off x="9153098" y="4044696"/>
+              <a:ext cx="3477" cy="485452"/>
+            </a:xfrm>
+            <a:prstGeom prst="straightConnector1">
+              <a:avLst/>
+            </a:prstGeom>
+            <a:ln>
+              <a:tailEnd type="triangle"/>
+            </a:ln>
+          </p:spPr>
+          <p:style>
+            <a:lnRef idx="2">
+              <a:schemeClr val="dk1"/>
+            </a:lnRef>
+            <a:fillRef idx="0">
+              <a:schemeClr val="dk1"/>
+            </a:fillRef>
+            <a:effectRef idx="1">
+              <a:schemeClr val="dk1"/>
+            </a:effectRef>
+            <a:fontRef idx="minor">
+              <a:schemeClr val="tx1"/>
+            </a:fontRef>
+          </p:style>
+        </p:cxnSp>
+        <p:cxnSp>
+          <p:nvCxnSpPr>
+            <p:cNvPr id="92" name="Connector: Elbow 91">
+              <a:extLst>
+                <a:ext uri="{FF2B5EF4-FFF2-40B4-BE49-F238E27FC236}">
+                  <a16:creationId xmlns:a16="http://schemas.microsoft.com/office/drawing/2014/main" id="{6C127AEE-ECFF-29F8-3684-BD377015F02F}"/>
+                </a:ext>
+              </a:extLst>
+            </p:cNvPr>
+            <p:cNvCxnSpPr>
+              <a:cxnSpLocks/>
+              <a:stCxn id="59" idx="2"/>
+              <a:endCxn id="60" idx="4"/>
+            </p:cNvCxnSpPr>
+            <p:nvPr/>
+          </p:nvCxnSpPr>
+          <p:spPr>
+            <a:xfrm rot="5400000">
+              <a:off x="10216023" y="3691703"/>
+              <a:ext cx="745646" cy="1451632"/>
+            </a:xfrm>
+            <a:prstGeom prst="bentConnector2">
+              <a:avLst/>
+            </a:prstGeom>
+            <a:ln>
+              <a:tailEnd type="triangle"/>
+            </a:ln>
+          </p:spPr>
+          <p:style>
+            <a:lnRef idx="2">
+              <a:schemeClr val="dk1"/>
+            </a:lnRef>
+            <a:fillRef idx="0">
+              <a:schemeClr val="dk1"/>
+            </a:fillRef>
+            <a:effectRef idx="1">
+              <a:schemeClr val="dk1"/>
+            </a:effectRef>
+            <a:fontRef idx="minor">
+              <a:schemeClr val="tx1"/>
+            </a:fontRef>
+          </p:style>
+        </p:cxnSp>
+        <p:cxnSp>
+          <p:nvCxnSpPr>
+            <p:cNvPr id="94" name="Straight Arrow Connector 93">
+              <a:extLst>
+                <a:ext uri="{FF2B5EF4-FFF2-40B4-BE49-F238E27FC236}">
+                  <a16:creationId xmlns:a16="http://schemas.microsoft.com/office/drawing/2014/main" id="{60C1BFB3-CB1B-E7D5-D527-4AFB3CCDAE5B}"/>
+                </a:ext>
+              </a:extLst>
+            </p:cNvPr>
+            <p:cNvCxnSpPr>
+              <a:cxnSpLocks/>
+              <a:stCxn id="60" idx="2"/>
+              <a:endCxn id="63" idx="3"/>
+            </p:cNvCxnSpPr>
+            <p:nvPr/>
+          </p:nvCxnSpPr>
+          <p:spPr>
+            <a:xfrm flipH="1" flipV="1">
+              <a:off x="6615871" y="4789170"/>
+              <a:ext cx="1834248" cy="1172"/>
+            </a:xfrm>
+            <a:prstGeom prst="straightConnector1">
+              <a:avLst/>
+            </a:prstGeom>
+            <a:ln>
+              <a:tailEnd type="triangle"/>
+            </a:ln>
+          </p:spPr>
+          <p:style>
+            <a:lnRef idx="2">
+              <a:schemeClr val="dk1"/>
+            </a:lnRef>
+            <a:fillRef idx="0">
+              <a:schemeClr val="dk1"/>
+            </a:fillRef>
+            <a:effectRef idx="1">
+              <a:schemeClr val="dk1"/>
+            </a:effectRef>
+            <a:fontRef idx="minor">
+              <a:schemeClr val="tx1"/>
+            </a:fontRef>
+          </p:style>
+        </p:cxnSp>
+        <p:cxnSp>
+          <p:nvCxnSpPr>
+            <p:cNvPr id="98" name="Connector: Elbow 97">
+              <a:extLst>
+                <a:ext uri="{FF2B5EF4-FFF2-40B4-BE49-F238E27FC236}">
+                  <a16:creationId xmlns:a16="http://schemas.microsoft.com/office/drawing/2014/main" id="{723710D3-0E97-021A-0A94-F06F2EB0B91C}"/>
+                </a:ext>
+              </a:extLst>
+            </p:cNvPr>
+            <p:cNvCxnSpPr>
+              <a:cxnSpLocks/>
+              <a:stCxn id="63" idx="1"/>
+              <a:endCxn id="17" idx="2"/>
+            </p:cNvCxnSpPr>
+            <p:nvPr/>
+          </p:nvCxnSpPr>
+          <p:spPr>
+            <a:xfrm rot="10800000">
+              <a:off x="945294" y="4019888"/>
+              <a:ext cx="3449921" cy="769282"/>
+            </a:xfrm>
+            <a:prstGeom prst="bentConnector2">
+              <a:avLst/>
+            </a:prstGeom>
+            <a:ln>
+              <a:tailEnd type="triangle"/>
+            </a:ln>
+          </p:spPr>
+          <p:style>
+            <a:lnRef idx="2">
+              <a:schemeClr val="dk1"/>
+            </a:lnRef>
+            <a:fillRef idx="0">
+              <a:schemeClr val="dk1"/>
+            </a:fillRef>
+            <a:effectRef idx="1">
+              <a:schemeClr val="dk1"/>
+            </a:effectRef>
+            <a:fontRef idx="minor">
+              <a:schemeClr val="tx1"/>
+            </a:fontRef>
+          </p:style>
+        </p:cxnSp>
+        <p:cxnSp>
+          <p:nvCxnSpPr>
+            <p:cNvPr id="100" name="Connector: Elbow 99">
+              <a:extLst>
+                <a:ext uri="{FF2B5EF4-FFF2-40B4-BE49-F238E27FC236}">
+                  <a16:creationId xmlns:a16="http://schemas.microsoft.com/office/drawing/2014/main" id="{9AEF66C2-8787-335F-CF05-77C6E825848C}"/>
+                </a:ext>
+              </a:extLst>
+            </p:cNvPr>
+            <p:cNvCxnSpPr>
+              <a:cxnSpLocks/>
+              <a:stCxn id="63" idx="2"/>
+              <a:endCxn id="67" idx="2"/>
+            </p:cNvCxnSpPr>
+            <p:nvPr/>
+          </p:nvCxnSpPr>
+          <p:spPr>
+            <a:xfrm rot="16200000" flipH="1">
+              <a:off x="5635502" y="4975441"/>
+              <a:ext cx="660302" cy="920220"/>
+            </a:xfrm>
+            <a:prstGeom prst="bentConnector2">
+              <a:avLst/>
+            </a:prstGeom>
+            <a:ln>
+              <a:prstDash val="dash"/>
+              <a:tailEnd type="triangle"/>
+            </a:ln>
+          </p:spPr>
+          <p:style>
+            <a:lnRef idx="2">
+              <a:schemeClr val="dk1"/>
+            </a:lnRef>
+            <a:fillRef idx="0">
+              <a:schemeClr val="dk1"/>
+            </a:fillRef>
+            <a:effectRef idx="1">
+              <a:schemeClr val="dk1"/>
+            </a:effectRef>
+            <a:fontRef idx="minor">
+              <a:schemeClr val="tx1"/>
+            </a:fontRef>
+          </p:style>
+        </p:cxnSp>
+        <p:cxnSp>
+          <p:nvCxnSpPr>
+            <p:cNvPr id="109" name="Straight Arrow Connector 108">
+              <a:extLst>
+                <a:ext uri="{FF2B5EF4-FFF2-40B4-BE49-F238E27FC236}">
+                  <a16:creationId xmlns:a16="http://schemas.microsoft.com/office/drawing/2014/main" id="{6028F317-A45B-188C-4092-CFE1DE5AB6C8}"/>
+                </a:ext>
+              </a:extLst>
+            </p:cNvPr>
+            <p:cNvCxnSpPr>
+              <a:cxnSpLocks/>
+              <a:stCxn id="67" idx="4"/>
+              <a:endCxn id="66" idx="1"/>
+            </p:cNvCxnSpPr>
+            <p:nvPr/>
+          </p:nvCxnSpPr>
+          <p:spPr>
+            <a:xfrm flipV="1">
+              <a:off x="7511525" y="5764530"/>
+              <a:ext cx="938594" cy="1172"/>
+            </a:xfrm>
+            <a:prstGeom prst="straightConnector1">
+              <a:avLst/>
+            </a:prstGeom>
+            <a:ln>
+              <a:prstDash val="dash"/>
+              <a:tailEnd type="triangle"/>
+            </a:ln>
+          </p:spPr>
+          <p:style>
+            <a:lnRef idx="2">
+              <a:schemeClr val="dk1"/>
+            </a:lnRef>
+            <a:fillRef idx="0">
+              <a:schemeClr val="dk1"/>
+            </a:fillRef>
+            <a:effectRef idx="1">
+              <a:schemeClr val="dk1"/>
+            </a:effectRef>
+            <a:fontRef idx="minor">
+              <a:schemeClr val="tx1"/>
+            </a:fontRef>
+          </p:style>
+        </p:cxnSp>
+        <p:cxnSp>
+          <p:nvCxnSpPr>
+            <p:cNvPr id="113" name="Connector: Elbow 112">
+              <a:extLst>
+                <a:ext uri="{FF2B5EF4-FFF2-40B4-BE49-F238E27FC236}">
+                  <a16:creationId xmlns:a16="http://schemas.microsoft.com/office/drawing/2014/main" id="{406B426B-FF9D-B4EB-0733-4FD42B829FF4}"/>
+                </a:ext>
+              </a:extLst>
+            </p:cNvPr>
+            <p:cNvCxnSpPr>
+              <a:cxnSpLocks/>
+              <a:stCxn id="66" idx="0"/>
+              <a:endCxn id="58" idx="3"/>
+            </p:cNvCxnSpPr>
+            <p:nvPr/>
+          </p:nvCxnSpPr>
+          <p:spPr>
+            <a:xfrm rot="16200000" flipV="1">
+              <a:off x="7006214" y="3044806"/>
+              <a:ext cx="2473452" cy="2333536"/>
+            </a:xfrm>
+            <a:prstGeom prst="bentConnector3">
+              <a:avLst>
+                <a:gd name="adj1" fmla="val 10444"/>
+              </a:avLst>
+            </a:prstGeom>
+            <a:ln>
+              <a:prstDash val="dash"/>
+              <a:tailEnd type="triangle"/>
+            </a:ln>
+          </p:spPr>
+          <p:style>
+            <a:lnRef idx="2">
+              <a:schemeClr val="dk1"/>
+            </a:lnRef>
+            <a:fillRef idx="0">
+              <a:schemeClr val="dk1"/>
+            </a:fillRef>
+            <a:effectRef idx="1">
+              <a:schemeClr val="dk1"/>
+            </a:effectRef>
+            <a:fontRef idx="minor">
+              <a:schemeClr val="tx1"/>
+            </a:fontRef>
+          </p:style>
+        </p:cxnSp>
+        <p:cxnSp>
+          <p:nvCxnSpPr>
+            <p:cNvPr id="175" name="Straight Arrow Connector 174">
+              <a:extLst>
+                <a:ext uri="{FF2B5EF4-FFF2-40B4-BE49-F238E27FC236}">
+                  <a16:creationId xmlns:a16="http://schemas.microsoft.com/office/drawing/2014/main" id="{8A14CDAA-5363-251C-D2F9-F42749E80B2F}"/>
+                </a:ext>
+              </a:extLst>
+            </p:cNvPr>
+            <p:cNvCxnSpPr>
+              <a:cxnSpLocks/>
+              <a:stCxn id="55" idx="3"/>
+              <a:endCxn id="54" idx="2"/>
+            </p:cNvCxnSpPr>
+            <p:nvPr/>
+          </p:nvCxnSpPr>
+          <p:spPr>
+            <a:xfrm flipV="1">
+              <a:off x="1744284" y="1548129"/>
+              <a:ext cx="478993" cy="1779"/>
+            </a:xfrm>
+            <a:prstGeom prst="straightConnector1">
+              <a:avLst/>
+            </a:prstGeom>
+            <a:ln>
+              <a:tailEnd type="triangle"/>
+            </a:ln>
+          </p:spPr>
+          <p:style>
+            <a:lnRef idx="2">
+              <a:schemeClr val="dk1"/>
+            </a:lnRef>
+            <a:fillRef idx="0">
+              <a:schemeClr val="dk1"/>
+            </a:fillRef>
+            <a:effectRef idx="1">
+              <a:schemeClr val="dk1"/>
+            </a:effectRef>
+            <a:fontRef idx="minor">
+              <a:schemeClr val="tx1"/>
+            </a:fontRef>
+          </p:style>
+        </p:cxnSp>
+      </p:grpSp>
+      <p:sp>
+        <p:nvSpPr>
+          <p:cNvPr id="18" name="TextBox 17">
+            <a:extLst>
+              <a:ext uri="{FF2B5EF4-FFF2-40B4-BE49-F238E27FC236}">
+                <a16:creationId xmlns:a16="http://schemas.microsoft.com/office/drawing/2014/main" id="{8BE9E772-A719-1C63-F257-2C963C0C6D34}"/>
+              </a:ext>
+            </a:extLst>
+          </p:cNvPr>
+          <p:cNvSpPr txBox="1"/>
+          <p:nvPr/>
+        </p:nvSpPr>
+        <p:spPr>
+          <a:xfrm>
+            <a:off x="930048" y="2421835"/>
+            <a:ext cx="453970" cy="369332"/>
+          </a:xfrm>
+          <a:prstGeom prst="rect">
+            <a:avLst/>
+          </a:prstGeom>
+          <a:noFill/>
+        </p:spPr>
+        <p:txBody>
+          <a:bodyPr wrap="none" rtlCol="0">
+            <a:spAutoFit/>
+          </a:bodyPr>
+          <a:lstStyle/>
+          <a:p>
+            <a:r>
+              <a:rPr lang="en-US">
+                <a:latin typeface="Times New Roman" panose="02020603050405020304" pitchFamily="18" charset="0"/>
+                <a:cs typeface="Times New Roman" panose="02020603050405020304" pitchFamily="18" charset="0"/>
+              </a:rPr>
+              <a:t>(1)</a:t>
+            </a:r>
+          </a:p>
+        </p:txBody>
+      </p:sp>
+      <p:sp>
+        <p:nvSpPr>
+          <p:cNvPr id="21" name="TextBox 20">
+            <a:extLst>
+              <a:ext uri="{FF2B5EF4-FFF2-40B4-BE49-F238E27FC236}">
+                <a16:creationId xmlns:a16="http://schemas.microsoft.com/office/drawing/2014/main" id="{4055C19D-E1B3-3E3A-75B8-7E2E6AD9BFCB}"/>
+              </a:ext>
+            </a:extLst>
+          </p:cNvPr>
+          <p:cNvSpPr txBox="1"/>
+          <p:nvPr/>
+        </p:nvSpPr>
+        <p:spPr>
+          <a:xfrm>
+            <a:off x="1712702" y="955786"/>
+            <a:ext cx="453970" cy="369332"/>
+          </a:xfrm>
+          <a:prstGeom prst="rect">
+            <a:avLst/>
+          </a:prstGeom>
+          <a:noFill/>
+        </p:spPr>
+        <p:txBody>
+          <a:bodyPr wrap="none" rtlCol="0">
+            <a:spAutoFit/>
+          </a:bodyPr>
+          <a:lstStyle/>
+          <a:p>
+            <a:r>
+              <a:rPr lang="en-US">
+                <a:latin typeface="Times New Roman" panose="02020603050405020304" pitchFamily="18" charset="0"/>
+                <a:cs typeface="Times New Roman" panose="02020603050405020304" pitchFamily="18" charset="0"/>
+              </a:rPr>
+              <a:t>(2)</a:t>
+            </a:r>
+          </a:p>
+        </p:txBody>
+      </p:sp>
+      <p:sp>
+        <p:nvSpPr>
+          <p:cNvPr id="22" name="TextBox 21">
+            <a:extLst>
+              <a:ext uri="{FF2B5EF4-FFF2-40B4-BE49-F238E27FC236}">
+                <a16:creationId xmlns:a16="http://schemas.microsoft.com/office/drawing/2014/main" id="{7F6168BC-AC66-2CD1-EB27-45D671CA2234}"/>
+              </a:ext>
+            </a:extLst>
+          </p:cNvPr>
+          <p:cNvSpPr txBox="1"/>
+          <p:nvPr/>
+        </p:nvSpPr>
+        <p:spPr>
+          <a:xfrm>
+            <a:off x="3884432" y="949435"/>
+            <a:ext cx="453970" cy="369332"/>
+          </a:xfrm>
+          <a:prstGeom prst="rect">
+            <a:avLst/>
+          </a:prstGeom>
+          <a:noFill/>
+        </p:spPr>
+        <p:txBody>
+          <a:bodyPr wrap="none" rtlCol="0">
+            <a:spAutoFit/>
+          </a:bodyPr>
+          <a:lstStyle/>
+          <a:p>
+            <a:r>
+              <a:rPr lang="en-US">
+                <a:latin typeface="Times New Roman" panose="02020603050405020304" pitchFamily="18" charset="0"/>
+                <a:cs typeface="Times New Roman" panose="02020603050405020304" pitchFamily="18" charset="0"/>
+              </a:rPr>
+              <a:t>(3)</a:t>
+            </a:r>
+          </a:p>
+        </p:txBody>
+      </p:sp>
+      <p:sp>
+        <p:nvSpPr>
+          <p:cNvPr id="26" name="TextBox 25">
+            <a:extLst>
+              <a:ext uri="{FF2B5EF4-FFF2-40B4-BE49-F238E27FC236}">
+                <a16:creationId xmlns:a16="http://schemas.microsoft.com/office/drawing/2014/main" id="{693C02BE-96D0-0B18-F718-4D4120CE833F}"/>
+              </a:ext>
+            </a:extLst>
+          </p:cNvPr>
+          <p:cNvSpPr txBox="1"/>
+          <p:nvPr/>
+        </p:nvSpPr>
+        <p:spPr>
+          <a:xfrm>
+            <a:off x="5836915" y="959596"/>
+            <a:ext cx="453970" cy="369332"/>
+          </a:xfrm>
+          <a:prstGeom prst="rect">
+            <a:avLst/>
+          </a:prstGeom>
+          <a:noFill/>
+        </p:spPr>
+        <p:txBody>
+          <a:bodyPr wrap="none" rtlCol="0">
+            <a:spAutoFit/>
+          </a:bodyPr>
+          <a:lstStyle/>
+          <a:p>
+            <a:r>
+              <a:rPr lang="en-US">
+                <a:latin typeface="Times New Roman" panose="02020603050405020304" pitchFamily="18" charset="0"/>
+                <a:cs typeface="Times New Roman" panose="02020603050405020304" pitchFamily="18" charset="0"/>
+              </a:rPr>
+              <a:t>(4)</a:t>
+            </a:r>
+          </a:p>
+        </p:txBody>
+      </p:sp>
+      <p:sp>
+        <p:nvSpPr>
+          <p:cNvPr id="28" name="TextBox 27">
+            <a:extLst>
+              <a:ext uri="{FF2B5EF4-FFF2-40B4-BE49-F238E27FC236}">
+                <a16:creationId xmlns:a16="http://schemas.microsoft.com/office/drawing/2014/main" id="{EED74E39-3A92-FCA0-307B-43ECDDFB156F}"/>
+              </a:ext>
+            </a:extLst>
+          </p:cNvPr>
+          <p:cNvSpPr txBox="1"/>
+          <p:nvPr/>
+        </p:nvSpPr>
+        <p:spPr>
+          <a:xfrm>
+            <a:off x="7789398" y="954261"/>
+            <a:ext cx="665567" cy="369332"/>
+          </a:xfrm>
+          <a:prstGeom prst="rect">
+            <a:avLst/>
+          </a:prstGeom>
+          <a:noFill/>
+        </p:spPr>
+        <p:txBody>
+          <a:bodyPr wrap="none" rtlCol="0">
+            <a:spAutoFit/>
+          </a:bodyPr>
+          <a:lstStyle/>
+          <a:p>
+            <a:r>
+              <a:rPr lang="en-US">
+                <a:latin typeface="Times New Roman" panose="02020603050405020304" pitchFamily="18" charset="0"/>
+                <a:cs typeface="Times New Roman" panose="02020603050405020304" pitchFamily="18" charset="0"/>
+              </a:rPr>
+              <a:t>(5.B)</a:t>
+            </a:r>
+          </a:p>
+        </p:txBody>
+      </p:sp>
+      <p:sp>
+        <p:nvSpPr>
+          <p:cNvPr id="30" name="TextBox 29">
+            <a:extLst>
+              <a:ext uri="{FF2B5EF4-FFF2-40B4-BE49-F238E27FC236}">
+                <a16:creationId xmlns:a16="http://schemas.microsoft.com/office/drawing/2014/main" id="{7B9562B5-65FD-95FD-852D-5488006D52A7}"/>
+              </a:ext>
+            </a:extLst>
+          </p:cNvPr>
+          <p:cNvSpPr txBox="1"/>
+          <p:nvPr/>
+        </p:nvSpPr>
+        <p:spPr>
+          <a:xfrm>
+            <a:off x="7060927" y="1582822"/>
+            <a:ext cx="620683" cy="369332"/>
+          </a:xfrm>
+          <a:prstGeom prst="rect">
+            <a:avLst/>
+          </a:prstGeom>
+          <a:noFill/>
+        </p:spPr>
+        <p:txBody>
+          <a:bodyPr wrap="none" rtlCol="0">
+            <a:spAutoFit/>
+          </a:bodyPr>
+          <a:lstStyle/>
+          <a:p>
+            <a:r>
+              <a:rPr lang="en-US">
+                <a:latin typeface="Times New Roman" panose="02020603050405020304" pitchFamily="18" charset="0"/>
+                <a:cs typeface="Times New Roman" panose="02020603050405020304" pitchFamily="18" charset="0"/>
+              </a:rPr>
+              <a:t>(5A)</a:t>
+            </a:r>
+          </a:p>
+        </p:txBody>
+      </p:sp>
+      <p:sp>
+        <p:nvSpPr>
+          <p:cNvPr id="31" name="TextBox 30">
+            <a:extLst>
+              <a:ext uri="{FF2B5EF4-FFF2-40B4-BE49-F238E27FC236}">
+                <a16:creationId xmlns:a16="http://schemas.microsoft.com/office/drawing/2014/main" id="{34114EB8-53ED-E06B-62C0-8C4840DD1161}"/>
+              </a:ext>
+            </a:extLst>
+          </p:cNvPr>
+          <p:cNvSpPr txBox="1"/>
+          <p:nvPr/>
+        </p:nvSpPr>
+        <p:spPr>
+          <a:xfrm>
+            <a:off x="9132132" y="1540621"/>
+            <a:ext cx="453970" cy="369332"/>
+          </a:xfrm>
+          <a:prstGeom prst="rect">
+            <a:avLst/>
+          </a:prstGeom>
+          <a:noFill/>
+        </p:spPr>
+        <p:txBody>
+          <a:bodyPr wrap="none" rtlCol="0">
+            <a:spAutoFit/>
+          </a:bodyPr>
+          <a:lstStyle/>
+          <a:p>
+            <a:r>
+              <a:rPr lang="en-US">
+                <a:latin typeface="Times New Roman" panose="02020603050405020304" pitchFamily="18" charset="0"/>
+                <a:cs typeface="Times New Roman" panose="02020603050405020304" pitchFamily="18" charset="0"/>
+              </a:rPr>
+              <a:t>(6)</a:t>
+            </a:r>
+          </a:p>
+        </p:txBody>
+      </p:sp>
+      <p:sp>
+        <p:nvSpPr>
+          <p:cNvPr id="225" name="TextBox 224">
+            <a:extLst>
+              <a:ext uri="{FF2B5EF4-FFF2-40B4-BE49-F238E27FC236}">
+                <a16:creationId xmlns:a16="http://schemas.microsoft.com/office/drawing/2014/main" id="{4A0CA8CD-41DF-4707-6A3B-6219725B420C}"/>
+              </a:ext>
+            </a:extLst>
+          </p:cNvPr>
+          <p:cNvSpPr txBox="1"/>
+          <p:nvPr/>
+        </p:nvSpPr>
+        <p:spPr>
+          <a:xfrm>
+            <a:off x="9908102" y="1898380"/>
+            <a:ext cx="620683" cy="369332"/>
+          </a:xfrm>
+          <a:prstGeom prst="rect">
+            <a:avLst/>
+          </a:prstGeom>
+          <a:noFill/>
+        </p:spPr>
+        <p:txBody>
+          <a:bodyPr wrap="none" rtlCol="0">
+            <a:spAutoFit/>
+          </a:bodyPr>
+          <a:lstStyle/>
+          <a:p>
+            <a:r>
+              <a:rPr lang="en-US">
+                <a:latin typeface="Times New Roman" panose="02020603050405020304" pitchFamily="18" charset="0"/>
+                <a:cs typeface="Times New Roman" panose="02020603050405020304" pitchFamily="18" charset="0"/>
+              </a:rPr>
+              <a:t>(7A)</a:t>
+            </a:r>
+          </a:p>
+        </p:txBody>
+      </p:sp>
+      <p:sp>
+        <p:nvSpPr>
+          <p:cNvPr id="226" name="TextBox 225">
+            <a:extLst>
+              <a:ext uri="{FF2B5EF4-FFF2-40B4-BE49-F238E27FC236}">
+                <a16:creationId xmlns:a16="http://schemas.microsoft.com/office/drawing/2014/main" id="{52D513FF-9E26-80FA-9228-13D7376A4E6A}"/>
+              </a:ext>
+            </a:extLst>
+          </p:cNvPr>
+          <p:cNvSpPr txBox="1"/>
+          <p:nvPr/>
+        </p:nvSpPr>
+        <p:spPr>
+          <a:xfrm>
+            <a:off x="7756344" y="1902286"/>
+            <a:ext cx="607859" cy="369332"/>
+          </a:xfrm>
+          <a:prstGeom prst="rect">
+            <a:avLst/>
+          </a:prstGeom>
+          <a:noFill/>
+        </p:spPr>
+        <p:txBody>
+          <a:bodyPr wrap="none" rtlCol="0">
+            <a:spAutoFit/>
+          </a:bodyPr>
+          <a:lstStyle/>
+          <a:p>
+            <a:r>
+              <a:rPr lang="en-US">
+                <a:latin typeface="Times New Roman" panose="02020603050405020304" pitchFamily="18" charset="0"/>
+                <a:cs typeface="Times New Roman" panose="02020603050405020304" pitchFamily="18" charset="0"/>
+              </a:rPr>
+              <a:t>(7B)</a:t>
+            </a:r>
+          </a:p>
+        </p:txBody>
+      </p:sp>
+      <p:sp>
+        <p:nvSpPr>
+          <p:cNvPr id="227" name="TextBox 226">
+            <a:extLst>
+              <a:ext uri="{FF2B5EF4-FFF2-40B4-BE49-F238E27FC236}">
+                <a16:creationId xmlns:a16="http://schemas.microsoft.com/office/drawing/2014/main" id="{F2E6387B-EA6E-0EE1-350C-F04BAF3F1465}"/>
+              </a:ext>
+            </a:extLst>
+          </p:cNvPr>
+          <p:cNvSpPr txBox="1"/>
+          <p:nvPr/>
+        </p:nvSpPr>
+        <p:spPr>
+          <a:xfrm>
+            <a:off x="9132132" y="2758989"/>
+            <a:ext cx="453970" cy="369332"/>
+          </a:xfrm>
+          <a:prstGeom prst="rect">
+            <a:avLst/>
+          </a:prstGeom>
+          <a:noFill/>
+        </p:spPr>
+        <p:txBody>
+          <a:bodyPr wrap="none" rtlCol="0">
+            <a:spAutoFit/>
+          </a:bodyPr>
+          <a:lstStyle/>
+          <a:p>
+            <a:r>
+              <a:rPr lang="en-US">
+                <a:latin typeface="Times New Roman" panose="02020603050405020304" pitchFamily="18" charset="0"/>
+                <a:cs typeface="Times New Roman" panose="02020603050405020304" pitchFamily="18" charset="0"/>
+              </a:rPr>
+              <a:t>(8)</a:t>
+            </a:r>
+          </a:p>
+        </p:txBody>
+      </p:sp>
+      <p:sp>
+        <p:nvSpPr>
+          <p:cNvPr id="229" name="TextBox 228">
+            <a:extLst>
+              <a:ext uri="{FF2B5EF4-FFF2-40B4-BE49-F238E27FC236}">
+                <a16:creationId xmlns:a16="http://schemas.microsoft.com/office/drawing/2014/main" id="{BACE9959-8A5E-EB73-D33F-1DDCA267114C}"/>
+              </a:ext>
+            </a:extLst>
+          </p:cNvPr>
+          <p:cNvSpPr txBox="1"/>
+          <p:nvPr/>
+        </p:nvSpPr>
+        <p:spPr>
+          <a:xfrm>
+            <a:off x="9132132" y="3819905"/>
+            <a:ext cx="607859" cy="369332"/>
+          </a:xfrm>
+          <a:prstGeom prst="rect">
+            <a:avLst/>
+          </a:prstGeom>
+          <a:noFill/>
+        </p:spPr>
+        <p:txBody>
+          <a:bodyPr wrap="none" rtlCol="0">
+            <a:spAutoFit/>
+          </a:bodyPr>
+          <a:lstStyle/>
+          <a:p>
+            <a:r>
+              <a:rPr lang="en-US">
+                <a:latin typeface="Times New Roman" panose="02020603050405020304" pitchFamily="18" charset="0"/>
+                <a:cs typeface="Times New Roman" panose="02020603050405020304" pitchFamily="18" charset="0"/>
+              </a:rPr>
+              <a:t>(9B)</a:t>
+            </a:r>
+          </a:p>
+        </p:txBody>
+      </p:sp>
+      <p:sp>
+        <p:nvSpPr>
+          <p:cNvPr id="231" name="TextBox 230">
+            <a:extLst>
+              <a:ext uri="{FF2B5EF4-FFF2-40B4-BE49-F238E27FC236}">
+                <a16:creationId xmlns:a16="http://schemas.microsoft.com/office/drawing/2014/main" id="{DDDB9D33-8C98-9B28-B9DC-3CE42E936A0A}"/>
+              </a:ext>
+            </a:extLst>
+          </p:cNvPr>
+          <p:cNvSpPr txBox="1"/>
+          <p:nvPr/>
+        </p:nvSpPr>
+        <p:spPr>
+          <a:xfrm>
+            <a:off x="9893756" y="3134344"/>
+            <a:ext cx="620683" cy="369332"/>
+          </a:xfrm>
+          <a:prstGeom prst="rect">
+            <a:avLst/>
+          </a:prstGeom>
+          <a:noFill/>
+        </p:spPr>
+        <p:txBody>
+          <a:bodyPr wrap="none" rtlCol="0">
+            <a:spAutoFit/>
+          </a:bodyPr>
+          <a:lstStyle/>
+          <a:p>
+            <a:r>
+              <a:rPr lang="en-US">
+                <a:latin typeface="Times New Roman" panose="02020603050405020304" pitchFamily="18" charset="0"/>
+                <a:cs typeface="Times New Roman" panose="02020603050405020304" pitchFamily="18" charset="0"/>
+              </a:rPr>
+              <a:t>(9A)</a:t>
+            </a:r>
+          </a:p>
+        </p:txBody>
+      </p:sp>
+      <p:sp>
+        <p:nvSpPr>
+          <p:cNvPr id="232" name="TextBox 231">
+            <a:extLst>
+              <a:ext uri="{FF2B5EF4-FFF2-40B4-BE49-F238E27FC236}">
+                <a16:creationId xmlns:a16="http://schemas.microsoft.com/office/drawing/2014/main" id="{1ABD8BE5-A3FD-DD45-DFFB-FC11977D2C4A}"/>
+              </a:ext>
+            </a:extLst>
+          </p:cNvPr>
+          <p:cNvSpPr txBox="1"/>
+          <p:nvPr/>
+        </p:nvSpPr>
+        <p:spPr>
+          <a:xfrm>
+            <a:off x="11298890" y="3819905"/>
+            <a:ext cx="793807" cy="369332"/>
+          </a:xfrm>
+          <a:prstGeom prst="rect">
+            <a:avLst/>
+          </a:prstGeom>
+          <a:noFill/>
+        </p:spPr>
+        <p:txBody>
+          <a:bodyPr wrap="none" rtlCol="0">
+            <a:spAutoFit/>
+          </a:bodyPr>
+          <a:lstStyle/>
+          <a:p>
+            <a:r>
+              <a:rPr lang="en-US">
+                <a:latin typeface="Times New Roman" panose="02020603050405020304" pitchFamily="18" charset="0"/>
+                <a:cs typeface="Times New Roman" panose="02020603050405020304" pitchFamily="18" charset="0"/>
+              </a:rPr>
+              <a:t>(9A.1)</a:t>
+            </a:r>
+          </a:p>
+        </p:txBody>
+      </p:sp>
+      <p:sp>
+        <p:nvSpPr>
+          <p:cNvPr id="233" name="TextBox 232">
+            <a:extLst>
+              <a:ext uri="{FF2B5EF4-FFF2-40B4-BE49-F238E27FC236}">
+                <a16:creationId xmlns:a16="http://schemas.microsoft.com/office/drawing/2014/main" id="{B46540FE-0123-EBC7-B0F4-7A99776169F3}"/>
+              </a:ext>
+            </a:extLst>
+          </p:cNvPr>
+          <p:cNvSpPr txBox="1"/>
+          <p:nvPr/>
+        </p:nvSpPr>
+        <p:spPr>
+          <a:xfrm>
+            <a:off x="7857551" y="4189237"/>
+            <a:ext cx="569387" cy="369332"/>
+          </a:xfrm>
+          <a:prstGeom prst="rect">
+            <a:avLst/>
+          </a:prstGeom>
+          <a:noFill/>
+        </p:spPr>
+        <p:txBody>
+          <a:bodyPr wrap="none" rtlCol="0">
+            <a:spAutoFit/>
+          </a:bodyPr>
+          <a:lstStyle/>
+          <a:p>
+            <a:r>
+              <a:rPr lang="en-US">
+                <a:latin typeface="Times New Roman" panose="02020603050405020304" pitchFamily="18" charset="0"/>
+                <a:cs typeface="Times New Roman" panose="02020603050405020304" pitchFamily="18" charset="0"/>
+              </a:rPr>
+              <a:t>(10)</a:t>
+            </a:r>
+          </a:p>
+        </p:txBody>
+      </p:sp>
+      <p:sp>
+        <p:nvSpPr>
+          <p:cNvPr id="234" name="TextBox 233">
+            <a:extLst>
+              <a:ext uri="{FF2B5EF4-FFF2-40B4-BE49-F238E27FC236}">
+                <a16:creationId xmlns:a16="http://schemas.microsoft.com/office/drawing/2014/main" id="{3FC66BF1-DD6D-1774-4CB8-C5BC8029DD35}"/>
+              </a:ext>
+            </a:extLst>
+          </p:cNvPr>
+          <p:cNvSpPr txBox="1"/>
+          <p:nvPr/>
+        </p:nvSpPr>
+        <p:spPr>
+          <a:xfrm>
+            <a:off x="3807722" y="4193878"/>
+            <a:ext cx="569387" cy="369332"/>
+          </a:xfrm>
+          <a:prstGeom prst="rect">
+            <a:avLst/>
+          </a:prstGeom>
+          <a:noFill/>
+        </p:spPr>
+        <p:txBody>
+          <a:bodyPr wrap="none" rtlCol="0">
+            <a:spAutoFit/>
+          </a:bodyPr>
+          <a:lstStyle/>
+          <a:p>
+            <a:r>
+              <a:rPr lang="en-US">
+                <a:latin typeface="Times New Roman" panose="02020603050405020304" pitchFamily="18" charset="0"/>
+                <a:cs typeface="Times New Roman" panose="02020603050405020304" pitchFamily="18" charset="0"/>
+              </a:rPr>
+              <a:t>(12)</a:t>
+            </a:r>
+          </a:p>
+        </p:txBody>
+      </p:sp>
+      <p:sp>
+        <p:nvSpPr>
+          <p:cNvPr id="235" name="TextBox 234">
+            <a:extLst>
+              <a:ext uri="{FF2B5EF4-FFF2-40B4-BE49-F238E27FC236}">
+                <a16:creationId xmlns:a16="http://schemas.microsoft.com/office/drawing/2014/main" id="{CF249917-AFDF-31DB-8E74-350B5EFDCEC5}"/>
+              </a:ext>
+            </a:extLst>
+          </p:cNvPr>
+          <p:cNvSpPr txBox="1"/>
+          <p:nvPr/>
+        </p:nvSpPr>
+        <p:spPr>
+          <a:xfrm>
+            <a:off x="5488681" y="4880608"/>
+            <a:ext cx="560795" cy="369332"/>
+          </a:xfrm>
+          <a:prstGeom prst="rect">
+            <a:avLst/>
+          </a:prstGeom>
+          <a:noFill/>
+        </p:spPr>
+        <p:txBody>
+          <a:bodyPr wrap="none" rtlCol="0">
+            <a:spAutoFit/>
+          </a:bodyPr>
+          <a:lstStyle/>
+          <a:p>
+            <a:r>
+              <a:rPr lang="en-US">
+                <a:latin typeface="Times New Roman" panose="02020603050405020304" pitchFamily="18" charset="0"/>
+                <a:cs typeface="Times New Roman" panose="02020603050405020304" pitchFamily="18" charset="0"/>
+              </a:rPr>
+              <a:t>(11)</a:t>
+            </a:r>
+          </a:p>
+        </p:txBody>
+      </p:sp>
+      <p:sp>
+        <p:nvSpPr>
+          <p:cNvPr id="236" name="TextBox 235">
+            <a:extLst>
+              <a:ext uri="{FF2B5EF4-FFF2-40B4-BE49-F238E27FC236}">
+                <a16:creationId xmlns:a16="http://schemas.microsoft.com/office/drawing/2014/main" id="{51C47859-2A7F-C3F9-CEC9-B77FBC48A537}"/>
+              </a:ext>
+            </a:extLst>
+          </p:cNvPr>
+          <p:cNvSpPr txBox="1"/>
+          <p:nvPr/>
+        </p:nvSpPr>
+        <p:spPr>
+          <a:xfrm>
+            <a:off x="7608353" y="5155725"/>
+            <a:ext cx="733919" cy="369332"/>
+          </a:xfrm>
+          <a:prstGeom prst="rect">
+            <a:avLst/>
+          </a:prstGeom>
+          <a:noFill/>
+        </p:spPr>
+        <p:txBody>
+          <a:bodyPr wrap="none" rtlCol="0">
+            <a:spAutoFit/>
+          </a:bodyPr>
+          <a:lstStyle/>
+          <a:p>
+            <a:r>
+              <a:rPr lang="en-US">
+                <a:latin typeface="Times New Roman" panose="02020603050405020304" pitchFamily="18" charset="0"/>
+                <a:cs typeface="Times New Roman" panose="02020603050405020304" pitchFamily="18" charset="0"/>
+              </a:rPr>
+              <a:t>(11.1)</a:t>
+            </a:r>
+          </a:p>
+        </p:txBody>
+      </p:sp>
+      <p:sp>
+        <p:nvSpPr>
+          <p:cNvPr id="237" name="TextBox 236">
+            <a:extLst>
+              <a:ext uri="{FF2B5EF4-FFF2-40B4-BE49-F238E27FC236}">
+                <a16:creationId xmlns:a16="http://schemas.microsoft.com/office/drawing/2014/main" id="{199F8A92-E4F0-32CD-A29E-FF60B87122A4}"/>
+              </a:ext>
+            </a:extLst>
+          </p:cNvPr>
+          <p:cNvSpPr txBox="1"/>
+          <p:nvPr/>
+        </p:nvSpPr>
+        <p:spPr>
+          <a:xfrm>
+            <a:off x="9394463" y="4853417"/>
+            <a:ext cx="733919" cy="369332"/>
+          </a:xfrm>
+          <a:prstGeom prst="rect">
+            <a:avLst/>
+          </a:prstGeom>
+          <a:noFill/>
+        </p:spPr>
+        <p:txBody>
+          <a:bodyPr wrap="none" rtlCol="0">
+            <a:spAutoFit/>
+          </a:bodyPr>
+          <a:lstStyle/>
+          <a:p>
+            <a:r>
+              <a:rPr lang="en-US">
+                <a:latin typeface="Times New Roman" panose="02020603050405020304" pitchFamily="18" charset="0"/>
+                <a:cs typeface="Times New Roman" panose="02020603050405020304" pitchFamily="18" charset="0"/>
+              </a:rPr>
+              <a:t>(11.2)</a:t>
+            </a:r>
+          </a:p>
+        </p:txBody>
+      </p:sp>
+    </p:spTree>
+    <p:extLst>
+      <p:ext uri="{BB962C8B-B14F-4D97-AF65-F5344CB8AC3E}">
+        <p14:creationId xmlns:p14="http://schemas.microsoft.com/office/powerpoint/2010/main" val="741112967"/>
+      </p:ext>
+    </p:extLst>
+  </p:cSld>
+  <p:clrMapOvr>
+    <a:masterClrMapping/>
+  </p:clrMapOvr>
+</p:sld>
+</file>
+
+<file path=ppt/slides/slide17.xml><?xml version="1.0" encoding="utf-8"?>
+<p:sld xmlns:a="http://schemas.openxmlformats.org/drawingml/2006/main" xmlns:r="http://schemas.openxmlformats.org/officeDocument/2006/relationships" xmlns:p="http://schemas.openxmlformats.org/presentationml/2006/main">
+  <p:cSld>
+    <p:spTree>
+      <p:nvGrpSpPr>
         <p:cNvPr id="1" name=""/>
         <p:cNvGrpSpPr/>
         <p:nvPr/>
@@ -16832,7 +19682,7 @@
 </p:sld>
 </file>
 
-<file path=ppt/slides/slide17.xml><?xml version="1.0" encoding="utf-8"?>
+<file path=ppt/slides/slide18.xml><?xml version="1.0" encoding="utf-8"?>
 <p:sld xmlns:a="http://schemas.openxmlformats.org/drawingml/2006/main" xmlns:r="http://schemas.openxmlformats.org/officeDocument/2006/relationships" xmlns:p="http://schemas.openxmlformats.org/presentationml/2006/main">
   <p:cSld>
     <p:spTree>
@@ -18072,7 +20922,7 @@
 </p:sld>
 </file>
 
-<file path=ppt/slides/slide18.xml><?xml version="1.0" encoding="utf-8"?>
+<file path=ppt/slides/slide19.xml><?xml version="1.0" encoding="utf-8"?>
 <p:sld xmlns:a="http://schemas.openxmlformats.org/drawingml/2006/main" xmlns:r="http://schemas.openxmlformats.org/officeDocument/2006/relationships" xmlns:p="http://schemas.openxmlformats.org/presentationml/2006/main">
   <p:cSld>
     <p:spTree>
@@ -19110,7 +21960,31 @@
                 <a:latin typeface="Times New Roman" panose="02020603050405020304" pitchFamily="18" charset="0"/>
                 <a:cs typeface="Times New Roman" panose="02020603050405020304" pitchFamily="18" charset="0"/>
               </a:rPr>
-              <a:t>Bộ dữ liệu về lịch sử Việt Nam đã được chuẩn hóa</a:t>
+              <a:t>Bộ dữ liệu về</a:t>
+            </a:r>
+            <a:endParaRPr lang="en-US" sz="1600">
+              <a:solidFill>
+                <a:schemeClr val="tx1"/>
+              </a:solidFill>
+              <a:latin typeface="Times New Roman" panose="02020603050405020304" pitchFamily="18" charset="0"/>
+              <a:cs typeface="Times New Roman" panose="02020603050405020304" pitchFamily="18" charset="0"/>
+            </a:endParaRPr>
+          </a:p>
+          <a:p>
+            <a:pPr algn="ctr">
+              <a:lnSpc>
+                <a:spcPct val="150000"/>
+              </a:lnSpc>
+            </a:pPr>
+            <a:r>
+              <a:rPr lang="vi-VN" sz="1600">
+                <a:solidFill>
+                  <a:schemeClr val="tx1"/>
+                </a:solidFill>
+                <a:latin typeface="Times New Roman" panose="02020603050405020304" pitchFamily="18" charset="0"/>
+                <a:cs typeface="Times New Roman" panose="02020603050405020304" pitchFamily="18" charset="0"/>
+              </a:rPr>
+              <a:t>lịch sử Việt Nam đã được chuẩn hóa</a:t>
             </a:r>
           </a:p>
         </p:txBody>
@@ -19119,253 +21993,6 @@
     <p:extLst>
       <p:ext uri="{BB962C8B-B14F-4D97-AF65-F5344CB8AC3E}">
         <p14:creationId xmlns:p14="http://schemas.microsoft.com/office/powerpoint/2010/main" val="3763551740"/>
-      </p:ext>
-    </p:extLst>
-  </p:cSld>
-  <p:clrMapOvr>
-    <a:masterClrMapping/>
-  </p:clrMapOvr>
-</p:sld>
-</file>
-
-<file path=ppt/slides/slide19.xml><?xml version="1.0" encoding="utf-8"?>
-<p:sld xmlns:a="http://schemas.openxmlformats.org/drawingml/2006/main" xmlns:r="http://schemas.openxmlformats.org/officeDocument/2006/relationships" xmlns:p="http://schemas.openxmlformats.org/presentationml/2006/main">
-  <p:cSld>
-    <p:spTree>
-      <p:nvGrpSpPr>
-        <p:cNvPr id="1" name=""/>
-        <p:cNvGrpSpPr/>
-        <p:nvPr/>
-      </p:nvGrpSpPr>
-      <p:grpSpPr>
-        <a:xfrm>
-          <a:off x="0" y="0"/>
-          <a:ext cx="0" cy="0"/>
-          <a:chOff x="0" y="0"/>
-          <a:chExt cx="0" cy="0"/>
-        </a:xfrm>
-      </p:grpSpPr>
-      <p:sp>
-        <p:nvSpPr>
-          <p:cNvPr id="2" name="TextBox 1">
-            <a:extLst>
-              <a:ext uri="{FF2B5EF4-FFF2-40B4-BE49-F238E27FC236}">
-                <a16:creationId xmlns:a16="http://schemas.microsoft.com/office/drawing/2014/main" id="{A76BB85E-EAB6-2089-5682-48447CE032A4}"/>
-              </a:ext>
-            </a:extLst>
-          </p:cNvPr>
-          <p:cNvSpPr txBox="1"/>
-          <p:nvPr/>
-        </p:nvSpPr>
-        <p:spPr>
-          <a:xfrm>
-            <a:off x="612648" y="795528"/>
-            <a:ext cx="8497839" cy="3693319"/>
-          </a:xfrm>
-          <a:prstGeom prst="rect">
-            <a:avLst/>
-          </a:prstGeom>
-          <a:noFill/>
-        </p:spPr>
-        <p:txBody>
-          <a:bodyPr wrap="none" rtlCol="0">
-            <a:spAutoFit/>
-          </a:bodyPr>
-          <a:lstStyle/>
-          <a:p>
-            <a:pPr marL="285750" indent="-285750">
-              <a:buFontTx/>
-              <a:buChar char="-"/>
-            </a:pPr>
-            <a:r>
-              <a:rPr lang="vi-VN"/>
-              <a:t>Chức năng đăng nhập/đăng xuất: </a:t>
-            </a:r>
-            <a:r>
-              <a:rPr lang="vi-VN">
-                <a:solidFill>
-                  <a:srgbClr val="00B0F0"/>
-                </a:solidFill>
-              </a:rPr>
-              <a:t>biểu đồ chức năng, usecase</a:t>
-            </a:r>
-            <a:r>
-              <a:rPr lang="vi-VN"/>
-              <a:t>, tuần tự</a:t>
-            </a:r>
-          </a:p>
-          <a:p>
-            <a:pPr marL="285750" indent="-285750">
-              <a:buFontTx/>
-              <a:buChar char="-"/>
-            </a:pPr>
-            <a:r>
-              <a:rPr lang="vi-VN"/>
-              <a:t>Chức năng cài đặt người dùng tùy chọn: </a:t>
-            </a:r>
-            <a:r>
-              <a:rPr lang="vi-VN">
-                <a:solidFill>
-                  <a:srgbClr val="00B0F0"/>
-                </a:solidFill>
-              </a:rPr>
-              <a:t>biểu đồ  chức năng, usecase,</a:t>
-            </a:r>
-            <a:r>
-              <a:rPr lang="vi-VN"/>
-              <a:t> tuần tự</a:t>
-            </a:r>
-          </a:p>
-          <a:p>
-            <a:pPr marL="285750" indent="-285750">
-              <a:buFontTx/>
-              <a:buChar char="-"/>
-            </a:pPr>
-            <a:r>
-              <a:rPr lang="vi-VN"/>
-              <a:t>Chức năng khởi tạo starter: biểu đồ tuần tự</a:t>
-            </a:r>
-          </a:p>
-          <a:p>
-            <a:pPr marL="285750" indent="-285750">
-              <a:buFontTx/>
-              <a:buChar char="-"/>
-            </a:pPr>
-            <a:r>
-              <a:rPr lang="vi-VN"/>
-              <a:t>Chức năng trò chuyện văn bản: </a:t>
-            </a:r>
-            <a:r>
-              <a:rPr lang="vi-VN">
-                <a:solidFill>
-                  <a:srgbClr val="00B0F0"/>
-                </a:solidFill>
-              </a:rPr>
-              <a:t>biểu đồ chức năng, usecase</a:t>
-            </a:r>
-            <a:r>
-              <a:rPr lang="vi-VN"/>
-              <a:t>, tuần tự</a:t>
-            </a:r>
-          </a:p>
-          <a:p>
-            <a:pPr marL="285750" indent="-285750">
-              <a:buFontTx/>
-              <a:buChar char="-"/>
-            </a:pPr>
-            <a:r>
-              <a:rPr lang="vi-VN"/>
-              <a:t>Chức năng trò chuyện âm thanh: </a:t>
-            </a:r>
-            <a:r>
-              <a:rPr lang="vi-VN">
-                <a:solidFill>
-                  <a:srgbClr val="00B0F0"/>
-                </a:solidFill>
-              </a:rPr>
-              <a:t>chức năng, usecase</a:t>
-            </a:r>
-            <a:r>
-              <a:rPr lang="vi-VN"/>
-              <a:t>, tuần tự</a:t>
-            </a:r>
-          </a:p>
-          <a:p>
-            <a:pPr marL="285750" indent="-285750">
-              <a:buFontTx/>
-              <a:buChar char="-"/>
-            </a:pPr>
-            <a:r>
-              <a:rPr lang="vi-VN"/>
-              <a:t>Chức năng tăng cường trí nhớ hội thoại: </a:t>
-            </a:r>
-            <a:r>
-              <a:rPr lang="vi-VN">
-                <a:solidFill>
-                  <a:srgbClr val="00B0F0"/>
-                </a:solidFill>
-              </a:rPr>
-              <a:t>chức năng, usecase</a:t>
-            </a:r>
-            <a:r>
-              <a:rPr lang="vi-VN"/>
-              <a:t>, tuần tự</a:t>
-            </a:r>
-          </a:p>
-          <a:p>
-            <a:pPr marL="285750" indent="-285750">
-              <a:buFontTx/>
-              <a:buChar char="-"/>
-            </a:pPr>
-            <a:r>
-              <a:rPr lang="vi-VN"/>
-              <a:t>Chức năng quản lý hành vi người dùng: chức năng, usecase, tuần tự</a:t>
-            </a:r>
-          </a:p>
-          <a:p>
-            <a:pPr marL="285750" indent="-285750">
-              <a:buFontTx/>
-              <a:buChar char="-"/>
-            </a:pPr>
-            <a:r>
-              <a:rPr lang="vi-VN"/>
-              <a:t>Chức năng quản lý hội thoại: chức năng, usecase, tuần tự</a:t>
-            </a:r>
-          </a:p>
-          <a:p>
-            <a:pPr marL="285750" indent="-285750">
-              <a:buFontTx/>
-              <a:buChar char="-"/>
-            </a:pPr>
-            <a:r>
-              <a:rPr lang="vi-VN"/>
-              <a:t>Chức năng xử lý trích xuất thông tin trò chuyện</a:t>
-            </a:r>
-          </a:p>
-          <a:p>
-            <a:pPr marL="285750" indent="-285750">
-              <a:buFontTx/>
-              <a:buChar char="-"/>
-            </a:pPr>
-            <a:endParaRPr lang="vi-VN"/>
-          </a:p>
-          <a:p>
-            <a:pPr marL="285750" indent="-285750">
-              <a:buFontTx/>
-              <a:buChar char="-"/>
-            </a:pPr>
-            <a:r>
-              <a:rPr lang="vi-VN"/>
-              <a:t>Thiết kế cơ sở dữ liệu embedding: có những trường nào</a:t>
-            </a:r>
-          </a:p>
-          <a:p>
-            <a:pPr marL="285750" indent="-285750">
-              <a:buFontTx/>
-              <a:buChar char="-"/>
-            </a:pPr>
-            <a:r>
-              <a:rPr lang="vi-VN"/>
-              <a:t>Cơ sở dữ liệu lưu trữ lịch sử hội thoại</a:t>
-            </a:r>
-          </a:p>
-          <a:p>
-            <a:pPr marL="285750" indent="-285750">
-              <a:buFontTx/>
-              <a:buChar char="-"/>
-            </a:pPr>
-            <a:r>
-              <a:rPr lang="vi-VN"/>
-              <a:t>Co sơ dữ liệu lưu trữ thông tin người dùng</a:t>
-            </a:r>
-            <a:endParaRPr lang="en-US"/>
-          </a:p>
-        </p:txBody>
-      </p:sp>
-    </p:spTree>
-    <p:extLst>
-      <p:ext uri="{BB962C8B-B14F-4D97-AF65-F5344CB8AC3E}">
-        <p14:creationId xmlns:p14="http://schemas.microsoft.com/office/powerpoint/2010/main" val="629964740"/>
       </p:ext>
     </p:extLst>
   </p:cSld>
@@ -19406,6 +22033,253 @@
 </file>
 
 <file path=ppt/slides/slide20.xml><?xml version="1.0" encoding="utf-8"?>
+<p:sld xmlns:a="http://schemas.openxmlformats.org/drawingml/2006/main" xmlns:r="http://schemas.openxmlformats.org/officeDocument/2006/relationships" xmlns:p="http://schemas.openxmlformats.org/presentationml/2006/main">
+  <p:cSld>
+    <p:spTree>
+      <p:nvGrpSpPr>
+        <p:cNvPr id="1" name=""/>
+        <p:cNvGrpSpPr/>
+        <p:nvPr/>
+      </p:nvGrpSpPr>
+      <p:grpSpPr>
+        <a:xfrm>
+          <a:off x="0" y="0"/>
+          <a:ext cx="0" cy="0"/>
+          <a:chOff x="0" y="0"/>
+          <a:chExt cx="0" cy="0"/>
+        </a:xfrm>
+      </p:grpSpPr>
+      <p:sp>
+        <p:nvSpPr>
+          <p:cNvPr id="2" name="TextBox 1">
+            <a:extLst>
+              <a:ext uri="{FF2B5EF4-FFF2-40B4-BE49-F238E27FC236}">
+                <a16:creationId xmlns:a16="http://schemas.microsoft.com/office/drawing/2014/main" id="{A76BB85E-EAB6-2089-5682-48447CE032A4}"/>
+              </a:ext>
+            </a:extLst>
+          </p:cNvPr>
+          <p:cNvSpPr txBox="1"/>
+          <p:nvPr/>
+        </p:nvSpPr>
+        <p:spPr>
+          <a:xfrm>
+            <a:off x="612648" y="795528"/>
+            <a:ext cx="8497839" cy="3693319"/>
+          </a:xfrm>
+          <a:prstGeom prst="rect">
+            <a:avLst/>
+          </a:prstGeom>
+          <a:noFill/>
+        </p:spPr>
+        <p:txBody>
+          <a:bodyPr wrap="none" rtlCol="0">
+            <a:spAutoFit/>
+          </a:bodyPr>
+          <a:lstStyle/>
+          <a:p>
+            <a:pPr marL="285750" indent="-285750">
+              <a:buFontTx/>
+              <a:buChar char="-"/>
+            </a:pPr>
+            <a:r>
+              <a:rPr lang="vi-VN"/>
+              <a:t>Chức năng đăng nhập/đăng xuất: </a:t>
+            </a:r>
+            <a:r>
+              <a:rPr lang="vi-VN">
+                <a:solidFill>
+                  <a:srgbClr val="00B0F0"/>
+                </a:solidFill>
+              </a:rPr>
+              <a:t>biểu đồ chức năng, usecase</a:t>
+            </a:r>
+            <a:r>
+              <a:rPr lang="vi-VN"/>
+              <a:t>, tuần tự</a:t>
+            </a:r>
+          </a:p>
+          <a:p>
+            <a:pPr marL="285750" indent="-285750">
+              <a:buFontTx/>
+              <a:buChar char="-"/>
+            </a:pPr>
+            <a:r>
+              <a:rPr lang="vi-VN"/>
+              <a:t>Chức năng cài đặt người dùng tùy chọn: </a:t>
+            </a:r>
+            <a:r>
+              <a:rPr lang="vi-VN">
+                <a:solidFill>
+                  <a:srgbClr val="00B0F0"/>
+                </a:solidFill>
+              </a:rPr>
+              <a:t>biểu đồ  chức năng, usecase,</a:t>
+            </a:r>
+            <a:r>
+              <a:rPr lang="vi-VN"/>
+              <a:t> tuần tự</a:t>
+            </a:r>
+          </a:p>
+          <a:p>
+            <a:pPr marL="285750" indent="-285750">
+              <a:buFontTx/>
+              <a:buChar char="-"/>
+            </a:pPr>
+            <a:r>
+              <a:rPr lang="vi-VN"/>
+              <a:t>Chức năng khởi tạo starter: biểu đồ tuần tự</a:t>
+            </a:r>
+          </a:p>
+          <a:p>
+            <a:pPr marL="285750" indent="-285750">
+              <a:buFontTx/>
+              <a:buChar char="-"/>
+            </a:pPr>
+            <a:r>
+              <a:rPr lang="vi-VN"/>
+              <a:t>Chức năng trò chuyện văn bản: </a:t>
+            </a:r>
+            <a:r>
+              <a:rPr lang="vi-VN">
+                <a:solidFill>
+                  <a:srgbClr val="00B0F0"/>
+                </a:solidFill>
+              </a:rPr>
+              <a:t>biểu đồ chức năng, usecase</a:t>
+            </a:r>
+            <a:r>
+              <a:rPr lang="vi-VN"/>
+              <a:t>, tuần tự</a:t>
+            </a:r>
+          </a:p>
+          <a:p>
+            <a:pPr marL="285750" indent="-285750">
+              <a:buFontTx/>
+              <a:buChar char="-"/>
+            </a:pPr>
+            <a:r>
+              <a:rPr lang="vi-VN"/>
+              <a:t>Chức năng trò chuyện âm thanh: </a:t>
+            </a:r>
+            <a:r>
+              <a:rPr lang="vi-VN">
+                <a:solidFill>
+                  <a:srgbClr val="00B0F0"/>
+                </a:solidFill>
+              </a:rPr>
+              <a:t>chức năng, usecase</a:t>
+            </a:r>
+            <a:r>
+              <a:rPr lang="vi-VN"/>
+              <a:t>, tuần tự</a:t>
+            </a:r>
+          </a:p>
+          <a:p>
+            <a:pPr marL="285750" indent="-285750">
+              <a:buFontTx/>
+              <a:buChar char="-"/>
+            </a:pPr>
+            <a:r>
+              <a:rPr lang="vi-VN"/>
+              <a:t>Chức năng tăng cường trí nhớ hội thoại: </a:t>
+            </a:r>
+            <a:r>
+              <a:rPr lang="vi-VN">
+                <a:solidFill>
+                  <a:srgbClr val="00B0F0"/>
+                </a:solidFill>
+              </a:rPr>
+              <a:t>chức năng, usecase</a:t>
+            </a:r>
+            <a:r>
+              <a:rPr lang="vi-VN"/>
+              <a:t>, tuần tự</a:t>
+            </a:r>
+          </a:p>
+          <a:p>
+            <a:pPr marL="285750" indent="-285750">
+              <a:buFontTx/>
+              <a:buChar char="-"/>
+            </a:pPr>
+            <a:r>
+              <a:rPr lang="vi-VN"/>
+              <a:t>Chức năng quản lý hành vi người dùng: chức năng, usecase, tuần tự</a:t>
+            </a:r>
+          </a:p>
+          <a:p>
+            <a:pPr marL="285750" indent="-285750">
+              <a:buFontTx/>
+              <a:buChar char="-"/>
+            </a:pPr>
+            <a:r>
+              <a:rPr lang="vi-VN"/>
+              <a:t>Chức năng quản lý hội thoại: chức năng, usecase, tuần tự</a:t>
+            </a:r>
+          </a:p>
+          <a:p>
+            <a:pPr marL="285750" indent="-285750">
+              <a:buFontTx/>
+              <a:buChar char="-"/>
+            </a:pPr>
+            <a:r>
+              <a:rPr lang="vi-VN"/>
+              <a:t>Chức năng xử lý trích xuất thông tin trò chuyện</a:t>
+            </a:r>
+          </a:p>
+          <a:p>
+            <a:pPr marL="285750" indent="-285750">
+              <a:buFontTx/>
+              <a:buChar char="-"/>
+            </a:pPr>
+            <a:endParaRPr lang="vi-VN"/>
+          </a:p>
+          <a:p>
+            <a:pPr marL="285750" indent="-285750">
+              <a:buFontTx/>
+              <a:buChar char="-"/>
+            </a:pPr>
+            <a:r>
+              <a:rPr lang="vi-VN"/>
+              <a:t>Thiết kế cơ sở dữ liệu embedding: có những trường nào</a:t>
+            </a:r>
+          </a:p>
+          <a:p>
+            <a:pPr marL="285750" indent="-285750">
+              <a:buFontTx/>
+              <a:buChar char="-"/>
+            </a:pPr>
+            <a:r>
+              <a:rPr lang="vi-VN"/>
+              <a:t>Cơ sở dữ liệu lưu trữ lịch sử hội thoại</a:t>
+            </a:r>
+          </a:p>
+          <a:p>
+            <a:pPr marL="285750" indent="-285750">
+              <a:buFontTx/>
+              <a:buChar char="-"/>
+            </a:pPr>
+            <a:r>
+              <a:rPr lang="vi-VN"/>
+              <a:t>Co sơ dữ liệu lưu trữ thông tin người dùng</a:t>
+            </a:r>
+            <a:endParaRPr lang="en-US"/>
+          </a:p>
+        </p:txBody>
+      </p:sp>
+    </p:spTree>
+    <p:extLst>
+      <p:ext uri="{BB962C8B-B14F-4D97-AF65-F5344CB8AC3E}">
+        <p14:creationId xmlns:p14="http://schemas.microsoft.com/office/powerpoint/2010/main" val="629964740"/>
+      </p:ext>
+    </p:extLst>
+  </p:cSld>
+  <p:clrMapOvr>
+    <a:masterClrMapping/>
+  </p:clrMapOvr>
+</p:sld>
+</file>
+
+<file path=ppt/slides/slide21.xml><?xml version="1.0" encoding="utf-8"?>
 <p:sld xmlns:a="http://schemas.openxmlformats.org/drawingml/2006/main" xmlns:r="http://schemas.openxmlformats.org/officeDocument/2006/relationships" xmlns:p="http://schemas.openxmlformats.org/presentationml/2006/main">
   <p:cSld>
     <p:spTree>
@@ -20789,7 +23663,7 @@
 </p:sld>
 </file>
 
-<file path=ppt/slides/slide21.xml><?xml version="1.0" encoding="utf-8"?>
+<file path=ppt/slides/slide22.xml><?xml version="1.0" encoding="utf-8"?>
 <p:sld xmlns:a="http://schemas.openxmlformats.org/drawingml/2006/main" xmlns:r="http://schemas.openxmlformats.org/officeDocument/2006/relationships" xmlns:p="http://schemas.openxmlformats.org/presentationml/2006/main">
   <p:cSld>
     <p:spTree>
@@ -22200,7 +25074,7 @@
 </p:sld>
 </file>
 
-<file path=ppt/slides/slide22.xml><?xml version="1.0" encoding="utf-8"?>
+<file path=ppt/slides/slide23.xml><?xml version="1.0" encoding="utf-8"?>
 <p:sld xmlns:a="http://schemas.openxmlformats.org/drawingml/2006/main" xmlns:r="http://schemas.openxmlformats.org/officeDocument/2006/relationships" xmlns:p="http://schemas.openxmlformats.org/presentationml/2006/main">
   <p:cSld>
     <p:spTree>
@@ -23163,7 +26037,7 @@
 </p:sld>
 </file>
 
-<file path=ppt/slides/slide23.xml><?xml version="1.0" encoding="utf-8"?>
+<file path=ppt/slides/slide24.xml><?xml version="1.0" encoding="utf-8"?>
 <p:sld xmlns:a="http://schemas.openxmlformats.org/drawingml/2006/main" xmlns:r="http://schemas.openxmlformats.org/officeDocument/2006/relationships" xmlns:p="http://schemas.openxmlformats.org/presentationml/2006/main">
   <p:cSld>
     <p:spTree>
@@ -24258,7 +27132,7 @@
 </p:sld>
 </file>
 
-<file path=ppt/slides/slide24.xml><?xml version="1.0" encoding="utf-8"?>
+<file path=ppt/slides/slide25.xml><?xml version="1.0" encoding="utf-8"?>
 <p:sld xmlns:a="http://schemas.openxmlformats.org/drawingml/2006/main" xmlns:r="http://schemas.openxmlformats.org/officeDocument/2006/relationships" xmlns:p="http://schemas.openxmlformats.org/presentationml/2006/main">
   <p:cSld>
     <p:spTree>
@@ -25081,7 +27955,7 @@
 </p:sld>
 </file>
 
-<file path=ppt/slides/slide25.xml><?xml version="1.0" encoding="utf-8"?>
+<file path=ppt/slides/slide26.xml><?xml version="1.0" encoding="utf-8"?>
 <p:sld xmlns:a="http://schemas.openxmlformats.org/drawingml/2006/main" xmlns:r="http://schemas.openxmlformats.org/officeDocument/2006/relationships" xmlns:p="http://schemas.openxmlformats.org/presentationml/2006/main">
   <p:cSld>
     <p:spTree>
@@ -26058,7 +28932,7 @@
 </p:sld>
 </file>
 
-<file path=ppt/slides/slide26.xml><?xml version="1.0" encoding="utf-8"?>
+<file path=ppt/slides/slide27.xml><?xml version="1.0" encoding="utf-8"?>
 <p:sld xmlns:a="http://schemas.openxmlformats.org/drawingml/2006/main" xmlns:r="http://schemas.openxmlformats.org/officeDocument/2006/relationships" xmlns:p="http://schemas.openxmlformats.org/presentationml/2006/main">
   <p:cSld>
     <p:spTree>
@@ -26830,7 +29704,7 @@
 </p:sld>
 </file>
 
-<file path=ppt/slides/slide27.xml><?xml version="1.0" encoding="utf-8"?>
+<file path=ppt/slides/slide28.xml><?xml version="1.0" encoding="utf-8"?>
 <p:sld xmlns:a="http://schemas.openxmlformats.org/drawingml/2006/main" xmlns:r="http://schemas.openxmlformats.org/officeDocument/2006/relationships" xmlns:p="http://schemas.openxmlformats.org/presentationml/2006/main">
   <p:cSld>
     <p:spTree>
@@ -27506,7 +30380,7 @@
 </p:sld>
 </file>
 
-<file path=ppt/slides/slide28.xml><?xml version="1.0" encoding="utf-8"?>
+<file path=ppt/slides/slide29.xml><?xml version="1.0" encoding="utf-8"?>
 <p:sld xmlns:a="http://schemas.openxmlformats.org/drawingml/2006/main" xmlns:r="http://schemas.openxmlformats.org/officeDocument/2006/relationships" xmlns:p="http://schemas.openxmlformats.org/presentationml/2006/main">
   <p:cSld>
     <p:spTree>
@@ -28496,971 +31370,6 @@
 </p:sld>
 </file>
 
-<file path=ppt/slides/slide29.xml><?xml version="1.0" encoding="utf-8"?>
-<p:sld xmlns:a="http://schemas.openxmlformats.org/drawingml/2006/main" xmlns:r="http://schemas.openxmlformats.org/officeDocument/2006/relationships" xmlns:p="http://schemas.openxmlformats.org/presentationml/2006/main">
-  <p:cSld>
-    <p:spTree>
-      <p:nvGrpSpPr>
-        <p:cNvPr id="1" name=""/>
-        <p:cNvGrpSpPr/>
-        <p:nvPr/>
-      </p:nvGrpSpPr>
-      <p:grpSpPr>
-        <a:xfrm>
-          <a:off x="0" y="0"/>
-          <a:ext cx="0" cy="0"/>
-          <a:chOff x="0" y="0"/>
-          <a:chExt cx="0" cy="0"/>
-        </a:xfrm>
-      </p:grpSpPr>
-      <p:sp>
-        <p:nvSpPr>
-          <p:cNvPr id="2" name="Oval 1">
-            <a:extLst>
-              <a:ext uri="{FF2B5EF4-FFF2-40B4-BE49-F238E27FC236}">
-                <a16:creationId xmlns:a16="http://schemas.microsoft.com/office/drawing/2014/main" id="{26B05E5A-5774-6924-7ADA-F84796769A43}"/>
-              </a:ext>
-            </a:extLst>
-          </p:cNvPr>
-          <p:cNvSpPr/>
-          <p:nvPr/>
-        </p:nvSpPr>
-        <p:spPr>
-          <a:xfrm>
-            <a:off x="563300" y="1266944"/>
-            <a:ext cx="1844040" cy="777240"/>
-          </a:xfrm>
-          <a:prstGeom prst="ellipse">
-            <a:avLst/>
-          </a:prstGeom>
-          <a:solidFill>
-            <a:schemeClr val="bg2"/>
-          </a:solidFill>
-          <a:ln>
-            <a:solidFill>
-              <a:schemeClr val="tx1"/>
-            </a:solidFill>
-          </a:ln>
-        </p:spPr>
-        <p:style>
-          <a:lnRef idx="2">
-            <a:schemeClr val="dk1"/>
-          </a:lnRef>
-          <a:fillRef idx="1">
-            <a:schemeClr val="lt1"/>
-          </a:fillRef>
-          <a:effectRef idx="0">
-            <a:schemeClr val="dk1"/>
-          </a:effectRef>
-          <a:fontRef idx="minor">
-            <a:schemeClr val="dk1"/>
-          </a:fontRef>
-        </p:style>
-        <p:txBody>
-          <a:bodyPr rtlCol="0" anchor="ctr"/>
-          <a:lstStyle/>
-          <a:p>
-            <a:pPr algn="ctr"/>
-            <a:r>
-              <a:rPr lang="en-US" sz="2000">
-                <a:solidFill>
-                  <a:schemeClr val="tx1"/>
-                </a:solidFill>
-                <a:latin typeface="Times New Roman" panose="02020603050405020304" pitchFamily="18" charset="0"/>
-                <a:cs typeface="Times New Roman" panose="02020603050405020304" pitchFamily="18" charset="0"/>
-              </a:rPr>
-              <a:t>Bắt đầu</a:t>
-            </a:r>
-          </a:p>
-        </p:txBody>
-      </p:sp>
-      <p:sp>
-        <p:nvSpPr>
-          <p:cNvPr id="3" name="Rectangle: Rounded Corners 2">
-            <a:extLst>
-              <a:ext uri="{FF2B5EF4-FFF2-40B4-BE49-F238E27FC236}">
-                <a16:creationId xmlns:a16="http://schemas.microsoft.com/office/drawing/2014/main" id="{1FD55CFC-45CB-076F-E764-2798E3C31C69}"/>
-              </a:ext>
-            </a:extLst>
-          </p:cNvPr>
-          <p:cNvSpPr/>
-          <p:nvPr/>
-        </p:nvSpPr>
-        <p:spPr>
-          <a:xfrm>
-            <a:off x="3543300" y="1082278"/>
-            <a:ext cx="3352800" cy="1146572"/>
-          </a:xfrm>
-          <a:prstGeom prst="roundRect">
-            <a:avLst/>
-          </a:prstGeom>
-          <a:solidFill>
-            <a:schemeClr val="bg2"/>
-          </a:solidFill>
-          <a:ln>
-            <a:solidFill>
-              <a:schemeClr val="tx1"/>
-            </a:solidFill>
-          </a:ln>
-        </p:spPr>
-        <p:style>
-          <a:lnRef idx="2">
-            <a:schemeClr val="accent1">
-              <a:shade val="15000"/>
-            </a:schemeClr>
-          </a:lnRef>
-          <a:fillRef idx="1">
-            <a:schemeClr val="accent1"/>
-          </a:fillRef>
-          <a:effectRef idx="0">
-            <a:schemeClr val="accent1"/>
-          </a:effectRef>
-          <a:fontRef idx="minor">
-            <a:schemeClr val="lt1"/>
-          </a:fontRef>
-        </p:style>
-        <p:txBody>
-          <a:bodyPr rtlCol="0" anchor="ctr"/>
-          <a:lstStyle/>
-          <a:p>
-            <a:pPr algn="ctr"/>
-            <a:r>
-              <a:rPr lang="en-US" sz="2000">
-                <a:solidFill>
-                  <a:schemeClr val="tx1"/>
-                </a:solidFill>
-                <a:latin typeface="Times New Roman" panose="02020603050405020304" pitchFamily="18" charset="0"/>
-                <a:cs typeface="Times New Roman" panose="02020603050405020304" pitchFamily="18" charset="0"/>
-              </a:rPr>
-              <a:t>Người dùng nhập truy vấn </a:t>
-            </a:r>
-          </a:p>
-          <a:p>
-            <a:pPr algn="ctr"/>
-            <a:r>
-              <a:rPr lang="en-US" sz="2000">
-                <a:solidFill>
-                  <a:schemeClr val="tx1"/>
-                </a:solidFill>
-                <a:latin typeface="Times New Roman" panose="02020603050405020304" pitchFamily="18" charset="0"/>
-                <a:cs typeface="Times New Roman" panose="02020603050405020304" pitchFamily="18" charset="0"/>
-              </a:rPr>
-              <a:t>đầu vào dạng âm thanh</a:t>
-            </a:r>
-          </a:p>
-        </p:txBody>
-      </p:sp>
-      <p:sp>
-        <p:nvSpPr>
-          <p:cNvPr id="4" name="Rectangle: Rounded Corners 3">
-            <a:extLst>
-              <a:ext uri="{FF2B5EF4-FFF2-40B4-BE49-F238E27FC236}">
-                <a16:creationId xmlns:a16="http://schemas.microsoft.com/office/drawing/2014/main" id="{012BC32F-D488-40BE-E7AC-211C34DC428B}"/>
-              </a:ext>
-            </a:extLst>
-          </p:cNvPr>
-          <p:cNvSpPr/>
-          <p:nvPr/>
-        </p:nvSpPr>
-        <p:spPr>
-          <a:xfrm>
-            <a:off x="8260080" y="2855714"/>
-            <a:ext cx="3352800" cy="1146572"/>
-          </a:xfrm>
-          <a:prstGeom prst="roundRect">
-            <a:avLst/>
-          </a:prstGeom>
-          <a:solidFill>
-            <a:schemeClr val="bg2"/>
-          </a:solidFill>
-          <a:ln>
-            <a:solidFill>
-              <a:schemeClr val="tx1"/>
-            </a:solidFill>
-          </a:ln>
-        </p:spPr>
-        <p:style>
-          <a:lnRef idx="2">
-            <a:schemeClr val="accent1">
-              <a:shade val="15000"/>
-            </a:schemeClr>
-          </a:lnRef>
-          <a:fillRef idx="1">
-            <a:schemeClr val="accent1"/>
-          </a:fillRef>
-          <a:effectRef idx="0">
-            <a:schemeClr val="accent1"/>
-          </a:effectRef>
-          <a:fontRef idx="minor">
-            <a:schemeClr val="lt1"/>
-          </a:fontRef>
-        </p:style>
-        <p:txBody>
-          <a:bodyPr rtlCol="0" anchor="ctr"/>
-          <a:lstStyle/>
-          <a:p>
-            <a:pPr algn="ctr"/>
-            <a:r>
-              <a:rPr lang="en-US" sz="2000">
-                <a:solidFill>
-                  <a:schemeClr val="tx1"/>
-                </a:solidFill>
-                <a:latin typeface="Times New Roman" panose="02020603050405020304" pitchFamily="18" charset="0"/>
-                <a:cs typeface="Times New Roman" panose="02020603050405020304" pitchFamily="18" charset="0"/>
-              </a:rPr>
-              <a:t>Hệ thống gọi agent sinh ra phản hồi cho truy vấn văn bản</a:t>
-            </a:r>
-          </a:p>
-        </p:txBody>
-      </p:sp>
-      <p:sp>
-        <p:nvSpPr>
-          <p:cNvPr id="5" name="Rectangle: Rounded Corners 4">
-            <a:extLst>
-              <a:ext uri="{FF2B5EF4-FFF2-40B4-BE49-F238E27FC236}">
-                <a16:creationId xmlns:a16="http://schemas.microsoft.com/office/drawing/2014/main" id="{54B1920A-B421-7EFC-66B0-2A4A582AB950}"/>
-              </a:ext>
-            </a:extLst>
-          </p:cNvPr>
-          <p:cNvSpPr/>
-          <p:nvPr/>
-        </p:nvSpPr>
-        <p:spPr>
-          <a:xfrm>
-            <a:off x="3543300" y="4495562"/>
-            <a:ext cx="3352800" cy="1146572"/>
-          </a:xfrm>
-          <a:prstGeom prst="roundRect">
-            <a:avLst/>
-          </a:prstGeom>
-          <a:solidFill>
-            <a:schemeClr val="bg2"/>
-          </a:solidFill>
-          <a:ln>
-            <a:solidFill>
-              <a:schemeClr val="tx1"/>
-            </a:solidFill>
-          </a:ln>
-        </p:spPr>
-        <p:style>
-          <a:lnRef idx="2">
-            <a:schemeClr val="accent1">
-              <a:shade val="15000"/>
-            </a:schemeClr>
-          </a:lnRef>
-          <a:fillRef idx="1">
-            <a:schemeClr val="accent1"/>
-          </a:fillRef>
-          <a:effectRef idx="0">
-            <a:schemeClr val="accent1"/>
-          </a:effectRef>
-          <a:fontRef idx="minor">
-            <a:schemeClr val="lt1"/>
-          </a:fontRef>
-        </p:style>
-        <p:txBody>
-          <a:bodyPr rtlCol="0" anchor="ctr"/>
-          <a:lstStyle/>
-          <a:p>
-            <a:pPr algn="ctr"/>
-            <a:r>
-              <a:rPr lang="en-US" sz="2000">
-                <a:solidFill>
-                  <a:schemeClr val="tx1"/>
-                </a:solidFill>
-                <a:latin typeface="Times New Roman" panose="02020603050405020304" pitchFamily="18" charset="0"/>
-                <a:cs typeface="Times New Roman" panose="02020603050405020304" pitchFamily="18" charset="0"/>
-              </a:rPr>
-              <a:t>Hệ thống đưa ra phản hồi cho người dùng</a:t>
-            </a:r>
-          </a:p>
-        </p:txBody>
-      </p:sp>
-      <p:sp>
-        <p:nvSpPr>
-          <p:cNvPr id="6" name="Oval 5">
-            <a:extLst>
-              <a:ext uri="{FF2B5EF4-FFF2-40B4-BE49-F238E27FC236}">
-                <a16:creationId xmlns:a16="http://schemas.microsoft.com/office/drawing/2014/main" id="{15D19990-4494-20B0-3C52-25E34B2C5171}"/>
-              </a:ext>
-            </a:extLst>
-          </p:cNvPr>
-          <p:cNvSpPr/>
-          <p:nvPr/>
-        </p:nvSpPr>
-        <p:spPr>
-          <a:xfrm>
-            <a:off x="533254" y="4649748"/>
-            <a:ext cx="1844040" cy="838200"/>
-          </a:xfrm>
-          <a:prstGeom prst="ellipse">
-            <a:avLst/>
-          </a:prstGeom>
-          <a:solidFill>
-            <a:schemeClr val="bg2"/>
-          </a:solidFill>
-          <a:ln>
-            <a:solidFill>
-              <a:schemeClr val="tx1"/>
-            </a:solidFill>
-          </a:ln>
-        </p:spPr>
-        <p:style>
-          <a:lnRef idx="2">
-            <a:schemeClr val="dk1"/>
-          </a:lnRef>
-          <a:fillRef idx="1">
-            <a:schemeClr val="lt1"/>
-          </a:fillRef>
-          <a:effectRef idx="0">
-            <a:schemeClr val="dk1"/>
-          </a:effectRef>
-          <a:fontRef idx="minor">
-            <a:schemeClr val="dk1"/>
-          </a:fontRef>
-        </p:style>
-        <p:txBody>
-          <a:bodyPr rtlCol="0" anchor="ctr"/>
-          <a:lstStyle/>
-          <a:p>
-            <a:pPr algn="ctr"/>
-            <a:r>
-              <a:rPr lang="en-US" sz="2000">
-                <a:solidFill>
-                  <a:schemeClr val="tx1"/>
-                </a:solidFill>
-                <a:latin typeface="Times New Roman" panose="02020603050405020304" pitchFamily="18" charset="0"/>
-                <a:cs typeface="Times New Roman" panose="02020603050405020304" pitchFamily="18" charset="0"/>
-              </a:rPr>
-              <a:t>Kết thúc</a:t>
-            </a:r>
-          </a:p>
-        </p:txBody>
-      </p:sp>
-      <p:cxnSp>
-        <p:nvCxnSpPr>
-          <p:cNvPr id="10" name="Straight Arrow Connector 9">
-            <a:extLst>
-              <a:ext uri="{FF2B5EF4-FFF2-40B4-BE49-F238E27FC236}">
-                <a16:creationId xmlns:a16="http://schemas.microsoft.com/office/drawing/2014/main" id="{EEB03F82-25A2-151D-7732-8C2D919E83A8}"/>
-              </a:ext>
-            </a:extLst>
-          </p:cNvPr>
-          <p:cNvCxnSpPr>
-            <a:cxnSpLocks/>
-            <a:stCxn id="80" idx="1"/>
-            <a:endCxn id="5" idx="3"/>
-          </p:cNvCxnSpPr>
-          <p:nvPr/>
-        </p:nvCxnSpPr>
-        <p:spPr>
-          <a:xfrm flipH="1" flipV="1">
-            <a:off x="6896100" y="5068848"/>
-            <a:ext cx="1363980" cy="1548"/>
-          </a:xfrm>
-          <a:prstGeom prst="straightConnector1">
-            <a:avLst/>
-          </a:prstGeom>
-          <a:ln>
-            <a:tailEnd type="triangle"/>
-          </a:ln>
-        </p:spPr>
-        <p:style>
-          <a:lnRef idx="2">
-            <a:schemeClr val="dk1"/>
-          </a:lnRef>
-          <a:fillRef idx="0">
-            <a:schemeClr val="dk1"/>
-          </a:fillRef>
-          <a:effectRef idx="1">
-            <a:schemeClr val="dk1"/>
-          </a:effectRef>
-          <a:fontRef idx="minor">
-            <a:schemeClr val="tx1"/>
-          </a:fontRef>
-        </p:style>
-      </p:cxnSp>
-      <p:sp>
-        <p:nvSpPr>
-          <p:cNvPr id="11" name="TextBox 10">
-            <a:extLst>
-              <a:ext uri="{FF2B5EF4-FFF2-40B4-BE49-F238E27FC236}">
-                <a16:creationId xmlns:a16="http://schemas.microsoft.com/office/drawing/2014/main" id="{83DA8988-AE88-6FB4-DE9E-72AC01A75957}"/>
-              </a:ext>
-            </a:extLst>
-          </p:cNvPr>
-          <p:cNvSpPr txBox="1"/>
-          <p:nvPr/>
-        </p:nvSpPr>
-        <p:spPr>
-          <a:xfrm>
-            <a:off x="6897135" y="1286470"/>
-            <a:ext cx="453970" cy="369332"/>
-          </a:xfrm>
-          <a:prstGeom prst="rect">
-            <a:avLst/>
-          </a:prstGeom>
-          <a:noFill/>
-        </p:spPr>
-        <p:txBody>
-          <a:bodyPr wrap="none" rtlCol="0">
-            <a:spAutoFit/>
-          </a:bodyPr>
-          <a:lstStyle/>
-          <a:p>
-            <a:r>
-              <a:rPr lang="en-US">
-                <a:latin typeface="Times New Roman" panose="02020603050405020304" pitchFamily="18" charset="0"/>
-                <a:cs typeface="Times New Roman" panose="02020603050405020304" pitchFamily="18" charset="0"/>
-              </a:rPr>
-              <a:t>(2)</a:t>
-            </a:r>
-          </a:p>
-        </p:txBody>
-      </p:sp>
-      <p:sp>
-        <p:nvSpPr>
-          <p:cNvPr id="12" name="TextBox 11">
-            <a:extLst>
-              <a:ext uri="{FF2B5EF4-FFF2-40B4-BE49-F238E27FC236}">
-                <a16:creationId xmlns:a16="http://schemas.microsoft.com/office/drawing/2014/main" id="{6BDF8B9F-A792-6678-A237-8A18D79AA52A}"/>
-              </a:ext>
-            </a:extLst>
-          </p:cNvPr>
-          <p:cNvSpPr txBox="1"/>
-          <p:nvPr/>
-        </p:nvSpPr>
-        <p:spPr>
-          <a:xfrm>
-            <a:off x="9951140" y="2228850"/>
-            <a:ext cx="453970" cy="369332"/>
-          </a:xfrm>
-          <a:prstGeom prst="rect">
-            <a:avLst/>
-          </a:prstGeom>
-          <a:noFill/>
-        </p:spPr>
-        <p:txBody>
-          <a:bodyPr wrap="none" rtlCol="0">
-            <a:spAutoFit/>
-          </a:bodyPr>
-          <a:lstStyle/>
-          <a:p>
-            <a:r>
-              <a:rPr lang="en-US">
-                <a:latin typeface="Times New Roman" panose="02020603050405020304" pitchFamily="18" charset="0"/>
-                <a:cs typeface="Times New Roman" panose="02020603050405020304" pitchFamily="18" charset="0"/>
-              </a:rPr>
-              <a:t>(3)</a:t>
-            </a:r>
-          </a:p>
-        </p:txBody>
-      </p:sp>
-      <p:sp>
-        <p:nvSpPr>
-          <p:cNvPr id="13" name="TextBox 12">
-            <a:extLst>
-              <a:ext uri="{FF2B5EF4-FFF2-40B4-BE49-F238E27FC236}">
-                <a16:creationId xmlns:a16="http://schemas.microsoft.com/office/drawing/2014/main" id="{0AF1B328-25AD-5F94-8892-B231A3582966}"/>
-              </a:ext>
-            </a:extLst>
-          </p:cNvPr>
-          <p:cNvSpPr txBox="1"/>
-          <p:nvPr/>
-        </p:nvSpPr>
-        <p:spPr>
-          <a:xfrm>
-            <a:off x="7806110" y="4699279"/>
-            <a:ext cx="453970" cy="369332"/>
-          </a:xfrm>
-          <a:prstGeom prst="rect">
-            <a:avLst/>
-          </a:prstGeom>
-          <a:noFill/>
-        </p:spPr>
-        <p:txBody>
-          <a:bodyPr wrap="none" rtlCol="0">
-            <a:spAutoFit/>
-          </a:bodyPr>
-          <a:lstStyle/>
-          <a:p>
-            <a:r>
-              <a:rPr lang="en-US">
-                <a:latin typeface="Times New Roman" panose="02020603050405020304" pitchFamily="18" charset="0"/>
-                <a:cs typeface="Times New Roman" panose="02020603050405020304" pitchFamily="18" charset="0"/>
-              </a:rPr>
-              <a:t>(5)</a:t>
-            </a:r>
-          </a:p>
-        </p:txBody>
-      </p:sp>
-      <p:sp>
-        <p:nvSpPr>
-          <p:cNvPr id="14" name="TextBox 13">
-            <a:extLst>
-              <a:ext uri="{FF2B5EF4-FFF2-40B4-BE49-F238E27FC236}">
-                <a16:creationId xmlns:a16="http://schemas.microsoft.com/office/drawing/2014/main" id="{D9D70832-FA92-8019-E202-E206CDAD1F8B}"/>
-              </a:ext>
-            </a:extLst>
-          </p:cNvPr>
-          <p:cNvSpPr txBox="1"/>
-          <p:nvPr/>
-        </p:nvSpPr>
-        <p:spPr>
-          <a:xfrm>
-            <a:off x="3089330" y="4699279"/>
-            <a:ext cx="453970" cy="369332"/>
-          </a:xfrm>
-          <a:prstGeom prst="rect">
-            <a:avLst/>
-          </a:prstGeom>
-          <a:noFill/>
-        </p:spPr>
-        <p:txBody>
-          <a:bodyPr wrap="none" rtlCol="0">
-            <a:spAutoFit/>
-          </a:bodyPr>
-          <a:lstStyle/>
-          <a:p>
-            <a:r>
-              <a:rPr lang="en-US">
-                <a:latin typeface="Times New Roman" panose="02020603050405020304" pitchFamily="18" charset="0"/>
-                <a:cs typeface="Times New Roman" panose="02020603050405020304" pitchFamily="18" charset="0"/>
-              </a:rPr>
-              <a:t>(6)</a:t>
-            </a:r>
-          </a:p>
-        </p:txBody>
-      </p:sp>
-      <p:sp>
-        <p:nvSpPr>
-          <p:cNvPr id="19" name="Rectangle: Rounded Corners 18">
-            <a:extLst>
-              <a:ext uri="{FF2B5EF4-FFF2-40B4-BE49-F238E27FC236}">
-                <a16:creationId xmlns:a16="http://schemas.microsoft.com/office/drawing/2014/main" id="{0401DB0B-6A26-2921-74FF-83D321420B3B}"/>
-              </a:ext>
-            </a:extLst>
-          </p:cNvPr>
-          <p:cNvSpPr/>
-          <p:nvPr/>
-        </p:nvSpPr>
-        <p:spPr>
-          <a:xfrm>
-            <a:off x="8260080" y="1082278"/>
-            <a:ext cx="3352800" cy="1146572"/>
-          </a:xfrm>
-          <a:prstGeom prst="roundRect">
-            <a:avLst/>
-          </a:prstGeom>
-          <a:solidFill>
-            <a:schemeClr val="bg2"/>
-          </a:solidFill>
-          <a:ln>
-            <a:solidFill>
-              <a:schemeClr val="tx1"/>
-            </a:solidFill>
-          </a:ln>
-        </p:spPr>
-        <p:style>
-          <a:lnRef idx="2">
-            <a:schemeClr val="accent1">
-              <a:shade val="15000"/>
-            </a:schemeClr>
-          </a:lnRef>
-          <a:fillRef idx="1">
-            <a:schemeClr val="accent1"/>
-          </a:fillRef>
-          <a:effectRef idx="0">
-            <a:schemeClr val="accent1"/>
-          </a:effectRef>
-          <a:fontRef idx="minor">
-            <a:schemeClr val="lt1"/>
-          </a:fontRef>
-        </p:style>
-        <p:txBody>
-          <a:bodyPr rtlCol="0" anchor="ctr"/>
-          <a:lstStyle/>
-          <a:p>
-            <a:pPr algn="ctr"/>
-            <a:r>
-              <a:rPr lang="en-US" sz="2000">
-                <a:solidFill>
-                  <a:schemeClr val="tx1"/>
-                </a:solidFill>
-                <a:latin typeface="Times New Roman" panose="02020603050405020304" pitchFamily="18" charset="0"/>
-                <a:cs typeface="Times New Roman" panose="02020603050405020304" pitchFamily="18" charset="0"/>
-              </a:rPr>
-              <a:t>Hệ thống chuyển đổi truy vấn từ âm thanh sang văn bản</a:t>
-            </a:r>
-          </a:p>
-        </p:txBody>
-      </p:sp>
-      <p:cxnSp>
-        <p:nvCxnSpPr>
-          <p:cNvPr id="32" name="Straight Arrow Connector 31">
-            <a:extLst>
-              <a:ext uri="{FF2B5EF4-FFF2-40B4-BE49-F238E27FC236}">
-                <a16:creationId xmlns:a16="http://schemas.microsoft.com/office/drawing/2014/main" id="{69CA16BF-CFB6-3255-EE70-71A1800C7386}"/>
-              </a:ext>
-            </a:extLst>
-          </p:cNvPr>
-          <p:cNvCxnSpPr>
-            <a:cxnSpLocks/>
-            <a:stCxn id="2" idx="6"/>
-            <a:endCxn id="3" idx="1"/>
-          </p:cNvCxnSpPr>
-          <p:nvPr/>
-        </p:nvCxnSpPr>
-        <p:spPr>
-          <a:xfrm>
-            <a:off x="2407340" y="1655564"/>
-            <a:ext cx="1135960" cy="0"/>
-          </a:xfrm>
-          <a:prstGeom prst="straightConnector1">
-            <a:avLst/>
-          </a:prstGeom>
-          <a:ln>
-            <a:tailEnd type="triangle"/>
-          </a:ln>
-        </p:spPr>
-        <p:style>
-          <a:lnRef idx="2">
-            <a:schemeClr val="dk1"/>
-          </a:lnRef>
-          <a:fillRef idx="0">
-            <a:schemeClr val="dk1"/>
-          </a:fillRef>
-          <a:effectRef idx="1">
-            <a:schemeClr val="dk1"/>
-          </a:effectRef>
-          <a:fontRef idx="minor">
-            <a:schemeClr val="tx1"/>
-          </a:fontRef>
-        </p:style>
-      </p:cxnSp>
-      <p:cxnSp>
-        <p:nvCxnSpPr>
-          <p:cNvPr id="37" name="Straight Arrow Connector 36">
-            <a:extLst>
-              <a:ext uri="{FF2B5EF4-FFF2-40B4-BE49-F238E27FC236}">
-                <a16:creationId xmlns:a16="http://schemas.microsoft.com/office/drawing/2014/main" id="{6F9A9B17-2BF5-D280-1052-147247FF1DC9}"/>
-              </a:ext>
-            </a:extLst>
-          </p:cNvPr>
-          <p:cNvCxnSpPr>
-            <a:cxnSpLocks/>
-            <a:stCxn id="3" idx="3"/>
-            <a:endCxn id="19" idx="1"/>
-          </p:cNvCxnSpPr>
-          <p:nvPr/>
-        </p:nvCxnSpPr>
-        <p:spPr>
-          <a:xfrm>
-            <a:off x="6896100" y="1655564"/>
-            <a:ext cx="1363980" cy="0"/>
-          </a:xfrm>
-          <a:prstGeom prst="straightConnector1">
-            <a:avLst/>
-          </a:prstGeom>
-          <a:ln>
-            <a:tailEnd type="triangle"/>
-          </a:ln>
-        </p:spPr>
-        <p:style>
-          <a:lnRef idx="2">
-            <a:schemeClr val="dk1"/>
-          </a:lnRef>
-          <a:fillRef idx="0">
-            <a:schemeClr val="dk1"/>
-          </a:fillRef>
-          <a:effectRef idx="1">
-            <a:schemeClr val="dk1"/>
-          </a:effectRef>
-          <a:fontRef idx="minor">
-            <a:schemeClr val="tx1"/>
-          </a:fontRef>
-        </p:style>
-      </p:cxnSp>
-      <p:cxnSp>
-        <p:nvCxnSpPr>
-          <p:cNvPr id="40" name="Straight Arrow Connector 39">
-            <a:extLst>
-              <a:ext uri="{FF2B5EF4-FFF2-40B4-BE49-F238E27FC236}">
-                <a16:creationId xmlns:a16="http://schemas.microsoft.com/office/drawing/2014/main" id="{D93911F4-290D-D63C-C1A1-C249AA350DC4}"/>
-              </a:ext>
-            </a:extLst>
-          </p:cNvPr>
-          <p:cNvCxnSpPr>
-            <a:cxnSpLocks/>
-            <a:stCxn id="19" idx="2"/>
-            <a:endCxn id="4" idx="0"/>
-          </p:cNvCxnSpPr>
-          <p:nvPr/>
-        </p:nvCxnSpPr>
-        <p:spPr>
-          <a:xfrm>
-            <a:off x="9936480" y="2228850"/>
-            <a:ext cx="0" cy="626864"/>
-          </a:xfrm>
-          <a:prstGeom prst="straightConnector1">
-            <a:avLst/>
-          </a:prstGeom>
-          <a:ln>
-            <a:tailEnd type="triangle"/>
-          </a:ln>
-        </p:spPr>
-        <p:style>
-          <a:lnRef idx="2">
-            <a:schemeClr val="dk1"/>
-          </a:lnRef>
-          <a:fillRef idx="0">
-            <a:schemeClr val="dk1"/>
-          </a:fillRef>
-          <a:effectRef idx="1">
-            <a:schemeClr val="dk1"/>
-          </a:effectRef>
-          <a:fontRef idx="minor">
-            <a:schemeClr val="tx1"/>
-          </a:fontRef>
-        </p:style>
-      </p:cxnSp>
-      <p:sp>
-        <p:nvSpPr>
-          <p:cNvPr id="43" name="TextBox 42">
-            <a:extLst>
-              <a:ext uri="{FF2B5EF4-FFF2-40B4-BE49-F238E27FC236}">
-                <a16:creationId xmlns:a16="http://schemas.microsoft.com/office/drawing/2014/main" id="{DDF65E27-7ED9-F013-8222-13C703D45D29}"/>
-              </a:ext>
-            </a:extLst>
-          </p:cNvPr>
-          <p:cNvSpPr txBox="1"/>
-          <p:nvPr/>
-        </p:nvSpPr>
-        <p:spPr>
-          <a:xfrm>
-            <a:off x="2408375" y="1286470"/>
-            <a:ext cx="453970" cy="369332"/>
-          </a:xfrm>
-          <a:prstGeom prst="rect">
-            <a:avLst/>
-          </a:prstGeom>
-          <a:noFill/>
-        </p:spPr>
-        <p:txBody>
-          <a:bodyPr wrap="none" rtlCol="0">
-            <a:spAutoFit/>
-          </a:bodyPr>
-          <a:lstStyle/>
-          <a:p>
-            <a:r>
-              <a:rPr lang="en-US">
-                <a:latin typeface="Times New Roman" panose="02020603050405020304" pitchFamily="18" charset="0"/>
-                <a:cs typeface="Times New Roman" panose="02020603050405020304" pitchFamily="18" charset="0"/>
-              </a:rPr>
-              <a:t>(1)</a:t>
-            </a:r>
-          </a:p>
-        </p:txBody>
-      </p:sp>
-      <p:cxnSp>
-        <p:nvCxnSpPr>
-          <p:cNvPr id="76" name="Straight Arrow Connector 75">
-            <a:extLst>
-              <a:ext uri="{FF2B5EF4-FFF2-40B4-BE49-F238E27FC236}">
-                <a16:creationId xmlns:a16="http://schemas.microsoft.com/office/drawing/2014/main" id="{B8461CB0-63ED-4A9D-1B90-E2949619306C}"/>
-              </a:ext>
-            </a:extLst>
-          </p:cNvPr>
-          <p:cNvCxnSpPr>
-            <a:stCxn id="5" idx="1"/>
-            <a:endCxn id="6" idx="6"/>
-          </p:cNvCxnSpPr>
-          <p:nvPr/>
-        </p:nvCxnSpPr>
-        <p:spPr>
-          <a:xfrm flipH="1">
-            <a:off x="2377294" y="5068848"/>
-            <a:ext cx="1166006" cy="0"/>
-          </a:xfrm>
-          <a:prstGeom prst="straightConnector1">
-            <a:avLst/>
-          </a:prstGeom>
-          <a:ln>
-            <a:tailEnd type="triangle"/>
-          </a:ln>
-        </p:spPr>
-        <p:style>
-          <a:lnRef idx="2">
-            <a:schemeClr val="dk1"/>
-          </a:lnRef>
-          <a:fillRef idx="0">
-            <a:schemeClr val="dk1"/>
-          </a:fillRef>
-          <a:effectRef idx="1">
-            <a:schemeClr val="dk1"/>
-          </a:effectRef>
-          <a:fontRef idx="minor">
-            <a:schemeClr val="tx1"/>
-          </a:fontRef>
-        </p:style>
-      </p:cxnSp>
-      <p:sp>
-        <p:nvSpPr>
-          <p:cNvPr id="80" name="Rectangle: Rounded Corners 79">
-            <a:extLst>
-              <a:ext uri="{FF2B5EF4-FFF2-40B4-BE49-F238E27FC236}">
-                <a16:creationId xmlns:a16="http://schemas.microsoft.com/office/drawing/2014/main" id="{BCC66C11-250E-00AA-715E-FE85F08CD21D}"/>
-              </a:ext>
-            </a:extLst>
-          </p:cNvPr>
-          <p:cNvSpPr/>
-          <p:nvPr/>
-        </p:nvSpPr>
-        <p:spPr>
-          <a:xfrm>
-            <a:off x="8260080" y="4497110"/>
-            <a:ext cx="3352800" cy="1146572"/>
-          </a:xfrm>
-          <a:prstGeom prst="roundRect">
-            <a:avLst/>
-          </a:prstGeom>
-          <a:solidFill>
-            <a:schemeClr val="bg2"/>
-          </a:solidFill>
-          <a:ln>
-            <a:solidFill>
-              <a:schemeClr val="tx1"/>
-            </a:solidFill>
-          </a:ln>
-        </p:spPr>
-        <p:style>
-          <a:lnRef idx="2">
-            <a:schemeClr val="accent1">
-              <a:shade val="15000"/>
-            </a:schemeClr>
-          </a:lnRef>
-          <a:fillRef idx="1">
-            <a:schemeClr val="accent1"/>
-          </a:fillRef>
-          <a:effectRef idx="0">
-            <a:schemeClr val="accent1"/>
-          </a:effectRef>
-          <a:fontRef idx="minor">
-            <a:schemeClr val="lt1"/>
-          </a:fontRef>
-        </p:style>
-        <p:txBody>
-          <a:bodyPr rtlCol="0" anchor="ctr"/>
-          <a:lstStyle/>
-          <a:p>
-            <a:pPr algn="ctr"/>
-            <a:r>
-              <a:rPr lang="en-US" sz="2000">
-                <a:solidFill>
-                  <a:schemeClr val="tx1"/>
-                </a:solidFill>
-                <a:latin typeface="Times New Roman" panose="02020603050405020304" pitchFamily="18" charset="0"/>
-                <a:cs typeface="Times New Roman" panose="02020603050405020304" pitchFamily="18" charset="0"/>
-              </a:rPr>
-              <a:t>Hệ thống chuyển đổi phản hồi sang dạng âm thanh</a:t>
-            </a:r>
-          </a:p>
-        </p:txBody>
-      </p:sp>
-      <p:cxnSp>
-        <p:nvCxnSpPr>
-          <p:cNvPr id="82" name="Straight Arrow Connector 81">
-            <a:extLst>
-              <a:ext uri="{FF2B5EF4-FFF2-40B4-BE49-F238E27FC236}">
-                <a16:creationId xmlns:a16="http://schemas.microsoft.com/office/drawing/2014/main" id="{D38BA67F-B673-C314-25C9-C505F698BF19}"/>
-              </a:ext>
-            </a:extLst>
-          </p:cNvPr>
-          <p:cNvCxnSpPr>
-            <a:cxnSpLocks/>
-            <a:stCxn id="4" idx="2"/>
-            <a:endCxn id="80" idx="0"/>
-          </p:cNvCxnSpPr>
-          <p:nvPr/>
-        </p:nvCxnSpPr>
-        <p:spPr>
-          <a:xfrm>
-            <a:off x="9936480" y="4002286"/>
-            <a:ext cx="0" cy="494824"/>
-          </a:xfrm>
-          <a:prstGeom prst="straightConnector1">
-            <a:avLst/>
-          </a:prstGeom>
-          <a:ln>
-            <a:tailEnd type="triangle"/>
-          </a:ln>
-        </p:spPr>
-        <p:style>
-          <a:lnRef idx="2">
-            <a:schemeClr val="dk1"/>
-          </a:lnRef>
-          <a:fillRef idx="0">
-            <a:schemeClr val="dk1"/>
-          </a:fillRef>
-          <a:effectRef idx="1">
-            <a:schemeClr val="dk1"/>
-          </a:effectRef>
-          <a:fontRef idx="minor">
-            <a:schemeClr val="tx1"/>
-          </a:fontRef>
-        </p:style>
-      </p:cxnSp>
-      <p:sp>
-        <p:nvSpPr>
-          <p:cNvPr id="85" name="TextBox 84">
-            <a:extLst>
-              <a:ext uri="{FF2B5EF4-FFF2-40B4-BE49-F238E27FC236}">
-                <a16:creationId xmlns:a16="http://schemas.microsoft.com/office/drawing/2014/main" id="{693B2600-13EF-9684-55D5-F2EC963AFB97}"/>
-              </a:ext>
-            </a:extLst>
-          </p:cNvPr>
-          <p:cNvSpPr txBox="1"/>
-          <p:nvPr/>
-        </p:nvSpPr>
-        <p:spPr>
-          <a:xfrm>
-            <a:off x="9951140" y="4002286"/>
-            <a:ext cx="453970" cy="369332"/>
-          </a:xfrm>
-          <a:prstGeom prst="rect">
-            <a:avLst/>
-          </a:prstGeom>
-          <a:noFill/>
-        </p:spPr>
-        <p:txBody>
-          <a:bodyPr wrap="none" rtlCol="0">
-            <a:spAutoFit/>
-          </a:bodyPr>
-          <a:lstStyle/>
-          <a:p>
-            <a:r>
-              <a:rPr lang="en-US">
-                <a:latin typeface="Times New Roman" panose="02020603050405020304" pitchFamily="18" charset="0"/>
-                <a:cs typeface="Times New Roman" panose="02020603050405020304" pitchFamily="18" charset="0"/>
-              </a:rPr>
-              <a:t>(4)</a:t>
-            </a:r>
-          </a:p>
-        </p:txBody>
-      </p:sp>
-    </p:spTree>
-    <p:extLst>
-      <p:ext uri="{BB962C8B-B14F-4D97-AF65-F5344CB8AC3E}">
-        <p14:creationId xmlns:p14="http://schemas.microsoft.com/office/powerpoint/2010/main" val="354594061"/>
-      </p:ext>
-    </p:extLst>
-  </p:cSld>
-  <p:clrMapOvr>
-    <a:masterClrMapping/>
-  </p:clrMapOvr>
-</p:sld>
-</file>
-
 <file path=ppt/slides/slide3.xml><?xml version="1.0" encoding="utf-8"?>
 <p:sld xmlns:a="http://schemas.openxmlformats.org/drawingml/2006/main" xmlns:r="http://schemas.openxmlformats.org/officeDocument/2006/relationships" xmlns:p="http://schemas.openxmlformats.org/presentationml/2006/main">
   <p:cSld>
@@ -31418,6 +33327,971 @@
 </file>
 
 <file path=ppt/slides/slide30.xml><?xml version="1.0" encoding="utf-8"?>
+<p:sld xmlns:a="http://schemas.openxmlformats.org/drawingml/2006/main" xmlns:r="http://schemas.openxmlformats.org/officeDocument/2006/relationships" xmlns:p="http://schemas.openxmlformats.org/presentationml/2006/main">
+  <p:cSld>
+    <p:spTree>
+      <p:nvGrpSpPr>
+        <p:cNvPr id="1" name=""/>
+        <p:cNvGrpSpPr/>
+        <p:nvPr/>
+      </p:nvGrpSpPr>
+      <p:grpSpPr>
+        <a:xfrm>
+          <a:off x="0" y="0"/>
+          <a:ext cx="0" cy="0"/>
+          <a:chOff x="0" y="0"/>
+          <a:chExt cx="0" cy="0"/>
+        </a:xfrm>
+      </p:grpSpPr>
+      <p:sp>
+        <p:nvSpPr>
+          <p:cNvPr id="2" name="Oval 1">
+            <a:extLst>
+              <a:ext uri="{FF2B5EF4-FFF2-40B4-BE49-F238E27FC236}">
+                <a16:creationId xmlns:a16="http://schemas.microsoft.com/office/drawing/2014/main" id="{26B05E5A-5774-6924-7ADA-F84796769A43}"/>
+              </a:ext>
+            </a:extLst>
+          </p:cNvPr>
+          <p:cNvSpPr/>
+          <p:nvPr/>
+        </p:nvSpPr>
+        <p:spPr>
+          <a:xfrm>
+            <a:off x="563300" y="1266944"/>
+            <a:ext cx="1844040" cy="777240"/>
+          </a:xfrm>
+          <a:prstGeom prst="ellipse">
+            <a:avLst/>
+          </a:prstGeom>
+          <a:solidFill>
+            <a:schemeClr val="bg2"/>
+          </a:solidFill>
+          <a:ln>
+            <a:solidFill>
+              <a:schemeClr val="tx1"/>
+            </a:solidFill>
+          </a:ln>
+        </p:spPr>
+        <p:style>
+          <a:lnRef idx="2">
+            <a:schemeClr val="dk1"/>
+          </a:lnRef>
+          <a:fillRef idx="1">
+            <a:schemeClr val="lt1"/>
+          </a:fillRef>
+          <a:effectRef idx="0">
+            <a:schemeClr val="dk1"/>
+          </a:effectRef>
+          <a:fontRef idx="minor">
+            <a:schemeClr val="dk1"/>
+          </a:fontRef>
+        </p:style>
+        <p:txBody>
+          <a:bodyPr rtlCol="0" anchor="ctr"/>
+          <a:lstStyle/>
+          <a:p>
+            <a:pPr algn="ctr"/>
+            <a:r>
+              <a:rPr lang="en-US" sz="2000">
+                <a:solidFill>
+                  <a:schemeClr val="tx1"/>
+                </a:solidFill>
+                <a:latin typeface="Times New Roman" panose="02020603050405020304" pitchFamily="18" charset="0"/>
+                <a:cs typeface="Times New Roman" panose="02020603050405020304" pitchFamily="18" charset="0"/>
+              </a:rPr>
+              <a:t>Bắt đầu</a:t>
+            </a:r>
+          </a:p>
+        </p:txBody>
+      </p:sp>
+      <p:sp>
+        <p:nvSpPr>
+          <p:cNvPr id="3" name="Rectangle: Rounded Corners 2">
+            <a:extLst>
+              <a:ext uri="{FF2B5EF4-FFF2-40B4-BE49-F238E27FC236}">
+                <a16:creationId xmlns:a16="http://schemas.microsoft.com/office/drawing/2014/main" id="{1FD55CFC-45CB-076F-E764-2798E3C31C69}"/>
+              </a:ext>
+            </a:extLst>
+          </p:cNvPr>
+          <p:cNvSpPr/>
+          <p:nvPr/>
+        </p:nvSpPr>
+        <p:spPr>
+          <a:xfrm>
+            <a:off x="3543300" y="1082278"/>
+            <a:ext cx="3352800" cy="1146572"/>
+          </a:xfrm>
+          <a:prstGeom prst="roundRect">
+            <a:avLst/>
+          </a:prstGeom>
+          <a:solidFill>
+            <a:schemeClr val="bg2"/>
+          </a:solidFill>
+          <a:ln>
+            <a:solidFill>
+              <a:schemeClr val="tx1"/>
+            </a:solidFill>
+          </a:ln>
+        </p:spPr>
+        <p:style>
+          <a:lnRef idx="2">
+            <a:schemeClr val="accent1">
+              <a:shade val="15000"/>
+            </a:schemeClr>
+          </a:lnRef>
+          <a:fillRef idx="1">
+            <a:schemeClr val="accent1"/>
+          </a:fillRef>
+          <a:effectRef idx="0">
+            <a:schemeClr val="accent1"/>
+          </a:effectRef>
+          <a:fontRef idx="minor">
+            <a:schemeClr val="lt1"/>
+          </a:fontRef>
+        </p:style>
+        <p:txBody>
+          <a:bodyPr rtlCol="0" anchor="ctr"/>
+          <a:lstStyle/>
+          <a:p>
+            <a:pPr algn="ctr"/>
+            <a:r>
+              <a:rPr lang="en-US" sz="2000">
+                <a:solidFill>
+                  <a:schemeClr val="tx1"/>
+                </a:solidFill>
+                <a:latin typeface="Times New Roman" panose="02020603050405020304" pitchFamily="18" charset="0"/>
+                <a:cs typeface="Times New Roman" panose="02020603050405020304" pitchFamily="18" charset="0"/>
+              </a:rPr>
+              <a:t>Người dùng nhập truy vấn </a:t>
+            </a:r>
+          </a:p>
+          <a:p>
+            <a:pPr algn="ctr"/>
+            <a:r>
+              <a:rPr lang="en-US" sz="2000">
+                <a:solidFill>
+                  <a:schemeClr val="tx1"/>
+                </a:solidFill>
+                <a:latin typeface="Times New Roman" panose="02020603050405020304" pitchFamily="18" charset="0"/>
+                <a:cs typeface="Times New Roman" panose="02020603050405020304" pitchFamily="18" charset="0"/>
+              </a:rPr>
+              <a:t>đầu vào dạng âm thanh</a:t>
+            </a:r>
+          </a:p>
+        </p:txBody>
+      </p:sp>
+      <p:sp>
+        <p:nvSpPr>
+          <p:cNvPr id="4" name="Rectangle: Rounded Corners 3">
+            <a:extLst>
+              <a:ext uri="{FF2B5EF4-FFF2-40B4-BE49-F238E27FC236}">
+                <a16:creationId xmlns:a16="http://schemas.microsoft.com/office/drawing/2014/main" id="{012BC32F-D488-40BE-E7AC-211C34DC428B}"/>
+              </a:ext>
+            </a:extLst>
+          </p:cNvPr>
+          <p:cNvSpPr/>
+          <p:nvPr/>
+        </p:nvSpPr>
+        <p:spPr>
+          <a:xfrm>
+            <a:off x="8260080" y="2855714"/>
+            <a:ext cx="3352800" cy="1146572"/>
+          </a:xfrm>
+          <a:prstGeom prst="roundRect">
+            <a:avLst/>
+          </a:prstGeom>
+          <a:solidFill>
+            <a:schemeClr val="bg2"/>
+          </a:solidFill>
+          <a:ln>
+            <a:solidFill>
+              <a:schemeClr val="tx1"/>
+            </a:solidFill>
+          </a:ln>
+        </p:spPr>
+        <p:style>
+          <a:lnRef idx="2">
+            <a:schemeClr val="accent1">
+              <a:shade val="15000"/>
+            </a:schemeClr>
+          </a:lnRef>
+          <a:fillRef idx="1">
+            <a:schemeClr val="accent1"/>
+          </a:fillRef>
+          <a:effectRef idx="0">
+            <a:schemeClr val="accent1"/>
+          </a:effectRef>
+          <a:fontRef idx="minor">
+            <a:schemeClr val="lt1"/>
+          </a:fontRef>
+        </p:style>
+        <p:txBody>
+          <a:bodyPr rtlCol="0" anchor="ctr"/>
+          <a:lstStyle/>
+          <a:p>
+            <a:pPr algn="ctr"/>
+            <a:r>
+              <a:rPr lang="en-US" sz="2000">
+                <a:solidFill>
+                  <a:schemeClr val="tx1"/>
+                </a:solidFill>
+                <a:latin typeface="Times New Roman" panose="02020603050405020304" pitchFamily="18" charset="0"/>
+                <a:cs typeface="Times New Roman" panose="02020603050405020304" pitchFamily="18" charset="0"/>
+              </a:rPr>
+              <a:t>Hệ thống gọi agent sinh ra phản hồi cho truy vấn văn bản</a:t>
+            </a:r>
+          </a:p>
+        </p:txBody>
+      </p:sp>
+      <p:sp>
+        <p:nvSpPr>
+          <p:cNvPr id="5" name="Rectangle: Rounded Corners 4">
+            <a:extLst>
+              <a:ext uri="{FF2B5EF4-FFF2-40B4-BE49-F238E27FC236}">
+                <a16:creationId xmlns:a16="http://schemas.microsoft.com/office/drawing/2014/main" id="{54B1920A-B421-7EFC-66B0-2A4A582AB950}"/>
+              </a:ext>
+            </a:extLst>
+          </p:cNvPr>
+          <p:cNvSpPr/>
+          <p:nvPr/>
+        </p:nvSpPr>
+        <p:spPr>
+          <a:xfrm>
+            <a:off x="3543300" y="4495562"/>
+            <a:ext cx="3352800" cy="1146572"/>
+          </a:xfrm>
+          <a:prstGeom prst="roundRect">
+            <a:avLst/>
+          </a:prstGeom>
+          <a:solidFill>
+            <a:schemeClr val="bg2"/>
+          </a:solidFill>
+          <a:ln>
+            <a:solidFill>
+              <a:schemeClr val="tx1"/>
+            </a:solidFill>
+          </a:ln>
+        </p:spPr>
+        <p:style>
+          <a:lnRef idx="2">
+            <a:schemeClr val="accent1">
+              <a:shade val="15000"/>
+            </a:schemeClr>
+          </a:lnRef>
+          <a:fillRef idx="1">
+            <a:schemeClr val="accent1"/>
+          </a:fillRef>
+          <a:effectRef idx="0">
+            <a:schemeClr val="accent1"/>
+          </a:effectRef>
+          <a:fontRef idx="minor">
+            <a:schemeClr val="lt1"/>
+          </a:fontRef>
+        </p:style>
+        <p:txBody>
+          <a:bodyPr rtlCol="0" anchor="ctr"/>
+          <a:lstStyle/>
+          <a:p>
+            <a:pPr algn="ctr"/>
+            <a:r>
+              <a:rPr lang="en-US" sz="2000">
+                <a:solidFill>
+                  <a:schemeClr val="tx1"/>
+                </a:solidFill>
+                <a:latin typeface="Times New Roman" panose="02020603050405020304" pitchFamily="18" charset="0"/>
+                <a:cs typeface="Times New Roman" panose="02020603050405020304" pitchFamily="18" charset="0"/>
+              </a:rPr>
+              <a:t>Hệ thống đưa ra phản hồi cho người dùng</a:t>
+            </a:r>
+          </a:p>
+        </p:txBody>
+      </p:sp>
+      <p:sp>
+        <p:nvSpPr>
+          <p:cNvPr id="6" name="Oval 5">
+            <a:extLst>
+              <a:ext uri="{FF2B5EF4-FFF2-40B4-BE49-F238E27FC236}">
+                <a16:creationId xmlns:a16="http://schemas.microsoft.com/office/drawing/2014/main" id="{15D19990-4494-20B0-3C52-25E34B2C5171}"/>
+              </a:ext>
+            </a:extLst>
+          </p:cNvPr>
+          <p:cNvSpPr/>
+          <p:nvPr/>
+        </p:nvSpPr>
+        <p:spPr>
+          <a:xfrm>
+            <a:off x="533254" y="4649748"/>
+            <a:ext cx="1844040" cy="838200"/>
+          </a:xfrm>
+          <a:prstGeom prst="ellipse">
+            <a:avLst/>
+          </a:prstGeom>
+          <a:solidFill>
+            <a:schemeClr val="bg2"/>
+          </a:solidFill>
+          <a:ln>
+            <a:solidFill>
+              <a:schemeClr val="tx1"/>
+            </a:solidFill>
+          </a:ln>
+        </p:spPr>
+        <p:style>
+          <a:lnRef idx="2">
+            <a:schemeClr val="dk1"/>
+          </a:lnRef>
+          <a:fillRef idx="1">
+            <a:schemeClr val="lt1"/>
+          </a:fillRef>
+          <a:effectRef idx="0">
+            <a:schemeClr val="dk1"/>
+          </a:effectRef>
+          <a:fontRef idx="minor">
+            <a:schemeClr val="dk1"/>
+          </a:fontRef>
+        </p:style>
+        <p:txBody>
+          <a:bodyPr rtlCol="0" anchor="ctr"/>
+          <a:lstStyle/>
+          <a:p>
+            <a:pPr algn="ctr"/>
+            <a:r>
+              <a:rPr lang="en-US" sz="2000">
+                <a:solidFill>
+                  <a:schemeClr val="tx1"/>
+                </a:solidFill>
+                <a:latin typeface="Times New Roman" panose="02020603050405020304" pitchFamily="18" charset="0"/>
+                <a:cs typeface="Times New Roman" panose="02020603050405020304" pitchFamily="18" charset="0"/>
+              </a:rPr>
+              <a:t>Kết thúc</a:t>
+            </a:r>
+          </a:p>
+        </p:txBody>
+      </p:sp>
+      <p:cxnSp>
+        <p:nvCxnSpPr>
+          <p:cNvPr id="10" name="Straight Arrow Connector 9">
+            <a:extLst>
+              <a:ext uri="{FF2B5EF4-FFF2-40B4-BE49-F238E27FC236}">
+                <a16:creationId xmlns:a16="http://schemas.microsoft.com/office/drawing/2014/main" id="{EEB03F82-25A2-151D-7732-8C2D919E83A8}"/>
+              </a:ext>
+            </a:extLst>
+          </p:cNvPr>
+          <p:cNvCxnSpPr>
+            <a:cxnSpLocks/>
+            <a:stCxn id="80" idx="1"/>
+            <a:endCxn id="5" idx="3"/>
+          </p:cNvCxnSpPr>
+          <p:nvPr/>
+        </p:nvCxnSpPr>
+        <p:spPr>
+          <a:xfrm flipH="1" flipV="1">
+            <a:off x="6896100" y="5068848"/>
+            <a:ext cx="1363980" cy="1548"/>
+          </a:xfrm>
+          <a:prstGeom prst="straightConnector1">
+            <a:avLst/>
+          </a:prstGeom>
+          <a:ln>
+            <a:tailEnd type="triangle"/>
+          </a:ln>
+        </p:spPr>
+        <p:style>
+          <a:lnRef idx="2">
+            <a:schemeClr val="dk1"/>
+          </a:lnRef>
+          <a:fillRef idx="0">
+            <a:schemeClr val="dk1"/>
+          </a:fillRef>
+          <a:effectRef idx="1">
+            <a:schemeClr val="dk1"/>
+          </a:effectRef>
+          <a:fontRef idx="minor">
+            <a:schemeClr val="tx1"/>
+          </a:fontRef>
+        </p:style>
+      </p:cxnSp>
+      <p:sp>
+        <p:nvSpPr>
+          <p:cNvPr id="11" name="TextBox 10">
+            <a:extLst>
+              <a:ext uri="{FF2B5EF4-FFF2-40B4-BE49-F238E27FC236}">
+                <a16:creationId xmlns:a16="http://schemas.microsoft.com/office/drawing/2014/main" id="{83DA8988-AE88-6FB4-DE9E-72AC01A75957}"/>
+              </a:ext>
+            </a:extLst>
+          </p:cNvPr>
+          <p:cNvSpPr txBox="1"/>
+          <p:nvPr/>
+        </p:nvSpPr>
+        <p:spPr>
+          <a:xfrm>
+            <a:off x="6897135" y="1286470"/>
+            <a:ext cx="453970" cy="369332"/>
+          </a:xfrm>
+          <a:prstGeom prst="rect">
+            <a:avLst/>
+          </a:prstGeom>
+          <a:noFill/>
+        </p:spPr>
+        <p:txBody>
+          <a:bodyPr wrap="none" rtlCol="0">
+            <a:spAutoFit/>
+          </a:bodyPr>
+          <a:lstStyle/>
+          <a:p>
+            <a:r>
+              <a:rPr lang="en-US">
+                <a:latin typeface="Times New Roman" panose="02020603050405020304" pitchFamily="18" charset="0"/>
+                <a:cs typeface="Times New Roman" panose="02020603050405020304" pitchFamily="18" charset="0"/>
+              </a:rPr>
+              <a:t>(2)</a:t>
+            </a:r>
+          </a:p>
+        </p:txBody>
+      </p:sp>
+      <p:sp>
+        <p:nvSpPr>
+          <p:cNvPr id="12" name="TextBox 11">
+            <a:extLst>
+              <a:ext uri="{FF2B5EF4-FFF2-40B4-BE49-F238E27FC236}">
+                <a16:creationId xmlns:a16="http://schemas.microsoft.com/office/drawing/2014/main" id="{6BDF8B9F-A792-6678-A237-8A18D79AA52A}"/>
+              </a:ext>
+            </a:extLst>
+          </p:cNvPr>
+          <p:cNvSpPr txBox="1"/>
+          <p:nvPr/>
+        </p:nvSpPr>
+        <p:spPr>
+          <a:xfrm>
+            <a:off x="9951140" y="2228850"/>
+            <a:ext cx="453970" cy="369332"/>
+          </a:xfrm>
+          <a:prstGeom prst="rect">
+            <a:avLst/>
+          </a:prstGeom>
+          <a:noFill/>
+        </p:spPr>
+        <p:txBody>
+          <a:bodyPr wrap="none" rtlCol="0">
+            <a:spAutoFit/>
+          </a:bodyPr>
+          <a:lstStyle/>
+          <a:p>
+            <a:r>
+              <a:rPr lang="en-US">
+                <a:latin typeface="Times New Roman" panose="02020603050405020304" pitchFamily="18" charset="0"/>
+                <a:cs typeface="Times New Roman" panose="02020603050405020304" pitchFamily="18" charset="0"/>
+              </a:rPr>
+              <a:t>(3)</a:t>
+            </a:r>
+          </a:p>
+        </p:txBody>
+      </p:sp>
+      <p:sp>
+        <p:nvSpPr>
+          <p:cNvPr id="13" name="TextBox 12">
+            <a:extLst>
+              <a:ext uri="{FF2B5EF4-FFF2-40B4-BE49-F238E27FC236}">
+                <a16:creationId xmlns:a16="http://schemas.microsoft.com/office/drawing/2014/main" id="{0AF1B328-25AD-5F94-8892-B231A3582966}"/>
+              </a:ext>
+            </a:extLst>
+          </p:cNvPr>
+          <p:cNvSpPr txBox="1"/>
+          <p:nvPr/>
+        </p:nvSpPr>
+        <p:spPr>
+          <a:xfrm>
+            <a:off x="7806110" y="4699279"/>
+            <a:ext cx="453970" cy="369332"/>
+          </a:xfrm>
+          <a:prstGeom prst="rect">
+            <a:avLst/>
+          </a:prstGeom>
+          <a:noFill/>
+        </p:spPr>
+        <p:txBody>
+          <a:bodyPr wrap="none" rtlCol="0">
+            <a:spAutoFit/>
+          </a:bodyPr>
+          <a:lstStyle/>
+          <a:p>
+            <a:r>
+              <a:rPr lang="en-US">
+                <a:latin typeface="Times New Roman" panose="02020603050405020304" pitchFamily="18" charset="0"/>
+                <a:cs typeface="Times New Roman" panose="02020603050405020304" pitchFamily="18" charset="0"/>
+              </a:rPr>
+              <a:t>(5)</a:t>
+            </a:r>
+          </a:p>
+        </p:txBody>
+      </p:sp>
+      <p:sp>
+        <p:nvSpPr>
+          <p:cNvPr id="14" name="TextBox 13">
+            <a:extLst>
+              <a:ext uri="{FF2B5EF4-FFF2-40B4-BE49-F238E27FC236}">
+                <a16:creationId xmlns:a16="http://schemas.microsoft.com/office/drawing/2014/main" id="{D9D70832-FA92-8019-E202-E206CDAD1F8B}"/>
+              </a:ext>
+            </a:extLst>
+          </p:cNvPr>
+          <p:cNvSpPr txBox="1"/>
+          <p:nvPr/>
+        </p:nvSpPr>
+        <p:spPr>
+          <a:xfrm>
+            <a:off x="3089330" y="4699279"/>
+            <a:ext cx="453970" cy="369332"/>
+          </a:xfrm>
+          <a:prstGeom prst="rect">
+            <a:avLst/>
+          </a:prstGeom>
+          <a:noFill/>
+        </p:spPr>
+        <p:txBody>
+          <a:bodyPr wrap="none" rtlCol="0">
+            <a:spAutoFit/>
+          </a:bodyPr>
+          <a:lstStyle/>
+          <a:p>
+            <a:r>
+              <a:rPr lang="en-US">
+                <a:latin typeface="Times New Roman" panose="02020603050405020304" pitchFamily="18" charset="0"/>
+                <a:cs typeface="Times New Roman" panose="02020603050405020304" pitchFamily="18" charset="0"/>
+              </a:rPr>
+              <a:t>(6)</a:t>
+            </a:r>
+          </a:p>
+        </p:txBody>
+      </p:sp>
+      <p:sp>
+        <p:nvSpPr>
+          <p:cNvPr id="19" name="Rectangle: Rounded Corners 18">
+            <a:extLst>
+              <a:ext uri="{FF2B5EF4-FFF2-40B4-BE49-F238E27FC236}">
+                <a16:creationId xmlns:a16="http://schemas.microsoft.com/office/drawing/2014/main" id="{0401DB0B-6A26-2921-74FF-83D321420B3B}"/>
+              </a:ext>
+            </a:extLst>
+          </p:cNvPr>
+          <p:cNvSpPr/>
+          <p:nvPr/>
+        </p:nvSpPr>
+        <p:spPr>
+          <a:xfrm>
+            <a:off x="8260080" y="1082278"/>
+            <a:ext cx="3352800" cy="1146572"/>
+          </a:xfrm>
+          <a:prstGeom prst="roundRect">
+            <a:avLst/>
+          </a:prstGeom>
+          <a:solidFill>
+            <a:schemeClr val="bg2"/>
+          </a:solidFill>
+          <a:ln>
+            <a:solidFill>
+              <a:schemeClr val="tx1"/>
+            </a:solidFill>
+          </a:ln>
+        </p:spPr>
+        <p:style>
+          <a:lnRef idx="2">
+            <a:schemeClr val="accent1">
+              <a:shade val="15000"/>
+            </a:schemeClr>
+          </a:lnRef>
+          <a:fillRef idx="1">
+            <a:schemeClr val="accent1"/>
+          </a:fillRef>
+          <a:effectRef idx="0">
+            <a:schemeClr val="accent1"/>
+          </a:effectRef>
+          <a:fontRef idx="minor">
+            <a:schemeClr val="lt1"/>
+          </a:fontRef>
+        </p:style>
+        <p:txBody>
+          <a:bodyPr rtlCol="0" anchor="ctr"/>
+          <a:lstStyle/>
+          <a:p>
+            <a:pPr algn="ctr"/>
+            <a:r>
+              <a:rPr lang="en-US" sz="2000">
+                <a:solidFill>
+                  <a:schemeClr val="tx1"/>
+                </a:solidFill>
+                <a:latin typeface="Times New Roman" panose="02020603050405020304" pitchFamily="18" charset="0"/>
+                <a:cs typeface="Times New Roman" panose="02020603050405020304" pitchFamily="18" charset="0"/>
+              </a:rPr>
+              <a:t>Hệ thống chuyển đổi truy vấn từ âm thanh sang văn bản</a:t>
+            </a:r>
+          </a:p>
+        </p:txBody>
+      </p:sp>
+      <p:cxnSp>
+        <p:nvCxnSpPr>
+          <p:cNvPr id="32" name="Straight Arrow Connector 31">
+            <a:extLst>
+              <a:ext uri="{FF2B5EF4-FFF2-40B4-BE49-F238E27FC236}">
+                <a16:creationId xmlns:a16="http://schemas.microsoft.com/office/drawing/2014/main" id="{69CA16BF-CFB6-3255-EE70-71A1800C7386}"/>
+              </a:ext>
+            </a:extLst>
+          </p:cNvPr>
+          <p:cNvCxnSpPr>
+            <a:cxnSpLocks/>
+            <a:stCxn id="2" idx="6"/>
+            <a:endCxn id="3" idx="1"/>
+          </p:cNvCxnSpPr>
+          <p:nvPr/>
+        </p:nvCxnSpPr>
+        <p:spPr>
+          <a:xfrm>
+            <a:off x="2407340" y="1655564"/>
+            <a:ext cx="1135960" cy="0"/>
+          </a:xfrm>
+          <a:prstGeom prst="straightConnector1">
+            <a:avLst/>
+          </a:prstGeom>
+          <a:ln>
+            <a:tailEnd type="triangle"/>
+          </a:ln>
+        </p:spPr>
+        <p:style>
+          <a:lnRef idx="2">
+            <a:schemeClr val="dk1"/>
+          </a:lnRef>
+          <a:fillRef idx="0">
+            <a:schemeClr val="dk1"/>
+          </a:fillRef>
+          <a:effectRef idx="1">
+            <a:schemeClr val="dk1"/>
+          </a:effectRef>
+          <a:fontRef idx="minor">
+            <a:schemeClr val="tx1"/>
+          </a:fontRef>
+        </p:style>
+      </p:cxnSp>
+      <p:cxnSp>
+        <p:nvCxnSpPr>
+          <p:cNvPr id="37" name="Straight Arrow Connector 36">
+            <a:extLst>
+              <a:ext uri="{FF2B5EF4-FFF2-40B4-BE49-F238E27FC236}">
+                <a16:creationId xmlns:a16="http://schemas.microsoft.com/office/drawing/2014/main" id="{6F9A9B17-2BF5-D280-1052-147247FF1DC9}"/>
+              </a:ext>
+            </a:extLst>
+          </p:cNvPr>
+          <p:cNvCxnSpPr>
+            <a:cxnSpLocks/>
+            <a:stCxn id="3" idx="3"/>
+            <a:endCxn id="19" idx="1"/>
+          </p:cNvCxnSpPr>
+          <p:nvPr/>
+        </p:nvCxnSpPr>
+        <p:spPr>
+          <a:xfrm>
+            <a:off x="6896100" y="1655564"/>
+            <a:ext cx="1363980" cy="0"/>
+          </a:xfrm>
+          <a:prstGeom prst="straightConnector1">
+            <a:avLst/>
+          </a:prstGeom>
+          <a:ln>
+            <a:tailEnd type="triangle"/>
+          </a:ln>
+        </p:spPr>
+        <p:style>
+          <a:lnRef idx="2">
+            <a:schemeClr val="dk1"/>
+          </a:lnRef>
+          <a:fillRef idx="0">
+            <a:schemeClr val="dk1"/>
+          </a:fillRef>
+          <a:effectRef idx="1">
+            <a:schemeClr val="dk1"/>
+          </a:effectRef>
+          <a:fontRef idx="minor">
+            <a:schemeClr val="tx1"/>
+          </a:fontRef>
+        </p:style>
+      </p:cxnSp>
+      <p:cxnSp>
+        <p:nvCxnSpPr>
+          <p:cNvPr id="40" name="Straight Arrow Connector 39">
+            <a:extLst>
+              <a:ext uri="{FF2B5EF4-FFF2-40B4-BE49-F238E27FC236}">
+                <a16:creationId xmlns:a16="http://schemas.microsoft.com/office/drawing/2014/main" id="{D93911F4-290D-D63C-C1A1-C249AA350DC4}"/>
+              </a:ext>
+            </a:extLst>
+          </p:cNvPr>
+          <p:cNvCxnSpPr>
+            <a:cxnSpLocks/>
+            <a:stCxn id="19" idx="2"/>
+            <a:endCxn id="4" idx="0"/>
+          </p:cNvCxnSpPr>
+          <p:nvPr/>
+        </p:nvCxnSpPr>
+        <p:spPr>
+          <a:xfrm>
+            <a:off x="9936480" y="2228850"/>
+            <a:ext cx="0" cy="626864"/>
+          </a:xfrm>
+          <a:prstGeom prst="straightConnector1">
+            <a:avLst/>
+          </a:prstGeom>
+          <a:ln>
+            <a:tailEnd type="triangle"/>
+          </a:ln>
+        </p:spPr>
+        <p:style>
+          <a:lnRef idx="2">
+            <a:schemeClr val="dk1"/>
+          </a:lnRef>
+          <a:fillRef idx="0">
+            <a:schemeClr val="dk1"/>
+          </a:fillRef>
+          <a:effectRef idx="1">
+            <a:schemeClr val="dk1"/>
+          </a:effectRef>
+          <a:fontRef idx="minor">
+            <a:schemeClr val="tx1"/>
+          </a:fontRef>
+        </p:style>
+      </p:cxnSp>
+      <p:sp>
+        <p:nvSpPr>
+          <p:cNvPr id="43" name="TextBox 42">
+            <a:extLst>
+              <a:ext uri="{FF2B5EF4-FFF2-40B4-BE49-F238E27FC236}">
+                <a16:creationId xmlns:a16="http://schemas.microsoft.com/office/drawing/2014/main" id="{DDF65E27-7ED9-F013-8222-13C703D45D29}"/>
+              </a:ext>
+            </a:extLst>
+          </p:cNvPr>
+          <p:cNvSpPr txBox="1"/>
+          <p:nvPr/>
+        </p:nvSpPr>
+        <p:spPr>
+          <a:xfrm>
+            <a:off x="2408375" y="1286470"/>
+            <a:ext cx="453970" cy="369332"/>
+          </a:xfrm>
+          <a:prstGeom prst="rect">
+            <a:avLst/>
+          </a:prstGeom>
+          <a:noFill/>
+        </p:spPr>
+        <p:txBody>
+          <a:bodyPr wrap="none" rtlCol="0">
+            <a:spAutoFit/>
+          </a:bodyPr>
+          <a:lstStyle/>
+          <a:p>
+            <a:r>
+              <a:rPr lang="en-US">
+                <a:latin typeface="Times New Roman" panose="02020603050405020304" pitchFamily="18" charset="0"/>
+                <a:cs typeface="Times New Roman" panose="02020603050405020304" pitchFamily="18" charset="0"/>
+              </a:rPr>
+              <a:t>(1)</a:t>
+            </a:r>
+          </a:p>
+        </p:txBody>
+      </p:sp>
+      <p:cxnSp>
+        <p:nvCxnSpPr>
+          <p:cNvPr id="76" name="Straight Arrow Connector 75">
+            <a:extLst>
+              <a:ext uri="{FF2B5EF4-FFF2-40B4-BE49-F238E27FC236}">
+                <a16:creationId xmlns:a16="http://schemas.microsoft.com/office/drawing/2014/main" id="{B8461CB0-63ED-4A9D-1B90-E2949619306C}"/>
+              </a:ext>
+            </a:extLst>
+          </p:cNvPr>
+          <p:cNvCxnSpPr>
+            <a:stCxn id="5" idx="1"/>
+            <a:endCxn id="6" idx="6"/>
+          </p:cNvCxnSpPr>
+          <p:nvPr/>
+        </p:nvCxnSpPr>
+        <p:spPr>
+          <a:xfrm flipH="1">
+            <a:off x="2377294" y="5068848"/>
+            <a:ext cx="1166006" cy="0"/>
+          </a:xfrm>
+          <a:prstGeom prst="straightConnector1">
+            <a:avLst/>
+          </a:prstGeom>
+          <a:ln>
+            <a:tailEnd type="triangle"/>
+          </a:ln>
+        </p:spPr>
+        <p:style>
+          <a:lnRef idx="2">
+            <a:schemeClr val="dk1"/>
+          </a:lnRef>
+          <a:fillRef idx="0">
+            <a:schemeClr val="dk1"/>
+          </a:fillRef>
+          <a:effectRef idx="1">
+            <a:schemeClr val="dk1"/>
+          </a:effectRef>
+          <a:fontRef idx="minor">
+            <a:schemeClr val="tx1"/>
+          </a:fontRef>
+        </p:style>
+      </p:cxnSp>
+      <p:sp>
+        <p:nvSpPr>
+          <p:cNvPr id="80" name="Rectangle: Rounded Corners 79">
+            <a:extLst>
+              <a:ext uri="{FF2B5EF4-FFF2-40B4-BE49-F238E27FC236}">
+                <a16:creationId xmlns:a16="http://schemas.microsoft.com/office/drawing/2014/main" id="{BCC66C11-250E-00AA-715E-FE85F08CD21D}"/>
+              </a:ext>
+            </a:extLst>
+          </p:cNvPr>
+          <p:cNvSpPr/>
+          <p:nvPr/>
+        </p:nvSpPr>
+        <p:spPr>
+          <a:xfrm>
+            <a:off x="8260080" y="4497110"/>
+            <a:ext cx="3352800" cy="1146572"/>
+          </a:xfrm>
+          <a:prstGeom prst="roundRect">
+            <a:avLst/>
+          </a:prstGeom>
+          <a:solidFill>
+            <a:schemeClr val="bg2"/>
+          </a:solidFill>
+          <a:ln>
+            <a:solidFill>
+              <a:schemeClr val="tx1"/>
+            </a:solidFill>
+          </a:ln>
+        </p:spPr>
+        <p:style>
+          <a:lnRef idx="2">
+            <a:schemeClr val="accent1">
+              <a:shade val="15000"/>
+            </a:schemeClr>
+          </a:lnRef>
+          <a:fillRef idx="1">
+            <a:schemeClr val="accent1"/>
+          </a:fillRef>
+          <a:effectRef idx="0">
+            <a:schemeClr val="accent1"/>
+          </a:effectRef>
+          <a:fontRef idx="minor">
+            <a:schemeClr val="lt1"/>
+          </a:fontRef>
+        </p:style>
+        <p:txBody>
+          <a:bodyPr rtlCol="0" anchor="ctr"/>
+          <a:lstStyle/>
+          <a:p>
+            <a:pPr algn="ctr"/>
+            <a:r>
+              <a:rPr lang="en-US" sz="2000">
+                <a:solidFill>
+                  <a:schemeClr val="tx1"/>
+                </a:solidFill>
+                <a:latin typeface="Times New Roman" panose="02020603050405020304" pitchFamily="18" charset="0"/>
+                <a:cs typeface="Times New Roman" panose="02020603050405020304" pitchFamily="18" charset="0"/>
+              </a:rPr>
+              <a:t>Hệ thống chuyển đổi phản hồi sang dạng âm thanh</a:t>
+            </a:r>
+          </a:p>
+        </p:txBody>
+      </p:sp>
+      <p:cxnSp>
+        <p:nvCxnSpPr>
+          <p:cNvPr id="82" name="Straight Arrow Connector 81">
+            <a:extLst>
+              <a:ext uri="{FF2B5EF4-FFF2-40B4-BE49-F238E27FC236}">
+                <a16:creationId xmlns:a16="http://schemas.microsoft.com/office/drawing/2014/main" id="{D38BA67F-B673-C314-25C9-C505F698BF19}"/>
+              </a:ext>
+            </a:extLst>
+          </p:cNvPr>
+          <p:cNvCxnSpPr>
+            <a:cxnSpLocks/>
+            <a:stCxn id="4" idx="2"/>
+            <a:endCxn id="80" idx="0"/>
+          </p:cNvCxnSpPr>
+          <p:nvPr/>
+        </p:nvCxnSpPr>
+        <p:spPr>
+          <a:xfrm>
+            <a:off x="9936480" y="4002286"/>
+            <a:ext cx="0" cy="494824"/>
+          </a:xfrm>
+          <a:prstGeom prst="straightConnector1">
+            <a:avLst/>
+          </a:prstGeom>
+          <a:ln>
+            <a:tailEnd type="triangle"/>
+          </a:ln>
+        </p:spPr>
+        <p:style>
+          <a:lnRef idx="2">
+            <a:schemeClr val="dk1"/>
+          </a:lnRef>
+          <a:fillRef idx="0">
+            <a:schemeClr val="dk1"/>
+          </a:fillRef>
+          <a:effectRef idx="1">
+            <a:schemeClr val="dk1"/>
+          </a:effectRef>
+          <a:fontRef idx="minor">
+            <a:schemeClr val="tx1"/>
+          </a:fontRef>
+        </p:style>
+      </p:cxnSp>
+      <p:sp>
+        <p:nvSpPr>
+          <p:cNvPr id="85" name="TextBox 84">
+            <a:extLst>
+              <a:ext uri="{FF2B5EF4-FFF2-40B4-BE49-F238E27FC236}">
+                <a16:creationId xmlns:a16="http://schemas.microsoft.com/office/drawing/2014/main" id="{693B2600-13EF-9684-55D5-F2EC963AFB97}"/>
+              </a:ext>
+            </a:extLst>
+          </p:cNvPr>
+          <p:cNvSpPr txBox="1"/>
+          <p:nvPr/>
+        </p:nvSpPr>
+        <p:spPr>
+          <a:xfrm>
+            <a:off x="9951140" y="4002286"/>
+            <a:ext cx="453970" cy="369332"/>
+          </a:xfrm>
+          <a:prstGeom prst="rect">
+            <a:avLst/>
+          </a:prstGeom>
+          <a:noFill/>
+        </p:spPr>
+        <p:txBody>
+          <a:bodyPr wrap="none" rtlCol="0">
+            <a:spAutoFit/>
+          </a:bodyPr>
+          <a:lstStyle/>
+          <a:p>
+            <a:r>
+              <a:rPr lang="en-US">
+                <a:latin typeface="Times New Roman" panose="02020603050405020304" pitchFamily="18" charset="0"/>
+                <a:cs typeface="Times New Roman" panose="02020603050405020304" pitchFamily="18" charset="0"/>
+              </a:rPr>
+              <a:t>(4)</a:t>
+            </a:r>
+          </a:p>
+        </p:txBody>
+      </p:sp>
+    </p:spTree>
+    <p:extLst>
+      <p:ext uri="{BB962C8B-B14F-4D97-AF65-F5344CB8AC3E}">
+        <p14:creationId xmlns:p14="http://schemas.microsoft.com/office/powerpoint/2010/main" val="354594061"/>
+      </p:ext>
+    </p:extLst>
+  </p:cSld>
+  <p:clrMapOvr>
+    <a:masterClrMapping/>
+  </p:clrMapOvr>
+</p:sld>
+</file>
+
+<file path=ppt/slides/slide31.xml><?xml version="1.0" encoding="utf-8"?>
 <p:sld xmlns:a="http://schemas.openxmlformats.org/drawingml/2006/main" xmlns:r="http://schemas.openxmlformats.org/officeDocument/2006/relationships" xmlns:p="http://schemas.openxmlformats.org/presentationml/2006/main">
   <p:cSld>
     <p:spTree>
@@ -32445,7 +35319,7 @@
 </p:sld>
 </file>
 
-<file path=ppt/slides/slide31.xml><?xml version="1.0" encoding="utf-8"?>
+<file path=ppt/slides/slide32.xml><?xml version="1.0" encoding="utf-8"?>
 <p:sld xmlns:a="http://schemas.openxmlformats.org/drawingml/2006/main" xmlns:r="http://schemas.openxmlformats.org/officeDocument/2006/relationships" xmlns:p="http://schemas.openxmlformats.org/presentationml/2006/main">
   <p:cSld>
     <p:spTree>
@@ -33646,553 +36520,6 @@
     <p:extLst>
       <p:ext uri="{BB962C8B-B14F-4D97-AF65-F5344CB8AC3E}">
         <p14:creationId xmlns:p14="http://schemas.microsoft.com/office/powerpoint/2010/main" val="484954333"/>
-      </p:ext>
-    </p:extLst>
-  </p:cSld>
-  <p:clrMapOvr>
-    <a:masterClrMapping/>
-  </p:clrMapOvr>
-</p:sld>
-</file>
-
-<file path=ppt/slides/slide32.xml><?xml version="1.0" encoding="utf-8"?>
-<p:sld xmlns:a="http://schemas.openxmlformats.org/drawingml/2006/main" xmlns:r="http://schemas.openxmlformats.org/officeDocument/2006/relationships" xmlns:p="http://schemas.openxmlformats.org/presentationml/2006/main">
-  <p:cSld>
-    <p:spTree>
-      <p:nvGrpSpPr>
-        <p:cNvPr id="1" name=""/>
-        <p:cNvGrpSpPr/>
-        <p:nvPr/>
-      </p:nvGrpSpPr>
-      <p:grpSpPr>
-        <a:xfrm>
-          <a:off x="0" y="0"/>
-          <a:ext cx="0" cy="0"/>
-          <a:chOff x="0" y="0"/>
-          <a:chExt cx="0" cy="0"/>
-        </a:xfrm>
-      </p:grpSpPr>
-      <p:sp>
-        <p:nvSpPr>
-          <p:cNvPr id="2" name="Oval 1">
-            <a:extLst>
-              <a:ext uri="{FF2B5EF4-FFF2-40B4-BE49-F238E27FC236}">
-                <a16:creationId xmlns:a16="http://schemas.microsoft.com/office/drawing/2014/main" id="{71B2C4F9-1C0F-1CF9-481D-E75171FFEB29}"/>
-              </a:ext>
-            </a:extLst>
-          </p:cNvPr>
-          <p:cNvSpPr/>
-          <p:nvPr/>
-        </p:nvSpPr>
-        <p:spPr>
-          <a:xfrm>
-            <a:off x="1327694" y="1014002"/>
-            <a:ext cx="1844040" cy="777240"/>
-          </a:xfrm>
-          <a:prstGeom prst="ellipse">
-            <a:avLst/>
-          </a:prstGeom>
-          <a:solidFill>
-            <a:schemeClr val="bg2"/>
-          </a:solidFill>
-          <a:ln>
-            <a:solidFill>
-              <a:schemeClr val="tx1"/>
-            </a:solidFill>
-          </a:ln>
-        </p:spPr>
-        <p:style>
-          <a:lnRef idx="2">
-            <a:schemeClr val="dk1"/>
-          </a:lnRef>
-          <a:fillRef idx="1">
-            <a:schemeClr val="lt1"/>
-          </a:fillRef>
-          <a:effectRef idx="0">
-            <a:schemeClr val="dk1"/>
-          </a:effectRef>
-          <a:fontRef idx="minor">
-            <a:schemeClr val="dk1"/>
-          </a:fontRef>
-        </p:style>
-        <p:txBody>
-          <a:bodyPr rtlCol="0" anchor="ctr"/>
-          <a:lstStyle/>
-          <a:p>
-            <a:pPr algn="ctr"/>
-            <a:r>
-              <a:rPr lang="en-US" sz="2400">
-                <a:solidFill>
-                  <a:schemeClr val="tx1"/>
-                </a:solidFill>
-                <a:latin typeface="Times New Roman" panose="02020603050405020304" pitchFamily="18" charset="0"/>
-                <a:cs typeface="Times New Roman" panose="02020603050405020304" pitchFamily="18" charset="0"/>
-              </a:rPr>
-              <a:t>Bắt đầu</a:t>
-            </a:r>
-          </a:p>
-        </p:txBody>
-      </p:sp>
-      <p:sp>
-        <p:nvSpPr>
-          <p:cNvPr id="3" name="Rectangle: Rounded Corners 2">
-            <a:extLst>
-              <a:ext uri="{FF2B5EF4-FFF2-40B4-BE49-F238E27FC236}">
-                <a16:creationId xmlns:a16="http://schemas.microsoft.com/office/drawing/2014/main" id="{E9423A58-5224-8B0E-F5F4-8BEB42C3EAEF}"/>
-              </a:ext>
-            </a:extLst>
-          </p:cNvPr>
-          <p:cNvSpPr/>
-          <p:nvPr/>
-        </p:nvSpPr>
-        <p:spPr>
-          <a:xfrm>
-            <a:off x="2794000" y="2450434"/>
-            <a:ext cx="3302000" cy="924618"/>
-          </a:xfrm>
-          <a:prstGeom prst="roundRect">
-            <a:avLst/>
-          </a:prstGeom>
-          <a:solidFill>
-            <a:schemeClr val="bg2"/>
-          </a:solidFill>
-          <a:ln>
-            <a:solidFill>
-              <a:schemeClr val="tx1"/>
-            </a:solidFill>
-          </a:ln>
-        </p:spPr>
-        <p:style>
-          <a:lnRef idx="2">
-            <a:schemeClr val="accent1">
-              <a:shade val="15000"/>
-            </a:schemeClr>
-          </a:lnRef>
-          <a:fillRef idx="1">
-            <a:schemeClr val="accent1"/>
-          </a:fillRef>
-          <a:effectRef idx="0">
-            <a:schemeClr val="accent1"/>
-          </a:effectRef>
-          <a:fontRef idx="minor">
-            <a:schemeClr val="lt1"/>
-          </a:fontRef>
-        </p:style>
-        <p:txBody>
-          <a:bodyPr rtlCol="0" anchor="ctr"/>
-          <a:lstStyle/>
-          <a:p>
-            <a:pPr algn="ctr"/>
-            <a:r>
-              <a:rPr lang="en-US" sz="2000">
-                <a:solidFill>
-                  <a:schemeClr val="tx1"/>
-                </a:solidFill>
-                <a:latin typeface="Times New Roman" panose="02020603050405020304" pitchFamily="18" charset="0"/>
-                <a:cs typeface="Times New Roman" panose="02020603050405020304" pitchFamily="18" charset="0"/>
-              </a:rPr>
-              <a:t>Người dùng thực hiện</a:t>
-            </a:r>
-          </a:p>
-          <a:p>
-            <a:pPr algn="ctr"/>
-            <a:r>
-              <a:rPr lang="en-US" sz="2000">
-                <a:solidFill>
-                  <a:schemeClr val="tx1"/>
-                </a:solidFill>
-                <a:latin typeface="Times New Roman" panose="02020603050405020304" pitchFamily="18" charset="0"/>
-                <a:cs typeface="Times New Roman" panose="02020603050405020304" pitchFamily="18" charset="0"/>
-              </a:rPr>
-              <a:t>một hành vi đánh giá</a:t>
-            </a:r>
-          </a:p>
-        </p:txBody>
-      </p:sp>
-      <p:sp>
-        <p:nvSpPr>
-          <p:cNvPr id="4" name="Rectangle: Rounded Corners 3">
-            <a:extLst>
-              <a:ext uri="{FF2B5EF4-FFF2-40B4-BE49-F238E27FC236}">
-                <a16:creationId xmlns:a16="http://schemas.microsoft.com/office/drawing/2014/main" id="{62133B71-7D08-E4AD-3AB4-C3CF9EF83B1A}"/>
-              </a:ext>
-            </a:extLst>
-          </p:cNvPr>
-          <p:cNvSpPr/>
-          <p:nvPr/>
-        </p:nvSpPr>
-        <p:spPr>
-          <a:xfrm>
-            <a:off x="6096000" y="3710882"/>
-            <a:ext cx="3302000" cy="924618"/>
-          </a:xfrm>
-          <a:prstGeom prst="roundRect">
-            <a:avLst/>
-          </a:prstGeom>
-          <a:solidFill>
-            <a:schemeClr val="bg2"/>
-          </a:solidFill>
-          <a:ln>
-            <a:solidFill>
-              <a:schemeClr val="tx1"/>
-            </a:solidFill>
-          </a:ln>
-        </p:spPr>
-        <p:style>
-          <a:lnRef idx="2">
-            <a:schemeClr val="accent1">
-              <a:shade val="15000"/>
-            </a:schemeClr>
-          </a:lnRef>
-          <a:fillRef idx="1">
-            <a:schemeClr val="accent1"/>
-          </a:fillRef>
-          <a:effectRef idx="0">
-            <a:schemeClr val="accent1"/>
-          </a:effectRef>
-          <a:fontRef idx="minor">
-            <a:schemeClr val="lt1"/>
-          </a:fontRef>
-        </p:style>
-        <p:txBody>
-          <a:bodyPr rtlCol="0" anchor="ctr"/>
-          <a:lstStyle/>
-          <a:p>
-            <a:pPr algn="ctr"/>
-            <a:r>
-              <a:rPr lang="en-US" sz="2000">
-                <a:solidFill>
-                  <a:schemeClr val="tx1"/>
-                </a:solidFill>
-                <a:latin typeface="Times New Roman" panose="02020603050405020304" pitchFamily="18" charset="0"/>
-                <a:cs typeface="Times New Roman" panose="02020603050405020304" pitchFamily="18" charset="0"/>
-              </a:rPr>
-              <a:t>Hệ thống cập nhật hành vi</a:t>
-            </a:r>
-          </a:p>
-          <a:p>
-            <a:pPr algn="ctr"/>
-            <a:r>
-              <a:rPr lang="en-US" sz="2000">
-                <a:solidFill>
-                  <a:schemeClr val="tx1"/>
-                </a:solidFill>
-                <a:latin typeface="Times New Roman" panose="02020603050405020304" pitchFamily="18" charset="0"/>
-                <a:cs typeface="Times New Roman" panose="02020603050405020304" pitchFamily="18" charset="0"/>
-              </a:rPr>
-              <a:t>của người dùng vào CSDL</a:t>
-            </a:r>
-          </a:p>
-        </p:txBody>
-      </p:sp>
-      <p:sp>
-        <p:nvSpPr>
-          <p:cNvPr id="6" name="Oval 5">
-            <a:extLst>
-              <a:ext uri="{FF2B5EF4-FFF2-40B4-BE49-F238E27FC236}">
-                <a16:creationId xmlns:a16="http://schemas.microsoft.com/office/drawing/2014/main" id="{41E78B99-0B43-8090-58DE-2DC7F0DAF15C}"/>
-              </a:ext>
-            </a:extLst>
-          </p:cNvPr>
-          <p:cNvSpPr/>
-          <p:nvPr/>
-        </p:nvSpPr>
-        <p:spPr>
-          <a:xfrm>
-            <a:off x="9042400" y="4969096"/>
-            <a:ext cx="1844040" cy="777240"/>
-          </a:xfrm>
-          <a:prstGeom prst="ellipse">
-            <a:avLst/>
-          </a:prstGeom>
-          <a:solidFill>
-            <a:schemeClr val="bg2"/>
-          </a:solidFill>
-          <a:ln>
-            <a:solidFill>
-              <a:schemeClr val="tx1"/>
-            </a:solidFill>
-          </a:ln>
-        </p:spPr>
-        <p:style>
-          <a:lnRef idx="2">
-            <a:schemeClr val="dk1"/>
-          </a:lnRef>
-          <a:fillRef idx="1">
-            <a:schemeClr val="lt1"/>
-          </a:fillRef>
-          <a:effectRef idx="0">
-            <a:schemeClr val="dk1"/>
-          </a:effectRef>
-          <a:fontRef idx="minor">
-            <a:schemeClr val="dk1"/>
-          </a:fontRef>
-        </p:style>
-        <p:txBody>
-          <a:bodyPr rtlCol="0" anchor="ctr"/>
-          <a:lstStyle/>
-          <a:p>
-            <a:pPr algn="ctr"/>
-            <a:r>
-              <a:rPr lang="en-US" sz="2400">
-                <a:solidFill>
-                  <a:schemeClr val="tx1"/>
-                </a:solidFill>
-                <a:latin typeface="Times New Roman" panose="02020603050405020304" pitchFamily="18" charset="0"/>
-                <a:cs typeface="Times New Roman" panose="02020603050405020304" pitchFamily="18" charset="0"/>
-              </a:rPr>
-              <a:t>Kết thúc</a:t>
-            </a:r>
-          </a:p>
-        </p:txBody>
-      </p:sp>
-      <p:sp>
-        <p:nvSpPr>
-          <p:cNvPr id="18" name="TextBox 17">
-            <a:extLst>
-              <a:ext uri="{FF2B5EF4-FFF2-40B4-BE49-F238E27FC236}">
-                <a16:creationId xmlns:a16="http://schemas.microsoft.com/office/drawing/2014/main" id="{350D8F2E-A5EA-2C12-2109-C38A249237E7}"/>
-              </a:ext>
-            </a:extLst>
-          </p:cNvPr>
-          <p:cNvSpPr txBox="1"/>
-          <p:nvPr/>
-        </p:nvSpPr>
-        <p:spPr>
-          <a:xfrm>
-            <a:off x="3171734" y="1002512"/>
-            <a:ext cx="482824" cy="400110"/>
-          </a:xfrm>
-          <a:prstGeom prst="rect">
-            <a:avLst/>
-          </a:prstGeom>
-          <a:noFill/>
-        </p:spPr>
-        <p:txBody>
-          <a:bodyPr wrap="none" rtlCol="0">
-            <a:spAutoFit/>
-          </a:bodyPr>
-          <a:lstStyle/>
-          <a:p>
-            <a:r>
-              <a:rPr lang="en-US" sz="2000">
-                <a:latin typeface="Times New Roman" panose="02020603050405020304" pitchFamily="18" charset="0"/>
-                <a:cs typeface="Times New Roman" panose="02020603050405020304" pitchFamily="18" charset="0"/>
-              </a:rPr>
-              <a:t>(1)</a:t>
-            </a:r>
-          </a:p>
-        </p:txBody>
-      </p:sp>
-      <p:sp>
-        <p:nvSpPr>
-          <p:cNvPr id="19" name="TextBox 18">
-            <a:extLst>
-              <a:ext uri="{FF2B5EF4-FFF2-40B4-BE49-F238E27FC236}">
-                <a16:creationId xmlns:a16="http://schemas.microsoft.com/office/drawing/2014/main" id="{A541460D-3078-ACE9-FC0C-77F71E274E2D}"/>
-              </a:ext>
-            </a:extLst>
-          </p:cNvPr>
-          <p:cNvSpPr txBox="1"/>
-          <p:nvPr/>
-        </p:nvSpPr>
-        <p:spPr>
-          <a:xfrm>
-            <a:off x="6096000" y="2512633"/>
-            <a:ext cx="482824" cy="400110"/>
-          </a:xfrm>
-          <a:prstGeom prst="rect">
-            <a:avLst/>
-          </a:prstGeom>
-          <a:noFill/>
-        </p:spPr>
-        <p:txBody>
-          <a:bodyPr wrap="none" rtlCol="0">
-            <a:spAutoFit/>
-          </a:bodyPr>
-          <a:lstStyle/>
-          <a:p>
-            <a:r>
-              <a:rPr lang="en-US" sz="2000">
-                <a:latin typeface="Times New Roman" panose="02020603050405020304" pitchFamily="18" charset="0"/>
-                <a:cs typeface="Times New Roman" panose="02020603050405020304" pitchFamily="18" charset="0"/>
-              </a:rPr>
-              <a:t>(2)</a:t>
-            </a:r>
-          </a:p>
-        </p:txBody>
-      </p:sp>
-      <p:sp>
-        <p:nvSpPr>
-          <p:cNvPr id="20" name="TextBox 19">
-            <a:extLst>
-              <a:ext uri="{FF2B5EF4-FFF2-40B4-BE49-F238E27FC236}">
-                <a16:creationId xmlns:a16="http://schemas.microsoft.com/office/drawing/2014/main" id="{1EF642F4-A632-F076-ECA9-894516DA9C81}"/>
-              </a:ext>
-            </a:extLst>
-          </p:cNvPr>
-          <p:cNvSpPr txBox="1"/>
-          <p:nvPr/>
-        </p:nvSpPr>
-        <p:spPr>
-          <a:xfrm>
-            <a:off x="9398000" y="3773081"/>
-            <a:ext cx="482824" cy="400110"/>
-          </a:xfrm>
-          <a:prstGeom prst="rect">
-            <a:avLst/>
-          </a:prstGeom>
-          <a:noFill/>
-        </p:spPr>
-        <p:txBody>
-          <a:bodyPr wrap="none" rtlCol="0">
-            <a:spAutoFit/>
-          </a:bodyPr>
-          <a:lstStyle/>
-          <a:p>
-            <a:r>
-              <a:rPr lang="en-US" sz="2000">
-                <a:latin typeface="Times New Roman" panose="02020603050405020304" pitchFamily="18" charset="0"/>
-                <a:cs typeface="Times New Roman" panose="02020603050405020304" pitchFamily="18" charset="0"/>
-              </a:rPr>
-              <a:t>(3)</a:t>
-            </a:r>
-          </a:p>
-        </p:txBody>
-      </p:sp>
-      <p:cxnSp>
-        <p:nvCxnSpPr>
-          <p:cNvPr id="29" name="Connector: Elbow 28">
-            <a:extLst>
-              <a:ext uri="{FF2B5EF4-FFF2-40B4-BE49-F238E27FC236}">
-                <a16:creationId xmlns:a16="http://schemas.microsoft.com/office/drawing/2014/main" id="{F4D02D3B-11BE-D88E-3232-2AF9C20A721B}"/>
-              </a:ext>
-            </a:extLst>
-          </p:cNvPr>
-          <p:cNvCxnSpPr>
-            <a:cxnSpLocks/>
-            <a:stCxn id="2" idx="6"/>
-            <a:endCxn id="3" idx="0"/>
-          </p:cNvCxnSpPr>
-          <p:nvPr/>
-        </p:nvCxnSpPr>
-        <p:spPr>
-          <a:xfrm>
-            <a:off x="3171734" y="1402622"/>
-            <a:ext cx="1273266" cy="1047812"/>
-          </a:xfrm>
-          <a:prstGeom prst="bentConnector2">
-            <a:avLst/>
-          </a:prstGeom>
-          <a:ln>
-            <a:tailEnd type="triangle"/>
-          </a:ln>
-        </p:spPr>
-        <p:style>
-          <a:lnRef idx="2">
-            <a:schemeClr val="dk1"/>
-          </a:lnRef>
-          <a:fillRef idx="0">
-            <a:schemeClr val="dk1"/>
-          </a:fillRef>
-          <a:effectRef idx="1">
-            <a:schemeClr val="dk1"/>
-          </a:effectRef>
-          <a:fontRef idx="minor">
-            <a:schemeClr val="tx1"/>
-          </a:fontRef>
-        </p:style>
-      </p:cxnSp>
-      <p:cxnSp>
-        <p:nvCxnSpPr>
-          <p:cNvPr id="31" name="Connector: Elbow 30">
-            <a:extLst>
-              <a:ext uri="{FF2B5EF4-FFF2-40B4-BE49-F238E27FC236}">
-                <a16:creationId xmlns:a16="http://schemas.microsoft.com/office/drawing/2014/main" id="{DBC04417-11EE-9F9F-5B12-FA8212176C2A}"/>
-              </a:ext>
-            </a:extLst>
-          </p:cNvPr>
-          <p:cNvCxnSpPr>
-            <a:cxnSpLocks/>
-            <a:stCxn id="3" idx="3"/>
-            <a:endCxn id="4" idx="0"/>
-          </p:cNvCxnSpPr>
-          <p:nvPr/>
-        </p:nvCxnSpPr>
-        <p:spPr>
-          <a:xfrm>
-            <a:off x="6096000" y="2912743"/>
-            <a:ext cx="1651000" cy="798139"/>
-          </a:xfrm>
-          <a:prstGeom prst="bentConnector2">
-            <a:avLst/>
-          </a:prstGeom>
-          <a:ln>
-            <a:tailEnd type="triangle"/>
-          </a:ln>
-        </p:spPr>
-        <p:style>
-          <a:lnRef idx="2">
-            <a:schemeClr val="dk1"/>
-          </a:lnRef>
-          <a:fillRef idx="0">
-            <a:schemeClr val="dk1"/>
-          </a:fillRef>
-          <a:effectRef idx="1">
-            <a:schemeClr val="dk1"/>
-          </a:effectRef>
-          <a:fontRef idx="minor">
-            <a:schemeClr val="tx1"/>
-          </a:fontRef>
-        </p:style>
-      </p:cxnSp>
-      <p:cxnSp>
-        <p:nvCxnSpPr>
-          <p:cNvPr id="33" name="Connector: Elbow 32">
-            <a:extLst>
-              <a:ext uri="{FF2B5EF4-FFF2-40B4-BE49-F238E27FC236}">
-                <a16:creationId xmlns:a16="http://schemas.microsoft.com/office/drawing/2014/main" id="{EDF04D07-B273-B93A-F8F4-5475F0D810F2}"/>
-              </a:ext>
-            </a:extLst>
-          </p:cNvPr>
-          <p:cNvCxnSpPr>
-            <a:cxnSpLocks/>
-            <a:stCxn id="4" idx="3"/>
-            <a:endCxn id="6" idx="0"/>
-          </p:cNvCxnSpPr>
-          <p:nvPr/>
-        </p:nvCxnSpPr>
-        <p:spPr>
-          <a:xfrm>
-            <a:off x="9398000" y="4173191"/>
-            <a:ext cx="566420" cy="795905"/>
-          </a:xfrm>
-          <a:prstGeom prst="bentConnector2">
-            <a:avLst/>
-          </a:prstGeom>
-          <a:ln>
-            <a:tailEnd type="triangle"/>
-          </a:ln>
-        </p:spPr>
-        <p:style>
-          <a:lnRef idx="2">
-            <a:schemeClr val="dk1"/>
-          </a:lnRef>
-          <a:fillRef idx="0">
-            <a:schemeClr val="dk1"/>
-          </a:fillRef>
-          <a:effectRef idx="1">
-            <a:schemeClr val="dk1"/>
-          </a:effectRef>
-          <a:fontRef idx="minor">
-            <a:schemeClr val="tx1"/>
-          </a:fontRef>
-        </p:style>
-      </p:cxnSp>
-    </p:spTree>
-    <p:extLst>
-      <p:ext uri="{BB962C8B-B14F-4D97-AF65-F5344CB8AC3E}">
-        <p14:creationId xmlns:p14="http://schemas.microsoft.com/office/powerpoint/2010/main" val="285086992"/>
       </p:ext>
     </p:extLst>
   </p:cSld>
@@ -34221,10 +36548,10 @@
       </p:grpSpPr>
       <p:sp>
         <p:nvSpPr>
-          <p:cNvPr id="2" name="Rectangle: Rounded Corners 1">
-            <a:extLst>
-              <a:ext uri="{FF2B5EF4-FFF2-40B4-BE49-F238E27FC236}">
-                <a16:creationId xmlns:a16="http://schemas.microsoft.com/office/drawing/2014/main" id="{E4ADF9A4-DE0B-8F8B-4DF4-46018C8FE330}"/>
+          <p:cNvPr id="2" name="Oval 1">
+            <a:extLst>
+              <a:ext uri="{FF2B5EF4-FFF2-40B4-BE49-F238E27FC236}">
+                <a16:creationId xmlns:a16="http://schemas.microsoft.com/office/drawing/2014/main" id="{71B2C4F9-1C0F-1CF9-481D-E75171FFEB29}"/>
               </a:ext>
             </a:extLst>
           </p:cNvPr>
@@ -34233,8 +36560,69 @@
         </p:nvSpPr>
         <p:spPr>
           <a:xfrm>
-            <a:off x="4957151" y="1317577"/>
-            <a:ext cx="2277687" cy="465513"/>
+            <a:off x="1327694" y="1014002"/>
+            <a:ext cx="1844040" cy="777240"/>
+          </a:xfrm>
+          <a:prstGeom prst="ellipse">
+            <a:avLst/>
+          </a:prstGeom>
+          <a:solidFill>
+            <a:schemeClr val="bg2"/>
+          </a:solidFill>
+          <a:ln>
+            <a:solidFill>
+              <a:schemeClr val="tx1"/>
+            </a:solidFill>
+          </a:ln>
+        </p:spPr>
+        <p:style>
+          <a:lnRef idx="2">
+            <a:schemeClr val="dk1"/>
+          </a:lnRef>
+          <a:fillRef idx="1">
+            <a:schemeClr val="lt1"/>
+          </a:fillRef>
+          <a:effectRef idx="0">
+            <a:schemeClr val="dk1"/>
+          </a:effectRef>
+          <a:fontRef idx="minor">
+            <a:schemeClr val="dk1"/>
+          </a:fontRef>
+        </p:style>
+        <p:txBody>
+          <a:bodyPr rtlCol="0" anchor="ctr"/>
+          <a:lstStyle/>
+          <a:p>
+            <a:pPr algn="ctr"/>
+            <a:r>
+              <a:rPr lang="en-US" sz="2400">
+                <a:solidFill>
+                  <a:schemeClr val="tx1"/>
+                </a:solidFill>
+                <a:latin typeface="Times New Roman" panose="02020603050405020304" pitchFamily="18" charset="0"/>
+                <a:cs typeface="Times New Roman" panose="02020603050405020304" pitchFamily="18" charset="0"/>
+              </a:rPr>
+              <a:t>Bắt đầu</a:t>
+            </a:r>
+          </a:p>
+        </p:txBody>
+      </p:sp>
+      <p:sp>
+        <p:nvSpPr>
+          <p:cNvPr id="3" name="Rectangle: Rounded Corners 2">
+            <a:extLst>
+              <a:ext uri="{FF2B5EF4-FFF2-40B4-BE49-F238E27FC236}">
+                <a16:creationId xmlns:a16="http://schemas.microsoft.com/office/drawing/2014/main" id="{E9423A58-5224-8B0E-F5F4-8BEB42C3EAEF}"/>
+              </a:ext>
+            </a:extLst>
+          </p:cNvPr>
+          <p:cNvSpPr/>
+          <p:nvPr/>
+        </p:nvSpPr>
+        <p:spPr>
+          <a:xfrm>
+            <a:off x="2794000" y="2450434"/>
+            <a:ext cx="3302000" cy="924618"/>
           </a:xfrm>
           <a:prstGeom prst="roundRect">
             <a:avLst/>
@@ -34277,17 +36665,30 @@
                 <a:latin typeface="Times New Roman" panose="02020603050405020304" pitchFamily="18" charset="0"/>
                 <a:cs typeface="Times New Roman" panose="02020603050405020304" pitchFamily="18" charset="0"/>
               </a:rPr>
-              <a:t>Vai trò</a:t>
+              <a:t>Người dùng thực hiện</a:t>
+            </a:r>
+          </a:p>
+          <a:p>
+            <a:pPr algn="ctr"/>
+            <a:r>
+              <a:rPr lang="en-US" sz="2000">
+                <a:solidFill>
+                  <a:schemeClr val="tx1"/>
+                </a:solidFill>
+                <a:latin typeface="Times New Roman" panose="02020603050405020304" pitchFamily="18" charset="0"/>
+                <a:cs typeface="Times New Roman" panose="02020603050405020304" pitchFamily="18" charset="0"/>
+              </a:rPr>
+              <a:t>một hành vi đánh giá</a:t>
             </a:r>
           </a:p>
         </p:txBody>
       </p:sp>
       <p:sp>
         <p:nvSpPr>
-          <p:cNvPr id="3" name="Rectangle: Rounded Corners 2">
-            <a:extLst>
-              <a:ext uri="{FF2B5EF4-FFF2-40B4-BE49-F238E27FC236}">
-                <a16:creationId xmlns:a16="http://schemas.microsoft.com/office/drawing/2014/main" id="{8CC44113-62FE-B628-2505-D75FDEFC7AE5}"/>
+          <p:cNvPr id="4" name="Rectangle: Rounded Corners 3">
+            <a:extLst>
+              <a:ext uri="{FF2B5EF4-FFF2-40B4-BE49-F238E27FC236}">
+                <a16:creationId xmlns:a16="http://schemas.microsoft.com/office/drawing/2014/main" id="{62133B71-7D08-E4AD-3AB4-C3CF9EF83B1A}"/>
               </a:ext>
             </a:extLst>
           </p:cNvPr>
@@ -34296,8 +36697,8 @@
         </p:nvSpPr>
         <p:spPr>
           <a:xfrm>
-            <a:off x="4957151" y="1941045"/>
-            <a:ext cx="2277687" cy="465513"/>
+            <a:off x="6096000" y="3710882"/>
+            <a:ext cx="3302000" cy="924618"/>
           </a:xfrm>
           <a:prstGeom prst="roundRect">
             <a:avLst/>
@@ -34340,17 +36741,30 @@
                 <a:latin typeface="Times New Roman" panose="02020603050405020304" pitchFamily="18" charset="0"/>
                 <a:cs typeface="Times New Roman" panose="02020603050405020304" pitchFamily="18" charset="0"/>
               </a:rPr>
-              <a:t>Bối cảnh</a:t>
+              <a:t>Hệ thống cập nhật hành vi</a:t>
+            </a:r>
+          </a:p>
+          <a:p>
+            <a:pPr algn="ctr"/>
+            <a:r>
+              <a:rPr lang="en-US" sz="2000">
+                <a:solidFill>
+                  <a:schemeClr val="tx1"/>
+                </a:solidFill>
+                <a:latin typeface="Times New Roman" panose="02020603050405020304" pitchFamily="18" charset="0"/>
+                <a:cs typeface="Times New Roman" panose="02020603050405020304" pitchFamily="18" charset="0"/>
+              </a:rPr>
+              <a:t>của người dùng vào CSDL</a:t>
             </a:r>
           </a:p>
         </p:txBody>
       </p:sp>
       <p:sp>
         <p:nvSpPr>
-          <p:cNvPr id="4" name="Rectangle: Rounded Corners 3">
-            <a:extLst>
-              <a:ext uri="{FF2B5EF4-FFF2-40B4-BE49-F238E27FC236}">
-                <a16:creationId xmlns:a16="http://schemas.microsoft.com/office/drawing/2014/main" id="{9AF6F156-0943-2C06-9194-54696915F448}"/>
+          <p:cNvPr id="6" name="Oval 5">
+            <a:extLst>
+              <a:ext uri="{FF2B5EF4-FFF2-40B4-BE49-F238E27FC236}">
+                <a16:creationId xmlns:a16="http://schemas.microsoft.com/office/drawing/2014/main" id="{41E78B99-0B43-8090-58DE-2DC7F0DAF15C}"/>
               </a:ext>
             </a:extLst>
           </p:cNvPr>
@@ -34359,10 +36773,10 @@
         </p:nvSpPr>
         <p:spPr>
           <a:xfrm>
-            <a:off x="4957151" y="2564513"/>
-            <a:ext cx="2277687" cy="465513"/>
-          </a:xfrm>
-          <a:prstGeom prst="roundRect">
+            <a:off x="9042400" y="4969096"/>
+            <a:ext cx="1844040" cy="777240"/>
+          </a:xfrm>
+          <a:prstGeom prst="ellipse">
             <a:avLst/>
           </a:prstGeom>
           <a:solidFill>
@@ -34376,18 +36790,16 @@
         </p:spPr>
         <p:style>
           <a:lnRef idx="2">
-            <a:schemeClr val="accent1">
-              <a:shade val="15000"/>
-            </a:schemeClr>
+            <a:schemeClr val="dk1"/>
           </a:lnRef>
           <a:fillRef idx="1">
-            <a:schemeClr val="accent1"/>
+            <a:schemeClr val="lt1"/>
           </a:fillRef>
           <a:effectRef idx="0">
-            <a:schemeClr val="accent1"/>
+            <a:schemeClr val="dk1"/>
           </a:effectRef>
           <a:fontRef idx="minor">
-            <a:schemeClr val="lt1"/>
+            <a:schemeClr val="dk1"/>
           </a:fontRef>
         </p:style>
         <p:txBody>
@@ -34396,479 +36808,265 @@
           <a:p>
             <a:pPr algn="ctr"/>
             <a:r>
-              <a:rPr lang="en-US" sz="2000">
+              <a:rPr lang="en-US" sz="2400">
                 <a:solidFill>
                   <a:schemeClr val="tx1"/>
                 </a:solidFill>
                 <a:latin typeface="Times New Roman" panose="02020603050405020304" pitchFamily="18" charset="0"/>
                 <a:cs typeface="Times New Roman" panose="02020603050405020304" pitchFamily="18" charset="0"/>
               </a:rPr>
-              <a:t>Nhiệm vụ</a:t>
+              <a:t>Kết thúc</a:t>
             </a:r>
           </a:p>
         </p:txBody>
       </p:sp>
       <p:sp>
         <p:nvSpPr>
-          <p:cNvPr id="5" name="Rectangle: Rounded Corners 4">
-            <a:extLst>
-              <a:ext uri="{FF2B5EF4-FFF2-40B4-BE49-F238E27FC236}">
-                <a16:creationId xmlns:a16="http://schemas.microsoft.com/office/drawing/2014/main" id="{6AE5A87F-B9A7-AA4E-457F-FA124B5068AB}"/>
-              </a:ext>
-            </a:extLst>
-          </p:cNvPr>
-          <p:cNvSpPr/>
+          <p:cNvPr id="18" name="TextBox 17">
+            <a:extLst>
+              <a:ext uri="{FF2B5EF4-FFF2-40B4-BE49-F238E27FC236}">
+                <a16:creationId xmlns:a16="http://schemas.microsoft.com/office/drawing/2014/main" id="{350D8F2E-A5EA-2C12-2109-C38A249237E7}"/>
+              </a:ext>
+            </a:extLst>
+          </p:cNvPr>
+          <p:cNvSpPr txBox="1"/>
           <p:nvPr/>
         </p:nvSpPr>
         <p:spPr>
           <a:xfrm>
-            <a:off x="4957151" y="3811341"/>
-            <a:ext cx="2277687" cy="465513"/>
-          </a:xfrm>
-          <a:prstGeom prst="roundRect">
-            <a:avLst/>
-          </a:prstGeom>
-          <a:solidFill>
-            <a:schemeClr val="bg2"/>
-          </a:solidFill>
-          <a:ln>
-            <a:solidFill>
-              <a:schemeClr val="tx1"/>
-            </a:solidFill>
-          </a:ln>
-        </p:spPr>
-        <p:style>
-          <a:lnRef idx="2">
-            <a:schemeClr val="accent1">
-              <a:shade val="15000"/>
-            </a:schemeClr>
-          </a:lnRef>
-          <a:fillRef idx="1">
-            <a:schemeClr val="accent1"/>
-          </a:fillRef>
-          <a:effectRef idx="0">
-            <a:schemeClr val="accent1"/>
-          </a:effectRef>
-          <a:fontRef idx="minor">
-            <a:schemeClr val="lt1"/>
-          </a:fontRef>
-        </p:style>
+            <a:off x="3171734" y="1002512"/>
+            <a:ext cx="482824" cy="400110"/>
+          </a:xfrm>
+          <a:prstGeom prst="rect">
+            <a:avLst/>
+          </a:prstGeom>
+          <a:noFill/>
+        </p:spPr>
         <p:txBody>
-          <a:bodyPr rtlCol="0" anchor="ctr"/>
+          <a:bodyPr wrap="none" rtlCol="0">
+            <a:spAutoFit/>
+          </a:bodyPr>
           <a:lstStyle/>
           <a:p>
-            <a:pPr algn="ctr"/>
             <a:r>
               <a:rPr lang="en-US" sz="2000">
-                <a:solidFill>
-                  <a:schemeClr val="tx1"/>
-                </a:solidFill>
                 <a:latin typeface="Times New Roman" panose="02020603050405020304" pitchFamily="18" charset="0"/>
                 <a:cs typeface="Times New Roman" panose="02020603050405020304" pitchFamily="18" charset="0"/>
               </a:rPr>
-              <a:t>Ví dụ 1</a:t>
+              <a:t>(1)</a:t>
             </a:r>
           </a:p>
         </p:txBody>
       </p:sp>
       <p:sp>
         <p:nvSpPr>
-          <p:cNvPr id="6" name="Rectangle: Rounded Corners 5">
-            <a:extLst>
-              <a:ext uri="{FF2B5EF4-FFF2-40B4-BE49-F238E27FC236}">
-                <a16:creationId xmlns:a16="http://schemas.microsoft.com/office/drawing/2014/main" id="{F7CCF113-E741-D820-34D8-31288E48EA5F}"/>
-              </a:ext>
-            </a:extLst>
-          </p:cNvPr>
-          <p:cNvSpPr/>
+          <p:cNvPr id="19" name="TextBox 18">
+            <a:extLst>
+              <a:ext uri="{FF2B5EF4-FFF2-40B4-BE49-F238E27FC236}">
+                <a16:creationId xmlns:a16="http://schemas.microsoft.com/office/drawing/2014/main" id="{A541460D-3078-ACE9-FC0C-77F71E274E2D}"/>
+              </a:ext>
+            </a:extLst>
+          </p:cNvPr>
+          <p:cNvSpPr txBox="1"/>
           <p:nvPr/>
         </p:nvSpPr>
         <p:spPr>
           <a:xfrm>
-            <a:off x="4957151" y="4434809"/>
-            <a:ext cx="2277687" cy="465513"/>
-          </a:xfrm>
-          <a:prstGeom prst="roundRect">
-            <a:avLst/>
-          </a:prstGeom>
-          <a:solidFill>
-            <a:schemeClr val="bg2"/>
-          </a:solidFill>
-          <a:ln>
-            <a:solidFill>
-              <a:schemeClr val="tx1"/>
-            </a:solidFill>
-          </a:ln>
-        </p:spPr>
-        <p:style>
-          <a:lnRef idx="2">
-            <a:schemeClr val="accent1">
-              <a:shade val="15000"/>
-            </a:schemeClr>
-          </a:lnRef>
-          <a:fillRef idx="1">
-            <a:schemeClr val="accent1"/>
-          </a:fillRef>
-          <a:effectRef idx="0">
-            <a:schemeClr val="accent1"/>
-          </a:effectRef>
-          <a:fontRef idx="minor">
-            <a:schemeClr val="lt1"/>
-          </a:fontRef>
-        </p:style>
+            <a:off x="6096000" y="2512633"/>
+            <a:ext cx="482824" cy="400110"/>
+          </a:xfrm>
+          <a:prstGeom prst="rect">
+            <a:avLst/>
+          </a:prstGeom>
+          <a:noFill/>
+        </p:spPr>
         <p:txBody>
-          <a:bodyPr rtlCol="0" anchor="ctr"/>
+          <a:bodyPr wrap="none" rtlCol="0">
+            <a:spAutoFit/>
+          </a:bodyPr>
           <a:lstStyle/>
           <a:p>
-            <a:pPr algn="ctr"/>
             <a:r>
               <a:rPr lang="en-US" sz="2000">
-                <a:solidFill>
-                  <a:schemeClr val="tx1"/>
-                </a:solidFill>
                 <a:latin typeface="Times New Roman" panose="02020603050405020304" pitchFamily="18" charset="0"/>
                 <a:cs typeface="Times New Roman" panose="02020603050405020304" pitchFamily="18" charset="0"/>
               </a:rPr>
-              <a:t>Ví dụ …</a:t>
+              <a:t>(2)</a:t>
             </a:r>
           </a:p>
         </p:txBody>
       </p:sp>
       <p:sp>
         <p:nvSpPr>
-          <p:cNvPr id="7" name="Rectangle: Rounded Corners 6">
-            <a:extLst>
-              <a:ext uri="{FF2B5EF4-FFF2-40B4-BE49-F238E27FC236}">
-                <a16:creationId xmlns:a16="http://schemas.microsoft.com/office/drawing/2014/main" id="{4BFFF11C-3CBC-D614-936E-224461FB2ACF}"/>
-              </a:ext>
-            </a:extLst>
-          </p:cNvPr>
-          <p:cNvSpPr/>
+          <p:cNvPr id="20" name="TextBox 19">
+            <a:extLst>
+              <a:ext uri="{FF2B5EF4-FFF2-40B4-BE49-F238E27FC236}">
+                <a16:creationId xmlns:a16="http://schemas.microsoft.com/office/drawing/2014/main" id="{1EF642F4-A632-F076-ECA9-894516DA9C81}"/>
+              </a:ext>
+            </a:extLst>
+          </p:cNvPr>
+          <p:cNvSpPr txBox="1"/>
           <p:nvPr/>
         </p:nvSpPr>
         <p:spPr>
           <a:xfrm>
-            <a:off x="4957151" y="5058277"/>
-            <a:ext cx="2277687" cy="465513"/>
-          </a:xfrm>
-          <a:prstGeom prst="roundRect">
-            <a:avLst/>
-          </a:prstGeom>
-          <a:solidFill>
-            <a:schemeClr val="bg2"/>
-          </a:solidFill>
-          <a:ln>
-            <a:solidFill>
-              <a:schemeClr val="tx1"/>
-            </a:solidFill>
-          </a:ln>
-        </p:spPr>
-        <p:style>
-          <a:lnRef idx="2">
-            <a:schemeClr val="accent1">
-              <a:shade val="15000"/>
-            </a:schemeClr>
-          </a:lnRef>
-          <a:fillRef idx="1">
-            <a:schemeClr val="accent1"/>
-          </a:fillRef>
-          <a:effectRef idx="0">
-            <a:schemeClr val="accent1"/>
-          </a:effectRef>
-          <a:fontRef idx="minor">
-            <a:schemeClr val="lt1"/>
-          </a:fontRef>
-        </p:style>
+            <a:off x="9398000" y="3773081"/>
+            <a:ext cx="482824" cy="400110"/>
+          </a:xfrm>
+          <a:prstGeom prst="rect">
+            <a:avLst/>
+          </a:prstGeom>
+          <a:noFill/>
+        </p:spPr>
         <p:txBody>
-          <a:bodyPr rtlCol="0" anchor="ctr"/>
+          <a:bodyPr wrap="none" rtlCol="0">
+            <a:spAutoFit/>
+          </a:bodyPr>
           <a:lstStyle/>
           <a:p>
-            <a:pPr algn="ctr"/>
             <a:r>
               <a:rPr lang="en-US" sz="2000">
-                <a:solidFill>
-                  <a:schemeClr val="tx1"/>
-                </a:solidFill>
                 <a:latin typeface="Times New Roman" panose="02020603050405020304" pitchFamily="18" charset="0"/>
                 <a:cs typeface="Times New Roman" panose="02020603050405020304" pitchFamily="18" charset="0"/>
               </a:rPr>
-              <a:t>Hướng dẫn</a:t>
+              <a:t>(3)</a:t>
             </a:r>
           </a:p>
         </p:txBody>
       </p:sp>
-      <p:sp>
-        <p:nvSpPr>
-          <p:cNvPr id="8" name="Rectangle: Rounded Corners 7">
-            <a:extLst>
-              <a:ext uri="{FF2B5EF4-FFF2-40B4-BE49-F238E27FC236}">
-                <a16:creationId xmlns:a16="http://schemas.microsoft.com/office/drawing/2014/main" id="{87AE8872-DB4B-0CAC-7DB2-0F81067540C1}"/>
-              </a:ext>
-            </a:extLst>
-          </p:cNvPr>
-          <p:cNvSpPr/>
-          <p:nvPr/>
-        </p:nvSpPr>
+      <p:cxnSp>
+        <p:nvCxnSpPr>
+          <p:cNvPr id="29" name="Connector: Elbow 28">
+            <a:extLst>
+              <a:ext uri="{FF2B5EF4-FFF2-40B4-BE49-F238E27FC236}">
+                <a16:creationId xmlns:a16="http://schemas.microsoft.com/office/drawing/2014/main" id="{F4D02D3B-11BE-D88E-3232-2AF9C20A721B}"/>
+              </a:ext>
+            </a:extLst>
+          </p:cNvPr>
+          <p:cNvCxnSpPr>
+            <a:cxnSpLocks/>
+            <a:stCxn id="2" idx="6"/>
+            <a:endCxn id="3" idx="0"/>
+          </p:cNvCxnSpPr>
+          <p:nvPr/>
+        </p:nvCxnSpPr>
         <p:spPr>
           <a:xfrm>
-            <a:off x="4957151" y="5681745"/>
-            <a:ext cx="2277687" cy="465513"/>
-          </a:xfrm>
-          <a:prstGeom prst="roundRect">
-            <a:avLst/>
-          </a:prstGeom>
-          <a:solidFill>
-            <a:schemeClr val="bg2"/>
-          </a:solidFill>
+            <a:off x="3171734" y="1402622"/>
+            <a:ext cx="1273266" cy="1047812"/>
+          </a:xfrm>
+          <a:prstGeom prst="bentConnector2">
+            <a:avLst/>
+          </a:prstGeom>
           <a:ln>
-            <a:solidFill>
-              <a:schemeClr val="tx1"/>
-            </a:solidFill>
+            <a:tailEnd type="triangle"/>
           </a:ln>
         </p:spPr>
         <p:style>
           <a:lnRef idx="2">
-            <a:schemeClr val="accent1">
-              <a:shade val="15000"/>
-            </a:schemeClr>
+            <a:schemeClr val="dk1"/>
           </a:lnRef>
-          <a:fillRef idx="1">
-            <a:schemeClr val="accent1"/>
+          <a:fillRef idx="0">
+            <a:schemeClr val="dk1"/>
           </a:fillRef>
-          <a:effectRef idx="0">
-            <a:schemeClr val="accent1"/>
+          <a:effectRef idx="1">
+            <a:schemeClr val="dk1"/>
           </a:effectRef>
           <a:fontRef idx="minor">
-            <a:schemeClr val="lt1"/>
+            <a:schemeClr val="tx1"/>
           </a:fontRef>
         </p:style>
-        <p:txBody>
-          <a:bodyPr rtlCol="0" anchor="ctr"/>
-          <a:lstStyle/>
-          <a:p>
-            <a:pPr algn="ctr"/>
-            <a:r>
-              <a:rPr lang="en-US" sz="2000">
-                <a:solidFill>
-                  <a:schemeClr val="tx1"/>
-                </a:solidFill>
-                <a:latin typeface="Times New Roman" panose="02020603050405020304" pitchFamily="18" charset="0"/>
-                <a:cs typeface="Times New Roman" panose="02020603050405020304" pitchFamily="18" charset="0"/>
-              </a:rPr>
-              <a:t>Lưu ý</a:t>
-            </a:r>
-          </a:p>
-        </p:txBody>
-      </p:sp>
-      <p:sp>
-        <p:nvSpPr>
-          <p:cNvPr id="9" name="Rectangle: Rounded Corners 8">
-            <a:extLst>
-              <a:ext uri="{FF2B5EF4-FFF2-40B4-BE49-F238E27FC236}">
-                <a16:creationId xmlns:a16="http://schemas.microsoft.com/office/drawing/2014/main" id="{C97A42C2-BBE0-F9E1-48F5-620BDEE672F5}"/>
-              </a:ext>
-            </a:extLst>
-          </p:cNvPr>
-          <p:cNvSpPr/>
-          <p:nvPr/>
-        </p:nvSpPr>
+      </p:cxnSp>
+      <p:cxnSp>
+        <p:nvCxnSpPr>
+          <p:cNvPr id="31" name="Connector: Elbow 30">
+            <a:extLst>
+              <a:ext uri="{FF2B5EF4-FFF2-40B4-BE49-F238E27FC236}">
+                <a16:creationId xmlns:a16="http://schemas.microsoft.com/office/drawing/2014/main" id="{DBC04417-11EE-9F9F-5B12-FA8212176C2A}"/>
+              </a:ext>
+            </a:extLst>
+          </p:cNvPr>
+          <p:cNvCxnSpPr>
+            <a:cxnSpLocks/>
+            <a:stCxn id="3" idx="3"/>
+            <a:endCxn id="4" idx="0"/>
+          </p:cNvCxnSpPr>
+          <p:nvPr/>
+        </p:nvCxnSpPr>
         <p:spPr>
           <a:xfrm>
-            <a:off x="3535675" y="536181"/>
-            <a:ext cx="5120640" cy="6001790"/>
-          </a:xfrm>
-          <a:prstGeom prst="roundRect">
-            <a:avLst/>
-          </a:prstGeom>
-          <a:noFill/>
+            <a:off x="6096000" y="2912743"/>
+            <a:ext cx="1651000" cy="798139"/>
+          </a:xfrm>
+          <a:prstGeom prst="bentConnector2">
+            <a:avLst/>
+          </a:prstGeom>
           <a:ln>
-            <a:solidFill>
-              <a:srgbClr val="FF0000"/>
-            </a:solidFill>
-            <a:prstDash val="dash"/>
+            <a:tailEnd type="triangle"/>
           </a:ln>
         </p:spPr>
         <p:style>
           <a:lnRef idx="2">
-            <a:schemeClr val="accent1">
-              <a:shade val="15000"/>
-            </a:schemeClr>
+            <a:schemeClr val="dk1"/>
           </a:lnRef>
-          <a:fillRef idx="1">
-            <a:schemeClr val="accent1"/>
+          <a:fillRef idx="0">
+            <a:schemeClr val="dk1"/>
           </a:fillRef>
-          <a:effectRef idx="0">
-            <a:schemeClr val="accent1"/>
+          <a:effectRef idx="1">
+            <a:schemeClr val="dk1"/>
           </a:effectRef>
           <a:fontRef idx="minor">
-            <a:schemeClr val="lt1"/>
+            <a:schemeClr val="tx1"/>
           </a:fontRef>
         </p:style>
-        <p:txBody>
-          <a:bodyPr rtlCol="0" anchor="ctr"/>
-          <a:lstStyle/>
-          <a:p>
-            <a:pPr algn="ctr"/>
-            <a:endParaRPr lang="en-US" sz="2000">
-              <a:latin typeface="Times New Roman" panose="02020603050405020304" pitchFamily="18" charset="0"/>
-              <a:cs typeface="Times New Roman" panose="02020603050405020304" pitchFamily="18" charset="0"/>
-            </a:endParaRPr>
-          </a:p>
-        </p:txBody>
-      </p:sp>
-      <p:sp>
-        <p:nvSpPr>
-          <p:cNvPr id="10" name="Rectangle: Rounded Corners 9">
-            <a:extLst>
-              <a:ext uri="{FF2B5EF4-FFF2-40B4-BE49-F238E27FC236}">
-                <a16:creationId xmlns:a16="http://schemas.microsoft.com/office/drawing/2014/main" id="{E2031F3D-9150-2123-189F-AF63D3578697}"/>
-              </a:ext>
-            </a:extLst>
-          </p:cNvPr>
-          <p:cNvSpPr/>
-          <p:nvPr/>
-        </p:nvSpPr>
+      </p:cxnSp>
+      <p:cxnSp>
+        <p:nvCxnSpPr>
+          <p:cNvPr id="33" name="Connector: Elbow 32">
+            <a:extLst>
+              <a:ext uri="{FF2B5EF4-FFF2-40B4-BE49-F238E27FC236}">
+                <a16:creationId xmlns:a16="http://schemas.microsoft.com/office/drawing/2014/main" id="{EDF04D07-B273-B93A-F8F4-5475F0D810F2}"/>
+              </a:ext>
+            </a:extLst>
+          </p:cNvPr>
+          <p:cNvCxnSpPr>
+            <a:cxnSpLocks/>
+            <a:stCxn id="4" idx="3"/>
+            <a:endCxn id="6" idx="0"/>
+          </p:cNvCxnSpPr>
+          <p:nvPr/>
+        </p:nvCxnSpPr>
         <p:spPr>
           <a:xfrm>
-            <a:off x="4574766" y="145469"/>
-            <a:ext cx="3042458" cy="781396"/>
-          </a:xfrm>
-          <a:prstGeom prst="roundRect">
-            <a:avLst/>
-          </a:prstGeom>
-          <a:solidFill>
-            <a:srgbClr val="FFFFFF"/>
-          </a:solidFill>
+            <a:off x="9398000" y="4173191"/>
+            <a:ext cx="566420" cy="795905"/>
+          </a:xfrm>
+          <a:prstGeom prst="bentConnector2">
+            <a:avLst/>
+          </a:prstGeom>
           <a:ln>
-            <a:solidFill>
-              <a:srgbClr val="FF0000"/>
-            </a:solidFill>
+            <a:tailEnd type="triangle"/>
           </a:ln>
         </p:spPr>
         <p:style>
           <a:lnRef idx="2">
-            <a:schemeClr val="accent1">
-              <a:shade val="15000"/>
-            </a:schemeClr>
+            <a:schemeClr val="dk1"/>
           </a:lnRef>
-          <a:fillRef idx="1">
-            <a:schemeClr val="accent1"/>
+          <a:fillRef idx="0">
+            <a:schemeClr val="dk1"/>
           </a:fillRef>
-          <a:effectRef idx="0">
-            <a:schemeClr val="accent1"/>
+          <a:effectRef idx="1">
+            <a:schemeClr val="dk1"/>
           </a:effectRef>
           <a:fontRef idx="minor">
-            <a:schemeClr val="lt1"/>
+            <a:schemeClr val="tx1"/>
           </a:fontRef>
         </p:style>
-        <p:txBody>
-          <a:bodyPr rtlCol="0" anchor="ctr"/>
-          <a:lstStyle/>
-          <a:p>
-            <a:pPr algn="ctr"/>
-            <a:r>
-              <a:rPr lang="en-US" sz="2000">
-                <a:ln w="0">
-                  <a:solidFill>
-                    <a:schemeClr val="tx1"/>
-                  </a:solidFill>
-                </a:ln>
-                <a:solidFill>
-                  <a:schemeClr val="tx1"/>
-                </a:solidFill>
-                <a:latin typeface="Times New Roman" panose="02020603050405020304" pitchFamily="18" charset="0"/>
-                <a:cs typeface="Times New Roman" panose="02020603050405020304" pitchFamily="18" charset="0"/>
-              </a:rPr>
-              <a:t>Prompt cho tác vụ</a:t>
-            </a:r>
-          </a:p>
-          <a:p>
-            <a:pPr algn="ctr"/>
-            <a:r>
-              <a:rPr lang="en-US" sz="2000">
-                <a:ln w="0">
-                  <a:solidFill>
-                    <a:schemeClr val="tx1"/>
-                  </a:solidFill>
-                </a:ln>
-                <a:solidFill>
-                  <a:schemeClr val="tx1"/>
-                </a:solidFill>
-                <a:latin typeface="Times New Roman" panose="02020603050405020304" pitchFamily="18" charset="0"/>
-                <a:cs typeface="Times New Roman" panose="02020603050405020304" pitchFamily="18" charset="0"/>
-              </a:rPr>
-              <a:t>trích xuất thông tin</a:t>
-            </a:r>
-          </a:p>
-        </p:txBody>
-      </p:sp>
-      <p:sp>
-        <p:nvSpPr>
-          <p:cNvPr id="11" name="Rectangle: Rounded Corners 10">
-            <a:extLst>
-              <a:ext uri="{FF2B5EF4-FFF2-40B4-BE49-F238E27FC236}">
-                <a16:creationId xmlns:a16="http://schemas.microsoft.com/office/drawing/2014/main" id="{1CB039DE-91EA-0092-CC10-04B3DF401AD0}"/>
-              </a:ext>
-            </a:extLst>
-          </p:cNvPr>
-          <p:cNvSpPr/>
-          <p:nvPr/>
-        </p:nvSpPr>
-        <p:spPr>
-          <a:xfrm>
-            <a:off x="4957151" y="3187927"/>
-            <a:ext cx="2277687" cy="465513"/>
-          </a:xfrm>
-          <a:prstGeom prst="roundRect">
-            <a:avLst/>
-          </a:prstGeom>
-          <a:solidFill>
-            <a:schemeClr val="bg2"/>
-          </a:solidFill>
-          <a:ln>
-            <a:solidFill>
-              <a:schemeClr val="tx1"/>
-            </a:solidFill>
-          </a:ln>
-        </p:spPr>
-        <p:style>
-          <a:lnRef idx="2">
-            <a:schemeClr val="accent1">
-              <a:shade val="15000"/>
-            </a:schemeClr>
-          </a:lnRef>
-          <a:fillRef idx="1">
-            <a:schemeClr val="accent1"/>
-          </a:fillRef>
-          <a:effectRef idx="0">
-            <a:schemeClr val="accent1"/>
-          </a:effectRef>
-          <a:fontRef idx="minor">
-            <a:schemeClr val="lt1"/>
-          </a:fontRef>
-        </p:style>
-        <p:txBody>
-          <a:bodyPr rtlCol="0" anchor="ctr"/>
-          <a:lstStyle/>
-          <a:p>
-            <a:pPr algn="ctr"/>
-            <a:r>
-              <a:rPr lang="en-US" sz="2000">
-                <a:solidFill>
-                  <a:schemeClr val="tx1"/>
-                </a:solidFill>
-                <a:latin typeface="Times New Roman" panose="02020603050405020304" pitchFamily="18" charset="0"/>
-                <a:cs typeface="Times New Roman" panose="02020603050405020304" pitchFamily="18" charset="0"/>
-              </a:rPr>
-              <a:t>Đầu ra có cấu trúc</a:t>
-            </a:r>
-          </a:p>
-        </p:txBody>
-      </p:sp>
+      </p:cxnSp>
     </p:spTree>
     <p:extLst>
       <p:ext uri="{BB962C8B-B14F-4D97-AF65-F5344CB8AC3E}">
-        <p14:creationId xmlns:p14="http://schemas.microsoft.com/office/powerpoint/2010/main" val="2705721519"/>
+        <p14:creationId xmlns:p14="http://schemas.microsoft.com/office/powerpoint/2010/main" val="285086992"/>
       </p:ext>
     </p:extLst>
   </p:cSld>
@@ -34897,10 +37095,10 @@
       </p:grpSpPr>
       <p:sp>
         <p:nvSpPr>
-          <p:cNvPr id="3" name="Rectangle: Rounded Corners 2">
-            <a:extLst>
-              <a:ext uri="{FF2B5EF4-FFF2-40B4-BE49-F238E27FC236}">
-                <a16:creationId xmlns:a16="http://schemas.microsoft.com/office/drawing/2014/main" id="{048EB605-C214-F543-6B11-029AC50FDEBD}"/>
+          <p:cNvPr id="2" name="Rectangle: Rounded Corners 1">
+            <a:extLst>
+              <a:ext uri="{FF2B5EF4-FFF2-40B4-BE49-F238E27FC236}">
+                <a16:creationId xmlns:a16="http://schemas.microsoft.com/office/drawing/2014/main" id="{E4ADF9A4-DE0B-8F8B-4DF4-46018C8FE330}"/>
               </a:ext>
             </a:extLst>
           </p:cNvPr>
@@ -34909,7 +37107,7 @@
         </p:nvSpPr>
         <p:spPr>
           <a:xfrm>
-            <a:off x="4957153" y="1404850"/>
+            <a:off x="4957151" y="1317577"/>
             <a:ext cx="2277687" cy="465513"/>
           </a:xfrm>
           <a:prstGeom prst="roundRect">
@@ -34960,10 +37158,10 @@
       </p:sp>
       <p:sp>
         <p:nvSpPr>
-          <p:cNvPr id="4" name="Rectangle: Rounded Corners 3">
-            <a:extLst>
-              <a:ext uri="{FF2B5EF4-FFF2-40B4-BE49-F238E27FC236}">
-                <a16:creationId xmlns:a16="http://schemas.microsoft.com/office/drawing/2014/main" id="{54BC9C70-A4ED-0B89-64FD-D4C0E2B71AA4}"/>
+          <p:cNvPr id="3" name="Rectangle: Rounded Corners 2">
+            <a:extLst>
+              <a:ext uri="{FF2B5EF4-FFF2-40B4-BE49-F238E27FC236}">
+                <a16:creationId xmlns:a16="http://schemas.microsoft.com/office/drawing/2014/main" id="{8CC44113-62FE-B628-2505-D75FDEFC7AE5}"/>
               </a:ext>
             </a:extLst>
           </p:cNvPr>
@@ -34972,7 +37170,7 @@
         </p:nvSpPr>
         <p:spPr>
           <a:xfrm>
-            <a:off x="4957153" y="2115592"/>
+            <a:off x="4957151" y="1941045"/>
             <a:ext cx="2277687" cy="465513"/>
           </a:xfrm>
           <a:prstGeom prst="roundRect">
@@ -35023,10 +37221,10 @@
       </p:sp>
       <p:sp>
         <p:nvSpPr>
-          <p:cNvPr id="5" name="Rectangle: Rounded Corners 4">
-            <a:extLst>
-              <a:ext uri="{FF2B5EF4-FFF2-40B4-BE49-F238E27FC236}">
-                <a16:creationId xmlns:a16="http://schemas.microsoft.com/office/drawing/2014/main" id="{ABB99AF4-2C14-05D1-265A-F78135C3126E}"/>
+          <p:cNvPr id="4" name="Rectangle: Rounded Corners 3">
+            <a:extLst>
+              <a:ext uri="{FF2B5EF4-FFF2-40B4-BE49-F238E27FC236}">
+                <a16:creationId xmlns:a16="http://schemas.microsoft.com/office/drawing/2014/main" id="{9AF6F156-0943-2C06-9194-54696915F448}"/>
               </a:ext>
             </a:extLst>
           </p:cNvPr>
@@ -35035,7 +37233,7 @@
         </p:nvSpPr>
         <p:spPr>
           <a:xfrm>
-            <a:off x="4957153" y="2826334"/>
+            <a:off x="4957151" y="2564513"/>
             <a:ext cx="2277687" cy="465513"/>
           </a:xfrm>
           <a:prstGeom prst="roundRect">
@@ -35079,17 +37277,17 @@
                 <a:latin typeface="Times New Roman" panose="02020603050405020304" pitchFamily="18" charset="0"/>
                 <a:cs typeface="Times New Roman" panose="02020603050405020304" pitchFamily="18" charset="0"/>
               </a:rPr>
-              <a:t>Câu hỏi</a:t>
+              <a:t>Nhiệm vụ</a:t>
             </a:r>
           </a:p>
         </p:txBody>
       </p:sp>
       <p:sp>
         <p:nvSpPr>
-          <p:cNvPr id="6" name="Rectangle: Rounded Corners 5">
-            <a:extLst>
-              <a:ext uri="{FF2B5EF4-FFF2-40B4-BE49-F238E27FC236}">
-                <a16:creationId xmlns:a16="http://schemas.microsoft.com/office/drawing/2014/main" id="{15D95F07-863A-45BC-041C-86202B8CE299}"/>
+          <p:cNvPr id="5" name="Rectangle: Rounded Corners 4">
+            <a:extLst>
+              <a:ext uri="{FF2B5EF4-FFF2-40B4-BE49-F238E27FC236}">
+                <a16:creationId xmlns:a16="http://schemas.microsoft.com/office/drawing/2014/main" id="{6AE5A87F-B9A7-AA4E-457F-FA124B5068AB}"/>
               </a:ext>
             </a:extLst>
           </p:cNvPr>
@@ -35098,7 +37296,7 @@
         </p:nvSpPr>
         <p:spPr>
           <a:xfrm>
-            <a:off x="4957152" y="3537076"/>
+            <a:off x="4957151" y="3811341"/>
             <a:ext cx="2277687" cy="465513"/>
           </a:xfrm>
           <a:prstGeom prst="roundRect">
@@ -35149,10 +37347,10 @@
       </p:sp>
       <p:sp>
         <p:nvSpPr>
-          <p:cNvPr id="7" name="Rectangle: Rounded Corners 6">
-            <a:extLst>
-              <a:ext uri="{FF2B5EF4-FFF2-40B4-BE49-F238E27FC236}">
-                <a16:creationId xmlns:a16="http://schemas.microsoft.com/office/drawing/2014/main" id="{A7B5ECB3-AC0A-79C1-04C3-54D8536F115C}"/>
+          <p:cNvPr id="6" name="Rectangle: Rounded Corners 5">
+            <a:extLst>
+              <a:ext uri="{FF2B5EF4-FFF2-40B4-BE49-F238E27FC236}">
+                <a16:creationId xmlns:a16="http://schemas.microsoft.com/office/drawing/2014/main" id="{F7CCF113-E741-D820-34D8-31288E48EA5F}"/>
               </a:ext>
             </a:extLst>
           </p:cNvPr>
@@ -35161,7 +37359,7 @@
         </p:nvSpPr>
         <p:spPr>
           <a:xfrm>
-            <a:off x="4957152" y="4247818"/>
+            <a:off x="4957151" y="4434809"/>
             <a:ext cx="2277687" cy="465513"/>
           </a:xfrm>
           <a:prstGeom prst="roundRect">
@@ -35212,10 +37410,10 @@
       </p:sp>
       <p:sp>
         <p:nvSpPr>
-          <p:cNvPr id="8" name="Rectangle: Rounded Corners 7">
-            <a:extLst>
-              <a:ext uri="{FF2B5EF4-FFF2-40B4-BE49-F238E27FC236}">
-                <a16:creationId xmlns:a16="http://schemas.microsoft.com/office/drawing/2014/main" id="{EA8C18FB-766B-5769-7A4B-4DE68340C0A0}"/>
+          <p:cNvPr id="7" name="Rectangle: Rounded Corners 6">
+            <a:extLst>
+              <a:ext uri="{FF2B5EF4-FFF2-40B4-BE49-F238E27FC236}">
+                <a16:creationId xmlns:a16="http://schemas.microsoft.com/office/drawing/2014/main" id="{4BFFF11C-3CBC-D614-936E-224461FB2ACF}"/>
               </a:ext>
             </a:extLst>
           </p:cNvPr>
@@ -35224,7 +37422,7 @@
         </p:nvSpPr>
         <p:spPr>
           <a:xfrm>
-            <a:off x="4957152" y="4958560"/>
+            <a:off x="4957151" y="5058277"/>
             <a:ext cx="2277687" cy="465513"/>
           </a:xfrm>
           <a:prstGeom prst="roundRect">
@@ -35275,10 +37473,10 @@
       </p:sp>
       <p:sp>
         <p:nvSpPr>
-          <p:cNvPr id="9" name="Rectangle: Rounded Corners 8">
-            <a:extLst>
-              <a:ext uri="{FF2B5EF4-FFF2-40B4-BE49-F238E27FC236}">
-                <a16:creationId xmlns:a16="http://schemas.microsoft.com/office/drawing/2014/main" id="{E2667497-E73D-C9B7-735A-15EA3A038FC9}"/>
+          <p:cNvPr id="8" name="Rectangle: Rounded Corners 7">
+            <a:extLst>
+              <a:ext uri="{FF2B5EF4-FFF2-40B4-BE49-F238E27FC236}">
+                <a16:creationId xmlns:a16="http://schemas.microsoft.com/office/drawing/2014/main" id="{87AE8872-DB4B-0CAC-7DB2-0F81067540C1}"/>
               </a:ext>
             </a:extLst>
           </p:cNvPr>
@@ -35287,7 +37485,7 @@
         </p:nvSpPr>
         <p:spPr>
           <a:xfrm>
-            <a:off x="4957152" y="5669302"/>
+            <a:off x="4957151" y="5681745"/>
             <a:ext cx="2277687" cy="465513"/>
           </a:xfrm>
           <a:prstGeom prst="roundRect">
@@ -35338,10 +37536,10 @@
       </p:sp>
       <p:sp>
         <p:nvSpPr>
-          <p:cNvPr id="12" name="Rectangle: Rounded Corners 11">
-            <a:extLst>
-              <a:ext uri="{FF2B5EF4-FFF2-40B4-BE49-F238E27FC236}">
-                <a16:creationId xmlns:a16="http://schemas.microsoft.com/office/drawing/2014/main" id="{31359D66-3D89-0106-62D7-169807288848}"/>
+          <p:cNvPr id="9" name="Rectangle: Rounded Corners 8">
+            <a:extLst>
+              <a:ext uri="{FF2B5EF4-FFF2-40B4-BE49-F238E27FC236}">
+                <a16:creationId xmlns:a16="http://schemas.microsoft.com/office/drawing/2014/main" id="{C97A42C2-BBE0-F9E1-48F5-620BDEE672F5}"/>
               </a:ext>
             </a:extLst>
           </p:cNvPr>
@@ -35394,10 +37592,10 @@
       </p:sp>
       <p:sp>
         <p:nvSpPr>
-          <p:cNvPr id="2" name="Rectangle: Rounded Corners 1">
-            <a:extLst>
-              <a:ext uri="{FF2B5EF4-FFF2-40B4-BE49-F238E27FC236}">
-                <a16:creationId xmlns:a16="http://schemas.microsoft.com/office/drawing/2014/main" id="{68358D49-BEFB-0F3C-74B3-68D07EFC7EF5}"/>
+          <p:cNvPr id="10" name="Rectangle: Rounded Corners 9">
+            <a:extLst>
+              <a:ext uri="{FF2B5EF4-FFF2-40B4-BE49-F238E27FC236}">
+                <a16:creationId xmlns:a16="http://schemas.microsoft.com/office/drawing/2014/main" id="{E2031F3D-9150-2123-189F-AF63D3578697}"/>
               </a:ext>
             </a:extLst>
           </p:cNvPr>
@@ -35455,7 +37653,7 @@
                 <a:latin typeface="Times New Roman" panose="02020603050405020304" pitchFamily="18" charset="0"/>
                 <a:cs typeface="Times New Roman" panose="02020603050405020304" pitchFamily="18" charset="0"/>
               </a:rPr>
-              <a:t>Prompt cho chức năng</a:t>
+              <a:t>Prompt cho tác vụ</a:t>
             </a:r>
           </a:p>
           <a:p>
@@ -35473,7 +37671,70 @@
                 <a:latin typeface="Times New Roman" panose="02020603050405020304" pitchFamily="18" charset="0"/>
                 <a:cs typeface="Times New Roman" panose="02020603050405020304" pitchFamily="18" charset="0"/>
               </a:rPr>
-              <a:t>trò chuyện với người dùng</a:t>
+              <a:t>trích xuất thông tin</a:t>
+            </a:r>
+          </a:p>
+        </p:txBody>
+      </p:sp>
+      <p:sp>
+        <p:nvSpPr>
+          <p:cNvPr id="11" name="Rectangle: Rounded Corners 10">
+            <a:extLst>
+              <a:ext uri="{FF2B5EF4-FFF2-40B4-BE49-F238E27FC236}">
+                <a16:creationId xmlns:a16="http://schemas.microsoft.com/office/drawing/2014/main" id="{1CB039DE-91EA-0092-CC10-04B3DF401AD0}"/>
+              </a:ext>
+            </a:extLst>
+          </p:cNvPr>
+          <p:cNvSpPr/>
+          <p:nvPr/>
+        </p:nvSpPr>
+        <p:spPr>
+          <a:xfrm>
+            <a:off x="4957151" y="3187927"/>
+            <a:ext cx="2277687" cy="465513"/>
+          </a:xfrm>
+          <a:prstGeom prst="roundRect">
+            <a:avLst/>
+          </a:prstGeom>
+          <a:solidFill>
+            <a:schemeClr val="bg2"/>
+          </a:solidFill>
+          <a:ln>
+            <a:solidFill>
+              <a:schemeClr val="tx1"/>
+            </a:solidFill>
+          </a:ln>
+        </p:spPr>
+        <p:style>
+          <a:lnRef idx="2">
+            <a:schemeClr val="accent1">
+              <a:shade val="15000"/>
+            </a:schemeClr>
+          </a:lnRef>
+          <a:fillRef idx="1">
+            <a:schemeClr val="accent1"/>
+          </a:fillRef>
+          <a:effectRef idx="0">
+            <a:schemeClr val="accent1"/>
+          </a:effectRef>
+          <a:fontRef idx="minor">
+            <a:schemeClr val="lt1"/>
+          </a:fontRef>
+        </p:style>
+        <p:txBody>
+          <a:bodyPr rtlCol="0" anchor="ctr"/>
+          <a:lstStyle/>
+          <a:p>
+            <a:pPr algn="ctr"/>
+            <a:r>
+              <a:rPr lang="en-US" sz="2000">
+                <a:solidFill>
+                  <a:schemeClr val="tx1"/>
+                </a:solidFill>
+                <a:latin typeface="Times New Roman" panose="02020603050405020304" pitchFamily="18" charset="0"/>
+                <a:cs typeface="Times New Roman" panose="02020603050405020304" pitchFamily="18" charset="0"/>
+              </a:rPr>
+              <a:t>Đầu ra có cấu trúc</a:t>
             </a:r>
           </a:p>
         </p:txBody>
@@ -35481,7 +37742,7 @@
     </p:spTree>
     <p:extLst>
       <p:ext uri="{BB962C8B-B14F-4D97-AF65-F5344CB8AC3E}">
-        <p14:creationId xmlns:p14="http://schemas.microsoft.com/office/powerpoint/2010/main" val="2964644478"/>
+        <p14:creationId xmlns:p14="http://schemas.microsoft.com/office/powerpoint/2010/main" val="2705721519"/>
       </p:ext>
     </p:extLst>
   </p:cSld>
@@ -35510,10 +37771,10 @@
       </p:grpSpPr>
       <p:sp>
         <p:nvSpPr>
-          <p:cNvPr id="2" name="Rectangle: Rounded Corners 1">
-            <a:extLst>
-              <a:ext uri="{FF2B5EF4-FFF2-40B4-BE49-F238E27FC236}">
-                <a16:creationId xmlns:a16="http://schemas.microsoft.com/office/drawing/2014/main" id="{AB2F63C9-07C9-28F7-CACF-8CC92E29BBF1}"/>
+          <p:cNvPr id="3" name="Rectangle: Rounded Corners 2">
+            <a:extLst>
+              <a:ext uri="{FF2B5EF4-FFF2-40B4-BE49-F238E27FC236}">
+                <a16:creationId xmlns:a16="http://schemas.microsoft.com/office/drawing/2014/main" id="{048EB605-C214-F543-6B11-029AC50FDEBD}"/>
               </a:ext>
             </a:extLst>
           </p:cNvPr>
@@ -35522,7 +37783,7 @@
         </p:nvSpPr>
         <p:spPr>
           <a:xfrm>
-            <a:off x="4957151" y="1317577"/>
+            <a:off x="4957153" y="1404850"/>
             <a:ext cx="2277687" cy="465513"/>
           </a:xfrm>
           <a:prstGeom prst="roundRect">
@@ -35573,10 +37834,10 @@
       </p:sp>
       <p:sp>
         <p:nvSpPr>
-          <p:cNvPr id="3" name="Rectangle: Rounded Corners 2">
-            <a:extLst>
-              <a:ext uri="{FF2B5EF4-FFF2-40B4-BE49-F238E27FC236}">
-                <a16:creationId xmlns:a16="http://schemas.microsoft.com/office/drawing/2014/main" id="{A9748CE9-C615-3005-D1A7-04AD7FAC795C}"/>
+          <p:cNvPr id="4" name="Rectangle: Rounded Corners 3">
+            <a:extLst>
+              <a:ext uri="{FF2B5EF4-FFF2-40B4-BE49-F238E27FC236}">
+                <a16:creationId xmlns:a16="http://schemas.microsoft.com/office/drawing/2014/main" id="{54BC9C70-A4ED-0B89-64FD-D4C0E2B71AA4}"/>
               </a:ext>
             </a:extLst>
           </p:cNvPr>
@@ -35585,7 +37846,7 @@
         </p:nvSpPr>
         <p:spPr>
           <a:xfrm>
-            <a:off x="4957151" y="1941045"/>
+            <a:off x="4957153" y="2115592"/>
             <a:ext cx="2277687" cy="465513"/>
           </a:xfrm>
           <a:prstGeom prst="roundRect">
@@ -35636,10 +37897,10 @@
       </p:sp>
       <p:sp>
         <p:nvSpPr>
-          <p:cNvPr id="4" name="Rectangle: Rounded Corners 3">
-            <a:extLst>
-              <a:ext uri="{FF2B5EF4-FFF2-40B4-BE49-F238E27FC236}">
-                <a16:creationId xmlns:a16="http://schemas.microsoft.com/office/drawing/2014/main" id="{523FB17A-2C6D-D419-B862-CAC1F16E1338}"/>
+          <p:cNvPr id="5" name="Rectangle: Rounded Corners 4">
+            <a:extLst>
+              <a:ext uri="{FF2B5EF4-FFF2-40B4-BE49-F238E27FC236}">
+                <a16:creationId xmlns:a16="http://schemas.microsoft.com/office/drawing/2014/main" id="{ABB99AF4-2C14-05D1-265A-F78135C3126E}"/>
               </a:ext>
             </a:extLst>
           </p:cNvPr>
@@ -35648,7 +37909,7 @@
         </p:nvSpPr>
         <p:spPr>
           <a:xfrm>
-            <a:off x="4957151" y="2564513"/>
+            <a:off x="4957153" y="2826334"/>
             <a:ext cx="2277687" cy="465513"/>
           </a:xfrm>
           <a:prstGeom prst="roundRect">
@@ -35699,10 +37960,10 @@
       </p:sp>
       <p:sp>
         <p:nvSpPr>
-          <p:cNvPr id="5" name="Rectangle: Rounded Corners 4">
-            <a:extLst>
-              <a:ext uri="{FF2B5EF4-FFF2-40B4-BE49-F238E27FC236}">
-                <a16:creationId xmlns:a16="http://schemas.microsoft.com/office/drawing/2014/main" id="{52A1AEB5-777B-E184-7C3D-ED57EC360533}"/>
+          <p:cNvPr id="6" name="Rectangle: Rounded Corners 5">
+            <a:extLst>
+              <a:ext uri="{FF2B5EF4-FFF2-40B4-BE49-F238E27FC236}">
+                <a16:creationId xmlns:a16="http://schemas.microsoft.com/office/drawing/2014/main" id="{15D95F07-863A-45BC-041C-86202B8CE299}"/>
               </a:ext>
             </a:extLst>
           </p:cNvPr>
@@ -35711,7 +37972,7 @@
         </p:nvSpPr>
         <p:spPr>
           <a:xfrm>
-            <a:off x="4957151" y="3811341"/>
+            <a:off x="4957152" y="3537076"/>
             <a:ext cx="2277687" cy="465513"/>
           </a:xfrm>
           <a:prstGeom prst="roundRect">
@@ -35762,10 +38023,10 @@
       </p:sp>
       <p:sp>
         <p:nvSpPr>
-          <p:cNvPr id="6" name="Rectangle: Rounded Corners 5">
-            <a:extLst>
-              <a:ext uri="{FF2B5EF4-FFF2-40B4-BE49-F238E27FC236}">
-                <a16:creationId xmlns:a16="http://schemas.microsoft.com/office/drawing/2014/main" id="{4C0C7C49-EAAD-F3F6-4482-427D3CDA991E}"/>
+          <p:cNvPr id="7" name="Rectangle: Rounded Corners 6">
+            <a:extLst>
+              <a:ext uri="{FF2B5EF4-FFF2-40B4-BE49-F238E27FC236}">
+                <a16:creationId xmlns:a16="http://schemas.microsoft.com/office/drawing/2014/main" id="{A7B5ECB3-AC0A-79C1-04C3-54D8536F115C}"/>
               </a:ext>
             </a:extLst>
           </p:cNvPr>
@@ -35774,7 +38035,7 @@
         </p:nvSpPr>
         <p:spPr>
           <a:xfrm>
-            <a:off x="4957151" y="4434809"/>
+            <a:off x="4957152" y="4247818"/>
             <a:ext cx="2277687" cy="465513"/>
           </a:xfrm>
           <a:prstGeom prst="roundRect">
@@ -35825,10 +38086,10 @@
       </p:sp>
       <p:sp>
         <p:nvSpPr>
-          <p:cNvPr id="7" name="Rectangle: Rounded Corners 6">
-            <a:extLst>
-              <a:ext uri="{FF2B5EF4-FFF2-40B4-BE49-F238E27FC236}">
-                <a16:creationId xmlns:a16="http://schemas.microsoft.com/office/drawing/2014/main" id="{71D9D5E7-CE64-04CF-C0A7-0AB82FF47521}"/>
+          <p:cNvPr id="8" name="Rectangle: Rounded Corners 7">
+            <a:extLst>
+              <a:ext uri="{FF2B5EF4-FFF2-40B4-BE49-F238E27FC236}">
+                <a16:creationId xmlns:a16="http://schemas.microsoft.com/office/drawing/2014/main" id="{EA8C18FB-766B-5769-7A4B-4DE68340C0A0}"/>
               </a:ext>
             </a:extLst>
           </p:cNvPr>
@@ -35837,7 +38098,7 @@
         </p:nvSpPr>
         <p:spPr>
           <a:xfrm>
-            <a:off x="4957151" y="5058277"/>
+            <a:off x="4957152" y="4958560"/>
             <a:ext cx="2277687" cy="465513"/>
           </a:xfrm>
           <a:prstGeom prst="roundRect">
@@ -35888,10 +38149,10 @@
       </p:sp>
       <p:sp>
         <p:nvSpPr>
-          <p:cNvPr id="8" name="Rectangle: Rounded Corners 7">
-            <a:extLst>
-              <a:ext uri="{FF2B5EF4-FFF2-40B4-BE49-F238E27FC236}">
-                <a16:creationId xmlns:a16="http://schemas.microsoft.com/office/drawing/2014/main" id="{0AB434B3-C344-31F7-495F-0AA705CD2676}"/>
+          <p:cNvPr id="9" name="Rectangle: Rounded Corners 8">
+            <a:extLst>
+              <a:ext uri="{FF2B5EF4-FFF2-40B4-BE49-F238E27FC236}">
+                <a16:creationId xmlns:a16="http://schemas.microsoft.com/office/drawing/2014/main" id="{E2667497-E73D-C9B7-735A-15EA3A038FC9}"/>
               </a:ext>
             </a:extLst>
           </p:cNvPr>
@@ -35900,7 +38161,7 @@
         </p:nvSpPr>
         <p:spPr>
           <a:xfrm>
-            <a:off x="4957151" y="5681745"/>
+            <a:off x="4957152" y="5669302"/>
             <a:ext cx="2277687" cy="465513"/>
           </a:xfrm>
           <a:prstGeom prst="roundRect">
@@ -35951,10 +38212,10 @@
       </p:sp>
       <p:sp>
         <p:nvSpPr>
-          <p:cNvPr id="9" name="Rectangle: Rounded Corners 8">
-            <a:extLst>
-              <a:ext uri="{FF2B5EF4-FFF2-40B4-BE49-F238E27FC236}">
-                <a16:creationId xmlns:a16="http://schemas.microsoft.com/office/drawing/2014/main" id="{D800047B-C85B-E86D-B48E-E40693192A88}"/>
+          <p:cNvPr id="12" name="Rectangle: Rounded Corners 11">
+            <a:extLst>
+              <a:ext uri="{FF2B5EF4-FFF2-40B4-BE49-F238E27FC236}">
+                <a16:creationId xmlns:a16="http://schemas.microsoft.com/office/drawing/2014/main" id="{31359D66-3D89-0106-62D7-169807288848}"/>
               </a:ext>
             </a:extLst>
           </p:cNvPr>
@@ -36007,10 +38268,10 @@
       </p:sp>
       <p:sp>
         <p:nvSpPr>
-          <p:cNvPr id="10" name="Rectangle: Rounded Corners 9">
-            <a:extLst>
-              <a:ext uri="{FF2B5EF4-FFF2-40B4-BE49-F238E27FC236}">
-                <a16:creationId xmlns:a16="http://schemas.microsoft.com/office/drawing/2014/main" id="{2260C8B5-26F6-45A9-6F8F-27DB4488B198}"/>
+          <p:cNvPr id="2" name="Rectangle: Rounded Corners 1">
+            <a:extLst>
+              <a:ext uri="{FF2B5EF4-FFF2-40B4-BE49-F238E27FC236}">
+                <a16:creationId xmlns:a16="http://schemas.microsoft.com/office/drawing/2014/main" id="{68358D49-BEFB-0F3C-74B3-68D07EFC7EF5}"/>
               </a:ext>
             </a:extLst>
           </p:cNvPr>
@@ -36068,7 +38329,7 @@
                 <a:latin typeface="Times New Roman" panose="02020603050405020304" pitchFamily="18" charset="0"/>
                 <a:cs typeface="Times New Roman" panose="02020603050405020304" pitchFamily="18" charset="0"/>
               </a:rPr>
-              <a:t>Prompt cho tác vụ</a:t>
+              <a:t>Prompt cho chức năng</a:t>
             </a:r>
           </a:p>
           <a:p>
@@ -36086,17 +38347,47 @@
                 <a:latin typeface="Times New Roman" panose="02020603050405020304" pitchFamily="18" charset="0"/>
                 <a:cs typeface="Times New Roman" panose="02020603050405020304" pitchFamily="18" charset="0"/>
               </a:rPr>
-              <a:t>trích xuất thông tin</a:t>
+              <a:t>trò chuyện với người dùng</a:t>
             </a:r>
           </a:p>
         </p:txBody>
       </p:sp>
-      <p:sp>
-        <p:nvSpPr>
-          <p:cNvPr id="11" name="Rectangle: Rounded Corners 10">
-            <a:extLst>
-              <a:ext uri="{FF2B5EF4-FFF2-40B4-BE49-F238E27FC236}">
-                <a16:creationId xmlns:a16="http://schemas.microsoft.com/office/drawing/2014/main" id="{F4D89389-FC1C-90EA-1BC5-0AE4888836C0}"/>
+    </p:spTree>
+    <p:extLst>
+      <p:ext uri="{BB962C8B-B14F-4D97-AF65-F5344CB8AC3E}">
+        <p14:creationId xmlns:p14="http://schemas.microsoft.com/office/powerpoint/2010/main" val="2964644478"/>
+      </p:ext>
+    </p:extLst>
+  </p:cSld>
+  <p:clrMapOvr>
+    <a:masterClrMapping/>
+  </p:clrMapOvr>
+</p:sld>
+</file>
+
+<file path=ppt/slides/slide36.xml><?xml version="1.0" encoding="utf-8"?>
+<p:sld xmlns:a="http://schemas.openxmlformats.org/drawingml/2006/main" xmlns:r="http://schemas.openxmlformats.org/officeDocument/2006/relationships" xmlns:p="http://schemas.openxmlformats.org/presentationml/2006/main">
+  <p:cSld>
+    <p:spTree>
+      <p:nvGrpSpPr>
+        <p:cNvPr id="1" name=""/>
+        <p:cNvGrpSpPr/>
+        <p:nvPr/>
+      </p:nvGrpSpPr>
+      <p:grpSpPr>
+        <a:xfrm>
+          <a:off x="0" y="0"/>
+          <a:ext cx="0" cy="0"/>
+          <a:chOff x="0" y="0"/>
+          <a:chExt cx="0" cy="0"/>
+        </a:xfrm>
+      </p:grpSpPr>
+      <p:sp>
+        <p:nvSpPr>
+          <p:cNvPr id="2" name="Rectangle: Rounded Corners 1">
+            <a:extLst>
+              <a:ext uri="{FF2B5EF4-FFF2-40B4-BE49-F238E27FC236}">
+                <a16:creationId xmlns:a16="http://schemas.microsoft.com/office/drawing/2014/main" id="{AB2F63C9-07C9-28F7-CACF-8CC92E29BBF1}"/>
               </a:ext>
             </a:extLst>
           </p:cNvPr>
@@ -36105,7 +38396,7 @@
         </p:nvSpPr>
         <p:spPr>
           <a:xfrm>
-            <a:off x="4957151" y="3187927"/>
+            <a:off x="4957151" y="1317577"/>
             <a:ext cx="2277687" cy="465513"/>
           </a:xfrm>
           <a:prstGeom prst="roundRect">
@@ -36149,6 +38440,589 @@
                 <a:latin typeface="Times New Roman" panose="02020603050405020304" pitchFamily="18" charset="0"/>
                 <a:cs typeface="Times New Roman" panose="02020603050405020304" pitchFamily="18" charset="0"/>
               </a:rPr>
+              <a:t>Vai trò</a:t>
+            </a:r>
+          </a:p>
+        </p:txBody>
+      </p:sp>
+      <p:sp>
+        <p:nvSpPr>
+          <p:cNvPr id="3" name="Rectangle: Rounded Corners 2">
+            <a:extLst>
+              <a:ext uri="{FF2B5EF4-FFF2-40B4-BE49-F238E27FC236}">
+                <a16:creationId xmlns:a16="http://schemas.microsoft.com/office/drawing/2014/main" id="{A9748CE9-C615-3005-D1A7-04AD7FAC795C}"/>
+              </a:ext>
+            </a:extLst>
+          </p:cNvPr>
+          <p:cNvSpPr/>
+          <p:nvPr/>
+        </p:nvSpPr>
+        <p:spPr>
+          <a:xfrm>
+            <a:off x="4957151" y="1941045"/>
+            <a:ext cx="2277687" cy="465513"/>
+          </a:xfrm>
+          <a:prstGeom prst="roundRect">
+            <a:avLst/>
+          </a:prstGeom>
+          <a:solidFill>
+            <a:schemeClr val="bg2"/>
+          </a:solidFill>
+          <a:ln>
+            <a:solidFill>
+              <a:schemeClr val="tx1"/>
+            </a:solidFill>
+          </a:ln>
+        </p:spPr>
+        <p:style>
+          <a:lnRef idx="2">
+            <a:schemeClr val="accent1">
+              <a:shade val="15000"/>
+            </a:schemeClr>
+          </a:lnRef>
+          <a:fillRef idx="1">
+            <a:schemeClr val="accent1"/>
+          </a:fillRef>
+          <a:effectRef idx="0">
+            <a:schemeClr val="accent1"/>
+          </a:effectRef>
+          <a:fontRef idx="minor">
+            <a:schemeClr val="lt1"/>
+          </a:fontRef>
+        </p:style>
+        <p:txBody>
+          <a:bodyPr rtlCol="0" anchor="ctr"/>
+          <a:lstStyle/>
+          <a:p>
+            <a:pPr algn="ctr"/>
+            <a:r>
+              <a:rPr lang="en-US" sz="2000">
+                <a:solidFill>
+                  <a:schemeClr val="tx1"/>
+                </a:solidFill>
+                <a:latin typeface="Times New Roman" panose="02020603050405020304" pitchFamily="18" charset="0"/>
+                <a:cs typeface="Times New Roman" panose="02020603050405020304" pitchFamily="18" charset="0"/>
+              </a:rPr>
+              <a:t>Bối cảnh</a:t>
+            </a:r>
+          </a:p>
+        </p:txBody>
+      </p:sp>
+      <p:sp>
+        <p:nvSpPr>
+          <p:cNvPr id="4" name="Rectangle: Rounded Corners 3">
+            <a:extLst>
+              <a:ext uri="{FF2B5EF4-FFF2-40B4-BE49-F238E27FC236}">
+                <a16:creationId xmlns:a16="http://schemas.microsoft.com/office/drawing/2014/main" id="{523FB17A-2C6D-D419-B862-CAC1F16E1338}"/>
+              </a:ext>
+            </a:extLst>
+          </p:cNvPr>
+          <p:cNvSpPr/>
+          <p:nvPr/>
+        </p:nvSpPr>
+        <p:spPr>
+          <a:xfrm>
+            <a:off x="4957151" y="2564513"/>
+            <a:ext cx="2277687" cy="465513"/>
+          </a:xfrm>
+          <a:prstGeom prst="roundRect">
+            <a:avLst/>
+          </a:prstGeom>
+          <a:solidFill>
+            <a:schemeClr val="bg2"/>
+          </a:solidFill>
+          <a:ln>
+            <a:solidFill>
+              <a:schemeClr val="tx1"/>
+            </a:solidFill>
+          </a:ln>
+        </p:spPr>
+        <p:style>
+          <a:lnRef idx="2">
+            <a:schemeClr val="accent1">
+              <a:shade val="15000"/>
+            </a:schemeClr>
+          </a:lnRef>
+          <a:fillRef idx="1">
+            <a:schemeClr val="accent1"/>
+          </a:fillRef>
+          <a:effectRef idx="0">
+            <a:schemeClr val="accent1"/>
+          </a:effectRef>
+          <a:fontRef idx="minor">
+            <a:schemeClr val="lt1"/>
+          </a:fontRef>
+        </p:style>
+        <p:txBody>
+          <a:bodyPr rtlCol="0" anchor="ctr"/>
+          <a:lstStyle/>
+          <a:p>
+            <a:pPr algn="ctr"/>
+            <a:r>
+              <a:rPr lang="en-US" sz="2000">
+                <a:solidFill>
+                  <a:schemeClr val="tx1"/>
+                </a:solidFill>
+                <a:latin typeface="Times New Roman" panose="02020603050405020304" pitchFamily="18" charset="0"/>
+                <a:cs typeface="Times New Roman" panose="02020603050405020304" pitchFamily="18" charset="0"/>
+              </a:rPr>
+              <a:t>Câu hỏi</a:t>
+            </a:r>
+          </a:p>
+        </p:txBody>
+      </p:sp>
+      <p:sp>
+        <p:nvSpPr>
+          <p:cNvPr id="5" name="Rectangle: Rounded Corners 4">
+            <a:extLst>
+              <a:ext uri="{FF2B5EF4-FFF2-40B4-BE49-F238E27FC236}">
+                <a16:creationId xmlns:a16="http://schemas.microsoft.com/office/drawing/2014/main" id="{52A1AEB5-777B-E184-7C3D-ED57EC360533}"/>
+              </a:ext>
+            </a:extLst>
+          </p:cNvPr>
+          <p:cNvSpPr/>
+          <p:nvPr/>
+        </p:nvSpPr>
+        <p:spPr>
+          <a:xfrm>
+            <a:off x="4957151" y="3811341"/>
+            <a:ext cx="2277687" cy="465513"/>
+          </a:xfrm>
+          <a:prstGeom prst="roundRect">
+            <a:avLst/>
+          </a:prstGeom>
+          <a:solidFill>
+            <a:schemeClr val="bg2"/>
+          </a:solidFill>
+          <a:ln>
+            <a:solidFill>
+              <a:schemeClr val="tx1"/>
+            </a:solidFill>
+          </a:ln>
+        </p:spPr>
+        <p:style>
+          <a:lnRef idx="2">
+            <a:schemeClr val="accent1">
+              <a:shade val="15000"/>
+            </a:schemeClr>
+          </a:lnRef>
+          <a:fillRef idx="1">
+            <a:schemeClr val="accent1"/>
+          </a:fillRef>
+          <a:effectRef idx="0">
+            <a:schemeClr val="accent1"/>
+          </a:effectRef>
+          <a:fontRef idx="minor">
+            <a:schemeClr val="lt1"/>
+          </a:fontRef>
+        </p:style>
+        <p:txBody>
+          <a:bodyPr rtlCol="0" anchor="ctr"/>
+          <a:lstStyle/>
+          <a:p>
+            <a:pPr algn="ctr"/>
+            <a:r>
+              <a:rPr lang="en-US" sz="2000">
+                <a:solidFill>
+                  <a:schemeClr val="tx1"/>
+                </a:solidFill>
+                <a:latin typeface="Times New Roman" panose="02020603050405020304" pitchFamily="18" charset="0"/>
+                <a:cs typeface="Times New Roman" panose="02020603050405020304" pitchFamily="18" charset="0"/>
+              </a:rPr>
+              <a:t>Ví dụ 1</a:t>
+            </a:r>
+          </a:p>
+        </p:txBody>
+      </p:sp>
+      <p:sp>
+        <p:nvSpPr>
+          <p:cNvPr id="6" name="Rectangle: Rounded Corners 5">
+            <a:extLst>
+              <a:ext uri="{FF2B5EF4-FFF2-40B4-BE49-F238E27FC236}">
+                <a16:creationId xmlns:a16="http://schemas.microsoft.com/office/drawing/2014/main" id="{4C0C7C49-EAAD-F3F6-4482-427D3CDA991E}"/>
+              </a:ext>
+            </a:extLst>
+          </p:cNvPr>
+          <p:cNvSpPr/>
+          <p:nvPr/>
+        </p:nvSpPr>
+        <p:spPr>
+          <a:xfrm>
+            <a:off x="4957151" y="4434809"/>
+            <a:ext cx="2277687" cy="465513"/>
+          </a:xfrm>
+          <a:prstGeom prst="roundRect">
+            <a:avLst/>
+          </a:prstGeom>
+          <a:solidFill>
+            <a:schemeClr val="bg2"/>
+          </a:solidFill>
+          <a:ln>
+            <a:solidFill>
+              <a:schemeClr val="tx1"/>
+            </a:solidFill>
+          </a:ln>
+        </p:spPr>
+        <p:style>
+          <a:lnRef idx="2">
+            <a:schemeClr val="accent1">
+              <a:shade val="15000"/>
+            </a:schemeClr>
+          </a:lnRef>
+          <a:fillRef idx="1">
+            <a:schemeClr val="accent1"/>
+          </a:fillRef>
+          <a:effectRef idx="0">
+            <a:schemeClr val="accent1"/>
+          </a:effectRef>
+          <a:fontRef idx="minor">
+            <a:schemeClr val="lt1"/>
+          </a:fontRef>
+        </p:style>
+        <p:txBody>
+          <a:bodyPr rtlCol="0" anchor="ctr"/>
+          <a:lstStyle/>
+          <a:p>
+            <a:pPr algn="ctr"/>
+            <a:r>
+              <a:rPr lang="en-US" sz="2000">
+                <a:solidFill>
+                  <a:schemeClr val="tx1"/>
+                </a:solidFill>
+                <a:latin typeface="Times New Roman" panose="02020603050405020304" pitchFamily="18" charset="0"/>
+                <a:cs typeface="Times New Roman" panose="02020603050405020304" pitchFamily="18" charset="0"/>
+              </a:rPr>
+              <a:t>Ví dụ …</a:t>
+            </a:r>
+          </a:p>
+        </p:txBody>
+      </p:sp>
+      <p:sp>
+        <p:nvSpPr>
+          <p:cNvPr id="7" name="Rectangle: Rounded Corners 6">
+            <a:extLst>
+              <a:ext uri="{FF2B5EF4-FFF2-40B4-BE49-F238E27FC236}">
+                <a16:creationId xmlns:a16="http://schemas.microsoft.com/office/drawing/2014/main" id="{71D9D5E7-CE64-04CF-C0A7-0AB82FF47521}"/>
+              </a:ext>
+            </a:extLst>
+          </p:cNvPr>
+          <p:cNvSpPr/>
+          <p:nvPr/>
+        </p:nvSpPr>
+        <p:spPr>
+          <a:xfrm>
+            <a:off x="4957151" y="5058277"/>
+            <a:ext cx="2277687" cy="465513"/>
+          </a:xfrm>
+          <a:prstGeom prst="roundRect">
+            <a:avLst/>
+          </a:prstGeom>
+          <a:solidFill>
+            <a:schemeClr val="bg2"/>
+          </a:solidFill>
+          <a:ln>
+            <a:solidFill>
+              <a:schemeClr val="tx1"/>
+            </a:solidFill>
+          </a:ln>
+        </p:spPr>
+        <p:style>
+          <a:lnRef idx="2">
+            <a:schemeClr val="accent1">
+              <a:shade val="15000"/>
+            </a:schemeClr>
+          </a:lnRef>
+          <a:fillRef idx="1">
+            <a:schemeClr val="accent1"/>
+          </a:fillRef>
+          <a:effectRef idx="0">
+            <a:schemeClr val="accent1"/>
+          </a:effectRef>
+          <a:fontRef idx="minor">
+            <a:schemeClr val="lt1"/>
+          </a:fontRef>
+        </p:style>
+        <p:txBody>
+          <a:bodyPr rtlCol="0" anchor="ctr"/>
+          <a:lstStyle/>
+          <a:p>
+            <a:pPr algn="ctr"/>
+            <a:r>
+              <a:rPr lang="en-US" sz="2000">
+                <a:solidFill>
+                  <a:schemeClr val="tx1"/>
+                </a:solidFill>
+                <a:latin typeface="Times New Roman" panose="02020603050405020304" pitchFamily="18" charset="0"/>
+                <a:cs typeface="Times New Roman" panose="02020603050405020304" pitchFamily="18" charset="0"/>
+              </a:rPr>
+              <a:t>Hướng dẫn</a:t>
+            </a:r>
+          </a:p>
+        </p:txBody>
+      </p:sp>
+      <p:sp>
+        <p:nvSpPr>
+          <p:cNvPr id="8" name="Rectangle: Rounded Corners 7">
+            <a:extLst>
+              <a:ext uri="{FF2B5EF4-FFF2-40B4-BE49-F238E27FC236}">
+                <a16:creationId xmlns:a16="http://schemas.microsoft.com/office/drawing/2014/main" id="{0AB434B3-C344-31F7-495F-0AA705CD2676}"/>
+              </a:ext>
+            </a:extLst>
+          </p:cNvPr>
+          <p:cNvSpPr/>
+          <p:nvPr/>
+        </p:nvSpPr>
+        <p:spPr>
+          <a:xfrm>
+            <a:off x="4957151" y="5681745"/>
+            <a:ext cx="2277687" cy="465513"/>
+          </a:xfrm>
+          <a:prstGeom prst="roundRect">
+            <a:avLst/>
+          </a:prstGeom>
+          <a:solidFill>
+            <a:schemeClr val="bg2"/>
+          </a:solidFill>
+          <a:ln>
+            <a:solidFill>
+              <a:schemeClr val="tx1"/>
+            </a:solidFill>
+          </a:ln>
+        </p:spPr>
+        <p:style>
+          <a:lnRef idx="2">
+            <a:schemeClr val="accent1">
+              <a:shade val="15000"/>
+            </a:schemeClr>
+          </a:lnRef>
+          <a:fillRef idx="1">
+            <a:schemeClr val="accent1"/>
+          </a:fillRef>
+          <a:effectRef idx="0">
+            <a:schemeClr val="accent1"/>
+          </a:effectRef>
+          <a:fontRef idx="minor">
+            <a:schemeClr val="lt1"/>
+          </a:fontRef>
+        </p:style>
+        <p:txBody>
+          <a:bodyPr rtlCol="0" anchor="ctr"/>
+          <a:lstStyle/>
+          <a:p>
+            <a:pPr algn="ctr"/>
+            <a:r>
+              <a:rPr lang="en-US" sz="2000">
+                <a:solidFill>
+                  <a:schemeClr val="tx1"/>
+                </a:solidFill>
+                <a:latin typeface="Times New Roman" panose="02020603050405020304" pitchFamily="18" charset="0"/>
+                <a:cs typeface="Times New Roman" panose="02020603050405020304" pitchFamily="18" charset="0"/>
+              </a:rPr>
+              <a:t>Lưu ý</a:t>
+            </a:r>
+          </a:p>
+        </p:txBody>
+      </p:sp>
+      <p:sp>
+        <p:nvSpPr>
+          <p:cNvPr id="9" name="Rectangle: Rounded Corners 8">
+            <a:extLst>
+              <a:ext uri="{FF2B5EF4-FFF2-40B4-BE49-F238E27FC236}">
+                <a16:creationId xmlns:a16="http://schemas.microsoft.com/office/drawing/2014/main" id="{D800047B-C85B-E86D-B48E-E40693192A88}"/>
+              </a:ext>
+            </a:extLst>
+          </p:cNvPr>
+          <p:cNvSpPr/>
+          <p:nvPr/>
+        </p:nvSpPr>
+        <p:spPr>
+          <a:xfrm>
+            <a:off x="3535675" y="536181"/>
+            <a:ext cx="5120640" cy="6001790"/>
+          </a:xfrm>
+          <a:prstGeom prst="roundRect">
+            <a:avLst/>
+          </a:prstGeom>
+          <a:noFill/>
+          <a:ln>
+            <a:solidFill>
+              <a:srgbClr val="FF0000"/>
+            </a:solidFill>
+            <a:prstDash val="dash"/>
+          </a:ln>
+        </p:spPr>
+        <p:style>
+          <a:lnRef idx="2">
+            <a:schemeClr val="accent1">
+              <a:shade val="15000"/>
+            </a:schemeClr>
+          </a:lnRef>
+          <a:fillRef idx="1">
+            <a:schemeClr val="accent1"/>
+          </a:fillRef>
+          <a:effectRef idx="0">
+            <a:schemeClr val="accent1"/>
+          </a:effectRef>
+          <a:fontRef idx="minor">
+            <a:schemeClr val="lt1"/>
+          </a:fontRef>
+        </p:style>
+        <p:txBody>
+          <a:bodyPr rtlCol="0" anchor="ctr"/>
+          <a:lstStyle/>
+          <a:p>
+            <a:pPr algn="ctr"/>
+            <a:endParaRPr lang="en-US" sz="2000">
+              <a:latin typeface="Times New Roman" panose="02020603050405020304" pitchFamily="18" charset="0"/>
+              <a:cs typeface="Times New Roman" panose="02020603050405020304" pitchFamily="18" charset="0"/>
+            </a:endParaRPr>
+          </a:p>
+        </p:txBody>
+      </p:sp>
+      <p:sp>
+        <p:nvSpPr>
+          <p:cNvPr id="10" name="Rectangle: Rounded Corners 9">
+            <a:extLst>
+              <a:ext uri="{FF2B5EF4-FFF2-40B4-BE49-F238E27FC236}">
+                <a16:creationId xmlns:a16="http://schemas.microsoft.com/office/drawing/2014/main" id="{2260C8B5-26F6-45A9-6F8F-27DB4488B198}"/>
+              </a:ext>
+            </a:extLst>
+          </p:cNvPr>
+          <p:cNvSpPr/>
+          <p:nvPr/>
+        </p:nvSpPr>
+        <p:spPr>
+          <a:xfrm>
+            <a:off x="4574766" y="145469"/>
+            <a:ext cx="3042458" cy="781396"/>
+          </a:xfrm>
+          <a:prstGeom prst="roundRect">
+            <a:avLst/>
+          </a:prstGeom>
+          <a:solidFill>
+            <a:srgbClr val="FFFFFF"/>
+          </a:solidFill>
+          <a:ln>
+            <a:solidFill>
+              <a:srgbClr val="FF0000"/>
+            </a:solidFill>
+          </a:ln>
+        </p:spPr>
+        <p:style>
+          <a:lnRef idx="2">
+            <a:schemeClr val="accent1">
+              <a:shade val="15000"/>
+            </a:schemeClr>
+          </a:lnRef>
+          <a:fillRef idx="1">
+            <a:schemeClr val="accent1"/>
+          </a:fillRef>
+          <a:effectRef idx="0">
+            <a:schemeClr val="accent1"/>
+          </a:effectRef>
+          <a:fontRef idx="minor">
+            <a:schemeClr val="lt1"/>
+          </a:fontRef>
+        </p:style>
+        <p:txBody>
+          <a:bodyPr rtlCol="0" anchor="ctr"/>
+          <a:lstStyle/>
+          <a:p>
+            <a:pPr algn="ctr"/>
+            <a:r>
+              <a:rPr lang="en-US" sz="2000">
+                <a:ln w="0">
+                  <a:solidFill>
+                    <a:schemeClr val="tx1"/>
+                  </a:solidFill>
+                </a:ln>
+                <a:solidFill>
+                  <a:schemeClr val="tx1"/>
+                </a:solidFill>
+                <a:latin typeface="Times New Roman" panose="02020603050405020304" pitchFamily="18" charset="0"/>
+                <a:cs typeface="Times New Roman" panose="02020603050405020304" pitchFamily="18" charset="0"/>
+              </a:rPr>
+              <a:t>Prompt cho tác vụ</a:t>
+            </a:r>
+          </a:p>
+          <a:p>
+            <a:pPr algn="ctr"/>
+            <a:r>
+              <a:rPr lang="en-US" sz="2000">
+                <a:ln w="0">
+                  <a:solidFill>
+                    <a:schemeClr val="tx1"/>
+                  </a:solidFill>
+                </a:ln>
+                <a:solidFill>
+                  <a:schemeClr val="tx1"/>
+                </a:solidFill>
+                <a:latin typeface="Times New Roman" panose="02020603050405020304" pitchFamily="18" charset="0"/>
+                <a:cs typeface="Times New Roman" panose="02020603050405020304" pitchFamily="18" charset="0"/>
+              </a:rPr>
+              <a:t>trích xuất thông tin</a:t>
+            </a:r>
+          </a:p>
+        </p:txBody>
+      </p:sp>
+      <p:sp>
+        <p:nvSpPr>
+          <p:cNvPr id="11" name="Rectangle: Rounded Corners 10">
+            <a:extLst>
+              <a:ext uri="{FF2B5EF4-FFF2-40B4-BE49-F238E27FC236}">
+                <a16:creationId xmlns:a16="http://schemas.microsoft.com/office/drawing/2014/main" id="{F4D89389-FC1C-90EA-1BC5-0AE4888836C0}"/>
+              </a:ext>
+            </a:extLst>
+          </p:cNvPr>
+          <p:cNvSpPr/>
+          <p:nvPr/>
+        </p:nvSpPr>
+        <p:spPr>
+          <a:xfrm>
+            <a:off x="4957151" y="3187927"/>
+            <a:ext cx="2277687" cy="465513"/>
+          </a:xfrm>
+          <a:prstGeom prst="roundRect">
+            <a:avLst/>
+          </a:prstGeom>
+          <a:solidFill>
+            <a:schemeClr val="bg2"/>
+          </a:solidFill>
+          <a:ln>
+            <a:solidFill>
+              <a:schemeClr val="tx1"/>
+            </a:solidFill>
+          </a:ln>
+        </p:spPr>
+        <p:style>
+          <a:lnRef idx="2">
+            <a:schemeClr val="accent1">
+              <a:shade val="15000"/>
+            </a:schemeClr>
+          </a:lnRef>
+          <a:fillRef idx="1">
+            <a:schemeClr val="accent1"/>
+          </a:fillRef>
+          <a:effectRef idx="0">
+            <a:schemeClr val="accent1"/>
+          </a:effectRef>
+          <a:fontRef idx="minor">
+            <a:schemeClr val="lt1"/>
+          </a:fontRef>
+        </p:style>
+        <p:txBody>
+          <a:bodyPr rtlCol="0" anchor="ctr"/>
+          <a:lstStyle/>
+          <a:p>
+            <a:pPr algn="ctr"/>
+            <a:r>
+              <a:rPr lang="en-US" sz="2000">
+                <a:solidFill>
+                  <a:schemeClr val="tx1"/>
+                </a:solidFill>
+                <a:latin typeface="Times New Roman" panose="02020603050405020304" pitchFamily="18" charset="0"/>
+                <a:cs typeface="Times New Roman" panose="02020603050405020304" pitchFamily="18" charset="0"/>
+              </a:rPr>
               <a:t>Đầu ra có cấu trúc</a:t>
             </a:r>
           </a:p>
@@ -36167,7 +39041,7 @@
 </p:sld>
 </file>
 
-<file path=ppt/slides/slide36.xml><?xml version="1.0" encoding="utf-8"?>
+<file path=ppt/slides/slide37.xml><?xml version="1.0" encoding="utf-8"?>
 <p:sld xmlns:a="http://schemas.openxmlformats.org/drawingml/2006/main" xmlns:r="http://schemas.openxmlformats.org/officeDocument/2006/relationships" xmlns:p="http://schemas.openxmlformats.org/presentationml/2006/main">
   <p:cSld>
     <p:spTree>
